--- a/presentation/feedback_rtdetr_presentation.pptx
+++ b/presentation/feedback_rtdetr_presentation.pptx
@@ -23,6 +23,12 @@
     <p:sldId id="271" r:id="rId22"/>
     <p:sldId id="272" r:id="rId23"/>
     <p:sldId id="273" r:id="rId24"/>
+    <p:sldId id="274" r:id="rId25"/>
+    <p:sldId id="275" r:id="rId26"/>
+    <p:sldId id="276" r:id="rId27"/>
+    <p:sldId id="277" r:id="rId28"/>
+    <p:sldId id="278" r:id="rId29"/>
+    <p:sldId id="279" r:id="rId30"/>
   </p:sldIdLst>
   <p:sldSz cx="12191695" cy="6858000" type="screen4x3"/>
   <p:notesSz cx="6858000" cy="9144000"/>
@@ -3371,7 +3377,7 @@
                 </a:solidFill>
                 <a:latin typeface="Helvetica"/>
               </a:rPr>
-              <a:t>Training: v2 climbs faster, ends higher</a:t>
+              <a:t>Attention, in one line</a:t>
             </a:r>
           </a:p>
         </p:txBody>
@@ -3421,7 +3427,7 @@
       </p:sp>
       <p:pic>
         <p:nvPicPr>
-          <p:cNvPr id="4" name="Picture 3" descr="learning_curves.png"/>
+          <p:cNvPr id="4" name="Picture 3" descr="math_attention.png"/>
           <p:cNvPicPr>
             <a:picLocks noChangeAspect="1"/>
           </p:cNvPicPr>
@@ -3435,8 +3441,8 @@
         </p:blipFill>
         <p:spPr>
           <a:xfrm>
-            <a:off x="2194560" y="1463040"/>
-            <a:ext cx="7772400" cy="4718957"/>
+            <a:off x="457200" y="1371600"/>
+            <a:ext cx="11247120" cy="4875472"/>
           </a:xfrm>
           <a:prstGeom prst="rect">
             <a:avLst/>
@@ -3451,29 +3457,29 @@
         </p:nvSpPr>
         <p:spPr>
           <a:xfrm>
-            <a:off x="640080" y="5852160"/>
-            <a:ext cx="10972800" cy="365760"/>
-          </a:xfrm>
-          <a:prstGeom prst="rect">
-            <a:avLst/>
-          </a:prstGeom>
-          <a:noFill/>
-        </p:spPr>
-        <p:txBody>
-          <a:bodyPr wrap="square" lIns="0" rIns="0" tIns="0" bIns="0" anchor="t">
-            <a:spAutoFit/>
-          </a:bodyPr>
-          <a:lstStyle/>
-          <a:p>
-            <a:pPr algn="ctr"/>
-            <a:r>
-              <a:rPr sz="1400" b="0" i="1">
+            <a:off x="640080" y="6446520"/>
+            <a:ext cx="9144000" cy="274320"/>
+          </a:xfrm>
+          <a:prstGeom prst="rect">
+            <a:avLst/>
+          </a:prstGeom>
+          <a:noFill/>
+        </p:spPr>
+        <p:txBody>
+          <a:bodyPr wrap="square" lIns="0" rIns="0" tIns="0" bIns="0" anchor="t">
+            <a:spAutoFit/>
+          </a:bodyPr>
+          <a:lstStyle/>
+          <a:p>
+            <a:pPr algn="l"/>
+            <a:r>
+              <a:rPr sz="1000" b="0" i="0">
                 <a:solidFill>
                   <a:srgbClr val="666677"/>
                 </a:solidFill>
                 <a:latin typeface="Helvetica"/>
               </a:rPr>
-              <a:t>v2 first crosses v1's final 33.91 at epoch 8 — four epochs early.</a:t>
+              <a:t>3. Proposed Solution  •  Feedback-Augmented RT-DETR  •  Hatem Saadallah &amp; Nour Jennane</a:t>
             </a:r>
           </a:p>
         </p:txBody>
@@ -3481,41 +3487,6 @@
       <p:sp>
         <p:nvSpPr>
           <p:cNvPr id="6" name="TextBox 5"/>
-          <p:cNvSpPr txBox="1"/>
-          <p:nvPr/>
-        </p:nvSpPr>
-        <p:spPr>
-          <a:xfrm>
-            <a:off x="640080" y="6446520"/>
-            <a:ext cx="7315200" cy="274320"/>
-          </a:xfrm>
-          <a:prstGeom prst="rect">
-            <a:avLst/>
-          </a:prstGeom>
-          <a:noFill/>
-        </p:spPr>
-        <p:txBody>
-          <a:bodyPr wrap="square" lIns="0" rIns="0" tIns="0" bIns="0" anchor="t">
-            <a:spAutoFit/>
-          </a:bodyPr>
-          <a:lstStyle/>
-          <a:p>
-            <a:pPr algn="l"/>
-            <a:r>
-              <a:rPr sz="1000" b="0" i="0">
-                <a:solidFill>
-                  <a:srgbClr val="666677"/>
-                </a:solidFill>
-                <a:latin typeface="Helvetica"/>
-              </a:rPr>
-              <a:t>Feedback-Augmented RT-DETR  •  Hatem Saadallah &amp; Nour Jennane</a:t>
-            </a:r>
-          </a:p>
-        </p:txBody>
-      </p:sp>
-      <p:sp>
-        <p:nvSpPr>
-          <p:cNvPr id="7" name="TextBox 6"/>
           <p:cNvSpPr txBox="1"/>
           <p:nvPr/>
         </p:nvSpPr>
@@ -3543,7 +3514,7 @@
                 </a:solidFill>
                 <a:latin typeface="Helvetica"/>
               </a:rPr>
-              <a:t>10 / 18</a:t>
+              <a:t>10 / 24</a:t>
             </a:r>
           </a:p>
         </p:txBody>
@@ -3596,7 +3567,7 @@
                 </a:solidFill>
                 <a:latin typeface="Helvetica"/>
               </a:rPr>
-              <a:t>Final performance (with feedback ON)</a:t>
+              <a:t>Our feedback rule</a:t>
             </a:r>
           </a:p>
         </p:txBody>
@@ -3644,52 +3615,30 @@
           </a:p>
         </p:txBody>
       </p:sp>
-      <p:sp>
-        <p:nvSpPr>
-          <p:cNvPr id="4" name="Rounded Rectangle 3"/>
-          <p:cNvSpPr/>
-          <p:nvPr/>
-        </p:nvSpPr>
-        <p:spPr>
-          <a:xfrm>
-            <a:off x="914400" y="2011680"/>
-            <a:ext cx="4846320" cy="3200400"/>
-          </a:xfrm>
-          <a:prstGeom prst="roundRect">
-            <a:avLst/>
-          </a:prstGeom>
-          <a:solidFill>
-            <a:srgbClr val="F5F5F7"/>
-          </a:solidFill>
-          <a:ln w="9525">
-            <a:solidFill>
-              <a:srgbClr val="666677"/>
-            </a:solidFill>
-          </a:ln>
-          <a:effectLst/>
-        </p:spPr>
-        <p:style>
-          <a:lnRef idx="1">
-            <a:schemeClr val="accent1"/>
-          </a:lnRef>
-          <a:fillRef idx="3">
-            <a:schemeClr val="accent1"/>
-          </a:fillRef>
-          <a:effectRef idx="2">
-            <a:schemeClr val="accent1"/>
-          </a:effectRef>
-          <a:fontRef idx="minor">
-            <a:schemeClr val="lt1"/>
-          </a:fontRef>
-        </p:style>
-        <p:txBody>
-          <a:bodyPr rtlCol="0" anchor="ctr"/>
-          <a:lstStyle/>
-          <a:p>
-            <a:pPr algn="ctr"/>
-          </a:p>
-        </p:txBody>
-      </p:sp>
+      <p:pic>
+        <p:nvPicPr>
+          <p:cNvPr id="4" name="Picture 3" descr="math_feedback.png"/>
+          <p:cNvPicPr>
+            <a:picLocks noChangeAspect="1"/>
+          </p:cNvPicPr>
+          <p:nvPr/>
+        </p:nvPicPr>
+        <p:blipFill>
+          <a:blip r:embed="rId2"/>
+          <a:stretch>
+            <a:fillRect/>
+          </a:stretch>
+        </p:blipFill>
+        <p:spPr>
+          <a:xfrm>
+            <a:off x="457200" y="1371600"/>
+            <a:ext cx="11247120" cy="5011823"/>
+          </a:xfrm>
+          <a:prstGeom prst="rect">
+            <a:avLst/>
+          </a:prstGeom>
+        </p:spPr>
+      </p:pic>
       <p:sp>
         <p:nvSpPr>
           <p:cNvPr id="5" name="TextBox 4"/>
@@ -3698,29 +3647,29 @@
         </p:nvSpPr>
         <p:spPr>
           <a:xfrm>
-            <a:off x="914400" y="2194560"/>
-            <a:ext cx="4846320" cy="457200"/>
-          </a:xfrm>
-          <a:prstGeom prst="rect">
-            <a:avLst/>
-          </a:prstGeom>
-          <a:noFill/>
-        </p:spPr>
-        <p:txBody>
-          <a:bodyPr wrap="square" lIns="0" rIns="0" tIns="0" bIns="0" anchor="t">
-            <a:spAutoFit/>
-          </a:bodyPr>
-          <a:lstStyle/>
-          <a:p>
-            <a:pPr algn="ctr"/>
-            <a:r>
-              <a:rPr sz="2400" b="0" i="0">
+            <a:off x="640080" y="6446520"/>
+            <a:ext cx="9144000" cy="274320"/>
+          </a:xfrm>
+          <a:prstGeom prst="rect">
+            <a:avLst/>
+          </a:prstGeom>
+          <a:noFill/>
+        </p:spPr>
+        <p:txBody>
+          <a:bodyPr wrap="square" lIns="0" rIns="0" tIns="0" bIns="0" anchor="t">
+            <a:spAutoFit/>
+          </a:bodyPr>
+          <a:lstStyle/>
+          <a:p>
+            <a:pPr algn="l"/>
+            <a:r>
+              <a:rPr sz="1000" b="0" i="0">
                 <a:solidFill>
                   <a:srgbClr val="666677"/>
                 </a:solidFill>
                 <a:latin typeface="Helvetica"/>
               </a:rPr>
-              <a:t>v1</a:t>
+              <a:t>3. Proposed Solution  •  Feedback-Augmented RT-DETR  •  Hatem Saadallah &amp; Nour Jennane</a:t>
             </a:r>
           </a:p>
         </p:txBody>
@@ -3728,262 +3677,6 @@
       <p:sp>
         <p:nvSpPr>
           <p:cNvPr id="6" name="TextBox 5"/>
-          <p:cNvSpPr txBox="1"/>
-          <p:nvPr/>
-        </p:nvSpPr>
-        <p:spPr>
-          <a:xfrm>
-            <a:off x="914400" y="2697480"/>
-            <a:ext cx="4846320" cy="1828800"/>
-          </a:xfrm>
-          <a:prstGeom prst="rect">
-            <a:avLst/>
-          </a:prstGeom>
-          <a:noFill/>
-        </p:spPr>
-        <p:txBody>
-          <a:bodyPr wrap="square" lIns="0" rIns="0" tIns="0" bIns="0" anchor="t">
-            <a:spAutoFit/>
-          </a:bodyPr>
-          <a:lstStyle/>
-          <a:p>
-            <a:pPr algn="ctr"/>
-            <a:r>
-              <a:rPr sz="8800" b="1" i="0">
-                <a:solidFill>
-                  <a:srgbClr val="666677"/>
-                </a:solidFill>
-                <a:latin typeface="Helvetica"/>
-              </a:rPr>
-              <a:t>33.91</a:t>
-            </a:r>
-          </a:p>
-        </p:txBody>
-      </p:sp>
-      <p:sp>
-        <p:nvSpPr>
-          <p:cNvPr id="7" name="TextBox 6"/>
-          <p:cNvSpPr txBox="1"/>
-          <p:nvPr/>
-        </p:nvSpPr>
-        <p:spPr>
-          <a:xfrm>
-            <a:off x="914400" y="4572000"/>
-            <a:ext cx="4846320" cy="457200"/>
-          </a:xfrm>
-          <a:prstGeom prst="rect">
-            <a:avLst/>
-          </a:prstGeom>
-          <a:noFill/>
-        </p:spPr>
-        <p:txBody>
-          <a:bodyPr wrap="square" lIns="0" rIns="0" tIns="0" bIns="0" anchor="t">
-            <a:spAutoFit/>
-          </a:bodyPr>
-          <a:lstStyle/>
-          <a:p>
-            <a:pPr algn="ctr"/>
-            <a:r>
-              <a:rPr sz="1800" b="0" i="1">
-                <a:solidFill>
-                  <a:srgbClr val="666677"/>
-                </a:solidFill>
-                <a:latin typeface="Helvetica"/>
-              </a:rPr>
-              <a:t>APₛ</a:t>
-            </a:r>
-          </a:p>
-        </p:txBody>
-      </p:sp>
-      <p:sp>
-        <p:nvSpPr>
-          <p:cNvPr id="8" name="Rounded Rectangle 7"/>
-          <p:cNvSpPr/>
-          <p:nvPr/>
-        </p:nvSpPr>
-        <p:spPr>
-          <a:xfrm>
-            <a:off x="6400800" y="2011680"/>
-            <a:ext cx="4846320" cy="3200400"/>
-          </a:xfrm>
-          <a:prstGeom prst="roundRect">
-            <a:avLst/>
-          </a:prstGeom>
-          <a:solidFill>
-            <a:srgbClr val="E8F7E8"/>
-          </a:solidFill>
-          <a:ln w="25400">
-            <a:solidFill>
-              <a:srgbClr val="2CA02C"/>
-            </a:solidFill>
-          </a:ln>
-          <a:effectLst/>
-        </p:spPr>
-        <p:style>
-          <a:lnRef idx="1">
-            <a:schemeClr val="accent1"/>
-          </a:lnRef>
-          <a:fillRef idx="3">
-            <a:schemeClr val="accent1"/>
-          </a:fillRef>
-          <a:effectRef idx="2">
-            <a:schemeClr val="accent1"/>
-          </a:effectRef>
-          <a:fontRef idx="minor">
-            <a:schemeClr val="lt1"/>
-          </a:fontRef>
-        </p:style>
-        <p:txBody>
-          <a:bodyPr rtlCol="0" anchor="ctr"/>
-          <a:lstStyle/>
-          <a:p>
-            <a:pPr algn="ctr"/>
-          </a:p>
-        </p:txBody>
-      </p:sp>
-      <p:sp>
-        <p:nvSpPr>
-          <p:cNvPr id="9" name="TextBox 8"/>
-          <p:cNvSpPr txBox="1"/>
-          <p:nvPr/>
-        </p:nvSpPr>
-        <p:spPr>
-          <a:xfrm>
-            <a:off x="6400800" y="2194560"/>
-            <a:ext cx="4846320" cy="457200"/>
-          </a:xfrm>
-          <a:prstGeom prst="rect">
-            <a:avLst/>
-          </a:prstGeom>
-          <a:noFill/>
-        </p:spPr>
-        <p:txBody>
-          <a:bodyPr wrap="square" lIns="0" rIns="0" tIns="0" bIns="0" anchor="t">
-            <a:spAutoFit/>
-          </a:bodyPr>
-          <a:lstStyle/>
-          <a:p>
-            <a:pPr algn="ctr"/>
-            <a:r>
-              <a:rPr sz="2400" b="1" i="0">
-                <a:solidFill>
-                  <a:srgbClr val="2CA02C"/>
-                </a:solidFill>
-                <a:latin typeface="Helvetica"/>
-              </a:rPr>
-              <a:t>v2</a:t>
-            </a:r>
-          </a:p>
-        </p:txBody>
-      </p:sp>
-      <p:sp>
-        <p:nvSpPr>
-          <p:cNvPr id="10" name="TextBox 9"/>
-          <p:cNvSpPr txBox="1"/>
-          <p:nvPr/>
-        </p:nvSpPr>
-        <p:spPr>
-          <a:xfrm>
-            <a:off x="6400800" y="2697480"/>
-            <a:ext cx="4846320" cy="1828800"/>
-          </a:xfrm>
-          <a:prstGeom prst="rect">
-            <a:avLst/>
-          </a:prstGeom>
-          <a:noFill/>
-        </p:spPr>
-        <p:txBody>
-          <a:bodyPr wrap="square" lIns="0" rIns="0" tIns="0" bIns="0" anchor="t">
-            <a:spAutoFit/>
-          </a:bodyPr>
-          <a:lstStyle/>
-          <a:p>
-            <a:pPr algn="ctr"/>
-            <a:r>
-              <a:rPr sz="8800" b="1" i="0">
-                <a:solidFill>
-                  <a:srgbClr val="2CA02C"/>
-                </a:solidFill>
-                <a:latin typeface="Helvetica"/>
-              </a:rPr>
-              <a:t>34.30</a:t>
-            </a:r>
-          </a:p>
-        </p:txBody>
-      </p:sp>
-      <p:sp>
-        <p:nvSpPr>
-          <p:cNvPr id="11" name="TextBox 10"/>
-          <p:cNvSpPr txBox="1"/>
-          <p:nvPr/>
-        </p:nvSpPr>
-        <p:spPr>
-          <a:xfrm>
-            <a:off x="6400800" y="4572000"/>
-            <a:ext cx="4846320" cy="457200"/>
-          </a:xfrm>
-          <a:prstGeom prst="rect">
-            <a:avLst/>
-          </a:prstGeom>
-          <a:noFill/>
-        </p:spPr>
-        <p:txBody>
-          <a:bodyPr wrap="square" lIns="0" rIns="0" tIns="0" bIns="0" anchor="t">
-            <a:spAutoFit/>
-          </a:bodyPr>
-          <a:lstStyle/>
-          <a:p>
-            <a:pPr algn="ctr"/>
-            <a:r>
-              <a:rPr sz="1800" b="0" i="1">
-                <a:solidFill>
-                  <a:srgbClr val="2CA02C"/>
-                </a:solidFill>
-                <a:latin typeface="Helvetica"/>
-              </a:rPr>
-              <a:t>APₛ    +0.4</a:t>
-            </a:r>
-          </a:p>
-        </p:txBody>
-      </p:sp>
-      <p:sp>
-        <p:nvSpPr>
-          <p:cNvPr id="12" name="TextBox 11"/>
-          <p:cNvSpPr txBox="1"/>
-          <p:nvPr/>
-        </p:nvSpPr>
-        <p:spPr>
-          <a:xfrm>
-            <a:off x="640080" y="6446520"/>
-            <a:ext cx="7315200" cy="274320"/>
-          </a:xfrm>
-          <a:prstGeom prst="rect">
-            <a:avLst/>
-          </a:prstGeom>
-          <a:noFill/>
-        </p:spPr>
-        <p:txBody>
-          <a:bodyPr wrap="square" lIns="0" rIns="0" tIns="0" bIns="0" anchor="t">
-            <a:spAutoFit/>
-          </a:bodyPr>
-          <a:lstStyle/>
-          <a:p>
-            <a:pPr algn="l"/>
-            <a:r>
-              <a:rPr sz="1000" b="0" i="0">
-                <a:solidFill>
-                  <a:srgbClr val="666677"/>
-                </a:solidFill>
-                <a:latin typeface="Helvetica"/>
-              </a:rPr>
-              <a:t>Feedback-Augmented RT-DETR  •  Hatem Saadallah &amp; Nour Jennane</a:t>
-            </a:r>
-          </a:p>
-        </p:txBody>
-      </p:sp>
-      <p:sp>
-        <p:nvSpPr>
-          <p:cNvPr id="13" name="TextBox 12"/>
           <p:cNvSpPr txBox="1"/>
           <p:nvPr/>
         </p:nvSpPr>
@@ -4011,7 +3704,7 @@
                 </a:solidFill>
                 <a:latin typeface="Helvetica"/>
               </a:rPr>
-              <a:t>11 / 18</a:t>
+              <a:t>11 / 24</a:t>
             </a:r>
           </a:p>
         </p:txBody>
@@ -4064,7 +3757,7 @@
                 </a:solidFill>
                 <a:latin typeface="Helvetica"/>
               </a:rPr>
-              <a:t>Ablation: same model, only the switch changes</a:t>
+              <a:t>First attempt (v1) — and why it failed</a:t>
             </a:r>
           </a:p>
         </p:txBody>
@@ -4112,30 +3805,41 @@
           </a:p>
         </p:txBody>
       </p:sp>
-      <p:pic>
-        <p:nvPicPr>
-          <p:cNvPr id="4" name="Picture 3" descr="diag_ablation.png"/>
-          <p:cNvPicPr>
-            <a:picLocks noChangeAspect="1"/>
-          </p:cNvPicPr>
-          <p:nvPr/>
-        </p:nvPicPr>
-        <p:blipFill>
-          <a:blip r:embed="rId2"/>
-          <a:stretch>
-            <a:fillRect/>
-          </a:stretch>
-        </p:blipFill>
-        <p:spPr>
-          <a:xfrm>
-            <a:off x="914400" y="2286000"/>
-            <a:ext cx="10332720" cy="3385557"/>
-          </a:xfrm>
-          <a:prstGeom prst="rect">
-            <a:avLst/>
-          </a:prstGeom>
-        </p:spPr>
-      </p:pic>
+      <p:sp>
+        <p:nvSpPr>
+          <p:cNvPr id="4" name="TextBox 3"/>
+          <p:cNvSpPr txBox="1"/>
+          <p:nvPr/>
+        </p:nvSpPr>
+        <p:spPr>
+          <a:xfrm>
+            <a:off x="640080" y="1417320"/>
+            <a:ext cx="10972800" cy="457200"/>
+          </a:xfrm>
+          <a:prstGeom prst="rect">
+            <a:avLst/>
+          </a:prstGeom>
+          <a:noFill/>
+        </p:spPr>
+        <p:txBody>
+          <a:bodyPr wrap="square" lIns="0" rIns="0" tIns="0" bIns="0" anchor="t">
+            <a:spAutoFit/>
+          </a:bodyPr>
+          <a:lstStyle/>
+          <a:p>
+            <a:pPr algn="ctr"/>
+            <a:r>
+              <a:rPr sz="1800" b="0" i="1">
+                <a:solidFill>
+                  <a:srgbClr val="1A1A2E"/>
+                </a:solidFill>
+                <a:latin typeface="Helvetica"/>
+              </a:rPr>
+              <a:t>Plain sigmoid gate, applied to all four pyramid levels.</a:t>
+            </a:r>
+          </a:p>
+        </p:txBody>
+      </p:sp>
       <p:sp>
         <p:nvSpPr>
           <p:cNvPr id="5" name="TextBox 4"/>
@@ -4144,8 +3848,8 @@
         </p:nvSpPr>
         <p:spPr>
           <a:xfrm>
-            <a:off x="640080" y="5486400"/>
-            <a:ext cx="10972800" cy="457200"/>
+            <a:off x="640080" y="2377440"/>
+            <a:ext cx="5120640" cy="1828800"/>
           </a:xfrm>
           <a:prstGeom prst="rect">
             <a:avLst/>
@@ -4160,27 +3864,133 @@
           <a:p>
             <a:pPr algn="ctr"/>
             <a:r>
-              <a:rPr sz="1800" b="0" i="1">
+              <a:rPr sz="7200" b="1" i="0">
+                <a:solidFill>
+                  <a:srgbClr val="D62C2E"/>
+                </a:solidFill>
+                <a:latin typeface="Helvetica"/>
+              </a:rPr>
+              <a:t>Δ APₛ  =  0.00</a:t>
+            </a:r>
+          </a:p>
+        </p:txBody>
+      </p:sp>
+      <p:sp>
+        <p:nvSpPr>
+          <p:cNvPr id="6" name="TextBox 5"/>
+          <p:cNvSpPr txBox="1"/>
+          <p:nvPr/>
+        </p:nvSpPr>
+        <p:spPr>
+          <a:xfrm>
+            <a:off x="640080" y="4206240"/>
+            <a:ext cx="5120640" cy="457200"/>
+          </a:xfrm>
+          <a:prstGeom prst="rect">
+            <a:avLst/>
+          </a:prstGeom>
+          <a:noFill/>
+        </p:spPr>
+        <p:txBody>
+          <a:bodyPr wrap="square" lIns="0" rIns="0" tIns="0" bIns="0" anchor="t">
+            <a:spAutoFit/>
+          </a:bodyPr>
+          <a:lstStyle/>
+          <a:p>
+            <a:pPr algn="ctr"/>
+            <a:r>
+              <a:rPr sz="1500" b="0" i="1">
+                <a:solidFill>
+                  <a:srgbClr val="666677"/>
+                </a:solidFill>
+                <a:latin typeface="Helvetica"/>
+              </a:rPr>
+              <a:t>the mechanism contributed nothing</a:t>
+            </a:r>
+          </a:p>
+        </p:txBody>
+      </p:sp>
+      <p:sp>
+        <p:nvSpPr>
+          <p:cNvPr id="7" name="TextBox 6"/>
+          <p:cNvSpPr txBox="1"/>
+          <p:nvPr/>
+        </p:nvSpPr>
+        <p:spPr>
+          <a:xfrm>
+            <a:off x="6492240" y="2286000"/>
+            <a:ext cx="5120640" cy="548640"/>
+          </a:xfrm>
+          <a:prstGeom prst="rect">
+            <a:avLst/>
+          </a:prstGeom>
+          <a:noFill/>
+        </p:spPr>
+        <p:txBody>
+          <a:bodyPr wrap="square" lIns="0" rIns="0" tIns="0" bIns="0" anchor="t">
+            <a:spAutoFit/>
+          </a:bodyPr>
+          <a:lstStyle/>
+          <a:p>
+            <a:pPr algn="l"/>
+            <a:r>
+              <a:rPr sz="2400" b="1" i="0">
                 <a:solidFill>
                   <a:srgbClr val="1A1A2E"/>
                 </a:solidFill>
                 <a:latin typeface="Helvetica"/>
               </a:rPr>
-              <a:t>Toggle feedback ON or OFF at inference. Everything else identical.</a:t>
-            </a:r>
-          </a:p>
-        </p:txBody>
-      </p:sp>
-      <p:sp>
-        <p:nvSpPr>
-          <p:cNvPr id="6" name="TextBox 5"/>
+              <a:t>Why?</a:t>
+            </a:r>
+          </a:p>
+        </p:txBody>
+      </p:sp>
+      <p:sp>
+        <p:nvSpPr>
+          <p:cNvPr id="8" name="TextBox 7"/>
+          <p:cNvSpPr txBox="1"/>
+          <p:nvPr/>
+        </p:nvSpPr>
+        <p:spPr>
+          <a:xfrm>
+            <a:off x="6492240" y="2834640"/>
+            <a:ext cx="5120640" cy="2286000"/>
+          </a:xfrm>
+          <a:prstGeom prst="rect">
+            <a:avLst/>
+          </a:prstGeom>
+          <a:noFill/>
+        </p:spPr>
+        <p:txBody>
+          <a:bodyPr wrap="square" lIns="0" rIns="0" tIns="0" bIns="0" anchor="t">
+            <a:spAutoFit/>
+          </a:bodyPr>
+          <a:lstStyle/>
+          <a:p>
+            <a:pPr algn="l"/>
+            <a:r>
+              <a:rPr sz="1500" b="0" i="0">
+                <a:solidFill>
+                  <a:srgbClr val="1A1A2E"/>
+                </a:solidFill>
+                <a:latin typeface="Helvetica"/>
+              </a:rPr>
+              <a:t>α drifts to −∞ → gate ≈ 0.
+The feedback signal is multiplied by zero before reaching memory.</a:t>
+            </a:r>
+          </a:p>
+        </p:txBody>
+      </p:sp>
+      <p:sp>
+        <p:nvSpPr>
+          <p:cNvPr id="9" name="TextBox 8"/>
           <p:cNvSpPr txBox="1"/>
           <p:nvPr/>
         </p:nvSpPr>
         <p:spPr>
           <a:xfrm>
             <a:off x="640080" y="6446520"/>
-            <a:ext cx="7315200" cy="274320"/>
+            <a:ext cx="9144000" cy="274320"/>
           </a:xfrm>
           <a:prstGeom prst="rect">
             <a:avLst/>
@@ -4201,14 +4011,14 @@
                 </a:solidFill>
                 <a:latin typeface="Helvetica"/>
               </a:rPr>
-              <a:t>Feedback-Augmented RT-DETR  •  Hatem Saadallah &amp; Nour Jennane</a:t>
-            </a:r>
-          </a:p>
-        </p:txBody>
-      </p:sp>
-      <p:sp>
-        <p:nvSpPr>
-          <p:cNvPr id="7" name="TextBox 6"/>
+              <a:t>3. Proposed Solution  •  Feedback-Augmented RT-DETR  •  Hatem Saadallah &amp; Nour Jennane</a:t>
+            </a:r>
+          </a:p>
+        </p:txBody>
+      </p:sp>
+      <p:sp>
+        <p:nvSpPr>
+          <p:cNvPr id="10" name="TextBox 9"/>
           <p:cNvSpPr txBox="1"/>
           <p:nvPr/>
         </p:nvSpPr>
@@ -4236,7 +4046,7 @@
                 </a:solidFill>
                 <a:latin typeface="Helvetica"/>
               </a:rPr>
-              <a:t>12 / 18</a:t>
+              <a:t>12 / 24</a:t>
             </a:r>
           </a:p>
         </p:txBody>
@@ -4289,7 +4099,7 @@
                 </a:solidFill>
                 <a:latin typeface="Helvetica"/>
               </a:rPr>
-              <a:t>Causal effect of feedback</a:t>
+              <a:t>v2: two fixes — zero new parameters</a:t>
             </a:r>
           </a:p>
         </p:txBody>
@@ -4337,16 +4147,40 @@
           </a:p>
         </p:txBody>
       </p:sp>
-      <p:sp>
-        <p:nvSpPr>
-          <p:cNvPr id="4" name="TextBox 3"/>
-          <p:cNvSpPr txBox="1"/>
-          <p:nvPr/>
-        </p:nvSpPr>
-        <p:spPr>
-          <a:xfrm>
-            <a:off x="640080" y="1828800"/>
-            <a:ext cx="3657600" cy="548640"/>
+      <p:pic>
+        <p:nvPicPr>
+          <p:cNvPr id="4" name="Picture 3" descr="diag_v2_fixes.png"/>
+          <p:cNvPicPr>
+            <a:picLocks noChangeAspect="1"/>
+          </p:cNvPicPr>
+          <p:nvPr/>
+        </p:nvPicPr>
+        <p:blipFill>
+          <a:blip r:embed="rId2"/>
+          <a:stretch>
+            <a:fillRect/>
+          </a:stretch>
+        </p:blipFill>
+        <p:spPr>
+          <a:xfrm>
+            <a:off x="914400" y="2011680"/>
+            <a:ext cx="10332720" cy="3438915"/>
+          </a:xfrm>
+          <a:prstGeom prst="rect">
+            <a:avLst/>
+          </a:prstGeom>
+        </p:spPr>
+      </p:pic>
+      <p:sp>
+        <p:nvSpPr>
+          <p:cNvPr id="5" name="TextBox 4"/>
+          <p:cNvSpPr txBox="1"/>
+          <p:nvPr/>
+        </p:nvSpPr>
+        <p:spPr>
+          <a:xfrm>
+            <a:off x="640080" y="5577840"/>
+            <a:ext cx="10972800" cy="457200"/>
           </a:xfrm>
           <a:prstGeom prst="rect">
             <a:avLst/>
@@ -4361,83 +4195,48 @@
           <a:p>
             <a:pPr algn="ctr"/>
             <a:r>
-              <a:rPr sz="2400" b="0" i="0">
+              <a:rPr sz="1800" b="0" i="1">
+                <a:solidFill>
+                  <a:srgbClr val="1A1A2E"/>
+                </a:solidFill>
+                <a:latin typeface="Helvetica"/>
+              </a:rPr>
+              <a:t>Reparameterize the gate. Refine only the levels small objects live in.</a:t>
+            </a:r>
+          </a:p>
+        </p:txBody>
+      </p:sp>
+      <p:sp>
+        <p:nvSpPr>
+          <p:cNvPr id="6" name="TextBox 5"/>
+          <p:cNvSpPr txBox="1"/>
+          <p:nvPr/>
+        </p:nvSpPr>
+        <p:spPr>
+          <a:xfrm>
+            <a:off x="640080" y="6446520"/>
+            <a:ext cx="9144000" cy="274320"/>
+          </a:xfrm>
+          <a:prstGeom prst="rect">
+            <a:avLst/>
+          </a:prstGeom>
+          <a:noFill/>
+        </p:spPr>
+        <p:txBody>
+          <a:bodyPr wrap="square" lIns="0" rIns="0" tIns="0" bIns="0" anchor="t">
+            <a:spAutoFit/>
+          </a:bodyPr>
+          <a:lstStyle/>
+          <a:p>
+            <a:pPr algn="l"/>
+            <a:r>
+              <a:rPr sz="1000" b="0" i="0">
                 <a:solidFill>
                   <a:srgbClr val="666677"/>
                 </a:solidFill>
                 <a:latin typeface="Helvetica"/>
               </a:rPr>
-              <a:t>ON</a:t>
-            </a:r>
-          </a:p>
-        </p:txBody>
-      </p:sp>
-      <p:sp>
-        <p:nvSpPr>
-          <p:cNvPr id="5" name="TextBox 4"/>
-          <p:cNvSpPr txBox="1"/>
-          <p:nvPr/>
-        </p:nvSpPr>
-        <p:spPr>
-          <a:xfrm>
-            <a:off x="640080" y="2468880"/>
-            <a:ext cx="3657600" cy="2011680"/>
-          </a:xfrm>
-          <a:prstGeom prst="rect">
-            <a:avLst/>
-          </a:prstGeom>
-          <a:noFill/>
-        </p:spPr>
-        <p:txBody>
-          <a:bodyPr wrap="square" lIns="0" rIns="0" tIns="0" bIns="0" anchor="t">
-            <a:spAutoFit/>
-          </a:bodyPr>
-          <a:lstStyle/>
-          <a:p>
-            <a:pPr algn="ctr"/>
-            <a:r>
-              <a:rPr sz="11000" b="1" i="0">
-                <a:solidFill>
-                  <a:srgbClr val="2CA02C"/>
-                </a:solidFill>
-                <a:latin typeface="Helvetica"/>
-              </a:rPr>
-              <a:t>34.25</a:t>
-            </a:r>
-          </a:p>
-        </p:txBody>
-      </p:sp>
-      <p:sp>
-        <p:nvSpPr>
-          <p:cNvPr id="6" name="TextBox 5"/>
-          <p:cNvSpPr txBox="1"/>
-          <p:nvPr/>
-        </p:nvSpPr>
-        <p:spPr>
-          <a:xfrm>
-            <a:off x="640080" y="4754880"/>
-            <a:ext cx="3657600" cy="457200"/>
-          </a:xfrm>
-          <a:prstGeom prst="rect">
-            <a:avLst/>
-          </a:prstGeom>
-          <a:noFill/>
-        </p:spPr>
-        <p:txBody>
-          <a:bodyPr wrap="square" lIns="0" rIns="0" tIns="0" bIns="0" anchor="t">
-            <a:spAutoFit/>
-          </a:bodyPr>
-          <a:lstStyle/>
-          <a:p>
-            <a:pPr algn="ctr"/>
-            <a:r>
-              <a:rPr sz="1400" b="0" i="1">
-                <a:solidFill>
-                  <a:srgbClr val="666677"/>
-                </a:solidFill>
-                <a:latin typeface="Helvetica"/>
-              </a:rPr>
-              <a:t>feedback enabled</a:t>
+              <a:t>3. Proposed Solution  •  Feedback-Augmented RT-DETR  •  Hatem Saadallah &amp; Nour Jennane</a:t>
             </a:r>
           </a:p>
         </p:txBody>
@@ -4445,286 +4244,6 @@
       <p:sp>
         <p:nvSpPr>
           <p:cNvPr id="7" name="TextBox 6"/>
-          <p:cNvSpPr txBox="1"/>
-          <p:nvPr/>
-        </p:nvSpPr>
-        <p:spPr>
-          <a:xfrm>
-            <a:off x="4434840" y="1828800"/>
-            <a:ext cx="3657600" cy="548640"/>
-          </a:xfrm>
-          <a:prstGeom prst="rect">
-            <a:avLst/>
-          </a:prstGeom>
-          <a:noFill/>
-        </p:spPr>
-        <p:txBody>
-          <a:bodyPr wrap="square" lIns="0" rIns="0" tIns="0" bIns="0" anchor="t">
-            <a:spAutoFit/>
-          </a:bodyPr>
-          <a:lstStyle/>
-          <a:p>
-            <a:pPr algn="ctr"/>
-            <a:r>
-              <a:rPr sz="2400" b="0" i="0">
-                <a:solidFill>
-                  <a:srgbClr val="666677"/>
-                </a:solidFill>
-                <a:latin typeface="Helvetica"/>
-              </a:rPr>
-              <a:t>OFF</a:t>
-            </a:r>
-          </a:p>
-        </p:txBody>
-      </p:sp>
-      <p:sp>
-        <p:nvSpPr>
-          <p:cNvPr id="8" name="TextBox 7"/>
-          <p:cNvSpPr txBox="1"/>
-          <p:nvPr/>
-        </p:nvSpPr>
-        <p:spPr>
-          <a:xfrm>
-            <a:off x="4434840" y="2468880"/>
-            <a:ext cx="3657600" cy="2011680"/>
-          </a:xfrm>
-          <a:prstGeom prst="rect">
-            <a:avLst/>
-          </a:prstGeom>
-          <a:noFill/>
-        </p:spPr>
-        <p:txBody>
-          <a:bodyPr wrap="square" lIns="0" rIns="0" tIns="0" bIns="0" anchor="t">
-            <a:spAutoFit/>
-          </a:bodyPr>
-          <a:lstStyle/>
-          <a:p>
-            <a:pPr algn="ctr"/>
-            <a:r>
-              <a:rPr sz="11000" b="1" i="0">
-                <a:solidFill>
-                  <a:srgbClr val="666677"/>
-                </a:solidFill>
-                <a:latin typeface="Helvetica"/>
-              </a:rPr>
-              <a:t>33.26</a:t>
-            </a:r>
-          </a:p>
-        </p:txBody>
-      </p:sp>
-      <p:sp>
-        <p:nvSpPr>
-          <p:cNvPr id="9" name="TextBox 8"/>
-          <p:cNvSpPr txBox="1"/>
-          <p:nvPr/>
-        </p:nvSpPr>
-        <p:spPr>
-          <a:xfrm>
-            <a:off x="4434840" y="4754880"/>
-            <a:ext cx="3657600" cy="457200"/>
-          </a:xfrm>
-          <a:prstGeom prst="rect">
-            <a:avLst/>
-          </a:prstGeom>
-          <a:noFill/>
-        </p:spPr>
-        <p:txBody>
-          <a:bodyPr wrap="square" lIns="0" rIns="0" tIns="0" bIns="0" anchor="t">
-            <a:spAutoFit/>
-          </a:bodyPr>
-          <a:lstStyle/>
-          <a:p>
-            <a:pPr algn="ctr"/>
-            <a:r>
-              <a:rPr sz="1400" b="0" i="1">
-                <a:solidFill>
-                  <a:srgbClr val="666677"/>
-                </a:solidFill>
-                <a:latin typeface="Helvetica"/>
-              </a:rPr>
-              <a:t>feedback bypassed</a:t>
-            </a:r>
-          </a:p>
-        </p:txBody>
-      </p:sp>
-      <p:sp>
-        <p:nvSpPr>
-          <p:cNvPr id="10" name="TextBox 9"/>
-          <p:cNvSpPr txBox="1"/>
-          <p:nvPr/>
-        </p:nvSpPr>
-        <p:spPr>
-          <a:xfrm>
-            <a:off x="8229600" y="1828800"/>
-            <a:ext cx="3657600" cy="548640"/>
-          </a:xfrm>
-          <a:prstGeom prst="rect">
-            <a:avLst/>
-          </a:prstGeom>
-          <a:noFill/>
-        </p:spPr>
-        <p:txBody>
-          <a:bodyPr wrap="square" lIns="0" rIns="0" tIns="0" bIns="0" anchor="t">
-            <a:spAutoFit/>
-          </a:bodyPr>
-          <a:lstStyle/>
-          <a:p>
-            <a:pPr algn="ctr"/>
-            <a:r>
-              <a:rPr sz="2400" b="0" i="0">
-                <a:solidFill>
-                  <a:srgbClr val="666677"/>
-                </a:solidFill>
-                <a:latin typeface="Helvetica"/>
-              </a:rPr>
-              <a:t>Δ</a:t>
-            </a:r>
-          </a:p>
-        </p:txBody>
-      </p:sp>
-      <p:sp>
-        <p:nvSpPr>
-          <p:cNvPr id="11" name="TextBox 10"/>
-          <p:cNvSpPr txBox="1"/>
-          <p:nvPr/>
-        </p:nvSpPr>
-        <p:spPr>
-          <a:xfrm>
-            <a:off x="8229600" y="2468880"/>
-            <a:ext cx="3657600" cy="2011680"/>
-          </a:xfrm>
-          <a:prstGeom prst="rect">
-            <a:avLst/>
-          </a:prstGeom>
-          <a:noFill/>
-        </p:spPr>
-        <p:txBody>
-          <a:bodyPr wrap="square" lIns="0" rIns="0" tIns="0" bIns="0" anchor="t">
-            <a:spAutoFit/>
-          </a:bodyPr>
-          <a:lstStyle/>
-          <a:p>
-            <a:pPr algn="ctr"/>
-            <a:r>
-              <a:rPr sz="11000" b="1" i="0">
-                <a:solidFill>
-                  <a:srgbClr val="1F6FEB"/>
-                </a:solidFill>
-                <a:latin typeface="Helvetica"/>
-              </a:rPr>
-              <a:t>+0.99</a:t>
-            </a:r>
-          </a:p>
-        </p:txBody>
-      </p:sp>
-      <p:sp>
-        <p:nvSpPr>
-          <p:cNvPr id="12" name="TextBox 11"/>
-          <p:cNvSpPr txBox="1"/>
-          <p:nvPr/>
-        </p:nvSpPr>
-        <p:spPr>
-          <a:xfrm>
-            <a:off x="8229600" y="4754880"/>
-            <a:ext cx="3657600" cy="457200"/>
-          </a:xfrm>
-          <a:prstGeom prst="rect">
-            <a:avLst/>
-          </a:prstGeom>
-          <a:noFill/>
-        </p:spPr>
-        <p:txBody>
-          <a:bodyPr wrap="square" lIns="0" rIns="0" tIns="0" bIns="0" anchor="t">
-            <a:spAutoFit/>
-          </a:bodyPr>
-          <a:lstStyle/>
-          <a:p>
-            <a:pPr algn="ctr"/>
-            <a:r>
-              <a:rPr sz="1400" b="0" i="1">
-                <a:solidFill>
-                  <a:srgbClr val="666677"/>
-                </a:solidFill>
-                <a:latin typeface="Helvetica"/>
-              </a:rPr>
-              <a:t>the contribution</a:t>
-            </a:r>
-          </a:p>
-        </p:txBody>
-      </p:sp>
-      <p:sp>
-        <p:nvSpPr>
-          <p:cNvPr id="13" name="TextBox 12"/>
-          <p:cNvSpPr txBox="1"/>
-          <p:nvPr/>
-        </p:nvSpPr>
-        <p:spPr>
-          <a:xfrm>
-            <a:off x="640080" y="5669280"/>
-            <a:ext cx="10972800" cy="548640"/>
-          </a:xfrm>
-          <a:prstGeom prst="rect">
-            <a:avLst/>
-          </a:prstGeom>
-          <a:noFill/>
-        </p:spPr>
-        <p:txBody>
-          <a:bodyPr wrap="square" lIns="0" rIns="0" tIns="0" bIns="0" anchor="t">
-            <a:spAutoFit/>
-          </a:bodyPr>
-          <a:lstStyle/>
-          <a:p>
-            <a:pPr algn="ctr"/>
-            <a:r>
-              <a:rPr sz="2200" b="1" i="0">
-                <a:solidFill>
-                  <a:srgbClr val="1F6FEB"/>
-                </a:solidFill>
-                <a:latin typeface="Helvetica"/>
-              </a:rPr>
-              <a:t>Feedback has a real causal impact.</a:t>
-            </a:r>
-          </a:p>
-        </p:txBody>
-      </p:sp>
-      <p:sp>
-        <p:nvSpPr>
-          <p:cNvPr id="14" name="TextBox 13"/>
-          <p:cNvSpPr txBox="1"/>
-          <p:nvPr/>
-        </p:nvSpPr>
-        <p:spPr>
-          <a:xfrm>
-            <a:off x="640080" y="6446520"/>
-            <a:ext cx="7315200" cy="274320"/>
-          </a:xfrm>
-          <a:prstGeom prst="rect">
-            <a:avLst/>
-          </a:prstGeom>
-          <a:noFill/>
-        </p:spPr>
-        <p:txBody>
-          <a:bodyPr wrap="square" lIns="0" rIns="0" tIns="0" bIns="0" anchor="t">
-            <a:spAutoFit/>
-          </a:bodyPr>
-          <a:lstStyle/>
-          <a:p>
-            <a:pPr algn="l"/>
-            <a:r>
-              <a:rPr sz="1000" b="0" i="0">
-                <a:solidFill>
-                  <a:srgbClr val="666677"/>
-                </a:solidFill>
-                <a:latin typeface="Helvetica"/>
-              </a:rPr>
-              <a:t>Feedback-Augmented RT-DETR  •  Hatem Saadallah &amp; Nour Jennane</a:t>
-            </a:r>
-          </a:p>
-        </p:txBody>
-      </p:sp>
-      <p:sp>
-        <p:nvSpPr>
-          <p:cNvPr id="15" name="TextBox 14"/>
           <p:cNvSpPr txBox="1"/>
           <p:nvPr/>
         </p:nvSpPr>
@@ -4752,7 +4271,7 @@
                 </a:solidFill>
                 <a:latin typeface="Helvetica"/>
               </a:rPr>
-              <a:t>13 / 18</a:t>
+              <a:t>13 / 24</a:t>
             </a:r>
           </a:p>
         </p:txBody>
@@ -4783,8 +4302,8 @@
         </p:nvSpPr>
         <p:spPr>
           <a:xfrm>
-            <a:off x="640080" y="457200"/>
-            <a:ext cx="10972800" cy="822960"/>
+            <a:off x="731520" y="2377440"/>
+            <a:ext cx="10698480" cy="365760"/>
           </a:xfrm>
           <a:prstGeom prst="rect">
             <a:avLst/>
@@ -4799,13 +4318,13 @@
           <a:p>
             <a:pPr algn="l"/>
             <a:r>
-              <a:rPr sz="3400" b="1" i="0">
+              <a:rPr sz="1400" b="1" i="0">
                 <a:solidFill>
                   <a:srgbClr val="1F6FEB"/>
                 </a:solidFill>
                 <a:latin typeface="Helvetica"/>
               </a:rPr>
-              <a:t>Higher resolution → bigger gain</a:t>
+              <a:t>SECTION  4  /  5</a:t>
             </a:r>
           </a:p>
         </p:txBody>
@@ -4818,7 +4337,7 @@
         </p:nvSpPr>
         <p:spPr>
           <a:xfrm>
-            <a:off x="640080" y="1143000"/>
+            <a:off x="731520" y="2788920"/>
             <a:ext cx="640080" cy="54864"/>
           </a:xfrm>
           <a:prstGeom prst="rect">
@@ -4861,289 +4380,106 @@
         </p:nvSpPr>
         <p:spPr>
           <a:xfrm>
-            <a:off x="640080" y="2194560"/>
-            <a:ext cx="5303520" cy="457200"/>
-          </a:xfrm>
-          <a:prstGeom prst="rect">
-            <a:avLst/>
-          </a:prstGeom>
-          <a:noFill/>
-        </p:spPr>
-        <p:txBody>
-          <a:bodyPr wrap="square" lIns="0" rIns="0" tIns="0" bIns="0" anchor="t">
-            <a:spAutoFit/>
-          </a:bodyPr>
-          <a:lstStyle/>
-          <a:p>
-            <a:pPr algn="ctr"/>
-            <a:r>
-              <a:rPr sz="2200" b="0" i="0">
+            <a:off x="731520" y="2971800"/>
+            <a:ext cx="10698480" cy="1097280"/>
+          </a:xfrm>
+          <a:prstGeom prst="rect">
+            <a:avLst/>
+          </a:prstGeom>
+          <a:noFill/>
+        </p:spPr>
+        <p:txBody>
+          <a:bodyPr wrap="square" lIns="0" rIns="0" tIns="0" bIns="0" anchor="t">
+            <a:spAutoFit/>
+          </a:bodyPr>
+          <a:lstStyle/>
+          <a:p>
+            <a:pPr algn="l"/>
+            <a:r>
+              <a:rPr sz="5400" b="1" i="0">
+                <a:solidFill>
+                  <a:srgbClr val="1A1A2E"/>
+                </a:solidFill>
+                <a:latin typeface="Helvetica"/>
+              </a:rPr>
+              <a:t>Performance Evaluation Approach</a:t>
+            </a:r>
+          </a:p>
+        </p:txBody>
+      </p:sp>
+      <p:sp>
+        <p:nvSpPr>
+          <p:cNvPr id="5" name="TextBox 4"/>
+          <p:cNvSpPr txBox="1"/>
+          <p:nvPr/>
+        </p:nvSpPr>
+        <p:spPr>
+          <a:xfrm>
+            <a:off x="731520" y="4206240"/>
+            <a:ext cx="10698480" cy="548640"/>
+          </a:xfrm>
+          <a:prstGeom prst="rect">
+            <a:avLst/>
+          </a:prstGeom>
+          <a:noFill/>
+        </p:spPr>
+        <p:txBody>
+          <a:bodyPr wrap="square" lIns="0" rIns="0" tIns="0" bIns="0" anchor="t">
+            <a:spAutoFit/>
+          </a:bodyPr>
+          <a:lstStyle/>
+          <a:p>
+            <a:pPr algn="l"/>
+            <a:r>
+              <a:rPr sz="2000" b="0" i="1">
                 <a:solidFill>
                   <a:srgbClr val="666677"/>
                 </a:solidFill>
                 <a:latin typeface="Helvetica"/>
               </a:rPr>
-              <a:t>640 × 640</a:t>
-            </a:r>
-          </a:p>
-        </p:txBody>
-      </p:sp>
-      <p:sp>
-        <p:nvSpPr>
-          <p:cNvPr id="5" name="TextBox 4"/>
-          <p:cNvSpPr txBox="1"/>
-          <p:nvPr/>
-        </p:nvSpPr>
-        <p:spPr>
-          <a:xfrm>
-            <a:off x="640080" y="2743200"/>
-            <a:ext cx="5303520" cy="1828800"/>
-          </a:xfrm>
-          <a:prstGeom prst="rect">
-            <a:avLst/>
-          </a:prstGeom>
-          <a:noFill/>
-        </p:spPr>
-        <p:txBody>
-          <a:bodyPr wrap="square" lIns="0" rIns="0" tIns="0" bIns="0" anchor="t">
-            <a:spAutoFit/>
-          </a:bodyPr>
-          <a:lstStyle/>
-          <a:p>
-            <a:pPr algn="ctr"/>
-            <a:r>
-              <a:rPr sz="8800" b="1" i="0">
-                <a:solidFill>
-                  <a:srgbClr val="1A1A2E"/>
-                </a:solidFill>
-                <a:latin typeface="Helvetica"/>
-              </a:rPr>
-              <a:t>34.25</a:t>
-            </a:r>
-          </a:p>
-        </p:txBody>
-      </p:sp>
-      <p:sp>
-        <p:nvSpPr>
-          <p:cNvPr id="6" name="Right Arrow 5"/>
-          <p:cNvSpPr/>
-          <p:nvPr/>
-        </p:nvSpPr>
-        <p:spPr>
-          <a:xfrm>
-            <a:off x="5303520" y="3291840"/>
-            <a:ext cx="1554480" cy="548640"/>
-          </a:xfrm>
-          <a:prstGeom prst="rightArrow">
-            <a:avLst/>
-          </a:prstGeom>
-          <a:solidFill>
-            <a:srgbClr val="1F6FEB"/>
-          </a:solidFill>
-          <a:ln>
-            <a:noFill/>
-          </a:ln>
-        </p:spPr>
-        <p:style>
-          <a:lnRef idx="1">
-            <a:schemeClr val="accent1"/>
-          </a:lnRef>
-          <a:fillRef idx="3">
-            <a:schemeClr val="accent1"/>
-          </a:fillRef>
-          <a:effectRef idx="2">
-            <a:schemeClr val="accent1"/>
-          </a:effectRef>
-          <a:fontRef idx="minor">
-            <a:schemeClr val="lt1"/>
-          </a:fontRef>
-        </p:style>
-        <p:txBody>
-          <a:bodyPr rtlCol="0" anchor="ctr"/>
-          <a:lstStyle/>
-          <a:p>
-            <a:pPr algn="ctr"/>
+              <a:t>Metrics, baselines, and the same-checkpoint ablation that isolates causality.</a:t>
+            </a:r>
+          </a:p>
+        </p:txBody>
+      </p:sp>
+      <p:sp>
+        <p:nvSpPr>
+          <p:cNvPr id="6" name="TextBox 5"/>
+          <p:cNvSpPr txBox="1"/>
+          <p:nvPr/>
+        </p:nvSpPr>
+        <p:spPr>
+          <a:xfrm>
+            <a:off x="640080" y="6446520"/>
+            <a:ext cx="9144000" cy="274320"/>
+          </a:xfrm>
+          <a:prstGeom prst="rect">
+            <a:avLst/>
+          </a:prstGeom>
+          <a:noFill/>
+        </p:spPr>
+        <p:txBody>
+          <a:bodyPr wrap="square" lIns="0" rIns="0" tIns="0" bIns="0" anchor="t">
+            <a:spAutoFit/>
+          </a:bodyPr>
+          <a:lstStyle/>
+          <a:p>
+            <a:pPr algn="l"/>
+            <a:r>
+              <a:rPr sz="1000" b="0" i="0">
+                <a:solidFill>
+                  <a:srgbClr val="666677"/>
+                </a:solidFill>
+                <a:latin typeface="Helvetica"/>
+              </a:rPr>
+              <a:t>4. Evaluation Approach  •  Feedback-Augmented RT-DETR  •  Hatem Saadallah &amp; Nour Jennane</a:t>
+            </a:r>
           </a:p>
         </p:txBody>
       </p:sp>
       <p:sp>
         <p:nvSpPr>
           <p:cNvPr id="7" name="TextBox 6"/>
-          <p:cNvSpPr txBox="1"/>
-          <p:nvPr/>
-        </p:nvSpPr>
-        <p:spPr>
-          <a:xfrm>
-            <a:off x="6217920" y="2194560"/>
-            <a:ext cx="5303520" cy="457200"/>
-          </a:xfrm>
-          <a:prstGeom prst="rect">
-            <a:avLst/>
-          </a:prstGeom>
-          <a:noFill/>
-        </p:spPr>
-        <p:txBody>
-          <a:bodyPr wrap="square" lIns="0" rIns="0" tIns="0" bIns="0" anchor="t">
-            <a:spAutoFit/>
-          </a:bodyPr>
-          <a:lstStyle/>
-          <a:p>
-            <a:pPr algn="ctr"/>
-            <a:r>
-              <a:rPr sz="2200" b="1" i="0">
-                <a:solidFill>
-                  <a:srgbClr val="1F6FEB"/>
-                </a:solidFill>
-                <a:latin typeface="Helvetica"/>
-              </a:rPr>
-              <a:t>800 × 800</a:t>
-            </a:r>
-          </a:p>
-        </p:txBody>
-      </p:sp>
-      <p:sp>
-        <p:nvSpPr>
-          <p:cNvPr id="8" name="TextBox 7"/>
-          <p:cNvSpPr txBox="1"/>
-          <p:nvPr/>
-        </p:nvSpPr>
-        <p:spPr>
-          <a:xfrm>
-            <a:off x="6217920" y="2743200"/>
-            <a:ext cx="5303520" cy="1828800"/>
-          </a:xfrm>
-          <a:prstGeom prst="rect">
-            <a:avLst/>
-          </a:prstGeom>
-          <a:noFill/>
-        </p:spPr>
-        <p:txBody>
-          <a:bodyPr wrap="square" lIns="0" rIns="0" tIns="0" bIns="0" anchor="t">
-            <a:spAutoFit/>
-          </a:bodyPr>
-          <a:lstStyle/>
-          <a:p>
-            <a:pPr algn="ctr"/>
-            <a:r>
-              <a:rPr sz="8800" b="1" i="0">
-                <a:solidFill>
-                  <a:srgbClr val="2CA02C"/>
-                </a:solidFill>
-                <a:latin typeface="Helvetica"/>
-              </a:rPr>
-              <a:t>37.01</a:t>
-            </a:r>
-          </a:p>
-        </p:txBody>
-      </p:sp>
-      <p:sp>
-        <p:nvSpPr>
-          <p:cNvPr id="9" name="TextBox 8"/>
-          <p:cNvSpPr txBox="1"/>
-          <p:nvPr/>
-        </p:nvSpPr>
-        <p:spPr>
-          <a:xfrm>
-            <a:off x="640080" y="5120640"/>
-            <a:ext cx="10972800" cy="457200"/>
-          </a:xfrm>
-          <a:prstGeom prst="rect">
-            <a:avLst/>
-          </a:prstGeom>
-          <a:noFill/>
-        </p:spPr>
-        <p:txBody>
-          <a:bodyPr wrap="square" lIns="0" rIns="0" tIns="0" bIns="0" anchor="t">
-            <a:spAutoFit/>
-          </a:bodyPr>
-          <a:lstStyle/>
-          <a:p>
-            <a:pPr algn="ctr"/>
-            <a:r>
-              <a:rPr sz="2200" b="0" i="1">
-                <a:solidFill>
-                  <a:srgbClr val="1A1A2E"/>
-                </a:solidFill>
-                <a:latin typeface="Helvetica"/>
-              </a:rPr>
-              <a:t>+2.76 from more pixels.</a:t>
-            </a:r>
-          </a:p>
-        </p:txBody>
-      </p:sp>
-      <p:sp>
-        <p:nvSpPr>
-          <p:cNvPr id="10" name="TextBox 9"/>
-          <p:cNvSpPr txBox="1"/>
-          <p:nvPr/>
-        </p:nvSpPr>
-        <p:spPr>
-          <a:xfrm>
-            <a:off x="640080" y="5669280"/>
-            <a:ext cx="10972800" cy="457200"/>
-          </a:xfrm>
-          <a:prstGeom prst="rect">
-            <a:avLst/>
-          </a:prstGeom>
-          <a:noFill/>
-        </p:spPr>
-        <p:txBody>
-          <a:bodyPr wrap="square" lIns="0" rIns="0" tIns="0" bIns="0" anchor="t">
-            <a:spAutoFit/>
-          </a:bodyPr>
-          <a:lstStyle/>
-          <a:p>
-            <a:pPr algn="ctr"/>
-            <a:r>
-              <a:rPr sz="1600" b="0" i="0">
-                <a:solidFill>
-                  <a:srgbClr val="666677"/>
-                </a:solidFill>
-                <a:latin typeface="Helvetica"/>
-              </a:rPr>
-              <a:t>Feedback helps. Spatial sampling helps too.</a:t>
-            </a:r>
-          </a:p>
-        </p:txBody>
-      </p:sp>
-      <p:sp>
-        <p:nvSpPr>
-          <p:cNvPr id="11" name="TextBox 10"/>
-          <p:cNvSpPr txBox="1"/>
-          <p:nvPr/>
-        </p:nvSpPr>
-        <p:spPr>
-          <a:xfrm>
-            <a:off x="640080" y="6446520"/>
-            <a:ext cx="7315200" cy="274320"/>
-          </a:xfrm>
-          <a:prstGeom prst="rect">
-            <a:avLst/>
-          </a:prstGeom>
-          <a:noFill/>
-        </p:spPr>
-        <p:txBody>
-          <a:bodyPr wrap="square" lIns="0" rIns="0" tIns="0" bIns="0" anchor="t">
-            <a:spAutoFit/>
-          </a:bodyPr>
-          <a:lstStyle/>
-          <a:p>
-            <a:pPr algn="l"/>
-            <a:r>
-              <a:rPr sz="1000" b="0" i="0">
-                <a:solidFill>
-                  <a:srgbClr val="666677"/>
-                </a:solidFill>
-                <a:latin typeface="Helvetica"/>
-              </a:rPr>
-              <a:t>Feedback-Augmented RT-DETR  •  Hatem Saadallah &amp; Nour Jennane</a:t>
-            </a:r>
-          </a:p>
-        </p:txBody>
-      </p:sp>
-      <p:sp>
-        <p:nvSpPr>
-          <p:cNvPr id="12" name="TextBox 11"/>
           <p:cNvSpPr txBox="1"/>
           <p:nvPr/>
         </p:nvSpPr>
@@ -5171,7 +4507,7 @@
                 </a:solidFill>
                 <a:latin typeface="Helvetica"/>
               </a:rPr>
-              <a:t>14 / 18</a:t>
+              <a:t>14 / 24</a:t>
             </a:r>
           </a:p>
         </p:txBody>
@@ -5224,7 +4560,7 @@
                 </a:solidFill>
                 <a:latin typeface="Helvetica"/>
               </a:rPr>
-              <a:t>Trade-offs</a:t>
+              <a:t>How we evaluate the contribution</a:t>
             </a:r>
           </a:p>
         </p:txBody>
@@ -5280,18 +4616,18 @@
         </p:nvSpPr>
         <p:spPr>
           <a:xfrm>
-            <a:off x="914400" y="2286000"/>
-            <a:ext cx="4846320" cy="3200400"/>
+            <a:off x="640080" y="1417320"/>
+            <a:ext cx="5486400" cy="1691640"/>
           </a:xfrm>
           <a:prstGeom prst="roundRect">
             <a:avLst/>
           </a:prstGeom>
           <a:solidFill>
-            <a:srgbClr val="E8F7E8"/>
+            <a:srgbClr val="F5F5F7"/>
           </a:solidFill>
-          <a:ln w="19050">
+          <a:ln w="9525">
             <a:solidFill>
-              <a:srgbClr val="2CA02C"/>
+              <a:srgbClr val="666677"/>
             </a:solidFill>
           </a:ln>
           <a:effectLst/>
@@ -5326,29 +4662,29 @@
         </p:nvSpPr>
         <p:spPr>
           <a:xfrm>
-            <a:off x="914400" y="2468880"/>
-            <a:ext cx="4846320" cy="914400"/>
-          </a:xfrm>
-          <a:prstGeom prst="rect">
-            <a:avLst/>
-          </a:prstGeom>
-          <a:noFill/>
-        </p:spPr>
-        <p:txBody>
-          <a:bodyPr wrap="square" lIns="0" rIns="0" tIns="0" bIns="0" anchor="t">
-            <a:spAutoFit/>
-          </a:bodyPr>
-          <a:lstStyle/>
-          <a:p>
-            <a:pPr algn="ctr"/>
-            <a:r>
-              <a:rPr sz="8800" b="1" i="0">
-                <a:solidFill>
-                  <a:srgbClr val="2CA02C"/>
-                </a:solidFill>
-                <a:latin typeface="Helvetica"/>
-              </a:rPr>
-              <a:t>+</a:t>
+            <a:off x="868680" y="1554480"/>
+            <a:ext cx="5120640" cy="365760"/>
+          </a:xfrm>
+          <a:prstGeom prst="rect">
+            <a:avLst/>
+          </a:prstGeom>
+          <a:noFill/>
+        </p:spPr>
+        <p:txBody>
+          <a:bodyPr wrap="square" lIns="0" rIns="0" tIns="0" bIns="0" anchor="t">
+            <a:spAutoFit/>
+          </a:bodyPr>
+          <a:lstStyle/>
+          <a:p>
+            <a:pPr algn="l"/>
+            <a:r>
+              <a:rPr sz="1300" b="1" i="0">
+                <a:solidFill>
+                  <a:srgbClr val="1F6FEB"/>
+                </a:solidFill>
+                <a:latin typeface="Helvetica"/>
+              </a:rPr>
+              <a:t>Metrics  (COCO standard)</a:t>
             </a:r>
           </a:p>
         </p:txBody>
@@ -5361,29 +4697,29 @@
         </p:nvSpPr>
         <p:spPr>
           <a:xfrm>
-            <a:off x="914400" y="3931920"/>
-            <a:ext cx="4846320" cy="548640"/>
-          </a:xfrm>
-          <a:prstGeom prst="rect">
-            <a:avLst/>
-          </a:prstGeom>
-          <a:noFill/>
-        </p:spPr>
-        <p:txBody>
-          <a:bodyPr wrap="square" lIns="0" rIns="0" tIns="0" bIns="0" anchor="t">
-            <a:spAutoFit/>
-          </a:bodyPr>
-          <a:lstStyle/>
-          <a:p>
-            <a:pPr algn="ctr"/>
-            <a:r>
-              <a:rPr sz="2200" b="1" i="0">
+            <a:off x="868680" y="1920240"/>
+            <a:ext cx="5120640" cy="365760"/>
+          </a:xfrm>
+          <a:prstGeom prst="rect">
+            <a:avLst/>
+          </a:prstGeom>
+          <a:noFill/>
+        </p:spPr>
+        <p:txBody>
+          <a:bodyPr wrap="square" lIns="0" rIns="0" tIns="0" bIns="0" anchor="t">
+            <a:spAutoFit/>
+          </a:bodyPr>
+          <a:lstStyle/>
+          <a:p>
+            <a:pPr algn="l"/>
+            <a:r>
+              <a:rPr sz="1300" b="0" i="0">
                 <a:solidFill>
                   <a:srgbClr val="1A1A2E"/>
                 </a:solidFill>
                 <a:latin typeface="Helvetica"/>
               </a:rPr>
-              <a:t>Better small-object detection</a:t>
+              <a:t>AP, APₛ, APₘ, APₗ  —  IoU 0.5..0.95</a:t>
             </a:r>
           </a:p>
         </p:txBody>
@@ -5396,53 +4732,88 @@
         </p:nvSpPr>
         <p:spPr>
           <a:xfrm>
-            <a:off x="914400" y="4663440"/>
-            <a:ext cx="4846320" cy="457200"/>
-          </a:xfrm>
-          <a:prstGeom prst="rect">
-            <a:avLst/>
-          </a:prstGeom>
-          <a:noFill/>
-        </p:spPr>
-        <p:txBody>
-          <a:bodyPr wrap="square" lIns="0" rIns="0" tIns="0" bIns="0" anchor="t">
-            <a:spAutoFit/>
-          </a:bodyPr>
-          <a:lstStyle/>
-          <a:p>
-            <a:pPr algn="ctr"/>
-            <a:r>
-              <a:rPr sz="1400" b="0" i="1">
+            <a:off x="868680" y="2286000"/>
+            <a:ext cx="5120640" cy="365760"/>
+          </a:xfrm>
+          <a:prstGeom prst="rect">
+            <a:avLst/>
+          </a:prstGeom>
+          <a:noFill/>
+        </p:spPr>
+        <p:txBody>
+          <a:bodyPr wrap="square" lIns="0" rIns="0" tIns="0" bIns="0" anchor="t">
+            <a:spAutoFit/>
+          </a:bodyPr>
+          <a:lstStyle/>
+          <a:p>
+            <a:pPr algn="l"/>
+            <a:r>
+              <a:rPr sz="1300" b="1" i="0">
+                <a:solidFill>
+                  <a:srgbClr val="1A1A2E"/>
+                </a:solidFill>
+                <a:latin typeface="Helvetica"/>
+              </a:rPr>
+              <a:t>APₛ is the headline metric (area &lt; 32² px)</a:t>
+            </a:r>
+          </a:p>
+        </p:txBody>
+      </p:sp>
+      <p:sp>
+        <p:nvSpPr>
+          <p:cNvPr id="8" name="TextBox 7"/>
+          <p:cNvSpPr txBox="1"/>
+          <p:nvPr/>
+        </p:nvSpPr>
+        <p:spPr>
+          <a:xfrm>
+            <a:off x="868680" y="2651760"/>
+            <a:ext cx="5120640" cy="365760"/>
+          </a:xfrm>
+          <a:prstGeom prst="rect">
+            <a:avLst/>
+          </a:prstGeom>
+          <a:noFill/>
+        </p:spPr>
+        <p:txBody>
+          <a:bodyPr wrap="square" lIns="0" rIns="0" tIns="0" bIns="0" anchor="t">
+            <a:spAutoFit/>
+          </a:bodyPr>
+          <a:lstStyle/>
+          <a:p>
+            <a:pPr algn="l"/>
+            <a:r>
+              <a:rPr sz="1000" b="0" i="1">
                 <a:solidFill>
                   <a:srgbClr val="666677"/>
                 </a:solidFill>
                 <a:latin typeface="Helvetica"/>
               </a:rPr>
-              <a:t>+0.99 APₛ causal contribution</a:t>
-            </a:r>
-          </a:p>
-        </p:txBody>
-      </p:sp>
-      <p:sp>
-        <p:nvSpPr>
-          <p:cNvPr id="8" name="Rounded Rectangle 7"/>
+              <a:t>Others verify we don't degrade easier categories.</a:t>
+            </a:r>
+          </a:p>
+        </p:txBody>
+      </p:sp>
+      <p:sp>
+        <p:nvSpPr>
+          <p:cNvPr id="9" name="Rounded Rectangle 8"/>
           <p:cNvSpPr/>
           <p:nvPr/>
         </p:nvSpPr>
         <p:spPr>
           <a:xfrm>
-            <a:off x="6400800" y="2286000"/>
-            <a:ext cx="4846320" cy="3200400"/>
+            <a:off x="6400800" y="1417320"/>
+            <a:ext cx="5120640" cy="1691640"/>
           </a:xfrm>
           <a:prstGeom prst="roundRect">
             <a:avLst/>
           </a:prstGeom>
           <a:solidFill>
-            <a:srgbClr val="FDECEC"/>
+            <a:srgbClr val="F5F5F7"/>
           </a:solidFill>
-          <a:ln w="19050">
+          <a:ln w="9525">
             <a:solidFill>
-              <a:srgbClr val="D62C2E"/>
+              <a:srgbClr val="666677"/>
             </a:solidFill>
           </a:ln>
           <a:effectLst/>
@@ -5471,14 +4842,154 @@
       </p:sp>
       <p:sp>
         <p:nvSpPr>
-          <p:cNvPr id="9" name="TextBox 8"/>
-          <p:cNvSpPr txBox="1"/>
-          <p:nvPr/>
-        </p:nvSpPr>
-        <p:spPr>
-          <a:xfrm>
-            <a:off x="6400800" y="2468880"/>
-            <a:ext cx="4846320" cy="914400"/>
+          <p:cNvPr id="10" name="TextBox 9"/>
+          <p:cNvSpPr txBox="1"/>
+          <p:nvPr/>
+        </p:nvSpPr>
+        <p:spPr>
+          <a:xfrm>
+            <a:off x="6629400" y="1554480"/>
+            <a:ext cx="4754880" cy="365760"/>
+          </a:xfrm>
+          <a:prstGeom prst="rect">
+            <a:avLst/>
+          </a:prstGeom>
+          <a:noFill/>
+        </p:spPr>
+        <p:txBody>
+          <a:bodyPr wrap="square" lIns="0" rIns="0" tIns="0" bIns="0" anchor="t">
+            <a:spAutoFit/>
+          </a:bodyPr>
+          <a:lstStyle/>
+          <a:p>
+            <a:pPr algn="l"/>
+            <a:r>
+              <a:rPr sz="1300" b="1" i="0">
+                <a:solidFill>
+                  <a:srgbClr val="1F6FEB"/>
+                </a:solidFill>
+                <a:latin typeface="Helvetica"/>
+              </a:rPr>
+              <a:t>Baselines</a:t>
+            </a:r>
+          </a:p>
+        </p:txBody>
+      </p:sp>
+      <p:sp>
+        <p:nvSpPr>
+          <p:cNvPr id="11" name="TextBox 10"/>
+          <p:cNvSpPr txBox="1"/>
+          <p:nvPr/>
+        </p:nvSpPr>
+        <p:spPr>
+          <a:xfrm>
+            <a:off x="6629400" y="1920240"/>
+            <a:ext cx="4754880" cy="365760"/>
+          </a:xfrm>
+          <a:prstGeom prst="rect">
+            <a:avLst/>
+          </a:prstGeom>
+          <a:noFill/>
+        </p:spPr>
+        <p:txBody>
+          <a:bodyPr wrap="square" lIns="0" rIns="0" tIns="0" bIns="0" anchor="t">
+            <a:spAutoFit/>
+          </a:bodyPr>
+          <a:lstStyle/>
+          <a:p>
+            <a:pPr algn="l"/>
+            <a:r>
+              <a:rPr sz="1300" b="0" i="0">
+                <a:solidFill>
+                  <a:srgbClr val="1A1A2E"/>
+                </a:solidFill>
+                <a:latin typeface="Helvetica"/>
+              </a:rPr>
+              <a:t>RT-DETR-R50  (published)</a:t>
+            </a:r>
+          </a:p>
+        </p:txBody>
+      </p:sp>
+      <p:sp>
+        <p:nvSpPr>
+          <p:cNvPr id="12" name="TextBox 11"/>
+          <p:cNvSpPr txBox="1"/>
+          <p:nvPr/>
+        </p:nvSpPr>
+        <p:spPr>
+          <a:xfrm>
+            <a:off x="6629400" y="2286000"/>
+            <a:ext cx="4754880" cy="365760"/>
+          </a:xfrm>
+          <a:prstGeom prst="rect">
+            <a:avLst/>
+          </a:prstGeom>
+          <a:noFill/>
+        </p:spPr>
+        <p:txBody>
+          <a:bodyPr wrap="square" lIns="0" rIns="0" tIns="0" bIns="0" anchor="t">
+            <a:spAutoFit/>
+          </a:bodyPr>
+          <a:lstStyle/>
+          <a:p>
+            <a:pPr algn="l"/>
+            <a:r>
+              <a:rPr sz="1300" b="0" i="0">
+                <a:solidFill>
+                  <a:srgbClr val="1A1A2E"/>
+                </a:solidFill>
+                <a:latin typeface="Helvetica"/>
+              </a:rPr>
+              <a:t>v1 feedback  (before the fix)</a:t>
+            </a:r>
+          </a:p>
+        </p:txBody>
+      </p:sp>
+      <p:sp>
+        <p:nvSpPr>
+          <p:cNvPr id="13" name="TextBox 12"/>
+          <p:cNvSpPr txBox="1"/>
+          <p:nvPr/>
+        </p:nvSpPr>
+        <p:spPr>
+          <a:xfrm>
+            <a:off x="6629400" y="2651760"/>
+            <a:ext cx="4754880" cy="365760"/>
+          </a:xfrm>
+          <a:prstGeom prst="rect">
+            <a:avLst/>
+          </a:prstGeom>
+          <a:noFill/>
+        </p:spPr>
+        <p:txBody>
+          <a:bodyPr wrap="square" lIns="0" rIns="0" tIns="0" bIns="0" anchor="t">
+            <a:spAutoFit/>
+          </a:bodyPr>
+          <a:lstStyle/>
+          <a:p>
+            <a:pPr algn="l"/>
+            <a:r>
+              <a:rPr sz="1300" b="1" i="0">
+                <a:solidFill>
+                  <a:srgbClr val="1A1A2E"/>
+                </a:solidFill>
+                <a:latin typeface="Helvetica"/>
+              </a:rPr>
+              <a:t>v2 feedback  (with the fix)</a:t>
+            </a:r>
+          </a:p>
+        </p:txBody>
+      </p:sp>
+      <p:sp>
+        <p:nvSpPr>
+          <p:cNvPr id="14" name="TextBox 13"/>
+          <p:cNvSpPr txBox="1"/>
+          <p:nvPr/>
+        </p:nvSpPr>
+        <p:spPr>
+          <a:xfrm>
+            <a:off x="640080" y="3337560"/>
+            <a:ext cx="10972800" cy="457200"/>
           </a:xfrm>
           <a:prstGeom prst="rect">
             <a:avLst/>
@@ -5493,27 +5004,51 @@
           <a:p>
             <a:pPr algn="ctr"/>
             <a:r>
-              <a:rPr sz="8800" b="1" i="0">
-                <a:solidFill>
-                  <a:srgbClr val="D62C2E"/>
-                </a:solidFill>
-                <a:latin typeface="Helvetica"/>
-              </a:rPr>
-              <a:t>−</a:t>
-            </a:r>
-          </a:p>
-        </p:txBody>
-      </p:sp>
-      <p:sp>
-        <p:nvSpPr>
-          <p:cNvPr id="10" name="TextBox 9"/>
-          <p:cNvSpPr txBox="1"/>
-          <p:nvPr/>
-        </p:nvSpPr>
-        <p:spPr>
-          <a:xfrm>
-            <a:off x="6400800" y="3931920"/>
-            <a:ext cx="4846320" cy="548640"/>
+              <a:rPr sz="1800" b="1" i="0">
+                <a:solidFill>
+                  <a:srgbClr val="1F6FEB"/>
+                </a:solidFill>
+                <a:latin typeface="Helvetica"/>
+              </a:rPr>
+              <a:t>Same-checkpoint ablation  —  isolates causal contribution</a:t>
+            </a:r>
+          </a:p>
+        </p:txBody>
+      </p:sp>
+      <p:pic>
+        <p:nvPicPr>
+          <p:cNvPr id="15" name="Picture 14" descr="diag_ablation.png"/>
+          <p:cNvPicPr>
+            <a:picLocks noChangeAspect="1"/>
+          </p:cNvPicPr>
+          <p:nvPr/>
+        </p:nvPicPr>
+        <p:blipFill>
+          <a:blip r:embed="rId2"/>
+          <a:stretch>
+            <a:fillRect/>
+          </a:stretch>
+        </p:blipFill>
+        <p:spPr>
+          <a:xfrm>
+            <a:off x="2194560" y="3840480"/>
+            <a:ext cx="7772400" cy="2546658"/>
+          </a:xfrm>
+          <a:prstGeom prst="rect">
+            <a:avLst/>
+          </a:prstGeom>
+        </p:spPr>
+      </p:pic>
+      <p:sp>
+        <p:nvSpPr>
+          <p:cNvPr id="16" name="TextBox 15"/>
+          <p:cNvSpPr txBox="1"/>
+          <p:nvPr/>
+        </p:nvSpPr>
+        <p:spPr>
+          <a:xfrm>
+            <a:off x="640080" y="6080760"/>
+            <a:ext cx="10972800" cy="365760"/>
           </a:xfrm>
           <a:prstGeom prst="rect">
             <a:avLst/>
@@ -5528,62 +5063,27 @@
           <a:p>
             <a:pPr algn="ctr"/>
             <a:r>
-              <a:rPr sz="2200" b="1" i="0">
-                <a:solidFill>
-                  <a:srgbClr val="1A1A2E"/>
-                </a:solidFill>
-                <a:latin typeface="Helvetica"/>
-              </a:rPr>
-              <a:t>Slower inference (FPS drops)</a:t>
-            </a:r>
-          </a:p>
-        </p:txBody>
-      </p:sp>
-      <p:sp>
-        <p:nvSpPr>
-          <p:cNvPr id="11" name="TextBox 10"/>
-          <p:cNvSpPr txBox="1"/>
-          <p:nvPr/>
-        </p:nvSpPr>
-        <p:spPr>
-          <a:xfrm>
-            <a:off x="6400800" y="4663440"/>
-            <a:ext cx="4846320" cy="457200"/>
-          </a:xfrm>
-          <a:prstGeom prst="rect">
-            <a:avLst/>
-          </a:prstGeom>
-          <a:noFill/>
-        </p:spPr>
-        <p:txBody>
-          <a:bodyPr wrap="square" lIns="0" rIns="0" tIns="0" bIns="0" anchor="t">
-            <a:spAutoFit/>
-          </a:bodyPr>
-          <a:lstStyle/>
-          <a:p>
-            <a:pPr algn="ctr"/>
-            <a:r>
-              <a:rPr sz="1400" b="0" i="1">
+              <a:rPr sz="1200" b="0" i="1">
                 <a:solidFill>
                   <a:srgbClr val="666677"/>
                 </a:solidFill>
                 <a:latin typeface="Helvetica"/>
               </a:rPr>
-              <a:t>53 FPS → 26 FPS  (cost is the P2 level, not feedback)</a:t>
-            </a:r>
-          </a:p>
-        </p:txBody>
-      </p:sp>
-      <p:sp>
-        <p:nvSpPr>
-          <p:cNvPr id="12" name="TextBox 11"/>
+              <a:t>Toggle feedback ON / OFF at inference. Identical weights, identical inputs.</a:t>
+            </a:r>
+          </a:p>
+        </p:txBody>
+      </p:sp>
+      <p:sp>
+        <p:nvSpPr>
+          <p:cNvPr id="17" name="TextBox 16"/>
           <p:cNvSpPr txBox="1"/>
           <p:nvPr/>
         </p:nvSpPr>
         <p:spPr>
           <a:xfrm>
             <a:off x="640080" y="6446520"/>
-            <a:ext cx="7315200" cy="274320"/>
+            <a:ext cx="9144000" cy="274320"/>
           </a:xfrm>
           <a:prstGeom prst="rect">
             <a:avLst/>
@@ -5604,14 +5104,14 @@
                 </a:solidFill>
                 <a:latin typeface="Helvetica"/>
               </a:rPr>
-              <a:t>Feedback-Augmented RT-DETR  •  Hatem Saadallah &amp; Nour Jennane</a:t>
-            </a:r>
-          </a:p>
-        </p:txBody>
-      </p:sp>
-      <p:sp>
-        <p:nvSpPr>
-          <p:cNvPr id="13" name="TextBox 12"/>
+              <a:t>4. Evaluation Approach  •  Feedback-Augmented RT-DETR  •  Hatem Saadallah &amp; Nour Jennane</a:t>
+            </a:r>
+          </a:p>
+        </p:txBody>
+      </p:sp>
+      <p:sp>
+        <p:nvSpPr>
+          <p:cNvPr id="18" name="TextBox 17"/>
           <p:cNvSpPr txBox="1"/>
           <p:nvPr/>
         </p:nvSpPr>
@@ -5639,7 +5139,7 @@
                 </a:solidFill>
                 <a:latin typeface="Helvetica"/>
               </a:rPr>
-              <a:t>15 / 18</a:t>
+              <a:t>15 / 24</a:t>
             </a:r>
           </a:p>
         </p:txBody>
@@ -5670,8 +5170,8 @@
         </p:nvSpPr>
         <p:spPr>
           <a:xfrm>
-            <a:off x="640080" y="457200"/>
-            <a:ext cx="10972800" cy="822960"/>
+            <a:off x="731520" y="2377440"/>
+            <a:ext cx="10698480" cy="365760"/>
           </a:xfrm>
           <a:prstGeom prst="rect">
             <a:avLst/>
@@ -5686,13 +5186,13 @@
           <a:p>
             <a:pPr algn="l"/>
             <a:r>
-              <a:rPr sz="3400" b="1" i="0">
+              <a:rPr sz="1400" b="1" i="0">
                 <a:solidFill>
                   <a:srgbClr val="1F6FEB"/>
                 </a:solidFill>
                 <a:latin typeface="Helvetica"/>
               </a:rPr>
-              <a:t>Conclusion</a:t>
+              <a:t>SECTION  5  /  5</a:t>
             </a:r>
           </a:p>
         </p:txBody>
@@ -5705,7 +5205,7 @@
         </p:nvSpPr>
         <p:spPr>
           <a:xfrm>
-            <a:off x="640080" y="1143000"/>
+            <a:off x="731520" y="2788920"/>
             <a:ext cx="640080" cy="54864"/>
           </a:xfrm>
           <a:prstGeom prst="rect">
@@ -5742,44 +5242,36 @@
       </p:sp>
       <p:sp>
         <p:nvSpPr>
-          <p:cNvPr id="4" name="Oval 3"/>
-          <p:cNvSpPr/>
-          <p:nvPr/>
-        </p:nvSpPr>
-        <p:spPr>
-          <a:xfrm>
-            <a:off x="822960" y="1965960"/>
-            <a:ext cx="502920" cy="502920"/>
-          </a:xfrm>
-          <a:prstGeom prst="ellipse">
-            <a:avLst/>
-          </a:prstGeom>
-          <a:solidFill>
-            <a:srgbClr val="1F6FEB"/>
-          </a:solidFill>
-          <a:ln>
-            <a:noFill/>
-          </a:ln>
-        </p:spPr>
-        <p:style>
-          <a:lnRef idx="1">
-            <a:schemeClr val="accent1"/>
-          </a:lnRef>
-          <a:fillRef idx="3">
-            <a:schemeClr val="accent1"/>
-          </a:fillRef>
-          <a:effectRef idx="2">
-            <a:schemeClr val="accent1"/>
-          </a:effectRef>
-          <a:fontRef idx="minor">
-            <a:schemeClr val="lt1"/>
-          </a:fontRef>
-        </p:style>
-        <p:txBody>
-          <a:bodyPr rtlCol="0" anchor="ctr"/>
-          <a:lstStyle/>
-          <a:p>
-            <a:pPr algn="ctr"/>
+          <p:cNvPr id="4" name="TextBox 3"/>
+          <p:cNvSpPr txBox="1"/>
+          <p:nvPr/>
+        </p:nvSpPr>
+        <p:spPr>
+          <a:xfrm>
+            <a:off x="731520" y="2971800"/>
+            <a:ext cx="10698480" cy="1097280"/>
+          </a:xfrm>
+          <a:prstGeom prst="rect">
+            <a:avLst/>
+          </a:prstGeom>
+          <a:noFill/>
+        </p:spPr>
+        <p:txBody>
+          <a:bodyPr wrap="square" lIns="0" rIns="0" tIns="0" bIns="0" anchor="t">
+            <a:spAutoFit/>
+          </a:bodyPr>
+          <a:lstStyle/>
+          <a:p>
+            <a:pPr algn="l"/>
+            <a:r>
+              <a:rPr sz="5400" b="1" i="0">
+                <a:solidFill>
+                  <a:srgbClr val="1A1A2E"/>
+                </a:solidFill>
+                <a:latin typeface="Helvetica"/>
+              </a:rPr>
+              <a:t>Final Results</a:t>
+            </a:r>
           </a:p>
         </p:txBody>
       </p:sp>
@@ -5791,29 +5283,29 @@
         </p:nvSpPr>
         <p:spPr>
           <a:xfrm>
-            <a:off x="822960" y="1993392"/>
-            <a:ext cx="502920" cy="502920"/>
-          </a:xfrm>
-          <a:prstGeom prst="rect">
-            <a:avLst/>
-          </a:prstGeom>
-          <a:noFill/>
-        </p:spPr>
-        <p:txBody>
-          <a:bodyPr wrap="square" lIns="0" rIns="0" tIns="0" bIns="0" anchor="t">
-            <a:spAutoFit/>
-          </a:bodyPr>
-          <a:lstStyle/>
-          <a:p>
-            <a:pPr algn="ctr"/>
-            <a:r>
-              <a:rPr sz="2000" b="1" i="0">
-                <a:solidFill>
-                  <a:srgbClr val="FFFFFF"/>
-                </a:solidFill>
-                <a:latin typeface="Helvetica"/>
-              </a:rPr>
-              <a:t>1</a:t>
+            <a:off x="731520" y="4206240"/>
+            <a:ext cx="10698480" cy="548640"/>
+          </a:xfrm>
+          <a:prstGeom prst="rect">
+            <a:avLst/>
+          </a:prstGeom>
+          <a:noFill/>
+        </p:spPr>
+        <p:txBody>
+          <a:bodyPr wrap="square" lIns="0" rIns="0" tIns="0" bIns="0" anchor="t">
+            <a:spAutoFit/>
+          </a:bodyPr>
+          <a:lstStyle/>
+          <a:p>
+            <a:pPr algn="l"/>
+            <a:r>
+              <a:rPr sz="2000" b="0" i="1">
+                <a:solidFill>
+                  <a:srgbClr val="666677"/>
+                </a:solidFill>
+                <a:latin typeface="Helvetica"/>
+              </a:rPr>
+              <a:t>Training trajectory, the causal effect, robustness, trade-offs, and what's next.</a:t>
             </a:r>
           </a:p>
         </p:txBody>
@@ -5826,8 +5318,8 @@
         </p:nvSpPr>
         <p:spPr>
           <a:xfrm>
-            <a:off x="1554480" y="1874520"/>
-            <a:ext cx="10058400" cy="548640"/>
+            <a:off x="640080" y="6446520"/>
+            <a:ext cx="9144000" cy="274320"/>
           </a:xfrm>
           <a:prstGeom prst="rect">
             <a:avLst/>
@@ -5842,13 +5334,13 @@
           <a:p>
             <a:pPr algn="l"/>
             <a:r>
-              <a:rPr sz="2400" b="1" i="0">
-                <a:solidFill>
-                  <a:srgbClr val="1A1A2E"/>
-                </a:solidFill>
-                <a:latin typeface="Helvetica"/>
-              </a:rPr>
-              <a:t>Feedback improves small-object detection</a:t>
+              <a:rPr sz="1000" b="0" i="0">
+                <a:solidFill>
+                  <a:srgbClr val="666677"/>
+                </a:solidFill>
+                <a:latin typeface="Helvetica"/>
+              </a:rPr>
+              <a:t>5. Final Results  •  Feedback-Augmented RT-DETR  •  Hatem Saadallah &amp; Nour Jennane</a:t>
             </a:r>
           </a:p>
         </p:txBody>
@@ -5856,372 +5348,6 @@
       <p:sp>
         <p:nvSpPr>
           <p:cNvPr id="7" name="TextBox 6"/>
-          <p:cNvSpPr txBox="1"/>
-          <p:nvPr/>
-        </p:nvSpPr>
-        <p:spPr>
-          <a:xfrm>
-            <a:off x="1554480" y="2468880"/>
-            <a:ext cx="10058400" cy="548640"/>
-          </a:xfrm>
-          <a:prstGeom prst="rect">
-            <a:avLst/>
-          </a:prstGeom>
-          <a:noFill/>
-        </p:spPr>
-        <p:txBody>
-          <a:bodyPr wrap="square" lIns="0" rIns="0" tIns="0" bIns="0" anchor="t">
-            <a:spAutoFit/>
-          </a:bodyPr>
-          <a:lstStyle/>
-          <a:p>
-            <a:pPr algn="l"/>
-            <a:r>
-              <a:rPr sz="1500" b="0" i="1">
-                <a:solidFill>
-                  <a:srgbClr val="666677"/>
-                </a:solidFill>
-                <a:latin typeface="Helvetica"/>
-              </a:rPr>
-              <a:t>+0.99 APₛ causal contribution at inference.</a:t>
-            </a:r>
-          </a:p>
-        </p:txBody>
-      </p:sp>
-      <p:sp>
-        <p:nvSpPr>
-          <p:cNvPr id="8" name="Oval 7"/>
-          <p:cNvSpPr/>
-          <p:nvPr/>
-        </p:nvSpPr>
-        <p:spPr>
-          <a:xfrm>
-            <a:off x="822960" y="3383280"/>
-            <a:ext cx="502920" cy="502920"/>
-          </a:xfrm>
-          <a:prstGeom prst="ellipse">
-            <a:avLst/>
-          </a:prstGeom>
-          <a:solidFill>
-            <a:srgbClr val="1F6FEB"/>
-          </a:solidFill>
-          <a:ln>
-            <a:noFill/>
-          </a:ln>
-        </p:spPr>
-        <p:style>
-          <a:lnRef idx="1">
-            <a:schemeClr val="accent1"/>
-          </a:lnRef>
-          <a:fillRef idx="3">
-            <a:schemeClr val="accent1"/>
-          </a:fillRef>
-          <a:effectRef idx="2">
-            <a:schemeClr val="accent1"/>
-          </a:effectRef>
-          <a:fontRef idx="minor">
-            <a:schemeClr val="lt1"/>
-          </a:fontRef>
-        </p:style>
-        <p:txBody>
-          <a:bodyPr rtlCol="0" anchor="ctr"/>
-          <a:lstStyle/>
-          <a:p>
-            <a:pPr algn="ctr"/>
-          </a:p>
-        </p:txBody>
-      </p:sp>
-      <p:sp>
-        <p:nvSpPr>
-          <p:cNvPr id="9" name="TextBox 8"/>
-          <p:cNvSpPr txBox="1"/>
-          <p:nvPr/>
-        </p:nvSpPr>
-        <p:spPr>
-          <a:xfrm>
-            <a:off x="822960" y="3410712"/>
-            <a:ext cx="502920" cy="502920"/>
-          </a:xfrm>
-          <a:prstGeom prst="rect">
-            <a:avLst/>
-          </a:prstGeom>
-          <a:noFill/>
-        </p:spPr>
-        <p:txBody>
-          <a:bodyPr wrap="square" lIns="0" rIns="0" tIns="0" bIns="0" anchor="t">
-            <a:spAutoFit/>
-          </a:bodyPr>
-          <a:lstStyle/>
-          <a:p>
-            <a:pPr algn="ctr"/>
-            <a:r>
-              <a:rPr sz="2000" b="1" i="0">
-                <a:solidFill>
-                  <a:srgbClr val="FFFFFF"/>
-                </a:solidFill>
-                <a:latin typeface="Helvetica"/>
-              </a:rPr>
-              <a:t>2</a:t>
-            </a:r>
-          </a:p>
-        </p:txBody>
-      </p:sp>
-      <p:sp>
-        <p:nvSpPr>
-          <p:cNvPr id="10" name="TextBox 9"/>
-          <p:cNvSpPr txBox="1"/>
-          <p:nvPr/>
-        </p:nvSpPr>
-        <p:spPr>
-          <a:xfrm>
-            <a:off x="1554480" y="3291840"/>
-            <a:ext cx="10058400" cy="548640"/>
-          </a:xfrm>
-          <a:prstGeom prst="rect">
-            <a:avLst/>
-          </a:prstGeom>
-          <a:noFill/>
-        </p:spPr>
-        <p:txBody>
-          <a:bodyPr wrap="square" lIns="0" rIns="0" tIns="0" bIns="0" anchor="t">
-            <a:spAutoFit/>
-          </a:bodyPr>
-          <a:lstStyle/>
-          <a:p>
-            <a:pPr algn="l"/>
-            <a:r>
-              <a:rPr sz="2400" b="1" i="0">
-                <a:solidFill>
-                  <a:srgbClr val="1A1A2E"/>
-                </a:solidFill>
-                <a:latin typeface="Helvetica"/>
-              </a:rPr>
-              <a:t>Only works with proper design</a:t>
-            </a:r>
-          </a:p>
-        </p:txBody>
-      </p:sp>
-      <p:sp>
-        <p:nvSpPr>
-          <p:cNvPr id="11" name="TextBox 10"/>
-          <p:cNvSpPr txBox="1"/>
-          <p:nvPr/>
-        </p:nvSpPr>
-        <p:spPr>
-          <a:xfrm>
-            <a:off x="1554480" y="3886200"/>
-            <a:ext cx="10058400" cy="548640"/>
-          </a:xfrm>
-          <a:prstGeom prst="rect">
-            <a:avLst/>
-          </a:prstGeom>
-          <a:noFill/>
-        </p:spPr>
-        <p:txBody>
-          <a:bodyPr wrap="square" lIns="0" rIns="0" tIns="0" bIns="0" anchor="t">
-            <a:spAutoFit/>
-          </a:bodyPr>
-          <a:lstStyle/>
-          <a:p>
-            <a:pPr algn="l"/>
-            <a:r>
-              <a:rPr sz="1500" b="0" i="1">
-                <a:solidFill>
-                  <a:srgbClr val="666677"/>
-                </a:solidFill>
-                <a:latin typeface="Helvetica"/>
-              </a:rPr>
-              <a:t>Floor the gate; restrict to small-object levels.</a:t>
-            </a:r>
-          </a:p>
-        </p:txBody>
-      </p:sp>
-      <p:sp>
-        <p:nvSpPr>
-          <p:cNvPr id="12" name="Oval 11"/>
-          <p:cNvSpPr/>
-          <p:nvPr/>
-        </p:nvSpPr>
-        <p:spPr>
-          <a:xfrm>
-            <a:off x="822960" y="4800600"/>
-            <a:ext cx="502920" cy="502920"/>
-          </a:xfrm>
-          <a:prstGeom prst="ellipse">
-            <a:avLst/>
-          </a:prstGeom>
-          <a:solidFill>
-            <a:srgbClr val="1F6FEB"/>
-          </a:solidFill>
-          <a:ln>
-            <a:noFill/>
-          </a:ln>
-        </p:spPr>
-        <p:style>
-          <a:lnRef idx="1">
-            <a:schemeClr val="accent1"/>
-          </a:lnRef>
-          <a:fillRef idx="3">
-            <a:schemeClr val="accent1"/>
-          </a:fillRef>
-          <a:effectRef idx="2">
-            <a:schemeClr val="accent1"/>
-          </a:effectRef>
-          <a:fontRef idx="minor">
-            <a:schemeClr val="lt1"/>
-          </a:fontRef>
-        </p:style>
-        <p:txBody>
-          <a:bodyPr rtlCol="0" anchor="ctr"/>
-          <a:lstStyle/>
-          <a:p>
-            <a:pPr algn="ctr"/>
-          </a:p>
-        </p:txBody>
-      </p:sp>
-      <p:sp>
-        <p:nvSpPr>
-          <p:cNvPr id="13" name="TextBox 12"/>
-          <p:cNvSpPr txBox="1"/>
-          <p:nvPr/>
-        </p:nvSpPr>
-        <p:spPr>
-          <a:xfrm>
-            <a:off x="822960" y="4828032"/>
-            <a:ext cx="502920" cy="502920"/>
-          </a:xfrm>
-          <a:prstGeom prst="rect">
-            <a:avLst/>
-          </a:prstGeom>
-          <a:noFill/>
-        </p:spPr>
-        <p:txBody>
-          <a:bodyPr wrap="square" lIns="0" rIns="0" tIns="0" bIns="0" anchor="t">
-            <a:spAutoFit/>
-          </a:bodyPr>
-          <a:lstStyle/>
-          <a:p>
-            <a:pPr algn="ctr"/>
-            <a:r>
-              <a:rPr sz="2000" b="1" i="0">
-                <a:solidFill>
-                  <a:srgbClr val="FFFFFF"/>
-                </a:solidFill>
-                <a:latin typeface="Helvetica"/>
-              </a:rPr>
-              <a:t>3</a:t>
-            </a:r>
-          </a:p>
-        </p:txBody>
-      </p:sp>
-      <p:sp>
-        <p:nvSpPr>
-          <p:cNvPr id="14" name="TextBox 13"/>
-          <p:cNvSpPr txBox="1"/>
-          <p:nvPr/>
-        </p:nvSpPr>
-        <p:spPr>
-          <a:xfrm>
-            <a:off x="1554480" y="4709160"/>
-            <a:ext cx="10058400" cy="548640"/>
-          </a:xfrm>
-          <a:prstGeom prst="rect">
-            <a:avLst/>
-          </a:prstGeom>
-          <a:noFill/>
-        </p:spPr>
-        <p:txBody>
-          <a:bodyPr wrap="square" lIns="0" rIns="0" tIns="0" bIns="0" anchor="t">
-            <a:spAutoFit/>
-          </a:bodyPr>
-          <a:lstStyle/>
-          <a:p>
-            <a:pPr algn="l"/>
-            <a:r>
-              <a:rPr sz="2400" b="1" i="0">
-                <a:solidFill>
-                  <a:srgbClr val="1A1A2E"/>
-                </a:solidFill>
-                <a:latin typeface="Helvetica"/>
-              </a:rPr>
-              <a:t>Modest but real</a:t>
-            </a:r>
-          </a:p>
-        </p:txBody>
-      </p:sp>
-      <p:sp>
-        <p:nvSpPr>
-          <p:cNvPr id="15" name="TextBox 14"/>
-          <p:cNvSpPr txBox="1"/>
-          <p:nvPr/>
-        </p:nvSpPr>
-        <p:spPr>
-          <a:xfrm>
-            <a:off x="1554480" y="5303520"/>
-            <a:ext cx="10058400" cy="548640"/>
-          </a:xfrm>
-          <a:prstGeom prst="rect">
-            <a:avLst/>
-          </a:prstGeom>
-          <a:noFill/>
-        </p:spPr>
-        <p:txBody>
-          <a:bodyPr wrap="square" lIns="0" rIns="0" tIns="0" bIns="0" anchor="t">
-            <a:spAutoFit/>
-          </a:bodyPr>
-          <a:lstStyle/>
-          <a:p>
-            <a:pPr algn="l"/>
-            <a:r>
-              <a:rPr sz="1500" b="0" i="1">
-                <a:solidFill>
-                  <a:srgbClr val="666677"/>
-                </a:solidFill>
-                <a:latin typeface="Helvetica"/>
-              </a:rPr>
-              <a:t>Consistent across metrics; reproducible from the same checkpoint.</a:t>
-            </a:r>
-          </a:p>
-        </p:txBody>
-      </p:sp>
-      <p:sp>
-        <p:nvSpPr>
-          <p:cNvPr id="16" name="TextBox 15"/>
-          <p:cNvSpPr txBox="1"/>
-          <p:nvPr/>
-        </p:nvSpPr>
-        <p:spPr>
-          <a:xfrm>
-            <a:off x="640080" y="6446520"/>
-            <a:ext cx="7315200" cy="274320"/>
-          </a:xfrm>
-          <a:prstGeom prst="rect">
-            <a:avLst/>
-          </a:prstGeom>
-          <a:noFill/>
-        </p:spPr>
-        <p:txBody>
-          <a:bodyPr wrap="square" lIns="0" rIns="0" tIns="0" bIns="0" anchor="t">
-            <a:spAutoFit/>
-          </a:bodyPr>
-          <a:lstStyle/>
-          <a:p>
-            <a:pPr algn="l"/>
-            <a:r>
-              <a:rPr sz="1000" b="0" i="0">
-                <a:solidFill>
-                  <a:srgbClr val="666677"/>
-                </a:solidFill>
-                <a:latin typeface="Helvetica"/>
-              </a:rPr>
-              <a:t>Feedback-Augmented RT-DETR  •  Hatem Saadallah &amp; Nour Jennane</a:t>
-            </a:r>
-          </a:p>
-        </p:txBody>
-      </p:sp>
-      <p:sp>
-        <p:nvSpPr>
-          <p:cNvPr id="17" name="TextBox 16"/>
           <p:cNvSpPr txBox="1"/>
           <p:nvPr/>
         </p:nvSpPr>
@@ -6249,7 +5375,7 @@
                 </a:solidFill>
                 <a:latin typeface="Helvetica"/>
               </a:rPr>
-              <a:t>16 / 18</a:t>
+              <a:t>16 / 24</a:t>
             </a:r>
           </a:p>
         </p:txBody>
@@ -6302,7 +5428,7 @@
                 </a:solidFill>
                 <a:latin typeface="Helvetica"/>
               </a:rPr>
-              <a:t>Limitations</a:t>
+              <a:t>Training: v2 climbs faster, ends higher</a:t>
             </a:r>
           </a:p>
         </p:txBody>
@@ -6350,80 +5476,61 @@
           </a:p>
         </p:txBody>
       </p:sp>
-      <p:sp>
-        <p:nvSpPr>
-          <p:cNvPr id="4" name="Oval 3"/>
-          <p:cNvSpPr/>
-          <p:nvPr/>
-        </p:nvSpPr>
-        <p:spPr>
-          <a:xfrm>
-            <a:off x="822960" y="1993392"/>
-            <a:ext cx="457200" cy="457200"/>
-          </a:xfrm>
-          <a:prstGeom prst="ellipse">
-            <a:avLst/>
-          </a:prstGeom>
-          <a:solidFill>
-            <a:srgbClr val="666677"/>
-          </a:solidFill>
-          <a:ln>
-            <a:noFill/>
-          </a:ln>
-        </p:spPr>
-        <p:style>
-          <a:lnRef idx="1">
-            <a:schemeClr val="accent1"/>
-          </a:lnRef>
-          <a:fillRef idx="3">
-            <a:schemeClr val="accent1"/>
-          </a:fillRef>
-          <a:effectRef idx="2">
-            <a:schemeClr val="accent1"/>
-          </a:effectRef>
-          <a:fontRef idx="minor">
-            <a:schemeClr val="lt1"/>
-          </a:fontRef>
-        </p:style>
-        <p:txBody>
-          <a:bodyPr rtlCol="0" anchor="ctr"/>
+      <p:pic>
+        <p:nvPicPr>
+          <p:cNvPr id="4" name="Picture 3" descr="learning_curves.png"/>
+          <p:cNvPicPr>
+            <a:picLocks noChangeAspect="1"/>
+          </p:cNvPicPr>
+          <p:nvPr/>
+        </p:nvPicPr>
+        <p:blipFill>
+          <a:blip r:embed="rId2"/>
+          <a:stretch>
+            <a:fillRect/>
+          </a:stretch>
+        </p:blipFill>
+        <p:spPr>
+          <a:xfrm>
+            <a:off x="2194560" y="1463040"/>
+            <a:ext cx="7772400" cy="4718957"/>
+          </a:xfrm>
+          <a:prstGeom prst="rect">
+            <a:avLst/>
+          </a:prstGeom>
+        </p:spPr>
+      </p:pic>
+      <p:sp>
+        <p:nvSpPr>
+          <p:cNvPr id="5" name="TextBox 4"/>
+          <p:cNvSpPr txBox="1"/>
+          <p:nvPr/>
+        </p:nvSpPr>
+        <p:spPr>
+          <a:xfrm>
+            <a:off x="640080" y="5852160"/>
+            <a:ext cx="10972800" cy="365760"/>
+          </a:xfrm>
+          <a:prstGeom prst="rect">
+            <a:avLst/>
+          </a:prstGeom>
+          <a:noFill/>
+        </p:spPr>
+        <p:txBody>
+          <a:bodyPr wrap="square" lIns="0" rIns="0" tIns="0" bIns="0" anchor="t">
+            <a:spAutoFit/>
+          </a:bodyPr>
           <a:lstStyle/>
           <a:p>
             <a:pPr algn="ctr"/>
-          </a:p>
-        </p:txBody>
-      </p:sp>
-      <p:sp>
-        <p:nvSpPr>
-          <p:cNvPr id="5" name="TextBox 4"/>
-          <p:cNvSpPr txBox="1"/>
-          <p:nvPr/>
-        </p:nvSpPr>
-        <p:spPr>
-          <a:xfrm>
-            <a:off x="822960" y="2020824"/>
-            <a:ext cx="457200" cy="457200"/>
-          </a:xfrm>
-          <a:prstGeom prst="rect">
-            <a:avLst/>
-          </a:prstGeom>
-          <a:noFill/>
-        </p:spPr>
-        <p:txBody>
-          <a:bodyPr wrap="square" lIns="0" rIns="0" tIns="0" bIns="0" anchor="t">
-            <a:spAutoFit/>
-          </a:bodyPr>
-          <a:lstStyle/>
-          <a:p>
-            <a:pPr algn="ctr"/>
-            <a:r>
-              <a:rPr sz="2000" b="1" i="0">
-                <a:solidFill>
-                  <a:srgbClr val="FFFFFF"/>
-                </a:solidFill>
-                <a:latin typeface="Helvetica"/>
-              </a:rPr>
-              <a:t>—</a:t>
+            <a:r>
+              <a:rPr sz="1400" b="0" i="1">
+                <a:solidFill>
+                  <a:srgbClr val="666677"/>
+                </a:solidFill>
+                <a:latin typeface="Helvetica"/>
+              </a:rPr>
+              <a:t>v2 first crosses v1's final 33.91 at epoch 8 — four epochs early.</a:t>
             </a:r>
           </a:p>
         </p:txBody>
@@ -6436,8 +5543,8 @@
         </p:nvSpPr>
         <p:spPr>
           <a:xfrm>
-            <a:off x="1554480" y="1874520"/>
-            <a:ext cx="10058400" cy="548640"/>
+            <a:off x="640080" y="6446520"/>
+            <a:ext cx="9144000" cy="274320"/>
           </a:xfrm>
           <a:prstGeom prst="rect">
             <a:avLst/>
@@ -6452,13 +5559,13 @@
           <a:p>
             <a:pPr algn="l"/>
             <a:r>
-              <a:rPr sz="2400" b="1" i="0">
-                <a:solidFill>
-                  <a:srgbClr val="1A1A2E"/>
-                </a:solidFill>
-                <a:latin typeface="Helvetica"/>
-              </a:rPr>
-              <a:t>Single training run</a:t>
+              <a:rPr sz="1000" b="0" i="0">
+                <a:solidFill>
+                  <a:srgbClr val="666677"/>
+                </a:solidFill>
+                <a:latin typeface="Helvetica"/>
+              </a:rPr>
+              <a:t>5. Final Results  •  Feedback-Augmented RT-DETR  •  Hatem Saadallah &amp; Nour Jennane</a:t>
             </a:r>
           </a:p>
         </p:txBody>
@@ -6466,372 +5573,6 @@
       <p:sp>
         <p:nvSpPr>
           <p:cNvPr id="7" name="TextBox 6"/>
-          <p:cNvSpPr txBox="1"/>
-          <p:nvPr/>
-        </p:nvSpPr>
-        <p:spPr>
-          <a:xfrm>
-            <a:off x="1554480" y="2468880"/>
-            <a:ext cx="10058400" cy="548640"/>
-          </a:xfrm>
-          <a:prstGeom prst="rect">
-            <a:avLst/>
-          </a:prstGeom>
-          <a:noFill/>
-        </p:spPr>
-        <p:txBody>
-          <a:bodyPr wrap="square" lIns="0" rIns="0" tIns="0" bIns="0" anchor="t">
-            <a:spAutoFit/>
-          </a:bodyPr>
-          <a:lstStyle/>
-          <a:p>
-            <a:pPr algn="l"/>
-            <a:r>
-              <a:rPr sz="1500" b="0" i="1">
-                <a:solidFill>
-                  <a:srgbClr val="666677"/>
-                </a:solidFill>
-                <a:latin typeface="Helvetica"/>
-              </a:rPr>
-              <a:t>no multi-seed variance</a:t>
-            </a:r>
-          </a:p>
-        </p:txBody>
-      </p:sp>
-      <p:sp>
-        <p:nvSpPr>
-          <p:cNvPr id="8" name="Oval 7"/>
-          <p:cNvSpPr/>
-          <p:nvPr/>
-        </p:nvSpPr>
-        <p:spPr>
-          <a:xfrm>
-            <a:off x="822960" y="3410712"/>
-            <a:ext cx="457200" cy="457200"/>
-          </a:xfrm>
-          <a:prstGeom prst="ellipse">
-            <a:avLst/>
-          </a:prstGeom>
-          <a:solidFill>
-            <a:srgbClr val="666677"/>
-          </a:solidFill>
-          <a:ln>
-            <a:noFill/>
-          </a:ln>
-        </p:spPr>
-        <p:style>
-          <a:lnRef idx="1">
-            <a:schemeClr val="accent1"/>
-          </a:lnRef>
-          <a:fillRef idx="3">
-            <a:schemeClr val="accent1"/>
-          </a:fillRef>
-          <a:effectRef idx="2">
-            <a:schemeClr val="accent1"/>
-          </a:effectRef>
-          <a:fontRef idx="minor">
-            <a:schemeClr val="lt1"/>
-          </a:fontRef>
-        </p:style>
-        <p:txBody>
-          <a:bodyPr rtlCol="0" anchor="ctr"/>
-          <a:lstStyle/>
-          <a:p>
-            <a:pPr algn="ctr"/>
-          </a:p>
-        </p:txBody>
-      </p:sp>
-      <p:sp>
-        <p:nvSpPr>
-          <p:cNvPr id="9" name="TextBox 8"/>
-          <p:cNvSpPr txBox="1"/>
-          <p:nvPr/>
-        </p:nvSpPr>
-        <p:spPr>
-          <a:xfrm>
-            <a:off x="822960" y="3438144"/>
-            <a:ext cx="457200" cy="457200"/>
-          </a:xfrm>
-          <a:prstGeom prst="rect">
-            <a:avLst/>
-          </a:prstGeom>
-          <a:noFill/>
-        </p:spPr>
-        <p:txBody>
-          <a:bodyPr wrap="square" lIns="0" rIns="0" tIns="0" bIns="0" anchor="t">
-            <a:spAutoFit/>
-          </a:bodyPr>
-          <a:lstStyle/>
-          <a:p>
-            <a:pPr algn="ctr"/>
-            <a:r>
-              <a:rPr sz="2000" b="1" i="0">
-                <a:solidFill>
-                  <a:srgbClr val="FFFFFF"/>
-                </a:solidFill>
-                <a:latin typeface="Helvetica"/>
-              </a:rPr>
-              <a:t>—</a:t>
-            </a:r>
-          </a:p>
-        </p:txBody>
-      </p:sp>
-      <p:sp>
-        <p:nvSpPr>
-          <p:cNvPr id="10" name="TextBox 9"/>
-          <p:cNvSpPr txBox="1"/>
-          <p:nvPr/>
-        </p:nvSpPr>
-        <p:spPr>
-          <a:xfrm>
-            <a:off x="1554480" y="3291840"/>
-            <a:ext cx="10058400" cy="548640"/>
-          </a:xfrm>
-          <a:prstGeom prst="rect">
-            <a:avLst/>
-          </a:prstGeom>
-          <a:noFill/>
-        </p:spPr>
-        <p:txBody>
-          <a:bodyPr wrap="square" lIns="0" rIns="0" tIns="0" bIns="0" anchor="t">
-            <a:spAutoFit/>
-          </a:bodyPr>
-          <a:lstStyle/>
-          <a:p>
-            <a:pPr algn="l"/>
-            <a:r>
-              <a:rPr sz="2400" b="1" i="0">
-                <a:solidFill>
-                  <a:srgbClr val="1A1A2E"/>
-                </a:solidFill>
-                <a:latin typeface="Helvetica"/>
-              </a:rPr>
-              <a:t>Below paper baseline</a:t>
-            </a:r>
-          </a:p>
-        </p:txBody>
-      </p:sp>
-      <p:sp>
-        <p:nvSpPr>
-          <p:cNvPr id="11" name="TextBox 10"/>
-          <p:cNvSpPr txBox="1"/>
-          <p:nvPr/>
-        </p:nvSpPr>
-        <p:spPr>
-          <a:xfrm>
-            <a:off x="1554480" y="3886200"/>
-            <a:ext cx="10058400" cy="548640"/>
-          </a:xfrm>
-          <a:prstGeom prst="rect">
-            <a:avLst/>
-          </a:prstGeom>
-          <a:noFill/>
-        </p:spPr>
-        <p:txBody>
-          <a:bodyPr wrap="square" lIns="0" rIns="0" tIns="0" bIns="0" anchor="t">
-            <a:spAutoFit/>
-          </a:bodyPr>
-          <a:lstStyle/>
-          <a:p>
-            <a:pPr algn="l"/>
-            <a:r>
-              <a:rPr sz="1500" b="0" i="1">
-                <a:solidFill>
-                  <a:srgbClr val="666677"/>
-                </a:solidFill>
-                <a:latin typeface="Helvetica"/>
-              </a:rPr>
-              <a:t>13-epoch finetune vs 72-epoch from scratch</a:t>
-            </a:r>
-          </a:p>
-        </p:txBody>
-      </p:sp>
-      <p:sp>
-        <p:nvSpPr>
-          <p:cNvPr id="12" name="Oval 11"/>
-          <p:cNvSpPr/>
-          <p:nvPr/>
-        </p:nvSpPr>
-        <p:spPr>
-          <a:xfrm>
-            <a:off x="822960" y="4828032"/>
-            <a:ext cx="457200" cy="457200"/>
-          </a:xfrm>
-          <a:prstGeom prst="ellipse">
-            <a:avLst/>
-          </a:prstGeom>
-          <a:solidFill>
-            <a:srgbClr val="666677"/>
-          </a:solidFill>
-          <a:ln>
-            <a:noFill/>
-          </a:ln>
-        </p:spPr>
-        <p:style>
-          <a:lnRef idx="1">
-            <a:schemeClr val="accent1"/>
-          </a:lnRef>
-          <a:fillRef idx="3">
-            <a:schemeClr val="accent1"/>
-          </a:fillRef>
-          <a:effectRef idx="2">
-            <a:schemeClr val="accent1"/>
-          </a:effectRef>
-          <a:fontRef idx="minor">
-            <a:schemeClr val="lt1"/>
-          </a:fontRef>
-        </p:style>
-        <p:txBody>
-          <a:bodyPr rtlCol="0" anchor="ctr"/>
-          <a:lstStyle/>
-          <a:p>
-            <a:pPr algn="ctr"/>
-          </a:p>
-        </p:txBody>
-      </p:sp>
-      <p:sp>
-        <p:nvSpPr>
-          <p:cNvPr id="13" name="TextBox 12"/>
-          <p:cNvSpPr txBox="1"/>
-          <p:nvPr/>
-        </p:nvSpPr>
-        <p:spPr>
-          <a:xfrm>
-            <a:off x="822960" y="4855464"/>
-            <a:ext cx="457200" cy="457200"/>
-          </a:xfrm>
-          <a:prstGeom prst="rect">
-            <a:avLst/>
-          </a:prstGeom>
-          <a:noFill/>
-        </p:spPr>
-        <p:txBody>
-          <a:bodyPr wrap="square" lIns="0" rIns="0" tIns="0" bIns="0" anchor="t">
-            <a:spAutoFit/>
-          </a:bodyPr>
-          <a:lstStyle/>
-          <a:p>
-            <a:pPr algn="ctr"/>
-            <a:r>
-              <a:rPr sz="2000" b="1" i="0">
-                <a:solidFill>
-                  <a:srgbClr val="FFFFFF"/>
-                </a:solidFill>
-                <a:latin typeface="Helvetica"/>
-              </a:rPr>
-              <a:t>—</a:t>
-            </a:r>
-          </a:p>
-        </p:txBody>
-      </p:sp>
-      <p:sp>
-        <p:nvSpPr>
-          <p:cNvPr id="14" name="TextBox 13"/>
-          <p:cNvSpPr txBox="1"/>
-          <p:nvPr/>
-        </p:nvSpPr>
-        <p:spPr>
-          <a:xfrm>
-            <a:off x="1554480" y="4709160"/>
-            <a:ext cx="10058400" cy="548640"/>
-          </a:xfrm>
-          <a:prstGeom prst="rect">
-            <a:avLst/>
-          </a:prstGeom>
-          <a:noFill/>
-        </p:spPr>
-        <p:txBody>
-          <a:bodyPr wrap="square" lIns="0" rIns="0" tIns="0" bIns="0" anchor="t">
-            <a:spAutoFit/>
-          </a:bodyPr>
-          <a:lstStyle/>
-          <a:p>
-            <a:pPr algn="l"/>
-            <a:r>
-              <a:rPr sz="2400" b="1" i="0">
-                <a:solidFill>
-                  <a:srgbClr val="1A1A2E"/>
-                </a:solidFill>
-                <a:latin typeface="Helvetica"/>
-              </a:rPr>
-              <a:t>Increased latency</a:t>
-            </a:r>
-          </a:p>
-        </p:txBody>
-      </p:sp>
-      <p:sp>
-        <p:nvSpPr>
-          <p:cNvPr id="15" name="TextBox 14"/>
-          <p:cNvSpPr txBox="1"/>
-          <p:nvPr/>
-        </p:nvSpPr>
-        <p:spPr>
-          <a:xfrm>
-            <a:off x="1554480" y="5303520"/>
-            <a:ext cx="10058400" cy="548640"/>
-          </a:xfrm>
-          <a:prstGeom prst="rect">
-            <a:avLst/>
-          </a:prstGeom>
-          <a:noFill/>
-        </p:spPr>
-        <p:txBody>
-          <a:bodyPr wrap="square" lIns="0" rIns="0" tIns="0" bIns="0" anchor="t">
-            <a:spAutoFit/>
-          </a:bodyPr>
-          <a:lstStyle/>
-          <a:p>
-            <a:pPr algn="l"/>
-            <a:r>
-              <a:rPr sz="1500" b="0" i="1">
-                <a:solidFill>
-                  <a:srgbClr val="666677"/>
-                </a:solidFill>
-                <a:latin typeface="Helvetica"/>
-              </a:rPr>
-              <a:t>~2× slower (cost is the P2 level)</a:t>
-            </a:r>
-          </a:p>
-        </p:txBody>
-      </p:sp>
-      <p:sp>
-        <p:nvSpPr>
-          <p:cNvPr id="16" name="TextBox 15"/>
-          <p:cNvSpPr txBox="1"/>
-          <p:nvPr/>
-        </p:nvSpPr>
-        <p:spPr>
-          <a:xfrm>
-            <a:off x="640080" y="6446520"/>
-            <a:ext cx="7315200" cy="274320"/>
-          </a:xfrm>
-          <a:prstGeom prst="rect">
-            <a:avLst/>
-          </a:prstGeom>
-          <a:noFill/>
-        </p:spPr>
-        <p:txBody>
-          <a:bodyPr wrap="square" lIns="0" rIns="0" tIns="0" bIns="0" anchor="t">
-            <a:spAutoFit/>
-          </a:bodyPr>
-          <a:lstStyle/>
-          <a:p>
-            <a:pPr algn="l"/>
-            <a:r>
-              <a:rPr sz="1000" b="0" i="0">
-                <a:solidFill>
-                  <a:srgbClr val="666677"/>
-                </a:solidFill>
-                <a:latin typeface="Helvetica"/>
-              </a:rPr>
-              <a:t>Feedback-Augmented RT-DETR  •  Hatem Saadallah &amp; Nour Jennane</a:t>
-            </a:r>
-          </a:p>
-        </p:txBody>
-      </p:sp>
-      <p:sp>
-        <p:nvSpPr>
-          <p:cNvPr id="17" name="TextBox 16"/>
           <p:cNvSpPr txBox="1"/>
           <p:nvPr/>
         </p:nvSpPr>
@@ -6859,7 +5600,7 @@
                 </a:solidFill>
                 <a:latin typeface="Helvetica"/>
               </a:rPr>
-              <a:t>17 / 18</a:t>
+              <a:t>17 / 24</a:t>
             </a:r>
           </a:p>
         </p:txBody>
@@ -6890,78 +5631,43 @@
         </p:nvSpPr>
         <p:spPr>
           <a:xfrm>
-            <a:off x="640080" y="2194560"/>
-            <a:ext cx="10972800" cy="1371600"/>
-          </a:xfrm>
-          <a:prstGeom prst="rect">
-            <a:avLst/>
-          </a:prstGeom>
-          <a:noFill/>
-        </p:spPr>
-        <p:txBody>
-          <a:bodyPr wrap="square" lIns="0" rIns="0" tIns="0" bIns="0" anchor="t">
-            <a:spAutoFit/>
-          </a:bodyPr>
-          <a:lstStyle/>
-          <a:p>
-            <a:pPr algn="ctr"/>
-            <a:r>
-              <a:rPr sz="8000" b="1" i="0">
-                <a:solidFill>
-                  <a:srgbClr val="1A1A2E"/>
-                </a:solidFill>
-                <a:latin typeface="Helvetica"/>
-              </a:rPr>
-              <a:t>Thank you.</a:t>
-            </a:r>
-          </a:p>
-        </p:txBody>
-      </p:sp>
-      <p:sp>
-        <p:nvSpPr>
-          <p:cNvPr id="3" name="TextBox 2"/>
-          <p:cNvSpPr txBox="1"/>
-          <p:nvPr/>
-        </p:nvSpPr>
-        <p:spPr>
-          <a:xfrm>
-            <a:off x="640080" y="3840480"/>
-            <a:ext cx="10972800" cy="731520"/>
-          </a:xfrm>
-          <a:prstGeom prst="rect">
-            <a:avLst/>
-          </a:prstGeom>
-          <a:noFill/>
-        </p:spPr>
-        <p:txBody>
-          <a:bodyPr wrap="square" lIns="0" rIns="0" tIns="0" bIns="0" anchor="t">
-            <a:spAutoFit/>
-          </a:bodyPr>
-          <a:lstStyle/>
-          <a:p>
-            <a:pPr algn="ctr"/>
-            <a:r>
-              <a:rPr sz="4000" b="0" i="0">
+            <a:off x="640080" y="457200"/>
+            <a:ext cx="10972800" cy="822960"/>
+          </a:xfrm>
+          <a:prstGeom prst="rect">
+            <a:avLst/>
+          </a:prstGeom>
+          <a:noFill/>
+        </p:spPr>
+        <p:txBody>
+          <a:bodyPr wrap="square" lIns="0" rIns="0" tIns="0" bIns="0" anchor="t">
+            <a:spAutoFit/>
+          </a:bodyPr>
+          <a:lstStyle/>
+          <a:p>
+            <a:pPr algn="l"/>
+            <a:r>
+              <a:rPr sz="3400" b="1" i="0">
                 <a:solidFill>
                   <a:srgbClr val="1F6FEB"/>
                 </a:solidFill>
                 <a:latin typeface="Helvetica"/>
               </a:rPr>
-              <a:t>Questions?</a:t>
-            </a:r>
-          </a:p>
-        </p:txBody>
-      </p:sp>
-      <p:sp>
-        <p:nvSpPr>
-          <p:cNvPr id="4" name="Rectangle 3"/>
+              <a:t>Final performance (with feedback ON)</a:t>
+            </a:r>
+          </a:p>
+        </p:txBody>
+      </p:sp>
+      <p:sp>
+        <p:nvSpPr>
+          <p:cNvPr id="3" name="Rectangle 2"/>
           <p:cNvSpPr/>
           <p:nvPr/>
         </p:nvSpPr>
         <p:spPr>
           <a:xfrm>
-            <a:off x="5641848" y="4937760"/>
-            <a:ext cx="914400" cy="54864"/>
+            <a:off x="640080" y="1143000"/>
+            <a:ext cx="640080" cy="54864"/>
           </a:xfrm>
           <a:prstGeom prst="rect">
             <a:avLst/>
@@ -6997,14 +5703,60 @@
       </p:sp>
       <p:sp>
         <p:nvSpPr>
+          <p:cNvPr id="4" name="Rounded Rectangle 3"/>
+          <p:cNvSpPr/>
+          <p:nvPr/>
+        </p:nvSpPr>
+        <p:spPr>
+          <a:xfrm>
+            <a:off x="914400" y="2011680"/>
+            <a:ext cx="4846320" cy="3200400"/>
+          </a:xfrm>
+          <a:prstGeom prst="roundRect">
+            <a:avLst/>
+          </a:prstGeom>
+          <a:solidFill>
+            <a:srgbClr val="F5F5F7"/>
+          </a:solidFill>
+          <a:ln w="9525">
+            <a:solidFill>
+              <a:srgbClr val="666677"/>
+            </a:solidFill>
+          </a:ln>
+          <a:effectLst/>
+        </p:spPr>
+        <p:style>
+          <a:lnRef idx="1">
+            <a:schemeClr val="accent1"/>
+          </a:lnRef>
+          <a:fillRef idx="3">
+            <a:schemeClr val="accent1"/>
+          </a:fillRef>
+          <a:effectRef idx="2">
+            <a:schemeClr val="accent1"/>
+          </a:effectRef>
+          <a:fontRef idx="minor">
+            <a:schemeClr val="lt1"/>
+          </a:fontRef>
+        </p:style>
+        <p:txBody>
+          <a:bodyPr rtlCol="0" anchor="ctr"/>
+          <a:lstStyle/>
+          <a:p>
+            <a:pPr algn="ctr"/>
+          </a:p>
+        </p:txBody>
+      </p:sp>
+      <p:sp>
+        <p:nvSpPr>
           <p:cNvPr id="5" name="TextBox 4"/>
           <p:cNvSpPr txBox="1"/>
           <p:nvPr/>
         </p:nvSpPr>
         <p:spPr>
           <a:xfrm>
-            <a:off x="640080" y="5212080"/>
-            <a:ext cx="10972800" cy="365760"/>
+            <a:off x="914400" y="2194560"/>
+            <a:ext cx="4846320" cy="457200"/>
           </a:xfrm>
           <a:prstGeom prst="rect">
             <a:avLst/>
@@ -7019,13 +5771,13 @@
           <a:p>
             <a:pPr algn="ctr"/>
             <a:r>
-              <a:rPr sz="1600" b="0" i="0">
-                <a:solidFill>
-                  <a:srgbClr val="1A1A2E"/>
-                </a:solidFill>
-                <a:latin typeface="Helvetica"/>
-              </a:rPr>
-              <a:t>Hatem Saadallah  ·  Nour Jennane</a:t>
+              <a:rPr sz="2400" b="0" i="0">
+                <a:solidFill>
+                  <a:srgbClr val="666677"/>
+                </a:solidFill>
+                <a:latin typeface="Helvetica"/>
+              </a:rPr>
+              <a:t>v1</a:t>
             </a:r>
           </a:p>
         </p:txBody>
@@ -7038,8 +5790,710 @@
         </p:nvSpPr>
         <p:spPr>
           <a:xfrm>
+            <a:off x="914400" y="2697480"/>
+            <a:ext cx="4846320" cy="1828800"/>
+          </a:xfrm>
+          <a:prstGeom prst="rect">
+            <a:avLst/>
+          </a:prstGeom>
+          <a:noFill/>
+        </p:spPr>
+        <p:txBody>
+          <a:bodyPr wrap="square" lIns="0" rIns="0" tIns="0" bIns="0" anchor="t">
+            <a:spAutoFit/>
+          </a:bodyPr>
+          <a:lstStyle/>
+          <a:p>
+            <a:pPr algn="ctr"/>
+            <a:r>
+              <a:rPr sz="8800" b="1" i="0">
+                <a:solidFill>
+                  <a:srgbClr val="666677"/>
+                </a:solidFill>
+                <a:latin typeface="Helvetica"/>
+              </a:rPr>
+              <a:t>33.91</a:t>
+            </a:r>
+          </a:p>
+        </p:txBody>
+      </p:sp>
+      <p:sp>
+        <p:nvSpPr>
+          <p:cNvPr id="7" name="TextBox 6"/>
+          <p:cNvSpPr txBox="1"/>
+          <p:nvPr/>
+        </p:nvSpPr>
+        <p:spPr>
+          <a:xfrm>
+            <a:off x="914400" y="4572000"/>
+            <a:ext cx="4846320" cy="457200"/>
+          </a:xfrm>
+          <a:prstGeom prst="rect">
+            <a:avLst/>
+          </a:prstGeom>
+          <a:noFill/>
+        </p:spPr>
+        <p:txBody>
+          <a:bodyPr wrap="square" lIns="0" rIns="0" tIns="0" bIns="0" anchor="t">
+            <a:spAutoFit/>
+          </a:bodyPr>
+          <a:lstStyle/>
+          <a:p>
+            <a:pPr algn="ctr"/>
+            <a:r>
+              <a:rPr sz="1800" b="0" i="1">
+                <a:solidFill>
+                  <a:srgbClr val="666677"/>
+                </a:solidFill>
+                <a:latin typeface="Helvetica"/>
+              </a:rPr>
+              <a:t>APₛ</a:t>
+            </a:r>
+          </a:p>
+        </p:txBody>
+      </p:sp>
+      <p:sp>
+        <p:nvSpPr>
+          <p:cNvPr id="8" name="Rounded Rectangle 7"/>
+          <p:cNvSpPr/>
+          <p:nvPr/>
+        </p:nvSpPr>
+        <p:spPr>
+          <a:xfrm>
+            <a:off x="6400800" y="2011680"/>
+            <a:ext cx="4846320" cy="3200400"/>
+          </a:xfrm>
+          <a:prstGeom prst="roundRect">
+            <a:avLst/>
+          </a:prstGeom>
+          <a:solidFill>
+            <a:srgbClr val="E8F7E8"/>
+          </a:solidFill>
+          <a:ln w="25400">
+            <a:solidFill>
+              <a:srgbClr val="2CA02C"/>
+            </a:solidFill>
+          </a:ln>
+          <a:effectLst/>
+        </p:spPr>
+        <p:style>
+          <a:lnRef idx="1">
+            <a:schemeClr val="accent1"/>
+          </a:lnRef>
+          <a:fillRef idx="3">
+            <a:schemeClr val="accent1"/>
+          </a:fillRef>
+          <a:effectRef idx="2">
+            <a:schemeClr val="accent1"/>
+          </a:effectRef>
+          <a:fontRef idx="minor">
+            <a:schemeClr val="lt1"/>
+          </a:fontRef>
+        </p:style>
+        <p:txBody>
+          <a:bodyPr rtlCol="0" anchor="ctr"/>
+          <a:lstStyle/>
+          <a:p>
+            <a:pPr algn="ctr"/>
+          </a:p>
+        </p:txBody>
+      </p:sp>
+      <p:sp>
+        <p:nvSpPr>
+          <p:cNvPr id="9" name="TextBox 8"/>
+          <p:cNvSpPr txBox="1"/>
+          <p:nvPr/>
+        </p:nvSpPr>
+        <p:spPr>
+          <a:xfrm>
+            <a:off x="6400800" y="2194560"/>
+            <a:ext cx="4846320" cy="457200"/>
+          </a:xfrm>
+          <a:prstGeom prst="rect">
+            <a:avLst/>
+          </a:prstGeom>
+          <a:noFill/>
+        </p:spPr>
+        <p:txBody>
+          <a:bodyPr wrap="square" lIns="0" rIns="0" tIns="0" bIns="0" anchor="t">
+            <a:spAutoFit/>
+          </a:bodyPr>
+          <a:lstStyle/>
+          <a:p>
+            <a:pPr algn="ctr"/>
+            <a:r>
+              <a:rPr sz="2400" b="1" i="0">
+                <a:solidFill>
+                  <a:srgbClr val="2CA02C"/>
+                </a:solidFill>
+                <a:latin typeface="Helvetica"/>
+              </a:rPr>
+              <a:t>v2</a:t>
+            </a:r>
+          </a:p>
+        </p:txBody>
+      </p:sp>
+      <p:sp>
+        <p:nvSpPr>
+          <p:cNvPr id="10" name="TextBox 9"/>
+          <p:cNvSpPr txBox="1"/>
+          <p:nvPr/>
+        </p:nvSpPr>
+        <p:spPr>
+          <a:xfrm>
+            <a:off x="6400800" y="2697480"/>
+            <a:ext cx="4846320" cy="1828800"/>
+          </a:xfrm>
+          <a:prstGeom prst="rect">
+            <a:avLst/>
+          </a:prstGeom>
+          <a:noFill/>
+        </p:spPr>
+        <p:txBody>
+          <a:bodyPr wrap="square" lIns="0" rIns="0" tIns="0" bIns="0" anchor="t">
+            <a:spAutoFit/>
+          </a:bodyPr>
+          <a:lstStyle/>
+          <a:p>
+            <a:pPr algn="ctr"/>
+            <a:r>
+              <a:rPr sz="8800" b="1" i="0">
+                <a:solidFill>
+                  <a:srgbClr val="2CA02C"/>
+                </a:solidFill>
+                <a:latin typeface="Helvetica"/>
+              </a:rPr>
+              <a:t>34.30</a:t>
+            </a:r>
+          </a:p>
+        </p:txBody>
+      </p:sp>
+      <p:sp>
+        <p:nvSpPr>
+          <p:cNvPr id="11" name="TextBox 10"/>
+          <p:cNvSpPr txBox="1"/>
+          <p:nvPr/>
+        </p:nvSpPr>
+        <p:spPr>
+          <a:xfrm>
+            <a:off x="6400800" y="4572000"/>
+            <a:ext cx="4846320" cy="457200"/>
+          </a:xfrm>
+          <a:prstGeom prst="rect">
+            <a:avLst/>
+          </a:prstGeom>
+          <a:noFill/>
+        </p:spPr>
+        <p:txBody>
+          <a:bodyPr wrap="square" lIns="0" rIns="0" tIns="0" bIns="0" anchor="t">
+            <a:spAutoFit/>
+          </a:bodyPr>
+          <a:lstStyle/>
+          <a:p>
+            <a:pPr algn="ctr"/>
+            <a:r>
+              <a:rPr sz="1800" b="0" i="1">
+                <a:solidFill>
+                  <a:srgbClr val="2CA02C"/>
+                </a:solidFill>
+                <a:latin typeface="Helvetica"/>
+              </a:rPr>
+              <a:t>APₛ    +0.4</a:t>
+            </a:r>
+          </a:p>
+        </p:txBody>
+      </p:sp>
+      <p:sp>
+        <p:nvSpPr>
+          <p:cNvPr id="12" name="TextBox 11"/>
+          <p:cNvSpPr txBox="1"/>
+          <p:nvPr/>
+        </p:nvSpPr>
+        <p:spPr>
+          <a:xfrm>
+            <a:off x="640080" y="6446520"/>
+            <a:ext cx="9144000" cy="274320"/>
+          </a:xfrm>
+          <a:prstGeom prst="rect">
+            <a:avLst/>
+          </a:prstGeom>
+          <a:noFill/>
+        </p:spPr>
+        <p:txBody>
+          <a:bodyPr wrap="square" lIns="0" rIns="0" tIns="0" bIns="0" anchor="t">
+            <a:spAutoFit/>
+          </a:bodyPr>
+          <a:lstStyle/>
+          <a:p>
+            <a:pPr algn="l"/>
+            <a:r>
+              <a:rPr sz="1000" b="0" i="0">
+                <a:solidFill>
+                  <a:srgbClr val="666677"/>
+                </a:solidFill>
+                <a:latin typeface="Helvetica"/>
+              </a:rPr>
+              <a:t>5. Final Results  •  Feedback-Augmented RT-DETR  •  Hatem Saadallah &amp; Nour Jennane</a:t>
+            </a:r>
+          </a:p>
+        </p:txBody>
+      </p:sp>
+      <p:sp>
+        <p:nvSpPr>
+          <p:cNvPr id="13" name="TextBox 12"/>
+          <p:cNvSpPr txBox="1"/>
+          <p:nvPr/>
+        </p:nvSpPr>
+        <p:spPr>
+          <a:xfrm>
+            <a:off x="10515600" y="6446520"/>
+            <a:ext cx="1097280" cy="274320"/>
+          </a:xfrm>
+          <a:prstGeom prst="rect">
+            <a:avLst/>
+          </a:prstGeom>
+          <a:noFill/>
+        </p:spPr>
+        <p:txBody>
+          <a:bodyPr wrap="square" lIns="0" rIns="0" tIns="0" bIns="0" anchor="t">
+            <a:spAutoFit/>
+          </a:bodyPr>
+          <a:lstStyle/>
+          <a:p>
+            <a:pPr algn="r"/>
+            <a:r>
+              <a:rPr sz="1000" b="0" i="0">
+                <a:solidFill>
+                  <a:srgbClr val="666677"/>
+                </a:solidFill>
+                <a:latin typeface="Helvetica"/>
+              </a:rPr>
+              <a:t>18 / 24</a:t>
+            </a:r>
+          </a:p>
+        </p:txBody>
+      </p:sp>
+    </p:spTree>
+  </p:cSld>
+  <p:clrMapOvr>
+    <a:masterClrMapping/>
+  </p:clrMapOvr>
+</p:sld>
+</file>
+
+<file path=ppt/slides/slide19.xml><?xml version="1.0" encoding="utf-8"?>
+<p:sld xmlns:a="http://schemas.openxmlformats.org/drawingml/2006/main" xmlns:p="http://schemas.openxmlformats.org/presentationml/2006/main" xmlns:r="http://schemas.openxmlformats.org/officeDocument/2006/relationships">
+  <p:cSld>
+    <p:spTree>
+      <p:nvGrpSpPr>
+        <p:cNvPr id="1" name=""/>
+        <p:cNvGrpSpPr/>
+        <p:nvPr/>
+      </p:nvGrpSpPr>
+      <p:grpSpPr/>
+      <p:sp>
+        <p:nvSpPr>
+          <p:cNvPr id="2" name="TextBox 1"/>
+          <p:cNvSpPr txBox="1"/>
+          <p:nvPr/>
+        </p:nvSpPr>
+        <p:spPr>
+          <a:xfrm>
+            <a:off x="640080" y="457200"/>
+            <a:ext cx="10972800" cy="822960"/>
+          </a:xfrm>
+          <a:prstGeom prst="rect">
+            <a:avLst/>
+          </a:prstGeom>
+          <a:noFill/>
+        </p:spPr>
+        <p:txBody>
+          <a:bodyPr wrap="square" lIns="0" rIns="0" tIns="0" bIns="0" anchor="t">
+            <a:spAutoFit/>
+          </a:bodyPr>
+          <a:lstStyle/>
+          <a:p>
+            <a:pPr algn="l"/>
+            <a:r>
+              <a:rPr sz="3400" b="1" i="0">
+                <a:solidFill>
+                  <a:srgbClr val="1F6FEB"/>
+                </a:solidFill>
+                <a:latin typeface="Helvetica"/>
+              </a:rPr>
+              <a:t>Causal effect of feedback</a:t>
+            </a:r>
+          </a:p>
+        </p:txBody>
+      </p:sp>
+      <p:sp>
+        <p:nvSpPr>
+          <p:cNvPr id="3" name="Rectangle 2"/>
+          <p:cNvSpPr/>
+          <p:nvPr/>
+        </p:nvSpPr>
+        <p:spPr>
+          <a:xfrm>
+            <a:off x="640080" y="1143000"/>
+            <a:ext cx="640080" cy="54864"/>
+          </a:xfrm>
+          <a:prstGeom prst="rect">
+            <a:avLst/>
+          </a:prstGeom>
+          <a:solidFill>
+            <a:srgbClr val="1F6FEB"/>
+          </a:solidFill>
+          <a:ln>
+            <a:noFill/>
+          </a:ln>
+        </p:spPr>
+        <p:style>
+          <a:lnRef idx="1">
+            <a:schemeClr val="accent1"/>
+          </a:lnRef>
+          <a:fillRef idx="3">
+            <a:schemeClr val="accent1"/>
+          </a:fillRef>
+          <a:effectRef idx="2">
+            <a:schemeClr val="accent1"/>
+          </a:effectRef>
+          <a:fontRef idx="minor">
+            <a:schemeClr val="lt1"/>
+          </a:fontRef>
+        </p:style>
+        <p:txBody>
+          <a:bodyPr rtlCol="0" anchor="ctr"/>
+          <a:lstStyle/>
+          <a:p>
+            <a:pPr algn="ctr"/>
+          </a:p>
+        </p:txBody>
+      </p:sp>
+      <p:sp>
+        <p:nvSpPr>
+          <p:cNvPr id="4" name="TextBox 3"/>
+          <p:cNvSpPr txBox="1"/>
+          <p:nvPr/>
+        </p:nvSpPr>
+        <p:spPr>
+          <a:xfrm>
+            <a:off x="640080" y="1828800"/>
+            <a:ext cx="3657600" cy="548640"/>
+          </a:xfrm>
+          <a:prstGeom prst="rect">
+            <a:avLst/>
+          </a:prstGeom>
+          <a:noFill/>
+        </p:spPr>
+        <p:txBody>
+          <a:bodyPr wrap="square" lIns="0" rIns="0" tIns="0" bIns="0" anchor="t">
+            <a:spAutoFit/>
+          </a:bodyPr>
+          <a:lstStyle/>
+          <a:p>
+            <a:pPr algn="ctr"/>
+            <a:r>
+              <a:rPr sz="2400" b="0" i="0">
+                <a:solidFill>
+                  <a:srgbClr val="666677"/>
+                </a:solidFill>
+                <a:latin typeface="Helvetica"/>
+              </a:rPr>
+              <a:t>ON</a:t>
+            </a:r>
+          </a:p>
+        </p:txBody>
+      </p:sp>
+      <p:sp>
+        <p:nvSpPr>
+          <p:cNvPr id="5" name="TextBox 4"/>
+          <p:cNvSpPr txBox="1"/>
+          <p:nvPr/>
+        </p:nvSpPr>
+        <p:spPr>
+          <a:xfrm>
+            <a:off x="640080" y="2468880"/>
+            <a:ext cx="3657600" cy="2011680"/>
+          </a:xfrm>
+          <a:prstGeom prst="rect">
+            <a:avLst/>
+          </a:prstGeom>
+          <a:noFill/>
+        </p:spPr>
+        <p:txBody>
+          <a:bodyPr wrap="square" lIns="0" rIns="0" tIns="0" bIns="0" anchor="t">
+            <a:spAutoFit/>
+          </a:bodyPr>
+          <a:lstStyle/>
+          <a:p>
+            <a:pPr algn="ctr"/>
+            <a:r>
+              <a:rPr sz="11000" b="1" i="0">
+                <a:solidFill>
+                  <a:srgbClr val="2CA02C"/>
+                </a:solidFill>
+                <a:latin typeface="Helvetica"/>
+              </a:rPr>
+              <a:t>34.25</a:t>
+            </a:r>
+          </a:p>
+        </p:txBody>
+      </p:sp>
+      <p:sp>
+        <p:nvSpPr>
+          <p:cNvPr id="6" name="TextBox 5"/>
+          <p:cNvSpPr txBox="1"/>
+          <p:nvPr/>
+        </p:nvSpPr>
+        <p:spPr>
+          <a:xfrm>
+            <a:off x="640080" y="4754880"/>
+            <a:ext cx="3657600" cy="457200"/>
+          </a:xfrm>
+          <a:prstGeom prst="rect">
+            <a:avLst/>
+          </a:prstGeom>
+          <a:noFill/>
+        </p:spPr>
+        <p:txBody>
+          <a:bodyPr wrap="square" lIns="0" rIns="0" tIns="0" bIns="0" anchor="t">
+            <a:spAutoFit/>
+          </a:bodyPr>
+          <a:lstStyle/>
+          <a:p>
+            <a:pPr algn="ctr"/>
+            <a:r>
+              <a:rPr sz="1400" b="0" i="1">
+                <a:solidFill>
+                  <a:srgbClr val="666677"/>
+                </a:solidFill>
+                <a:latin typeface="Helvetica"/>
+              </a:rPr>
+              <a:t>feedback enabled</a:t>
+            </a:r>
+          </a:p>
+        </p:txBody>
+      </p:sp>
+      <p:sp>
+        <p:nvSpPr>
+          <p:cNvPr id="7" name="TextBox 6"/>
+          <p:cNvSpPr txBox="1"/>
+          <p:nvPr/>
+        </p:nvSpPr>
+        <p:spPr>
+          <a:xfrm>
+            <a:off x="4434840" y="1828800"/>
+            <a:ext cx="3657600" cy="548640"/>
+          </a:xfrm>
+          <a:prstGeom prst="rect">
+            <a:avLst/>
+          </a:prstGeom>
+          <a:noFill/>
+        </p:spPr>
+        <p:txBody>
+          <a:bodyPr wrap="square" lIns="0" rIns="0" tIns="0" bIns="0" anchor="t">
+            <a:spAutoFit/>
+          </a:bodyPr>
+          <a:lstStyle/>
+          <a:p>
+            <a:pPr algn="ctr"/>
+            <a:r>
+              <a:rPr sz="2400" b="0" i="0">
+                <a:solidFill>
+                  <a:srgbClr val="666677"/>
+                </a:solidFill>
+                <a:latin typeface="Helvetica"/>
+              </a:rPr>
+              <a:t>OFF</a:t>
+            </a:r>
+          </a:p>
+        </p:txBody>
+      </p:sp>
+      <p:sp>
+        <p:nvSpPr>
+          <p:cNvPr id="8" name="TextBox 7"/>
+          <p:cNvSpPr txBox="1"/>
+          <p:nvPr/>
+        </p:nvSpPr>
+        <p:spPr>
+          <a:xfrm>
+            <a:off x="4434840" y="2468880"/>
+            <a:ext cx="3657600" cy="2011680"/>
+          </a:xfrm>
+          <a:prstGeom prst="rect">
+            <a:avLst/>
+          </a:prstGeom>
+          <a:noFill/>
+        </p:spPr>
+        <p:txBody>
+          <a:bodyPr wrap="square" lIns="0" rIns="0" tIns="0" bIns="0" anchor="t">
+            <a:spAutoFit/>
+          </a:bodyPr>
+          <a:lstStyle/>
+          <a:p>
+            <a:pPr algn="ctr"/>
+            <a:r>
+              <a:rPr sz="11000" b="1" i="0">
+                <a:solidFill>
+                  <a:srgbClr val="666677"/>
+                </a:solidFill>
+                <a:latin typeface="Helvetica"/>
+              </a:rPr>
+              <a:t>33.26</a:t>
+            </a:r>
+          </a:p>
+        </p:txBody>
+      </p:sp>
+      <p:sp>
+        <p:nvSpPr>
+          <p:cNvPr id="9" name="TextBox 8"/>
+          <p:cNvSpPr txBox="1"/>
+          <p:nvPr/>
+        </p:nvSpPr>
+        <p:spPr>
+          <a:xfrm>
+            <a:off x="4434840" y="4754880"/>
+            <a:ext cx="3657600" cy="457200"/>
+          </a:xfrm>
+          <a:prstGeom prst="rect">
+            <a:avLst/>
+          </a:prstGeom>
+          <a:noFill/>
+        </p:spPr>
+        <p:txBody>
+          <a:bodyPr wrap="square" lIns="0" rIns="0" tIns="0" bIns="0" anchor="t">
+            <a:spAutoFit/>
+          </a:bodyPr>
+          <a:lstStyle/>
+          <a:p>
+            <a:pPr algn="ctr"/>
+            <a:r>
+              <a:rPr sz="1400" b="0" i="1">
+                <a:solidFill>
+                  <a:srgbClr val="666677"/>
+                </a:solidFill>
+                <a:latin typeface="Helvetica"/>
+              </a:rPr>
+              <a:t>feedback bypassed</a:t>
+            </a:r>
+          </a:p>
+        </p:txBody>
+      </p:sp>
+      <p:sp>
+        <p:nvSpPr>
+          <p:cNvPr id="10" name="TextBox 9"/>
+          <p:cNvSpPr txBox="1"/>
+          <p:nvPr/>
+        </p:nvSpPr>
+        <p:spPr>
+          <a:xfrm>
+            <a:off x="8229600" y="1828800"/>
+            <a:ext cx="3657600" cy="548640"/>
+          </a:xfrm>
+          <a:prstGeom prst="rect">
+            <a:avLst/>
+          </a:prstGeom>
+          <a:noFill/>
+        </p:spPr>
+        <p:txBody>
+          <a:bodyPr wrap="square" lIns="0" rIns="0" tIns="0" bIns="0" anchor="t">
+            <a:spAutoFit/>
+          </a:bodyPr>
+          <a:lstStyle/>
+          <a:p>
+            <a:pPr algn="ctr"/>
+            <a:r>
+              <a:rPr sz="2400" b="0" i="0">
+                <a:solidFill>
+                  <a:srgbClr val="666677"/>
+                </a:solidFill>
+                <a:latin typeface="Helvetica"/>
+              </a:rPr>
+              <a:t>Δ</a:t>
+            </a:r>
+          </a:p>
+        </p:txBody>
+      </p:sp>
+      <p:sp>
+        <p:nvSpPr>
+          <p:cNvPr id="11" name="TextBox 10"/>
+          <p:cNvSpPr txBox="1"/>
+          <p:nvPr/>
+        </p:nvSpPr>
+        <p:spPr>
+          <a:xfrm>
+            <a:off x="8229600" y="2468880"/>
+            <a:ext cx="3657600" cy="2011680"/>
+          </a:xfrm>
+          <a:prstGeom prst="rect">
+            <a:avLst/>
+          </a:prstGeom>
+          <a:noFill/>
+        </p:spPr>
+        <p:txBody>
+          <a:bodyPr wrap="square" lIns="0" rIns="0" tIns="0" bIns="0" anchor="t">
+            <a:spAutoFit/>
+          </a:bodyPr>
+          <a:lstStyle/>
+          <a:p>
+            <a:pPr algn="ctr"/>
+            <a:r>
+              <a:rPr sz="11000" b="1" i="0">
+                <a:solidFill>
+                  <a:srgbClr val="1F6FEB"/>
+                </a:solidFill>
+                <a:latin typeface="Helvetica"/>
+              </a:rPr>
+              <a:t>+0.99</a:t>
+            </a:r>
+          </a:p>
+        </p:txBody>
+      </p:sp>
+      <p:sp>
+        <p:nvSpPr>
+          <p:cNvPr id="12" name="TextBox 11"/>
+          <p:cNvSpPr txBox="1"/>
+          <p:nvPr/>
+        </p:nvSpPr>
+        <p:spPr>
+          <a:xfrm>
+            <a:off x="8229600" y="4754880"/>
+            <a:ext cx="3657600" cy="457200"/>
+          </a:xfrm>
+          <a:prstGeom prst="rect">
+            <a:avLst/>
+          </a:prstGeom>
+          <a:noFill/>
+        </p:spPr>
+        <p:txBody>
+          <a:bodyPr wrap="square" lIns="0" rIns="0" tIns="0" bIns="0" anchor="t">
+            <a:spAutoFit/>
+          </a:bodyPr>
+          <a:lstStyle/>
+          <a:p>
+            <a:pPr algn="ctr"/>
+            <a:r>
+              <a:rPr sz="1400" b="0" i="1">
+                <a:solidFill>
+                  <a:srgbClr val="666677"/>
+                </a:solidFill>
+                <a:latin typeface="Helvetica"/>
+              </a:rPr>
+              <a:t>the contribution</a:t>
+            </a:r>
+          </a:p>
+        </p:txBody>
+      </p:sp>
+      <p:sp>
+        <p:nvSpPr>
+          <p:cNvPr id="13" name="TextBox 12"/>
+          <p:cNvSpPr txBox="1"/>
+          <p:nvPr/>
+        </p:nvSpPr>
+        <p:spPr>
+          <a:xfrm>
             <a:off x="640080" y="5669280"/>
-            <a:ext cx="10972800" cy="365760"/>
+            <a:ext cx="10972800" cy="548640"/>
           </a:xfrm>
           <a:prstGeom prst="rect">
             <a:avLst/>
@@ -7054,13 +6508,83 @@
           <a:p>
             <a:pPr algn="ctr"/>
             <a:r>
-              <a:rPr sz="1200" b="0" i="0">
+              <a:rPr sz="2200" b="1" i="0">
+                <a:solidFill>
+                  <a:srgbClr val="1F6FEB"/>
+                </a:solidFill>
+                <a:latin typeface="Helvetica"/>
+              </a:rPr>
+              <a:t>Feedback has a real causal impact on small-object detection.</a:t>
+            </a:r>
+          </a:p>
+        </p:txBody>
+      </p:sp>
+      <p:sp>
+        <p:nvSpPr>
+          <p:cNvPr id="14" name="TextBox 13"/>
+          <p:cNvSpPr txBox="1"/>
+          <p:nvPr/>
+        </p:nvSpPr>
+        <p:spPr>
+          <a:xfrm>
+            <a:off x="640080" y="6446520"/>
+            <a:ext cx="9144000" cy="274320"/>
+          </a:xfrm>
+          <a:prstGeom prst="rect">
+            <a:avLst/>
+          </a:prstGeom>
+          <a:noFill/>
+        </p:spPr>
+        <p:txBody>
+          <a:bodyPr wrap="square" lIns="0" rIns="0" tIns="0" bIns="0" anchor="t">
+            <a:spAutoFit/>
+          </a:bodyPr>
+          <a:lstStyle/>
+          <a:p>
+            <a:pPr algn="l"/>
+            <a:r>
+              <a:rPr sz="1000" b="0" i="0">
                 <a:solidFill>
                   <a:srgbClr val="666677"/>
                 </a:solidFill>
                 <a:latin typeface="Helvetica"/>
               </a:rPr>
-              <a:t>github.com/HatemSaadallah/feedback-augmented-rtdetr</a:t>
+              <a:t>5. Final Results  •  Feedback-Augmented RT-DETR  •  Hatem Saadallah &amp; Nour Jennane</a:t>
+            </a:r>
+          </a:p>
+        </p:txBody>
+      </p:sp>
+      <p:sp>
+        <p:nvSpPr>
+          <p:cNvPr id="15" name="TextBox 14"/>
+          <p:cNvSpPr txBox="1"/>
+          <p:nvPr/>
+        </p:nvSpPr>
+        <p:spPr>
+          <a:xfrm>
+            <a:off x="10515600" y="6446520"/>
+            <a:ext cx="1097280" cy="274320"/>
+          </a:xfrm>
+          <a:prstGeom prst="rect">
+            <a:avLst/>
+          </a:prstGeom>
+          <a:noFill/>
+        </p:spPr>
+        <p:txBody>
+          <a:bodyPr wrap="square" lIns="0" rIns="0" tIns="0" bIns="0" anchor="t">
+            <a:spAutoFit/>
+          </a:bodyPr>
+          <a:lstStyle/>
+          <a:p>
+            <a:pPr algn="r"/>
+            <a:r>
+              <a:rPr sz="1000" b="0" i="0">
+                <a:solidFill>
+                  <a:srgbClr val="666677"/>
+                </a:solidFill>
+                <a:latin typeface="Helvetica"/>
+              </a:rPr>
+              <a:t>19 / 24</a:t>
             </a:r>
           </a:p>
         </p:txBody>
@@ -7091,8 +6615,8 @@
         </p:nvSpPr>
         <p:spPr>
           <a:xfrm>
-            <a:off x="640080" y="457200"/>
-            <a:ext cx="10972800" cy="822960"/>
+            <a:off x="731520" y="2377440"/>
+            <a:ext cx="10698480" cy="365760"/>
           </a:xfrm>
           <a:prstGeom prst="rect">
             <a:avLst/>
@@ -7107,13 +6631,13 @@
           <a:p>
             <a:pPr algn="l"/>
             <a:r>
-              <a:rPr sz="3400" b="1" i="0">
+              <a:rPr sz="1400" b="1" i="0">
                 <a:solidFill>
                   <a:srgbClr val="1F6FEB"/>
                 </a:solidFill>
                 <a:latin typeface="Helvetica"/>
               </a:rPr>
-              <a:t>Small objects are harder to detect</a:t>
+              <a:t>SECTION  1  /  5</a:t>
             </a:r>
           </a:p>
         </p:txBody>
@@ -7126,7 +6650,7 @@
         </p:nvSpPr>
         <p:spPr>
           <a:xfrm>
-            <a:off x="640080" y="1143000"/>
+            <a:off x="731520" y="2788920"/>
             <a:ext cx="640080" cy="54864"/>
           </a:xfrm>
           <a:prstGeom prst="rect">
@@ -7161,30 +6685,41 @@
           </a:p>
         </p:txBody>
       </p:sp>
-      <p:pic>
-        <p:nvPicPr>
-          <p:cNvPr id="4" name="Picture 3" descr="viz_000000001000.png"/>
-          <p:cNvPicPr>
-            <a:picLocks noChangeAspect="1"/>
-          </p:cNvPicPr>
-          <p:nvPr/>
-        </p:nvPicPr>
-        <p:blipFill>
-          <a:blip r:embed="rId2"/>
-          <a:stretch>
-            <a:fillRect/>
-          </a:stretch>
-        </p:blipFill>
-        <p:spPr>
-          <a:xfrm>
-            <a:off x="640080" y="1554480"/>
-            <a:ext cx="6400800" cy="1718336"/>
-          </a:xfrm>
-          <a:prstGeom prst="rect">
-            <a:avLst/>
-          </a:prstGeom>
-        </p:spPr>
-      </p:pic>
+      <p:sp>
+        <p:nvSpPr>
+          <p:cNvPr id="4" name="TextBox 3"/>
+          <p:cNvSpPr txBox="1"/>
+          <p:nvPr/>
+        </p:nvSpPr>
+        <p:spPr>
+          <a:xfrm>
+            <a:off x="731520" y="2971800"/>
+            <a:ext cx="10698480" cy="1097280"/>
+          </a:xfrm>
+          <a:prstGeom prst="rect">
+            <a:avLst/>
+          </a:prstGeom>
+          <a:noFill/>
+        </p:spPr>
+        <p:txBody>
+          <a:bodyPr wrap="square" lIns="0" rIns="0" tIns="0" bIns="0" anchor="t">
+            <a:spAutoFit/>
+          </a:bodyPr>
+          <a:lstStyle/>
+          <a:p>
+            <a:pPr algn="l"/>
+            <a:r>
+              <a:rPr sz="5400" b="1" i="0">
+                <a:solidFill>
+                  <a:srgbClr val="1A1A2E"/>
+                </a:solidFill>
+                <a:latin typeface="Helvetica"/>
+              </a:rPr>
+              <a:t>Problem Formulation</a:t>
+            </a:r>
+          </a:p>
+        </p:txBody>
+      </p:sp>
       <p:sp>
         <p:nvSpPr>
           <p:cNvPr id="5" name="TextBox 4"/>
@@ -7193,8 +6728,8 @@
         </p:nvSpPr>
         <p:spPr>
           <a:xfrm>
-            <a:off x="7680960" y="1828800"/>
-            <a:ext cx="4114800" cy="457200"/>
+            <a:off x="731520" y="4206240"/>
+            <a:ext cx="10698480" cy="548640"/>
           </a:xfrm>
           <a:prstGeom prst="rect">
             <a:avLst/>
@@ -7209,13 +6744,13 @@
           <a:p>
             <a:pPr algn="l"/>
             <a:r>
-              <a:rPr sz="1500" b="0" i="0">
+              <a:rPr sz="2000" b="0" i="1">
                 <a:solidFill>
                   <a:srgbClr val="666677"/>
                 </a:solidFill>
                 <a:latin typeface="Helvetica"/>
               </a:rPr>
-              <a:t>APₗ (large)</a:t>
+              <a:t>What is small-object detection, and why does RT-DETR struggle?</a:t>
             </a:r>
           </a:p>
         </p:txBody>
@@ -7228,8 +6763,8 @@
         </p:nvSpPr>
         <p:spPr>
           <a:xfrm>
-            <a:off x="7680960" y="2194560"/>
-            <a:ext cx="4114800" cy="1280160"/>
+            <a:off x="640080" y="6446520"/>
+            <a:ext cx="9144000" cy="274320"/>
           </a:xfrm>
           <a:prstGeom prst="rect">
             <a:avLst/>
@@ -7244,13 +6779,13 @@
           <a:p>
             <a:pPr algn="l"/>
             <a:r>
-              <a:rPr sz="8400" b="1" i="0">
-                <a:solidFill>
-                  <a:srgbClr val="2CA02C"/>
-                </a:solidFill>
-                <a:latin typeface="Helvetica"/>
-              </a:rPr>
-              <a:t>67.7</a:t>
+              <a:rPr sz="1000" b="0" i="0">
+                <a:solidFill>
+                  <a:srgbClr val="666677"/>
+                </a:solidFill>
+                <a:latin typeface="Helvetica"/>
+              </a:rPr>
+              <a:t>1. Problem Formulation  •  Feedback-Augmented RT-DETR  •  Hatem Saadallah &amp; Nour Jennane</a:t>
             </a:r>
           </a:p>
         </p:txBody>
@@ -7258,146 +6793,6 @@
       <p:sp>
         <p:nvSpPr>
           <p:cNvPr id="7" name="TextBox 6"/>
-          <p:cNvSpPr txBox="1"/>
-          <p:nvPr/>
-        </p:nvSpPr>
-        <p:spPr>
-          <a:xfrm>
-            <a:off x="7680960" y="3657600"/>
-            <a:ext cx="4114800" cy="457200"/>
-          </a:xfrm>
-          <a:prstGeom prst="rect">
-            <a:avLst/>
-          </a:prstGeom>
-          <a:noFill/>
-        </p:spPr>
-        <p:txBody>
-          <a:bodyPr wrap="square" lIns="0" rIns="0" tIns="0" bIns="0" anchor="t">
-            <a:spAutoFit/>
-          </a:bodyPr>
-          <a:lstStyle/>
-          <a:p>
-            <a:pPr algn="l"/>
-            <a:r>
-              <a:rPr sz="1500" b="0" i="0">
-                <a:solidFill>
-                  <a:srgbClr val="666677"/>
-                </a:solidFill>
-                <a:latin typeface="Helvetica"/>
-              </a:rPr>
-              <a:t>APₛ (small)</a:t>
-            </a:r>
-          </a:p>
-        </p:txBody>
-      </p:sp>
-      <p:sp>
-        <p:nvSpPr>
-          <p:cNvPr id="8" name="TextBox 7"/>
-          <p:cNvSpPr txBox="1"/>
-          <p:nvPr/>
-        </p:nvSpPr>
-        <p:spPr>
-          <a:xfrm>
-            <a:off x="7680960" y="4023360"/>
-            <a:ext cx="4114800" cy="1280160"/>
-          </a:xfrm>
-          <a:prstGeom prst="rect">
-            <a:avLst/>
-          </a:prstGeom>
-          <a:noFill/>
-        </p:spPr>
-        <p:txBody>
-          <a:bodyPr wrap="square" lIns="0" rIns="0" tIns="0" bIns="0" anchor="t">
-            <a:spAutoFit/>
-          </a:bodyPr>
-          <a:lstStyle/>
-          <a:p>
-            <a:pPr algn="l"/>
-            <a:r>
-              <a:rPr sz="8400" b="1" i="0">
-                <a:solidFill>
-                  <a:srgbClr val="D62C2E"/>
-                </a:solidFill>
-                <a:latin typeface="Helvetica"/>
-              </a:rPr>
-              <a:t>34.7</a:t>
-            </a:r>
-          </a:p>
-        </p:txBody>
-      </p:sp>
-      <p:sp>
-        <p:nvSpPr>
-          <p:cNvPr id="9" name="TextBox 8"/>
-          <p:cNvSpPr txBox="1"/>
-          <p:nvPr/>
-        </p:nvSpPr>
-        <p:spPr>
-          <a:xfrm>
-            <a:off x="7680960" y="5486400"/>
-            <a:ext cx="4114800" cy="548640"/>
-          </a:xfrm>
-          <a:prstGeom prst="rect">
-            <a:avLst/>
-          </a:prstGeom>
-          <a:noFill/>
-        </p:spPr>
-        <p:txBody>
-          <a:bodyPr wrap="square" lIns="0" rIns="0" tIns="0" bIns="0" anchor="t">
-            <a:spAutoFit/>
-          </a:bodyPr>
-          <a:lstStyle/>
-          <a:p>
-            <a:pPr algn="l"/>
-            <a:r>
-              <a:rPr sz="1800" b="0" i="1">
-                <a:solidFill>
-                  <a:srgbClr val="1A1A2E"/>
-                </a:solidFill>
-                <a:latin typeface="Helvetica"/>
-              </a:rPr>
-              <a:t>33-point gap. Why?</a:t>
-            </a:r>
-          </a:p>
-        </p:txBody>
-      </p:sp>
-      <p:sp>
-        <p:nvSpPr>
-          <p:cNvPr id="10" name="TextBox 9"/>
-          <p:cNvSpPr txBox="1"/>
-          <p:nvPr/>
-        </p:nvSpPr>
-        <p:spPr>
-          <a:xfrm>
-            <a:off x="640080" y="6446520"/>
-            <a:ext cx="7315200" cy="274320"/>
-          </a:xfrm>
-          <a:prstGeom prst="rect">
-            <a:avLst/>
-          </a:prstGeom>
-          <a:noFill/>
-        </p:spPr>
-        <p:txBody>
-          <a:bodyPr wrap="square" lIns="0" rIns="0" tIns="0" bIns="0" anchor="t">
-            <a:spAutoFit/>
-          </a:bodyPr>
-          <a:lstStyle/>
-          <a:p>
-            <a:pPr algn="l"/>
-            <a:r>
-              <a:rPr sz="1000" b="0" i="0">
-                <a:solidFill>
-                  <a:srgbClr val="666677"/>
-                </a:solidFill>
-                <a:latin typeface="Helvetica"/>
-              </a:rPr>
-              <a:t>Feedback-Augmented RT-DETR  •  Hatem Saadallah &amp; Nour Jennane</a:t>
-            </a:r>
-          </a:p>
-        </p:txBody>
-      </p:sp>
-      <p:sp>
-        <p:nvSpPr>
-          <p:cNvPr id="11" name="TextBox 10"/>
           <p:cNvSpPr txBox="1"/>
           <p:nvPr/>
         </p:nvSpPr>
@@ -7425,7 +6820,2806 @@
                 </a:solidFill>
                 <a:latin typeface="Helvetica"/>
               </a:rPr>
-              <a:t>2 / 18</a:t>
+              <a:t>2 / 24</a:t>
+            </a:r>
+          </a:p>
+        </p:txBody>
+      </p:sp>
+    </p:spTree>
+  </p:cSld>
+  <p:clrMapOvr>
+    <a:masterClrMapping/>
+  </p:clrMapOvr>
+</p:sld>
+</file>
+
+<file path=ppt/slides/slide20.xml><?xml version="1.0" encoding="utf-8"?>
+<p:sld xmlns:a="http://schemas.openxmlformats.org/drawingml/2006/main" xmlns:p="http://schemas.openxmlformats.org/presentationml/2006/main" xmlns:r="http://schemas.openxmlformats.org/officeDocument/2006/relationships">
+  <p:cSld>
+    <p:spTree>
+      <p:nvGrpSpPr>
+        <p:cNvPr id="1" name=""/>
+        <p:cNvGrpSpPr/>
+        <p:nvPr/>
+      </p:nvGrpSpPr>
+      <p:grpSpPr/>
+      <p:sp>
+        <p:nvSpPr>
+          <p:cNvPr id="2" name="TextBox 1"/>
+          <p:cNvSpPr txBox="1"/>
+          <p:nvPr/>
+        </p:nvSpPr>
+        <p:spPr>
+          <a:xfrm>
+            <a:off x="640080" y="457200"/>
+            <a:ext cx="10972800" cy="822960"/>
+          </a:xfrm>
+          <a:prstGeom prst="rect">
+            <a:avLst/>
+          </a:prstGeom>
+          <a:noFill/>
+        </p:spPr>
+        <p:txBody>
+          <a:bodyPr wrap="square" lIns="0" rIns="0" tIns="0" bIns="0" anchor="t">
+            <a:spAutoFit/>
+          </a:bodyPr>
+          <a:lstStyle/>
+          <a:p>
+            <a:pPr algn="l"/>
+            <a:r>
+              <a:rPr sz="3400" b="1" i="0">
+                <a:solidFill>
+                  <a:srgbClr val="1F6FEB"/>
+                </a:solidFill>
+                <a:latin typeface="Helvetica"/>
+              </a:rPr>
+              <a:t>Higher resolution → bigger gain</a:t>
+            </a:r>
+          </a:p>
+        </p:txBody>
+      </p:sp>
+      <p:sp>
+        <p:nvSpPr>
+          <p:cNvPr id="3" name="Rectangle 2"/>
+          <p:cNvSpPr/>
+          <p:nvPr/>
+        </p:nvSpPr>
+        <p:spPr>
+          <a:xfrm>
+            <a:off x="640080" y="1143000"/>
+            <a:ext cx="640080" cy="54864"/>
+          </a:xfrm>
+          <a:prstGeom prst="rect">
+            <a:avLst/>
+          </a:prstGeom>
+          <a:solidFill>
+            <a:srgbClr val="1F6FEB"/>
+          </a:solidFill>
+          <a:ln>
+            <a:noFill/>
+          </a:ln>
+        </p:spPr>
+        <p:style>
+          <a:lnRef idx="1">
+            <a:schemeClr val="accent1"/>
+          </a:lnRef>
+          <a:fillRef idx="3">
+            <a:schemeClr val="accent1"/>
+          </a:fillRef>
+          <a:effectRef idx="2">
+            <a:schemeClr val="accent1"/>
+          </a:effectRef>
+          <a:fontRef idx="minor">
+            <a:schemeClr val="lt1"/>
+          </a:fontRef>
+        </p:style>
+        <p:txBody>
+          <a:bodyPr rtlCol="0" anchor="ctr"/>
+          <a:lstStyle/>
+          <a:p>
+            <a:pPr algn="ctr"/>
+          </a:p>
+        </p:txBody>
+      </p:sp>
+      <p:sp>
+        <p:nvSpPr>
+          <p:cNvPr id="4" name="TextBox 3"/>
+          <p:cNvSpPr txBox="1"/>
+          <p:nvPr/>
+        </p:nvSpPr>
+        <p:spPr>
+          <a:xfrm>
+            <a:off x="640080" y="2194560"/>
+            <a:ext cx="5303520" cy="457200"/>
+          </a:xfrm>
+          <a:prstGeom prst="rect">
+            <a:avLst/>
+          </a:prstGeom>
+          <a:noFill/>
+        </p:spPr>
+        <p:txBody>
+          <a:bodyPr wrap="square" lIns="0" rIns="0" tIns="0" bIns="0" anchor="t">
+            <a:spAutoFit/>
+          </a:bodyPr>
+          <a:lstStyle/>
+          <a:p>
+            <a:pPr algn="ctr"/>
+            <a:r>
+              <a:rPr sz="2200" b="0" i="0">
+                <a:solidFill>
+                  <a:srgbClr val="666677"/>
+                </a:solidFill>
+                <a:latin typeface="Helvetica"/>
+              </a:rPr>
+              <a:t>640 × 640</a:t>
+            </a:r>
+          </a:p>
+        </p:txBody>
+      </p:sp>
+      <p:sp>
+        <p:nvSpPr>
+          <p:cNvPr id="5" name="TextBox 4"/>
+          <p:cNvSpPr txBox="1"/>
+          <p:nvPr/>
+        </p:nvSpPr>
+        <p:spPr>
+          <a:xfrm>
+            <a:off x="640080" y="2743200"/>
+            <a:ext cx="5303520" cy="1828800"/>
+          </a:xfrm>
+          <a:prstGeom prst="rect">
+            <a:avLst/>
+          </a:prstGeom>
+          <a:noFill/>
+        </p:spPr>
+        <p:txBody>
+          <a:bodyPr wrap="square" lIns="0" rIns="0" tIns="0" bIns="0" anchor="t">
+            <a:spAutoFit/>
+          </a:bodyPr>
+          <a:lstStyle/>
+          <a:p>
+            <a:pPr algn="ctr"/>
+            <a:r>
+              <a:rPr sz="8800" b="1" i="0">
+                <a:solidFill>
+                  <a:srgbClr val="1A1A2E"/>
+                </a:solidFill>
+                <a:latin typeface="Helvetica"/>
+              </a:rPr>
+              <a:t>34.25</a:t>
+            </a:r>
+          </a:p>
+        </p:txBody>
+      </p:sp>
+      <p:sp>
+        <p:nvSpPr>
+          <p:cNvPr id="6" name="Right Arrow 5"/>
+          <p:cNvSpPr/>
+          <p:nvPr/>
+        </p:nvSpPr>
+        <p:spPr>
+          <a:xfrm>
+            <a:off x="5303520" y="3291840"/>
+            <a:ext cx="1554480" cy="548640"/>
+          </a:xfrm>
+          <a:prstGeom prst="rightArrow">
+            <a:avLst/>
+          </a:prstGeom>
+          <a:solidFill>
+            <a:srgbClr val="1F6FEB"/>
+          </a:solidFill>
+          <a:ln>
+            <a:noFill/>
+          </a:ln>
+        </p:spPr>
+        <p:style>
+          <a:lnRef idx="1">
+            <a:schemeClr val="accent1"/>
+          </a:lnRef>
+          <a:fillRef idx="3">
+            <a:schemeClr val="accent1"/>
+          </a:fillRef>
+          <a:effectRef idx="2">
+            <a:schemeClr val="accent1"/>
+          </a:effectRef>
+          <a:fontRef idx="minor">
+            <a:schemeClr val="lt1"/>
+          </a:fontRef>
+        </p:style>
+        <p:txBody>
+          <a:bodyPr rtlCol="0" anchor="ctr"/>
+          <a:lstStyle/>
+          <a:p>
+            <a:pPr algn="ctr"/>
+          </a:p>
+        </p:txBody>
+      </p:sp>
+      <p:sp>
+        <p:nvSpPr>
+          <p:cNvPr id="7" name="TextBox 6"/>
+          <p:cNvSpPr txBox="1"/>
+          <p:nvPr/>
+        </p:nvSpPr>
+        <p:spPr>
+          <a:xfrm>
+            <a:off x="6217920" y="2194560"/>
+            <a:ext cx="5303520" cy="457200"/>
+          </a:xfrm>
+          <a:prstGeom prst="rect">
+            <a:avLst/>
+          </a:prstGeom>
+          <a:noFill/>
+        </p:spPr>
+        <p:txBody>
+          <a:bodyPr wrap="square" lIns="0" rIns="0" tIns="0" bIns="0" anchor="t">
+            <a:spAutoFit/>
+          </a:bodyPr>
+          <a:lstStyle/>
+          <a:p>
+            <a:pPr algn="ctr"/>
+            <a:r>
+              <a:rPr sz="2200" b="1" i="0">
+                <a:solidFill>
+                  <a:srgbClr val="1F6FEB"/>
+                </a:solidFill>
+                <a:latin typeface="Helvetica"/>
+              </a:rPr>
+              <a:t>800 × 800</a:t>
+            </a:r>
+          </a:p>
+        </p:txBody>
+      </p:sp>
+      <p:sp>
+        <p:nvSpPr>
+          <p:cNvPr id="8" name="TextBox 7"/>
+          <p:cNvSpPr txBox="1"/>
+          <p:nvPr/>
+        </p:nvSpPr>
+        <p:spPr>
+          <a:xfrm>
+            <a:off x="6217920" y="2743200"/>
+            <a:ext cx="5303520" cy="1828800"/>
+          </a:xfrm>
+          <a:prstGeom prst="rect">
+            <a:avLst/>
+          </a:prstGeom>
+          <a:noFill/>
+        </p:spPr>
+        <p:txBody>
+          <a:bodyPr wrap="square" lIns="0" rIns="0" tIns="0" bIns="0" anchor="t">
+            <a:spAutoFit/>
+          </a:bodyPr>
+          <a:lstStyle/>
+          <a:p>
+            <a:pPr algn="ctr"/>
+            <a:r>
+              <a:rPr sz="8800" b="1" i="0">
+                <a:solidFill>
+                  <a:srgbClr val="2CA02C"/>
+                </a:solidFill>
+                <a:latin typeface="Helvetica"/>
+              </a:rPr>
+              <a:t>37.01</a:t>
+            </a:r>
+          </a:p>
+        </p:txBody>
+      </p:sp>
+      <p:sp>
+        <p:nvSpPr>
+          <p:cNvPr id="9" name="TextBox 8"/>
+          <p:cNvSpPr txBox="1"/>
+          <p:nvPr/>
+        </p:nvSpPr>
+        <p:spPr>
+          <a:xfrm>
+            <a:off x="640080" y="5120640"/>
+            <a:ext cx="10972800" cy="457200"/>
+          </a:xfrm>
+          <a:prstGeom prst="rect">
+            <a:avLst/>
+          </a:prstGeom>
+          <a:noFill/>
+        </p:spPr>
+        <p:txBody>
+          <a:bodyPr wrap="square" lIns="0" rIns="0" tIns="0" bIns="0" anchor="t">
+            <a:spAutoFit/>
+          </a:bodyPr>
+          <a:lstStyle/>
+          <a:p>
+            <a:pPr algn="ctr"/>
+            <a:r>
+              <a:rPr sz="2200" b="0" i="1">
+                <a:solidFill>
+                  <a:srgbClr val="1A1A2E"/>
+                </a:solidFill>
+                <a:latin typeface="Helvetica"/>
+              </a:rPr>
+              <a:t>+2.76 from more pixels.</a:t>
+            </a:r>
+          </a:p>
+        </p:txBody>
+      </p:sp>
+      <p:sp>
+        <p:nvSpPr>
+          <p:cNvPr id="10" name="TextBox 9"/>
+          <p:cNvSpPr txBox="1"/>
+          <p:nvPr/>
+        </p:nvSpPr>
+        <p:spPr>
+          <a:xfrm>
+            <a:off x="640080" y="5669280"/>
+            <a:ext cx="10972800" cy="457200"/>
+          </a:xfrm>
+          <a:prstGeom prst="rect">
+            <a:avLst/>
+          </a:prstGeom>
+          <a:noFill/>
+        </p:spPr>
+        <p:txBody>
+          <a:bodyPr wrap="square" lIns="0" rIns="0" tIns="0" bIns="0" anchor="t">
+            <a:spAutoFit/>
+          </a:bodyPr>
+          <a:lstStyle/>
+          <a:p>
+            <a:pPr algn="ctr"/>
+            <a:r>
+              <a:rPr sz="1600" b="0" i="0">
+                <a:solidFill>
+                  <a:srgbClr val="666677"/>
+                </a:solidFill>
+                <a:latin typeface="Helvetica"/>
+              </a:rPr>
+              <a:t>Feedback helps. Spatial sampling helps too.</a:t>
+            </a:r>
+          </a:p>
+        </p:txBody>
+      </p:sp>
+      <p:sp>
+        <p:nvSpPr>
+          <p:cNvPr id="11" name="TextBox 10"/>
+          <p:cNvSpPr txBox="1"/>
+          <p:nvPr/>
+        </p:nvSpPr>
+        <p:spPr>
+          <a:xfrm>
+            <a:off x="640080" y="6446520"/>
+            <a:ext cx="9144000" cy="274320"/>
+          </a:xfrm>
+          <a:prstGeom prst="rect">
+            <a:avLst/>
+          </a:prstGeom>
+          <a:noFill/>
+        </p:spPr>
+        <p:txBody>
+          <a:bodyPr wrap="square" lIns="0" rIns="0" tIns="0" bIns="0" anchor="t">
+            <a:spAutoFit/>
+          </a:bodyPr>
+          <a:lstStyle/>
+          <a:p>
+            <a:pPr algn="l"/>
+            <a:r>
+              <a:rPr sz="1000" b="0" i="0">
+                <a:solidFill>
+                  <a:srgbClr val="666677"/>
+                </a:solidFill>
+                <a:latin typeface="Helvetica"/>
+              </a:rPr>
+              <a:t>5. Final Results  •  Feedback-Augmented RT-DETR  •  Hatem Saadallah &amp; Nour Jennane</a:t>
+            </a:r>
+          </a:p>
+        </p:txBody>
+      </p:sp>
+      <p:sp>
+        <p:nvSpPr>
+          <p:cNvPr id="12" name="TextBox 11"/>
+          <p:cNvSpPr txBox="1"/>
+          <p:nvPr/>
+        </p:nvSpPr>
+        <p:spPr>
+          <a:xfrm>
+            <a:off x="10515600" y="6446520"/>
+            <a:ext cx="1097280" cy="274320"/>
+          </a:xfrm>
+          <a:prstGeom prst="rect">
+            <a:avLst/>
+          </a:prstGeom>
+          <a:noFill/>
+        </p:spPr>
+        <p:txBody>
+          <a:bodyPr wrap="square" lIns="0" rIns="0" tIns="0" bIns="0" anchor="t">
+            <a:spAutoFit/>
+          </a:bodyPr>
+          <a:lstStyle/>
+          <a:p>
+            <a:pPr algn="r"/>
+            <a:r>
+              <a:rPr sz="1000" b="0" i="0">
+                <a:solidFill>
+                  <a:srgbClr val="666677"/>
+                </a:solidFill>
+                <a:latin typeface="Helvetica"/>
+              </a:rPr>
+              <a:t>20 / 24</a:t>
+            </a:r>
+          </a:p>
+        </p:txBody>
+      </p:sp>
+    </p:spTree>
+  </p:cSld>
+  <p:clrMapOvr>
+    <a:masterClrMapping/>
+  </p:clrMapOvr>
+</p:sld>
+</file>
+
+<file path=ppt/slides/slide21.xml><?xml version="1.0" encoding="utf-8"?>
+<p:sld xmlns:a="http://schemas.openxmlformats.org/drawingml/2006/main" xmlns:p="http://schemas.openxmlformats.org/presentationml/2006/main" xmlns:r="http://schemas.openxmlformats.org/officeDocument/2006/relationships">
+  <p:cSld>
+    <p:spTree>
+      <p:nvGrpSpPr>
+        <p:cNvPr id="1" name=""/>
+        <p:cNvGrpSpPr/>
+        <p:nvPr/>
+      </p:nvGrpSpPr>
+      <p:grpSpPr/>
+      <p:sp>
+        <p:nvSpPr>
+          <p:cNvPr id="2" name="TextBox 1"/>
+          <p:cNvSpPr txBox="1"/>
+          <p:nvPr/>
+        </p:nvSpPr>
+        <p:spPr>
+          <a:xfrm>
+            <a:off x="640080" y="457200"/>
+            <a:ext cx="10972800" cy="822960"/>
+          </a:xfrm>
+          <a:prstGeom prst="rect">
+            <a:avLst/>
+          </a:prstGeom>
+          <a:noFill/>
+        </p:spPr>
+        <p:txBody>
+          <a:bodyPr wrap="square" lIns="0" rIns="0" tIns="0" bIns="0" anchor="t">
+            <a:spAutoFit/>
+          </a:bodyPr>
+          <a:lstStyle/>
+          <a:p>
+            <a:pPr algn="l"/>
+            <a:r>
+              <a:rPr sz="3400" b="1" i="0">
+                <a:solidFill>
+                  <a:srgbClr val="1F6FEB"/>
+                </a:solidFill>
+                <a:latin typeface="Helvetica"/>
+              </a:rPr>
+              <a:t>Strengths and limitations</a:t>
+            </a:r>
+          </a:p>
+        </p:txBody>
+      </p:sp>
+      <p:sp>
+        <p:nvSpPr>
+          <p:cNvPr id="3" name="Rectangle 2"/>
+          <p:cNvSpPr/>
+          <p:nvPr/>
+        </p:nvSpPr>
+        <p:spPr>
+          <a:xfrm>
+            <a:off x="640080" y="1143000"/>
+            <a:ext cx="640080" cy="54864"/>
+          </a:xfrm>
+          <a:prstGeom prst="rect">
+            <a:avLst/>
+          </a:prstGeom>
+          <a:solidFill>
+            <a:srgbClr val="1F6FEB"/>
+          </a:solidFill>
+          <a:ln>
+            <a:noFill/>
+          </a:ln>
+        </p:spPr>
+        <p:style>
+          <a:lnRef idx="1">
+            <a:schemeClr val="accent1"/>
+          </a:lnRef>
+          <a:fillRef idx="3">
+            <a:schemeClr val="accent1"/>
+          </a:fillRef>
+          <a:effectRef idx="2">
+            <a:schemeClr val="accent1"/>
+          </a:effectRef>
+          <a:fontRef idx="minor">
+            <a:schemeClr val="lt1"/>
+          </a:fontRef>
+        </p:style>
+        <p:txBody>
+          <a:bodyPr rtlCol="0" anchor="ctr"/>
+          <a:lstStyle/>
+          <a:p>
+            <a:pPr algn="ctr"/>
+          </a:p>
+        </p:txBody>
+      </p:sp>
+      <p:sp>
+        <p:nvSpPr>
+          <p:cNvPr id="4" name="Rounded Rectangle 3"/>
+          <p:cNvSpPr/>
+          <p:nvPr/>
+        </p:nvSpPr>
+        <p:spPr>
+          <a:xfrm>
+            <a:off x="640080" y="1645920"/>
+            <a:ext cx="5394960" cy="4297680"/>
+          </a:xfrm>
+          <a:prstGeom prst="roundRect">
+            <a:avLst/>
+          </a:prstGeom>
+          <a:solidFill>
+            <a:srgbClr val="E8F7E8"/>
+          </a:solidFill>
+          <a:ln w="19050">
+            <a:solidFill>
+              <a:srgbClr val="2CA02C"/>
+            </a:solidFill>
+          </a:ln>
+          <a:effectLst/>
+        </p:spPr>
+        <p:style>
+          <a:lnRef idx="1">
+            <a:schemeClr val="accent1"/>
+          </a:lnRef>
+          <a:fillRef idx="3">
+            <a:schemeClr val="accent1"/>
+          </a:fillRef>
+          <a:effectRef idx="2">
+            <a:schemeClr val="accent1"/>
+          </a:effectRef>
+          <a:fontRef idx="minor">
+            <a:schemeClr val="lt1"/>
+          </a:fontRef>
+        </p:style>
+        <p:txBody>
+          <a:bodyPr rtlCol="0" anchor="ctr"/>
+          <a:lstStyle/>
+          <a:p>
+            <a:pPr algn="ctr"/>
+          </a:p>
+        </p:txBody>
+      </p:sp>
+      <p:sp>
+        <p:nvSpPr>
+          <p:cNvPr id="5" name="TextBox 4"/>
+          <p:cNvSpPr txBox="1"/>
+          <p:nvPr/>
+        </p:nvSpPr>
+        <p:spPr>
+          <a:xfrm>
+            <a:off x="822960" y="1828800"/>
+            <a:ext cx="5029200" cy="548640"/>
+          </a:xfrm>
+          <a:prstGeom prst="rect">
+            <a:avLst/>
+          </a:prstGeom>
+          <a:noFill/>
+        </p:spPr>
+        <p:txBody>
+          <a:bodyPr wrap="square" lIns="0" rIns="0" tIns="0" bIns="0" anchor="t">
+            <a:spAutoFit/>
+          </a:bodyPr>
+          <a:lstStyle/>
+          <a:p>
+            <a:pPr algn="l"/>
+            <a:r>
+              <a:rPr sz="2200" b="1" i="0">
+                <a:solidFill>
+                  <a:srgbClr val="2CA02C"/>
+                </a:solidFill>
+                <a:latin typeface="Helvetica"/>
+              </a:rPr>
+              <a:t>+  Strengths</a:t>
+            </a:r>
+          </a:p>
+        </p:txBody>
+      </p:sp>
+      <p:sp>
+        <p:nvSpPr>
+          <p:cNvPr id="6" name="TextBox 5"/>
+          <p:cNvSpPr txBox="1"/>
+          <p:nvPr/>
+        </p:nvSpPr>
+        <p:spPr>
+          <a:xfrm>
+            <a:off x="868680" y="2468880"/>
+            <a:ext cx="5029200" cy="731520"/>
+          </a:xfrm>
+          <a:prstGeom prst="rect">
+            <a:avLst/>
+          </a:prstGeom>
+          <a:noFill/>
+        </p:spPr>
+        <p:txBody>
+          <a:bodyPr wrap="square" lIns="0" rIns="0" tIns="0" bIns="0" anchor="t">
+            <a:spAutoFit/>
+          </a:bodyPr>
+          <a:lstStyle/>
+          <a:p>
+            <a:pPr algn="l"/>
+            <a:r>
+              <a:rPr sz="1400" b="0" i="0">
+                <a:solidFill>
+                  <a:srgbClr val="1A1A2E"/>
+                </a:solidFill>
+                <a:latin typeface="Helvetica"/>
+              </a:rPr>
+              <a:t>•  Causal contribution: +0.99 APₛ on the same checkpoint.</a:t>
+            </a:r>
+          </a:p>
+        </p:txBody>
+      </p:sp>
+      <p:sp>
+        <p:nvSpPr>
+          <p:cNvPr id="7" name="TextBox 6"/>
+          <p:cNvSpPr txBox="1"/>
+          <p:nvPr/>
+        </p:nvSpPr>
+        <p:spPr>
+          <a:xfrm>
+            <a:off x="868680" y="3246120"/>
+            <a:ext cx="5029200" cy="731520"/>
+          </a:xfrm>
+          <a:prstGeom prst="rect">
+            <a:avLst/>
+          </a:prstGeom>
+          <a:noFill/>
+        </p:spPr>
+        <p:txBody>
+          <a:bodyPr wrap="square" lIns="0" rIns="0" tIns="0" bIns="0" anchor="t">
+            <a:spAutoFit/>
+          </a:bodyPr>
+          <a:lstStyle/>
+          <a:p>
+            <a:pPr algn="l"/>
+            <a:r>
+              <a:rPr sz="1400" b="0" i="0">
+                <a:solidFill>
+                  <a:srgbClr val="1A1A2E"/>
+                </a:solidFill>
+                <a:latin typeface="Helvetica"/>
+              </a:rPr>
+              <a:t>•  Zero new parameters relative to v1.</a:t>
+            </a:r>
+          </a:p>
+        </p:txBody>
+      </p:sp>
+      <p:sp>
+        <p:nvSpPr>
+          <p:cNvPr id="8" name="TextBox 7"/>
+          <p:cNvSpPr txBox="1"/>
+          <p:nvPr/>
+        </p:nvSpPr>
+        <p:spPr>
+          <a:xfrm>
+            <a:off x="868680" y="4023360"/>
+            <a:ext cx="5029200" cy="731520"/>
+          </a:xfrm>
+          <a:prstGeom prst="rect">
+            <a:avLst/>
+          </a:prstGeom>
+          <a:noFill/>
+        </p:spPr>
+        <p:txBody>
+          <a:bodyPr wrap="square" lIns="0" rIns="0" tIns="0" bIns="0" anchor="t">
+            <a:spAutoFit/>
+          </a:bodyPr>
+          <a:lstStyle/>
+          <a:p>
+            <a:pPr algn="l"/>
+            <a:r>
+              <a:rPr sz="1400" b="0" i="0">
+                <a:solidFill>
+                  <a:srgbClr val="1A1A2E"/>
+                </a:solidFill>
+                <a:latin typeface="Helvetica"/>
+              </a:rPr>
+              <a:t>•  Consistent improvement on every metric (AP, APₛ, APₘ, APₗ).</a:t>
+            </a:r>
+          </a:p>
+        </p:txBody>
+      </p:sp>
+      <p:sp>
+        <p:nvSpPr>
+          <p:cNvPr id="9" name="TextBox 8"/>
+          <p:cNvSpPr txBox="1"/>
+          <p:nvPr/>
+        </p:nvSpPr>
+        <p:spPr>
+          <a:xfrm>
+            <a:off x="868680" y="4800600"/>
+            <a:ext cx="5029200" cy="731520"/>
+          </a:xfrm>
+          <a:prstGeom prst="rect">
+            <a:avLst/>
+          </a:prstGeom>
+          <a:noFill/>
+        </p:spPr>
+        <p:txBody>
+          <a:bodyPr wrap="square" lIns="0" rIns="0" tIns="0" bIns="0" anchor="t">
+            <a:spAutoFit/>
+          </a:bodyPr>
+          <a:lstStyle/>
+          <a:p>
+            <a:pPr algn="l"/>
+            <a:r>
+              <a:rPr sz="1400" b="0" i="0">
+                <a:solidFill>
+                  <a:srgbClr val="1A1A2E"/>
+                </a:solidFill>
+                <a:latin typeface="Helvetica"/>
+              </a:rPr>
+              <a:t>•  Robust at higher resolution (37.01 APₛ at 800×800).</a:t>
+            </a:r>
+          </a:p>
+        </p:txBody>
+      </p:sp>
+      <p:sp>
+        <p:nvSpPr>
+          <p:cNvPr id="10" name="Rounded Rectangle 9"/>
+          <p:cNvSpPr/>
+          <p:nvPr/>
+        </p:nvSpPr>
+        <p:spPr>
+          <a:xfrm>
+            <a:off x="6217920" y="1645920"/>
+            <a:ext cx="5394960" cy="4297680"/>
+          </a:xfrm>
+          <a:prstGeom prst="roundRect">
+            <a:avLst/>
+          </a:prstGeom>
+          <a:solidFill>
+            <a:srgbClr val="FDECEC"/>
+          </a:solidFill>
+          <a:ln w="19050">
+            <a:solidFill>
+              <a:srgbClr val="D62C2E"/>
+            </a:solidFill>
+          </a:ln>
+          <a:effectLst/>
+        </p:spPr>
+        <p:style>
+          <a:lnRef idx="1">
+            <a:schemeClr val="accent1"/>
+          </a:lnRef>
+          <a:fillRef idx="3">
+            <a:schemeClr val="accent1"/>
+          </a:fillRef>
+          <a:effectRef idx="2">
+            <a:schemeClr val="accent1"/>
+          </a:effectRef>
+          <a:fontRef idx="minor">
+            <a:schemeClr val="lt1"/>
+          </a:fontRef>
+        </p:style>
+        <p:txBody>
+          <a:bodyPr rtlCol="0" anchor="ctr"/>
+          <a:lstStyle/>
+          <a:p>
+            <a:pPr algn="ctr"/>
+          </a:p>
+        </p:txBody>
+      </p:sp>
+      <p:sp>
+        <p:nvSpPr>
+          <p:cNvPr id="11" name="TextBox 10"/>
+          <p:cNvSpPr txBox="1"/>
+          <p:nvPr/>
+        </p:nvSpPr>
+        <p:spPr>
+          <a:xfrm>
+            <a:off x="6400800" y="1828800"/>
+            <a:ext cx="5029200" cy="548640"/>
+          </a:xfrm>
+          <a:prstGeom prst="rect">
+            <a:avLst/>
+          </a:prstGeom>
+          <a:noFill/>
+        </p:spPr>
+        <p:txBody>
+          <a:bodyPr wrap="square" lIns="0" rIns="0" tIns="0" bIns="0" anchor="t">
+            <a:spAutoFit/>
+          </a:bodyPr>
+          <a:lstStyle/>
+          <a:p>
+            <a:pPr algn="l"/>
+            <a:r>
+              <a:rPr sz="2200" b="1" i="0">
+                <a:solidFill>
+                  <a:srgbClr val="D62C2E"/>
+                </a:solidFill>
+                <a:latin typeface="Helvetica"/>
+              </a:rPr>
+              <a:t>−  Limitations</a:t>
+            </a:r>
+          </a:p>
+        </p:txBody>
+      </p:sp>
+      <p:sp>
+        <p:nvSpPr>
+          <p:cNvPr id="12" name="TextBox 11"/>
+          <p:cNvSpPr txBox="1"/>
+          <p:nvPr/>
+        </p:nvSpPr>
+        <p:spPr>
+          <a:xfrm>
+            <a:off x="6446520" y="2468880"/>
+            <a:ext cx="5029200" cy="731520"/>
+          </a:xfrm>
+          <a:prstGeom prst="rect">
+            <a:avLst/>
+          </a:prstGeom>
+          <a:noFill/>
+        </p:spPr>
+        <p:txBody>
+          <a:bodyPr wrap="square" lIns="0" rIns="0" tIns="0" bIns="0" anchor="t">
+            <a:spAutoFit/>
+          </a:bodyPr>
+          <a:lstStyle/>
+          <a:p>
+            <a:pPr algn="l"/>
+            <a:r>
+              <a:rPr sz="1400" b="0" i="0">
+                <a:solidFill>
+                  <a:srgbClr val="1A1A2E"/>
+                </a:solidFill>
+                <a:latin typeface="Helvetica"/>
+              </a:rPr>
+              <a:t>•  Single seed — multi-seed variance unmeasured.</a:t>
+            </a:r>
+          </a:p>
+        </p:txBody>
+      </p:sp>
+      <p:sp>
+        <p:nvSpPr>
+          <p:cNvPr id="13" name="TextBox 12"/>
+          <p:cNvSpPr txBox="1"/>
+          <p:nvPr/>
+        </p:nvSpPr>
+        <p:spPr>
+          <a:xfrm>
+            <a:off x="6446520" y="3246120"/>
+            <a:ext cx="5029200" cy="731520"/>
+          </a:xfrm>
+          <a:prstGeom prst="rect">
+            <a:avLst/>
+          </a:prstGeom>
+          <a:noFill/>
+        </p:spPr>
+        <p:txBody>
+          <a:bodyPr wrap="square" lIns="0" rIns="0" tIns="0" bIns="0" anchor="t">
+            <a:spAutoFit/>
+          </a:bodyPr>
+          <a:lstStyle/>
+          <a:p>
+            <a:pPr algn="l"/>
+            <a:r>
+              <a:rPr sz="1400" b="0" i="0">
+                <a:solidFill>
+                  <a:srgbClr val="1A1A2E"/>
+                </a:solidFill>
+                <a:latin typeface="Helvetica"/>
+              </a:rPr>
+              <a:t>•  13-epoch finetune (vs 72-epoch from scratch).</a:t>
+            </a:r>
+          </a:p>
+        </p:txBody>
+      </p:sp>
+      <p:sp>
+        <p:nvSpPr>
+          <p:cNvPr id="14" name="TextBox 13"/>
+          <p:cNvSpPr txBox="1"/>
+          <p:nvPr/>
+        </p:nvSpPr>
+        <p:spPr>
+          <a:xfrm>
+            <a:off x="6446520" y="4023360"/>
+            <a:ext cx="5029200" cy="731520"/>
+          </a:xfrm>
+          <a:prstGeom prst="rect">
+            <a:avLst/>
+          </a:prstGeom>
+          <a:noFill/>
+        </p:spPr>
+        <p:txBody>
+          <a:bodyPr wrap="square" lIns="0" rIns="0" tIns="0" bIns="0" anchor="t">
+            <a:spAutoFit/>
+          </a:bodyPr>
+          <a:lstStyle/>
+          <a:p>
+            <a:pPr algn="l"/>
+            <a:r>
+              <a:rPr sz="1400" b="0" i="0">
+                <a:solidFill>
+                  <a:srgbClr val="1A1A2E"/>
+                </a:solidFill>
+                <a:latin typeface="Helvetica"/>
+              </a:rPr>
+              <a:t>•  Floor and mask not isolated (a 2×2 ablation is missing).</a:t>
+            </a:r>
+          </a:p>
+        </p:txBody>
+      </p:sp>
+      <p:sp>
+        <p:nvSpPr>
+          <p:cNvPr id="15" name="TextBox 14"/>
+          <p:cNvSpPr txBox="1"/>
+          <p:nvPr/>
+        </p:nvSpPr>
+        <p:spPr>
+          <a:xfrm>
+            <a:off x="6446520" y="4800600"/>
+            <a:ext cx="5029200" cy="731520"/>
+          </a:xfrm>
+          <a:prstGeom prst="rect">
+            <a:avLst/>
+          </a:prstGeom>
+          <a:noFill/>
+        </p:spPr>
+        <p:txBody>
+          <a:bodyPr wrap="square" lIns="0" rIns="0" tIns="0" bIns="0" anchor="t">
+            <a:spAutoFit/>
+          </a:bodyPr>
+          <a:lstStyle/>
+          <a:p>
+            <a:pPr algn="l"/>
+            <a:r>
+              <a:rPr sz="1400" b="0" i="0">
+                <a:solidFill>
+                  <a:srgbClr val="1A1A2E"/>
+                </a:solidFill>
+                <a:latin typeface="Helvetica"/>
+              </a:rPr>
+              <a:t>•  ≈2× slower than baseline (53 → 26 FPS) — cost is the P2 level.</a:t>
+            </a:r>
+          </a:p>
+        </p:txBody>
+      </p:sp>
+      <p:sp>
+        <p:nvSpPr>
+          <p:cNvPr id="16" name="TextBox 15"/>
+          <p:cNvSpPr txBox="1"/>
+          <p:nvPr/>
+        </p:nvSpPr>
+        <p:spPr>
+          <a:xfrm>
+            <a:off x="640080" y="6080760"/>
+            <a:ext cx="10972800" cy="365760"/>
+          </a:xfrm>
+          <a:prstGeom prst="rect">
+            <a:avLst/>
+          </a:prstGeom>
+          <a:noFill/>
+        </p:spPr>
+        <p:txBody>
+          <a:bodyPr wrap="square" lIns="0" rIns="0" tIns="0" bIns="0" anchor="t">
+            <a:spAutoFit/>
+          </a:bodyPr>
+          <a:lstStyle/>
+          <a:p>
+            <a:pPr algn="ctr"/>
+            <a:r>
+              <a:rPr sz="1200" b="0" i="1">
+                <a:solidFill>
+                  <a:srgbClr val="666677"/>
+                </a:solidFill>
+                <a:latin typeface="Helvetica"/>
+              </a:rPr>
+              <a:t>Strong on accuracy; pays in inference speed. The next slide proposes a way to recover speed.</a:t>
+            </a:r>
+          </a:p>
+        </p:txBody>
+      </p:sp>
+      <p:sp>
+        <p:nvSpPr>
+          <p:cNvPr id="17" name="TextBox 16"/>
+          <p:cNvSpPr txBox="1"/>
+          <p:nvPr/>
+        </p:nvSpPr>
+        <p:spPr>
+          <a:xfrm>
+            <a:off x="640080" y="6446520"/>
+            <a:ext cx="9144000" cy="274320"/>
+          </a:xfrm>
+          <a:prstGeom prst="rect">
+            <a:avLst/>
+          </a:prstGeom>
+          <a:noFill/>
+        </p:spPr>
+        <p:txBody>
+          <a:bodyPr wrap="square" lIns="0" rIns="0" tIns="0" bIns="0" anchor="t">
+            <a:spAutoFit/>
+          </a:bodyPr>
+          <a:lstStyle/>
+          <a:p>
+            <a:pPr algn="l"/>
+            <a:r>
+              <a:rPr sz="1000" b="0" i="0">
+                <a:solidFill>
+                  <a:srgbClr val="666677"/>
+                </a:solidFill>
+                <a:latin typeface="Helvetica"/>
+              </a:rPr>
+              <a:t>5. Final Results  •  Feedback-Augmented RT-DETR  •  Hatem Saadallah &amp; Nour Jennane</a:t>
+            </a:r>
+          </a:p>
+        </p:txBody>
+      </p:sp>
+      <p:sp>
+        <p:nvSpPr>
+          <p:cNvPr id="18" name="TextBox 17"/>
+          <p:cNvSpPr txBox="1"/>
+          <p:nvPr/>
+        </p:nvSpPr>
+        <p:spPr>
+          <a:xfrm>
+            <a:off x="10515600" y="6446520"/>
+            <a:ext cx="1097280" cy="274320"/>
+          </a:xfrm>
+          <a:prstGeom prst="rect">
+            <a:avLst/>
+          </a:prstGeom>
+          <a:noFill/>
+        </p:spPr>
+        <p:txBody>
+          <a:bodyPr wrap="square" lIns="0" rIns="0" tIns="0" bIns="0" anchor="t">
+            <a:spAutoFit/>
+          </a:bodyPr>
+          <a:lstStyle/>
+          <a:p>
+            <a:pPr algn="r"/>
+            <a:r>
+              <a:rPr sz="1000" b="0" i="0">
+                <a:solidFill>
+                  <a:srgbClr val="666677"/>
+                </a:solidFill>
+                <a:latin typeface="Helvetica"/>
+              </a:rPr>
+              <a:t>21 / 24</a:t>
+            </a:r>
+          </a:p>
+        </p:txBody>
+      </p:sp>
+    </p:spTree>
+  </p:cSld>
+  <p:clrMapOvr>
+    <a:masterClrMapping/>
+  </p:clrMapOvr>
+</p:sld>
+</file>
+
+<file path=ppt/slides/slide22.xml><?xml version="1.0" encoding="utf-8"?>
+<p:sld xmlns:a="http://schemas.openxmlformats.org/drawingml/2006/main" xmlns:p="http://schemas.openxmlformats.org/presentationml/2006/main" xmlns:r="http://schemas.openxmlformats.org/officeDocument/2006/relationships">
+  <p:cSld>
+    <p:spTree>
+      <p:nvGrpSpPr>
+        <p:cNvPr id="1" name=""/>
+        <p:cNvGrpSpPr/>
+        <p:nvPr/>
+      </p:nvGrpSpPr>
+      <p:grpSpPr/>
+      <p:sp>
+        <p:nvSpPr>
+          <p:cNvPr id="2" name="TextBox 1"/>
+          <p:cNvSpPr txBox="1"/>
+          <p:nvPr/>
+        </p:nvSpPr>
+        <p:spPr>
+          <a:xfrm>
+            <a:off x="640080" y="457200"/>
+            <a:ext cx="10972800" cy="822960"/>
+          </a:xfrm>
+          <a:prstGeom prst="rect">
+            <a:avLst/>
+          </a:prstGeom>
+          <a:noFill/>
+        </p:spPr>
+        <p:txBody>
+          <a:bodyPr wrap="square" lIns="0" rIns="0" tIns="0" bIns="0" anchor="t">
+            <a:spAutoFit/>
+          </a:bodyPr>
+          <a:lstStyle/>
+          <a:p>
+            <a:pPr algn="l"/>
+            <a:r>
+              <a:rPr sz="3400" b="1" i="0">
+                <a:solidFill>
+                  <a:srgbClr val="1F6FEB"/>
+                </a:solidFill>
+                <a:latin typeface="Helvetica"/>
+              </a:rPr>
+              <a:t>Future work: recovering inference speed</a:t>
+            </a:r>
+          </a:p>
+        </p:txBody>
+      </p:sp>
+      <p:sp>
+        <p:nvSpPr>
+          <p:cNvPr id="3" name="Rectangle 2"/>
+          <p:cNvSpPr/>
+          <p:nvPr/>
+        </p:nvSpPr>
+        <p:spPr>
+          <a:xfrm>
+            <a:off x="640080" y="1143000"/>
+            <a:ext cx="640080" cy="54864"/>
+          </a:xfrm>
+          <a:prstGeom prst="rect">
+            <a:avLst/>
+          </a:prstGeom>
+          <a:solidFill>
+            <a:srgbClr val="1F6FEB"/>
+          </a:solidFill>
+          <a:ln>
+            <a:noFill/>
+          </a:ln>
+        </p:spPr>
+        <p:style>
+          <a:lnRef idx="1">
+            <a:schemeClr val="accent1"/>
+          </a:lnRef>
+          <a:fillRef idx="3">
+            <a:schemeClr val="accent1"/>
+          </a:fillRef>
+          <a:effectRef idx="2">
+            <a:schemeClr val="accent1"/>
+          </a:effectRef>
+          <a:fontRef idx="minor">
+            <a:schemeClr val="lt1"/>
+          </a:fontRef>
+        </p:style>
+        <p:txBody>
+          <a:bodyPr rtlCol="0" anchor="ctr"/>
+          <a:lstStyle/>
+          <a:p>
+            <a:pPr algn="ctr"/>
+          </a:p>
+        </p:txBody>
+      </p:sp>
+      <p:sp>
+        <p:nvSpPr>
+          <p:cNvPr id="4" name="TextBox 3"/>
+          <p:cNvSpPr txBox="1"/>
+          <p:nvPr/>
+        </p:nvSpPr>
+        <p:spPr>
+          <a:xfrm>
+            <a:off x="640080" y="1417320"/>
+            <a:ext cx="10972800" cy="457200"/>
+          </a:xfrm>
+          <a:prstGeom prst="rect">
+            <a:avLst/>
+          </a:prstGeom>
+          <a:noFill/>
+        </p:spPr>
+        <p:txBody>
+          <a:bodyPr wrap="square" lIns="0" rIns="0" tIns="0" bIns="0" anchor="t">
+            <a:spAutoFit/>
+          </a:bodyPr>
+          <a:lstStyle/>
+          <a:p>
+            <a:pPr algn="ctr"/>
+            <a:r>
+              <a:rPr sz="1800" b="0" i="1">
+                <a:solidFill>
+                  <a:srgbClr val="1A1A2E"/>
+                </a:solidFill>
+                <a:latin typeface="Helvetica"/>
+              </a:rPr>
+              <a:t>The 2× slowdown comes from the P2 level, not the feedback module.</a:t>
+            </a:r>
+          </a:p>
+        </p:txBody>
+      </p:sp>
+      <p:sp>
+        <p:nvSpPr>
+          <p:cNvPr id="5" name="Rounded Rectangle 4"/>
+          <p:cNvSpPr/>
+          <p:nvPr/>
+        </p:nvSpPr>
+        <p:spPr>
+          <a:xfrm>
+            <a:off x="640080" y="2194560"/>
+            <a:ext cx="3657600" cy="3474720"/>
+          </a:xfrm>
+          <a:prstGeom prst="roundRect">
+            <a:avLst/>
+          </a:prstGeom>
+          <a:solidFill>
+            <a:srgbClr val="F0F6FF"/>
+          </a:solidFill>
+          <a:ln w="15240">
+            <a:solidFill>
+              <a:srgbClr val="1F6FEB"/>
+            </a:solidFill>
+          </a:ln>
+          <a:effectLst/>
+        </p:spPr>
+        <p:style>
+          <a:lnRef idx="1">
+            <a:schemeClr val="accent1"/>
+          </a:lnRef>
+          <a:fillRef idx="3">
+            <a:schemeClr val="accent1"/>
+          </a:fillRef>
+          <a:effectRef idx="2">
+            <a:schemeClr val="accent1"/>
+          </a:effectRef>
+          <a:fontRef idx="minor">
+            <a:schemeClr val="lt1"/>
+          </a:fontRef>
+        </p:style>
+        <p:txBody>
+          <a:bodyPr rtlCol="0" anchor="ctr"/>
+          <a:lstStyle/>
+          <a:p>
+            <a:pPr algn="ctr"/>
+          </a:p>
+        </p:txBody>
+      </p:sp>
+      <p:sp>
+        <p:nvSpPr>
+          <p:cNvPr id="6" name="Oval 5"/>
+          <p:cNvSpPr/>
+          <p:nvPr/>
+        </p:nvSpPr>
+        <p:spPr>
+          <a:xfrm>
+            <a:off x="822960" y="2331720"/>
+            <a:ext cx="457200" cy="457200"/>
+          </a:xfrm>
+          <a:prstGeom prst="ellipse">
+            <a:avLst/>
+          </a:prstGeom>
+          <a:solidFill>
+            <a:srgbClr val="1F6FEB"/>
+          </a:solidFill>
+          <a:ln>
+            <a:noFill/>
+          </a:ln>
+        </p:spPr>
+        <p:style>
+          <a:lnRef idx="1">
+            <a:schemeClr val="accent1"/>
+          </a:lnRef>
+          <a:fillRef idx="3">
+            <a:schemeClr val="accent1"/>
+          </a:fillRef>
+          <a:effectRef idx="2">
+            <a:schemeClr val="accent1"/>
+          </a:effectRef>
+          <a:fontRef idx="minor">
+            <a:schemeClr val="lt1"/>
+          </a:fontRef>
+        </p:style>
+        <p:txBody>
+          <a:bodyPr rtlCol="0" anchor="ctr"/>
+          <a:lstStyle/>
+          <a:p>
+            <a:pPr algn="ctr"/>
+          </a:p>
+        </p:txBody>
+      </p:sp>
+      <p:sp>
+        <p:nvSpPr>
+          <p:cNvPr id="7" name="TextBox 6"/>
+          <p:cNvSpPr txBox="1"/>
+          <p:nvPr/>
+        </p:nvSpPr>
+        <p:spPr>
+          <a:xfrm>
+            <a:off x="822960" y="2359152"/>
+            <a:ext cx="457200" cy="457200"/>
+          </a:xfrm>
+          <a:prstGeom prst="rect">
+            <a:avLst/>
+          </a:prstGeom>
+          <a:noFill/>
+        </p:spPr>
+        <p:txBody>
+          <a:bodyPr wrap="square" lIns="0" rIns="0" tIns="0" bIns="0" anchor="t">
+            <a:spAutoFit/>
+          </a:bodyPr>
+          <a:lstStyle/>
+          <a:p>
+            <a:pPr algn="ctr"/>
+            <a:r>
+              <a:rPr sz="1800" b="1" i="0">
+                <a:solidFill>
+                  <a:srgbClr val="FFFFFF"/>
+                </a:solidFill>
+                <a:latin typeface="Helvetica"/>
+              </a:rPr>
+              <a:t>1</a:t>
+            </a:r>
+          </a:p>
+        </p:txBody>
+      </p:sp>
+      <p:sp>
+        <p:nvSpPr>
+          <p:cNvPr id="8" name="TextBox 7"/>
+          <p:cNvSpPr txBox="1"/>
+          <p:nvPr/>
+        </p:nvSpPr>
+        <p:spPr>
+          <a:xfrm>
+            <a:off x="1417320" y="2377440"/>
+            <a:ext cx="2743200" cy="457200"/>
+          </a:xfrm>
+          <a:prstGeom prst="rect">
+            <a:avLst/>
+          </a:prstGeom>
+          <a:noFill/>
+        </p:spPr>
+        <p:txBody>
+          <a:bodyPr wrap="square" lIns="0" rIns="0" tIns="0" bIns="0" anchor="t">
+            <a:spAutoFit/>
+          </a:bodyPr>
+          <a:lstStyle/>
+          <a:p>
+            <a:pPr algn="l"/>
+            <a:r>
+              <a:rPr sz="1500" b="1" i="0">
+                <a:solidFill>
+                  <a:srgbClr val="1A1A2E"/>
+                </a:solidFill>
+                <a:latin typeface="Helvetica"/>
+              </a:rPr>
+              <a:t>Drop P2 at inference</a:t>
+            </a:r>
+          </a:p>
+        </p:txBody>
+      </p:sp>
+      <p:sp>
+        <p:nvSpPr>
+          <p:cNvPr id="9" name="TextBox 8"/>
+          <p:cNvSpPr txBox="1"/>
+          <p:nvPr/>
+        </p:nvSpPr>
+        <p:spPr>
+          <a:xfrm>
+            <a:off x="822960" y="2926080"/>
+            <a:ext cx="3291840" cy="365760"/>
+          </a:xfrm>
+          <a:prstGeom prst="rect">
+            <a:avLst/>
+          </a:prstGeom>
+          <a:noFill/>
+        </p:spPr>
+        <p:txBody>
+          <a:bodyPr wrap="square" lIns="0" rIns="0" tIns="0" bIns="0" anchor="t">
+            <a:spAutoFit/>
+          </a:bodyPr>
+          <a:lstStyle/>
+          <a:p>
+            <a:pPr algn="l"/>
+            <a:r>
+              <a:rPr sz="1000" b="1" i="1">
+                <a:solidFill>
+                  <a:srgbClr val="1F6FEB"/>
+                </a:solidFill>
+                <a:latin typeface="Helvetica"/>
+              </a:rPr>
+              <a:t>fastest path</a:t>
+            </a:r>
+          </a:p>
+        </p:txBody>
+      </p:sp>
+      <p:sp>
+        <p:nvSpPr>
+          <p:cNvPr id="10" name="TextBox 9"/>
+          <p:cNvSpPr txBox="1"/>
+          <p:nvPr/>
+        </p:nvSpPr>
+        <p:spPr>
+          <a:xfrm>
+            <a:off x="822960" y="3383280"/>
+            <a:ext cx="3291840" cy="2011680"/>
+          </a:xfrm>
+          <a:prstGeom prst="rect">
+            <a:avLst/>
+          </a:prstGeom>
+          <a:noFill/>
+        </p:spPr>
+        <p:txBody>
+          <a:bodyPr wrap="square" lIns="0" rIns="0" tIns="0" bIns="0" anchor="t">
+            <a:spAutoFit/>
+          </a:bodyPr>
+          <a:lstStyle/>
+          <a:p>
+            <a:pPr algn="l"/>
+            <a:r>
+              <a:rPr sz="1200" b="0" i="0">
+                <a:solidFill>
+                  <a:srgbClr val="1A1A2E"/>
+                </a:solidFill>
+                <a:latin typeface="Helvetica"/>
+              </a:rPr>
+              <a:t>Test whether the +0.99 transfers to the original 3-level (P3–P5) setup.
+If it does → recover ~53 FPS at no accuracy cost.</a:t>
+            </a:r>
+          </a:p>
+        </p:txBody>
+      </p:sp>
+      <p:sp>
+        <p:nvSpPr>
+          <p:cNvPr id="11" name="Rounded Rectangle 10"/>
+          <p:cNvSpPr/>
+          <p:nvPr/>
+        </p:nvSpPr>
+        <p:spPr>
+          <a:xfrm>
+            <a:off x="4434840" y="2194560"/>
+            <a:ext cx="3657600" cy="3474720"/>
+          </a:xfrm>
+          <a:prstGeom prst="roundRect">
+            <a:avLst/>
+          </a:prstGeom>
+          <a:solidFill>
+            <a:srgbClr val="F0F6FF"/>
+          </a:solidFill>
+          <a:ln w="15240">
+            <a:solidFill>
+              <a:srgbClr val="1F6FEB"/>
+            </a:solidFill>
+          </a:ln>
+          <a:effectLst/>
+        </p:spPr>
+        <p:style>
+          <a:lnRef idx="1">
+            <a:schemeClr val="accent1"/>
+          </a:lnRef>
+          <a:fillRef idx="3">
+            <a:schemeClr val="accent1"/>
+          </a:fillRef>
+          <a:effectRef idx="2">
+            <a:schemeClr val="accent1"/>
+          </a:effectRef>
+          <a:fontRef idx="minor">
+            <a:schemeClr val="lt1"/>
+          </a:fontRef>
+        </p:style>
+        <p:txBody>
+          <a:bodyPr rtlCol="0" anchor="ctr"/>
+          <a:lstStyle/>
+          <a:p>
+            <a:pPr algn="ctr"/>
+          </a:p>
+        </p:txBody>
+      </p:sp>
+      <p:sp>
+        <p:nvSpPr>
+          <p:cNvPr id="12" name="Oval 11"/>
+          <p:cNvSpPr/>
+          <p:nvPr/>
+        </p:nvSpPr>
+        <p:spPr>
+          <a:xfrm>
+            <a:off x="4617720" y="2331720"/>
+            <a:ext cx="457200" cy="457200"/>
+          </a:xfrm>
+          <a:prstGeom prst="ellipse">
+            <a:avLst/>
+          </a:prstGeom>
+          <a:solidFill>
+            <a:srgbClr val="1F6FEB"/>
+          </a:solidFill>
+          <a:ln>
+            <a:noFill/>
+          </a:ln>
+        </p:spPr>
+        <p:style>
+          <a:lnRef idx="1">
+            <a:schemeClr val="accent1"/>
+          </a:lnRef>
+          <a:fillRef idx="3">
+            <a:schemeClr val="accent1"/>
+          </a:fillRef>
+          <a:effectRef idx="2">
+            <a:schemeClr val="accent1"/>
+          </a:effectRef>
+          <a:fontRef idx="minor">
+            <a:schemeClr val="lt1"/>
+          </a:fontRef>
+        </p:style>
+        <p:txBody>
+          <a:bodyPr rtlCol="0" anchor="ctr"/>
+          <a:lstStyle/>
+          <a:p>
+            <a:pPr algn="ctr"/>
+          </a:p>
+        </p:txBody>
+      </p:sp>
+      <p:sp>
+        <p:nvSpPr>
+          <p:cNvPr id="13" name="TextBox 12"/>
+          <p:cNvSpPr txBox="1"/>
+          <p:nvPr/>
+        </p:nvSpPr>
+        <p:spPr>
+          <a:xfrm>
+            <a:off x="4617720" y="2359152"/>
+            <a:ext cx="457200" cy="457200"/>
+          </a:xfrm>
+          <a:prstGeom prst="rect">
+            <a:avLst/>
+          </a:prstGeom>
+          <a:noFill/>
+        </p:spPr>
+        <p:txBody>
+          <a:bodyPr wrap="square" lIns="0" rIns="0" tIns="0" bIns="0" anchor="t">
+            <a:spAutoFit/>
+          </a:bodyPr>
+          <a:lstStyle/>
+          <a:p>
+            <a:pPr algn="ctr"/>
+            <a:r>
+              <a:rPr sz="1800" b="1" i="0">
+                <a:solidFill>
+                  <a:srgbClr val="FFFFFF"/>
+                </a:solidFill>
+                <a:latin typeface="Helvetica"/>
+              </a:rPr>
+              <a:t>2</a:t>
+            </a:r>
+          </a:p>
+        </p:txBody>
+      </p:sp>
+      <p:sp>
+        <p:nvSpPr>
+          <p:cNvPr id="14" name="TextBox 13"/>
+          <p:cNvSpPr txBox="1"/>
+          <p:nvPr/>
+        </p:nvSpPr>
+        <p:spPr>
+          <a:xfrm>
+            <a:off x="5212080" y="2377440"/>
+            <a:ext cx="2743200" cy="457200"/>
+          </a:xfrm>
+          <a:prstGeom prst="rect">
+            <a:avLst/>
+          </a:prstGeom>
+          <a:noFill/>
+        </p:spPr>
+        <p:txBody>
+          <a:bodyPr wrap="square" lIns="0" rIns="0" tIns="0" bIns="0" anchor="t">
+            <a:spAutoFit/>
+          </a:bodyPr>
+          <a:lstStyle/>
+          <a:p>
+            <a:pPr algn="l"/>
+            <a:r>
+              <a:rPr sz="1500" b="1" i="0">
+                <a:solidFill>
+                  <a:srgbClr val="1A1A2E"/>
+                </a:solidFill>
+                <a:latin typeface="Helvetica"/>
+              </a:rPr>
+              <a:t>Lighter P2 path</a:t>
+            </a:r>
+          </a:p>
+        </p:txBody>
+      </p:sp>
+      <p:sp>
+        <p:nvSpPr>
+          <p:cNvPr id="15" name="TextBox 14"/>
+          <p:cNvSpPr txBox="1"/>
+          <p:nvPr/>
+        </p:nvSpPr>
+        <p:spPr>
+          <a:xfrm>
+            <a:off x="4617720" y="2926080"/>
+            <a:ext cx="3291840" cy="365760"/>
+          </a:xfrm>
+          <a:prstGeom prst="rect">
+            <a:avLst/>
+          </a:prstGeom>
+          <a:noFill/>
+        </p:spPr>
+        <p:txBody>
+          <a:bodyPr wrap="square" lIns="0" rIns="0" tIns="0" bIns="0" anchor="t">
+            <a:spAutoFit/>
+          </a:bodyPr>
+          <a:lstStyle/>
+          <a:p>
+            <a:pPr algn="l"/>
+            <a:r>
+              <a:rPr sz="1000" b="1" i="1">
+                <a:solidFill>
+                  <a:srgbClr val="1F6FEB"/>
+                </a:solidFill>
+                <a:latin typeface="Helvetica"/>
+              </a:rPr>
+              <a:t>compromise</a:t>
+            </a:r>
+          </a:p>
+        </p:txBody>
+      </p:sp>
+      <p:sp>
+        <p:nvSpPr>
+          <p:cNvPr id="16" name="TextBox 15"/>
+          <p:cNvSpPr txBox="1"/>
+          <p:nvPr/>
+        </p:nvSpPr>
+        <p:spPr>
+          <a:xfrm>
+            <a:off x="4617720" y="3383280"/>
+            <a:ext cx="3291840" cy="2011680"/>
+          </a:xfrm>
+          <a:prstGeom prst="rect">
+            <a:avLst/>
+          </a:prstGeom>
+          <a:noFill/>
+        </p:spPr>
+        <p:txBody>
+          <a:bodyPr wrap="square" lIns="0" rIns="0" tIns="0" bIns="0" anchor="t">
+            <a:spAutoFit/>
+          </a:bodyPr>
+          <a:lstStyle/>
+          <a:p>
+            <a:pPr algn="l"/>
+            <a:r>
+              <a:rPr sz="1200" b="0" i="0">
+                <a:solidFill>
+                  <a:srgbClr val="1A1A2E"/>
+                </a:solidFill>
+                <a:latin typeface="Helvetica"/>
+              </a:rPr>
+              <a:t>Halve P2 channels; or use a single-conv projection instead of
+the full input-projection block.</a:t>
+            </a:r>
+          </a:p>
+        </p:txBody>
+      </p:sp>
+      <p:sp>
+        <p:nvSpPr>
+          <p:cNvPr id="17" name="Rounded Rectangle 16"/>
+          <p:cNvSpPr/>
+          <p:nvPr/>
+        </p:nvSpPr>
+        <p:spPr>
+          <a:xfrm>
+            <a:off x="8229600" y="2194560"/>
+            <a:ext cx="3657600" cy="3474720"/>
+          </a:xfrm>
+          <a:prstGeom prst="roundRect">
+            <a:avLst/>
+          </a:prstGeom>
+          <a:solidFill>
+            <a:srgbClr val="F0F6FF"/>
+          </a:solidFill>
+          <a:ln w="15240">
+            <a:solidFill>
+              <a:srgbClr val="1F6FEB"/>
+            </a:solidFill>
+          </a:ln>
+          <a:effectLst/>
+        </p:spPr>
+        <p:style>
+          <a:lnRef idx="1">
+            <a:schemeClr val="accent1"/>
+          </a:lnRef>
+          <a:fillRef idx="3">
+            <a:schemeClr val="accent1"/>
+          </a:fillRef>
+          <a:effectRef idx="2">
+            <a:schemeClr val="accent1"/>
+          </a:effectRef>
+          <a:fontRef idx="minor">
+            <a:schemeClr val="lt1"/>
+          </a:fontRef>
+        </p:style>
+        <p:txBody>
+          <a:bodyPr rtlCol="0" anchor="ctr"/>
+          <a:lstStyle/>
+          <a:p>
+            <a:pPr algn="ctr"/>
+          </a:p>
+        </p:txBody>
+      </p:sp>
+      <p:sp>
+        <p:nvSpPr>
+          <p:cNvPr id="18" name="Oval 17"/>
+          <p:cNvSpPr/>
+          <p:nvPr/>
+        </p:nvSpPr>
+        <p:spPr>
+          <a:xfrm>
+            <a:off x="8412480" y="2331720"/>
+            <a:ext cx="457200" cy="457200"/>
+          </a:xfrm>
+          <a:prstGeom prst="ellipse">
+            <a:avLst/>
+          </a:prstGeom>
+          <a:solidFill>
+            <a:srgbClr val="1F6FEB"/>
+          </a:solidFill>
+          <a:ln>
+            <a:noFill/>
+          </a:ln>
+        </p:spPr>
+        <p:style>
+          <a:lnRef idx="1">
+            <a:schemeClr val="accent1"/>
+          </a:lnRef>
+          <a:fillRef idx="3">
+            <a:schemeClr val="accent1"/>
+          </a:fillRef>
+          <a:effectRef idx="2">
+            <a:schemeClr val="accent1"/>
+          </a:effectRef>
+          <a:fontRef idx="minor">
+            <a:schemeClr val="lt1"/>
+          </a:fontRef>
+        </p:style>
+        <p:txBody>
+          <a:bodyPr rtlCol="0" anchor="ctr"/>
+          <a:lstStyle/>
+          <a:p>
+            <a:pPr algn="ctr"/>
+          </a:p>
+        </p:txBody>
+      </p:sp>
+      <p:sp>
+        <p:nvSpPr>
+          <p:cNvPr id="19" name="TextBox 18"/>
+          <p:cNvSpPr txBox="1"/>
+          <p:nvPr/>
+        </p:nvSpPr>
+        <p:spPr>
+          <a:xfrm>
+            <a:off x="8412480" y="2359152"/>
+            <a:ext cx="457200" cy="457200"/>
+          </a:xfrm>
+          <a:prstGeom prst="rect">
+            <a:avLst/>
+          </a:prstGeom>
+          <a:noFill/>
+        </p:spPr>
+        <p:txBody>
+          <a:bodyPr wrap="square" lIns="0" rIns="0" tIns="0" bIns="0" anchor="t">
+            <a:spAutoFit/>
+          </a:bodyPr>
+          <a:lstStyle/>
+          <a:p>
+            <a:pPr algn="ctr"/>
+            <a:r>
+              <a:rPr sz="1800" b="1" i="0">
+                <a:solidFill>
+                  <a:srgbClr val="FFFFFF"/>
+                </a:solidFill>
+                <a:latin typeface="Helvetica"/>
+              </a:rPr>
+              <a:t>3</a:t>
+            </a:r>
+          </a:p>
+        </p:txBody>
+      </p:sp>
+      <p:sp>
+        <p:nvSpPr>
+          <p:cNvPr id="20" name="TextBox 19"/>
+          <p:cNvSpPr txBox="1"/>
+          <p:nvPr/>
+        </p:nvSpPr>
+        <p:spPr>
+          <a:xfrm>
+            <a:off x="9006840" y="2377440"/>
+            <a:ext cx="2743200" cy="457200"/>
+          </a:xfrm>
+          <a:prstGeom prst="rect">
+            <a:avLst/>
+          </a:prstGeom>
+          <a:noFill/>
+        </p:spPr>
+        <p:txBody>
+          <a:bodyPr wrap="square" lIns="0" rIns="0" tIns="0" bIns="0" anchor="t">
+            <a:spAutoFit/>
+          </a:bodyPr>
+          <a:lstStyle/>
+          <a:p>
+            <a:pPr algn="l"/>
+            <a:r>
+              <a:rPr sz="1500" b="1" i="0">
+                <a:solidFill>
+                  <a:srgbClr val="1A1A2E"/>
+                </a:solidFill>
+                <a:latin typeface="Helvetica"/>
+              </a:rPr>
+              <a:t>Distill v2 → student</a:t>
+            </a:r>
+          </a:p>
+        </p:txBody>
+      </p:sp>
+      <p:sp>
+        <p:nvSpPr>
+          <p:cNvPr id="21" name="TextBox 20"/>
+          <p:cNvSpPr txBox="1"/>
+          <p:nvPr/>
+        </p:nvSpPr>
+        <p:spPr>
+          <a:xfrm>
+            <a:off x="8412480" y="2926080"/>
+            <a:ext cx="3291840" cy="365760"/>
+          </a:xfrm>
+          <a:prstGeom prst="rect">
+            <a:avLst/>
+          </a:prstGeom>
+          <a:noFill/>
+        </p:spPr>
+        <p:txBody>
+          <a:bodyPr wrap="square" lIns="0" rIns="0" tIns="0" bIns="0" anchor="t">
+            <a:spAutoFit/>
+          </a:bodyPr>
+          <a:lstStyle/>
+          <a:p>
+            <a:pPr algn="l"/>
+            <a:r>
+              <a:rPr sz="1000" b="1" i="1">
+                <a:solidFill>
+                  <a:srgbClr val="1F6FEB"/>
+                </a:solidFill>
+                <a:latin typeface="Helvetica"/>
+              </a:rPr>
+              <a:t>principled</a:t>
+            </a:r>
+          </a:p>
+        </p:txBody>
+      </p:sp>
+      <p:sp>
+        <p:nvSpPr>
+          <p:cNvPr id="22" name="TextBox 21"/>
+          <p:cNvSpPr txBox="1"/>
+          <p:nvPr/>
+        </p:nvSpPr>
+        <p:spPr>
+          <a:xfrm>
+            <a:off x="8412480" y="3383280"/>
+            <a:ext cx="3291840" cy="2011680"/>
+          </a:xfrm>
+          <a:prstGeom prst="rect">
+            <a:avLst/>
+          </a:prstGeom>
+          <a:noFill/>
+        </p:spPr>
+        <p:txBody>
+          <a:bodyPr wrap="square" lIns="0" rIns="0" tIns="0" bIns="0" anchor="t">
+            <a:spAutoFit/>
+          </a:bodyPr>
+          <a:lstStyle/>
+          <a:p>
+            <a:pPr algn="l"/>
+            <a:r>
+              <a:rPr sz="1200" b="0" i="0">
+                <a:solidFill>
+                  <a:srgbClr val="1A1A2E"/>
+                </a:solidFill>
+                <a:latin typeface="Helvetica"/>
+              </a:rPr>
+              <a:t>Knowledge-distil into a P3–P5 student network.
+Teacher: full v2.  Student: baseline RT-DETR speed.</a:t>
+            </a:r>
+          </a:p>
+        </p:txBody>
+      </p:sp>
+      <p:sp>
+        <p:nvSpPr>
+          <p:cNvPr id="23" name="TextBox 22"/>
+          <p:cNvSpPr txBox="1"/>
+          <p:nvPr/>
+        </p:nvSpPr>
+        <p:spPr>
+          <a:xfrm>
+            <a:off x="640080" y="5943600"/>
+            <a:ext cx="10972800" cy="457200"/>
+          </a:xfrm>
+          <a:prstGeom prst="rect">
+            <a:avLst/>
+          </a:prstGeom>
+          <a:noFill/>
+        </p:spPr>
+        <p:txBody>
+          <a:bodyPr wrap="square" lIns="0" rIns="0" tIns="0" bIns="0" anchor="t">
+            <a:spAutoFit/>
+          </a:bodyPr>
+          <a:lstStyle/>
+          <a:p>
+            <a:pPr algn="ctr"/>
+            <a:r>
+              <a:rPr sz="1400" b="1" i="0">
+                <a:solidFill>
+                  <a:srgbClr val="1F6FEB"/>
+                </a:solidFill>
+                <a:latin typeface="Helvetica"/>
+              </a:rPr>
+              <a:t>Goal: keep the +0.99 APₛ gain while approaching the 53 FPS baseline.</a:t>
+            </a:r>
+          </a:p>
+        </p:txBody>
+      </p:sp>
+      <p:sp>
+        <p:nvSpPr>
+          <p:cNvPr id="24" name="TextBox 23"/>
+          <p:cNvSpPr txBox="1"/>
+          <p:nvPr/>
+        </p:nvSpPr>
+        <p:spPr>
+          <a:xfrm>
+            <a:off x="640080" y="6446520"/>
+            <a:ext cx="9144000" cy="274320"/>
+          </a:xfrm>
+          <a:prstGeom prst="rect">
+            <a:avLst/>
+          </a:prstGeom>
+          <a:noFill/>
+        </p:spPr>
+        <p:txBody>
+          <a:bodyPr wrap="square" lIns="0" rIns="0" tIns="0" bIns="0" anchor="t">
+            <a:spAutoFit/>
+          </a:bodyPr>
+          <a:lstStyle/>
+          <a:p>
+            <a:pPr algn="l"/>
+            <a:r>
+              <a:rPr sz="1000" b="0" i="0">
+                <a:solidFill>
+                  <a:srgbClr val="666677"/>
+                </a:solidFill>
+                <a:latin typeface="Helvetica"/>
+              </a:rPr>
+              <a:t>5. Final Results  •  Feedback-Augmented RT-DETR  •  Hatem Saadallah &amp; Nour Jennane</a:t>
+            </a:r>
+          </a:p>
+        </p:txBody>
+      </p:sp>
+      <p:sp>
+        <p:nvSpPr>
+          <p:cNvPr id="25" name="TextBox 24"/>
+          <p:cNvSpPr txBox="1"/>
+          <p:nvPr/>
+        </p:nvSpPr>
+        <p:spPr>
+          <a:xfrm>
+            <a:off x="10515600" y="6446520"/>
+            <a:ext cx="1097280" cy="274320"/>
+          </a:xfrm>
+          <a:prstGeom prst="rect">
+            <a:avLst/>
+          </a:prstGeom>
+          <a:noFill/>
+        </p:spPr>
+        <p:txBody>
+          <a:bodyPr wrap="square" lIns="0" rIns="0" tIns="0" bIns="0" anchor="t">
+            <a:spAutoFit/>
+          </a:bodyPr>
+          <a:lstStyle/>
+          <a:p>
+            <a:pPr algn="r"/>
+            <a:r>
+              <a:rPr sz="1000" b="0" i="0">
+                <a:solidFill>
+                  <a:srgbClr val="666677"/>
+                </a:solidFill>
+                <a:latin typeface="Helvetica"/>
+              </a:rPr>
+              <a:t>22 / 24</a:t>
+            </a:r>
+          </a:p>
+        </p:txBody>
+      </p:sp>
+    </p:spTree>
+  </p:cSld>
+  <p:clrMapOvr>
+    <a:masterClrMapping/>
+  </p:clrMapOvr>
+</p:sld>
+</file>
+
+<file path=ppt/slides/slide23.xml><?xml version="1.0" encoding="utf-8"?>
+<p:sld xmlns:a="http://schemas.openxmlformats.org/drawingml/2006/main" xmlns:p="http://schemas.openxmlformats.org/presentationml/2006/main" xmlns:r="http://schemas.openxmlformats.org/officeDocument/2006/relationships">
+  <p:cSld>
+    <p:spTree>
+      <p:nvGrpSpPr>
+        <p:cNvPr id="1" name=""/>
+        <p:cNvGrpSpPr/>
+        <p:nvPr/>
+      </p:nvGrpSpPr>
+      <p:grpSpPr/>
+      <p:sp>
+        <p:nvSpPr>
+          <p:cNvPr id="2" name="TextBox 1"/>
+          <p:cNvSpPr txBox="1"/>
+          <p:nvPr/>
+        </p:nvSpPr>
+        <p:spPr>
+          <a:xfrm>
+            <a:off x="640080" y="457200"/>
+            <a:ext cx="10972800" cy="822960"/>
+          </a:xfrm>
+          <a:prstGeom prst="rect">
+            <a:avLst/>
+          </a:prstGeom>
+          <a:noFill/>
+        </p:spPr>
+        <p:txBody>
+          <a:bodyPr wrap="square" lIns="0" rIns="0" tIns="0" bIns="0" anchor="t">
+            <a:spAutoFit/>
+          </a:bodyPr>
+          <a:lstStyle/>
+          <a:p>
+            <a:pPr algn="l"/>
+            <a:r>
+              <a:rPr sz="3400" b="1" i="0">
+                <a:solidFill>
+                  <a:srgbClr val="1F6FEB"/>
+                </a:solidFill>
+                <a:latin typeface="Helvetica"/>
+              </a:rPr>
+              <a:t>Conclusion</a:t>
+            </a:r>
+          </a:p>
+        </p:txBody>
+      </p:sp>
+      <p:sp>
+        <p:nvSpPr>
+          <p:cNvPr id="3" name="Rectangle 2"/>
+          <p:cNvSpPr/>
+          <p:nvPr/>
+        </p:nvSpPr>
+        <p:spPr>
+          <a:xfrm>
+            <a:off x="640080" y="1143000"/>
+            <a:ext cx="640080" cy="54864"/>
+          </a:xfrm>
+          <a:prstGeom prst="rect">
+            <a:avLst/>
+          </a:prstGeom>
+          <a:solidFill>
+            <a:srgbClr val="1F6FEB"/>
+          </a:solidFill>
+          <a:ln>
+            <a:noFill/>
+          </a:ln>
+        </p:spPr>
+        <p:style>
+          <a:lnRef idx="1">
+            <a:schemeClr val="accent1"/>
+          </a:lnRef>
+          <a:fillRef idx="3">
+            <a:schemeClr val="accent1"/>
+          </a:fillRef>
+          <a:effectRef idx="2">
+            <a:schemeClr val="accent1"/>
+          </a:effectRef>
+          <a:fontRef idx="minor">
+            <a:schemeClr val="lt1"/>
+          </a:fontRef>
+        </p:style>
+        <p:txBody>
+          <a:bodyPr rtlCol="0" anchor="ctr"/>
+          <a:lstStyle/>
+          <a:p>
+            <a:pPr algn="ctr"/>
+          </a:p>
+        </p:txBody>
+      </p:sp>
+      <p:sp>
+        <p:nvSpPr>
+          <p:cNvPr id="4" name="Oval 3"/>
+          <p:cNvSpPr/>
+          <p:nvPr/>
+        </p:nvSpPr>
+        <p:spPr>
+          <a:xfrm>
+            <a:off x="822960" y="1965960"/>
+            <a:ext cx="502920" cy="502920"/>
+          </a:xfrm>
+          <a:prstGeom prst="ellipse">
+            <a:avLst/>
+          </a:prstGeom>
+          <a:solidFill>
+            <a:srgbClr val="1F6FEB"/>
+          </a:solidFill>
+          <a:ln>
+            <a:noFill/>
+          </a:ln>
+        </p:spPr>
+        <p:style>
+          <a:lnRef idx="1">
+            <a:schemeClr val="accent1"/>
+          </a:lnRef>
+          <a:fillRef idx="3">
+            <a:schemeClr val="accent1"/>
+          </a:fillRef>
+          <a:effectRef idx="2">
+            <a:schemeClr val="accent1"/>
+          </a:effectRef>
+          <a:fontRef idx="minor">
+            <a:schemeClr val="lt1"/>
+          </a:fontRef>
+        </p:style>
+        <p:txBody>
+          <a:bodyPr rtlCol="0" anchor="ctr"/>
+          <a:lstStyle/>
+          <a:p>
+            <a:pPr algn="ctr"/>
+          </a:p>
+        </p:txBody>
+      </p:sp>
+      <p:sp>
+        <p:nvSpPr>
+          <p:cNvPr id="5" name="TextBox 4"/>
+          <p:cNvSpPr txBox="1"/>
+          <p:nvPr/>
+        </p:nvSpPr>
+        <p:spPr>
+          <a:xfrm>
+            <a:off x="822960" y="1993392"/>
+            <a:ext cx="502920" cy="502920"/>
+          </a:xfrm>
+          <a:prstGeom prst="rect">
+            <a:avLst/>
+          </a:prstGeom>
+          <a:noFill/>
+        </p:spPr>
+        <p:txBody>
+          <a:bodyPr wrap="square" lIns="0" rIns="0" tIns="0" bIns="0" anchor="t">
+            <a:spAutoFit/>
+          </a:bodyPr>
+          <a:lstStyle/>
+          <a:p>
+            <a:pPr algn="ctr"/>
+            <a:r>
+              <a:rPr sz="2000" b="1" i="0">
+                <a:solidFill>
+                  <a:srgbClr val="FFFFFF"/>
+                </a:solidFill>
+                <a:latin typeface="Helvetica"/>
+              </a:rPr>
+              <a:t>1</a:t>
+            </a:r>
+          </a:p>
+        </p:txBody>
+      </p:sp>
+      <p:sp>
+        <p:nvSpPr>
+          <p:cNvPr id="6" name="TextBox 5"/>
+          <p:cNvSpPr txBox="1"/>
+          <p:nvPr/>
+        </p:nvSpPr>
+        <p:spPr>
+          <a:xfrm>
+            <a:off x="1554480" y="1874520"/>
+            <a:ext cx="10058400" cy="548640"/>
+          </a:xfrm>
+          <a:prstGeom prst="rect">
+            <a:avLst/>
+          </a:prstGeom>
+          <a:noFill/>
+        </p:spPr>
+        <p:txBody>
+          <a:bodyPr wrap="square" lIns="0" rIns="0" tIns="0" bIns="0" anchor="t">
+            <a:spAutoFit/>
+          </a:bodyPr>
+          <a:lstStyle/>
+          <a:p>
+            <a:pPr algn="l"/>
+            <a:r>
+              <a:rPr sz="2400" b="1" i="0">
+                <a:solidFill>
+                  <a:srgbClr val="1A1A2E"/>
+                </a:solidFill>
+                <a:latin typeface="Helvetica"/>
+              </a:rPr>
+              <a:t>Feedback improves small-object detection</a:t>
+            </a:r>
+          </a:p>
+        </p:txBody>
+      </p:sp>
+      <p:sp>
+        <p:nvSpPr>
+          <p:cNvPr id="7" name="TextBox 6"/>
+          <p:cNvSpPr txBox="1"/>
+          <p:nvPr/>
+        </p:nvSpPr>
+        <p:spPr>
+          <a:xfrm>
+            <a:off x="1554480" y="2468880"/>
+            <a:ext cx="10058400" cy="548640"/>
+          </a:xfrm>
+          <a:prstGeom prst="rect">
+            <a:avLst/>
+          </a:prstGeom>
+          <a:noFill/>
+        </p:spPr>
+        <p:txBody>
+          <a:bodyPr wrap="square" lIns="0" rIns="0" tIns="0" bIns="0" anchor="t">
+            <a:spAutoFit/>
+          </a:bodyPr>
+          <a:lstStyle/>
+          <a:p>
+            <a:pPr algn="l"/>
+            <a:r>
+              <a:rPr sz="1500" b="0" i="1">
+                <a:solidFill>
+                  <a:srgbClr val="666677"/>
+                </a:solidFill>
+                <a:latin typeface="Helvetica"/>
+              </a:rPr>
+              <a:t>+0.99 APₛ causal contribution at inference.</a:t>
+            </a:r>
+          </a:p>
+        </p:txBody>
+      </p:sp>
+      <p:sp>
+        <p:nvSpPr>
+          <p:cNvPr id="8" name="Oval 7"/>
+          <p:cNvSpPr/>
+          <p:nvPr/>
+        </p:nvSpPr>
+        <p:spPr>
+          <a:xfrm>
+            <a:off x="822960" y="3383280"/>
+            <a:ext cx="502920" cy="502920"/>
+          </a:xfrm>
+          <a:prstGeom prst="ellipse">
+            <a:avLst/>
+          </a:prstGeom>
+          <a:solidFill>
+            <a:srgbClr val="1F6FEB"/>
+          </a:solidFill>
+          <a:ln>
+            <a:noFill/>
+          </a:ln>
+        </p:spPr>
+        <p:style>
+          <a:lnRef idx="1">
+            <a:schemeClr val="accent1"/>
+          </a:lnRef>
+          <a:fillRef idx="3">
+            <a:schemeClr val="accent1"/>
+          </a:fillRef>
+          <a:effectRef idx="2">
+            <a:schemeClr val="accent1"/>
+          </a:effectRef>
+          <a:fontRef idx="minor">
+            <a:schemeClr val="lt1"/>
+          </a:fontRef>
+        </p:style>
+        <p:txBody>
+          <a:bodyPr rtlCol="0" anchor="ctr"/>
+          <a:lstStyle/>
+          <a:p>
+            <a:pPr algn="ctr"/>
+          </a:p>
+        </p:txBody>
+      </p:sp>
+      <p:sp>
+        <p:nvSpPr>
+          <p:cNvPr id="9" name="TextBox 8"/>
+          <p:cNvSpPr txBox="1"/>
+          <p:nvPr/>
+        </p:nvSpPr>
+        <p:spPr>
+          <a:xfrm>
+            <a:off x="822960" y="3410712"/>
+            <a:ext cx="502920" cy="502920"/>
+          </a:xfrm>
+          <a:prstGeom prst="rect">
+            <a:avLst/>
+          </a:prstGeom>
+          <a:noFill/>
+        </p:spPr>
+        <p:txBody>
+          <a:bodyPr wrap="square" lIns="0" rIns="0" tIns="0" bIns="0" anchor="t">
+            <a:spAutoFit/>
+          </a:bodyPr>
+          <a:lstStyle/>
+          <a:p>
+            <a:pPr algn="ctr"/>
+            <a:r>
+              <a:rPr sz="2000" b="1" i="0">
+                <a:solidFill>
+                  <a:srgbClr val="FFFFFF"/>
+                </a:solidFill>
+                <a:latin typeface="Helvetica"/>
+              </a:rPr>
+              <a:t>2</a:t>
+            </a:r>
+          </a:p>
+        </p:txBody>
+      </p:sp>
+      <p:sp>
+        <p:nvSpPr>
+          <p:cNvPr id="10" name="TextBox 9"/>
+          <p:cNvSpPr txBox="1"/>
+          <p:nvPr/>
+        </p:nvSpPr>
+        <p:spPr>
+          <a:xfrm>
+            <a:off x="1554480" y="3291840"/>
+            <a:ext cx="10058400" cy="548640"/>
+          </a:xfrm>
+          <a:prstGeom prst="rect">
+            <a:avLst/>
+          </a:prstGeom>
+          <a:noFill/>
+        </p:spPr>
+        <p:txBody>
+          <a:bodyPr wrap="square" lIns="0" rIns="0" tIns="0" bIns="0" anchor="t">
+            <a:spAutoFit/>
+          </a:bodyPr>
+          <a:lstStyle/>
+          <a:p>
+            <a:pPr algn="l"/>
+            <a:r>
+              <a:rPr sz="2400" b="1" i="0">
+                <a:solidFill>
+                  <a:srgbClr val="1A1A2E"/>
+                </a:solidFill>
+                <a:latin typeface="Helvetica"/>
+              </a:rPr>
+              <a:t>Only works with proper design</a:t>
+            </a:r>
+          </a:p>
+        </p:txBody>
+      </p:sp>
+      <p:sp>
+        <p:nvSpPr>
+          <p:cNvPr id="11" name="TextBox 10"/>
+          <p:cNvSpPr txBox="1"/>
+          <p:nvPr/>
+        </p:nvSpPr>
+        <p:spPr>
+          <a:xfrm>
+            <a:off x="1554480" y="3886200"/>
+            <a:ext cx="10058400" cy="548640"/>
+          </a:xfrm>
+          <a:prstGeom prst="rect">
+            <a:avLst/>
+          </a:prstGeom>
+          <a:noFill/>
+        </p:spPr>
+        <p:txBody>
+          <a:bodyPr wrap="square" lIns="0" rIns="0" tIns="0" bIns="0" anchor="t">
+            <a:spAutoFit/>
+          </a:bodyPr>
+          <a:lstStyle/>
+          <a:p>
+            <a:pPr algn="l"/>
+            <a:r>
+              <a:rPr sz="1500" b="0" i="1">
+                <a:solidFill>
+                  <a:srgbClr val="666677"/>
+                </a:solidFill>
+                <a:latin typeface="Helvetica"/>
+              </a:rPr>
+              <a:t>Floor the gate; restrict to small-object levels.</a:t>
+            </a:r>
+          </a:p>
+        </p:txBody>
+      </p:sp>
+      <p:sp>
+        <p:nvSpPr>
+          <p:cNvPr id="12" name="Oval 11"/>
+          <p:cNvSpPr/>
+          <p:nvPr/>
+        </p:nvSpPr>
+        <p:spPr>
+          <a:xfrm>
+            <a:off x="822960" y="4800600"/>
+            <a:ext cx="502920" cy="502920"/>
+          </a:xfrm>
+          <a:prstGeom prst="ellipse">
+            <a:avLst/>
+          </a:prstGeom>
+          <a:solidFill>
+            <a:srgbClr val="1F6FEB"/>
+          </a:solidFill>
+          <a:ln>
+            <a:noFill/>
+          </a:ln>
+        </p:spPr>
+        <p:style>
+          <a:lnRef idx="1">
+            <a:schemeClr val="accent1"/>
+          </a:lnRef>
+          <a:fillRef idx="3">
+            <a:schemeClr val="accent1"/>
+          </a:fillRef>
+          <a:effectRef idx="2">
+            <a:schemeClr val="accent1"/>
+          </a:effectRef>
+          <a:fontRef idx="minor">
+            <a:schemeClr val="lt1"/>
+          </a:fontRef>
+        </p:style>
+        <p:txBody>
+          <a:bodyPr rtlCol="0" anchor="ctr"/>
+          <a:lstStyle/>
+          <a:p>
+            <a:pPr algn="ctr"/>
+          </a:p>
+        </p:txBody>
+      </p:sp>
+      <p:sp>
+        <p:nvSpPr>
+          <p:cNvPr id="13" name="TextBox 12"/>
+          <p:cNvSpPr txBox="1"/>
+          <p:nvPr/>
+        </p:nvSpPr>
+        <p:spPr>
+          <a:xfrm>
+            <a:off x="822960" y="4828032"/>
+            <a:ext cx="502920" cy="502920"/>
+          </a:xfrm>
+          <a:prstGeom prst="rect">
+            <a:avLst/>
+          </a:prstGeom>
+          <a:noFill/>
+        </p:spPr>
+        <p:txBody>
+          <a:bodyPr wrap="square" lIns="0" rIns="0" tIns="0" bIns="0" anchor="t">
+            <a:spAutoFit/>
+          </a:bodyPr>
+          <a:lstStyle/>
+          <a:p>
+            <a:pPr algn="ctr"/>
+            <a:r>
+              <a:rPr sz="2000" b="1" i="0">
+                <a:solidFill>
+                  <a:srgbClr val="FFFFFF"/>
+                </a:solidFill>
+                <a:latin typeface="Helvetica"/>
+              </a:rPr>
+              <a:t>3</a:t>
+            </a:r>
+          </a:p>
+        </p:txBody>
+      </p:sp>
+      <p:sp>
+        <p:nvSpPr>
+          <p:cNvPr id="14" name="TextBox 13"/>
+          <p:cNvSpPr txBox="1"/>
+          <p:nvPr/>
+        </p:nvSpPr>
+        <p:spPr>
+          <a:xfrm>
+            <a:off x="1554480" y="4709160"/>
+            <a:ext cx="10058400" cy="548640"/>
+          </a:xfrm>
+          <a:prstGeom prst="rect">
+            <a:avLst/>
+          </a:prstGeom>
+          <a:noFill/>
+        </p:spPr>
+        <p:txBody>
+          <a:bodyPr wrap="square" lIns="0" rIns="0" tIns="0" bIns="0" anchor="t">
+            <a:spAutoFit/>
+          </a:bodyPr>
+          <a:lstStyle/>
+          <a:p>
+            <a:pPr algn="l"/>
+            <a:r>
+              <a:rPr sz="2400" b="1" i="0">
+                <a:solidFill>
+                  <a:srgbClr val="1A1A2E"/>
+                </a:solidFill>
+                <a:latin typeface="Helvetica"/>
+              </a:rPr>
+              <a:t>Modest but real</a:t>
+            </a:r>
+          </a:p>
+        </p:txBody>
+      </p:sp>
+      <p:sp>
+        <p:nvSpPr>
+          <p:cNvPr id="15" name="TextBox 14"/>
+          <p:cNvSpPr txBox="1"/>
+          <p:nvPr/>
+        </p:nvSpPr>
+        <p:spPr>
+          <a:xfrm>
+            <a:off x="1554480" y="5303520"/>
+            <a:ext cx="10058400" cy="548640"/>
+          </a:xfrm>
+          <a:prstGeom prst="rect">
+            <a:avLst/>
+          </a:prstGeom>
+          <a:noFill/>
+        </p:spPr>
+        <p:txBody>
+          <a:bodyPr wrap="square" lIns="0" rIns="0" tIns="0" bIns="0" anchor="t">
+            <a:spAutoFit/>
+          </a:bodyPr>
+          <a:lstStyle/>
+          <a:p>
+            <a:pPr algn="l"/>
+            <a:r>
+              <a:rPr sz="1500" b="0" i="1">
+                <a:solidFill>
+                  <a:srgbClr val="666677"/>
+                </a:solidFill>
+                <a:latin typeface="Helvetica"/>
+              </a:rPr>
+              <a:t>Consistent across metrics; reproducible from the same checkpoint.</a:t>
+            </a:r>
+          </a:p>
+        </p:txBody>
+      </p:sp>
+      <p:sp>
+        <p:nvSpPr>
+          <p:cNvPr id="16" name="TextBox 15"/>
+          <p:cNvSpPr txBox="1"/>
+          <p:nvPr/>
+        </p:nvSpPr>
+        <p:spPr>
+          <a:xfrm>
+            <a:off x="640080" y="6446520"/>
+            <a:ext cx="9144000" cy="274320"/>
+          </a:xfrm>
+          <a:prstGeom prst="rect">
+            <a:avLst/>
+          </a:prstGeom>
+          <a:noFill/>
+        </p:spPr>
+        <p:txBody>
+          <a:bodyPr wrap="square" lIns="0" rIns="0" tIns="0" bIns="0" anchor="t">
+            <a:spAutoFit/>
+          </a:bodyPr>
+          <a:lstStyle/>
+          <a:p>
+            <a:pPr algn="l"/>
+            <a:r>
+              <a:rPr sz="1000" b="0" i="0">
+                <a:solidFill>
+                  <a:srgbClr val="666677"/>
+                </a:solidFill>
+                <a:latin typeface="Helvetica"/>
+              </a:rPr>
+              <a:t>5. Final Results  •  Feedback-Augmented RT-DETR  •  Hatem Saadallah &amp; Nour Jennane</a:t>
+            </a:r>
+          </a:p>
+        </p:txBody>
+      </p:sp>
+      <p:sp>
+        <p:nvSpPr>
+          <p:cNvPr id="17" name="TextBox 16"/>
+          <p:cNvSpPr txBox="1"/>
+          <p:nvPr/>
+        </p:nvSpPr>
+        <p:spPr>
+          <a:xfrm>
+            <a:off x="10515600" y="6446520"/>
+            <a:ext cx="1097280" cy="274320"/>
+          </a:xfrm>
+          <a:prstGeom prst="rect">
+            <a:avLst/>
+          </a:prstGeom>
+          <a:noFill/>
+        </p:spPr>
+        <p:txBody>
+          <a:bodyPr wrap="square" lIns="0" rIns="0" tIns="0" bIns="0" anchor="t">
+            <a:spAutoFit/>
+          </a:bodyPr>
+          <a:lstStyle/>
+          <a:p>
+            <a:pPr algn="r"/>
+            <a:r>
+              <a:rPr sz="1000" b="0" i="0">
+                <a:solidFill>
+                  <a:srgbClr val="666677"/>
+                </a:solidFill>
+                <a:latin typeface="Helvetica"/>
+              </a:rPr>
+              <a:t>23 / 24</a:t>
+            </a:r>
+          </a:p>
+        </p:txBody>
+      </p:sp>
+    </p:spTree>
+  </p:cSld>
+  <p:clrMapOvr>
+    <a:masterClrMapping/>
+  </p:clrMapOvr>
+</p:sld>
+</file>
+
+<file path=ppt/slides/slide24.xml><?xml version="1.0" encoding="utf-8"?>
+<p:sld xmlns:a="http://schemas.openxmlformats.org/drawingml/2006/main" xmlns:p="http://schemas.openxmlformats.org/presentationml/2006/main" xmlns:r="http://schemas.openxmlformats.org/officeDocument/2006/relationships">
+  <p:cSld>
+    <p:spTree>
+      <p:nvGrpSpPr>
+        <p:cNvPr id="1" name=""/>
+        <p:cNvGrpSpPr/>
+        <p:nvPr/>
+      </p:nvGrpSpPr>
+      <p:grpSpPr/>
+      <p:sp>
+        <p:nvSpPr>
+          <p:cNvPr id="2" name="TextBox 1"/>
+          <p:cNvSpPr txBox="1"/>
+          <p:nvPr/>
+        </p:nvSpPr>
+        <p:spPr>
+          <a:xfrm>
+            <a:off x="640080" y="2194560"/>
+            <a:ext cx="10972800" cy="1371600"/>
+          </a:xfrm>
+          <a:prstGeom prst="rect">
+            <a:avLst/>
+          </a:prstGeom>
+          <a:noFill/>
+        </p:spPr>
+        <p:txBody>
+          <a:bodyPr wrap="square" lIns="0" rIns="0" tIns="0" bIns="0" anchor="t">
+            <a:spAutoFit/>
+          </a:bodyPr>
+          <a:lstStyle/>
+          <a:p>
+            <a:pPr algn="ctr"/>
+            <a:r>
+              <a:rPr sz="8000" b="1" i="0">
+                <a:solidFill>
+                  <a:srgbClr val="1A1A2E"/>
+                </a:solidFill>
+                <a:latin typeface="Helvetica"/>
+              </a:rPr>
+              <a:t>Thank you.</a:t>
+            </a:r>
+          </a:p>
+        </p:txBody>
+      </p:sp>
+      <p:sp>
+        <p:nvSpPr>
+          <p:cNvPr id="3" name="TextBox 2"/>
+          <p:cNvSpPr txBox="1"/>
+          <p:nvPr/>
+        </p:nvSpPr>
+        <p:spPr>
+          <a:xfrm>
+            <a:off x="640080" y="3840480"/>
+            <a:ext cx="10972800" cy="731520"/>
+          </a:xfrm>
+          <a:prstGeom prst="rect">
+            <a:avLst/>
+          </a:prstGeom>
+          <a:noFill/>
+        </p:spPr>
+        <p:txBody>
+          <a:bodyPr wrap="square" lIns="0" rIns="0" tIns="0" bIns="0" anchor="t">
+            <a:spAutoFit/>
+          </a:bodyPr>
+          <a:lstStyle/>
+          <a:p>
+            <a:pPr algn="ctr"/>
+            <a:r>
+              <a:rPr sz="4000" b="0" i="0">
+                <a:solidFill>
+                  <a:srgbClr val="1F6FEB"/>
+                </a:solidFill>
+                <a:latin typeface="Helvetica"/>
+              </a:rPr>
+              <a:t>Questions?</a:t>
+            </a:r>
+          </a:p>
+        </p:txBody>
+      </p:sp>
+      <p:sp>
+        <p:nvSpPr>
+          <p:cNvPr id="4" name="Rectangle 3"/>
+          <p:cNvSpPr/>
+          <p:nvPr/>
+        </p:nvSpPr>
+        <p:spPr>
+          <a:xfrm>
+            <a:off x="5641848" y="4937760"/>
+            <a:ext cx="914400" cy="54864"/>
+          </a:xfrm>
+          <a:prstGeom prst="rect">
+            <a:avLst/>
+          </a:prstGeom>
+          <a:solidFill>
+            <a:srgbClr val="1F6FEB"/>
+          </a:solidFill>
+          <a:ln>
+            <a:noFill/>
+          </a:ln>
+        </p:spPr>
+        <p:style>
+          <a:lnRef idx="1">
+            <a:schemeClr val="accent1"/>
+          </a:lnRef>
+          <a:fillRef idx="3">
+            <a:schemeClr val="accent1"/>
+          </a:fillRef>
+          <a:effectRef idx="2">
+            <a:schemeClr val="accent1"/>
+          </a:effectRef>
+          <a:fontRef idx="minor">
+            <a:schemeClr val="lt1"/>
+          </a:fontRef>
+        </p:style>
+        <p:txBody>
+          <a:bodyPr rtlCol="0" anchor="ctr"/>
+          <a:lstStyle/>
+          <a:p>
+            <a:pPr algn="ctr"/>
+          </a:p>
+        </p:txBody>
+      </p:sp>
+      <p:sp>
+        <p:nvSpPr>
+          <p:cNvPr id="5" name="TextBox 4"/>
+          <p:cNvSpPr txBox="1"/>
+          <p:nvPr/>
+        </p:nvSpPr>
+        <p:spPr>
+          <a:xfrm>
+            <a:off x="640080" y="5212080"/>
+            <a:ext cx="10972800" cy="365760"/>
+          </a:xfrm>
+          <a:prstGeom prst="rect">
+            <a:avLst/>
+          </a:prstGeom>
+          <a:noFill/>
+        </p:spPr>
+        <p:txBody>
+          <a:bodyPr wrap="square" lIns="0" rIns="0" tIns="0" bIns="0" anchor="t">
+            <a:spAutoFit/>
+          </a:bodyPr>
+          <a:lstStyle/>
+          <a:p>
+            <a:pPr algn="ctr"/>
+            <a:r>
+              <a:rPr sz="1600" b="0" i="0">
+                <a:solidFill>
+                  <a:srgbClr val="1A1A2E"/>
+                </a:solidFill>
+                <a:latin typeface="Helvetica"/>
+              </a:rPr>
+              <a:t>Hatem Saadallah  ·  Nour Jennane</a:t>
+            </a:r>
+          </a:p>
+        </p:txBody>
+      </p:sp>
+      <p:sp>
+        <p:nvSpPr>
+          <p:cNvPr id="6" name="TextBox 5"/>
+          <p:cNvSpPr txBox="1"/>
+          <p:nvPr/>
+        </p:nvSpPr>
+        <p:spPr>
+          <a:xfrm>
+            <a:off x="640080" y="5669280"/>
+            <a:ext cx="10972800" cy="365760"/>
+          </a:xfrm>
+          <a:prstGeom prst="rect">
+            <a:avLst/>
+          </a:prstGeom>
+          <a:noFill/>
+        </p:spPr>
+        <p:txBody>
+          <a:bodyPr wrap="square" lIns="0" rIns="0" tIns="0" bIns="0" anchor="t">
+            <a:spAutoFit/>
+          </a:bodyPr>
+          <a:lstStyle/>
+          <a:p>
+            <a:pPr algn="ctr"/>
+            <a:r>
+              <a:rPr sz="1200" b="0" i="0">
+                <a:solidFill>
+                  <a:srgbClr val="666677"/>
+                </a:solidFill>
+                <a:latin typeface="Helvetica"/>
+              </a:rPr>
+              <a:t>github.com/HatemSaadallah/feedback-augmented-rtdetr</a:t>
             </a:r>
           </a:p>
         </p:txBody>
@@ -7478,7 +9672,7 @@
                 </a:solidFill>
                 <a:latin typeface="Helvetica"/>
               </a:rPr>
-              <a:t>Baseline RT-DETR</a:t>
+              <a:t>Small objects are harder to detect</a:t>
             </a:r>
           </a:p>
         </p:txBody>
@@ -7528,7 +9722,7 @@
       </p:sp>
       <p:pic>
         <p:nvPicPr>
-          <p:cNvPr id="4" name="Picture 3" descr="diag_baseline.png"/>
+          <p:cNvPr id="4" name="Picture 3" descr="viz_000000001000.png"/>
           <p:cNvPicPr>
             <a:picLocks noChangeAspect="1"/>
           </p:cNvPicPr>
@@ -7542,8 +9736,8 @@
         </p:blipFill>
         <p:spPr>
           <a:xfrm>
-            <a:off x="731520" y="2286000"/>
-            <a:ext cx="10698480" cy="2415119"/>
+            <a:off x="640080" y="1554480"/>
+            <a:ext cx="6400800" cy="1718336"/>
           </a:xfrm>
           <a:prstGeom prst="rect">
             <a:avLst/>
@@ -7558,43 +9752,183 @@
         </p:nvSpPr>
         <p:spPr>
           <a:xfrm>
-            <a:off x="640080" y="5029200"/>
-            <a:ext cx="10972800" cy="548640"/>
-          </a:xfrm>
-          <a:prstGeom prst="rect">
-            <a:avLst/>
-          </a:prstGeom>
-          <a:noFill/>
-        </p:spPr>
-        <p:txBody>
-          <a:bodyPr wrap="square" lIns="0" rIns="0" tIns="0" bIns="0" anchor="t">
-            <a:spAutoFit/>
-          </a:bodyPr>
-          <a:lstStyle/>
-          <a:p>
-            <a:pPr algn="ctr"/>
-            <a:r>
-              <a:rPr sz="2200" b="0" i="0">
+            <a:off x="7680960" y="1828800"/>
+            <a:ext cx="4114800" cy="457200"/>
+          </a:xfrm>
+          <a:prstGeom prst="rect">
+            <a:avLst/>
+          </a:prstGeom>
+          <a:noFill/>
+        </p:spPr>
+        <p:txBody>
+          <a:bodyPr wrap="square" lIns="0" rIns="0" tIns="0" bIns="0" anchor="t">
+            <a:spAutoFit/>
+          </a:bodyPr>
+          <a:lstStyle/>
+          <a:p>
+            <a:pPr algn="l"/>
+            <a:r>
+              <a:rPr sz="1500" b="0" i="0">
+                <a:solidFill>
+                  <a:srgbClr val="666677"/>
+                </a:solidFill>
+                <a:latin typeface="Helvetica"/>
+              </a:rPr>
+              <a:t>APₗ (large)</a:t>
+            </a:r>
+          </a:p>
+        </p:txBody>
+      </p:sp>
+      <p:sp>
+        <p:nvSpPr>
+          <p:cNvPr id="6" name="TextBox 5"/>
+          <p:cNvSpPr txBox="1"/>
+          <p:nvPr/>
+        </p:nvSpPr>
+        <p:spPr>
+          <a:xfrm>
+            <a:off x="7680960" y="2194560"/>
+            <a:ext cx="4114800" cy="1280160"/>
+          </a:xfrm>
+          <a:prstGeom prst="rect">
+            <a:avLst/>
+          </a:prstGeom>
+          <a:noFill/>
+        </p:spPr>
+        <p:txBody>
+          <a:bodyPr wrap="square" lIns="0" rIns="0" tIns="0" bIns="0" anchor="t">
+            <a:spAutoFit/>
+          </a:bodyPr>
+          <a:lstStyle/>
+          <a:p>
+            <a:pPr algn="l"/>
+            <a:r>
+              <a:rPr sz="8400" b="1" i="0">
+                <a:solidFill>
+                  <a:srgbClr val="2CA02C"/>
+                </a:solidFill>
+                <a:latin typeface="Helvetica"/>
+              </a:rPr>
+              <a:t>67.7</a:t>
+            </a:r>
+          </a:p>
+        </p:txBody>
+      </p:sp>
+      <p:sp>
+        <p:nvSpPr>
+          <p:cNvPr id="7" name="TextBox 6"/>
+          <p:cNvSpPr txBox="1"/>
+          <p:nvPr/>
+        </p:nvSpPr>
+        <p:spPr>
+          <a:xfrm>
+            <a:off x="7680960" y="3657600"/>
+            <a:ext cx="4114800" cy="457200"/>
+          </a:xfrm>
+          <a:prstGeom prst="rect">
+            <a:avLst/>
+          </a:prstGeom>
+          <a:noFill/>
+        </p:spPr>
+        <p:txBody>
+          <a:bodyPr wrap="square" lIns="0" rIns="0" tIns="0" bIns="0" anchor="t">
+            <a:spAutoFit/>
+          </a:bodyPr>
+          <a:lstStyle/>
+          <a:p>
+            <a:pPr algn="l"/>
+            <a:r>
+              <a:rPr sz="1500" b="0" i="0">
+                <a:solidFill>
+                  <a:srgbClr val="666677"/>
+                </a:solidFill>
+                <a:latin typeface="Helvetica"/>
+              </a:rPr>
+              <a:t>APₛ (small)</a:t>
+            </a:r>
+          </a:p>
+        </p:txBody>
+      </p:sp>
+      <p:sp>
+        <p:nvSpPr>
+          <p:cNvPr id="8" name="TextBox 7"/>
+          <p:cNvSpPr txBox="1"/>
+          <p:nvPr/>
+        </p:nvSpPr>
+        <p:spPr>
+          <a:xfrm>
+            <a:off x="7680960" y="4023360"/>
+            <a:ext cx="4114800" cy="1280160"/>
+          </a:xfrm>
+          <a:prstGeom prst="rect">
+            <a:avLst/>
+          </a:prstGeom>
+          <a:noFill/>
+        </p:spPr>
+        <p:txBody>
+          <a:bodyPr wrap="square" lIns="0" rIns="0" tIns="0" bIns="0" anchor="t">
+            <a:spAutoFit/>
+          </a:bodyPr>
+          <a:lstStyle/>
+          <a:p>
+            <a:pPr algn="l"/>
+            <a:r>
+              <a:rPr sz="8400" b="1" i="0">
+                <a:solidFill>
+                  <a:srgbClr val="D62C2E"/>
+                </a:solidFill>
+                <a:latin typeface="Helvetica"/>
+              </a:rPr>
+              <a:t>34.7</a:t>
+            </a:r>
+          </a:p>
+        </p:txBody>
+      </p:sp>
+      <p:sp>
+        <p:nvSpPr>
+          <p:cNvPr id="9" name="TextBox 8"/>
+          <p:cNvSpPr txBox="1"/>
+          <p:nvPr/>
+        </p:nvSpPr>
+        <p:spPr>
+          <a:xfrm>
+            <a:off x="7680960" y="5486400"/>
+            <a:ext cx="4114800" cy="548640"/>
+          </a:xfrm>
+          <a:prstGeom prst="rect">
+            <a:avLst/>
+          </a:prstGeom>
+          <a:noFill/>
+        </p:spPr>
+        <p:txBody>
+          <a:bodyPr wrap="square" lIns="0" rIns="0" tIns="0" bIns="0" anchor="t">
+            <a:spAutoFit/>
+          </a:bodyPr>
+          <a:lstStyle/>
+          <a:p>
+            <a:pPr algn="l"/>
+            <a:r>
+              <a:rPr sz="1800" b="0" i="1">
                 <a:solidFill>
                   <a:srgbClr val="1A1A2E"/>
                 </a:solidFill>
                 <a:latin typeface="Helvetica"/>
               </a:rPr>
-              <a:t>Encoder memory is computed once. The decoder cannot revise it.</a:t>
-            </a:r>
-          </a:p>
-        </p:txBody>
-      </p:sp>
-      <p:sp>
-        <p:nvSpPr>
-          <p:cNvPr id="6" name="TextBox 5"/>
+              <a:t>33-point gap. Why?</a:t>
+            </a:r>
+          </a:p>
+        </p:txBody>
+      </p:sp>
+      <p:sp>
+        <p:nvSpPr>
+          <p:cNvPr id="10" name="TextBox 9"/>
           <p:cNvSpPr txBox="1"/>
           <p:nvPr/>
         </p:nvSpPr>
         <p:spPr>
           <a:xfrm>
             <a:off x="640080" y="6446520"/>
-            <a:ext cx="7315200" cy="274320"/>
+            <a:ext cx="9144000" cy="274320"/>
           </a:xfrm>
           <a:prstGeom prst="rect">
             <a:avLst/>
@@ -7615,14 +9949,14 @@
                 </a:solidFill>
                 <a:latin typeface="Helvetica"/>
               </a:rPr>
-              <a:t>Feedback-Augmented RT-DETR  •  Hatem Saadallah &amp; Nour Jennane</a:t>
-            </a:r>
-          </a:p>
-        </p:txBody>
-      </p:sp>
-      <p:sp>
-        <p:nvSpPr>
-          <p:cNvPr id="7" name="TextBox 6"/>
+              <a:t>1. Problem Formulation  •  Feedback-Augmented RT-DETR  •  Hatem Saadallah &amp; Nour Jennane</a:t>
+            </a:r>
+          </a:p>
+        </p:txBody>
+      </p:sp>
+      <p:sp>
+        <p:nvSpPr>
+          <p:cNvPr id="11" name="TextBox 10"/>
           <p:cNvSpPr txBox="1"/>
           <p:nvPr/>
         </p:nvSpPr>
@@ -7650,7 +9984,7 @@
                 </a:solidFill>
                 <a:latin typeface="Helvetica"/>
               </a:rPr>
-              <a:t>3 / 18</a:t>
+              <a:t>3 / 24</a:t>
             </a:r>
           </a:p>
         </p:txBody>
@@ -7703,7 +10037,7 @@
                 </a:solidFill>
                 <a:latin typeface="Helvetica"/>
               </a:rPr>
-              <a:t>Our idea: let the model refine its own features</a:t>
+              <a:t>RT-DETR: backbone → encoder → decoder</a:t>
             </a:r>
           </a:p>
         </p:txBody>
@@ -7753,7 +10087,7 @@
       </p:sp>
       <p:pic>
         <p:nvPicPr>
-          <p:cNvPr id="4" name="Picture 3" descr="diag_idea.png"/>
+          <p:cNvPr id="4" name="Picture 3" descr="diag_rtdetr.png"/>
           <p:cNvPicPr>
             <a:picLocks noChangeAspect="1"/>
           </p:cNvPicPr>
@@ -7767,8 +10101,8 @@
         </p:blipFill>
         <p:spPr>
           <a:xfrm>
-            <a:off x="731520" y="2011680"/>
-            <a:ext cx="10698480" cy="3180182"/>
+            <a:off x="365760" y="1463040"/>
+            <a:ext cx="11430000" cy="4089633"/>
           </a:xfrm>
           <a:prstGeom prst="rect">
             <a:avLst/>
@@ -7783,8 +10117,8 @@
         </p:nvSpPr>
         <p:spPr>
           <a:xfrm>
-            <a:off x="640080" y="5212080"/>
-            <a:ext cx="10972800" cy="548640"/>
+            <a:off x="640080" y="5120640"/>
+            <a:ext cx="10972800" cy="457200"/>
           </a:xfrm>
           <a:prstGeom prst="rect">
             <a:avLst/>
@@ -7799,13 +10133,13 @@
           <a:p>
             <a:pPr algn="ctr"/>
             <a:r>
-              <a:rPr sz="2200" b="0" i="0">
+              <a:rPr sz="1800" b="0" i="0">
                 <a:solidFill>
                   <a:srgbClr val="1A1A2E"/>
                 </a:solidFill>
                 <a:latin typeface="Helvetica"/>
               </a:rPr>
-              <a:t>Feed early decoder predictions back into the encoder memory.</a:t>
+              <a:t>End-to-end, NMS-free. Six decoder layers all attend over the same encoder memory.</a:t>
             </a:r>
           </a:p>
         </p:txBody>
@@ -7818,8 +10152,43 @@
         </p:nvSpPr>
         <p:spPr>
           <a:xfrm>
+            <a:off x="640080" y="5760720"/>
+            <a:ext cx="10972800" cy="365760"/>
+          </a:xfrm>
+          <a:prstGeom prst="rect">
+            <a:avLst/>
+          </a:prstGeom>
+          <a:noFill/>
+        </p:spPr>
+        <p:txBody>
+          <a:bodyPr wrap="square" lIns="0" rIns="0" tIns="0" bIns="0" anchor="t">
+            <a:spAutoFit/>
+          </a:bodyPr>
+          <a:lstStyle/>
+          <a:p>
+            <a:pPr algn="ctr"/>
+            <a:r>
+              <a:rPr sz="1200" b="0" i="1">
+                <a:solidFill>
+                  <a:srgbClr val="666677"/>
+                </a:solidFill>
+                <a:latin typeface="Helvetica"/>
+              </a:rPr>
+              <a:t>Backbone extracts a feature pyramid (P2–P5); the hybrid encoder fuses scales; the decoder cross-attends.</a:t>
+            </a:r>
+          </a:p>
+        </p:txBody>
+      </p:sp>
+      <p:sp>
+        <p:nvSpPr>
+          <p:cNvPr id="7" name="TextBox 6"/>
+          <p:cNvSpPr txBox="1"/>
+          <p:nvPr/>
+        </p:nvSpPr>
+        <p:spPr>
+          <a:xfrm>
             <a:off x="640080" y="6446520"/>
-            <a:ext cx="7315200" cy="274320"/>
+            <a:ext cx="9144000" cy="274320"/>
           </a:xfrm>
           <a:prstGeom prst="rect">
             <a:avLst/>
@@ -7840,14 +10209,14 @@
                 </a:solidFill>
                 <a:latin typeface="Helvetica"/>
               </a:rPr>
-              <a:t>Feedback-Augmented RT-DETR  •  Hatem Saadallah &amp; Nour Jennane</a:t>
-            </a:r>
-          </a:p>
-        </p:txBody>
-      </p:sp>
-      <p:sp>
-        <p:nvSpPr>
-          <p:cNvPr id="7" name="TextBox 6"/>
+              <a:t>1. Problem Formulation  •  Feedback-Augmented RT-DETR  •  Hatem Saadallah &amp; Nour Jennane</a:t>
+            </a:r>
+          </a:p>
+        </p:txBody>
+      </p:sp>
+      <p:sp>
+        <p:nvSpPr>
+          <p:cNvPr id="8" name="TextBox 7"/>
           <p:cNvSpPr txBox="1"/>
           <p:nvPr/>
         </p:nvSpPr>
@@ -7875,7 +10244,7 @@
                 </a:solidFill>
                 <a:latin typeface="Helvetica"/>
               </a:rPr>
-              <a:t>4 / 18</a:t>
+              <a:t>4 / 24</a:t>
             </a:r>
           </a:p>
         </p:txBody>
@@ -7928,7 +10297,7 @@
                 </a:solidFill>
                 <a:latin typeface="Helvetica"/>
               </a:rPr>
-              <a:t>Attention, in one line</a:t>
+              <a:t>The reason is structural</a:t>
             </a:r>
           </a:p>
         </p:txBody>
@@ -7978,7 +10347,7 @@
       </p:sp>
       <p:pic>
         <p:nvPicPr>
-          <p:cNvPr id="4" name="Picture 3" descr="math_attention.png"/>
+          <p:cNvPr id="4" name="Picture 3" descr="diag_baseline.png"/>
           <p:cNvPicPr>
             <a:picLocks noChangeAspect="1"/>
           </p:cNvPicPr>
@@ -7992,8 +10361,8 @@
         </p:blipFill>
         <p:spPr>
           <a:xfrm>
-            <a:off x="457200" y="1371600"/>
-            <a:ext cx="11247120" cy="4875472"/>
+            <a:off x="731520" y="2286000"/>
+            <a:ext cx="10698480" cy="2415119"/>
           </a:xfrm>
           <a:prstGeom prst="rect">
             <a:avLst/>
@@ -8008,8 +10377,78 @@
         </p:nvSpPr>
         <p:spPr>
           <a:xfrm>
+            <a:off x="640080" y="5029200"/>
+            <a:ext cx="10972800" cy="548640"/>
+          </a:xfrm>
+          <a:prstGeom prst="rect">
+            <a:avLst/>
+          </a:prstGeom>
+          <a:noFill/>
+        </p:spPr>
+        <p:txBody>
+          <a:bodyPr wrap="square" lIns="0" rIns="0" tIns="0" bIns="0" anchor="t">
+            <a:spAutoFit/>
+          </a:bodyPr>
+          <a:lstStyle/>
+          <a:p>
+            <a:pPr algn="ctr"/>
+            <a:r>
+              <a:rPr sz="2200" b="0" i="0">
+                <a:solidFill>
+                  <a:srgbClr val="1A1A2E"/>
+                </a:solidFill>
+                <a:latin typeface="Helvetica"/>
+              </a:rPr>
+              <a:t>Encoder memory is computed once. The decoder cannot revise it.</a:t>
+            </a:r>
+          </a:p>
+        </p:txBody>
+      </p:sp>
+      <p:sp>
+        <p:nvSpPr>
+          <p:cNvPr id="6" name="TextBox 5"/>
+          <p:cNvSpPr txBox="1"/>
+          <p:nvPr/>
+        </p:nvSpPr>
+        <p:spPr>
+          <a:xfrm>
+            <a:off x="640080" y="5669280"/>
+            <a:ext cx="10972800" cy="457200"/>
+          </a:xfrm>
+          <a:prstGeom prst="rect">
+            <a:avLst/>
+          </a:prstGeom>
+          <a:noFill/>
+        </p:spPr>
+        <p:txBody>
+          <a:bodyPr wrap="square" lIns="0" rIns="0" tIns="0" bIns="0" anchor="t">
+            <a:spAutoFit/>
+          </a:bodyPr>
+          <a:lstStyle/>
+          <a:p>
+            <a:pPr algn="ctr"/>
+            <a:r>
+              <a:rPr sz="1400" b="0" i="1">
+                <a:solidFill>
+                  <a:srgbClr val="666677"/>
+                </a:solidFill>
+                <a:latin typeface="Helvetica"/>
+              </a:rPr>
+              <a:t>Refinement of the features small objects live in is a one-way street.</a:t>
+            </a:r>
+          </a:p>
+        </p:txBody>
+      </p:sp>
+      <p:sp>
+        <p:nvSpPr>
+          <p:cNvPr id="7" name="TextBox 6"/>
+          <p:cNvSpPr txBox="1"/>
+          <p:nvPr/>
+        </p:nvSpPr>
+        <p:spPr>
+          <a:xfrm>
             <a:off x="640080" y="6446520"/>
-            <a:ext cx="7315200" cy="274320"/>
+            <a:ext cx="9144000" cy="274320"/>
           </a:xfrm>
           <a:prstGeom prst="rect">
             <a:avLst/>
@@ -8030,14 +10469,14 @@
                 </a:solidFill>
                 <a:latin typeface="Helvetica"/>
               </a:rPr>
-              <a:t>Feedback-Augmented RT-DETR  •  Hatem Saadallah &amp; Nour Jennane</a:t>
-            </a:r>
-          </a:p>
-        </p:txBody>
-      </p:sp>
-      <p:sp>
-        <p:nvSpPr>
-          <p:cNvPr id="6" name="TextBox 5"/>
+              <a:t>1. Problem Formulation  •  Feedback-Augmented RT-DETR  •  Hatem Saadallah &amp; Nour Jennane</a:t>
+            </a:r>
+          </a:p>
+        </p:txBody>
+      </p:sp>
+      <p:sp>
+        <p:nvSpPr>
+          <p:cNvPr id="8" name="TextBox 7"/>
           <p:cNvSpPr txBox="1"/>
           <p:nvPr/>
         </p:nvSpPr>
@@ -8065,7 +10504,7 @@
                 </a:solidFill>
                 <a:latin typeface="Helvetica"/>
               </a:rPr>
-              <a:t>5 / 18</a:t>
+              <a:t>5 / 24</a:t>
             </a:r>
           </a:p>
         </p:txBody>
@@ -8096,8 +10535,8 @@
         </p:nvSpPr>
         <p:spPr>
           <a:xfrm>
-            <a:off x="640080" y="457200"/>
-            <a:ext cx="10972800" cy="822960"/>
+            <a:off x="731520" y="2377440"/>
+            <a:ext cx="10698480" cy="365760"/>
           </a:xfrm>
           <a:prstGeom prst="rect">
             <a:avLst/>
@@ -8112,13 +10551,13 @@
           <a:p>
             <a:pPr algn="l"/>
             <a:r>
-              <a:rPr sz="3400" b="1" i="0">
+              <a:rPr sz="1400" b="1" i="0">
                 <a:solidFill>
                   <a:srgbClr val="1F6FEB"/>
                 </a:solidFill>
                 <a:latin typeface="Helvetica"/>
               </a:rPr>
-              <a:t>Our feedback rule</a:t>
+              <a:t>SECTION  2  /  5</a:t>
             </a:r>
           </a:p>
         </p:txBody>
@@ -8131,7 +10570,7 @@
         </p:nvSpPr>
         <p:spPr>
           <a:xfrm>
-            <a:off x="640080" y="1143000"/>
+            <a:off x="731520" y="2788920"/>
             <a:ext cx="640080" cy="54864"/>
           </a:xfrm>
           <a:prstGeom prst="rect">
@@ -8166,30 +10605,41 @@
           </a:p>
         </p:txBody>
       </p:sp>
-      <p:pic>
-        <p:nvPicPr>
-          <p:cNvPr id="4" name="Picture 3" descr="math_feedback.png"/>
-          <p:cNvPicPr>
-            <a:picLocks noChangeAspect="1"/>
-          </p:cNvPicPr>
-          <p:nvPr/>
-        </p:nvPicPr>
-        <p:blipFill>
-          <a:blip r:embed="rId2"/>
-          <a:stretch>
-            <a:fillRect/>
-          </a:stretch>
-        </p:blipFill>
-        <p:spPr>
-          <a:xfrm>
-            <a:off x="457200" y="1371600"/>
-            <a:ext cx="11247120" cy="5011823"/>
-          </a:xfrm>
-          <a:prstGeom prst="rect">
-            <a:avLst/>
-          </a:prstGeom>
-        </p:spPr>
-      </p:pic>
+      <p:sp>
+        <p:nvSpPr>
+          <p:cNvPr id="4" name="TextBox 3"/>
+          <p:cNvSpPr txBox="1"/>
+          <p:nvPr/>
+        </p:nvSpPr>
+        <p:spPr>
+          <a:xfrm>
+            <a:off x="731520" y="2971800"/>
+            <a:ext cx="10698480" cy="1097280"/>
+          </a:xfrm>
+          <a:prstGeom prst="rect">
+            <a:avLst/>
+          </a:prstGeom>
+          <a:noFill/>
+        </p:spPr>
+        <p:txBody>
+          <a:bodyPr wrap="square" lIns="0" rIns="0" tIns="0" bIns="0" anchor="t">
+            <a:spAutoFit/>
+          </a:bodyPr>
+          <a:lstStyle/>
+          <a:p>
+            <a:pPr algn="l"/>
+            <a:r>
+              <a:rPr sz="5400" b="1" i="0">
+                <a:solidFill>
+                  <a:srgbClr val="1A1A2E"/>
+                </a:solidFill>
+                <a:latin typeface="Helvetica"/>
+              </a:rPr>
+              <a:t>Data Sourcing Strategy</a:t>
+            </a:r>
+          </a:p>
+        </p:txBody>
+      </p:sp>
       <p:sp>
         <p:nvSpPr>
           <p:cNvPr id="5" name="TextBox 4"/>
@@ -8198,8 +10648,43 @@
         </p:nvSpPr>
         <p:spPr>
           <a:xfrm>
+            <a:off x="731520" y="4206240"/>
+            <a:ext cx="10698480" cy="548640"/>
+          </a:xfrm>
+          <a:prstGeom prst="rect">
+            <a:avLst/>
+          </a:prstGeom>
+          <a:noFill/>
+        </p:spPr>
+        <p:txBody>
+          <a:bodyPr wrap="square" lIns="0" rIns="0" tIns="0" bIns="0" anchor="t">
+            <a:spAutoFit/>
+          </a:bodyPr>
+          <a:lstStyle/>
+          <a:p>
+            <a:pPr algn="l"/>
+            <a:r>
+              <a:rPr sz="2000" b="0" i="1">
+                <a:solidFill>
+                  <a:srgbClr val="666677"/>
+                </a:solidFill>
+                <a:latin typeface="Helvetica"/>
+              </a:rPr>
+              <a:t>What dataset we used and why it is appropriate.</a:t>
+            </a:r>
+          </a:p>
+        </p:txBody>
+      </p:sp>
+      <p:sp>
+        <p:nvSpPr>
+          <p:cNvPr id="6" name="TextBox 5"/>
+          <p:cNvSpPr txBox="1"/>
+          <p:nvPr/>
+        </p:nvSpPr>
+        <p:spPr>
+          <a:xfrm>
             <a:off x="640080" y="6446520"/>
-            <a:ext cx="7315200" cy="274320"/>
+            <a:ext cx="9144000" cy="274320"/>
           </a:xfrm>
           <a:prstGeom prst="rect">
             <a:avLst/>
@@ -8220,14 +10705,14 @@
                 </a:solidFill>
                 <a:latin typeface="Helvetica"/>
               </a:rPr>
-              <a:t>Feedback-Augmented RT-DETR  •  Hatem Saadallah &amp; Nour Jennane</a:t>
-            </a:r>
-          </a:p>
-        </p:txBody>
-      </p:sp>
-      <p:sp>
-        <p:nvSpPr>
-          <p:cNvPr id="6" name="TextBox 5"/>
+              <a:t>2. Data Sourcing Strategy  •  Feedback-Augmented RT-DETR  •  Hatem Saadallah &amp; Nour Jennane</a:t>
+            </a:r>
+          </a:p>
+        </p:txBody>
+      </p:sp>
+      <p:sp>
+        <p:nvSpPr>
+          <p:cNvPr id="7" name="TextBox 6"/>
           <p:cNvSpPr txBox="1"/>
           <p:nvPr/>
         </p:nvSpPr>
@@ -8255,7 +10740,7 @@
                 </a:solidFill>
                 <a:latin typeface="Helvetica"/>
               </a:rPr>
-              <a:t>6 / 18</a:t>
+              <a:t>6 / 24</a:t>
             </a:r>
           </a:p>
         </p:txBody>
@@ -8308,7 +10793,7 @@
                 </a:solidFill>
                 <a:latin typeface="Helvetica"/>
               </a:rPr>
-              <a:t>First attempt (v1)</a:t>
+              <a:t>COCO 2017 — the standard small-object benchmark</a:t>
             </a:r>
           </a:p>
         </p:txBody>
@@ -8358,119 +10843,526 @@
       </p:sp>
       <p:sp>
         <p:nvSpPr>
-          <p:cNvPr id="4" name="TextBox 3"/>
-          <p:cNvSpPr txBox="1"/>
-          <p:nvPr/>
-        </p:nvSpPr>
-        <p:spPr>
-          <a:xfrm>
-            <a:off x="640080" y="1828800"/>
-            <a:ext cx="10972800" cy="548640"/>
-          </a:xfrm>
-          <a:prstGeom prst="rect">
-            <a:avLst/>
-          </a:prstGeom>
-          <a:noFill/>
-        </p:spPr>
-        <p:txBody>
-          <a:bodyPr wrap="square" lIns="0" rIns="0" tIns="0" bIns="0" anchor="t">
-            <a:spAutoFit/>
-          </a:bodyPr>
+          <p:cNvPr id="4" name="Rounded Rectangle 3"/>
+          <p:cNvSpPr/>
+          <p:nvPr/>
+        </p:nvSpPr>
+        <p:spPr>
+          <a:xfrm>
+            <a:off x="640080" y="1554480"/>
+            <a:ext cx="5760720" cy="4206240"/>
+          </a:xfrm>
+          <a:prstGeom prst="roundRect">
+            <a:avLst/>
+          </a:prstGeom>
+          <a:solidFill>
+            <a:srgbClr val="F5F5F7"/>
+          </a:solidFill>
+          <a:ln w="9525">
+            <a:solidFill>
+              <a:srgbClr val="666677"/>
+            </a:solidFill>
+          </a:ln>
+          <a:effectLst/>
+        </p:spPr>
+        <p:style>
+          <a:lnRef idx="1">
+            <a:schemeClr val="accent1"/>
+          </a:lnRef>
+          <a:fillRef idx="3">
+            <a:schemeClr val="accent1"/>
+          </a:fillRef>
+          <a:effectRef idx="2">
+            <a:schemeClr val="accent1"/>
+          </a:effectRef>
+          <a:fontRef idx="minor">
+            <a:schemeClr val="lt1"/>
+          </a:fontRef>
+        </p:style>
+        <p:txBody>
+          <a:bodyPr rtlCol="0" anchor="ctr"/>
           <a:lstStyle/>
           <a:p>
             <a:pPr algn="ctr"/>
-            <a:r>
-              <a:rPr sz="2200" b="0" i="1">
+          </a:p>
+        </p:txBody>
+      </p:sp>
+      <p:sp>
+        <p:nvSpPr>
+          <p:cNvPr id="5" name="TextBox 4"/>
+          <p:cNvSpPr txBox="1"/>
+          <p:nvPr/>
+        </p:nvSpPr>
+        <p:spPr>
+          <a:xfrm>
+            <a:off x="868680" y="1783080"/>
+            <a:ext cx="5349240" cy="457200"/>
+          </a:xfrm>
+          <a:prstGeom prst="rect">
+            <a:avLst/>
+          </a:prstGeom>
+          <a:noFill/>
+        </p:spPr>
+        <p:txBody>
+          <a:bodyPr wrap="square" lIns="0" rIns="0" tIns="0" bIns="0" anchor="t">
+            <a:spAutoFit/>
+          </a:bodyPr>
+          <a:lstStyle/>
+          <a:p>
+            <a:pPr algn="l"/>
+            <a:r>
+              <a:rPr sz="1400" b="1" i="0">
+                <a:solidFill>
+                  <a:srgbClr val="1F6FEB"/>
+                </a:solidFill>
+                <a:latin typeface="Helvetica"/>
+              </a:rPr>
+              <a:t>Dataset</a:t>
+            </a:r>
+          </a:p>
+        </p:txBody>
+      </p:sp>
+      <p:sp>
+        <p:nvSpPr>
+          <p:cNvPr id="6" name="TextBox 5"/>
+          <p:cNvSpPr txBox="1"/>
+          <p:nvPr/>
+        </p:nvSpPr>
+        <p:spPr>
+          <a:xfrm>
+            <a:off x="868680" y="2240280"/>
+            <a:ext cx="5349240" cy="457200"/>
+          </a:xfrm>
+          <a:prstGeom prst="rect">
+            <a:avLst/>
+          </a:prstGeom>
+          <a:noFill/>
+        </p:spPr>
+        <p:txBody>
+          <a:bodyPr wrap="square" lIns="0" rIns="0" tIns="0" bIns="0" anchor="t">
+            <a:spAutoFit/>
+          </a:bodyPr>
+          <a:lstStyle/>
+          <a:p>
+            <a:pPr algn="l"/>
+            <a:r>
+              <a:rPr sz="2400" b="1" i="0">
                 <a:solidFill>
                   <a:srgbClr val="1A1A2E"/>
                 </a:solidFill>
                 <a:latin typeface="Helvetica"/>
               </a:rPr>
-              <a:t>Add the feedback module. Train. Toggle it off at inference.</a:t>
-            </a:r>
-          </a:p>
-        </p:txBody>
-      </p:sp>
-      <p:sp>
-        <p:nvSpPr>
-          <p:cNvPr id="5" name="TextBox 4"/>
-          <p:cNvSpPr txBox="1"/>
-          <p:nvPr/>
-        </p:nvSpPr>
-        <p:spPr>
-          <a:xfrm>
-            <a:off x="640080" y="3291840"/>
-            <a:ext cx="10972800" cy="1828800"/>
-          </a:xfrm>
-          <a:prstGeom prst="rect">
-            <a:avLst/>
-          </a:prstGeom>
-          <a:noFill/>
-        </p:spPr>
-        <p:txBody>
-          <a:bodyPr wrap="square" lIns="0" rIns="0" tIns="0" bIns="0" anchor="t">
-            <a:spAutoFit/>
-          </a:bodyPr>
+              <a:t>Microsoft COCO 2017</a:t>
+            </a:r>
+          </a:p>
+        </p:txBody>
+      </p:sp>
+      <p:sp>
+        <p:nvSpPr>
+          <p:cNvPr id="7" name="TextBox 6"/>
+          <p:cNvSpPr txBox="1"/>
+          <p:nvPr/>
+        </p:nvSpPr>
+        <p:spPr>
+          <a:xfrm>
+            <a:off x="868680" y="2834640"/>
+            <a:ext cx="5349240" cy="457200"/>
+          </a:xfrm>
+          <a:prstGeom prst="rect">
+            <a:avLst/>
+          </a:prstGeom>
+          <a:noFill/>
+        </p:spPr>
+        <p:txBody>
+          <a:bodyPr wrap="square" lIns="0" rIns="0" tIns="0" bIns="0" anchor="t">
+            <a:spAutoFit/>
+          </a:bodyPr>
+          <a:lstStyle/>
+          <a:p>
+            <a:pPr algn="l"/>
+            <a:r>
+              <a:rPr sz="1400" b="1" i="0">
+                <a:solidFill>
+                  <a:srgbClr val="1F6FEB"/>
+                </a:solidFill>
+                <a:latin typeface="Helvetica"/>
+              </a:rPr>
+              <a:t>Splits</a:t>
+            </a:r>
+          </a:p>
+        </p:txBody>
+      </p:sp>
+      <p:sp>
+        <p:nvSpPr>
+          <p:cNvPr id="8" name="TextBox 7"/>
+          <p:cNvSpPr txBox="1"/>
+          <p:nvPr/>
+        </p:nvSpPr>
+        <p:spPr>
+          <a:xfrm>
+            <a:off x="868680" y="3246120"/>
+            <a:ext cx="5349240" cy="457200"/>
+          </a:xfrm>
+          <a:prstGeom prst="rect">
+            <a:avLst/>
+          </a:prstGeom>
+          <a:noFill/>
+        </p:spPr>
+        <p:txBody>
+          <a:bodyPr wrap="square" lIns="0" rIns="0" tIns="0" bIns="0" anchor="t">
+            <a:spAutoFit/>
+          </a:bodyPr>
+          <a:lstStyle/>
+          <a:p>
+            <a:pPr algn="l"/>
+            <a:r>
+              <a:rPr sz="1500" b="0" i="0">
+                <a:solidFill>
+                  <a:srgbClr val="1A1A2E"/>
+                </a:solidFill>
+                <a:latin typeface="Menlo"/>
+              </a:rPr>
+              <a:t>train2017:  118k images, 860k boxes</a:t>
+            </a:r>
+          </a:p>
+        </p:txBody>
+      </p:sp>
+      <p:sp>
+        <p:nvSpPr>
+          <p:cNvPr id="9" name="TextBox 8"/>
+          <p:cNvSpPr txBox="1"/>
+          <p:nvPr/>
+        </p:nvSpPr>
+        <p:spPr>
+          <a:xfrm>
+            <a:off x="868680" y="3611880"/>
+            <a:ext cx="5349240" cy="457200"/>
+          </a:xfrm>
+          <a:prstGeom prst="rect">
+            <a:avLst/>
+          </a:prstGeom>
+          <a:noFill/>
+        </p:spPr>
+        <p:txBody>
+          <a:bodyPr wrap="square" lIns="0" rIns="0" tIns="0" bIns="0" anchor="t">
+            <a:spAutoFit/>
+          </a:bodyPr>
+          <a:lstStyle/>
+          <a:p>
+            <a:pPr algn="l"/>
+            <a:r>
+              <a:rPr sz="1500" b="0" i="0">
+                <a:solidFill>
+                  <a:srgbClr val="1A1A2E"/>
+                </a:solidFill>
+                <a:latin typeface="Menlo"/>
+              </a:rPr>
+              <a:t>val2017:        5k images   (held out)</a:t>
+            </a:r>
+          </a:p>
+        </p:txBody>
+      </p:sp>
+      <p:sp>
+        <p:nvSpPr>
+          <p:cNvPr id="10" name="TextBox 9"/>
+          <p:cNvSpPr txBox="1"/>
+          <p:nvPr/>
+        </p:nvSpPr>
+        <p:spPr>
+          <a:xfrm>
+            <a:off x="868680" y="4297680"/>
+            <a:ext cx="5349240" cy="457200"/>
+          </a:xfrm>
+          <a:prstGeom prst="rect">
+            <a:avLst/>
+          </a:prstGeom>
+          <a:noFill/>
+        </p:spPr>
+        <p:txBody>
+          <a:bodyPr wrap="square" lIns="0" rIns="0" tIns="0" bIns="0" anchor="t">
+            <a:spAutoFit/>
+          </a:bodyPr>
+          <a:lstStyle/>
+          <a:p>
+            <a:pPr algn="l"/>
+            <a:r>
+              <a:rPr sz="1400" b="1" i="0">
+                <a:solidFill>
+                  <a:srgbClr val="1F6FEB"/>
+                </a:solidFill>
+                <a:latin typeface="Helvetica"/>
+              </a:rPr>
+              <a:t>Pre-trained weights</a:t>
+            </a:r>
+          </a:p>
+        </p:txBody>
+      </p:sp>
+      <p:sp>
+        <p:nvSpPr>
+          <p:cNvPr id="11" name="TextBox 10"/>
+          <p:cNvSpPr txBox="1"/>
+          <p:nvPr/>
+        </p:nvSpPr>
+        <p:spPr>
+          <a:xfrm>
+            <a:off x="868680" y="4709160"/>
+            <a:ext cx="5349240" cy="457200"/>
+          </a:xfrm>
+          <a:prstGeom prst="rect">
+            <a:avLst/>
+          </a:prstGeom>
+          <a:noFill/>
+        </p:spPr>
+        <p:txBody>
+          <a:bodyPr wrap="square" lIns="0" rIns="0" tIns="0" bIns="0" anchor="t">
+            <a:spAutoFit/>
+          </a:bodyPr>
+          <a:lstStyle/>
+          <a:p>
+            <a:pPr algn="l"/>
+            <a:r>
+              <a:rPr sz="1300" b="0" i="0">
+                <a:solidFill>
+                  <a:srgbClr val="1A1A2E"/>
+                </a:solidFill>
+                <a:latin typeface="Menlo"/>
+              </a:rPr>
+              <a:t>rtdetr_r50vd_6x_coco.pth  (public, finetuned 13 ep)</a:t>
+            </a:r>
+          </a:p>
+        </p:txBody>
+      </p:sp>
+      <p:sp>
+        <p:nvSpPr>
+          <p:cNvPr id="12" name="Rounded Rectangle 11"/>
+          <p:cNvSpPr/>
+          <p:nvPr/>
+        </p:nvSpPr>
+        <p:spPr>
+          <a:xfrm>
+            <a:off x="6766560" y="1554480"/>
+            <a:ext cx="4846320" cy="4206240"/>
+          </a:xfrm>
+          <a:prstGeom prst="roundRect">
+            <a:avLst/>
+          </a:prstGeom>
+          <a:solidFill>
+            <a:srgbClr val="E8F1FF"/>
+          </a:solidFill>
+          <a:ln w="19050">
+            <a:solidFill>
+              <a:srgbClr val="1F6FEB"/>
+            </a:solidFill>
+          </a:ln>
+          <a:effectLst/>
+        </p:spPr>
+        <p:style>
+          <a:lnRef idx="1">
+            <a:schemeClr val="accent1"/>
+          </a:lnRef>
+          <a:fillRef idx="3">
+            <a:schemeClr val="accent1"/>
+          </a:fillRef>
+          <a:effectRef idx="2">
+            <a:schemeClr val="accent1"/>
+          </a:effectRef>
+          <a:fontRef idx="minor">
+            <a:schemeClr val="lt1"/>
+          </a:fontRef>
+        </p:style>
+        <p:txBody>
+          <a:bodyPr rtlCol="0" anchor="ctr"/>
           <a:lstStyle/>
           <a:p>
             <a:pPr algn="ctr"/>
-            <a:r>
-              <a:rPr sz="11000" b="1" i="0">
-                <a:solidFill>
-                  <a:srgbClr val="D62C2E"/>
-                </a:solidFill>
-                <a:latin typeface="Helvetica"/>
-              </a:rPr>
-              <a:t>Δ APₛ  =  0.00</a:t>
-            </a:r>
-          </a:p>
-        </p:txBody>
-      </p:sp>
-      <p:sp>
-        <p:nvSpPr>
-          <p:cNvPr id="6" name="TextBox 5"/>
-          <p:cNvSpPr txBox="1"/>
-          <p:nvPr/>
-        </p:nvSpPr>
-        <p:spPr>
-          <a:xfrm>
-            <a:off x="640080" y="5394960"/>
-            <a:ext cx="10972800" cy="457200"/>
-          </a:xfrm>
-          <a:prstGeom prst="rect">
-            <a:avLst/>
-          </a:prstGeom>
-          <a:noFill/>
-        </p:spPr>
-        <p:txBody>
-          <a:bodyPr wrap="square" lIns="0" rIns="0" tIns="0" bIns="0" anchor="t">
-            <a:spAutoFit/>
-          </a:bodyPr>
-          <a:lstStyle/>
-          <a:p>
-            <a:pPr algn="ctr"/>
-            <a:r>
-              <a:rPr sz="2000" b="0" i="0">
+          </a:p>
+        </p:txBody>
+      </p:sp>
+      <p:sp>
+        <p:nvSpPr>
+          <p:cNvPr id="13" name="TextBox 12"/>
+          <p:cNvSpPr txBox="1"/>
+          <p:nvPr/>
+        </p:nvSpPr>
+        <p:spPr>
+          <a:xfrm>
+            <a:off x="6949440" y="1783080"/>
+            <a:ext cx="4572000" cy="457200"/>
+          </a:xfrm>
+          <a:prstGeom prst="rect">
+            <a:avLst/>
+          </a:prstGeom>
+          <a:noFill/>
+        </p:spPr>
+        <p:txBody>
+          <a:bodyPr wrap="square" lIns="0" rIns="0" tIns="0" bIns="0" anchor="t">
+            <a:spAutoFit/>
+          </a:bodyPr>
+          <a:lstStyle/>
+          <a:p>
+            <a:pPr algn="l"/>
+            <a:r>
+              <a:rPr sz="1800" b="1" i="0">
+                <a:solidFill>
+                  <a:srgbClr val="1F6FEB"/>
+                </a:solidFill>
+                <a:latin typeface="Helvetica"/>
+              </a:rPr>
+              <a:t>Why COCO?</a:t>
+            </a:r>
+          </a:p>
+        </p:txBody>
+      </p:sp>
+      <p:sp>
+        <p:nvSpPr>
+          <p:cNvPr id="14" name="TextBox 13"/>
+          <p:cNvSpPr txBox="1"/>
+          <p:nvPr/>
+        </p:nvSpPr>
+        <p:spPr>
+          <a:xfrm>
+            <a:off x="6949440" y="2377440"/>
+            <a:ext cx="4572000" cy="731520"/>
+          </a:xfrm>
+          <a:prstGeom prst="rect">
+            <a:avLst/>
+          </a:prstGeom>
+          <a:noFill/>
+        </p:spPr>
+        <p:txBody>
+          <a:bodyPr wrap="square" lIns="0" rIns="0" tIns="0" bIns="0" anchor="t">
+            <a:spAutoFit/>
+          </a:bodyPr>
+          <a:lstStyle/>
+          <a:p>
+            <a:pPr algn="l"/>
+            <a:r>
+              <a:rPr sz="1400" b="0" i="0">
                 <a:solidFill>
                   <a:srgbClr val="1A1A2E"/>
                 </a:solidFill>
                 <a:latin typeface="Helvetica"/>
               </a:rPr>
-              <a:t>The mechanism contributed nothing.</a:t>
-            </a:r>
-          </a:p>
-        </p:txBody>
-      </p:sp>
-      <p:sp>
-        <p:nvSpPr>
-          <p:cNvPr id="7" name="TextBox 6"/>
+              <a:t>•  Standard benchmark — directly comparable to RT-DETR, DETR, YOLO.</a:t>
+            </a:r>
+          </a:p>
+        </p:txBody>
+      </p:sp>
+      <p:sp>
+        <p:nvSpPr>
+          <p:cNvPr id="15" name="TextBox 14"/>
+          <p:cNvSpPr txBox="1"/>
+          <p:nvPr/>
+        </p:nvSpPr>
+        <p:spPr>
+          <a:xfrm>
+            <a:off x="6949440" y="3154680"/>
+            <a:ext cx="4572000" cy="731520"/>
+          </a:xfrm>
+          <a:prstGeom prst="rect">
+            <a:avLst/>
+          </a:prstGeom>
+          <a:noFill/>
+        </p:spPr>
+        <p:txBody>
+          <a:bodyPr wrap="square" lIns="0" rIns="0" tIns="0" bIns="0" anchor="t">
+            <a:spAutoFit/>
+          </a:bodyPr>
+          <a:lstStyle/>
+          <a:p>
+            <a:pPr algn="l"/>
+            <a:r>
+              <a:rPr sz="1400" b="0" i="0">
+                <a:solidFill>
+                  <a:srgbClr val="1A1A2E"/>
+                </a:solidFill>
+                <a:latin typeface="Helvetica"/>
+              </a:rPr>
+              <a:t>•  Has explicit small / medium / large size buckets (APₛ / APₘ / APₗ).</a:t>
+            </a:r>
+          </a:p>
+        </p:txBody>
+      </p:sp>
+      <p:sp>
+        <p:nvSpPr>
+          <p:cNvPr id="16" name="TextBox 15"/>
+          <p:cNvSpPr txBox="1"/>
+          <p:nvPr/>
+        </p:nvSpPr>
+        <p:spPr>
+          <a:xfrm>
+            <a:off x="6949440" y="3931920"/>
+            <a:ext cx="4572000" cy="731520"/>
+          </a:xfrm>
+          <a:prstGeom prst="rect">
+            <a:avLst/>
+          </a:prstGeom>
+          <a:noFill/>
+        </p:spPr>
+        <p:txBody>
+          <a:bodyPr wrap="square" lIns="0" rIns="0" tIns="0" bIns="0" anchor="t">
+            <a:spAutoFit/>
+          </a:bodyPr>
+          <a:lstStyle/>
+          <a:p>
+            <a:pPr algn="l"/>
+            <a:r>
+              <a:rPr sz="1400" b="0" i="0">
+                <a:solidFill>
+                  <a:srgbClr val="1A1A2E"/>
+                </a:solidFill>
+                <a:latin typeface="Helvetica"/>
+              </a:rPr>
+              <a:t>•  ~41% of annotated boxes are small (area &lt; 32² px).</a:t>
+            </a:r>
+          </a:p>
+        </p:txBody>
+      </p:sp>
+      <p:sp>
+        <p:nvSpPr>
+          <p:cNvPr id="17" name="TextBox 16"/>
+          <p:cNvSpPr txBox="1"/>
+          <p:nvPr/>
+        </p:nvSpPr>
+        <p:spPr>
+          <a:xfrm>
+            <a:off x="6949440" y="4709160"/>
+            <a:ext cx="4572000" cy="731520"/>
+          </a:xfrm>
+          <a:prstGeom prst="rect">
+            <a:avLst/>
+          </a:prstGeom>
+          <a:noFill/>
+        </p:spPr>
+        <p:txBody>
+          <a:bodyPr wrap="square" lIns="0" rIns="0" tIns="0" bIns="0" anchor="t">
+            <a:spAutoFit/>
+          </a:bodyPr>
+          <a:lstStyle/>
+          <a:p>
+            <a:pPr algn="l"/>
+            <a:r>
+              <a:rPr sz="1400" b="0" i="0">
+                <a:solidFill>
+                  <a:srgbClr val="1A1A2E"/>
+                </a:solidFill>
+                <a:latin typeface="Helvetica"/>
+              </a:rPr>
+              <a:t>•  Same pre-training corpus as our baseline → fair comparison.</a:t>
+            </a:r>
+          </a:p>
+        </p:txBody>
+      </p:sp>
+      <p:sp>
+        <p:nvSpPr>
+          <p:cNvPr id="18" name="TextBox 17"/>
           <p:cNvSpPr txBox="1"/>
           <p:nvPr/>
         </p:nvSpPr>
         <p:spPr>
           <a:xfrm>
             <a:off x="640080" y="6446520"/>
-            <a:ext cx="7315200" cy="274320"/>
+            <a:ext cx="9144000" cy="274320"/>
           </a:xfrm>
           <a:prstGeom prst="rect">
             <a:avLst/>
@@ -8491,14 +11383,14 @@
                 </a:solidFill>
                 <a:latin typeface="Helvetica"/>
               </a:rPr>
-              <a:t>Feedback-Augmented RT-DETR  •  Hatem Saadallah &amp; Nour Jennane</a:t>
-            </a:r>
-          </a:p>
-        </p:txBody>
-      </p:sp>
-      <p:sp>
-        <p:nvSpPr>
-          <p:cNvPr id="8" name="TextBox 7"/>
+              <a:t>2. Data Sourcing Strategy  •  Feedback-Augmented RT-DETR  •  Hatem Saadallah &amp; Nour Jennane</a:t>
+            </a:r>
+          </a:p>
+        </p:txBody>
+      </p:sp>
+      <p:sp>
+        <p:nvSpPr>
+          <p:cNvPr id="19" name="TextBox 18"/>
           <p:cNvSpPr txBox="1"/>
           <p:nvPr/>
         </p:nvSpPr>
@@ -8526,7 +11418,7 @@
                 </a:solidFill>
                 <a:latin typeface="Helvetica"/>
               </a:rPr>
-              <a:t>7 / 18</a:t>
+              <a:t>7 / 24</a:t>
             </a:r>
           </a:p>
         </p:txBody>
@@ -8557,8 +11449,8 @@
         </p:nvSpPr>
         <p:spPr>
           <a:xfrm>
-            <a:off x="640080" y="457200"/>
-            <a:ext cx="10972800" cy="822960"/>
+            <a:off x="731520" y="2377440"/>
+            <a:ext cx="10698480" cy="365760"/>
           </a:xfrm>
           <a:prstGeom prst="rect">
             <a:avLst/>
@@ -8573,13 +11465,13 @@
           <a:p>
             <a:pPr algn="l"/>
             <a:r>
-              <a:rPr sz="3400" b="1" i="0">
+              <a:rPr sz="1400" b="1" i="0">
                 <a:solidFill>
                   <a:srgbClr val="1F6FEB"/>
                 </a:solidFill>
                 <a:latin typeface="Helvetica"/>
               </a:rPr>
-              <a:t>Why v1 failed: the gate collapsed</a:t>
+              <a:t>SECTION  3  /  5</a:t>
             </a:r>
           </a:p>
         </p:txBody>
@@ -8592,7 +11484,7 @@
         </p:nvSpPr>
         <p:spPr>
           <a:xfrm>
-            <a:off x="640080" y="1143000"/>
+            <a:off x="731520" y="2788920"/>
             <a:ext cx="640080" cy="54864"/>
           </a:xfrm>
           <a:prstGeom prst="rect">
@@ -8627,30 +11519,41 @@
           </a:p>
         </p:txBody>
       </p:sp>
-      <p:pic>
-        <p:nvPicPr>
-          <p:cNvPr id="4" name="Picture 3" descr="gate_reparam.png"/>
-          <p:cNvPicPr>
-            <a:picLocks noChangeAspect="1"/>
-          </p:cNvPicPr>
-          <p:nvPr/>
-        </p:nvPicPr>
-        <p:blipFill>
-          <a:blip r:embed="rId2"/>
-          <a:stretch>
-            <a:fillRect/>
-          </a:stretch>
-        </p:blipFill>
-        <p:spPr>
-          <a:xfrm>
-            <a:off x="4114800" y="1463040"/>
-            <a:ext cx="7772400" cy="4718957"/>
-          </a:xfrm>
-          <a:prstGeom prst="rect">
-            <a:avLst/>
-          </a:prstGeom>
-        </p:spPr>
-      </p:pic>
+      <p:sp>
+        <p:nvSpPr>
+          <p:cNvPr id="4" name="TextBox 3"/>
+          <p:cNvSpPr txBox="1"/>
+          <p:nvPr/>
+        </p:nvSpPr>
+        <p:spPr>
+          <a:xfrm>
+            <a:off x="731520" y="2971800"/>
+            <a:ext cx="10698480" cy="1097280"/>
+          </a:xfrm>
+          <a:prstGeom prst="rect">
+            <a:avLst/>
+          </a:prstGeom>
+          <a:noFill/>
+        </p:spPr>
+        <p:txBody>
+          <a:bodyPr wrap="square" lIns="0" rIns="0" tIns="0" bIns="0" anchor="t">
+            <a:spAutoFit/>
+          </a:bodyPr>
+          <a:lstStyle/>
+          <a:p>
+            <a:pPr algn="l"/>
+            <a:r>
+              <a:rPr sz="5400" b="1" i="0">
+                <a:solidFill>
+                  <a:srgbClr val="1A1A2E"/>
+                </a:solidFill>
+                <a:latin typeface="Helvetica"/>
+              </a:rPr>
+              <a:t>Proposed Solution</a:t>
+            </a:r>
+          </a:p>
+        </p:txBody>
+      </p:sp>
       <p:sp>
         <p:nvSpPr>
           <p:cNvPr id="5" name="TextBox 4"/>
@@ -8659,8 +11562,8 @@
         </p:nvSpPr>
         <p:spPr>
           <a:xfrm>
-            <a:off x="548640" y="2194560"/>
-            <a:ext cx="3474720" cy="457200"/>
+            <a:off x="731520" y="4206240"/>
+            <a:ext cx="10698480" cy="548640"/>
           </a:xfrm>
           <a:prstGeom prst="rect">
             <a:avLst/>
@@ -8675,13 +11578,13 @@
           <a:p>
             <a:pPr algn="l"/>
             <a:r>
-              <a:rPr sz="2200" b="1" i="0">
-                <a:solidFill>
-                  <a:srgbClr val="1A1A2E"/>
-                </a:solidFill>
-                <a:latin typeface="Helvetica"/>
-              </a:rPr>
-              <a:t>Plain sigmoid gate.</a:t>
+              <a:rPr sz="2000" b="0" i="1">
+                <a:solidFill>
+                  <a:srgbClr val="666677"/>
+                </a:solidFill>
+                <a:latin typeface="Helvetica"/>
+              </a:rPr>
+              <a:t>The feedback module, the math behind it, and the two fixes that make it work.</a:t>
             </a:r>
           </a:p>
         </p:txBody>
@@ -8694,8 +11597,8 @@
         </p:nvSpPr>
         <p:spPr>
           <a:xfrm>
-            <a:off x="548640" y="2743200"/>
-            <a:ext cx="3474720" cy="2286000"/>
+            <a:off x="640080" y="6446520"/>
+            <a:ext cx="9144000" cy="274320"/>
           </a:xfrm>
           <a:prstGeom prst="rect">
             <a:avLst/>
@@ -8710,14 +11613,13 @@
           <a:p>
             <a:pPr algn="l"/>
             <a:r>
-              <a:rPr sz="1500" b="0" i="0">
-                <a:solidFill>
-                  <a:srgbClr val="1A1A2E"/>
-                </a:solidFill>
-                <a:latin typeface="Helvetica"/>
-              </a:rPr>
-              <a:t>α drifts to −∞ → gate ≈ 0
-Feedback signal is multiplied by zero before reaching memory.</a:t>
+              <a:rPr sz="1000" b="0" i="0">
+                <a:solidFill>
+                  <a:srgbClr val="666677"/>
+                </a:solidFill>
+                <a:latin typeface="Helvetica"/>
+              </a:rPr>
+              <a:t>3. Proposed Solution  •  Feedback-Augmented RT-DETR  •  Hatem Saadallah &amp; Nour Jennane</a:t>
             </a:r>
           </a:p>
         </p:txBody>
@@ -8725,41 +11627,6 @@
       <p:sp>
         <p:nvSpPr>
           <p:cNvPr id="7" name="TextBox 6"/>
-          <p:cNvSpPr txBox="1"/>
-          <p:nvPr/>
-        </p:nvSpPr>
-        <p:spPr>
-          <a:xfrm>
-            <a:off x="640080" y="6446520"/>
-            <a:ext cx="7315200" cy="274320"/>
-          </a:xfrm>
-          <a:prstGeom prst="rect">
-            <a:avLst/>
-          </a:prstGeom>
-          <a:noFill/>
-        </p:spPr>
-        <p:txBody>
-          <a:bodyPr wrap="square" lIns="0" rIns="0" tIns="0" bIns="0" anchor="t">
-            <a:spAutoFit/>
-          </a:bodyPr>
-          <a:lstStyle/>
-          <a:p>
-            <a:pPr algn="l"/>
-            <a:r>
-              <a:rPr sz="1000" b="0" i="0">
-                <a:solidFill>
-                  <a:srgbClr val="666677"/>
-                </a:solidFill>
-                <a:latin typeface="Helvetica"/>
-              </a:rPr>
-              <a:t>Feedback-Augmented RT-DETR  •  Hatem Saadallah &amp; Nour Jennane</a:t>
-            </a:r>
-          </a:p>
-        </p:txBody>
-      </p:sp>
-      <p:sp>
-        <p:nvSpPr>
-          <p:cNvPr id="8" name="TextBox 7"/>
           <p:cNvSpPr txBox="1"/>
           <p:nvPr/>
         </p:nvSpPr>
@@ -8787,7 +11654,7 @@
                 </a:solidFill>
                 <a:latin typeface="Helvetica"/>
               </a:rPr>
-              <a:t>8 / 18</a:t>
+              <a:t>8 / 24</a:t>
             </a:r>
           </a:p>
         </p:txBody>
@@ -8840,7 +11707,7 @@
                 </a:solidFill>
                 <a:latin typeface="Helvetica"/>
               </a:rPr>
-              <a:t>Two fixes — zero new parameters</a:t>
+              <a:t>Our idea: let the model refine its own features</a:t>
             </a:r>
           </a:p>
         </p:txBody>
@@ -8890,7 +11757,7 @@
       </p:sp>
       <p:pic>
         <p:nvPicPr>
-          <p:cNvPr id="4" name="Picture 3" descr="diag_v2_fixes.png"/>
+          <p:cNvPr id="4" name="Picture 3" descr="diag_idea.png"/>
           <p:cNvPicPr>
             <a:picLocks noChangeAspect="1"/>
           </p:cNvPicPr>
@@ -8904,8 +11771,8 @@
         </p:blipFill>
         <p:spPr>
           <a:xfrm>
-            <a:off x="914400" y="2011680"/>
-            <a:ext cx="10332720" cy="3438915"/>
+            <a:off x="731520" y="2011680"/>
+            <a:ext cx="10698480" cy="3180182"/>
           </a:xfrm>
           <a:prstGeom prst="rect">
             <a:avLst/>
@@ -8920,8 +11787,8 @@
         </p:nvSpPr>
         <p:spPr>
           <a:xfrm>
-            <a:off x="640080" y="5577840"/>
-            <a:ext cx="10972800" cy="457200"/>
+            <a:off x="640080" y="5212080"/>
+            <a:ext cx="10972800" cy="548640"/>
           </a:xfrm>
           <a:prstGeom prst="rect">
             <a:avLst/>
@@ -8936,13 +11803,13 @@
           <a:p>
             <a:pPr algn="ctr"/>
             <a:r>
-              <a:rPr sz="1800" b="0" i="1">
+              <a:rPr sz="2200" b="0" i="0">
                 <a:solidFill>
                   <a:srgbClr val="1A1A2E"/>
                 </a:solidFill>
                 <a:latin typeface="Helvetica"/>
               </a:rPr>
-              <a:t>Reparameterize the gate. Refine only the levels small objects live in.</a:t>
+              <a:t>Feed early decoder predictions back into the encoder memory.</a:t>
             </a:r>
           </a:p>
         </p:txBody>
@@ -8956,7 +11823,7 @@
         <p:spPr>
           <a:xfrm>
             <a:off x="640080" y="6446520"/>
-            <a:ext cx="7315200" cy="274320"/>
+            <a:ext cx="9144000" cy="274320"/>
           </a:xfrm>
           <a:prstGeom prst="rect">
             <a:avLst/>
@@ -8977,7 +11844,7 @@
                 </a:solidFill>
                 <a:latin typeface="Helvetica"/>
               </a:rPr>
-              <a:t>Feedback-Augmented RT-DETR  •  Hatem Saadallah &amp; Nour Jennane</a:t>
+              <a:t>3. Proposed Solution  •  Feedback-Augmented RT-DETR  •  Hatem Saadallah &amp; Nour Jennane</a:t>
             </a:r>
           </a:p>
         </p:txBody>
@@ -9012,7 +11879,7 @@
                 </a:solidFill>
                 <a:latin typeface="Helvetica"/>
               </a:rPr>
-              <a:t>9 / 18</a:t>
+              <a:t>9 / 24</a:t>
             </a:r>
           </a:p>
         </p:txBody>

--- a/presentation/feedback_rtdetr_presentation.pptx
+++ b/presentation/feedback_rtdetr_presentation.pptx
@@ -3632,7 +3632,7 @@
         <p:spPr>
           <a:xfrm>
             <a:off x="457200" y="1371600"/>
-            <a:ext cx="11247120" cy="5011823"/>
+            <a:ext cx="11247120" cy="4875472"/>
           </a:xfrm>
           <a:prstGeom prst="rect">
             <a:avLst/>
@@ -3848,8 +3848,8 @@
         </p:nvSpPr>
         <p:spPr>
           <a:xfrm>
-            <a:off x="640080" y="2377440"/>
-            <a:ext cx="5120640" cy="1828800"/>
+            <a:off x="365760" y="2560320"/>
+            <a:ext cx="5852160" cy="1463040"/>
           </a:xfrm>
           <a:prstGeom prst="rect">
             <a:avLst/>
@@ -3864,13 +3864,31 @@
           <a:p>
             <a:pPr algn="ctr"/>
             <a:r>
-              <a:rPr sz="7200" b="1" i="0">
+              <a:rPr sz="5600" b="1" i="0">
                 <a:solidFill>
                   <a:srgbClr val="D62C2E"/>
                 </a:solidFill>
                 <a:latin typeface="Helvetica"/>
               </a:rPr>
-              <a:t>Δ APₛ  =  0.00</a:t>
+              <a:t>Δ AP</a:t>
+            </a:r>
+            <a:r>
+              <a:rPr sz="5600" b="1" i="0" baseline="-25000">
+                <a:solidFill>
+                  <a:srgbClr val="D62C2E"/>
+                </a:solidFill>
+                <a:latin typeface="Helvetica"/>
+              </a:rPr>
+              <a:t>S</a:t>
+            </a:r>
+            <a:r>
+              <a:rPr sz="5600" b="1" i="0">
+                <a:solidFill>
+                  <a:srgbClr val="D62C2E"/>
+                </a:solidFill>
+                <a:latin typeface="Helvetica"/>
+              </a:rPr>
+              <a:t>  =  0.00</a:t>
             </a:r>
           </a:p>
         </p:txBody>
@@ -3883,8 +3901,8 @@
         </p:nvSpPr>
         <p:spPr>
           <a:xfrm>
-            <a:off x="640080" y="4206240"/>
-            <a:ext cx="5120640" cy="457200"/>
+            <a:off x="365760" y="4114800"/>
+            <a:ext cx="5852160" cy="457200"/>
           </a:xfrm>
           <a:prstGeom prst="rect">
             <a:avLst/>
@@ -4719,7 +4737,61 @@
                 </a:solidFill>
                 <a:latin typeface="Helvetica"/>
               </a:rPr>
-              <a:t>AP, APₛ, APₘ, APₗ  —  IoU 0.5..0.95</a:t>
+              <a:t>AP, AP</a:t>
+            </a:r>
+            <a:r>
+              <a:rPr sz="1300" b="0" i="0" baseline="-25000">
+                <a:solidFill>
+                  <a:srgbClr val="1A1A2E"/>
+                </a:solidFill>
+                <a:latin typeface="Helvetica"/>
+              </a:rPr>
+              <a:t>S</a:t>
+            </a:r>
+            <a:r>
+              <a:rPr sz="1300" b="0" i="0">
+                <a:solidFill>
+                  <a:srgbClr val="1A1A2E"/>
+                </a:solidFill>
+                <a:latin typeface="Helvetica"/>
+              </a:rPr>
+              <a:t>, AP</a:t>
+            </a:r>
+            <a:r>
+              <a:rPr sz="1300" b="0" i="0" baseline="-25000">
+                <a:solidFill>
+                  <a:srgbClr val="1A1A2E"/>
+                </a:solidFill>
+                <a:latin typeface="Helvetica"/>
+              </a:rPr>
+              <a:t>M</a:t>
+            </a:r>
+            <a:r>
+              <a:rPr sz="1300" b="0" i="0">
+                <a:solidFill>
+                  <a:srgbClr val="1A1A2E"/>
+                </a:solidFill>
+                <a:latin typeface="Helvetica"/>
+              </a:rPr>
+              <a:t>, AP</a:t>
+            </a:r>
+            <a:r>
+              <a:rPr sz="1300" b="0" i="0" baseline="-25000">
+                <a:solidFill>
+                  <a:srgbClr val="1A1A2E"/>
+                </a:solidFill>
+                <a:latin typeface="Helvetica"/>
+              </a:rPr>
+              <a:t>L</a:t>
+            </a:r>
+            <a:r>
+              <a:rPr sz="1300" b="0" i="0">
+                <a:solidFill>
+                  <a:srgbClr val="1A1A2E"/>
+                </a:solidFill>
+                <a:latin typeface="Helvetica"/>
+              </a:rPr>
+              <a:t>  —  IoU 0.5..0.95</a:t>
             </a:r>
           </a:p>
         </p:txBody>
@@ -4754,7 +4826,25 @@
                 </a:solidFill>
                 <a:latin typeface="Helvetica"/>
               </a:rPr>
-              <a:t>APₛ is the headline metric (area &lt; 32² px)</a:t>
+              <a:t>AP</a:t>
+            </a:r>
+            <a:r>
+              <a:rPr sz="1300" b="1" i="0" baseline="-25000">
+                <a:solidFill>
+                  <a:srgbClr val="1A1A2E"/>
+                </a:solidFill>
+                <a:latin typeface="Helvetica"/>
+              </a:rPr>
+              <a:t>S</a:t>
+            </a:r>
+            <a:r>
+              <a:rPr sz="1300" b="1" i="0">
+                <a:solidFill>
+                  <a:srgbClr val="1A1A2E"/>
+                </a:solidFill>
+                <a:latin typeface="Helvetica"/>
+              </a:rPr>
+              <a:t> is the headline metric (area &lt; 32² px)</a:t>
             </a:r>
           </a:p>
         </p:txBody>
@@ -5847,7 +5937,16 @@
                 </a:solidFill>
                 <a:latin typeface="Helvetica"/>
               </a:rPr>
-              <a:t>APₛ</a:t>
+              <a:t>AP</a:t>
+            </a:r>
+            <a:r>
+              <a:rPr sz="1800" b="0" i="1" baseline="-25000">
+                <a:solidFill>
+                  <a:srgbClr val="666677"/>
+                </a:solidFill>
+                <a:latin typeface="Helvetica"/>
+              </a:rPr>
+              <a:t>S</a:t>
             </a:r>
           </a:p>
         </p:txBody>
@@ -5998,7 +6097,25 @@
                 </a:solidFill>
                 <a:latin typeface="Helvetica"/>
               </a:rPr>
-              <a:t>APₛ    +0.4</a:t>
+              <a:t>AP</a:t>
+            </a:r>
+            <a:r>
+              <a:rPr sz="1800" b="0" i="1" baseline="-25000">
+                <a:solidFill>
+                  <a:srgbClr val="2CA02C"/>
+                </a:solidFill>
+                <a:latin typeface="Helvetica"/>
+              </a:rPr>
+              <a:t>S</a:t>
+            </a:r>
+            <a:r>
+              <a:rPr sz="1800" b="0" i="1">
+                <a:solidFill>
+                  <a:srgbClr val="2CA02C"/>
+                </a:solidFill>
+                <a:latin typeface="Helvetica"/>
+              </a:rPr>
+              <a:t>    +0.4</a:t>
             </a:r>
           </a:p>
         </p:txBody>
@@ -7451,7 +7568,7 @@
                 </a:solidFill>
                 <a:latin typeface="Helvetica"/>
               </a:rPr>
-              <a:t>•  Causal contribution: +0.99 APₛ on the same checkpoint.</a:t>
+              <a:t>•  Causal contribution: +0.99 on small-object AP, same checkpoint.</a:t>
             </a:r>
           </a:p>
         </p:txBody>
@@ -7521,7 +7638,7 @@
                 </a:solidFill>
                 <a:latin typeface="Helvetica"/>
               </a:rPr>
-              <a:t>•  Consistent improvement on every metric (AP, APₛ, APₘ, APₗ).</a:t>
+              <a:t>•  Consistent improvement on every metric (AP, S, M, L).</a:t>
             </a:r>
           </a:p>
         </p:txBody>
@@ -7556,7 +7673,7 @@
                 </a:solidFill>
                 <a:latin typeface="Helvetica"/>
               </a:rPr>
-              <a:t>•  Robust at higher resolution (37.01 APₛ at 800×800).</a:t>
+              <a:t>•  Robust at higher resolution (37.01 small-object AP at 800×800).</a:t>
             </a:r>
           </a:p>
         </p:txBody>
@@ -8027,7 +8144,7 @@
         <p:spPr>
           <a:xfrm>
             <a:off x="640080" y="2194560"/>
-            <a:ext cx="3657600" cy="3474720"/>
+            <a:ext cx="3657600" cy="3657600"/>
           </a:xfrm>
           <a:prstGeom prst="roundRect">
             <a:avLst/>
@@ -8150,8 +8267,8 @@
         </p:nvSpPr>
         <p:spPr>
           <a:xfrm>
-            <a:off x="1417320" y="2377440"/>
-            <a:ext cx="2743200" cy="457200"/>
+            <a:off x="1417320" y="2331720"/>
+            <a:ext cx="2743200" cy="548640"/>
           </a:xfrm>
           <a:prstGeom prst="rect">
             <a:avLst/>
@@ -8166,13 +8283,13 @@
           <a:p>
             <a:pPr algn="l"/>
             <a:r>
-              <a:rPr sz="1500" b="1" i="0">
+              <a:rPr sz="1400" b="1" i="0">
                 <a:solidFill>
                   <a:srgbClr val="1A1A2E"/>
                 </a:solidFill>
                 <a:latin typeface="Helvetica"/>
               </a:rPr>
-              <a:t>Drop P2 at inference</a:t>
+              <a:t>Train with P2, infer without</a:t>
             </a:r>
           </a:p>
         </p:txBody>
@@ -8185,7 +8302,7 @@
         </p:nvSpPr>
         <p:spPr>
           <a:xfrm>
-            <a:off x="822960" y="2926080"/>
+            <a:off x="822960" y="2971800"/>
             <a:ext cx="3291840" cy="365760"/>
           </a:xfrm>
           <a:prstGeom prst="rect">
@@ -8220,8 +8337,8 @@
         </p:nvSpPr>
         <p:spPr>
           <a:xfrm>
-            <a:off x="822960" y="3383280"/>
-            <a:ext cx="3291840" cy="2011680"/>
+            <a:off x="822960" y="3429000"/>
+            <a:ext cx="3291840" cy="365760"/>
           </a:xfrm>
           <a:prstGeom prst="rect">
             <a:avLst/>
@@ -8236,28 +8353,132 @@
           <a:p>
             <a:pPr algn="l"/>
             <a:r>
-              <a:rPr sz="1200" b="0" i="0">
+              <a:rPr sz="1100" b="1" i="0">
+                <a:solidFill>
+                  <a:srgbClr val="1F6FEB"/>
+                </a:solidFill>
+                <a:latin typeface="Helvetica"/>
+              </a:rPr>
+              <a:t>How</a:t>
+            </a:r>
+          </a:p>
+        </p:txBody>
+      </p:sp>
+      <p:sp>
+        <p:nvSpPr>
+          <p:cNvPr id="11" name="TextBox 10"/>
+          <p:cNvSpPr txBox="1"/>
+          <p:nvPr/>
+        </p:nvSpPr>
+        <p:spPr>
+          <a:xfrm>
+            <a:off x="822960" y="3749039"/>
+            <a:ext cx="3291840" cy="1280160"/>
+          </a:xfrm>
+          <a:prstGeom prst="rect">
+            <a:avLst/>
+          </a:prstGeom>
+          <a:noFill/>
+        </p:spPr>
+        <p:txBody>
+          <a:bodyPr wrap="square" lIns="0" rIns="0" tIns="0" bIns="0" anchor="t">
+            <a:spAutoFit/>
+          </a:bodyPr>
+          <a:lstStyle/>
+          <a:p>
+            <a:pPr algn="l"/>
+            <a:r>
+              <a:rPr sz="1100" b="0" i="0">
                 <a:solidFill>
                   <a:srgbClr val="1A1A2E"/>
                 </a:solidFill>
                 <a:latin typeface="Helvetica"/>
               </a:rPr>
-              <a:t>Test whether the +0.99 transfers to the original 3-level (P3–P5) setup.
-If it does → recover ~53 FPS at no accuracy cost.</a:t>
-            </a:r>
-          </a:p>
-        </p:txBody>
-      </p:sp>
-      <p:sp>
-        <p:nvSpPr>
-          <p:cNvPr id="11" name="Rounded Rectangle 10"/>
+              <a:t>Use P2 during training to improve small-object learning, then remove it at inference.</a:t>
+            </a:r>
+          </a:p>
+        </p:txBody>
+      </p:sp>
+      <p:sp>
+        <p:nvSpPr>
+          <p:cNvPr id="12" name="TextBox 11"/>
+          <p:cNvSpPr txBox="1"/>
+          <p:nvPr/>
+        </p:nvSpPr>
+        <p:spPr>
+          <a:xfrm>
+            <a:off x="822960" y="4846320"/>
+            <a:ext cx="3291840" cy="365760"/>
+          </a:xfrm>
+          <a:prstGeom prst="rect">
+            <a:avLst/>
+          </a:prstGeom>
+          <a:noFill/>
+        </p:spPr>
+        <p:txBody>
+          <a:bodyPr wrap="square" lIns="0" rIns="0" tIns="0" bIns="0" anchor="t">
+            <a:spAutoFit/>
+          </a:bodyPr>
+          <a:lstStyle/>
+          <a:p>
+            <a:pPr algn="l"/>
+            <a:r>
+              <a:rPr sz="1100" b="1" i="0">
+                <a:solidFill>
+                  <a:srgbClr val="2CA02C"/>
+                </a:solidFill>
+                <a:latin typeface="Helvetica"/>
+              </a:rPr>
+              <a:t>Goal</a:t>
+            </a:r>
+          </a:p>
+        </p:txBody>
+      </p:sp>
+      <p:sp>
+        <p:nvSpPr>
+          <p:cNvPr id="13" name="TextBox 12"/>
+          <p:cNvSpPr txBox="1"/>
+          <p:nvPr/>
+        </p:nvSpPr>
+        <p:spPr>
+          <a:xfrm>
+            <a:off x="822960" y="5166360"/>
+            <a:ext cx="3291840" cy="1280160"/>
+          </a:xfrm>
+          <a:prstGeom prst="rect">
+            <a:avLst/>
+          </a:prstGeom>
+          <a:noFill/>
+        </p:spPr>
+        <p:txBody>
+          <a:bodyPr wrap="square" lIns="0" rIns="0" tIns="0" bIns="0" anchor="t">
+            <a:spAutoFit/>
+          </a:bodyPr>
+          <a:lstStyle/>
+          <a:p>
+            <a:pPr algn="l"/>
+            <a:r>
+              <a:rPr sz="1100" b="0" i="0">
+                <a:solidFill>
+                  <a:srgbClr val="1A1A2E"/>
+                </a:solidFill>
+                <a:latin typeface="Helvetica"/>
+              </a:rPr>
+              <a:t>Keep most of the +0.99 small-object AP gain without the P2 computational cost.</a:t>
+            </a:r>
+          </a:p>
+        </p:txBody>
+      </p:sp>
+      <p:sp>
+        <p:nvSpPr>
+          <p:cNvPr id="14" name="Rounded Rectangle 13"/>
           <p:cNvSpPr/>
           <p:nvPr/>
         </p:nvSpPr>
         <p:spPr>
           <a:xfrm>
             <a:off x="4434840" y="2194560"/>
-            <a:ext cx="3657600" cy="3474720"/>
+            <a:ext cx="3657600" cy="3657600"/>
           </a:xfrm>
           <a:prstGeom prst="roundRect">
             <a:avLst/>
@@ -8296,7 +8517,7 @@
       </p:sp>
       <p:sp>
         <p:nvSpPr>
-          <p:cNvPr id="12" name="Oval 11"/>
+          <p:cNvPr id="15" name="Oval 14"/>
           <p:cNvSpPr/>
           <p:nvPr/>
         </p:nvSpPr>
@@ -8339,7 +8560,7 @@
       </p:sp>
       <p:sp>
         <p:nvSpPr>
-          <p:cNvPr id="13" name="TextBox 12"/>
+          <p:cNvPr id="16" name="TextBox 15"/>
           <p:cNvSpPr txBox="1"/>
           <p:nvPr/>
         </p:nvSpPr>
@@ -8374,14 +8595,14 @@
       </p:sp>
       <p:sp>
         <p:nvSpPr>
-          <p:cNvPr id="14" name="TextBox 13"/>
-          <p:cNvSpPr txBox="1"/>
-          <p:nvPr/>
-        </p:nvSpPr>
-        <p:spPr>
-          <a:xfrm>
-            <a:off x="5212080" y="2377440"/>
-            <a:ext cx="2743200" cy="457200"/>
+          <p:cNvPr id="17" name="TextBox 16"/>
+          <p:cNvSpPr txBox="1"/>
+          <p:nvPr/>
+        </p:nvSpPr>
+        <p:spPr>
+          <a:xfrm>
+            <a:off x="5212080" y="2331720"/>
+            <a:ext cx="2743200" cy="548640"/>
           </a:xfrm>
           <a:prstGeom prst="rect">
             <a:avLst/>
@@ -8396,7 +8617,7 @@
           <a:p>
             <a:pPr algn="l"/>
             <a:r>
-              <a:rPr sz="1500" b="1" i="0">
+              <a:rPr sz="1400" b="1" i="0">
                 <a:solidFill>
                   <a:srgbClr val="1A1A2E"/>
                 </a:solidFill>
@@ -8409,13 +8630,13 @@
       </p:sp>
       <p:sp>
         <p:nvSpPr>
-          <p:cNvPr id="15" name="TextBox 14"/>
-          <p:cNvSpPr txBox="1"/>
-          <p:nvPr/>
-        </p:nvSpPr>
-        <p:spPr>
-          <a:xfrm>
-            <a:off x="4617720" y="2926080"/>
+          <p:cNvPr id="18" name="TextBox 17"/>
+          <p:cNvSpPr txBox="1"/>
+          <p:nvPr/>
+        </p:nvSpPr>
+        <p:spPr>
+          <a:xfrm>
+            <a:off x="4617720" y="2971800"/>
             <a:ext cx="3291840" cy="365760"/>
           </a:xfrm>
           <a:prstGeom prst="rect">
@@ -8444,14 +8665,14 @@
       </p:sp>
       <p:sp>
         <p:nvSpPr>
-          <p:cNvPr id="16" name="TextBox 15"/>
-          <p:cNvSpPr txBox="1"/>
-          <p:nvPr/>
-        </p:nvSpPr>
-        <p:spPr>
-          <a:xfrm>
-            <a:off x="4617720" y="3383280"/>
-            <a:ext cx="3291840" cy="2011680"/>
+          <p:cNvPr id="19" name="TextBox 18"/>
+          <p:cNvSpPr txBox="1"/>
+          <p:nvPr/>
+        </p:nvSpPr>
+        <p:spPr>
+          <a:xfrm>
+            <a:off x="4617720" y="3429000"/>
+            <a:ext cx="3291840" cy="365760"/>
           </a:xfrm>
           <a:prstGeom prst="rect">
             <a:avLst/>
@@ -8466,28 +8687,132 @@
           <a:p>
             <a:pPr algn="l"/>
             <a:r>
-              <a:rPr sz="1200" b="0" i="0">
+              <a:rPr sz="1100" b="1" i="0">
+                <a:solidFill>
+                  <a:srgbClr val="1F6FEB"/>
+                </a:solidFill>
+                <a:latin typeface="Helvetica"/>
+              </a:rPr>
+              <a:t>How</a:t>
+            </a:r>
+          </a:p>
+        </p:txBody>
+      </p:sp>
+      <p:sp>
+        <p:nvSpPr>
+          <p:cNvPr id="20" name="TextBox 19"/>
+          <p:cNvSpPr txBox="1"/>
+          <p:nvPr/>
+        </p:nvSpPr>
+        <p:spPr>
+          <a:xfrm>
+            <a:off x="4617720" y="3749039"/>
+            <a:ext cx="3291840" cy="1280160"/>
+          </a:xfrm>
+          <a:prstGeom prst="rect">
+            <a:avLst/>
+          </a:prstGeom>
+          <a:noFill/>
+        </p:spPr>
+        <p:txBody>
+          <a:bodyPr wrap="square" lIns="0" rIns="0" tIns="0" bIns="0" anchor="t">
+            <a:spAutoFit/>
+          </a:bodyPr>
+          <a:lstStyle/>
+          <a:p>
+            <a:pPr algn="l"/>
+            <a:r>
+              <a:rPr sz="1100" b="0" i="0">
                 <a:solidFill>
                   <a:srgbClr val="1A1A2E"/>
                 </a:solidFill>
                 <a:latin typeface="Helvetica"/>
               </a:rPr>
-              <a:t>Halve P2 channels; or use a single-conv projection instead of
-the full input-projection block.</a:t>
-            </a:r>
-          </a:p>
-        </p:txBody>
-      </p:sp>
-      <p:sp>
-        <p:nvSpPr>
-          <p:cNvPr id="17" name="Rounded Rectangle 16"/>
+              <a:t>Reduce the cost of P2 — fewer channels, or a simpler projection layer.</a:t>
+            </a:r>
+          </a:p>
+        </p:txBody>
+      </p:sp>
+      <p:sp>
+        <p:nvSpPr>
+          <p:cNvPr id="21" name="TextBox 20"/>
+          <p:cNvSpPr txBox="1"/>
+          <p:nvPr/>
+        </p:nvSpPr>
+        <p:spPr>
+          <a:xfrm>
+            <a:off x="4617720" y="4846320"/>
+            <a:ext cx="3291840" cy="365760"/>
+          </a:xfrm>
+          <a:prstGeom prst="rect">
+            <a:avLst/>
+          </a:prstGeom>
+          <a:noFill/>
+        </p:spPr>
+        <p:txBody>
+          <a:bodyPr wrap="square" lIns="0" rIns="0" tIns="0" bIns="0" anchor="t">
+            <a:spAutoFit/>
+          </a:bodyPr>
+          <a:lstStyle/>
+          <a:p>
+            <a:pPr algn="l"/>
+            <a:r>
+              <a:rPr sz="1100" b="1" i="0">
+                <a:solidFill>
+                  <a:srgbClr val="2CA02C"/>
+                </a:solidFill>
+                <a:latin typeface="Helvetica"/>
+              </a:rPr>
+              <a:t>Goal</a:t>
+            </a:r>
+          </a:p>
+        </p:txBody>
+      </p:sp>
+      <p:sp>
+        <p:nvSpPr>
+          <p:cNvPr id="22" name="TextBox 21"/>
+          <p:cNvSpPr txBox="1"/>
+          <p:nvPr/>
+        </p:nvSpPr>
+        <p:spPr>
+          <a:xfrm>
+            <a:off x="4617720" y="5166360"/>
+            <a:ext cx="3291840" cy="1280160"/>
+          </a:xfrm>
+          <a:prstGeom prst="rect">
+            <a:avLst/>
+          </a:prstGeom>
+          <a:noFill/>
+        </p:spPr>
+        <p:txBody>
+          <a:bodyPr wrap="square" lIns="0" rIns="0" tIns="0" bIns="0" anchor="t">
+            <a:spAutoFit/>
+          </a:bodyPr>
+          <a:lstStyle/>
+          <a:p>
+            <a:pPr algn="l"/>
+            <a:r>
+              <a:rPr sz="1100" b="0" i="0">
+                <a:solidFill>
+                  <a:srgbClr val="1A1A2E"/>
+                </a:solidFill>
+                <a:latin typeface="Helvetica"/>
+              </a:rPr>
+              <a:t>Preserve small-object improvements while reducing the high-resolution P2 slowdown.</a:t>
+            </a:r>
+          </a:p>
+        </p:txBody>
+      </p:sp>
+      <p:sp>
+        <p:nvSpPr>
+          <p:cNvPr id="23" name="Rounded Rectangle 22"/>
           <p:cNvSpPr/>
           <p:nvPr/>
         </p:nvSpPr>
         <p:spPr>
           <a:xfrm>
             <a:off x="8229600" y="2194560"/>
-            <a:ext cx="3657600" cy="3474720"/>
+            <a:ext cx="3657600" cy="3657600"/>
           </a:xfrm>
           <a:prstGeom prst="roundRect">
             <a:avLst/>
@@ -8526,7 +8851,7 @@
       </p:sp>
       <p:sp>
         <p:nvSpPr>
-          <p:cNvPr id="18" name="Oval 17"/>
+          <p:cNvPr id="24" name="Oval 23"/>
           <p:cNvSpPr/>
           <p:nvPr/>
         </p:nvSpPr>
@@ -8569,7 +8894,7 @@
       </p:sp>
       <p:sp>
         <p:nvSpPr>
-          <p:cNvPr id="19" name="TextBox 18"/>
+          <p:cNvPr id="25" name="TextBox 24"/>
           <p:cNvSpPr txBox="1"/>
           <p:nvPr/>
         </p:nvSpPr>
@@ -8604,14 +8929,14 @@
       </p:sp>
       <p:sp>
         <p:nvSpPr>
-          <p:cNvPr id="20" name="TextBox 19"/>
-          <p:cNvSpPr txBox="1"/>
-          <p:nvPr/>
-        </p:nvSpPr>
-        <p:spPr>
-          <a:xfrm>
-            <a:off x="9006840" y="2377440"/>
-            <a:ext cx="2743200" cy="457200"/>
+          <p:cNvPr id="26" name="TextBox 25"/>
+          <p:cNvSpPr txBox="1"/>
+          <p:nvPr/>
+        </p:nvSpPr>
+        <p:spPr>
+          <a:xfrm>
+            <a:off x="9006840" y="2331720"/>
+            <a:ext cx="2743200" cy="548640"/>
           </a:xfrm>
           <a:prstGeom prst="rect">
             <a:avLst/>
@@ -8626,26 +8951,26 @@
           <a:p>
             <a:pPr algn="l"/>
             <a:r>
-              <a:rPr sz="1500" b="1" i="0">
+              <a:rPr sz="1400" b="1" i="0">
                 <a:solidFill>
                   <a:srgbClr val="1A1A2E"/>
                 </a:solidFill>
                 <a:latin typeface="Helvetica"/>
               </a:rPr>
-              <a:t>Distill v2 → student</a:t>
-            </a:r>
-          </a:p>
-        </p:txBody>
-      </p:sp>
-      <p:sp>
-        <p:nvSpPr>
-          <p:cNvPr id="21" name="TextBox 20"/>
-          <p:cNvSpPr txBox="1"/>
-          <p:nvPr/>
-        </p:nvSpPr>
-        <p:spPr>
-          <a:xfrm>
-            <a:off x="8412480" y="2926080"/>
+              <a:t>Knowledge distillation</a:t>
+            </a:r>
+          </a:p>
+        </p:txBody>
+      </p:sp>
+      <p:sp>
+        <p:nvSpPr>
+          <p:cNvPr id="27" name="TextBox 26"/>
+          <p:cNvSpPr txBox="1"/>
+          <p:nvPr/>
+        </p:nvSpPr>
+        <p:spPr>
+          <a:xfrm>
+            <a:off x="8412480" y="2971800"/>
             <a:ext cx="3291840" cy="365760"/>
           </a:xfrm>
           <a:prstGeom prst="rect">
@@ -8674,14 +8999,14 @@
       </p:sp>
       <p:sp>
         <p:nvSpPr>
-          <p:cNvPr id="22" name="TextBox 21"/>
-          <p:cNvSpPr txBox="1"/>
-          <p:nvPr/>
-        </p:nvSpPr>
-        <p:spPr>
-          <a:xfrm>
-            <a:off x="8412480" y="3383280"/>
-            <a:ext cx="3291840" cy="2011680"/>
+          <p:cNvPr id="28" name="TextBox 27"/>
+          <p:cNvSpPr txBox="1"/>
+          <p:nvPr/>
+        </p:nvSpPr>
+        <p:spPr>
+          <a:xfrm>
+            <a:off x="8412480" y="3429000"/>
+            <a:ext cx="3291840" cy="365760"/>
           </a:xfrm>
           <a:prstGeom prst="rect">
             <a:avLst/>
@@ -8696,28 +9021,132 @@
           <a:p>
             <a:pPr algn="l"/>
             <a:r>
-              <a:rPr sz="1200" b="0" i="0">
+              <a:rPr sz="1100" b="1" i="0">
+                <a:solidFill>
+                  <a:srgbClr val="1F6FEB"/>
+                </a:solidFill>
+                <a:latin typeface="Helvetica"/>
+              </a:rPr>
+              <a:t>How</a:t>
+            </a:r>
+          </a:p>
+        </p:txBody>
+      </p:sp>
+      <p:sp>
+        <p:nvSpPr>
+          <p:cNvPr id="29" name="TextBox 28"/>
+          <p:cNvSpPr txBox="1"/>
+          <p:nvPr/>
+        </p:nvSpPr>
+        <p:spPr>
+          <a:xfrm>
+            <a:off x="8412480" y="3749039"/>
+            <a:ext cx="3291840" cy="1280160"/>
+          </a:xfrm>
+          <a:prstGeom prst="rect">
+            <a:avLst/>
+          </a:prstGeom>
+          <a:noFill/>
+        </p:spPr>
+        <p:txBody>
+          <a:bodyPr wrap="square" lIns="0" rIns="0" tIns="0" bIns="0" anchor="t">
+            <a:spAutoFit/>
+          </a:bodyPr>
+          <a:lstStyle/>
+          <a:p>
+            <a:pPr algn="l"/>
+            <a:r>
+              <a:rPr sz="1100" b="0" i="0">
                 <a:solidFill>
                   <a:srgbClr val="1A1A2E"/>
                 </a:solidFill>
                 <a:latin typeface="Helvetica"/>
               </a:rPr>
-              <a:t>Knowledge-distil into a P3–P5 student network.
-Teacher: full v2.  Student: baseline RT-DETR speed.</a:t>
-            </a:r>
-          </a:p>
-        </p:txBody>
-      </p:sp>
-      <p:sp>
-        <p:nvSpPr>
-          <p:cNvPr id="23" name="TextBox 22"/>
-          <p:cNvSpPr txBox="1"/>
-          <p:nvPr/>
-        </p:nvSpPr>
-        <p:spPr>
-          <a:xfrm>
-            <a:off x="640080" y="5943600"/>
-            <a:ext cx="10972800" cy="457200"/>
+              <a:t>Transfer v2's small-object improvements into a faster baseline RT-DETR student.</a:t>
+            </a:r>
+          </a:p>
+        </p:txBody>
+      </p:sp>
+      <p:sp>
+        <p:nvSpPr>
+          <p:cNvPr id="30" name="TextBox 29"/>
+          <p:cNvSpPr txBox="1"/>
+          <p:nvPr/>
+        </p:nvSpPr>
+        <p:spPr>
+          <a:xfrm>
+            <a:off x="8412480" y="4846320"/>
+            <a:ext cx="3291840" cy="365760"/>
+          </a:xfrm>
+          <a:prstGeom prst="rect">
+            <a:avLst/>
+          </a:prstGeom>
+          <a:noFill/>
+        </p:spPr>
+        <p:txBody>
+          <a:bodyPr wrap="square" lIns="0" rIns="0" tIns="0" bIns="0" anchor="t">
+            <a:spAutoFit/>
+          </a:bodyPr>
+          <a:lstStyle/>
+          <a:p>
+            <a:pPr algn="l"/>
+            <a:r>
+              <a:rPr sz="1100" b="1" i="0">
+                <a:solidFill>
+                  <a:srgbClr val="2CA02C"/>
+                </a:solidFill>
+                <a:latin typeface="Helvetica"/>
+              </a:rPr>
+              <a:t>Goal</a:t>
+            </a:r>
+          </a:p>
+        </p:txBody>
+      </p:sp>
+      <p:sp>
+        <p:nvSpPr>
+          <p:cNvPr id="31" name="TextBox 30"/>
+          <p:cNvSpPr txBox="1"/>
+          <p:nvPr/>
+        </p:nvSpPr>
+        <p:spPr>
+          <a:xfrm>
+            <a:off x="8412480" y="5166360"/>
+            <a:ext cx="3291840" cy="1280160"/>
+          </a:xfrm>
+          <a:prstGeom prst="rect">
+            <a:avLst/>
+          </a:prstGeom>
+          <a:noFill/>
+        </p:spPr>
+        <p:txBody>
+          <a:bodyPr wrap="square" lIns="0" rIns="0" tIns="0" bIns="0" anchor="t">
+            <a:spAutoFit/>
+          </a:bodyPr>
+          <a:lstStyle/>
+          <a:p>
+            <a:pPr algn="l"/>
+            <a:r>
+              <a:rPr sz="1100" b="0" i="0">
+                <a:solidFill>
+                  <a:srgbClr val="1A1A2E"/>
+                </a:solidFill>
+                <a:latin typeface="Helvetica"/>
+              </a:rPr>
+              <a:t>Recover baseline inference speed while retaining the small-object AP gains learned from P2 feedback.</a:t>
+            </a:r>
+          </a:p>
+        </p:txBody>
+      </p:sp>
+      <p:sp>
+        <p:nvSpPr>
+          <p:cNvPr id="32" name="TextBox 31"/>
+          <p:cNvSpPr txBox="1"/>
+          <p:nvPr/>
+        </p:nvSpPr>
+        <p:spPr>
+          <a:xfrm>
+            <a:off x="640080" y="6126480"/>
+            <a:ext cx="10972800" cy="365760"/>
           </a:xfrm>
           <a:prstGeom prst="rect">
             <a:avLst/>
@@ -8732,20 +9161,20 @@
           <a:p>
             <a:pPr algn="ctr"/>
             <a:r>
-              <a:rPr sz="1400" b="1" i="0">
+              <a:rPr sz="1300" b="1" i="0">
                 <a:solidFill>
                   <a:srgbClr val="1F6FEB"/>
                 </a:solidFill>
                 <a:latin typeface="Helvetica"/>
               </a:rPr>
-              <a:t>Goal: keep the +0.99 APₛ gain while approaching the 53 FPS baseline.</a:t>
-            </a:r>
-          </a:p>
-        </p:txBody>
-      </p:sp>
-      <p:sp>
-        <p:nvSpPr>
-          <p:cNvPr id="24" name="TextBox 23"/>
+              <a:t>Common goal: keep the +0.99 small-object AP gain while approaching the 53 FPS baseline.</a:t>
+            </a:r>
+          </a:p>
+        </p:txBody>
+      </p:sp>
+      <p:sp>
+        <p:nvSpPr>
+          <p:cNvPr id="33" name="TextBox 32"/>
           <p:cNvSpPr txBox="1"/>
           <p:nvPr/>
         </p:nvSpPr>
@@ -8780,7 +9209,7 @@
       </p:sp>
       <p:sp>
         <p:nvSpPr>
-          <p:cNvPr id="25" name="TextBox 24"/>
+          <p:cNvPr id="34" name="TextBox 33"/>
           <p:cNvSpPr txBox="1"/>
           <p:nvPr/>
         </p:nvSpPr>
@@ -9052,7 +9481,7 @@
                 </a:solidFill>
                 <a:latin typeface="Helvetica"/>
               </a:rPr>
-              <a:t>+0.99 APₛ causal contribution at inference.</a:t>
+              <a:t>+0.99 small-object AP, causal contribution at inference.</a:t>
             </a:r>
           </a:p>
         </p:txBody>
@@ -9774,7 +10203,25 @@
                 </a:solidFill>
                 <a:latin typeface="Helvetica"/>
               </a:rPr>
-              <a:t>APₗ (large)</a:t>
+              <a:t>AP</a:t>
+            </a:r>
+            <a:r>
+              <a:rPr sz="1500" b="0" i="0" baseline="-25000">
+                <a:solidFill>
+                  <a:srgbClr val="666677"/>
+                </a:solidFill>
+                <a:latin typeface="Helvetica"/>
+              </a:rPr>
+              <a:t>L</a:t>
+            </a:r>
+            <a:r>
+              <a:rPr sz="1500" b="0" i="0">
+                <a:solidFill>
+                  <a:srgbClr val="666677"/>
+                </a:solidFill>
+                <a:latin typeface="Helvetica"/>
+              </a:rPr>
+              <a:t> (large)</a:t>
             </a:r>
           </a:p>
         </p:txBody>
@@ -9844,7 +10291,25 @@
                 </a:solidFill>
                 <a:latin typeface="Helvetica"/>
               </a:rPr>
-              <a:t>APₛ (small)</a:t>
+              <a:t>AP</a:t>
+            </a:r>
+            <a:r>
+              <a:rPr sz="1500" b="0" i="0" baseline="-25000">
+                <a:solidFill>
+                  <a:srgbClr val="666677"/>
+                </a:solidFill>
+                <a:latin typeface="Helvetica"/>
+              </a:rPr>
+              <a:t>S</a:t>
+            </a:r>
+            <a:r>
+              <a:rPr sz="1500" b="0" i="0">
+                <a:solidFill>
+                  <a:srgbClr val="666677"/>
+                </a:solidFill>
+                <a:latin typeface="Helvetica"/>
+              </a:rPr>
+              <a:t> (small)</a:t>
             </a:r>
           </a:p>
         </p:txBody>
@@ -11278,7 +11743,7 @@
                 </a:solidFill>
                 <a:latin typeface="Helvetica"/>
               </a:rPr>
-              <a:t>•  Has explicit small / medium / large size buckets (APₛ / APₘ / APₗ).</a:t>
+              <a:t>•  Has explicit small / medium / large size buckets (S / M / L).</a:t>
             </a:r>
           </a:p>
         </p:txBody>

--- a/presentation/feedback_rtdetr_presentation.pptx
+++ b/presentation/feedback_rtdetr_presentation.pptx
@@ -29,6 +29,9 @@
     <p:sldId id="277" r:id="rId28"/>
     <p:sldId id="278" r:id="rId29"/>
     <p:sldId id="279" r:id="rId30"/>
+    <p:sldId id="280" r:id="rId31"/>
+    <p:sldId id="281" r:id="rId32"/>
+    <p:sldId id="282" r:id="rId33"/>
   </p:sldIdLst>
   <p:sldSz cx="12191695" cy="6858000" type="screen4x3"/>
   <p:notesSz cx="6858000" cy="9144000"/>
@@ -3514,7 +3517,7 @@
                 </a:solidFill>
                 <a:latin typeface="Helvetica"/>
               </a:rPr>
-              <a:t>10 / 24</a:t>
+              <a:t>9 / 27</a:t>
             </a:r>
           </a:p>
         </p:txBody>
@@ -3704,7 +3707,7 @@
                 </a:solidFill>
                 <a:latin typeface="Helvetica"/>
               </a:rPr>
-              <a:t>11 / 24</a:t>
+              <a:t>10 / 27</a:t>
             </a:r>
           </a:p>
         </p:txBody>
@@ -4064,7 +4067,7 @@
                 </a:solidFill>
                 <a:latin typeface="Helvetica"/>
               </a:rPr>
-              <a:t>12 / 24</a:t>
+              <a:t>11 / 27</a:t>
             </a:r>
           </a:p>
         </p:txBody>
@@ -4117,7 +4120,7 @@
                 </a:solidFill>
                 <a:latin typeface="Helvetica"/>
               </a:rPr>
-              <a:t>v2: two fixes — zero new parameters</a:t>
+              <a:t>First attempt (v1) — and why it failed</a:t>
             </a:r>
           </a:p>
         </p:txBody>
@@ -4165,30 +4168,41 @@
           </a:p>
         </p:txBody>
       </p:sp>
-      <p:pic>
-        <p:nvPicPr>
-          <p:cNvPr id="4" name="Picture 3" descr="diag_v2_fixes.png"/>
-          <p:cNvPicPr>
-            <a:picLocks noChangeAspect="1"/>
-          </p:cNvPicPr>
-          <p:nvPr/>
-        </p:nvPicPr>
-        <p:blipFill>
-          <a:blip r:embed="rId2"/>
-          <a:stretch>
-            <a:fillRect/>
-          </a:stretch>
-        </p:blipFill>
-        <p:spPr>
-          <a:xfrm>
-            <a:off x="914400" y="2011680"/>
-            <a:ext cx="10332720" cy="3438915"/>
-          </a:xfrm>
-          <a:prstGeom prst="rect">
-            <a:avLst/>
-          </a:prstGeom>
-        </p:spPr>
-      </p:pic>
+      <p:sp>
+        <p:nvSpPr>
+          <p:cNvPr id="4" name="TextBox 3"/>
+          <p:cNvSpPr txBox="1"/>
+          <p:nvPr/>
+        </p:nvSpPr>
+        <p:spPr>
+          <a:xfrm>
+            <a:off x="640080" y="1417320"/>
+            <a:ext cx="10972800" cy="457200"/>
+          </a:xfrm>
+          <a:prstGeom prst="rect">
+            <a:avLst/>
+          </a:prstGeom>
+          <a:noFill/>
+        </p:spPr>
+        <p:txBody>
+          <a:bodyPr wrap="square" lIns="0" rIns="0" tIns="0" bIns="0" anchor="t">
+            <a:spAutoFit/>
+          </a:bodyPr>
+          <a:lstStyle/>
+          <a:p>
+            <a:pPr algn="ctr"/>
+            <a:r>
+              <a:rPr sz="1800" b="0" i="1">
+                <a:solidFill>
+                  <a:srgbClr val="1A1A2E"/>
+                </a:solidFill>
+                <a:latin typeface="Helvetica"/>
+              </a:rPr>
+              <a:t>Plain sigmoid gate, applied to all four pyramid levels.</a:t>
+            </a:r>
+          </a:p>
+        </p:txBody>
+      </p:sp>
       <p:sp>
         <p:nvSpPr>
           <p:cNvPr id="5" name="TextBox 4"/>
@@ -4197,8 +4211,8 @@
         </p:nvSpPr>
         <p:spPr>
           <a:xfrm>
-            <a:off x="640080" y="5577840"/>
-            <a:ext cx="10972800" cy="457200"/>
+            <a:off x="365760" y="2560320"/>
+            <a:ext cx="5852160" cy="1463040"/>
           </a:xfrm>
           <a:prstGeom prst="rect">
             <a:avLst/>
@@ -4213,20 +4227,188 @@
           <a:p>
             <a:pPr algn="ctr"/>
             <a:r>
-              <a:rPr sz="1800" b="0" i="1">
+              <a:rPr sz="5600" b="1" i="0">
+                <a:solidFill>
+                  <a:srgbClr val="D62C2E"/>
+                </a:solidFill>
+                <a:latin typeface="Helvetica"/>
+              </a:rPr>
+              <a:t>Δ AP</a:t>
+            </a:r>
+            <a:r>
+              <a:rPr sz="5600" b="1" i="0" baseline="-25000">
+                <a:solidFill>
+                  <a:srgbClr val="D62C2E"/>
+                </a:solidFill>
+                <a:latin typeface="Helvetica"/>
+              </a:rPr>
+              <a:t>S</a:t>
+            </a:r>
+            <a:r>
+              <a:rPr sz="5600" b="1" i="0">
+                <a:solidFill>
+                  <a:srgbClr val="D62C2E"/>
+                </a:solidFill>
+                <a:latin typeface="Helvetica"/>
+              </a:rPr>
+              <a:t>  =  0.00</a:t>
+            </a:r>
+          </a:p>
+        </p:txBody>
+      </p:sp>
+      <p:sp>
+        <p:nvSpPr>
+          <p:cNvPr id="6" name="TextBox 5"/>
+          <p:cNvSpPr txBox="1"/>
+          <p:nvPr/>
+        </p:nvSpPr>
+        <p:spPr>
+          <a:xfrm>
+            <a:off x="365760" y="4114800"/>
+            <a:ext cx="5852160" cy="457200"/>
+          </a:xfrm>
+          <a:prstGeom prst="rect">
+            <a:avLst/>
+          </a:prstGeom>
+          <a:noFill/>
+        </p:spPr>
+        <p:txBody>
+          <a:bodyPr wrap="square" lIns="0" rIns="0" tIns="0" bIns="0" anchor="t">
+            <a:spAutoFit/>
+          </a:bodyPr>
+          <a:lstStyle/>
+          <a:p>
+            <a:pPr algn="ctr"/>
+            <a:r>
+              <a:rPr sz="1500" b="0" i="1">
+                <a:solidFill>
+                  <a:srgbClr val="666677"/>
+                </a:solidFill>
+                <a:latin typeface="Helvetica"/>
+              </a:rPr>
+              <a:t>the mechanism contributed nothing</a:t>
+            </a:r>
+          </a:p>
+        </p:txBody>
+      </p:sp>
+      <p:sp>
+        <p:nvSpPr>
+          <p:cNvPr id="7" name="TextBox 6"/>
+          <p:cNvSpPr txBox="1"/>
+          <p:nvPr/>
+        </p:nvSpPr>
+        <p:spPr>
+          <a:xfrm>
+            <a:off x="6492240" y="2286000"/>
+            <a:ext cx="5120640" cy="548640"/>
+          </a:xfrm>
+          <a:prstGeom prst="rect">
+            <a:avLst/>
+          </a:prstGeom>
+          <a:noFill/>
+        </p:spPr>
+        <p:txBody>
+          <a:bodyPr wrap="square" lIns="0" rIns="0" tIns="0" bIns="0" anchor="t">
+            <a:spAutoFit/>
+          </a:bodyPr>
+          <a:lstStyle/>
+          <a:p>
+            <a:pPr algn="l"/>
+            <a:r>
+              <a:rPr sz="2400" b="1" i="0">
                 <a:solidFill>
                   <a:srgbClr val="1A1A2E"/>
                 </a:solidFill>
                 <a:latin typeface="Helvetica"/>
               </a:rPr>
-              <a:t>Reparameterize the gate. Refine only the levels small objects live in.</a:t>
-            </a:r>
-          </a:p>
-        </p:txBody>
-      </p:sp>
-      <p:sp>
-        <p:nvSpPr>
-          <p:cNvPr id="6" name="TextBox 5"/>
+              <a:t>Why?</a:t>
+            </a:r>
+          </a:p>
+        </p:txBody>
+      </p:sp>
+      <p:sp>
+        <p:nvSpPr>
+          <p:cNvPr id="8" name="TextBox 7"/>
+          <p:cNvSpPr txBox="1"/>
+          <p:nvPr/>
+        </p:nvSpPr>
+        <p:spPr>
+          <a:xfrm>
+            <a:off x="6492240" y="2834640"/>
+            <a:ext cx="5120640" cy="2286000"/>
+          </a:xfrm>
+          <a:prstGeom prst="rect">
+            <a:avLst/>
+          </a:prstGeom>
+          <a:noFill/>
+        </p:spPr>
+        <p:txBody>
+          <a:bodyPr wrap="square" lIns="0" rIns="0" tIns="0" bIns="0" anchor="t">
+            <a:spAutoFit/>
+          </a:bodyPr>
+          <a:lstStyle/>
+          <a:p>
+            <a:pPr algn="l"/>
+            <a:r>
+              <a:rPr sz="1500" b="0" i="0">
+                <a:solidFill>
+                  <a:srgbClr val="1A1A2E"/>
+                </a:solidFill>
+                <a:latin typeface="Helvetica"/>
+              </a:rPr>
+              <a:t>α drifts to −∞ → gate ≈ 0.
+The feedback signal is multiplied by zero before reaching memory.</a:t>
+            </a:r>
+          </a:p>
+        </p:txBody>
+      </p:sp>
+      <p:sp>
+        <p:nvSpPr>
+          <p:cNvPr id="9" name="Oval 8"/>
+          <p:cNvSpPr/>
+          <p:nvPr/>
+        </p:nvSpPr>
+        <p:spPr>
+          <a:xfrm>
+            <a:off x="4069080" y="2606040"/>
+            <a:ext cx="1828800" cy="1371600"/>
+          </a:xfrm>
+          <a:prstGeom prst="ellipse">
+            <a:avLst/>
+          </a:prstGeom>
+          <a:noFill/>
+          <a:ln w="63500">
+            <a:solidFill>
+              <a:srgbClr val="D62C2E"/>
+            </a:solidFill>
+          </a:ln>
+          <a:effectLst/>
+        </p:spPr>
+        <p:style>
+          <a:lnRef idx="1">
+            <a:schemeClr val="accent1"/>
+          </a:lnRef>
+          <a:fillRef idx="3">
+            <a:schemeClr val="accent1"/>
+          </a:fillRef>
+          <a:effectRef idx="2">
+            <a:schemeClr val="accent1"/>
+          </a:effectRef>
+          <a:fontRef idx="minor">
+            <a:schemeClr val="lt1"/>
+          </a:fontRef>
+        </p:style>
+        <p:txBody>
+          <a:bodyPr rtlCol="0" anchor="ctr"/>
+          <a:lstStyle/>
+          <a:p>
+            <a:pPr algn="ctr"/>
+          </a:p>
+        </p:txBody>
+      </p:sp>
+      <p:sp>
+        <p:nvSpPr>
+          <p:cNvPr id="10" name="TextBox 9"/>
           <p:cNvSpPr txBox="1"/>
           <p:nvPr/>
         </p:nvSpPr>
@@ -4261,7 +4443,7 @@
       </p:sp>
       <p:sp>
         <p:nvSpPr>
-          <p:cNvPr id="7" name="TextBox 6"/>
+          <p:cNvPr id="11" name="TextBox 10"/>
           <p:cNvSpPr txBox="1"/>
           <p:nvPr/>
         </p:nvSpPr>
@@ -4289,7 +4471,7 @@
                 </a:solidFill>
                 <a:latin typeface="Helvetica"/>
               </a:rPr>
-              <a:t>13 / 24</a:t>
+              <a:t>12 / 27</a:t>
             </a:r>
           </a:p>
         </p:txBody>
@@ -4320,8 +4502,8 @@
         </p:nvSpPr>
         <p:spPr>
           <a:xfrm>
-            <a:off x="731520" y="2377440"/>
-            <a:ext cx="10698480" cy="365760"/>
+            <a:off x="640080" y="457200"/>
+            <a:ext cx="10972800" cy="822960"/>
           </a:xfrm>
           <a:prstGeom prst="rect">
             <a:avLst/>
@@ -4336,13 +4518,13 @@
           <a:p>
             <a:pPr algn="l"/>
             <a:r>
-              <a:rPr sz="1400" b="1" i="0">
+              <a:rPr sz="3400" b="1" i="0">
                 <a:solidFill>
                   <a:srgbClr val="1F6FEB"/>
                 </a:solidFill>
                 <a:latin typeface="Helvetica"/>
               </a:rPr>
-              <a:t>SECTION  4  /  5</a:t>
+              <a:t>v2: two fixes — zero new parameters</a:t>
             </a:r>
           </a:p>
         </p:txBody>
@@ -4355,7 +4537,7 @@
         </p:nvSpPr>
         <p:spPr>
           <a:xfrm>
-            <a:off x="731520" y="2788920"/>
+            <a:off x="640080" y="1143000"/>
             <a:ext cx="640080" cy="54864"/>
           </a:xfrm>
           <a:prstGeom prst="rect">
@@ -4390,72 +4572,61 @@
           </a:p>
         </p:txBody>
       </p:sp>
-      <p:sp>
-        <p:nvSpPr>
-          <p:cNvPr id="4" name="TextBox 3"/>
-          <p:cNvSpPr txBox="1"/>
-          <p:nvPr/>
-        </p:nvSpPr>
-        <p:spPr>
-          <a:xfrm>
-            <a:off x="731520" y="2971800"/>
-            <a:ext cx="10698480" cy="1097280"/>
-          </a:xfrm>
-          <a:prstGeom prst="rect">
-            <a:avLst/>
-          </a:prstGeom>
-          <a:noFill/>
-        </p:spPr>
-        <p:txBody>
-          <a:bodyPr wrap="square" lIns="0" rIns="0" tIns="0" bIns="0" anchor="t">
-            <a:spAutoFit/>
-          </a:bodyPr>
-          <a:lstStyle/>
-          <a:p>
-            <a:pPr algn="l"/>
-            <a:r>
-              <a:rPr sz="5400" b="1" i="0">
+      <p:pic>
+        <p:nvPicPr>
+          <p:cNvPr id="4" name="Picture 3" descr="diag_v2_fixes.png"/>
+          <p:cNvPicPr>
+            <a:picLocks noChangeAspect="1"/>
+          </p:cNvPicPr>
+          <p:nvPr/>
+        </p:nvPicPr>
+        <p:blipFill>
+          <a:blip r:embed="rId2"/>
+          <a:stretch>
+            <a:fillRect/>
+          </a:stretch>
+        </p:blipFill>
+        <p:spPr>
+          <a:xfrm>
+            <a:off x="914400" y="2011680"/>
+            <a:ext cx="10332720" cy="3438915"/>
+          </a:xfrm>
+          <a:prstGeom prst="rect">
+            <a:avLst/>
+          </a:prstGeom>
+        </p:spPr>
+      </p:pic>
+      <p:sp>
+        <p:nvSpPr>
+          <p:cNvPr id="5" name="TextBox 4"/>
+          <p:cNvSpPr txBox="1"/>
+          <p:nvPr/>
+        </p:nvSpPr>
+        <p:spPr>
+          <a:xfrm>
+            <a:off x="640080" y="5577840"/>
+            <a:ext cx="10972800" cy="457200"/>
+          </a:xfrm>
+          <a:prstGeom prst="rect">
+            <a:avLst/>
+          </a:prstGeom>
+          <a:noFill/>
+        </p:spPr>
+        <p:txBody>
+          <a:bodyPr wrap="square" lIns="0" rIns="0" tIns="0" bIns="0" anchor="t">
+            <a:spAutoFit/>
+          </a:bodyPr>
+          <a:lstStyle/>
+          <a:p>
+            <a:pPr algn="ctr"/>
+            <a:r>
+              <a:rPr sz="1800" b="0" i="1">
                 <a:solidFill>
                   <a:srgbClr val="1A1A2E"/>
                 </a:solidFill>
                 <a:latin typeface="Helvetica"/>
               </a:rPr>
-              <a:t>Performance Evaluation Approach</a:t>
-            </a:r>
-          </a:p>
-        </p:txBody>
-      </p:sp>
-      <p:sp>
-        <p:nvSpPr>
-          <p:cNvPr id="5" name="TextBox 4"/>
-          <p:cNvSpPr txBox="1"/>
-          <p:nvPr/>
-        </p:nvSpPr>
-        <p:spPr>
-          <a:xfrm>
-            <a:off x="731520" y="4206240"/>
-            <a:ext cx="10698480" cy="548640"/>
-          </a:xfrm>
-          <a:prstGeom prst="rect">
-            <a:avLst/>
-          </a:prstGeom>
-          <a:noFill/>
-        </p:spPr>
-        <p:txBody>
-          <a:bodyPr wrap="square" lIns="0" rIns="0" tIns="0" bIns="0" anchor="t">
-            <a:spAutoFit/>
-          </a:bodyPr>
-          <a:lstStyle/>
-          <a:p>
-            <a:pPr algn="l"/>
-            <a:r>
-              <a:rPr sz="2000" b="0" i="1">
-                <a:solidFill>
-                  <a:srgbClr val="666677"/>
-                </a:solidFill>
-                <a:latin typeface="Helvetica"/>
-              </a:rPr>
-              <a:t>Metrics, baselines, and the same-checkpoint ablation that isolates causality.</a:t>
+              <a:t>Reparameterize the gate. Refine only the levels small objects live in.</a:t>
             </a:r>
           </a:p>
         </p:txBody>
@@ -4490,7 +4661,7 @@
                 </a:solidFill>
                 <a:latin typeface="Helvetica"/>
               </a:rPr>
-              <a:t>4. Evaluation Approach  •  Feedback-Augmented RT-DETR  •  Hatem Saadallah &amp; Nour Jennane</a:t>
+              <a:t>3. Proposed Solution  •  Feedback-Augmented RT-DETR  •  Hatem Saadallah &amp; Nour Jennane</a:t>
             </a:r>
           </a:p>
         </p:txBody>
@@ -4525,7 +4696,7 @@
                 </a:solidFill>
                 <a:latin typeface="Helvetica"/>
               </a:rPr>
-              <a:t>14 / 24</a:t>
+              <a:t>13 / 27</a:t>
             </a:r>
           </a:p>
         </p:txBody>
@@ -4556,8 +4727,8 @@
         </p:nvSpPr>
         <p:spPr>
           <a:xfrm>
-            <a:off x="640080" y="457200"/>
-            <a:ext cx="10972800" cy="822960"/>
+            <a:off x="731520" y="2377440"/>
+            <a:ext cx="10698480" cy="365760"/>
           </a:xfrm>
           <a:prstGeom prst="rect">
             <a:avLst/>
@@ -4572,13 +4743,13 @@
           <a:p>
             <a:pPr algn="l"/>
             <a:r>
-              <a:rPr sz="3400" b="1" i="0">
+              <a:rPr sz="1400" b="1" i="0">
                 <a:solidFill>
                   <a:srgbClr val="1F6FEB"/>
                 </a:solidFill>
                 <a:latin typeface="Helvetica"/>
               </a:rPr>
-              <a:t>How we evaluate the contribution</a:t>
+              <a:t>SECTION  4  /  5</a:t>
             </a:r>
           </a:p>
         </p:txBody>
@@ -4591,7 +4762,7 @@
         </p:nvSpPr>
         <p:spPr>
           <a:xfrm>
-            <a:off x="640080" y="1143000"/>
+            <a:off x="731520" y="2788920"/>
             <a:ext cx="640080" cy="54864"/>
           </a:xfrm>
           <a:prstGeom prst="rect">
@@ -4628,47 +4799,36 @@
       </p:sp>
       <p:sp>
         <p:nvSpPr>
-          <p:cNvPr id="4" name="Rounded Rectangle 3"/>
-          <p:cNvSpPr/>
-          <p:nvPr/>
-        </p:nvSpPr>
-        <p:spPr>
-          <a:xfrm>
-            <a:off x="640080" y="1417320"/>
-            <a:ext cx="5486400" cy="1691640"/>
-          </a:xfrm>
-          <a:prstGeom prst="roundRect">
-            <a:avLst/>
-          </a:prstGeom>
-          <a:solidFill>
-            <a:srgbClr val="F5F5F7"/>
-          </a:solidFill>
-          <a:ln w="9525">
-            <a:solidFill>
-              <a:srgbClr val="666677"/>
-            </a:solidFill>
-          </a:ln>
-          <a:effectLst/>
-        </p:spPr>
-        <p:style>
-          <a:lnRef idx="1">
-            <a:schemeClr val="accent1"/>
-          </a:lnRef>
-          <a:fillRef idx="3">
-            <a:schemeClr val="accent1"/>
-          </a:fillRef>
-          <a:effectRef idx="2">
-            <a:schemeClr val="accent1"/>
-          </a:effectRef>
-          <a:fontRef idx="minor">
-            <a:schemeClr val="lt1"/>
-          </a:fontRef>
-        </p:style>
-        <p:txBody>
-          <a:bodyPr rtlCol="0" anchor="ctr"/>
-          <a:lstStyle/>
-          <a:p>
-            <a:pPr algn="ctr"/>
+          <p:cNvPr id="4" name="TextBox 3"/>
+          <p:cNvSpPr txBox="1"/>
+          <p:nvPr/>
+        </p:nvSpPr>
+        <p:spPr>
+          <a:xfrm>
+            <a:off x="731520" y="2971800"/>
+            <a:ext cx="10698480" cy="1097280"/>
+          </a:xfrm>
+          <a:prstGeom prst="rect">
+            <a:avLst/>
+          </a:prstGeom>
+          <a:noFill/>
+        </p:spPr>
+        <p:txBody>
+          <a:bodyPr wrap="square" lIns="0" rIns="0" tIns="0" bIns="0" anchor="t">
+            <a:spAutoFit/>
+          </a:bodyPr>
+          <a:lstStyle/>
+          <a:p>
+            <a:pPr algn="l"/>
+            <a:r>
+              <a:rPr sz="5400" b="1" i="0">
+                <a:solidFill>
+                  <a:srgbClr val="1A1A2E"/>
+                </a:solidFill>
+                <a:latin typeface="Helvetica"/>
+              </a:rPr>
+              <a:t>Performance Evaluation Approach</a:t>
+            </a:r>
           </a:p>
         </p:txBody>
       </p:sp>
@@ -4680,8 +4840,8 @@
         </p:nvSpPr>
         <p:spPr>
           <a:xfrm>
-            <a:off x="868680" y="1554480"/>
-            <a:ext cx="5120640" cy="365760"/>
+            <a:off x="731520" y="4206240"/>
+            <a:ext cx="10698480" cy="548640"/>
           </a:xfrm>
           <a:prstGeom prst="rect">
             <a:avLst/>
@@ -4696,13 +4856,13 @@
           <a:p>
             <a:pPr algn="l"/>
             <a:r>
-              <a:rPr sz="1300" b="1" i="0">
-                <a:solidFill>
-                  <a:srgbClr val="1F6FEB"/>
-                </a:solidFill>
-                <a:latin typeface="Helvetica"/>
-              </a:rPr>
-              <a:t>Metrics  (COCO standard)</a:t>
+              <a:rPr sz="2000" b="0" i="1">
+                <a:solidFill>
+                  <a:srgbClr val="666677"/>
+                </a:solidFill>
+                <a:latin typeface="Helvetica"/>
+              </a:rPr>
+              <a:t>Metrics, baselines, and the same-checkpoint ablation that isolates causality.</a:t>
             </a:r>
           </a:p>
         </p:txBody>
@@ -4710,463 +4870,6 @@
       <p:sp>
         <p:nvSpPr>
           <p:cNvPr id="6" name="TextBox 5"/>
-          <p:cNvSpPr txBox="1"/>
-          <p:nvPr/>
-        </p:nvSpPr>
-        <p:spPr>
-          <a:xfrm>
-            <a:off x="868680" y="1920240"/>
-            <a:ext cx="5120640" cy="365760"/>
-          </a:xfrm>
-          <a:prstGeom prst="rect">
-            <a:avLst/>
-          </a:prstGeom>
-          <a:noFill/>
-        </p:spPr>
-        <p:txBody>
-          <a:bodyPr wrap="square" lIns="0" rIns="0" tIns="0" bIns="0" anchor="t">
-            <a:spAutoFit/>
-          </a:bodyPr>
-          <a:lstStyle/>
-          <a:p>
-            <a:pPr algn="l"/>
-            <a:r>
-              <a:rPr sz="1300" b="0" i="0">
-                <a:solidFill>
-                  <a:srgbClr val="1A1A2E"/>
-                </a:solidFill>
-                <a:latin typeface="Helvetica"/>
-              </a:rPr>
-              <a:t>AP, AP</a:t>
-            </a:r>
-            <a:r>
-              <a:rPr sz="1300" b="0" i="0" baseline="-25000">
-                <a:solidFill>
-                  <a:srgbClr val="1A1A2E"/>
-                </a:solidFill>
-                <a:latin typeface="Helvetica"/>
-              </a:rPr>
-              <a:t>S</a:t>
-            </a:r>
-            <a:r>
-              <a:rPr sz="1300" b="0" i="0">
-                <a:solidFill>
-                  <a:srgbClr val="1A1A2E"/>
-                </a:solidFill>
-                <a:latin typeface="Helvetica"/>
-              </a:rPr>
-              <a:t>, AP</a:t>
-            </a:r>
-            <a:r>
-              <a:rPr sz="1300" b="0" i="0" baseline="-25000">
-                <a:solidFill>
-                  <a:srgbClr val="1A1A2E"/>
-                </a:solidFill>
-                <a:latin typeface="Helvetica"/>
-              </a:rPr>
-              <a:t>M</a:t>
-            </a:r>
-            <a:r>
-              <a:rPr sz="1300" b="0" i="0">
-                <a:solidFill>
-                  <a:srgbClr val="1A1A2E"/>
-                </a:solidFill>
-                <a:latin typeface="Helvetica"/>
-              </a:rPr>
-              <a:t>, AP</a:t>
-            </a:r>
-            <a:r>
-              <a:rPr sz="1300" b="0" i="0" baseline="-25000">
-                <a:solidFill>
-                  <a:srgbClr val="1A1A2E"/>
-                </a:solidFill>
-                <a:latin typeface="Helvetica"/>
-              </a:rPr>
-              <a:t>L</a:t>
-            </a:r>
-            <a:r>
-              <a:rPr sz="1300" b="0" i="0">
-                <a:solidFill>
-                  <a:srgbClr val="1A1A2E"/>
-                </a:solidFill>
-                <a:latin typeface="Helvetica"/>
-              </a:rPr>
-              <a:t>  —  IoU 0.5..0.95</a:t>
-            </a:r>
-          </a:p>
-        </p:txBody>
-      </p:sp>
-      <p:sp>
-        <p:nvSpPr>
-          <p:cNvPr id="7" name="TextBox 6"/>
-          <p:cNvSpPr txBox="1"/>
-          <p:nvPr/>
-        </p:nvSpPr>
-        <p:spPr>
-          <a:xfrm>
-            <a:off x="868680" y="2286000"/>
-            <a:ext cx="5120640" cy="365760"/>
-          </a:xfrm>
-          <a:prstGeom prst="rect">
-            <a:avLst/>
-          </a:prstGeom>
-          <a:noFill/>
-        </p:spPr>
-        <p:txBody>
-          <a:bodyPr wrap="square" lIns="0" rIns="0" tIns="0" bIns="0" anchor="t">
-            <a:spAutoFit/>
-          </a:bodyPr>
-          <a:lstStyle/>
-          <a:p>
-            <a:pPr algn="l"/>
-            <a:r>
-              <a:rPr sz="1300" b="1" i="0">
-                <a:solidFill>
-                  <a:srgbClr val="1A1A2E"/>
-                </a:solidFill>
-                <a:latin typeface="Helvetica"/>
-              </a:rPr>
-              <a:t>AP</a:t>
-            </a:r>
-            <a:r>
-              <a:rPr sz="1300" b="1" i="0" baseline="-25000">
-                <a:solidFill>
-                  <a:srgbClr val="1A1A2E"/>
-                </a:solidFill>
-                <a:latin typeface="Helvetica"/>
-              </a:rPr>
-              <a:t>S</a:t>
-            </a:r>
-            <a:r>
-              <a:rPr sz="1300" b="1" i="0">
-                <a:solidFill>
-                  <a:srgbClr val="1A1A2E"/>
-                </a:solidFill>
-                <a:latin typeface="Helvetica"/>
-              </a:rPr>
-              <a:t> is the headline metric (area &lt; 32² px)</a:t>
-            </a:r>
-          </a:p>
-        </p:txBody>
-      </p:sp>
-      <p:sp>
-        <p:nvSpPr>
-          <p:cNvPr id="8" name="TextBox 7"/>
-          <p:cNvSpPr txBox="1"/>
-          <p:nvPr/>
-        </p:nvSpPr>
-        <p:spPr>
-          <a:xfrm>
-            <a:off x="868680" y="2651760"/>
-            <a:ext cx="5120640" cy="365760"/>
-          </a:xfrm>
-          <a:prstGeom prst="rect">
-            <a:avLst/>
-          </a:prstGeom>
-          <a:noFill/>
-        </p:spPr>
-        <p:txBody>
-          <a:bodyPr wrap="square" lIns="0" rIns="0" tIns="0" bIns="0" anchor="t">
-            <a:spAutoFit/>
-          </a:bodyPr>
-          <a:lstStyle/>
-          <a:p>
-            <a:pPr algn="l"/>
-            <a:r>
-              <a:rPr sz="1000" b="0" i="1">
-                <a:solidFill>
-                  <a:srgbClr val="666677"/>
-                </a:solidFill>
-                <a:latin typeface="Helvetica"/>
-              </a:rPr>
-              <a:t>Others verify we don't degrade easier categories.</a:t>
-            </a:r>
-          </a:p>
-        </p:txBody>
-      </p:sp>
-      <p:sp>
-        <p:nvSpPr>
-          <p:cNvPr id="9" name="Rounded Rectangle 8"/>
-          <p:cNvSpPr/>
-          <p:nvPr/>
-        </p:nvSpPr>
-        <p:spPr>
-          <a:xfrm>
-            <a:off x="6400800" y="1417320"/>
-            <a:ext cx="5120640" cy="1691640"/>
-          </a:xfrm>
-          <a:prstGeom prst="roundRect">
-            <a:avLst/>
-          </a:prstGeom>
-          <a:solidFill>
-            <a:srgbClr val="F5F5F7"/>
-          </a:solidFill>
-          <a:ln w="9525">
-            <a:solidFill>
-              <a:srgbClr val="666677"/>
-            </a:solidFill>
-          </a:ln>
-          <a:effectLst/>
-        </p:spPr>
-        <p:style>
-          <a:lnRef idx="1">
-            <a:schemeClr val="accent1"/>
-          </a:lnRef>
-          <a:fillRef idx="3">
-            <a:schemeClr val="accent1"/>
-          </a:fillRef>
-          <a:effectRef idx="2">
-            <a:schemeClr val="accent1"/>
-          </a:effectRef>
-          <a:fontRef idx="minor">
-            <a:schemeClr val="lt1"/>
-          </a:fontRef>
-        </p:style>
-        <p:txBody>
-          <a:bodyPr rtlCol="0" anchor="ctr"/>
-          <a:lstStyle/>
-          <a:p>
-            <a:pPr algn="ctr"/>
-          </a:p>
-        </p:txBody>
-      </p:sp>
-      <p:sp>
-        <p:nvSpPr>
-          <p:cNvPr id="10" name="TextBox 9"/>
-          <p:cNvSpPr txBox="1"/>
-          <p:nvPr/>
-        </p:nvSpPr>
-        <p:spPr>
-          <a:xfrm>
-            <a:off x="6629400" y="1554480"/>
-            <a:ext cx="4754880" cy="365760"/>
-          </a:xfrm>
-          <a:prstGeom prst="rect">
-            <a:avLst/>
-          </a:prstGeom>
-          <a:noFill/>
-        </p:spPr>
-        <p:txBody>
-          <a:bodyPr wrap="square" lIns="0" rIns="0" tIns="0" bIns="0" anchor="t">
-            <a:spAutoFit/>
-          </a:bodyPr>
-          <a:lstStyle/>
-          <a:p>
-            <a:pPr algn="l"/>
-            <a:r>
-              <a:rPr sz="1300" b="1" i="0">
-                <a:solidFill>
-                  <a:srgbClr val="1F6FEB"/>
-                </a:solidFill>
-                <a:latin typeface="Helvetica"/>
-              </a:rPr>
-              <a:t>Baselines</a:t>
-            </a:r>
-          </a:p>
-        </p:txBody>
-      </p:sp>
-      <p:sp>
-        <p:nvSpPr>
-          <p:cNvPr id="11" name="TextBox 10"/>
-          <p:cNvSpPr txBox="1"/>
-          <p:nvPr/>
-        </p:nvSpPr>
-        <p:spPr>
-          <a:xfrm>
-            <a:off x="6629400" y="1920240"/>
-            <a:ext cx="4754880" cy="365760"/>
-          </a:xfrm>
-          <a:prstGeom prst="rect">
-            <a:avLst/>
-          </a:prstGeom>
-          <a:noFill/>
-        </p:spPr>
-        <p:txBody>
-          <a:bodyPr wrap="square" lIns="0" rIns="0" tIns="0" bIns="0" anchor="t">
-            <a:spAutoFit/>
-          </a:bodyPr>
-          <a:lstStyle/>
-          <a:p>
-            <a:pPr algn="l"/>
-            <a:r>
-              <a:rPr sz="1300" b="0" i="0">
-                <a:solidFill>
-                  <a:srgbClr val="1A1A2E"/>
-                </a:solidFill>
-                <a:latin typeface="Helvetica"/>
-              </a:rPr>
-              <a:t>RT-DETR-R50  (published)</a:t>
-            </a:r>
-          </a:p>
-        </p:txBody>
-      </p:sp>
-      <p:sp>
-        <p:nvSpPr>
-          <p:cNvPr id="12" name="TextBox 11"/>
-          <p:cNvSpPr txBox="1"/>
-          <p:nvPr/>
-        </p:nvSpPr>
-        <p:spPr>
-          <a:xfrm>
-            <a:off x="6629400" y="2286000"/>
-            <a:ext cx="4754880" cy="365760"/>
-          </a:xfrm>
-          <a:prstGeom prst="rect">
-            <a:avLst/>
-          </a:prstGeom>
-          <a:noFill/>
-        </p:spPr>
-        <p:txBody>
-          <a:bodyPr wrap="square" lIns="0" rIns="0" tIns="0" bIns="0" anchor="t">
-            <a:spAutoFit/>
-          </a:bodyPr>
-          <a:lstStyle/>
-          <a:p>
-            <a:pPr algn="l"/>
-            <a:r>
-              <a:rPr sz="1300" b="0" i="0">
-                <a:solidFill>
-                  <a:srgbClr val="1A1A2E"/>
-                </a:solidFill>
-                <a:latin typeface="Helvetica"/>
-              </a:rPr>
-              <a:t>v1 feedback  (before the fix)</a:t>
-            </a:r>
-          </a:p>
-        </p:txBody>
-      </p:sp>
-      <p:sp>
-        <p:nvSpPr>
-          <p:cNvPr id="13" name="TextBox 12"/>
-          <p:cNvSpPr txBox="1"/>
-          <p:nvPr/>
-        </p:nvSpPr>
-        <p:spPr>
-          <a:xfrm>
-            <a:off x="6629400" y="2651760"/>
-            <a:ext cx="4754880" cy="365760"/>
-          </a:xfrm>
-          <a:prstGeom prst="rect">
-            <a:avLst/>
-          </a:prstGeom>
-          <a:noFill/>
-        </p:spPr>
-        <p:txBody>
-          <a:bodyPr wrap="square" lIns="0" rIns="0" tIns="0" bIns="0" anchor="t">
-            <a:spAutoFit/>
-          </a:bodyPr>
-          <a:lstStyle/>
-          <a:p>
-            <a:pPr algn="l"/>
-            <a:r>
-              <a:rPr sz="1300" b="1" i="0">
-                <a:solidFill>
-                  <a:srgbClr val="1A1A2E"/>
-                </a:solidFill>
-                <a:latin typeface="Helvetica"/>
-              </a:rPr>
-              <a:t>v2 feedback  (with the fix)</a:t>
-            </a:r>
-          </a:p>
-        </p:txBody>
-      </p:sp>
-      <p:sp>
-        <p:nvSpPr>
-          <p:cNvPr id="14" name="TextBox 13"/>
-          <p:cNvSpPr txBox="1"/>
-          <p:nvPr/>
-        </p:nvSpPr>
-        <p:spPr>
-          <a:xfrm>
-            <a:off x="640080" y="3337560"/>
-            <a:ext cx="10972800" cy="457200"/>
-          </a:xfrm>
-          <a:prstGeom prst="rect">
-            <a:avLst/>
-          </a:prstGeom>
-          <a:noFill/>
-        </p:spPr>
-        <p:txBody>
-          <a:bodyPr wrap="square" lIns="0" rIns="0" tIns="0" bIns="0" anchor="t">
-            <a:spAutoFit/>
-          </a:bodyPr>
-          <a:lstStyle/>
-          <a:p>
-            <a:pPr algn="ctr"/>
-            <a:r>
-              <a:rPr sz="1800" b="1" i="0">
-                <a:solidFill>
-                  <a:srgbClr val="1F6FEB"/>
-                </a:solidFill>
-                <a:latin typeface="Helvetica"/>
-              </a:rPr>
-              <a:t>Same-checkpoint ablation  —  isolates causal contribution</a:t>
-            </a:r>
-          </a:p>
-        </p:txBody>
-      </p:sp>
-      <p:pic>
-        <p:nvPicPr>
-          <p:cNvPr id="15" name="Picture 14" descr="diag_ablation.png"/>
-          <p:cNvPicPr>
-            <a:picLocks noChangeAspect="1"/>
-          </p:cNvPicPr>
-          <p:nvPr/>
-        </p:nvPicPr>
-        <p:blipFill>
-          <a:blip r:embed="rId2"/>
-          <a:stretch>
-            <a:fillRect/>
-          </a:stretch>
-        </p:blipFill>
-        <p:spPr>
-          <a:xfrm>
-            <a:off x="2194560" y="3840480"/>
-            <a:ext cx="7772400" cy="2546658"/>
-          </a:xfrm>
-          <a:prstGeom prst="rect">
-            <a:avLst/>
-          </a:prstGeom>
-        </p:spPr>
-      </p:pic>
-      <p:sp>
-        <p:nvSpPr>
-          <p:cNvPr id="16" name="TextBox 15"/>
-          <p:cNvSpPr txBox="1"/>
-          <p:nvPr/>
-        </p:nvSpPr>
-        <p:spPr>
-          <a:xfrm>
-            <a:off x="640080" y="6080760"/>
-            <a:ext cx="10972800" cy="365760"/>
-          </a:xfrm>
-          <a:prstGeom prst="rect">
-            <a:avLst/>
-          </a:prstGeom>
-          <a:noFill/>
-        </p:spPr>
-        <p:txBody>
-          <a:bodyPr wrap="square" lIns="0" rIns="0" tIns="0" bIns="0" anchor="t">
-            <a:spAutoFit/>
-          </a:bodyPr>
-          <a:lstStyle/>
-          <a:p>
-            <a:pPr algn="ctr"/>
-            <a:r>
-              <a:rPr sz="1200" b="0" i="1">
-                <a:solidFill>
-                  <a:srgbClr val="666677"/>
-                </a:solidFill>
-                <a:latin typeface="Helvetica"/>
-              </a:rPr>
-              <a:t>Toggle feedback ON / OFF at inference. Identical weights, identical inputs.</a:t>
-            </a:r>
-          </a:p>
-        </p:txBody>
-      </p:sp>
-      <p:sp>
-        <p:nvSpPr>
-          <p:cNvPr id="17" name="TextBox 16"/>
           <p:cNvSpPr txBox="1"/>
           <p:nvPr/>
         </p:nvSpPr>
@@ -5201,7 +4904,7 @@
       </p:sp>
       <p:sp>
         <p:nvSpPr>
-          <p:cNvPr id="18" name="TextBox 17"/>
+          <p:cNvPr id="7" name="TextBox 6"/>
           <p:cNvSpPr txBox="1"/>
           <p:nvPr/>
         </p:nvSpPr>
@@ -5229,7 +4932,7 @@
                 </a:solidFill>
                 <a:latin typeface="Helvetica"/>
               </a:rPr>
-              <a:t>15 / 24</a:t>
+              <a:t>14 / 27</a:t>
             </a:r>
           </a:p>
         </p:txBody>
@@ -5260,8 +4963,8 @@
         </p:nvSpPr>
         <p:spPr>
           <a:xfrm>
-            <a:off x="731520" y="2377440"/>
-            <a:ext cx="10698480" cy="365760"/>
+            <a:off x="640080" y="457200"/>
+            <a:ext cx="10972800" cy="822960"/>
           </a:xfrm>
           <a:prstGeom prst="rect">
             <a:avLst/>
@@ -5276,13 +4979,13 @@
           <a:p>
             <a:pPr algn="l"/>
             <a:r>
-              <a:rPr sz="1400" b="1" i="0">
+              <a:rPr sz="3400" b="1" i="0">
                 <a:solidFill>
                   <a:srgbClr val="1F6FEB"/>
                 </a:solidFill>
                 <a:latin typeface="Helvetica"/>
               </a:rPr>
-              <a:t>SECTION  5  /  5</a:t>
+              <a:t>How we evaluate the contribution</a:t>
             </a:r>
           </a:p>
         </p:txBody>
@@ -5295,7 +4998,7 @@
         </p:nvSpPr>
         <p:spPr>
           <a:xfrm>
-            <a:off x="731520" y="2788920"/>
+            <a:off x="640080" y="1143000"/>
             <a:ext cx="640080" cy="54864"/>
           </a:xfrm>
           <a:prstGeom prst="rect">
@@ -5332,14 +5035,60 @@
       </p:sp>
       <p:sp>
         <p:nvSpPr>
-          <p:cNvPr id="4" name="TextBox 3"/>
-          <p:cNvSpPr txBox="1"/>
-          <p:nvPr/>
-        </p:nvSpPr>
-        <p:spPr>
-          <a:xfrm>
-            <a:off x="731520" y="2971800"/>
-            <a:ext cx="10698480" cy="1097280"/>
+          <p:cNvPr id="4" name="Rounded Rectangle 3"/>
+          <p:cNvSpPr/>
+          <p:nvPr/>
+        </p:nvSpPr>
+        <p:spPr>
+          <a:xfrm>
+            <a:off x="640080" y="1417320"/>
+            <a:ext cx="5486400" cy="1691640"/>
+          </a:xfrm>
+          <a:prstGeom prst="roundRect">
+            <a:avLst/>
+          </a:prstGeom>
+          <a:solidFill>
+            <a:srgbClr val="F5F5F7"/>
+          </a:solidFill>
+          <a:ln w="9525">
+            <a:solidFill>
+              <a:srgbClr val="666677"/>
+            </a:solidFill>
+          </a:ln>
+          <a:effectLst/>
+        </p:spPr>
+        <p:style>
+          <a:lnRef idx="1">
+            <a:schemeClr val="accent1"/>
+          </a:lnRef>
+          <a:fillRef idx="3">
+            <a:schemeClr val="accent1"/>
+          </a:fillRef>
+          <a:effectRef idx="2">
+            <a:schemeClr val="accent1"/>
+          </a:effectRef>
+          <a:fontRef idx="minor">
+            <a:schemeClr val="lt1"/>
+          </a:fontRef>
+        </p:style>
+        <p:txBody>
+          <a:bodyPr rtlCol="0" anchor="ctr"/>
+          <a:lstStyle/>
+          <a:p>
+            <a:pPr algn="ctr"/>
+          </a:p>
+        </p:txBody>
+      </p:sp>
+      <p:sp>
+        <p:nvSpPr>
+          <p:cNvPr id="5" name="TextBox 4"/>
+          <p:cNvSpPr txBox="1"/>
+          <p:nvPr/>
+        </p:nvSpPr>
+        <p:spPr>
+          <a:xfrm>
+            <a:off x="868680" y="1554480"/>
+            <a:ext cx="5120640" cy="365760"/>
           </a:xfrm>
           <a:prstGeom prst="rect">
             <a:avLst/>
@@ -5354,27 +5103,116 @@
           <a:p>
             <a:pPr algn="l"/>
             <a:r>
-              <a:rPr sz="5400" b="1" i="0">
+              <a:rPr sz="1300" b="1" i="0">
+                <a:solidFill>
+                  <a:srgbClr val="1F6FEB"/>
+                </a:solidFill>
+                <a:latin typeface="Helvetica"/>
+              </a:rPr>
+              <a:t>Metrics  (COCO standard)</a:t>
+            </a:r>
+          </a:p>
+        </p:txBody>
+      </p:sp>
+      <p:sp>
+        <p:nvSpPr>
+          <p:cNvPr id="6" name="TextBox 5"/>
+          <p:cNvSpPr txBox="1"/>
+          <p:nvPr/>
+        </p:nvSpPr>
+        <p:spPr>
+          <a:xfrm>
+            <a:off x="868680" y="1920240"/>
+            <a:ext cx="5120640" cy="365760"/>
+          </a:xfrm>
+          <a:prstGeom prst="rect">
+            <a:avLst/>
+          </a:prstGeom>
+          <a:noFill/>
+        </p:spPr>
+        <p:txBody>
+          <a:bodyPr wrap="square" lIns="0" rIns="0" tIns="0" bIns="0" anchor="t">
+            <a:spAutoFit/>
+          </a:bodyPr>
+          <a:lstStyle/>
+          <a:p>
+            <a:pPr algn="l"/>
+            <a:r>
+              <a:rPr sz="1300" b="0" i="0">
                 <a:solidFill>
                   <a:srgbClr val="1A1A2E"/>
                 </a:solidFill>
                 <a:latin typeface="Helvetica"/>
               </a:rPr>
-              <a:t>Final Results</a:t>
-            </a:r>
-          </a:p>
-        </p:txBody>
-      </p:sp>
-      <p:sp>
-        <p:nvSpPr>
-          <p:cNvPr id="5" name="TextBox 4"/>
-          <p:cNvSpPr txBox="1"/>
-          <p:nvPr/>
-        </p:nvSpPr>
-        <p:spPr>
-          <a:xfrm>
-            <a:off x="731520" y="4206240"/>
-            <a:ext cx="10698480" cy="548640"/>
+              <a:t>AP, AP</a:t>
+            </a:r>
+            <a:r>
+              <a:rPr sz="1300" b="0" i="0" baseline="-25000">
+                <a:solidFill>
+                  <a:srgbClr val="1A1A2E"/>
+                </a:solidFill>
+                <a:latin typeface="Helvetica"/>
+              </a:rPr>
+              <a:t>S</a:t>
+            </a:r>
+            <a:r>
+              <a:rPr sz="1300" b="0" i="0">
+                <a:solidFill>
+                  <a:srgbClr val="1A1A2E"/>
+                </a:solidFill>
+                <a:latin typeface="Helvetica"/>
+              </a:rPr>
+              <a:t>, AP</a:t>
+            </a:r>
+            <a:r>
+              <a:rPr sz="1300" b="0" i="0" baseline="-25000">
+                <a:solidFill>
+                  <a:srgbClr val="1A1A2E"/>
+                </a:solidFill>
+                <a:latin typeface="Helvetica"/>
+              </a:rPr>
+              <a:t>M</a:t>
+            </a:r>
+            <a:r>
+              <a:rPr sz="1300" b="0" i="0">
+                <a:solidFill>
+                  <a:srgbClr val="1A1A2E"/>
+                </a:solidFill>
+                <a:latin typeface="Helvetica"/>
+              </a:rPr>
+              <a:t>, AP</a:t>
+            </a:r>
+            <a:r>
+              <a:rPr sz="1300" b="0" i="0" baseline="-25000">
+                <a:solidFill>
+                  <a:srgbClr val="1A1A2E"/>
+                </a:solidFill>
+                <a:latin typeface="Helvetica"/>
+              </a:rPr>
+              <a:t>L</a:t>
+            </a:r>
+            <a:r>
+              <a:rPr sz="1300" b="0" i="0">
+                <a:solidFill>
+                  <a:srgbClr val="1A1A2E"/>
+                </a:solidFill>
+                <a:latin typeface="Helvetica"/>
+              </a:rPr>
+              <a:t>  —  IoU 0.5..0.95</a:t>
+            </a:r>
+          </a:p>
+        </p:txBody>
+      </p:sp>
+      <p:sp>
+        <p:nvSpPr>
+          <p:cNvPr id="7" name="TextBox 6"/>
+          <p:cNvSpPr txBox="1"/>
+          <p:nvPr/>
+        </p:nvSpPr>
+        <p:spPr>
+          <a:xfrm>
+            <a:off x="868680" y="2286000"/>
+            <a:ext cx="5120640" cy="365760"/>
           </a:xfrm>
           <a:prstGeom prst="rect">
             <a:avLst/>
@@ -5389,20 +5227,353 @@
           <a:p>
             <a:pPr algn="l"/>
             <a:r>
-              <a:rPr sz="2000" b="0" i="1">
+              <a:rPr sz="1300" b="1" i="0">
+                <a:solidFill>
+                  <a:srgbClr val="1A1A2E"/>
+                </a:solidFill>
+                <a:latin typeface="Helvetica"/>
+              </a:rPr>
+              <a:t>AP</a:t>
+            </a:r>
+            <a:r>
+              <a:rPr sz="1300" b="1" i="0" baseline="-25000">
+                <a:solidFill>
+                  <a:srgbClr val="1A1A2E"/>
+                </a:solidFill>
+                <a:latin typeface="Helvetica"/>
+              </a:rPr>
+              <a:t>S</a:t>
+            </a:r>
+            <a:r>
+              <a:rPr sz="1300" b="1" i="0">
+                <a:solidFill>
+                  <a:srgbClr val="1A1A2E"/>
+                </a:solidFill>
+                <a:latin typeface="Helvetica"/>
+              </a:rPr>
+              <a:t> is the headline metric (area &lt; 32² px)</a:t>
+            </a:r>
+          </a:p>
+        </p:txBody>
+      </p:sp>
+      <p:sp>
+        <p:nvSpPr>
+          <p:cNvPr id="8" name="TextBox 7"/>
+          <p:cNvSpPr txBox="1"/>
+          <p:nvPr/>
+        </p:nvSpPr>
+        <p:spPr>
+          <a:xfrm>
+            <a:off x="868680" y="2651760"/>
+            <a:ext cx="5120640" cy="365760"/>
+          </a:xfrm>
+          <a:prstGeom prst="rect">
+            <a:avLst/>
+          </a:prstGeom>
+          <a:noFill/>
+        </p:spPr>
+        <p:txBody>
+          <a:bodyPr wrap="square" lIns="0" rIns="0" tIns="0" bIns="0" anchor="t">
+            <a:spAutoFit/>
+          </a:bodyPr>
+          <a:lstStyle/>
+          <a:p>
+            <a:pPr algn="l"/>
+            <a:r>
+              <a:rPr sz="1000" b="0" i="1">
                 <a:solidFill>
                   <a:srgbClr val="666677"/>
                 </a:solidFill>
                 <a:latin typeface="Helvetica"/>
               </a:rPr>
-              <a:t>Training trajectory, the causal effect, robustness, trade-offs, and what's next.</a:t>
-            </a:r>
-          </a:p>
-        </p:txBody>
-      </p:sp>
-      <p:sp>
-        <p:nvSpPr>
-          <p:cNvPr id="6" name="TextBox 5"/>
+              <a:t>Others verify we don't degrade easier categories.</a:t>
+            </a:r>
+          </a:p>
+        </p:txBody>
+      </p:sp>
+      <p:sp>
+        <p:nvSpPr>
+          <p:cNvPr id="9" name="Rounded Rectangle 8"/>
+          <p:cNvSpPr/>
+          <p:nvPr/>
+        </p:nvSpPr>
+        <p:spPr>
+          <a:xfrm>
+            <a:off x="6400800" y="1417320"/>
+            <a:ext cx="5120640" cy="1691640"/>
+          </a:xfrm>
+          <a:prstGeom prst="roundRect">
+            <a:avLst/>
+          </a:prstGeom>
+          <a:solidFill>
+            <a:srgbClr val="F5F5F7"/>
+          </a:solidFill>
+          <a:ln w="9525">
+            <a:solidFill>
+              <a:srgbClr val="666677"/>
+            </a:solidFill>
+          </a:ln>
+          <a:effectLst/>
+        </p:spPr>
+        <p:style>
+          <a:lnRef idx="1">
+            <a:schemeClr val="accent1"/>
+          </a:lnRef>
+          <a:fillRef idx="3">
+            <a:schemeClr val="accent1"/>
+          </a:fillRef>
+          <a:effectRef idx="2">
+            <a:schemeClr val="accent1"/>
+          </a:effectRef>
+          <a:fontRef idx="minor">
+            <a:schemeClr val="lt1"/>
+          </a:fontRef>
+        </p:style>
+        <p:txBody>
+          <a:bodyPr rtlCol="0" anchor="ctr"/>
+          <a:lstStyle/>
+          <a:p>
+            <a:pPr algn="ctr"/>
+          </a:p>
+        </p:txBody>
+      </p:sp>
+      <p:sp>
+        <p:nvSpPr>
+          <p:cNvPr id="10" name="TextBox 9"/>
+          <p:cNvSpPr txBox="1"/>
+          <p:nvPr/>
+        </p:nvSpPr>
+        <p:spPr>
+          <a:xfrm>
+            <a:off x="6629400" y="1554480"/>
+            <a:ext cx="4754880" cy="365760"/>
+          </a:xfrm>
+          <a:prstGeom prst="rect">
+            <a:avLst/>
+          </a:prstGeom>
+          <a:noFill/>
+        </p:spPr>
+        <p:txBody>
+          <a:bodyPr wrap="square" lIns="0" rIns="0" tIns="0" bIns="0" anchor="t">
+            <a:spAutoFit/>
+          </a:bodyPr>
+          <a:lstStyle/>
+          <a:p>
+            <a:pPr algn="l"/>
+            <a:r>
+              <a:rPr sz="1300" b="1" i="0">
+                <a:solidFill>
+                  <a:srgbClr val="1F6FEB"/>
+                </a:solidFill>
+                <a:latin typeface="Helvetica"/>
+              </a:rPr>
+              <a:t>Baselines</a:t>
+            </a:r>
+          </a:p>
+        </p:txBody>
+      </p:sp>
+      <p:sp>
+        <p:nvSpPr>
+          <p:cNvPr id="11" name="TextBox 10"/>
+          <p:cNvSpPr txBox="1"/>
+          <p:nvPr/>
+        </p:nvSpPr>
+        <p:spPr>
+          <a:xfrm>
+            <a:off x="6629400" y="1920240"/>
+            <a:ext cx="4754880" cy="365760"/>
+          </a:xfrm>
+          <a:prstGeom prst="rect">
+            <a:avLst/>
+          </a:prstGeom>
+          <a:noFill/>
+        </p:spPr>
+        <p:txBody>
+          <a:bodyPr wrap="square" lIns="0" rIns="0" tIns="0" bIns="0" anchor="t">
+            <a:spAutoFit/>
+          </a:bodyPr>
+          <a:lstStyle/>
+          <a:p>
+            <a:pPr algn="l"/>
+            <a:r>
+              <a:rPr sz="1300" b="0" i="0">
+                <a:solidFill>
+                  <a:srgbClr val="1A1A2E"/>
+                </a:solidFill>
+                <a:latin typeface="Helvetica"/>
+              </a:rPr>
+              <a:t>RT-DETR-R50  (published)</a:t>
+            </a:r>
+          </a:p>
+        </p:txBody>
+      </p:sp>
+      <p:sp>
+        <p:nvSpPr>
+          <p:cNvPr id="12" name="TextBox 11"/>
+          <p:cNvSpPr txBox="1"/>
+          <p:nvPr/>
+        </p:nvSpPr>
+        <p:spPr>
+          <a:xfrm>
+            <a:off x="6629400" y="2286000"/>
+            <a:ext cx="4754880" cy="365760"/>
+          </a:xfrm>
+          <a:prstGeom prst="rect">
+            <a:avLst/>
+          </a:prstGeom>
+          <a:noFill/>
+        </p:spPr>
+        <p:txBody>
+          <a:bodyPr wrap="square" lIns="0" rIns="0" tIns="0" bIns="0" anchor="t">
+            <a:spAutoFit/>
+          </a:bodyPr>
+          <a:lstStyle/>
+          <a:p>
+            <a:pPr algn="l"/>
+            <a:r>
+              <a:rPr sz="1300" b="0" i="0">
+                <a:solidFill>
+                  <a:srgbClr val="1A1A2E"/>
+                </a:solidFill>
+                <a:latin typeface="Helvetica"/>
+              </a:rPr>
+              <a:t>v1 feedback  (before the fix)</a:t>
+            </a:r>
+          </a:p>
+        </p:txBody>
+      </p:sp>
+      <p:sp>
+        <p:nvSpPr>
+          <p:cNvPr id="13" name="TextBox 12"/>
+          <p:cNvSpPr txBox="1"/>
+          <p:nvPr/>
+        </p:nvSpPr>
+        <p:spPr>
+          <a:xfrm>
+            <a:off x="6629400" y="2651760"/>
+            <a:ext cx="4754880" cy="365760"/>
+          </a:xfrm>
+          <a:prstGeom prst="rect">
+            <a:avLst/>
+          </a:prstGeom>
+          <a:noFill/>
+        </p:spPr>
+        <p:txBody>
+          <a:bodyPr wrap="square" lIns="0" rIns="0" tIns="0" bIns="0" anchor="t">
+            <a:spAutoFit/>
+          </a:bodyPr>
+          <a:lstStyle/>
+          <a:p>
+            <a:pPr algn="l"/>
+            <a:r>
+              <a:rPr sz="1300" b="1" i="0">
+                <a:solidFill>
+                  <a:srgbClr val="1A1A2E"/>
+                </a:solidFill>
+                <a:latin typeface="Helvetica"/>
+              </a:rPr>
+              <a:t>v2 feedback  (with the fix)</a:t>
+            </a:r>
+          </a:p>
+        </p:txBody>
+      </p:sp>
+      <p:sp>
+        <p:nvSpPr>
+          <p:cNvPr id="14" name="TextBox 13"/>
+          <p:cNvSpPr txBox="1"/>
+          <p:nvPr/>
+        </p:nvSpPr>
+        <p:spPr>
+          <a:xfrm>
+            <a:off x="640080" y="3337560"/>
+            <a:ext cx="10972800" cy="457200"/>
+          </a:xfrm>
+          <a:prstGeom prst="rect">
+            <a:avLst/>
+          </a:prstGeom>
+          <a:noFill/>
+        </p:spPr>
+        <p:txBody>
+          <a:bodyPr wrap="square" lIns="0" rIns="0" tIns="0" bIns="0" anchor="t">
+            <a:spAutoFit/>
+          </a:bodyPr>
+          <a:lstStyle/>
+          <a:p>
+            <a:pPr algn="ctr"/>
+            <a:r>
+              <a:rPr sz="1800" b="1" i="0">
+                <a:solidFill>
+                  <a:srgbClr val="1F6FEB"/>
+                </a:solidFill>
+                <a:latin typeface="Helvetica"/>
+              </a:rPr>
+              <a:t>Same-checkpoint ablation  —  isolates causal contribution</a:t>
+            </a:r>
+          </a:p>
+        </p:txBody>
+      </p:sp>
+      <p:pic>
+        <p:nvPicPr>
+          <p:cNvPr id="15" name="Picture 14" descr="diag_ablation.png"/>
+          <p:cNvPicPr>
+            <a:picLocks noChangeAspect="1"/>
+          </p:cNvPicPr>
+          <p:nvPr/>
+        </p:nvPicPr>
+        <p:blipFill>
+          <a:blip r:embed="rId2"/>
+          <a:stretch>
+            <a:fillRect/>
+          </a:stretch>
+        </p:blipFill>
+        <p:spPr>
+          <a:xfrm>
+            <a:off x="2194560" y="3840480"/>
+            <a:ext cx="7772400" cy="2546658"/>
+          </a:xfrm>
+          <a:prstGeom prst="rect">
+            <a:avLst/>
+          </a:prstGeom>
+        </p:spPr>
+      </p:pic>
+      <p:sp>
+        <p:nvSpPr>
+          <p:cNvPr id="16" name="TextBox 15"/>
+          <p:cNvSpPr txBox="1"/>
+          <p:nvPr/>
+        </p:nvSpPr>
+        <p:spPr>
+          <a:xfrm>
+            <a:off x="640080" y="6080760"/>
+            <a:ext cx="10972800" cy="365760"/>
+          </a:xfrm>
+          <a:prstGeom prst="rect">
+            <a:avLst/>
+          </a:prstGeom>
+          <a:noFill/>
+        </p:spPr>
+        <p:txBody>
+          <a:bodyPr wrap="square" lIns="0" rIns="0" tIns="0" bIns="0" anchor="t">
+            <a:spAutoFit/>
+          </a:bodyPr>
+          <a:lstStyle/>
+          <a:p>
+            <a:pPr algn="ctr"/>
+            <a:r>
+              <a:rPr sz="1200" b="0" i="1">
+                <a:solidFill>
+                  <a:srgbClr val="666677"/>
+                </a:solidFill>
+                <a:latin typeface="Helvetica"/>
+              </a:rPr>
+              <a:t>Toggle feedback ON / OFF at inference. Identical weights, identical inputs.</a:t>
+            </a:r>
+          </a:p>
+        </p:txBody>
+      </p:sp>
+      <p:sp>
+        <p:nvSpPr>
+          <p:cNvPr id="17" name="TextBox 16"/>
           <p:cNvSpPr txBox="1"/>
           <p:nvPr/>
         </p:nvSpPr>
@@ -5430,14 +5601,14 @@
                 </a:solidFill>
                 <a:latin typeface="Helvetica"/>
               </a:rPr>
-              <a:t>5. Final Results  •  Feedback-Augmented RT-DETR  •  Hatem Saadallah &amp; Nour Jennane</a:t>
-            </a:r>
-          </a:p>
-        </p:txBody>
-      </p:sp>
-      <p:sp>
-        <p:nvSpPr>
-          <p:cNvPr id="7" name="TextBox 6"/>
+              <a:t>4. Evaluation Approach  •  Feedback-Augmented RT-DETR  •  Hatem Saadallah &amp; Nour Jennane</a:t>
+            </a:r>
+          </a:p>
+        </p:txBody>
+      </p:sp>
+      <p:sp>
+        <p:nvSpPr>
+          <p:cNvPr id="18" name="TextBox 17"/>
           <p:cNvSpPr txBox="1"/>
           <p:nvPr/>
         </p:nvSpPr>
@@ -5465,7 +5636,7 @@
                 </a:solidFill>
                 <a:latin typeface="Helvetica"/>
               </a:rPr>
-              <a:t>16 / 24</a:t>
+              <a:t>15 / 27</a:t>
             </a:r>
           </a:p>
         </p:txBody>
@@ -5496,8 +5667,8 @@
         </p:nvSpPr>
         <p:spPr>
           <a:xfrm>
-            <a:off x="640080" y="457200"/>
-            <a:ext cx="10972800" cy="822960"/>
+            <a:off x="731520" y="2377440"/>
+            <a:ext cx="10698480" cy="365760"/>
           </a:xfrm>
           <a:prstGeom prst="rect">
             <a:avLst/>
@@ -5512,13 +5683,13 @@
           <a:p>
             <a:pPr algn="l"/>
             <a:r>
-              <a:rPr sz="3400" b="1" i="0">
+              <a:rPr sz="1400" b="1" i="0">
                 <a:solidFill>
                   <a:srgbClr val="1F6FEB"/>
                 </a:solidFill>
                 <a:latin typeface="Helvetica"/>
               </a:rPr>
-              <a:t>Training: v2 climbs faster, ends higher</a:t>
+              <a:t>SECTION  5  /  5</a:t>
             </a:r>
           </a:p>
         </p:txBody>
@@ -5531,7 +5702,7 @@
         </p:nvSpPr>
         <p:spPr>
           <a:xfrm>
-            <a:off x="640080" y="1143000"/>
+            <a:off x="731520" y="2788920"/>
             <a:ext cx="640080" cy="54864"/>
           </a:xfrm>
           <a:prstGeom prst="rect">
@@ -5566,30 +5737,41 @@
           </a:p>
         </p:txBody>
       </p:sp>
-      <p:pic>
-        <p:nvPicPr>
-          <p:cNvPr id="4" name="Picture 3" descr="learning_curves.png"/>
-          <p:cNvPicPr>
-            <a:picLocks noChangeAspect="1"/>
-          </p:cNvPicPr>
-          <p:nvPr/>
-        </p:nvPicPr>
-        <p:blipFill>
-          <a:blip r:embed="rId2"/>
-          <a:stretch>
-            <a:fillRect/>
-          </a:stretch>
-        </p:blipFill>
-        <p:spPr>
-          <a:xfrm>
-            <a:off x="2194560" y="1463040"/>
-            <a:ext cx="7772400" cy="4718957"/>
-          </a:xfrm>
-          <a:prstGeom prst="rect">
-            <a:avLst/>
-          </a:prstGeom>
-        </p:spPr>
-      </p:pic>
+      <p:sp>
+        <p:nvSpPr>
+          <p:cNvPr id="4" name="TextBox 3"/>
+          <p:cNvSpPr txBox="1"/>
+          <p:nvPr/>
+        </p:nvSpPr>
+        <p:spPr>
+          <a:xfrm>
+            <a:off x="731520" y="2971800"/>
+            <a:ext cx="10698480" cy="1097280"/>
+          </a:xfrm>
+          <a:prstGeom prst="rect">
+            <a:avLst/>
+          </a:prstGeom>
+          <a:noFill/>
+        </p:spPr>
+        <p:txBody>
+          <a:bodyPr wrap="square" lIns="0" rIns="0" tIns="0" bIns="0" anchor="t">
+            <a:spAutoFit/>
+          </a:bodyPr>
+          <a:lstStyle/>
+          <a:p>
+            <a:pPr algn="l"/>
+            <a:r>
+              <a:rPr sz="5400" b="1" i="0">
+                <a:solidFill>
+                  <a:srgbClr val="1A1A2E"/>
+                </a:solidFill>
+                <a:latin typeface="Helvetica"/>
+              </a:rPr>
+              <a:t>Final Results</a:t>
+            </a:r>
+          </a:p>
+        </p:txBody>
+      </p:sp>
       <p:sp>
         <p:nvSpPr>
           <p:cNvPr id="5" name="TextBox 4"/>
@@ -5598,29 +5780,29 @@
         </p:nvSpPr>
         <p:spPr>
           <a:xfrm>
-            <a:off x="640080" y="5852160"/>
-            <a:ext cx="10972800" cy="365760"/>
-          </a:xfrm>
-          <a:prstGeom prst="rect">
-            <a:avLst/>
-          </a:prstGeom>
-          <a:noFill/>
-        </p:spPr>
-        <p:txBody>
-          <a:bodyPr wrap="square" lIns="0" rIns="0" tIns="0" bIns="0" anchor="t">
-            <a:spAutoFit/>
-          </a:bodyPr>
-          <a:lstStyle/>
-          <a:p>
-            <a:pPr algn="ctr"/>
-            <a:r>
-              <a:rPr sz="1400" b="0" i="1">
+            <a:off x="731520" y="4206240"/>
+            <a:ext cx="10698480" cy="548640"/>
+          </a:xfrm>
+          <a:prstGeom prst="rect">
+            <a:avLst/>
+          </a:prstGeom>
+          <a:noFill/>
+        </p:spPr>
+        <p:txBody>
+          <a:bodyPr wrap="square" lIns="0" rIns="0" tIns="0" bIns="0" anchor="t">
+            <a:spAutoFit/>
+          </a:bodyPr>
+          <a:lstStyle/>
+          <a:p>
+            <a:pPr algn="l"/>
+            <a:r>
+              <a:rPr sz="2000" b="0" i="1">
                 <a:solidFill>
                   <a:srgbClr val="666677"/>
                 </a:solidFill>
                 <a:latin typeface="Helvetica"/>
               </a:rPr>
-              <a:t>v2 first crosses v1's final 33.91 at epoch 8 — four epochs early.</a:t>
+              <a:t>Training trajectory, the causal effect, robustness, trade-offs, and what's next.</a:t>
             </a:r>
           </a:p>
         </p:txBody>
@@ -5690,7 +5872,7 @@
                 </a:solidFill>
                 <a:latin typeface="Helvetica"/>
               </a:rPr>
-              <a:t>17 / 24</a:t>
+              <a:t>16 / 27</a:t>
             </a:r>
           </a:p>
         </p:txBody>
@@ -5743,7 +5925,7 @@
                 </a:solidFill>
                 <a:latin typeface="Helvetica"/>
               </a:rPr>
-              <a:t>Final performance (with feedback ON)</a:t>
+              <a:t>Training: v2 climbs faster, ends higher</a:t>
             </a:r>
           </a:p>
         </p:txBody>
@@ -5791,83 +5973,61 @@
           </a:p>
         </p:txBody>
       </p:sp>
-      <p:sp>
-        <p:nvSpPr>
-          <p:cNvPr id="4" name="Rounded Rectangle 3"/>
-          <p:cNvSpPr/>
-          <p:nvPr/>
-        </p:nvSpPr>
-        <p:spPr>
-          <a:xfrm>
-            <a:off x="914400" y="2011680"/>
-            <a:ext cx="4846320" cy="3200400"/>
-          </a:xfrm>
-          <a:prstGeom prst="roundRect">
-            <a:avLst/>
-          </a:prstGeom>
-          <a:solidFill>
-            <a:srgbClr val="F5F5F7"/>
-          </a:solidFill>
-          <a:ln w="9525">
-            <a:solidFill>
-              <a:srgbClr val="666677"/>
-            </a:solidFill>
-          </a:ln>
-          <a:effectLst/>
-        </p:spPr>
-        <p:style>
-          <a:lnRef idx="1">
-            <a:schemeClr val="accent1"/>
-          </a:lnRef>
-          <a:fillRef idx="3">
-            <a:schemeClr val="accent1"/>
-          </a:fillRef>
-          <a:effectRef idx="2">
-            <a:schemeClr val="accent1"/>
-          </a:effectRef>
-          <a:fontRef idx="minor">
-            <a:schemeClr val="lt1"/>
-          </a:fontRef>
-        </p:style>
-        <p:txBody>
-          <a:bodyPr rtlCol="0" anchor="ctr"/>
+      <p:pic>
+        <p:nvPicPr>
+          <p:cNvPr id="4" name="Picture 3" descr="learning_curves.png"/>
+          <p:cNvPicPr>
+            <a:picLocks noChangeAspect="1"/>
+          </p:cNvPicPr>
+          <p:nvPr/>
+        </p:nvPicPr>
+        <p:blipFill>
+          <a:blip r:embed="rId2"/>
+          <a:stretch>
+            <a:fillRect/>
+          </a:stretch>
+        </p:blipFill>
+        <p:spPr>
+          <a:xfrm>
+            <a:off x="2194560" y="1463040"/>
+            <a:ext cx="7772400" cy="4718957"/>
+          </a:xfrm>
+          <a:prstGeom prst="rect">
+            <a:avLst/>
+          </a:prstGeom>
+        </p:spPr>
+      </p:pic>
+      <p:sp>
+        <p:nvSpPr>
+          <p:cNvPr id="5" name="TextBox 4"/>
+          <p:cNvSpPr txBox="1"/>
+          <p:nvPr/>
+        </p:nvSpPr>
+        <p:spPr>
+          <a:xfrm>
+            <a:off x="640080" y="5852160"/>
+            <a:ext cx="10972800" cy="365760"/>
+          </a:xfrm>
+          <a:prstGeom prst="rect">
+            <a:avLst/>
+          </a:prstGeom>
+          <a:noFill/>
+        </p:spPr>
+        <p:txBody>
+          <a:bodyPr wrap="square" lIns="0" rIns="0" tIns="0" bIns="0" anchor="t">
+            <a:spAutoFit/>
+          </a:bodyPr>
           <a:lstStyle/>
           <a:p>
             <a:pPr algn="ctr"/>
-          </a:p>
-        </p:txBody>
-      </p:sp>
-      <p:sp>
-        <p:nvSpPr>
-          <p:cNvPr id="5" name="TextBox 4"/>
-          <p:cNvSpPr txBox="1"/>
-          <p:nvPr/>
-        </p:nvSpPr>
-        <p:spPr>
-          <a:xfrm>
-            <a:off x="914400" y="2194560"/>
-            <a:ext cx="4846320" cy="457200"/>
-          </a:xfrm>
-          <a:prstGeom prst="rect">
-            <a:avLst/>
-          </a:prstGeom>
-          <a:noFill/>
-        </p:spPr>
-        <p:txBody>
-          <a:bodyPr wrap="square" lIns="0" rIns="0" tIns="0" bIns="0" anchor="t">
-            <a:spAutoFit/>
-          </a:bodyPr>
-          <a:lstStyle/>
-          <a:p>
-            <a:pPr algn="ctr"/>
-            <a:r>
-              <a:rPr sz="2400" b="0" i="0">
+            <a:r>
+              <a:rPr sz="1400" b="0" i="1">
                 <a:solidFill>
                   <a:srgbClr val="666677"/>
                 </a:solidFill>
                 <a:latin typeface="Helvetica"/>
               </a:rPr>
-              <a:t>v1</a:t>
+              <a:t>v2 first crosses v1's final 33.91 at epoch 8 — four epochs early.</a:t>
             </a:r>
           </a:p>
         </p:txBody>
@@ -5875,254 +6035,6 @@
       <p:sp>
         <p:nvSpPr>
           <p:cNvPr id="6" name="TextBox 5"/>
-          <p:cNvSpPr txBox="1"/>
-          <p:nvPr/>
-        </p:nvSpPr>
-        <p:spPr>
-          <a:xfrm>
-            <a:off x="914400" y="2697480"/>
-            <a:ext cx="4846320" cy="1828800"/>
-          </a:xfrm>
-          <a:prstGeom prst="rect">
-            <a:avLst/>
-          </a:prstGeom>
-          <a:noFill/>
-        </p:spPr>
-        <p:txBody>
-          <a:bodyPr wrap="square" lIns="0" rIns="0" tIns="0" bIns="0" anchor="t">
-            <a:spAutoFit/>
-          </a:bodyPr>
-          <a:lstStyle/>
-          <a:p>
-            <a:pPr algn="ctr"/>
-            <a:r>
-              <a:rPr sz="8800" b="1" i="0">
-                <a:solidFill>
-                  <a:srgbClr val="666677"/>
-                </a:solidFill>
-                <a:latin typeface="Helvetica"/>
-              </a:rPr>
-              <a:t>33.91</a:t>
-            </a:r>
-          </a:p>
-        </p:txBody>
-      </p:sp>
-      <p:sp>
-        <p:nvSpPr>
-          <p:cNvPr id="7" name="TextBox 6"/>
-          <p:cNvSpPr txBox="1"/>
-          <p:nvPr/>
-        </p:nvSpPr>
-        <p:spPr>
-          <a:xfrm>
-            <a:off x="914400" y="4572000"/>
-            <a:ext cx="4846320" cy="457200"/>
-          </a:xfrm>
-          <a:prstGeom prst="rect">
-            <a:avLst/>
-          </a:prstGeom>
-          <a:noFill/>
-        </p:spPr>
-        <p:txBody>
-          <a:bodyPr wrap="square" lIns="0" rIns="0" tIns="0" bIns="0" anchor="t">
-            <a:spAutoFit/>
-          </a:bodyPr>
-          <a:lstStyle/>
-          <a:p>
-            <a:pPr algn="ctr"/>
-            <a:r>
-              <a:rPr sz="1800" b="0" i="1">
-                <a:solidFill>
-                  <a:srgbClr val="666677"/>
-                </a:solidFill>
-                <a:latin typeface="Helvetica"/>
-              </a:rPr>
-              <a:t>AP</a:t>
-            </a:r>
-            <a:r>
-              <a:rPr sz="1800" b="0" i="1" baseline="-25000">
-                <a:solidFill>
-                  <a:srgbClr val="666677"/>
-                </a:solidFill>
-                <a:latin typeface="Helvetica"/>
-              </a:rPr>
-              <a:t>S</a:t>
-            </a:r>
-          </a:p>
-        </p:txBody>
-      </p:sp>
-      <p:sp>
-        <p:nvSpPr>
-          <p:cNvPr id="8" name="Rounded Rectangle 7"/>
-          <p:cNvSpPr/>
-          <p:nvPr/>
-        </p:nvSpPr>
-        <p:spPr>
-          <a:xfrm>
-            <a:off x="6400800" y="2011680"/>
-            <a:ext cx="4846320" cy="3200400"/>
-          </a:xfrm>
-          <a:prstGeom prst="roundRect">
-            <a:avLst/>
-          </a:prstGeom>
-          <a:solidFill>
-            <a:srgbClr val="E8F7E8"/>
-          </a:solidFill>
-          <a:ln w="25400">
-            <a:solidFill>
-              <a:srgbClr val="2CA02C"/>
-            </a:solidFill>
-          </a:ln>
-          <a:effectLst/>
-        </p:spPr>
-        <p:style>
-          <a:lnRef idx="1">
-            <a:schemeClr val="accent1"/>
-          </a:lnRef>
-          <a:fillRef idx="3">
-            <a:schemeClr val="accent1"/>
-          </a:fillRef>
-          <a:effectRef idx="2">
-            <a:schemeClr val="accent1"/>
-          </a:effectRef>
-          <a:fontRef idx="minor">
-            <a:schemeClr val="lt1"/>
-          </a:fontRef>
-        </p:style>
-        <p:txBody>
-          <a:bodyPr rtlCol="0" anchor="ctr"/>
-          <a:lstStyle/>
-          <a:p>
-            <a:pPr algn="ctr"/>
-          </a:p>
-        </p:txBody>
-      </p:sp>
-      <p:sp>
-        <p:nvSpPr>
-          <p:cNvPr id="9" name="TextBox 8"/>
-          <p:cNvSpPr txBox="1"/>
-          <p:nvPr/>
-        </p:nvSpPr>
-        <p:spPr>
-          <a:xfrm>
-            <a:off x="6400800" y="2194560"/>
-            <a:ext cx="4846320" cy="457200"/>
-          </a:xfrm>
-          <a:prstGeom prst="rect">
-            <a:avLst/>
-          </a:prstGeom>
-          <a:noFill/>
-        </p:spPr>
-        <p:txBody>
-          <a:bodyPr wrap="square" lIns="0" rIns="0" tIns="0" bIns="0" anchor="t">
-            <a:spAutoFit/>
-          </a:bodyPr>
-          <a:lstStyle/>
-          <a:p>
-            <a:pPr algn="ctr"/>
-            <a:r>
-              <a:rPr sz="2400" b="1" i="0">
-                <a:solidFill>
-                  <a:srgbClr val="2CA02C"/>
-                </a:solidFill>
-                <a:latin typeface="Helvetica"/>
-              </a:rPr>
-              <a:t>v2</a:t>
-            </a:r>
-          </a:p>
-        </p:txBody>
-      </p:sp>
-      <p:sp>
-        <p:nvSpPr>
-          <p:cNvPr id="10" name="TextBox 9"/>
-          <p:cNvSpPr txBox="1"/>
-          <p:nvPr/>
-        </p:nvSpPr>
-        <p:spPr>
-          <a:xfrm>
-            <a:off x="6400800" y="2697480"/>
-            <a:ext cx="4846320" cy="1828800"/>
-          </a:xfrm>
-          <a:prstGeom prst="rect">
-            <a:avLst/>
-          </a:prstGeom>
-          <a:noFill/>
-        </p:spPr>
-        <p:txBody>
-          <a:bodyPr wrap="square" lIns="0" rIns="0" tIns="0" bIns="0" anchor="t">
-            <a:spAutoFit/>
-          </a:bodyPr>
-          <a:lstStyle/>
-          <a:p>
-            <a:pPr algn="ctr"/>
-            <a:r>
-              <a:rPr sz="8800" b="1" i="0">
-                <a:solidFill>
-                  <a:srgbClr val="2CA02C"/>
-                </a:solidFill>
-                <a:latin typeface="Helvetica"/>
-              </a:rPr>
-              <a:t>34.30</a:t>
-            </a:r>
-          </a:p>
-        </p:txBody>
-      </p:sp>
-      <p:sp>
-        <p:nvSpPr>
-          <p:cNvPr id="11" name="TextBox 10"/>
-          <p:cNvSpPr txBox="1"/>
-          <p:nvPr/>
-        </p:nvSpPr>
-        <p:spPr>
-          <a:xfrm>
-            <a:off x="6400800" y="4572000"/>
-            <a:ext cx="4846320" cy="457200"/>
-          </a:xfrm>
-          <a:prstGeom prst="rect">
-            <a:avLst/>
-          </a:prstGeom>
-          <a:noFill/>
-        </p:spPr>
-        <p:txBody>
-          <a:bodyPr wrap="square" lIns="0" rIns="0" tIns="0" bIns="0" anchor="t">
-            <a:spAutoFit/>
-          </a:bodyPr>
-          <a:lstStyle/>
-          <a:p>
-            <a:pPr algn="ctr"/>
-            <a:r>
-              <a:rPr sz="1800" b="0" i="1">
-                <a:solidFill>
-                  <a:srgbClr val="2CA02C"/>
-                </a:solidFill>
-                <a:latin typeface="Helvetica"/>
-              </a:rPr>
-              <a:t>AP</a:t>
-            </a:r>
-            <a:r>
-              <a:rPr sz="1800" b="0" i="1" baseline="-25000">
-                <a:solidFill>
-                  <a:srgbClr val="2CA02C"/>
-                </a:solidFill>
-                <a:latin typeface="Helvetica"/>
-              </a:rPr>
-              <a:t>S</a:t>
-            </a:r>
-            <a:r>
-              <a:rPr sz="1800" b="0" i="1">
-                <a:solidFill>
-                  <a:srgbClr val="2CA02C"/>
-                </a:solidFill>
-                <a:latin typeface="Helvetica"/>
-              </a:rPr>
-              <a:t>    +0.4</a:t>
-            </a:r>
-          </a:p>
-        </p:txBody>
-      </p:sp>
-      <p:sp>
-        <p:nvSpPr>
-          <p:cNvPr id="12" name="TextBox 11"/>
           <p:cNvSpPr txBox="1"/>
           <p:nvPr/>
         </p:nvSpPr>
@@ -6157,7 +6069,7 @@
       </p:sp>
       <p:sp>
         <p:nvSpPr>
-          <p:cNvPr id="13" name="TextBox 12"/>
+          <p:cNvPr id="7" name="TextBox 6"/>
           <p:cNvSpPr txBox="1"/>
           <p:nvPr/>
         </p:nvSpPr>
@@ -6185,7 +6097,7 @@
                 </a:solidFill>
                 <a:latin typeface="Helvetica"/>
               </a:rPr>
-              <a:t>18 / 24</a:t>
+              <a:t>17 / 27</a:t>
             </a:r>
           </a:p>
         </p:txBody>
@@ -6238,7 +6150,7 @@
                 </a:solidFill>
                 <a:latin typeface="Helvetica"/>
               </a:rPr>
-              <a:t>Causal effect of feedback</a:t>
+              <a:t>Training: v2 climbs faster, ends higher</a:t>
             </a:r>
           </a:p>
         </p:txBody>
@@ -6286,16 +6198,40 @@
           </a:p>
         </p:txBody>
       </p:sp>
-      <p:sp>
-        <p:nvSpPr>
-          <p:cNvPr id="4" name="TextBox 3"/>
-          <p:cNvSpPr txBox="1"/>
-          <p:nvPr/>
-        </p:nvSpPr>
-        <p:spPr>
-          <a:xfrm>
-            <a:off x="640080" y="1828800"/>
-            <a:ext cx="3657600" cy="548640"/>
+      <p:pic>
+        <p:nvPicPr>
+          <p:cNvPr id="4" name="Picture 3" descr="learning_curves.png"/>
+          <p:cNvPicPr>
+            <a:picLocks noChangeAspect="1"/>
+          </p:cNvPicPr>
+          <p:nvPr/>
+        </p:nvPicPr>
+        <p:blipFill>
+          <a:blip r:embed="rId2"/>
+          <a:stretch>
+            <a:fillRect/>
+          </a:stretch>
+        </p:blipFill>
+        <p:spPr>
+          <a:xfrm>
+            <a:off x="2194560" y="1463040"/>
+            <a:ext cx="7772400" cy="4718957"/>
+          </a:xfrm>
+          <a:prstGeom prst="rect">
+            <a:avLst/>
+          </a:prstGeom>
+        </p:spPr>
+      </p:pic>
+      <p:sp>
+        <p:nvSpPr>
+          <p:cNvPr id="5" name="TextBox 4"/>
+          <p:cNvSpPr txBox="1"/>
+          <p:nvPr/>
+        </p:nvSpPr>
+        <p:spPr>
+          <a:xfrm>
+            <a:off x="640080" y="5852160"/>
+            <a:ext cx="10972800" cy="365760"/>
           </a:xfrm>
           <a:prstGeom prst="rect">
             <a:avLst/>
@@ -6310,118 +6246,92 @@
           <a:p>
             <a:pPr algn="ctr"/>
             <a:r>
-              <a:rPr sz="2400" b="0" i="0">
+              <a:rPr sz="1400" b="0" i="1">
                 <a:solidFill>
                   <a:srgbClr val="666677"/>
                 </a:solidFill>
                 <a:latin typeface="Helvetica"/>
               </a:rPr>
-              <a:t>ON</a:t>
-            </a:r>
-          </a:p>
-        </p:txBody>
-      </p:sp>
-      <p:sp>
-        <p:nvSpPr>
-          <p:cNvPr id="5" name="TextBox 4"/>
-          <p:cNvSpPr txBox="1"/>
-          <p:nvPr/>
-        </p:nvSpPr>
-        <p:spPr>
-          <a:xfrm>
-            <a:off x="640080" y="2468880"/>
-            <a:ext cx="3657600" cy="2011680"/>
-          </a:xfrm>
-          <a:prstGeom prst="rect">
-            <a:avLst/>
-          </a:prstGeom>
-          <a:noFill/>
-        </p:spPr>
-        <p:txBody>
-          <a:bodyPr wrap="square" lIns="0" rIns="0" tIns="0" bIns="0" anchor="t">
-            <a:spAutoFit/>
-          </a:bodyPr>
+              <a:t>v2 first crosses v1's final 33.91 at epoch 8 — four epochs early.</a:t>
+            </a:r>
+          </a:p>
+        </p:txBody>
+      </p:sp>
+      <p:sp>
+        <p:nvSpPr>
+          <p:cNvPr id="6" name="Oval 5"/>
+          <p:cNvSpPr/>
+          <p:nvPr/>
+        </p:nvSpPr>
+        <p:spPr>
+          <a:xfrm>
+            <a:off x="6355080" y="1691640"/>
+            <a:ext cx="777240" cy="640080"/>
+          </a:xfrm>
+          <a:prstGeom prst="ellipse">
+            <a:avLst/>
+          </a:prstGeom>
+          <a:noFill/>
+          <a:ln w="50800">
+            <a:solidFill>
+              <a:srgbClr val="2CA02C"/>
+            </a:solidFill>
+          </a:ln>
+          <a:effectLst/>
+        </p:spPr>
+        <p:style>
+          <a:lnRef idx="1">
+            <a:schemeClr val="accent1"/>
+          </a:lnRef>
+          <a:fillRef idx="3">
+            <a:schemeClr val="accent1"/>
+          </a:fillRef>
+          <a:effectRef idx="2">
+            <a:schemeClr val="accent1"/>
+          </a:effectRef>
+          <a:fontRef idx="minor">
+            <a:schemeClr val="lt1"/>
+          </a:fontRef>
+        </p:style>
+        <p:txBody>
+          <a:bodyPr rtlCol="0" anchor="ctr"/>
           <a:lstStyle/>
           <a:p>
             <a:pPr algn="ctr"/>
-            <a:r>
-              <a:rPr sz="11000" b="1" i="0">
+          </a:p>
+        </p:txBody>
+      </p:sp>
+      <p:sp>
+        <p:nvSpPr>
+          <p:cNvPr id="7" name="TextBox 6"/>
+          <p:cNvSpPr txBox="1"/>
+          <p:nvPr/>
+        </p:nvSpPr>
+        <p:spPr>
+          <a:xfrm>
+            <a:off x="6949440" y="2331720"/>
+            <a:ext cx="2743200" cy="365760"/>
+          </a:xfrm>
+          <a:prstGeom prst="rect">
+            <a:avLst/>
+          </a:prstGeom>
+          <a:noFill/>
+        </p:spPr>
+        <p:txBody>
+          <a:bodyPr wrap="square" lIns="0" rIns="0" tIns="0" bIns="0" anchor="t">
+            <a:spAutoFit/>
+          </a:bodyPr>
+          <a:lstStyle/>
+          <a:p>
+            <a:pPr algn="l"/>
+            <a:r>
+              <a:rPr sz="1400" b="1" i="0">
                 <a:solidFill>
                   <a:srgbClr val="2CA02C"/>
                 </a:solidFill>
                 <a:latin typeface="Helvetica"/>
               </a:rPr>
-              <a:t>34.25</a:t>
-            </a:r>
-          </a:p>
-        </p:txBody>
-      </p:sp>
-      <p:sp>
-        <p:nvSpPr>
-          <p:cNvPr id="6" name="TextBox 5"/>
-          <p:cNvSpPr txBox="1"/>
-          <p:nvPr/>
-        </p:nvSpPr>
-        <p:spPr>
-          <a:xfrm>
-            <a:off x="640080" y="4754880"/>
-            <a:ext cx="3657600" cy="457200"/>
-          </a:xfrm>
-          <a:prstGeom prst="rect">
-            <a:avLst/>
-          </a:prstGeom>
-          <a:noFill/>
-        </p:spPr>
-        <p:txBody>
-          <a:bodyPr wrap="square" lIns="0" rIns="0" tIns="0" bIns="0" anchor="t">
-            <a:spAutoFit/>
-          </a:bodyPr>
-          <a:lstStyle/>
-          <a:p>
-            <a:pPr algn="ctr"/>
-            <a:r>
-              <a:rPr sz="1400" b="0" i="1">
-                <a:solidFill>
-                  <a:srgbClr val="666677"/>
-                </a:solidFill>
-                <a:latin typeface="Helvetica"/>
-              </a:rPr>
-              <a:t>feedback enabled</a:t>
-            </a:r>
-          </a:p>
-        </p:txBody>
-      </p:sp>
-      <p:sp>
-        <p:nvSpPr>
-          <p:cNvPr id="7" name="TextBox 6"/>
-          <p:cNvSpPr txBox="1"/>
-          <p:nvPr/>
-        </p:nvSpPr>
-        <p:spPr>
-          <a:xfrm>
-            <a:off x="4434840" y="1828800"/>
-            <a:ext cx="3657600" cy="548640"/>
-          </a:xfrm>
-          <a:prstGeom prst="rect">
-            <a:avLst/>
-          </a:prstGeom>
-          <a:noFill/>
-        </p:spPr>
-        <p:txBody>
-          <a:bodyPr wrap="square" lIns="0" rIns="0" tIns="0" bIns="0" anchor="t">
-            <a:spAutoFit/>
-          </a:bodyPr>
-          <a:lstStyle/>
-          <a:p>
-            <a:pPr algn="ctr"/>
-            <a:r>
-              <a:rPr sz="2400" b="0" i="0">
-                <a:solidFill>
-                  <a:srgbClr val="666677"/>
-                </a:solidFill>
-                <a:latin typeface="Helvetica"/>
-              </a:rPr>
-              <a:t>OFF</a:t>
+              <a:t>v2 crosses here</a:t>
             </a:r>
           </a:p>
         </p:txBody>
@@ -6434,29 +6344,29 @@
         </p:nvSpPr>
         <p:spPr>
           <a:xfrm>
-            <a:off x="4434840" y="2468880"/>
-            <a:ext cx="3657600" cy="2011680"/>
-          </a:xfrm>
-          <a:prstGeom prst="rect">
-            <a:avLst/>
-          </a:prstGeom>
-          <a:noFill/>
-        </p:spPr>
-        <p:txBody>
-          <a:bodyPr wrap="square" lIns="0" rIns="0" tIns="0" bIns="0" anchor="t">
-            <a:spAutoFit/>
-          </a:bodyPr>
-          <a:lstStyle/>
-          <a:p>
-            <a:pPr algn="ctr"/>
-            <a:r>
-              <a:rPr sz="11000" b="1" i="0">
-                <a:solidFill>
-                  <a:srgbClr val="666677"/>
-                </a:solidFill>
-                <a:latin typeface="Helvetica"/>
-              </a:rPr>
-              <a:t>33.26</a:t>
+            <a:off x="6949440" y="2606040"/>
+            <a:ext cx="2743200" cy="365760"/>
+          </a:xfrm>
+          <a:prstGeom prst="rect">
+            <a:avLst/>
+          </a:prstGeom>
+          <a:noFill/>
+        </p:spPr>
+        <p:txBody>
+          <a:bodyPr wrap="square" lIns="0" rIns="0" tIns="0" bIns="0" anchor="t">
+            <a:spAutoFit/>
+          </a:bodyPr>
+          <a:lstStyle/>
+          <a:p>
+            <a:pPr algn="l"/>
+            <a:r>
+              <a:rPr sz="1200" b="0" i="1">
+                <a:solidFill>
+                  <a:srgbClr val="2CA02C"/>
+                </a:solidFill>
+                <a:latin typeface="Helvetica"/>
+              </a:rPr>
+              <a:t>at epoch 8 (4 early)</a:t>
             </a:r>
           </a:p>
         </p:txBody>
@@ -6464,181 +6374,6 @@
       <p:sp>
         <p:nvSpPr>
           <p:cNvPr id="9" name="TextBox 8"/>
-          <p:cNvSpPr txBox="1"/>
-          <p:nvPr/>
-        </p:nvSpPr>
-        <p:spPr>
-          <a:xfrm>
-            <a:off x="4434840" y="4754880"/>
-            <a:ext cx="3657600" cy="457200"/>
-          </a:xfrm>
-          <a:prstGeom prst="rect">
-            <a:avLst/>
-          </a:prstGeom>
-          <a:noFill/>
-        </p:spPr>
-        <p:txBody>
-          <a:bodyPr wrap="square" lIns="0" rIns="0" tIns="0" bIns="0" anchor="t">
-            <a:spAutoFit/>
-          </a:bodyPr>
-          <a:lstStyle/>
-          <a:p>
-            <a:pPr algn="ctr"/>
-            <a:r>
-              <a:rPr sz="1400" b="0" i="1">
-                <a:solidFill>
-                  <a:srgbClr val="666677"/>
-                </a:solidFill>
-                <a:latin typeface="Helvetica"/>
-              </a:rPr>
-              <a:t>feedback bypassed</a:t>
-            </a:r>
-          </a:p>
-        </p:txBody>
-      </p:sp>
-      <p:sp>
-        <p:nvSpPr>
-          <p:cNvPr id="10" name="TextBox 9"/>
-          <p:cNvSpPr txBox="1"/>
-          <p:nvPr/>
-        </p:nvSpPr>
-        <p:spPr>
-          <a:xfrm>
-            <a:off x="8229600" y="1828800"/>
-            <a:ext cx="3657600" cy="548640"/>
-          </a:xfrm>
-          <a:prstGeom prst="rect">
-            <a:avLst/>
-          </a:prstGeom>
-          <a:noFill/>
-        </p:spPr>
-        <p:txBody>
-          <a:bodyPr wrap="square" lIns="0" rIns="0" tIns="0" bIns="0" anchor="t">
-            <a:spAutoFit/>
-          </a:bodyPr>
-          <a:lstStyle/>
-          <a:p>
-            <a:pPr algn="ctr"/>
-            <a:r>
-              <a:rPr sz="2400" b="0" i="0">
-                <a:solidFill>
-                  <a:srgbClr val="666677"/>
-                </a:solidFill>
-                <a:latin typeface="Helvetica"/>
-              </a:rPr>
-              <a:t>Δ</a:t>
-            </a:r>
-          </a:p>
-        </p:txBody>
-      </p:sp>
-      <p:sp>
-        <p:nvSpPr>
-          <p:cNvPr id="11" name="TextBox 10"/>
-          <p:cNvSpPr txBox="1"/>
-          <p:nvPr/>
-        </p:nvSpPr>
-        <p:spPr>
-          <a:xfrm>
-            <a:off x="8229600" y="2468880"/>
-            <a:ext cx="3657600" cy="2011680"/>
-          </a:xfrm>
-          <a:prstGeom prst="rect">
-            <a:avLst/>
-          </a:prstGeom>
-          <a:noFill/>
-        </p:spPr>
-        <p:txBody>
-          <a:bodyPr wrap="square" lIns="0" rIns="0" tIns="0" bIns="0" anchor="t">
-            <a:spAutoFit/>
-          </a:bodyPr>
-          <a:lstStyle/>
-          <a:p>
-            <a:pPr algn="ctr"/>
-            <a:r>
-              <a:rPr sz="11000" b="1" i="0">
-                <a:solidFill>
-                  <a:srgbClr val="1F6FEB"/>
-                </a:solidFill>
-                <a:latin typeface="Helvetica"/>
-              </a:rPr>
-              <a:t>+0.99</a:t>
-            </a:r>
-          </a:p>
-        </p:txBody>
-      </p:sp>
-      <p:sp>
-        <p:nvSpPr>
-          <p:cNvPr id="12" name="TextBox 11"/>
-          <p:cNvSpPr txBox="1"/>
-          <p:nvPr/>
-        </p:nvSpPr>
-        <p:spPr>
-          <a:xfrm>
-            <a:off x="8229600" y="4754880"/>
-            <a:ext cx="3657600" cy="457200"/>
-          </a:xfrm>
-          <a:prstGeom prst="rect">
-            <a:avLst/>
-          </a:prstGeom>
-          <a:noFill/>
-        </p:spPr>
-        <p:txBody>
-          <a:bodyPr wrap="square" lIns="0" rIns="0" tIns="0" bIns="0" anchor="t">
-            <a:spAutoFit/>
-          </a:bodyPr>
-          <a:lstStyle/>
-          <a:p>
-            <a:pPr algn="ctr"/>
-            <a:r>
-              <a:rPr sz="1400" b="0" i="1">
-                <a:solidFill>
-                  <a:srgbClr val="666677"/>
-                </a:solidFill>
-                <a:latin typeface="Helvetica"/>
-              </a:rPr>
-              <a:t>the contribution</a:t>
-            </a:r>
-          </a:p>
-        </p:txBody>
-      </p:sp>
-      <p:sp>
-        <p:nvSpPr>
-          <p:cNvPr id="13" name="TextBox 12"/>
-          <p:cNvSpPr txBox="1"/>
-          <p:nvPr/>
-        </p:nvSpPr>
-        <p:spPr>
-          <a:xfrm>
-            <a:off x="640080" y="5669280"/>
-            <a:ext cx="10972800" cy="548640"/>
-          </a:xfrm>
-          <a:prstGeom prst="rect">
-            <a:avLst/>
-          </a:prstGeom>
-          <a:noFill/>
-        </p:spPr>
-        <p:txBody>
-          <a:bodyPr wrap="square" lIns="0" rIns="0" tIns="0" bIns="0" anchor="t">
-            <a:spAutoFit/>
-          </a:bodyPr>
-          <a:lstStyle/>
-          <a:p>
-            <a:pPr algn="ctr"/>
-            <a:r>
-              <a:rPr sz="2200" b="1" i="0">
-                <a:solidFill>
-                  <a:srgbClr val="1F6FEB"/>
-                </a:solidFill>
-                <a:latin typeface="Helvetica"/>
-              </a:rPr>
-              <a:t>Feedback has a real causal impact on small-object detection.</a:t>
-            </a:r>
-          </a:p>
-        </p:txBody>
-      </p:sp>
-      <p:sp>
-        <p:nvSpPr>
-          <p:cNvPr id="14" name="TextBox 13"/>
           <p:cNvSpPr txBox="1"/>
           <p:nvPr/>
         </p:nvSpPr>
@@ -6673,7 +6408,7 @@
       </p:sp>
       <p:sp>
         <p:nvSpPr>
-          <p:cNvPr id="15" name="TextBox 14"/>
+          <p:cNvPr id="10" name="TextBox 9"/>
           <p:cNvSpPr txBox="1"/>
           <p:nvPr/>
         </p:nvSpPr>
@@ -6701,7 +6436,7 @@
                 </a:solidFill>
                 <a:latin typeface="Helvetica"/>
               </a:rPr>
-              <a:t>19 / 24</a:t>
+              <a:t>18 / 27</a:t>
             </a:r>
           </a:p>
         </p:txBody>
@@ -6937,7 +6672,7 @@
                 </a:solidFill>
                 <a:latin typeface="Helvetica"/>
               </a:rPr>
-              <a:t>2 / 24</a:t>
+              <a:t>1 / 27</a:t>
             </a:r>
           </a:p>
         </p:txBody>
@@ -6990,7 +6725,7 @@
                 </a:solidFill>
                 <a:latin typeface="Helvetica"/>
               </a:rPr>
-              <a:t>Higher resolution → bigger gain</a:t>
+              <a:t>Final performance (with feedback ON)</a:t>
             </a:r>
           </a:p>
         </p:txBody>
@@ -7040,94 +6775,27 @@
       </p:sp>
       <p:sp>
         <p:nvSpPr>
-          <p:cNvPr id="4" name="TextBox 3"/>
-          <p:cNvSpPr txBox="1"/>
-          <p:nvPr/>
-        </p:nvSpPr>
-        <p:spPr>
-          <a:xfrm>
-            <a:off x="640080" y="2194560"/>
-            <a:ext cx="5303520" cy="457200"/>
-          </a:xfrm>
-          <a:prstGeom prst="rect">
-            <a:avLst/>
-          </a:prstGeom>
-          <a:noFill/>
-        </p:spPr>
-        <p:txBody>
-          <a:bodyPr wrap="square" lIns="0" rIns="0" tIns="0" bIns="0" anchor="t">
-            <a:spAutoFit/>
-          </a:bodyPr>
-          <a:lstStyle/>
-          <a:p>
-            <a:pPr algn="ctr"/>
-            <a:r>
-              <a:rPr sz="2200" b="0" i="0">
-                <a:solidFill>
-                  <a:srgbClr val="666677"/>
-                </a:solidFill>
-                <a:latin typeface="Helvetica"/>
-              </a:rPr>
-              <a:t>640 × 640</a:t>
-            </a:r>
-          </a:p>
-        </p:txBody>
-      </p:sp>
-      <p:sp>
-        <p:nvSpPr>
-          <p:cNvPr id="5" name="TextBox 4"/>
-          <p:cNvSpPr txBox="1"/>
-          <p:nvPr/>
-        </p:nvSpPr>
-        <p:spPr>
-          <a:xfrm>
-            <a:off x="640080" y="2743200"/>
-            <a:ext cx="5303520" cy="1828800"/>
-          </a:xfrm>
-          <a:prstGeom prst="rect">
-            <a:avLst/>
-          </a:prstGeom>
-          <a:noFill/>
-        </p:spPr>
-        <p:txBody>
-          <a:bodyPr wrap="square" lIns="0" rIns="0" tIns="0" bIns="0" anchor="t">
-            <a:spAutoFit/>
-          </a:bodyPr>
-          <a:lstStyle/>
-          <a:p>
-            <a:pPr algn="ctr"/>
-            <a:r>
-              <a:rPr sz="8800" b="1" i="0">
-                <a:solidFill>
-                  <a:srgbClr val="1A1A2E"/>
-                </a:solidFill>
-                <a:latin typeface="Helvetica"/>
-              </a:rPr>
-              <a:t>34.25</a:t>
-            </a:r>
-          </a:p>
-        </p:txBody>
-      </p:sp>
-      <p:sp>
-        <p:nvSpPr>
-          <p:cNvPr id="6" name="Right Arrow 5"/>
+          <p:cNvPr id="4" name="Rounded Rectangle 3"/>
           <p:cNvSpPr/>
           <p:nvPr/>
         </p:nvSpPr>
         <p:spPr>
           <a:xfrm>
-            <a:off x="5303520" y="3291840"/>
-            <a:ext cx="1554480" cy="548640"/>
-          </a:xfrm>
-          <a:prstGeom prst="rightArrow">
+            <a:off x="914400" y="2011680"/>
+            <a:ext cx="4846320" cy="3200400"/>
+          </a:xfrm>
+          <a:prstGeom prst="roundRect">
             <a:avLst/>
           </a:prstGeom>
           <a:solidFill>
-            <a:srgbClr val="1F6FEB"/>
+            <a:srgbClr val="F5F5F7"/>
           </a:solidFill>
-          <a:ln>
-            <a:noFill/>
+          <a:ln w="9525">
+            <a:solidFill>
+              <a:srgbClr val="666677"/>
+            </a:solidFill>
           </a:ln>
+          <a:effectLst/>
         </p:spPr>
         <p:style>
           <a:lnRef idx="1">
@@ -7153,14 +6821,84 @@
       </p:sp>
       <p:sp>
         <p:nvSpPr>
+          <p:cNvPr id="5" name="TextBox 4"/>
+          <p:cNvSpPr txBox="1"/>
+          <p:nvPr/>
+        </p:nvSpPr>
+        <p:spPr>
+          <a:xfrm>
+            <a:off x="914400" y="2194560"/>
+            <a:ext cx="4846320" cy="457200"/>
+          </a:xfrm>
+          <a:prstGeom prst="rect">
+            <a:avLst/>
+          </a:prstGeom>
+          <a:noFill/>
+        </p:spPr>
+        <p:txBody>
+          <a:bodyPr wrap="square" lIns="0" rIns="0" tIns="0" bIns="0" anchor="t">
+            <a:spAutoFit/>
+          </a:bodyPr>
+          <a:lstStyle/>
+          <a:p>
+            <a:pPr algn="ctr"/>
+            <a:r>
+              <a:rPr sz="2400" b="0" i="0">
+                <a:solidFill>
+                  <a:srgbClr val="666677"/>
+                </a:solidFill>
+                <a:latin typeface="Helvetica"/>
+              </a:rPr>
+              <a:t>v1</a:t>
+            </a:r>
+          </a:p>
+        </p:txBody>
+      </p:sp>
+      <p:sp>
+        <p:nvSpPr>
+          <p:cNvPr id="6" name="TextBox 5"/>
+          <p:cNvSpPr txBox="1"/>
+          <p:nvPr/>
+        </p:nvSpPr>
+        <p:spPr>
+          <a:xfrm>
+            <a:off x="914400" y="2697480"/>
+            <a:ext cx="4846320" cy="1828800"/>
+          </a:xfrm>
+          <a:prstGeom prst="rect">
+            <a:avLst/>
+          </a:prstGeom>
+          <a:noFill/>
+        </p:spPr>
+        <p:txBody>
+          <a:bodyPr wrap="square" lIns="0" rIns="0" tIns="0" bIns="0" anchor="t">
+            <a:spAutoFit/>
+          </a:bodyPr>
+          <a:lstStyle/>
+          <a:p>
+            <a:pPr algn="ctr"/>
+            <a:r>
+              <a:rPr sz="8800" b="1" i="0">
+                <a:solidFill>
+                  <a:srgbClr val="666677"/>
+                </a:solidFill>
+                <a:latin typeface="Helvetica"/>
+              </a:rPr>
+              <a:t>33.91</a:t>
+            </a:r>
+          </a:p>
+        </p:txBody>
+      </p:sp>
+      <p:sp>
+        <p:nvSpPr>
           <p:cNvPr id="7" name="TextBox 6"/>
           <p:cNvSpPr txBox="1"/>
           <p:nvPr/>
         </p:nvSpPr>
         <p:spPr>
           <a:xfrm>
-            <a:off x="6217920" y="2194560"/>
-            <a:ext cx="5303520" cy="457200"/>
+            <a:off x="914400" y="4572000"/>
+            <a:ext cx="4846320" cy="457200"/>
           </a:xfrm>
           <a:prstGeom prst="rect">
             <a:avLst/>
@@ -7175,40 +6913,130 @@
           <a:p>
             <a:pPr algn="ctr"/>
             <a:r>
-              <a:rPr sz="2200" b="1" i="0">
-                <a:solidFill>
-                  <a:srgbClr val="1F6FEB"/>
-                </a:solidFill>
-                <a:latin typeface="Helvetica"/>
-              </a:rPr>
-              <a:t>800 × 800</a:t>
-            </a:r>
-          </a:p>
-        </p:txBody>
-      </p:sp>
-      <p:sp>
-        <p:nvSpPr>
-          <p:cNvPr id="8" name="TextBox 7"/>
-          <p:cNvSpPr txBox="1"/>
-          <p:nvPr/>
-        </p:nvSpPr>
-        <p:spPr>
-          <a:xfrm>
-            <a:off x="6217920" y="2743200"/>
-            <a:ext cx="5303520" cy="1828800"/>
-          </a:xfrm>
-          <a:prstGeom prst="rect">
-            <a:avLst/>
-          </a:prstGeom>
-          <a:noFill/>
-        </p:spPr>
-        <p:txBody>
-          <a:bodyPr wrap="square" lIns="0" rIns="0" tIns="0" bIns="0" anchor="t">
-            <a:spAutoFit/>
-          </a:bodyPr>
+              <a:rPr sz="1800" b="0" i="1">
+                <a:solidFill>
+                  <a:srgbClr val="666677"/>
+                </a:solidFill>
+                <a:latin typeface="Helvetica"/>
+              </a:rPr>
+              <a:t>AP</a:t>
+            </a:r>
+            <a:r>
+              <a:rPr sz="1800" b="0" i="1" baseline="-25000">
+                <a:solidFill>
+                  <a:srgbClr val="666677"/>
+                </a:solidFill>
+                <a:latin typeface="Helvetica"/>
+              </a:rPr>
+              <a:t>S</a:t>
+            </a:r>
+          </a:p>
+        </p:txBody>
+      </p:sp>
+      <p:sp>
+        <p:nvSpPr>
+          <p:cNvPr id="8" name="Rounded Rectangle 7"/>
+          <p:cNvSpPr/>
+          <p:nvPr/>
+        </p:nvSpPr>
+        <p:spPr>
+          <a:xfrm>
+            <a:off x="6400800" y="2011680"/>
+            <a:ext cx="4846320" cy="3200400"/>
+          </a:xfrm>
+          <a:prstGeom prst="roundRect">
+            <a:avLst/>
+          </a:prstGeom>
+          <a:solidFill>
+            <a:srgbClr val="E8F7E8"/>
+          </a:solidFill>
+          <a:ln w="25400">
+            <a:solidFill>
+              <a:srgbClr val="2CA02C"/>
+            </a:solidFill>
+          </a:ln>
+          <a:effectLst/>
+        </p:spPr>
+        <p:style>
+          <a:lnRef idx="1">
+            <a:schemeClr val="accent1"/>
+          </a:lnRef>
+          <a:fillRef idx="3">
+            <a:schemeClr val="accent1"/>
+          </a:fillRef>
+          <a:effectRef idx="2">
+            <a:schemeClr val="accent1"/>
+          </a:effectRef>
+          <a:fontRef idx="minor">
+            <a:schemeClr val="lt1"/>
+          </a:fontRef>
+        </p:style>
+        <p:txBody>
+          <a:bodyPr rtlCol="0" anchor="ctr"/>
           <a:lstStyle/>
           <a:p>
             <a:pPr algn="ctr"/>
+          </a:p>
+        </p:txBody>
+      </p:sp>
+      <p:sp>
+        <p:nvSpPr>
+          <p:cNvPr id="9" name="TextBox 8"/>
+          <p:cNvSpPr txBox="1"/>
+          <p:nvPr/>
+        </p:nvSpPr>
+        <p:spPr>
+          <a:xfrm>
+            <a:off x="6400800" y="2194560"/>
+            <a:ext cx="4846320" cy="457200"/>
+          </a:xfrm>
+          <a:prstGeom prst="rect">
+            <a:avLst/>
+          </a:prstGeom>
+          <a:noFill/>
+        </p:spPr>
+        <p:txBody>
+          <a:bodyPr wrap="square" lIns="0" rIns="0" tIns="0" bIns="0" anchor="t">
+            <a:spAutoFit/>
+          </a:bodyPr>
+          <a:lstStyle/>
+          <a:p>
+            <a:pPr algn="ctr"/>
+            <a:r>
+              <a:rPr sz="2400" b="1" i="0">
+                <a:solidFill>
+                  <a:srgbClr val="2CA02C"/>
+                </a:solidFill>
+                <a:latin typeface="Helvetica"/>
+              </a:rPr>
+              <a:t>v2</a:t>
+            </a:r>
+          </a:p>
+        </p:txBody>
+      </p:sp>
+      <p:sp>
+        <p:nvSpPr>
+          <p:cNvPr id="10" name="TextBox 9"/>
+          <p:cNvSpPr txBox="1"/>
+          <p:nvPr/>
+        </p:nvSpPr>
+        <p:spPr>
+          <a:xfrm>
+            <a:off x="6400800" y="2697480"/>
+            <a:ext cx="4846320" cy="1828800"/>
+          </a:xfrm>
+          <a:prstGeom prst="rect">
+            <a:avLst/>
+          </a:prstGeom>
+          <a:noFill/>
+        </p:spPr>
+        <p:txBody>
+          <a:bodyPr wrap="square" lIns="0" rIns="0" tIns="0" bIns="0" anchor="t">
+            <a:spAutoFit/>
+          </a:bodyPr>
+          <a:lstStyle/>
+          <a:p>
+            <a:pPr algn="ctr"/>
             <a:r>
               <a:rPr sz="8800" b="1" i="0">
                 <a:solidFill>
@@ -7216,21 +7044,21 @@
                 </a:solidFill>
                 <a:latin typeface="Helvetica"/>
               </a:rPr>
-              <a:t>37.01</a:t>
-            </a:r>
-          </a:p>
-        </p:txBody>
-      </p:sp>
-      <p:sp>
-        <p:nvSpPr>
-          <p:cNvPr id="9" name="TextBox 8"/>
-          <p:cNvSpPr txBox="1"/>
-          <p:nvPr/>
-        </p:nvSpPr>
-        <p:spPr>
-          <a:xfrm>
-            <a:off x="640080" y="5120640"/>
-            <a:ext cx="10972800" cy="457200"/>
+              <a:t>34.30</a:t>
+            </a:r>
+          </a:p>
+        </p:txBody>
+      </p:sp>
+      <p:sp>
+        <p:nvSpPr>
+          <p:cNvPr id="11" name="TextBox 10"/>
+          <p:cNvSpPr txBox="1"/>
+          <p:nvPr/>
+        </p:nvSpPr>
+        <p:spPr>
+          <a:xfrm>
+            <a:off x="6400800" y="4572000"/>
+            <a:ext cx="4846320" cy="457200"/>
           </a:xfrm>
           <a:prstGeom prst="rect">
             <a:avLst/>
@@ -7245,55 +7073,38 @@
           <a:p>
             <a:pPr algn="ctr"/>
             <a:r>
-              <a:rPr sz="2200" b="0" i="1">
-                <a:solidFill>
-                  <a:srgbClr val="1A1A2E"/>
-                </a:solidFill>
-                <a:latin typeface="Helvetica"/>
-              </a:rPr>
-              <a:t>+2.76 from more pixels.</a:t>
-            </a:r>
-          </a:p>
-        </p:txBody>
-      </p:sp>
-      <p:sp>
-        <p:nvSpPr>
-          <p:cNvPr id="10" name="TextBox 9"/>
-          <p:cNvSpPr txBox="1"/>
-          <p:nvPr/>
-        </p:nvSpPr>
-        <p:spPr>
-          <a:xfrm>
-            <a:off x="640080" y="5669280"/>
-            <a:ext cx="10972800" cy="457200"/>
-          </a:xfrm>
-          <a:prstGeom prst="rect">
-            <a:avLst/>
-          </a:prstGeom>
-          <a:noFill/>
-        </p:spPr>
-        <p:txBody>
-          <a:bodyPr wrap="square" lIns="0" rIns="0" tIns="0" bIns="0" anchor="t">
-            <a:spAutoFit/>
-          </a:bodyPr>
-          <a:lstStyle/>
-          <a:p>
-            <a:pPr algn="ctr"/>
-            <a:r>
-              <a:rPr sz="1600" b="0" i="0">
-                <a:solidFill>
-                  <a:srgbClr val="666677"/>
-                </a:solidFill>
-                <a:latin typeface="Helvetica"/>
-              </a:rPr>
-              <a:t>Feedback helps. Spatial sampling helps too.</a:t>
-            </a:r>
-          </a:p>
-        </p:txBody>
-      </p:sp>
-      <p:sp>
-        <p:nvSpPr>
-          <p:cNvPr id="11" name="TextBox 10"/>
+              <a:rPr sz="1800" b="0" i="1">
+                <a:solidFill>
+                  <a:srgbClr val="2CA02C"/>
+                </a:solidFill>
+                <a:latin typeface="Helvetica"/>
+              </a:rPr>
+              <a:t>AP</a:t>
+            </a:r>
+            <a:r>
+              <a:rPr sz="1800" b="0" i="1" baseline="-25000">
+                <a:solidFill>
+                  <a:srgbClr val="2CA02C"/>
+                </a:solidFill>
+                <a:latin typeface="Helvetica"/>
+              </a:rPr>
+              <a:t>S</a:t>
+            </a:r>
+            <a:r>
+              <a:rPr sz="1800" b="0" i="1">
+                <a:solidFill>
+                  <a:srgbClr val="2CA02C"/>
+                </a:solidFill>
+                <a:latin typeface="Helvetica"/>
+              </a:rPr>
+              <a:t>    +0.4</a:t>
+            </a:r>
+          </a:p>
+        </p:txBody>
+      </p:sp>
+      <p:sp>
+        <p:nvSpPr>
+          <p:cNvPr id="12" name="TextBox 11"/>
           <p:cNvSpPr txBox="1"/>
           <p:nvPr/>
         </p:nvSpPr>
@@ -7328,7 +7139,7 @@
       </p:sp>
       <p:sp>
         <p:nvSpPr>
-          <p:cNvPr id="12" name="TextBox 11"/>
+          <p:cNvPr id="13" name="TextBox 12"/>
           <p:cNvSpPr txBox="1"/>
           <p:nvPr/>
         </p:nvSpPr>
@@ -7356,7 +7167,7 @@
                 </a:solidFill>
                 <a:latin typeface="Helvetica"/>
               </a:rPr>
-              <a:t>20 / 24</a:t>
+              <a:t>19 / 27</a:t>
             </a:r>
           </a:p>
         </p:txBody>
@@ -7409,7 +7220,7 @@
                 </a:solidFill>
                 <a:latin typeface="Helvetica"/>
               </a:rPr>
-              <a:t>Strengths and limitations</a:t>
+              <a:t>Causal effect of feedback</a:t>
             </a:r>
           </a:p>
         </p:txBody>
@@ -7459,47 +7270,36 @@
       </p:sp>
       <p:sp>
         <p:nvSpPr>
-          <p:cNvPr id="4" name="Rounded Rectangle 3"/>
-          <p:cNvSpPr/>
-          <p:nvPr/>
-        </p:nvSpPr>
-        <p:spPr>
-          <a:xfrm>
-            <a:off x="640080" y="1645920"/>
-            <a:ext cx="5394960" cy="4297680"/>
-          </a:xfrm>
-          <a:prstGeom prst="roundRect">
-            <a:avLst/>
-          </a:prstGeom>
-          <a:solidFill>
-            <a:srgbClr val="E8F7E8"/>
-          </a:solidFill>
-          <a:ln w="19050">
-            <a:solidFill>
-              <a:srgbClr val="2CA02C"/>
-            </a:solidFill>
-          </a:ln>
-          <a:effectLst/>
-        </p:spPr>
-        <p:style>
-          <a:lnRef idx="1">
-            <a:schemeClr val="accent1"/>
-          </a:lnRef>
-          <a:fillRef idx="3">
-            <a:schemeClr val="accent1"/>
-          </a:fillRef>
-          <a:effectRef idx="2">
-            <a:schemeClr val="accent1"/>
-          </a:effectRef>
-          <a:fontRef idx="minor">
-            <a:schemeClr val="lt1"/>
-          </a:fontRef>
-        </p:style>
-        <p:txBody>
-          <a:bodyPr rtlCol="0" anchor="ctr"/>
+          <p:cNvPr id="4" name="TextBox 3"/>
+          <p:cNvSpPr txBox="1"/>
+          <p:nvPr/>
+        </p:nvSpPr>
+        <p:spPr>
+          <a:xfrm>
+            <a:off x="640080" y="1828800"/>
+            <a:ext cx="3657600" cy="548640"/>
+          </a:xfrm>
+          <a:prstGeom prst="rect">
+            <a:avLst/>
+          </a:prstGeom>
+          <a:noFill/>
+        </p:spPr>
+        <p:txBody>
+          <a:bodyPr wrap="square" lIns="0" rIns="0" tIns="0" bIns="0" anchor="t">
+            <a:spAutoFit/>
+          </a:bodyPr>
           <a:lstStyle/>
           <a:p>
             <a:pPr algn="ctr"/>
+            <a:r>
+              <a:rPr sz="2400" b="0" i="0">
+                <a:solidFill>
+                  <a:srgbClr val="666677"/>
+                </a:solidFill>
+                <a:latin typeface="Helvetica"/>
+              </a:rPr>
+              <a:t>ON</a:t>
+            </a:r>
           </a:p>
         </p:txBody>
       </p:sp>
@@ -7511,320 +7311,309 @@
         </p:nvSpPr>
         <p:spPr>
           <a:xfrm>
-            <a:off x="822960" y="1828800"/>
-            <a:ext cx="5029200" cy="548640"/>
-          </a:xfrm>
-          <a:prstGeom prst="rect">
-            <a:avLst/>
-          </a:prstGeom>
-          <a:noFill/>
-        </p:spPr>
-        <p:txBody>
-          <a:bodyPr wrap="square" lIns="0" rIns="0" tIns="0" bIns="0" anchor="t">
-            <a:spAutoFit/>
-          </a:bodyPr>
-          <a:lstStyle/>
-          <a:p>
-            <a:pPr algn="l"/>
+            <a:off x="640080" y="2468880"/>
+            <a:ext cx="3657600" cy="2011680"/>
+          </a:xfrm>
+          <a:prstGeom prst="rect">
+            <a:avLst/>
+          </a:prstGeom>
+          <a:noFill/>
+        </p:spPr>
+        <p:txBody>
+          <a:bodyPr wrap="square" lIns="0" rIns="0" tIns="0" bIns="0" anchor="t">
+            <a:spAutoFit/>
+          </a:bodyPr>
+          <a:lstStyle/>
+          <a:p>
+            <a:pPr algn="ctr"/>
+            <a:r>
+              <a:rPr sz="11000" b="1" i="0">
+                <a:solidFill>
+                  <a:srgbClr val="2CA02C"/>
+                </a:solidFill>
+                <a:latin typeface="Helvetica"/>
+              </a:rPr>
+              <a:t>34.25</a:t>
+            </a:r>
+          </a:p>
+        </p:txBody>
+      </p:sp>
+      <p:sp>
+        <p:nvSpPr>
+          <p:cNvPr id="6" name="TextBox 5"/>
+          <p:cNvSpPr txBox="1"/>
+          <p:nvPr/>
+        </p:nvSpPr>
+        <p:spPr>
+          <a:xfrm>
+            <a:off x="640080" y="4754880"/>
+            <a:ext cx="3657600" cy="457200"/>
+          </a:xfrm>
+          <a:prstGeom prst="rect">
+            <a:avLst/>
+          </a:prstGeom>
+          <a:noFill/>
+        </p:spPr>
+        <p:txBody>
+          <a:bodyPr wrap="square" lIns="0" rIns="0" tIns="0" bIns="0" anchor="t">
+            <a:spAutoFit/>
+          </a:bodyPr>
+          <a:lstStyle/>
+          <a:p>
+            <a:pPr algn="ctr"/>
+            <a:r>
+              <a:rPr sz="1400" b="0" i="1">
+                <a:solidFill>
+                  <a:srgbClr val="666677"/>
+                </a:solidFill>
+                <a:latin typeface="Helvetica"/>
+              </a:rPr>
+              <a:t>feedback enabled</a:t>
+            </a:r>
+          </a:p>
+        </p:txBody>
+      </p:sp>
+      <p:sp>
+        <p:nvSpPr>
+          <p:cNvPr id="7" name="TextBox 6"/>
+          <p:cNvSpPr txBox="1"/>
+          <p:nvPr/>
+        </p:nvSpPr>
+        <p:spPr>
+          <a:xfrm>
+            <a:off x="4434840" y="1828800"/>
+            <a:ext cx="3657600" cy="548640"/>
+          </a:xfrm>
+          <a:prstGeom prst="rect">
+            <a:avLst/>
+          </a:prstGeom>
+          <a:noFill/>
+        </p:spPr>
+        <p:txBody>
+          <a:bodyPr wrap="square" lIns="0" rIns="0" tIns="0" bIns="0" anchor="t">
+            <a:spAutoFit/>
+          </a:bodyPr>
+          <a:lstStyle/>
+          <a:p>
+            <a:pPr algn="ctr"/>
+            <a:r>
+              <a:rPr sz="2400" b="0" i="0">
+                <a:solidFill>
+                  <a:srgbClr val="666677"/>
+                </a:solidFill>
+                <a:latin typeface="Helvetica"/>
+              </a:rPr>
+              <a:t>OFF</a:t>
+            </a:r>
+          </a:p>
+        </p:txBody>
+      </p:sp>
+      <p:sp>
+        <p:nvSpPr>
+          <p:cNvPr id="8" name="TextBox 7"/>
+          <p:cNvSpPr txBox="1"/>
+          <p:nvPr/>
+        </p:nvSpPr>
+        <p:spPr>
+          <a:xfrm>
+            <a:off x="4434840" y="2468880"/>
+            <a:ext cx="3657600" cy="2011680"/>
+          </a:xfrm>
+          <a:prstGeom prst="rect">
+            <a:avLst/>
+          </a:prstGeom>
+          <a:noFill/>
+        </p:spPr>
+        <p:txBody>
+          <a:bodyPr wrap="square" lIns="0" rIns="0" tIns="0" bIns="0" anchor="t">
+            <a:spAutoFit/>
+          </a:bodyPr>
+          <a:lstStyle/>
+          <a:p>
+            <a:pPr algn="ctr"/>
+            <a:r>
+              <a:rPr sz="11000" b="1" i="0">
+                <a:solidFill>
+                  <a:srgbClr val="666677"/>
+                </a:solidFill>
+                <a:latin typeface="Helvetica"/>
+              </a:rPr>
+              <a:t>33.26</a:t>
+            </a:r>
+          </a:p>
+        </p:txBody>
+      </p:sp>
+      <p:sp>
+        <p:nvSpPr>
+          <p:cNvPr id="9" name="TextBox 8"/>
+          <p:cNvSpPr txBox="1"/>
+          <p:nvPr/>
+        </p:nvSpPr>
+        <p:spPr>
+          <a:xfrm>
+            <a:off x="4434840" y="4754880"/>
+            <a:ext cx="3657600" cy="457200"/>
+          </a:xfrm>
+          <a:prstGeom prst="rect">
+            <a:avLst/>
+          </a:prstGeom>
+          <a:noFill/>
+        </p:spPr>
+        <p:txBody>
+          <a:bodyPr wrap="square" lIns="0" rIns="0" tIns="0" bIns="0" anchor="t">
+            <a:spAutoFit/>
+          </a:bodyPr>
+          <a:lstStyle/>
+          <a:p>
+            <a:pPr algn="ctr"/>
+            <a:r>
+              <a:rPr sz="1400" b="0" i="1">
+                <a:solidFill>
+                  <a:srgbClr val="666677"/>
+                </a:solidFill>
+                <a:latin typeface="Helvetica"/>
+              </a:rPr>
+              <a:t>feedback bypassed</a:t>
+            </a:r>
+          </a:p>
+        </p:txBody>
+      </p:sp>
+      <p:sp>
+        <p:nvSpPr>
+          <p:cNvPr id="10" name="TextBox 9"/>
+          <p:cNvSpPr txBox="1"/>
+          <p:nvPr/>
+        </p:nvSpPr>
+        <p:spPr>
+          <a:xfrm>
+            <a:off x="8229600" y="1828800"/>
+            <a:ext cx="3657600" cy="548640"/>
+          </a:xfrm>
+          <a:prstGeom prst="rect">
+            <a:avLst/>
+          </a:prstGeom>
+          <a:noFill/>
+        </p:spPr>
+        <p:txBody>
+          <a:bodyPr wrap="square" lIns="0" rIns="0" tIns="0" bIns="0" anchor="t">
+            <a:spAutoFit/>
+          </a:bodyPr>
+          <a:lstStyle/>
+          <a:p>
+            <a:pPr algn="ctr"/>
+            <a:r>
+              <a:rPr sz="2400" b="0" i="0">
+                <a:solidFill>
+                  <a:srgbClr val="666677"/>
+                </a:solidFill>
+                <a:latin typeface="Helvetica"/>
+              </a:rPr>
+              <a:t>Δ</a:t>
+            </a:r>
+          </a:p>
+        </p:txBody>
+      </p:sp>
+      <p:sp>
+        <p:nvSpPr>
+          <p:cNvPr id="11" name="TextBox 10"/>
+          <p:cNvSpPr txBox="1"/>
+          <p:nvPr/>
+        </p:nvSpPr>
+        <p:spPr>
+          <a:xfrm>
+            <a:off x="8229600" y="2468880"/>
+            <a:ext cx="3657600" cy="2011680"/>
+          </a:xfrm>
+          <a:prstGeom prst="rect">
+            <a:avLst/>
+          </a:prstGeom>
+          <a:noFill/>
+        </p:spPr>
+        <p:txBody>
+          <a:bodyPr wrap="square" lIns="0" rIns="0" tIns="0" bIns="0" anchor="t">
+            <a:spAutoFit/>
+          </a:bodyPr>
+          <a:lstStyle/>
+          <a:p>
+            <a:pPr algn="ctr"/>
+            <a:r>
+              <a:rPr sz="11000" b="1" i="0">
+                <a:solidFill>
+                  <a:srgbClr val="1F6FEB"/>
+                </a:solidFill>
+                <a:latin typeface="Helvetica"/>
+              </a:rPr>
+              <a:t>+0.99</a:t>
+            </a:r>
+          </a:p>
+        </p:txBody>
+      </p:sp>
+      <p:sp>
+        <p:nvSpPr>
+          <p:cNvPr id="12" name="TextBox 11"/>
+          <p:cNvSpPr txBox="1"/>
+          <p:nvPr/>
+        </p:nvSpPr>
+        <p:spPr>
+          <a:xfrm>
+            <a:off x="8229600" y="4754880"/>
+            <a:ext cx="3657600" cy="457200"/>
+          </a:xfrm>
+          <a:prstGeom prst="rect">
+            <a:avLst/>
+          </a:prstGeom>
+          <a:noFill/>
+        </p:spPr>
+        <p:txBody>
+          <a:bodyPr wrap="square" lIns="0" rIns="0" tIns="0" bIns="0" anchor="t">
+            <a:spAutoFit/>
+          </a:bodyPr>
+          <a:lstStyle/>
+          <a:p>
+            <a:pPr algn="ctr"/>
+            <a:r>
+              <a:rPr sz="1400" b="0" i="1">
+                <a:solidFill>
+                  <a:srgbClr val="666677"/>
+                </a:solidFill>
+                <a:latin typeface="Helvetica"/>
+              </a:rPr>
+              <a:t>the contribution</a:t>
+            </a:r>
+          </a:p>
+        </p:txBody>
+      </p:sp>
+      <p:sp>
+        <p:nvSpPr>
+          <p:cNvPr id="13" name="TextBox 12"/>
+          <p:cNvSpPr txBox="1"/>
+          <p:nvPr/>
+        </p:nvSpPr>
+        <p:spPr>
+          <a:xfrm>
+            <a:off x="640080" y="5669280"/>
+            <a:ext cx="10972800" cy="548640"/>
+          </a:xfrm>
+          <a:prstGeom prst="rect">
+            <a:avLst/>
+          </a:prstGeom>
+          <a:noFill/>
+        </p:spPr>
+        <p:txBody>
+          <a:bodyPr wrap="square" lIns="0" rIns="0" tIns="0" bIns="0" anchor="t">
+            <a:spAutoFit/>
+          </a:bodyPr>
+          <a:lstStyle/>
+          <a:p>
+            <a:pPr algn="ctr"/>
             <a:r>
               <a:rPr sz="2200" b="1" i="0">
                 <a:solidFill>
-                  <a:srgbClr val="2CA02C"/>
-                </a:solidFill>
-                <a:latin typeface="Helvetica"/>
-              </a:rPr>
-              <a:t>+  Strengths</a:t>
-            </a:r>
-          </a:p>
-        </p:txBody>
-      </p:sp>
-      <p:sp>
-        <p:nvSpPr>
-          <p:cNvPr id="6" name="TextBox 5"/>
-          <p:cNvSpPr txBox="1"/>
-          <p:nvPr/>
-        </p:nvSpPr>
-        <p:spPr>
-          <a:xfrm>
-            <a:off x="868680" y="2468880"/>
-            <a:ext cx="5029200" cy="731520"/>
-          </a:xfrm>
-          <a:prstGeom prst="rect">
-            <a:avLst/>
-          </a:prstGeom>
-          <a:noFill/>
-        </p:spPr>
-        <p:txBody>
-          <a:bodyPr wrap="square" lIns="0" rIns="0" tIns="0" bIns="0" anchor="t">
-            <a:spAutoFit/>
-          </a:bodyPr>
-          <a:lstStyle/>
-          <a:p>
-            <a:pPr algn="l"/>
-            <a:r>
-              <a:rPr sz="1400" b="0" i="0">
-                <a:solidFill>
-                  <a:srgbClr val="1A1A2E"/>
-                </a:solidFill>
-                <a:latin typeface="Helvetica"/>
-              </a:rPr>
-              <a:t>•  Causal contribution: +0.99 on small-object AP, same checkpoint.</a:t>
-            </a:r>
-          </a:p>
-        </p:txBody>
-      </p:sp>
-      <p:sp>
-        <p:nvSpPr>
-          <p:cNvPr id="7" name="TextBox 6"/>
-          <p:cNvSpPr txBox="1"/>
-          <p:nvPr/>
-        </p:nvSpPr>
-        <p:spPr>
-          <a:xfrm>
-            <a:off x="868680" y="3246120"/>
-            <a:ext cx="5029200" cy="731520"/>
-          </a:xfrm>
-          <a:prstGeom prst="rect">
-            <a:avLst/>
-          </a:prstGeom>
-          <a:noFill/>
-        </p:spPr>
-        <p:txBody>
-          <a:bodyPr wrap="square" lIns="0" rIns="0" tIns="0" bIns="0" anchor="t">
-            <a:spAutoFit/>
-          </a:bodyPr>
-          <a:lstStyle/>
-          <a:p>
-            <a:pPr algn="l"/>
-            <a:r>
-              <a:rPr sz="1400" b="0" i="0">
-                <a:solidFill>
-                  <a:srgbClr val="1A1A2E"/>
-                </a:solidFill>
-                <a:latin typeface="Helvetica"/>
-              </a:rPr>
-              <a:t>•  Zero new parameters relative to v1.</a:t>
-            </a:r>
-          </a:p>
-        </p:txBody>
-      </p:sp>
-      <p:sp>
-        <p:nvSpPr>
-          <p:cNvPr id="8" name="TextBox 7"/>
-          <p:cNvSpPr txBox="1"/>
-          <p:nvPr/>
-        </p:nvSpPr>
-        <p:spPr>
-          <a:xfrm>
-            <a:off x="868680" y="4023360"/>
-            <a:ext cx="5029200" cy="731520"/>
-          </a:xfrm>
-          <a:prstGeom prst="rect">
-            <a:avLst/>
-          </a:prstGeom>
-          <a:noFill/>
-        </p:spPr>
-        <p:txBody>
-          <a:bodyPr wrap="square" lIns="0" rIns="0" tIns="0" bIns="0" anchor="t">
-            <a:spAutoFit/>
-          </a:bodyPr>
-          <a:lstStyle/>
-          <a:p>
-            <a:pPr algn="l"/>
-            <a:r>
-              <a:rPr sz="1400" b="0" i="0">
-                <a:solidFill>
-                  <a:srgbClr val="1A1A2E"/>
-                </a:solidFill>
-                <a:latin typeface="Helvetica"/>
-              </a:rPr>
-              <a:t>•  Consistent improvement on every metric (AP, S, M, L).</a:t>
-            </a:r>
-          </a:p>
-        </p:txBody>
-      </p:sp>
-      <p:sp>
-        <p:nvSpPr>
-          <p:cNvPr id="9" name="TextBox 8"/>
-          <p:cNvSpPr txBox="1"/>
-          <p:nvPr/>
-        </p:nvSpPr>
-        <p:spPr>
-          <a:xfrm>
-            <a:off x="868680" y="4800600"/>
-            <a:ext cx="5029200" cy="731520"/>
-          </a:xfrm>
-          <a:prstGeom prst="rect">
-            <a:avLst/>
-          </a:prstGeom>
-          <a:noFill/>
-        </p:spPr>
-        <p:txBody>
-          <a:bodyPr wrap="square" lIns="0" rIns="0" tIns="0" bIns="0" anchor="t">
-            <a:spAutoFit/>
-          </a:bodyPr>
-          <a:lstStyle/>
-          <a:p>
-            <a:pPr algn="l"/>
-            <a:r>
-              <a:rPr sz="1400" b="0" i="0">
-                <a:solidFill>
-                  <a:srgbClr val="1A1A2E"/>
-                </a:solidFill>
-                <a:latin typeface="Helvetica"/>
-              </a:rPr>
-              <a:t>•  Robust at higher resolution (37.01 small-object AP at 800×800).</a:t>
-            </a:r>
-          </a:p>
-        </p:txBody>
-      </p:sp>
-      <p:sp>
-        <p:nvSpPr>
-          <p:cNvPr id="10" name="Rounded Rectangle 9"/>
-          <p:cNvSpPr/>
-          <p:nvPr/>
-        </p:nvSpPr>
-        <p:spPr>
-          <a:xfrm>
-            <a:off x="6217920" y="1645920"/>
-            <a:ext cx="5394960" cy="4297680"/>
-          </a:xfrm>
-          <a:prstGeom prst="roundRect">
-            <a:avLst/>
-          </a:prstGeom>
-          <a:solidFill>
-            <a:srgbClr val="FDECEC"/>
-          </a:solidFill>
-          <a:ln w="19050">
-            <a:solidFill>
-              <a:srgbClr val="D62C2E"/>
-            </a:solidFill>
-          </a:ln>
-          <a:effectLst/>
-        </p:spPr>
-        <p:style>
-          <a:lnRef idx="1">
-            <a:schemeClr val="accent1"/>
-          </a:lnRef>
-          <a:fillRef idx="3">
-            <a:schemeClr val="accent1"/>
-          </a:fillRef>
-          <a:effectRef idx="2">
-            <a:schemeClr val="accent1"/>
-          </a:effectRef>
-          <a:fontRef idx="minor">
-            <a:schemeClr val="lt1"/>
-          </a:fontRef>
-        </p:style>
-        <p:txBody>
-          <a:bodyPr rtlCol="0" anchor="ctr"/>
-          <a:lstStyle/>
-          <a:p>
-            <a:pPr algn="ctr"/>
-          </a:p>
-        </p:txBody>
-      </p:sp>
-      <p:sp>
-        <p:nvSpPr>
-          <p:cNvPr id="11" name="TextBox 10"/>
-          <p:cNvSpPr txBox="1"/>
-          <p:nvPr/>
-        </p:nvSpPr>
-        <p:spPr>
-          <a:xfrm>
-            <a:off x="6400800" y="1828800"/>
-            <a:ext cx="5029200" cy="548640"/>
-          </a:xfrm>
-          <a:prstGeom prst="rect">
-            <a:avLst/>
-          </a:prstGeom>
-          <a:noFill/>
-        </p:spPr>
-        <p:txBody>
-          <a:bodyPr wrap="square" lIns="0" rIns="0" tIns="0" bIns="0" anchor="t">
-            <a:spAutoFit/>
-          </a:bodyPr>
-          <a:lstStyle/>
-          <a:p>
-            <a:pPr algn="l"/>
-            <a:r>
-              <a:rPr sz="2200" b="1" i="0">
-                <a:solidFill>
-                  <a:srgbClr val="D62C2E"/>
-                </a:solidFill>
-                <a:latin typeface="Helvetica"/>
-              </a:rPr>
-              <a:t>−  Limitations</a:t>
-            </a:r>
-          </a:p>
-        </p:txBody>
-      </p:sp>
-      <p:sp>
-        <p:nvSpPr>
-          <p:cNvPr id="12" name="TextBox 11"/>
-          <p:cNvSpPr txBox="1"/>
-          <p:nvPr/>
-        </p:nvSpPr>
-        <p:spPr>
-          <a:xfrm>
-            <a:off x="6446520" y="2468880"/>
-            <a:ext cx="5029200" cy="731520"/>
-          </a:xfrm>
-          <a:prstGeom prst="rect">
-            <a:avLst/>
-          </a:prstGeom>
-          <a:noFill/>
-        </p:spPr>
-        <p:txBody>
-          <a:bodyPr wrap="square" lIns="0" rIns="0" tIns="0" bIns="0" anchor="t">
-            <a:spAutoFit/>
-          </a:bodyPr>
-          <a:lstStyle/>
-          <a:p>
-            <a:pPr algn="l"/>
-            <a:r>
-              <a:rPr sz="1400" b="0" i="0">
-                <a:solidFill>
-                  <a:srgbClr val="1A1A2E"/>
-                </a:solidFill>
-                <a:latin typeface="Helvetica"/>
-              </a:rPr>
-              <a:t>•  Single seed — multi-seed variance unmeasured.</a:t>
-            </a:r>
-          </a:p>
-        </p:txBody>
-      </p:sp>
-      <p:sp>
-        <p:nvSpPr>
-          <p:cNvPr id="13" name="TextBox 12"/>
-          <p:cNvSpPr txBox="1"/>
-          <p:nvPr/>
-        </p:nvSpPr>
-        <p:spPr>
-          <a:xfrm>
-            <a:off x="6446520" y="3246120"/>
-            <a:ext cx="5029200" cy="731520"/>
-          </a:xfrm>
-          <a:prstGeom prst="rect">
-            <a:avLst/>
-          </a:prstGeom>
-          <a:noFill/>
-        </p:spPr>
-        <p:txBody>
-          <a:bodyPr wrap="square" lIns="0" rIns="0" tIns="0" bIns="0" anchor="t">
-            <a:spAutoFit/>
-          </a:bodyPr>
-          <a:lstStyle/>
-          <a:p>
-            <a:pPr algn="l"/>
-            <a:r>
-              <a:rPr sz="1400" b="0" i="0">
-                <a:solidFill>
-                  <a:srgbClr val="1A1A2E"/>
-                </a:solidFill>
-                <a:latin typeface="Helvetica"/>
-              </a:rPr>
-              <a:t>•  13-epoch finetune (vs 72-epoch from scratch).</a:t>
+                  <a:srgbClr val="1F6FEB"/>
+                </a:solidFill>
+                <a:latin typeface="Helvetica"/>
+              </a:rPr>
+              <a:t>Feedback has a real causal impact on small-object detection.</a:t>
             </a:r>
           </a:p>
         </p:txBody>
@@ -7832,111 +7621,6 @@
       <p:sp>
         <p:nvSpPr>
           <p:cNvPr id="14" name="TextBox 13"/>
-          <p:cNvSpPr txBox="1"/>
-          <p:nvPr/>
-        </p:nvSpPr>
-        <p:spPr>
-          <a:xfrm>
-            <a:off x="6446520" y="4023360"/>
-            <a:ext cx="5029200" cy="731520"/>
-          </a:xfrm>
-          <a:prstGeom prst="rect">
-            <a:avLst/>
-          </a:prstGeom>
-          <a:noFill/>
-        </p:spPr>
-        <p:txBody>
-          <a:bodyPr wrap="square" lIns="0" rIns="0" tIns="0" bIns="0" anchor="t">
-            <a:spAutoFit/>
-          </a:bodyPr>
-          <a:lstStyle/>
-          <a:p>
-            <a:pPr algn="l"/>
-            <a:r>
-              <a:rPr sz="1400" b="0" i="0">
-                <a:solidFill>
-                  <a:srgbClr val="1A1A2E"/>
-                </a:solidFill>
-                <a:latin typeface="Helvetica"/>
-              </a:rPr>
-              <a:t>•  Floor and mask not isolated (a 2×2 ablation is missing).</a:t>
-            </a:r>
-          </a:p>
-        </p:txBody>
-      </p:sp>
-      <p:sp>
-        <p:nvSpPr>
-          <p:cNvPr id="15" name="TextBox 14"/>
-          <p:cNvSpPr txBox="1"/>
-          <p:nvPr/>
-        </p:nvSpPr>
-        <p:spPr>
-          <a:xfrm>
-            <a:off x="6446520" y="4800600"/>
-            <a:ext cx="5029200" cy="731520"/>
-          </a:xfrm>
-          <a:prstGeom prst="rect">
-            <a:avLst/>
-          </a:prstGeom>
-          <a:noFill/>
-        </p:spPr>
-        <p:txBody>
-          <a:bodyPr wrap="square" lIns="0" rIns="0" tIns="0" bIns="0" anchor="t">
-            <a:spAutoFit/>
-          </a:bodyPr>
-          <a:lstStyle/>
-          <a:p>
-            <a:pPr algn="l"/>
-            <a:r>
-              <a:rPr sz="1400" b="0" i="0">
-                <a:solidFill>
-                  <a:srgbClr val="1A1A2E"/>
-                </a:solidFill>
-                <a:latin typeface="Helvetica"/>
-              </a:rPr>
-              <a:t>•  ≈2× slower than baseline (53 → 26 FPS) — cost is the P2 level.</a:t>
-            </a:r>
-          </a:p>
-        </p:txBody>
-      </p:sp>
-      <p:sp>
-        <p:nvSpPr>
-          <p:cNvPr id="16" name="TextBox 15"/>
-          <p:cNvSpPr txBox="1"/>
-          <p:nvPr/>
-        </p:nvSpPr>
-        <p:spPr>
-          <a:xfrm>
-            <a:off x="640080" y="6080760"/>
-            <a:ext cx="10972800" cy="365760"/>
-          </a:xfrm>
-          <a:prstGeom prst="rect">
-            <a:avLst/>
-          </a:prstGeom>
-          <a:noFill/>
-        </p:spPr>
-        <p:txBody>
-          <a:bodyPr wrap="square" lIns="0" rIns="0" tIns="0" bIns="0" anchor="t">
-            <a:spAutoFit/>
-          </a:bodyPr>
-          <a:lstStyle/>
-          <a:p>
-            <a:pPr algn="ctr"/>
-            <a:r>
-              <a:rPr sz="1200" b="0" i="1">
-                <a:solidFill>
-                  <a:srgbClr val="666677"/>
-                </a:solidFill>
-                <a:latin typeface="Helvetica"/>
-              </a:rPr>
-              <a:t>Strong on accuracy; pays in inference speed. The next slide proposes a way to recover speed.</a:t>
-            </a:r>
-          </a:p>
-        </p:txBody>
-      </p:sp>
-      <p:sp>
-        <p:nvSpPr>
-          <p:cNvPr id="17" name="TextBox 16"/>
           <p:cNvSpPr txBox="1"/>
           <p:nvPr/>
         </p:nvSpPr>
@@ -7971,7 +7655,7 @@
       </p:sp>
       <p:sp>
         <p:nvSpPr>
-          <p:cNvPr id="18" name="TextBox 17"/>
+          <p:cNvPr id="15" name="TextBox 14"/>
           <p:cNvSpPr txBox="1"/>
           <p:nvPr/>
         </p:nvSpPr>
@@ -7999,7 +7683,7 @@
                 </a:solidFill>
                 <a:latin typeface="Helvetica"/>
               </a:rPr>
-              <a:t>21 / 24</a:t>
+              <a:t>20 / 27</a:t>
             </a:r>
           </a:p>
         </p:txBody>
@@ -8052,7 +7736,7 @@
                 </a:solidFill>
                 <a:latin typeface="Helvetica"/>
               </a:rPr>
-              <a:t>Future work: recovering inference speed</a:t>
+              <a:t>Causal effect of feedback</a:t>
             </a:r>
           </a:p>
         </p:txBody>
@@ -8108,8 +7792,8 @@
         </p:nvSpPr>
         <p:spPr>
           <a:xfrm>
-            <a:off x="640080" y="1417320"/>
-            <a:ext cx="10972800" cy="457200"/>
+            <a:off x="640080" y="1828800"/>
+            <a:ext cx="3657600" cy="548640"/>
           </a:xfrm>
           <a:prstGeom prst="rect">
             <a:avLst/>
@@ -8124,37 +7808,350 @@
           <a:p>
             <a:pPr algn="ctr"/>
             <a:r>
-              <a:rPr sz="1800" b="0" i="1">
-                <a:solidFill>
-                  <a:srgbClr val="1A1A2E"/>
-                </a:solidFill>
-                <a:latin typeface="Helvetica"/>
-              </a:rPr>
-              <a:t>The 2× slowdown comes from the P2 level, not the feedback module.</a:t>
-            </a:r>
-          </a:p>
-        </p:txBody>
-      </p:sp>
-      <p:sp>
-        <p:nvSpPr>
-          <p:cNvPr id="5" name="Rounded Rectangle 4"/>
+              <a:rPr sz="2400" b="0" i="0">
+                <a:solidFill>
+                  <a:srgbClr val="666677"/>
+                </a:solidFill>
+                <a:latin typeface="Helvetica"/>
+              </a:rPr>
+              <a:t>ON</a:t>
+            </a:r>
+          </a:p>
+        </p:txBody>
+      </p:sp>
+      <p:sp>
+        <p:nvSpPr>
+          <p:cNvPr id="5" name="TextBox 4"/>
+          <p:cNvSpPr txBox="1"/>
+          <p:nvPr/>
+        </p:nvSpPr>
+        <p:spPr>
+          <a:xfrm>
+            <a:off x="640080" y="2468880"/>
+            <a:ext cx="3657600" cy="2011680"/>
+          </a:xfrm>
+          <a:prstGeom prst="rect">
+            <a:avLst/>
+          </a:prstGeom>
+          <a:noFill/>
+        </p:spPr>
+        <p:txBody>
+          <a:bodyPr wrap="square" lIns="0" rIns="0" tIns="0" bIns="0" anchor="t">
+            <a:spAutoFit/>
+          </a:bodyPr>
+          <a:lstStyle/>
+          <a:p>
+            <a:pPr algn="ctr"/>
+            <a:r>
+              <a:rPr sz="11000" b="1" i="0">
+                <a:solidFill>
+                  <a:srgbClr val="2CA02C"/>
+                </a:solidFill>
+                <a:latin typeface="Helvetica"/>
+              </a:rPr>
+              <a:t>34.25</a:t>
+            </a:r>
+          </a:p>
+        </p:txBody>
+      </p:sp>
+      <p:sp>
+        <p:nvSpPr>
+          <p:cNvPr id="6" name="TextBox 5"/>
+          <p:cNvSpPr txBox="1"/>
+          <p:nvPr/>
+        </p:nvSpPr>
+        <p:spPr>
+          <a:xfrm>
+            <a:off x="640080" y="4754880"/>
+            <a:ext cx="3657600" cy="457200"/>
+          </a:xfrm>
+          <a:prstGeom prst="rect">
+            <a:avLst/>
+          </a:prstGeom>
+          <a:noFill/>
+        </p:spPr>
+        <p:txBody>
+          <a:bodyPr wrap="square" lIns="0" rIns="0" tIns="0" bIns="0" anchor="t">
+            <a:spAutoFit/>
+          </a:bodyPr>
+          <a:lstStyle/>
+          <a:p>
+            <a:pPr algn="ctr"/>
+            <a:r>
+              <a:rPr sz="1400" b="0" i="1">
+                <a:solidFill>
+                  <a:srgbClr val="666677"/>
+                </a:solidFill>
+                <a:latin typeface="Helvetica"/>
+              </a:rPr>
+              <a:t>feedback enabled</a:t>
+            </a:r>
+          </a:p>
+        </p:txBody>
+      </p:sp>
+      <p:sp>
+        <p:nvSpPr>
+          <p:cNvPr id="7" name="TextBox 6"/>
+          <p:cNvSpPr txBox="1"/>
+          <p:nvPr/>
+        </p:nvSpPr>
+        <p:spPr>
+          <a:xfrm>
+            <a:off x="4434840" y="1828800"/>
+            <a:ext cx="3657600" cy="548640"/>
+          </a:xfrm>
+          <a:prstGeom prst="rect">
+            <a:avLst/>
+          </a:prstGeom>
+          <a:noFill/>
+        </p:spPr>
+        <p:txBody>
+          <a:bodyPr wrap="square" lIns="0" rIns="0" tIns="0" bIns="0" anchor="t">
+            <a:spAutoFit/>
+          </a:bodyPr>
+          <a:lstStyle/>
+          <a:p>
+            <a:pPr algn="ctr"/>
+            <a:r>
+              <a:rPr sz="2400" b="0" i="0">
+                <a:solidFill>
+                  <a:srgbClr val="666677"/>
+                </a:solidFill>
+                <a:latin typeface="Helvetica"/>
+              </a:rPr>
+              <a:t>OFF</a:t>
+            </a:r>
+          </a:p>
+        </p:txBody>
+      </p:sp>
+      <p:sp>
+        <p:nvSpPr>
+          <p:cNvPr id="8" name="TextBox 7"/>
+          <p:cNvSpPr txBox="1"/>
+          <p:nvPr/>
+        </p:nvSpPr>
+        <p:spPr>
+          <a:xfrm>
+            <a:off x="4434840" y="2468880"/>
+            <a:ext cx="3657600" cy="2011680"/>
+          </a:xfrm>
+          <a:prstGeom prst="rect">
+            <a:avLst/>
+          </a:prstGeom>
+          <a:noFill/>
+        </p:spPr>
+        <p:txBody>
+          <a:bodyPr wrap="square" lIns="0" rIns="0" tIns="0" bIns="0" anchor="t">
+            <a:spAutoFit/>
+          </a:bodyPr>
+          <a:lstStyle/>
+          <a:p>
+            <a:pPr algn="ctr"/>
+            <a:r>
+              <a:rPr sz="11000" b="1" i="0">
+                <a:solidFill>
+                  <a:srgbClr val="666677"/>
+                </a:solidFill>
+                <a:latin typeface="Helvetica"/>
+              </a:rPr>
+              <a:t>33.26</a:t>
+            </a:r>
+          </a:p>
+        </p:txBody>
+      </p:sp>
+      <p:sp>
+        <p:nvSpPr>
+          <p:cNvPr id="9" name="TextBox 8"/>
+          <p:cNvSpPr txBox="1"/>
+          <p:nvPr/>
+        </p:nvSpPr>
+        <p:spPr>
+          <a:xfrm>
+            <a:off x="4434840" y="4754880"/>
+            <a:ext cx="3657600" cy="457200"/>
+          </a:xfrm>
+          <a:prstGeom prst="rect">
+            <a:avLst/>
+          </a:prstGeom>
+          <a:noFill/>
+        </p:spPr>
+        <p:txBody>
+          <a:bodyPr wrap="square" lIns="0" rIns="0" tIns="0" bIns="0" anchor="t">
+            <a:spAutoFit/>
+          </a:bodyPr>
+          <a:lstStyle/>
+          <a:p>
+            <a:pPr algn="ctr"/>
+            <a:r>
+              <a:rPr sz="1400" b="0" i="1">
+                <a:solidFill>
+                  <a:srgbClr val="666677"/>
+                </a:solidFill>
+                <a:latin typeface="Helvetica"/>
+              </a:rPr>
+              <a:t>feedback bypassed</a:t>
+            </a:r>
+          </a:p>
+        </p:txBody>
+      </p:sp>
+      <p:sp>
+        <p:nvSpPr>
+          <p:cNvPr id="10" name="TextBox 9"/>
+          <p:cNvSpPr txBox="1"/>
+          <p:nvPr/>
+        </p:nvSpPr>
+        <p:spPr>
+          <a:xfrm>
+            <a:off x="8229600" y="1828800"/>
+            <a:ext cx="3657600" cy="548640"/>
+          </a:xfrm>
+          <a:prstGeom prst="rect">
+            <a:avLst/>
+          </a:prstGeom>
+          <a:noFill/>
+        </p:spPr>
+        <p:txBody>
+          <a:bodyPr wrap="square" lIns="0" rIns="0" tIns="0" bIns="0" anchor="t">
+            <a:spAutoFit/>
+          </a:bodyPr>
+          <a:lstStyle/>
+          <a:p>
+            <a:pPr algn="ctr"/>
+            <a:r>
+              <a:rPr sz="2400" b="0" i="0">
+                <a:solidFill>
+                  <a:srgbClr val="666677"/>
+                </a:solidFill>
+                <a:latin typeface="Helvetica"/>
+              </a:rPr>
+              <a:t>Δ</a:t>
+            </a:r>
+          </a:p>
+        </p:txBody>
+      </p:sp>
+      <p:sp>
+        <p:nvSpPr>
+          <p:cNvPr id="11" name="TextBox 10"/>
+          <p:cNvSpPr txBox="1"/>
+          <p:nvPr/>
+        </p:nvSpPr>
+        <p:spPr>
+          <a:xfrm>
+            <a:off x="8229600" y="2468880"/>
+            <a:ext cx="3657600" cy="2011680"/>
+          </a:xfrm>
+          <a:prstGeom prst="rect">
+            <a:avLst/>
+          </a:prstGeom>
+          <a:noFill/>
+        </p:spPr>
+        <p:txBody>
+          <a:bodyPr wrap="square" lIns="0" rIns="0" tIns="0" bIns="0" anchor="t">
+            <a:spAutoFit/>
+          </a:bodyPr>
+          <a:lstStyle/>
+          <a:p>
+            <a:pPr algn="ctr"/>
+            <a:r>
+              <a:rPr sz="11000" b="1" i="0">
+                <a:solidFill>
+                  <a:srgbClr val="1F6FEB"/>
+                </a:solidFill>
+                <a:latin typeface="Helvetica"/>
+              </a:rPr>
+              <a:t>+0.99</a:t>
+            </a:r>
+          </a:p>
+        </p:txBody>
+      </p:sp>
+      <p:sp>
+        <p:nvSpPr>
+          <p:cNvPr id="12" name="TextBox 11"/>
+          <p:cNvSpPr txBox="1"/>
+          <p:nvPr/>
+        </p:nvSpPr>
+        <p:spPr>
+          <a:xfrm>
+            <a:off x="8229600" y="4754880"/>
+            <a:ext cx="3657600" cy="457200"/>
+          </a:xfrm>
+          <a:prstGeom prst="rect">
+            <a:avLst/>
+          </a:prstGeom>
+          <a:noFill/>
+        </p:spPr>
+        <p:txBody>
+          <a:bodyPr wrap="square" lIns="0" rIns="0" tIns="0" bIns="0" anchor="t">
+            <a:spAutoFit/>
+          </a:bodyPr>
+          <a:lstStyle/>
+          <a:p>
+            <a:pPr algn="ctr"/>
+            <a:r>
+              <a:rPr sz="1400" b="0" i="1">
+                <a:solidFill>
+                  <a:srgbClr val="666677"/>
+                </a:solidFill>
+                <a:latin typeface="Helvetica"/>
+              </a:rPr>
+              <a:t>the contribution</a:t>
+            </a:r>
+          </a:p>
+        </p:txBody>
+      </p:sp>
+      <p:sp>
+        <p:nvSpPr>
+          <p:cNvPr id="13" name="TextBox 12"/>
+          <p:cNvSpPr txBox="1"/>
+          <p:nvPr/>
+        </p:nvSpPr>
+        <p:spPr>
+          <a:xfrm>
+            <a:off x="640080" y="5669280"/>
+            <a:ext cx="10972800" cy="548640"/>
+          </a:xfrm>
+          <a:prstGeom prst="rect">
+            <a:avLst/>
+          </a:prstGeom>
+          <a:noFill/>
+        </p:spPr>
+        <p:txBody>
+          <a:bodyPr wrap="square" lIns="0" rIns="0" tIns="0" bIns="0" anchor="t">
+            <a:spAutoFit/>
+          </a:bodyPr>
+          <a:lstStyle/>
+          <a:p>
+            <a:pPr algn="ctr"/>
+            <a:r>
+              <a:rPr sz="2200" b="1" i="0">
+                <a:solidFill>
+                  <a:srgbClr val="1F6FEB"/>
+                </a:solidFill>
+                <a:latin typeface="Helvetica"/>
+              </a:rPr>
+              <a:t>Feedback has a real causal impact on small-object detection.</a:t>
+            </a:r>
+          </a:p>
+        </p:txBody>
+      </p:sp>
+      <p:sp>
+        <p:nvSpPr>
+          <p:cNvPr id="14" name="Oval 13"/>
           <p:cNvSpPr/>
           <p:nvPr/>
         </p:nvSpPr>
         <p:spPr>
           <a:xfrm>
-            <a:off x="640080" y="2194560"/>
-            <a:ext cx="3657600" cy="3657600"/>
-          </a:xfrm>
-          <a:prstGeom prst="roundRect">
-            <a:avLst/>
-          </a:prstGeom>
-          <a:solidFill>
-            <a:srgbClr val="F0F6FF"/>
-          </a:solidFill>
-          <a:ln w="15240">
+            <a:off x="8183879" y="2331720"/>
+            <a:ext cx="3611880" cy="2331720"/>
+          </a:xfrm>
+          <a:prstGeom prst="ellipse">
+            <a:avLst/>
+          </a:prstGeom>
+          <a:noFill/>
+          <a:ln w="63500">
             <a:solidFill>
-              <a:srgbClr val="1F6FEB"/>
+              <a:srgbClr val="2CA02C"/>
             </a:solidFill>
           </a:ln>
           <a:effectLst/>
@@ -8183,998 +8180,7 @@
       </p:sp>
       <p:sp>
         <p:nvSpPr>
-          <p:cNvPr id="6" name="Oval 5"/>
-          <p:cNvSpPr/>
-          <p:nvPr/>
-        </p:nvSpPr>
-        <p:spPr>
-          <a:xfrm>
-            <a:off x="822960" y="2331720"/>
-            <a:ext cx="457200" cy="457200"/>
-          </a:xfrm>
-          <a:prstGeom prst="ellipse">
-            <a:avLst/>
-          </a:prstGeom>
-          <a:solidFill>
-            <a:srgbClr val="1F6FEB"/>
-          </a:solidFill>
-          <a:ln>
-            <a:noFill/>
-          </a:ln>
-        </p:spPr>
-        <p:style>
-          <a:lnRef idx="1">
-            <a:schemeClr val="accent1"/>
-          </a:lnRef>
-          <a:fillRef idx="3">
-            <a:schemeClr val="accent1"/>
-          </a:fillRef>
-          <a:effectRef idx="2">
-            <a:schemeClr val="accent1"/>
-          </a:effectRef>
-          <a:fontRef idx="minor">
-            <a:schemeClr val="lt1"/>
-          </a:fontRef>
-        </p:style>
-        <p:txBody>
-          <a:bodyPr rtlCol="0" anchor="ctr"/>
-          <a:lstStyle/>
-          <a:p>
-            <a:pPr algn="ctr"/>
-          </a:p>
-        </p:txBody>
-      </p:sp>
-      <p:sp>
-        <p:nvSpPr>
-          <p:cNvPr id="7" name="TextBox 6"/>
-          <p:cNvSpPr txBox="1"/>
-          <p:nvPr/>
-        </p:nvSpPr>
-        <p:spPr>
-          <a:xfrm>
-            <a:off x="822960" y="2359152"/>
-            <a:ext cx="457200" cy="457200"/>
-          </a:xfrm>
-          <a:prstGeom prst="rect">
-            <a:avLst/>
-          </a:prstGeom>
-          <a:noFill/>
-        </p:spPr>
-        <p:txBody>
-          <a:bodyPr wrap="square" lIns="0" rIns="0" tIns="0" bIns="0" anchor="t">
-            <a:spAutoFit/>
-          </a:bodyPr>
-          <a:lstStyle/>
-          <a:p>
-            <a:pPr algn="ctr"/>
-            <a:r>
-              <a:rPr sz="1800" b="1" i="0">
-                <a:solidFill>
-                  <a:srgbClr val="FFFFFF"/>
-                </a:solidFill>
-                <a:latin typeface="Helvetica"/>
-              </a:rPr>
-              <a:t>1</a:t>
-            </a:r>
-          </a:p>
-        </p:txBody>
-      </p:sp>
-      <p:sp>
-        <p:nvSpPr>
-          <p:cNvPr id="8" name="TextBox 7"/>
-          <p:cNvSpPr txBox="1"/>
-          <p:nvPr/>
-        </p:nvSpPr>
-        <p:spPr>
-          <a:xfrm>
-            <a:off x="1417320" y="2331720"/>
-            <a:ext cx="2743200" cy="548640"/>
-          </a:xfrm>
-          <a:prstGeom prst="rect">
-            <a:avLst/>
-          </a:prstGeom>
-          <a:noFill/>
-        </p:spPr>
-        <p:txBody>
-          <a:bodyPr wrap="square" lIns="0" rIns="0" tIns="0" bIns="0" anchor="t">
-            <a:spAutoFit/>
-          </a:bodyPr>
-          <a:lstStyle/>
-          <a:p>
-            <a:pPr algn="l"/>
-            <a:r>
-              <a:rPr sz="1400" b="1" i="0">
-                <a:solidFill>
-                  <a:srgbClr val="1A1A2E"/>
-                </a:solidFill>
-                <a:latin typeface="Helvetica"/>
-              </a:rPr>
-              <a:t>Train with P2, infer without</a:t>
-            </a:r>
-          </a:p>
-        </p:txBody>
-      </p:sp>
-      <p:sp>
-        <p:nvSpPr>
-          <p:cNvPr id="9" name="TextBox 8"/>
-          <p:cNvSpPr txBox="1"/>
-          <p:nvPr/>
-        </p:nvSpPr>
-        <p:spPr>
-          <a:xfrm>
-            <a:off x="822960" y="2971800"/>
-            <a:ext cx="3291840" cy="365760"/>
-          </a:xfrm>
-          <a:prstGeom prst="rect">
-            <a:avLst/>
-          </a:prstGeom>
-          <a:noFill/>
-        </p:spPr>
-        <p:txBody>
-          <a:bodyPr wrap="square" lIns="0" rIns="0" tIns="0" bIns="0" anchor="t">
-            <a:spAutoFit/>
-          </a:bodyPr>
-          <a:lstStyle/>
-          <a:p>
-            <a:pPr algn="l"/>
-            <a:r>
-              <a:rPr sz="1000" b="1" i="1">
-                <a:solidFill>
-                  <a:srgbClr val="1F6FEB"/>
-                </a:solidFill>
-                <a:latin typeface="Helvetica"/>
-              </a:rPr>
-              <a:t>fastest path</a:t>
-            </a:r>
-          </a:p>
-        </p:txBody>
-      </p:sp>
-      <p:sp>
-        <p:nvSpPr>
-          <p:cNvPr id="10" name="TextBox 9"/>
-          <p:cNvSpPr txBox="1"/>
-          <p:nvPr/>
-        </p:nvSpPr>
-        <p:spPr>
-          <a:xfrm>
-            <a:off x="822960" y="3429000"/>
-            <a:ext cx="3291840" cy="365760"/>
-          </a:xfrm>
-          <a:prstGeom prst="rect">
-            <a:avLst/>
-          </a:prstGeom>
-          <a:noFill/>
-        </p:spPr>
-        <p:txBody>
-          <a:bodyPr wrap="square" lIns="0" rIns="0" tIns="0" bIns="0" anchor="t">
-            <a:spAutoFit/>
-          </a:bodyPr>
-          <a:lstStyle/>
-          <a:p>
-            <a:pPr algn="l"/>
-            <a:r>
-              <a:rPr sz="1100" b="1" i="0">
-                <a:solidFill>
-                  <a:srgbClr val="1F6FEB"/>
-                </a:solidFill>
-                <a:latin typeface="Helvetica"/>
-              </a:rPr>
-              <a:t>How</a:t>
-            </a:r>
-          </a:p>
-        </p:txBody>
-      </p:sp>
-      <p:sp>
-        <p:nvSpPr>
-          <p:cNvPr id="11" name="TextBox 10"/>
-          <p:cNvSpPr txBox="1"/>
-          <p:nvPr/>
-        </p:nvSpPr>
-        <p:spPr>
-          <a:xfrm>
-            <a:off x="822960" y="3749039"/>
-            <a:ext cx="3291840" cy="1280160"/>
-          </a:xfrm>
-          <a:prstGeom prst="rect">
-            <a:avLst/>
-          </a:prstGeom>
-          <a:noFill/>
-        </p:spPr>
-        <p:txBody>
-          <a:bodyPr wrap="square" lIns="0" rIns="0" tIns="0" bIns="0" anchor="t">
-            <a:spAutoFit/>
-          </a:bodyPr>
-          <a:lstStyle/>
-          <a:p>
-            <a:pPr algn="l"/>
-            <a:r>
-              <a:rPr sz="1100" b="0" i="0">
-                <a:solidFill>
-                  <a:srgbClr val="1A1A2E"/>
-                </a:solidFill>
-                <a:latin typeface="Helvetica"/>
-              </a:rPr>
-              <a:t>Use P2 during training to improve small-object learning, then remove it at inference.</a:t>
-            </a:r>
-          </a:p>
-        </p:txBody>
-      </p:sp>
-      <p:sp>
-        <p:nvSpPr>
-          <p:cNvPr id="12" name="TextBox 11"/>
-          <p:cNvSpPr txBox="1"/>
-          <p:nvPr/>
-        </p:nvSpPr>
-        <p:spPr>
-          <a:xfrm>
-            <a:off x="822960" y="4846320"/>
-            <a:ext cx="3291840" cy="365760"/>
-          </a:xfrm>
-          <a:prstGeom prst="rect">
-            <a:avLst/>
-          </a:prstGeom>
-          <a:noFill/>
-        </p:spPr>
-        <p:txBody>
-          <a:bodyPr wrap="square" lIns="0" rIns="0" tIns="0" bIns="0" anchor="t">
-            <a:spAutoFit/>
-          </a:bodyPr>
-          <a:lstStyle/>
-          <a:p>
-            <a:pPr algn="l"/>
-            <a:r>
-              <a:rPr sz="1100" b="1" i="0">
-                <a:solidFill>
-                  <a:srgbClr val="2CA02C"/>
-                </a:solidFill>
-                <a:latin typeface="Helvetica"/>
-              </a:rPr>
-              <a:t>Goal</a:t>
-            </a:r>
-          </a:p>
-        </p:txBody>
-      </p:sp>
-      <p:sp>
-        <p:nvSpPr>
-          <p:cNvPr id="13" name="TextBox 12"/>
-          <p:cNvSpPr txBox="1"/>
-          <p:nvPr/>
-        </p:nvSpPr>
-        <p:spPr>
-          <a:xfrm>
-            <a:off x="822960" y="5166360"/>
-            <a:ext cx="3291840" cy="1280160"/>
-          </a:xfrm>
-          <a:prstGeom prst="rect">
-            <a:avLst/>
-          </a:prstGeom>
-          <a:noFill/>
-        </p:spPr>
-        <p:txBody>
-          <a:bodyPr wrap="square" lIns="0" rIns="0" tIns="0" bIns="0" anchor="t">
-            <a:spAutoFit/>
-          </a:bodyPr>
-          <a:lstStyle/>
-          <a:p>
-            <a:pPr algn="l"/>
-            <a:r>
-              <a:rPr sz="1100" b="0" i="0">
-                <a:solidFill>
-                  <a:srgbClr val="1A1A2E"/>
-                </a:solidFill>
-                <a:latin typeface="Helvetica"/>
-              </a:rPr>
-              <a:t>Keep most of the +0.99 small-object AP gain without the P2 computational cost.</a:t>
-            </a:r>
-          </a:p>
-        </p:txBody>
-      </p:sp>
-      <p:sp>
-        <p:nvSpPr>
-          <p:cNvPr id="14" name="Rounded Rectangle 13"/>
-          <p:cNvSpPr/>
-          <p:nvPr/>
-        </p:nvSpPr>
-        <p:spPr>
-          <a:xfrm>
-            <a:off x="4434840" y="2194560"/>
-            <a:ext cx="3657600" cy="3657600"/>
-          </a:xfrm>
-          <a:prstGeom prst="roundRect">
-            <a:avLst/>
-          </a:prstGeom>
-          <a:solidFill>
-            <a:srgbClr val="F0F6FF"/>
-          </a:solidFill>
-          <a:ln w="15240">
-            <a:solidFill>
-              <a:srgbClr val="1F6FEB"/>
-            </a:solidFill>
-          </a:ln>
-          <a:effectLst/>
-        </p:spPr>
-        <p:style>
-          <a:lnRef idx="1">
-            <a:schemeClr val="accent1"/>
-          </a:lnRef>
-          <a:fillRef idx="3">
-            <a:schemeClr val="accent1"/>
-          </a:fillRef>
-          <a:effectRef idx="2">
-            <a:schemeClr val="accent1"/>
-          </a:effectRef>
-          <a:fontRef idx="minor">
-            <a:schemeClr val="lt1"/>
-          </a:fontRef>
-        </p:style>
-        <p:txBody>
-          <a:bodyPr rtlCol="0" anchor="ctr"/>
-          <a:lstStyle/>
-          <a:p>
-            <a:pPr algn="ctr"/>
-          </a:p>
-        </p:txBody>
-      </p:sp>
-      <p:sp>
-        <p:nvSpPr>
-          <p:cNvPr id="15" name="Oval 14"/>
-          <p:cNvSpPr/>
-          <p:nvPr/>
-        </p:nvSpPr>
-        <p:spPr>
-          <a:xfrm>
-            <a:off x="4617720" y="2331720"/>
-            <a:ext cx="457200" cy="457200"/>
-          </a:xfrm>
-          <a:prstGeom prst="ellipse">
-            <a:avLst/>
-          </a:prstGeom>
-          <a:solidFill>
-            <a:srgbClr val="1F6FEB"/>
-          </a:solidFill>
-          <a:ln>
-            <a:noFill/>
-          </a:ln>
-        </p:spPr>
-        <p:style>
-          <a:lnRef idx="1">
-            <a:schemeClr val="accent1"/>
-          </a:lnRef>
-          <a:fillRef idx="3">
-            <a:schemeClr val="accent1"/>
-          </a:fillRef>
-          <a:effectRef idx="2">
-            <a:schemeClr val="accent1"/>
-          </a:effectRef>
-          <a:fontRef idx="minor">
-            <a:schemeClr val="lt1"/>
-          </a:fontRef>
-        </p:style>
-        <p:txBody>
-          <a:bodyPr rtlCol="0" anchor="ctr"/>
-          <a:lstStyle/>
-          <a:p>
-            <a:pPr algn="ctr"/>
-          </a:p>
-        </p:txBody>
-      </p:sp>
-      <p:sp>
-        <p:nvSpPr>
-          <p:cNvPr id="16" name="TextBox 15"/>
-          <p:cNvSpPr txBox="1"/>
-          <p:nvPr/>
-        </p:nvSpPr>
-        <p:spPr>
-          <a:xfrm>
-            <a:off x="4617720" y="2359152"/>
-            <a:ext cx="457200" cy="457200"/>
-          </a:xfrm>
-          <a:prstGeom prst="rect">
-            <a:avLst/>
-          </a:prstGeom>
-          <a:noFill/>
-        </p:spPr>
-        <p:txBody>
-          <a:bodyPr wrap="square" lIns="0" rIns="0" tIns="0" bIns="0" anchor="t">
-            <a:spAutoFit/>
-          </a:bodyPr>
-          <a:lstStyle/>
-          <a:p>
-            <a:pPr algn="ctr"/>
-            <a:r>
-              <a:rPr sz="1800" b="1" i="0">
-                <a:solidFill>
-                  <a:srgbClr val="FFFFFF"/>
-                </a:solidFill>
-                <a:latin typeface="Helvetica"/>
-              </a:rPr>
-              <a:t>2</a:t>
-            </a:r>
-          </a:p>
-        </p:txBody>
-      </p:sp>
-      <p:sp>
-        <p:nvSpPr>
-          <p:cNvPr id="17" name="TextBox 16"/>
-          <p:cNvSpPr txBox="1"/>
-          <p:nvPr/>
-        </p:nvSpPr>
-        <p:spPr>
-          <a:xfrm>
-            <a:off x="5212080" y="2331720"/>
-            <a:ext cx="2743200" cy="548640"/>
-          </a:xfrm>
-          <a:prstGeom prst="rect">
-            <a:avLst/>
-          </a:prstGeom>
-          <a:noFill/>
-        </p:spPr>
-        <p:txBody>
-          <a:bodyPr wrap="square" lIns="0" rIns="0" tIns="0" bIns="0" anchor="t">
-            <a:spAutoFit/>
-          </a:bodyPr>
-          <a:lstStyle/>
-          <a:p>
-            <a:pPr algn="l"/>
-            <a:r>
-              <a:rPr sz="1400" b="1" i="0">
-                <a:solidFill>
-                  <a:srgbClr val="1A1A2E"/>
-                </a:solidFill>
-                <a:latin typeface="Helvetica"/>
-              </a:rPr>
-              <a:t>Lighter P2 path</a:t>
-            </a:r>
-          </a:p>
-        </p:txBody>
-      </p:sp>
-      <p:sp>
-        <p:nvSpPr>
-          <p:cNvPr id="18" name="TextBox 17"/>
-          <p:cNvSpPr txBox="1"/>
-          <p:nvPr/>
-        </p:nvSpPr>
-        <p:spPr>
-          <a:xfrm>
-            <a:off x="4617720" y="2971800"/>
-            <a:ext cx="3291840" cy="365760"/>
-          </a:xfrm>
-          <a:prstGeom prst="rect">
-            <a:avLst/>
-          </a:prstGeom>
-          <a:noFill/>
-        </p:spPr>
-        <p:txBody>
-          <a:bodyPr wrap="square" lIns="0" rIns="0" tIns="0" bIns="0" anchor="t">
-            <a:spAutoFit/>
-          </a:bodyPr>
-          <a:lstStyle/>
-          <a:p>
-            <a:pPr algn="l"/>
-            <a:r>
-              <a:rPr sz="1000" b="1" i="1">
-                <a:solidFill>
-                  <a:srgbClr val="1F6FEB"/>
-                </a:solidFill>
-                <a:latin typeface="Helvetica"/>
-              </a:rPr>
-              <a:t>compromise</a:t>
-            </a:r>
-          </a:p>
-        </p:txBody>
-      </p:sp>
-      <p:sp>
-        <p:nvSpPr>
-          <p:cNvPr id="19" name="TextBox 18"/>
-          <p:cNvSpPr txBox="1"/>
-          <p:nvPr/>
-        </p:nvSpPr>
-        <p:spPr>
-          <a:xfrm>
-            <a:off x="4617720" y="3429000"/>
-            <a:ext cx="3291840" cy="365760"/>
-          </a:xfrm>
-          <a:prstGeom prst="rect">
-            <a:avLst/>
-          </a:prstGeom>
-          <a:noFill/>
-        </p:spPr>
-        <p:txBody>
-          <a:bodyPr wrap="square" lIns="0" rIns="0" tIns="0" bIns="0" anchor="t">
-            <a:spAutoFit/>
-          </a:bodyPr>
-          <a:lstStyle/>
-          <a:p>
-            <a:pPr algn="l"/>
-            <a:r>
-              <a:rPr sz="1100" b="1" i="0">
-                <a:solidFill>
-                  <a:srgbClr val="1F6FEB"/>
-                </a:solidFill>
-                <a:latin typeface="Helvetica"/>
-              </a:rPr>
-              <a:t>How</a:t>
-            </a:r>
-          </a:p>
-        </p:txBody>
-      </p:sp>
-      <p:sp>
-        <p:nvSpPr>
-          <p:cNvPr id="20" name="TextBox 19"/>
-          <p:cNvSpPr txBox="1"/>
-          <p:nvPr/>
-        </p:nvSpPr>
-        <p:spPr>
-          <a:xfrm>
-            <a:off x="4617720" y="3749039"/>
-            <a:ext cx="3291840" cy="1280160"/>
-          </a:xfrm>
-          <a:prstGeom prst="rect">
-            <a:avLst/>
-          </a:prstGeom>
-          <a:noFill/>
-        </p:spPr>
-        <p:txBody>
-          <a:bodyPr wrap="square" lIns="0" rIns="0" tIns="0" bIns="0" anchor="t">
-            <a:spAutoFit/>
-          </a:bodyPr>
-          <a:lstStyle/>
-          <a:p>
-            <a:pPr algn="l"/>
-            <a:r>
-              <a:rPr sz="1100" b="0" i="0">
-                <a:solidFill>
-                  <a:srgbClr val="1A1A2E"/>
-                </a:solidFill>
-                <a:latin typeface="Helvetica"/>
-              </a:rPr>
-              <a:t>Reduce the cost of P2 — fewer channels, or a simpler projection layer.</a:t>
-            </a:r>
-          </a:p>
-        </p:txBody>
-      </p:sp>
-      <p:sp>
-        <p:nvSpPr>
-          <p:cNvPr id="21" name="TextBox 20"/>
-          <p:cNvSpPr txBox="1"/>
-          <p:nvPr/>
-        </p:nvSpPr>
-        <p:spPr>
-          <a:xfrm>
-            <a:off x="4617720" y="4846320"/>
-            <a:ext cx="3291840" cy="365760"/>
-          </a:xfrm>
-          <a:prstGeom prst="rect">
-            <a:avLst/>
-          </a:prstGeom>
-          <a:noFill/>
-        </p:spPr>
-        <p:txBody>
-          <a:bodyPr wrap="square" lIns="0" rIns="0" tIns="0" bIns="0" anchor="t">
-            <a:spAutoFit/>
-          </a:bodyPr>
-          <a:lstStyle/>
-          <a:p>
-            <a:pPr algn="l"/>
-            <a:r>
-              <a:rPr sz="1100" b="1" i="0">
-                <a:solidFill>
-                  <a:srgbClr val="2CA02C"/>
-                </a:solidFill>
-                <a:latin typeface="Helvetica"/>
-              </a:rPr>
-              <a:t>Goal</a:t>
-            </a:r>
-          </a:p>
-        </p:txBody>
-      </p:sp>
-      <p:sp>
-        <p:nvSpPr>
-          <p:cNvPr id="22" name="TextBox 21"/>
-          <p:cNvSpPr txBox="1"/>
-          <p:nvPr/>
-        </p:nvSpPr>
-        <p:spPr>
-          <a:xfrm>
-            <a:off x="4617720" y="5166360"/>
-            <a:ext cx="3291840" cy="1280160"/>
-          </a:xfrm>
-          <a:prstGeom prst="rect">
-            <a:avLst/>
-          </a:prstGeom>
-          <a:noFill/>
-        </p:spPr>
-        <p:txBody>
-          <a:bodyPr wrap="square" lIns="0" rIns="0" tIns="0" bIns="0" anchor="t">
-            <a:spAutoFit/>
-          </a:bodyPr>
-          <a:lstStyle/>
-          <a:p>
-            <a:pPr algn="l"/>
-            <a:r>
-              <a:rPr sz="1100" b="0" i="0">
-                <a:solidFill>
-                  <a:srgbClr val="1A1A2E"/>
-                </a:solidFill>
-                <a:latin typeface="Helvetica"/>
-              </a:rPr>
-              <a:t>Preserve small-object improvements while reducing the high-resolution P2 slowdown.</a:t>
-            </a:r>
-          </a:p>
-        </p:txBody>
-      </p:sp>
-      <p:sp>
-        <p:nvSpPr>
-          <p:cNvPr id="23" name="Rounded Rectangle 22"/>
-          <p:cNvSpPr/>
-          <p:nvPr/>
-        </p:nvSpPr>
-        <p:spPr>
-          <a:xfrm>
-            <a:off x="8229600" y="2194560"/>
-            <a:ext cx="3657600" cy="3657600"/>
-          </a:xfrm>
-          <a:prstGeom prst="roundRect">
-            <a:avLst/>
-          </a:prstGeom>
-          <a:solidFill>
-            <a:srgbClr val="F0F6FF"/>
-          </a:solidFill>
-          <a:ln w="15240">
-            <a:solidFill>
-              <a:srgbClr val="1F6FEB"/>
-            </a:solidFill>
-          </a:ln>
-          <a:effectLst/>
-        </p:spPr>
-        <p:style>
-          <a:lnRef idx="1">
-            <a:schemeClr val="accent1"/>
-          </a:lnRef>
-          <a:fillRef idx="3">
-            <a:schemeClr val="accent1"/>
-          </a:fillRef>
-          <a:effectRef idx="2">
-            <a:schemeClr val="accent1"/>
-          </a:effectRef>
-          <a:fontRef idx="minor">
-            <a:schemeClr val="lt1"/>
-          </a:fontRef>
-        </p:style>
-        <p:txBody>
-          <a:bodyPr rtlCol="0" anchor="ctr"/>
-          <a:lstStyle/>
-          <a:p>
-            <a:pPr algn="ctr"/>
-          </a:p>
-        </p:txBody>
-      </p:sp>
-      <p:sp>
-        <p:nvSpPr>
-          <p:cNvPr id="24" name="Oval 23"/>
-          <p:cNvSpPr/>
-          <p:nvPr/>
-        </p:nvSpPr>
-        <p:spPr>
-          <a:xfrm>
-            <a:off x="8412480" y="2331720"/>
-            <a:ext cx="457200" cy="457200"/>
-          </a:xfrm>
-          <a:prstGeom prst="ellipse">
-            <a:avLst/>
-          </a:prstGeom>
-          <a:solidFill>
-            <a:srgbClr val="1F6FEB"/>
-          </a:solidFill>
-          <a:ln>
-            <a:noFill/>
-          </a:ln>
-        </p:spPr>
-        <p:style>
-          <a:lnRef idx="1">
-            <a:schemeClr val="accent1"/>
-          </a:lnRef>
-          <a:fillRef idx="3">
-            <a:schemeClr val="accent1"/>
-          </a:fillRef>
-          <a:effectRef idx="2">
-            <a:schemeClr val="accent1"/>
-          </a:effectRef>
-          <a:fontRef idx="minor">
-            <a:schemeClr val="lt1"/>
-          </a:fontRef>
-        </p:style>
-        <p:txBody>
-          <a:bodyPr rtlCol="0" anchor="ctr"/>
-          <a:lstStyle/>
-          <a:p>
-            <a:pPr algn="ctr"/>
-          </a:p>
-        </p:txBody>
-      </p:sp>
-      <p:sp>
-        <p:nvSpPr>
-          <p:cNvPr id="25" name="TextBox 24"/>
-          <p:cNvSpPr txBox="1"/>
-          <p:nvPr/>
-        </p:nvSpPr>
-        <p:spPr>
-          <a:xfrm>
-            <a:off x="8412480" y="2359152"/>
-            <a:ext cx="457200" cy="457200"/>
-          </a:xfrm>
-          <a:prstGeom prst="rect">
-            <a:avLst/>
-          </a:prstGeom>
-          <a:noFill/>
-        </p:spPr>
-        <p:txBody>
-          <a:bodyPr wrap="square" lIns="0" rIns="0" tIns="0" bIns="0" anchor="t">
-            <a:spAutoFit/>
-          </a:bodyPr>
-          <a:lstStyle/>
-          <a:p>
-            <a:pPr algn="ctr"/>
-            <a:r>
-              <a:rPr sz="1800" b="1" i="0">
-                <a:solidFill>
-                  <a:srgbClr val="FFFFFF"/>
-                </a:solidFill>
-                <a:latin typeface="Helvetica"/>
-              </a:rPr>
-              <a:t>3</a:t>
-            </a:r>
-          </a:p>
-        </p:txBody>
-      </p:sp>
-      <p:sp>
-        <p:nvSpPr>
-          <p:cNvPr id="26" name="TextBox 25"/>
-          <p:cNvSpPr txBox="1"/>
-          <p:nvPr/>
-        </p:nvSpPr>
-        <p:spPr>
-          <a:xfrm>
-            <a:off x="9006840" y="2331720"/>
-            <a:ext cx="2743200" cy="548640"/>
-          </a:xfrm>
-          <a:prstGeom prst="rect">
-            <a:avLst/>
-          </a:prstGeom>
-          <a:noFill/>
-        </p:spPr>
-        <p:txBody>
-          <a:bodyPr wrap="square" lIns="0" rIns="0" tIns="0" bIns="0" anchor="t">
-            <a:spAutoFit/>
-          </a:bodyPr>
-          <a:lstStyle/>
-          <a:p>
-            <a:pPr algn="l"/>
-            <a:r>
-              <a:rPr sz="1400" b="1" i="0">
-                <a:solidFill>
-                  <a:srgbClr val="1A1A2E"/>
-                </a:solidFill>
-                <a:latin typeface="Helvetica"/>
-              </a:rPr>
-              <a:t>Knowledge distillation</a:t>
-            </a:r>
-          </a:p>
-        </p:txBody>
-      </p:sp>
-      <p:sp>
-        <p:nvSpPr>
-          <p:cNvPr id="27" name="TextBox 26"/>
-          <p:cNvSpPr txBox="1"/>
-          <p:nvPr/>
-        </p:nvSpPr>
-        <p:spPr>
-          <a:xfrm>
-            <a:off x="8412480" y="2971800"/>
-            <a:ext cx="3291840" cy="365760"/>
-          </a:xfrm>
-          <a:prstGeom prst="rect">
-            <a:avLst/>
-          </a:prstGeom>
-          <a:noFill/>
-        </p:spPr>
-        <p:txBody>
-          <a:bodyPr wrap="square" lIns="0" rIns="0" tIns="0" bIns="0" anchor="t">
-            <a:spAutoFit/>
-          </a:bodyPr>
-          <a:lstStyle/>
-          <a:p>
-            <a:pPr algn="l"/>
-            <a:r>
-              <a:rPr sz="1000" b="1" i="1">
-                <a:solidFill>
-                  <a:srgbClr val="1F6FEB"/>
-                </a:solidFill>
-                <a:latin typeface="Helvetica"/>
-              </a:rPr>
-              <a:t>principled</a:t>
-            </a:r>
-          </a:p>
-        </p:txBody>
-      </p:sp>
-      <p:sp>
-        <p:nvSpPr>
-          <p:cNvPr id="28" name="TextBox 27"/>
-          <p:cNvSpPr txBox="1"/>
-          <p:nvPr/>
-        </p:nvSpPr>
-        <p:spPr>
-          <a:xfrm>
-            <a:off x="8412480" y="3429000"/>
-            <a:ext cx="3291840" cy="365760"/>
-          </a:xfrm>
-          <a:prstGeom prst="rect">
-            <a:avLst/>
-          </a:prstGeom>
-          <a:noFill/>
-        </p:spPr>
-        <p:txBody>
-          <a:bodyPr wrap="square" lIns="0" rIns="0" tIns="0" bIns="0" anchor="t">
-            <a:spAutoFit/>
-          </a:bodyPr>
-          <a:lstStyle/>
-          <a:p>
-            <a:pPr algn="l"/>
-            <a:r>
-              <a:rPr sz="1100" b="1" i="0">
-                <a:solidFill>
-                  <a:srgbClr val="1F6FEB"/>
-                </a:solidFill>
-                <a:latin typeface="Helvetica"/>
-              </a:rPr>
-              <a:t>How</a:t>
-            </a:r>
-          </a:p>
-        </p:txBody>
-      </p:sp>
-      <p:sp>
-        <p:nvSpPr>
-          <p:cNvPr id="29" name="TextBox 28"/>
-          <p:cNvSpPr txBox="1"/>
-          <p:nvPr/>
-        </p:nvSpPr>
-        <p:spPr>
-          <a:xfrm>
-            <a:off x="8412480" y="3749039"/>
-            <a:ext cx="3291840" cy="1280160"/>
-          </a:xfrm>
-          <a:prstGeom prst="rect">
-            <a:avLst/>
-          </a:prstGeom>
-          <a:noFill/>
-        </p:spPr>
-        <p:txBody>
-          <a:bodyPr wrap="square" lIns="0" rIns="0" tIns="0" bIns="0" anchor="t">
-            <a:spAutoFit/>
-          </a:bodyPr>
-          <a:lstStyle/>
-          <a:p>
-            <a:pPr algn="l"/>
-            <a:r>
-              <a:rPr sz="1100" b="0" i="0">
-                <a:solidFill>
-                  <a:srgbClr val="1A1A2E"/>
-                </a:solidFill>
-                <a:latin typeface="Helvetica"/>
-              </a:rPr>
-              <a:t>Transfer v2's small-object improvements into a faster baseline RT-DETR student.</a:t>
-            </a:r>
-          </a:p>
-        </p:txBody>
-      </p:sp>
-      <p:sp>
-        <p:nvSpPr>
-          <p:cNvPr id="30" name="TextBox 29"/>
-          <p:cNvSpPr txBox="1"/>
-          <p:nvPr/>
-        </p:nvSpPr>
-        <p:spPr>
-          <a:xfrm>
-            <a:off x="8412480" y="4846320"/>
-            <a:ext cx="3291840" cy="365760"/>
-          </a:xfrm>
-          <a:prstGeom prst="rect">
-            <a:avLst/>
-          </a:prstGeom>
-          <a:noFill/>
-        </p:spPr>
-        <p:txBody>
-          <a:bodyPr wrap="square" lIns="0" rIns="0" tIns="0" bIns="0" anchor="t">
-            <a:spAutoFit/>
-          </a:bodyPr>
-          <a:lstStyle/>
-          <a:p>
-            <a:pPr algn="l"/>
-            <a:r>
-              <a:rPr sz="1100" b="1" i="0">
-                <a:solidFill>
-                  <a:srgbClr val="2CA02C"/>
-                </a:solidFill>
-                <a:latin typeface="Helvetica"/>
-              </a:rPr>
-              <a:t>Goal</a:t>
-            </a:r>
-          </a:p>
-        </p:txBody>
-      </p:sp>
-      <p:sp>
-        <p:nvSpPr>
-          <p:cNvPr id="31" name="TextBox 30"/>
-          <p:cNvSpPr txBox="1"/>
-          <p:nvPr/>
-        </p:nvSpPr>
-        <p:spPr>
-          <a:xfrm>
-            <a:off x="8412480" y="5166360"/>
-            <a:ext cx="3291840" cy="1280160"/>
-          </a:xfrm>
-          <a:prstGeom prst="rect">
-            <a:avLst/>
-          </a:prstGeom>
-          <a:noFill/>
-        </p:spPr>
-        <p:txBody>
-          <a:bodyPr wrap="square" lIns="0" rIns="0" tIns="0" bIns="0" anchor="t">
-            <a:spAutoFit/>
-          </a:bodyPr>
-          <a:lstStyle/>
-          <a:p>
-            <a:pPr algn="l"/>
-            <a:r>
-              <a:rPr sz="1100" b="0" i="0">
-                <a:solidFill>
-                  <a:srgbClr val="1A1A2E"/>
-                </a:solidFill>
-                <a:latin typeface="Helvetica"/>
-              </a:rPr>
-              <a:t>Recover baseline inference speed while retaining the small-object AP gains learned from P2 feedback.</a:t>
-            </a:r>
-          </a:p>
-        </p:txBody>
-      </p:sp>
-      <p:sp>
-        <p:nvSpPr>
-          <p:cNvPr id="32" name="TextBox 31"/>
-          <p:cNvSpPr txBox="1"/>
-          <p:nvPr/>
-        </p:nvSpPr>
-        <p:spPr>
-          <a:xfrm>
-            <a:off x="640080" y="6126480"/>
-            <a:ext cx="10972800" cy="365760"/>
-          </a:xfrm>
-          <a:prstGeom prst="rect">
-            <a:avLst/>
-          </a:prstGeom>
-          <a:noFill/>
-        </p:spPr>
-        <p:txBody>
-          <a:bodyPr wrap="square" lIns="0" rIns="0" tIns="0" bIns="0" anchor="t">
-            <a:spAutoFit/>
-          </a:bodyPr>
-          <a:lstStyle/>
-          <a:p>
-            <a:pPr algn="ctr"/>
-            <a:r>
-              <a:rPr sz="1300" b="1" i="0">
-                <a:solidFill>
-                  <a:srgbClr val="1F6FEB"/>
-                </a:solidFill>
-                <a:latin typeface="Helvetica"/>
-              </a:rPr>
-              <a:t>Common goal: keep the +0.99 small-object AP gain while approaching the 53 FPS baseline.</a:t>
-            </a:r>
-          </a:p>
-        </p:txBody>
-      </p:sp>
-      <p:sp>
-        <p:nvSpPr>
-          <p:cNvPr id="33" name="TextBox 32"/>
+          <p:cNvPr id="15" name="TextBox 14"/>
           <p:cNvSpPr txBox="1"/>
           <p:nvPr/>
         </p:nvSpPr>
@@ -9209,7 +8215,7 @@
       </p:sp>
       <p:sp>
         <p:nvSpPr>
-          <p:cNvPr id="34" name="TextBox 33"/>
+          <p:cNvPr id="16" name="TextBox 15"/>
           <p:cNvSpPr txBox="1"/>
           <p:nvPr/>
         </p:nvSpPr>
@@ -9237,7 +8243,7 @@
                 </a:solidFill>
                 <a:latin typeface="Helvetica"/>
               </a:rPr>
-              <a:t>22 / 24</a:t>
+              <a:t>21 / 27</a:t>
             </a:r>
           </a:p>
         </p:txBody>
@@ -9290,7 +8296,7 @@
                 </a:solidFill>
                 <a:latin typeface="Helvetica"/>
               </a:rPr>
-              <a:t>Conclusion</a:t>
+              <a:t>Higher resolution → bigger gain</a:t>
             </a:r>
           </a:p>
         </p:txBody>
@@ -9340,16 +8346,86 @@
       </p:sp>
       <p:sp>
         <p:nvSpPr>
-          <p:cNvPr id="4" name="Oval 3"/>
+          <p:cNvPr id="4" name="TextBox 3"/>
+          <p:cNvSpPr txBox="1"/>
+          <p:nvPr/>
+        </p:nvSpPr>
+        <p:spPr>
+          <a:xfrm>
+            <a:off x="640080" y="2194560"/>
+            <a:ext cx="5303520" cy="457200"/>
+          </a:xfrm>
+          <a:prstGeom prst="rect">
+            <a:avLst/>
+          </a:prstGeom>
+          <a:noFill/>
+        </p:spPr>
+        <p:txBody>
+          <a:bodyPr wrap="square" lIns="0" rIns="0" tIns="0" bIns="0" anchor="t">
+            <a:spAutoFit/>
+          </a:bodyPr>
+          <a:lstStyle/>
+          <a:p>
+            <a:pPr algn="ctr"/>
+            <a:r>
+              <a:rPr sz="2200" b="0" i="0">
+                <a:solidFill>
+                  <a:srgbClr val="666677"/>
+                </a:solidFill>
+                <a:latin typeface="Helvetica"/>
+              </a:rPr>
+              <a:t>640 × 640</a:t>
+            </a:r>
+          </a:p>
+        </p:txBody>
+      </p:sp>
+      <p:sp>
+        <p:nvSpPr>
+          <p:cNvPr id="5" name="TextBox 4"/>
+          <p:cNvSpPr txBox="1"/>
+          <p:nvPr/>
+        </p:nvSpPr>
+        <p:spPr>
+          <a:xfrm>
+            <a:off x="640080" y="2743200"/>
+            <a:ext cx="5303520" cy="1828800"/>
+          </a:xfrm>
+          <a:prstGeom prst="rect">
+            <a:avLst/>
+          </a:prstGeom>
+          <a:noFill/>
+        </p:spPr>
+        <p:txBody>
+          <a:bodyPr wrap="square" lIns="0" rIns="0" tIns="0" bIns="0" anchor="t">
+            <a:spAutoFit/>
+          </a:bodyPr>
+          <a:lstStyle/>
+          <a:p>
+            <a:pPr algn="ctr"/>
+            <a:r>
+              <a:rPr sz="8800" b="1" i="0">
+                <a:solidFill>
+                  <a:srgbClr val="1A1A2E"/>
+                </a:solidFill>
+                <a:latin typeface="Helvetica"/>
+              </a:rPr>
+              <a:t>34.25</a:t>
+            </a:r>
+          </a:p>
+        </p:txBody>
+      </p:sp>
+      <p:sp>
+        <p:nvSpPr>
+          <p:cNvPr id="6" name="Right Arrow 5"/>
           <p:cNvSpPr/>
           <p:nvPr/>
         </p:nvSpPr>
         <p:spPr>
           <a:xfrm>
-            <a:off x="822960" y="1965960"/>
-            <a:ext cx="502920" cy="502920"/>
-          </a:xfrm>
-          <a:prstGeom prst="ellipse">
+            <a:off x="5303520" y="3291840"/>
+            <a:ext cx="1554480" cy="548640"/>
+          </a:xfrm>
+          <a:prstGeom prst="rightArrow">
             <a:avLst/>
           </a:prstGeom>
           <a:solidFill>
@@ -9383,14 +8459,14 @@
       </p:sp>
       <p:sp>
         <p:nvSpPr>
-          <p:cNvPr id="5" name="TextBox 4"/>
-          <p:cNvSpPr txBox="1"/>
-          <p:nvPr/>
-        </p:nvSpPr>
-        <p:spPr>
-          <a:xfrm>
-            <a:off x="822960" y="1993392"/>
-            <a:ext cx="502920" cy="502920"/>
+          <p:cNvPr id="7" name="TextBox 6"/>
+          <p:cNvSpPr txBox="1"/>
+          <p:nvPr/>
+        </p:nvSpPr>
+        <p:spPr>
+          <a:xfrm>
+            <a:off x="6217920" y="2194560"/>
+            <a:ext cx="5303520" cy="457200"/>
           </a:xfrm>
           <a:prstGeom prst="rect">
             <a:avLst/>
@@ -9405,196 +8481,118 @@
           <a:p>
             <a:pPr algn="ctr"/>
             <a:r>
-              <a:rPr sz="2000" b="1" i="0">
-                <a:solidFill>
-                  <a:srgbClr val="FFFFFF"/>
-                </a:solidFill>
-                <a:latin typeface="Helvetica"/>
-              </a:rPr>
-              <a:t>1</a:t>
-            </a:r>
-          </a:p>
-        </p:txBody>
-      </p:sp>
-      <p:sp>
-        <p:nvSpPr>
-          <p:cNvPr id="6" name="TextBox 5"/>
-          <p:cNvSpPr txBox="1"/>
-          <p:nvPr/>
-        </p:nvSpPr>
-        <p:spPr>
-          <a:xfrm>
-            <a:off x="1554480" y="1874520"/>
-            <a:ext cx="10058400" cy="548640"/>
-          </a:xfrm>
-          <a:prstGeom prst="rect">
-            <a:avLst/>
-          </a:prstGeom>
-          <a:noFill/>
-        </p:spPr>
-        <p:txBody>
-          <a:bodyPr wrap="square" lIns="0" rIns="0" tIns="0" bIns="0" anchor="t">
-            <a:spAutoFit/>
-          </a:bodyPr>
-          <a:lstStyle/>
-          <a:p>
-            <a:pPr algn="l"/>
-            <a:r>
-              <a:rPr sz="2400" b="1" i="0">
+              <a:rPr sz="2200" b="1" i="0">
+                <a:solidFill>
+                  <a:srgbClr val="1F6FEB"/>
+                </a:solidFill>
+                <a:latin typeface="Helvetica"/>
+              </a:rPr>
+              <a:t>800 × 800</a:t>
+            </a:r>
+          </a:p>
+        </p:txBody>
+      </p:sp>
+      <p:sp>
+        <p:nvSpPr>
+          <p:cNvPr id="8" name="TextBox 7"/>
+          <p:cNvSpPr txBox="1"/>
+          <p:nvPr/>
+        </p:nvSpPr>
+        <p:spPr>
+          <a:xfrm>
+            <a:off x="6217920" y="2743200"/>
+            <a:ext cx="5303520" cy="1828800"/>
+          </a:xfrm>
+          <a:prstGeom prst="rect">
+            <a:avLst/>
+          </a:prstGeom>
+          <a:noFill/>
+        </p:spPr>
+        <p:txBody>
+          <a:bodyPr wrap="square" lIns="0" rIns="0" tIns="0" bIns="0" anchor="t">
+            <a:spAutoFit/>
+          </a:bodyPr>
+          <a:lstStyle/>
+          <a:p>
+            <a:pPr algn="ctr"/>
+            <a:r>
+              <a:rPr sz="8800" b="1" i="0">
+                <a:solidFill>
+                  <a:srgbClr val="2CA02C"/>
+                </a:solidFill>
+                <a:latin typeface="Helvetica"/>
+              </a:rPr>
+              <a:t>37.01</a:t>
+            </a:r>
+          </a:p>
+        </p:txBody>
+      </p:sp>
+      <p:sp>
+        <p:nvSpPr>
+          <p:cNvPr id="9" name="TextBox 8"/>
+          <p:cNvSpPr txBox="1"/>
+          <p:nvPr/>
+        </p:nvSpPr>
+        <p:spPr>
+          <a:xfrm>
+            <a:off x="640080" y="5120640"/>
+            <a:ext cx="10972800" cy="457200"/>
+          </a:xfrm>
+          <a:prstGeom prst="rect">
+            <a:avLst/>
+          </a:prstGeom>
+          <a:noFill/>
+        </p:spPr>
+        <p:txBody>
+          <a:bodyPr wrap="square" lIns="0" rIns="0" tIns="0" bIns="0" anchor="t">
+            <a:spAutoFit/>
+          </a:bodyPr>
+          <a:lstStyle/>
+          <a:p>
+            <a:pPr algn="ctr"/>
+            <a:r>
+              <a:rPr sz="2200" b="0" i="1">
                 <a:solidFill>
                   <a:srgbClr val="1A1A2E"/>
                 </a:solidFill>
                 <a:latin typeface="Helvetica"/>
               </a:rPr>
-              <a:t>Feedback improves small-object detection</a:t>
-            </a:r>
-          </a:p>
-        </p:txBody>
-      </p:sp>
-      <p:sp>
-        <p:nvSpPr>
-          <p:cNvPr id="7" name="TextBox 6"/>
-          <p:cNvSpPr txBox="1"/>
-          <p:nvPr/>
-        </p:nvSpPr>
-        <p:spPr>
-          <a:xfrm>
-            <a:off x="1554480" y="2468880"/>
-            <a:ext cx="10058400" cy="548640"/>
-          </a:xfrm>
-          <a:prstGeom prst="rect">
-            <a:avLst/>
-          </a:prstGeom>
-          <a:noFill/>
-        </p:spPr>
-        <p:txBody>
-          <a:bodyPr wrap="square" lIns="0" rIns="0" tIns="0" bIns="0" anchor="t">
-            <a:spAutoFit/>
-          </a:bodyPr>
-          <a:lstStyle/>
-          <a:p>
-            <a:pPr algn="l"/>
-            <a:r>
-              <a:rPr sz="1500" b="0" i="1">
+              <a:t>+2.76 from more pixels.</a:t>
+            </a:r>
+          </a:p>
+        </p:txBody>
+      </p:sp>
+      <p:sp>
+        <p:nvSpPr>
+          <p:cNvPr id="10" name="TextBox 9"/>
+          <p:cNvSpPr txBox="1"/>
+          <p:nvPr/>
+        </p:nvSpPr>
+        <p:spPr>
+          <a:xfrm>
+            <a:off x="640080" y="5669280"/>
+            <a:ext cx="10972800" cy="457200"/>
+          </a:xfrm>
+          <a:prstGeom prst="rect">
+            <a:avLst/>
+          </a:prstGeom>
+          <a:noFill/>
+        </p:spPr>
+        <p:txBody>
+          <a:bodyPr wrap="square" lIns="0" rIns="0" tIns="0" bIns="0" anchor="t">
+            <a:spAutoFit/>
+          </a:bodyPr>
+          <a:lstStyle/>
+          <a:p>
+            <a:pPr algn="ctr"/>
+            <a:r>
+              <a:rPr sz="1600" b="0" i="0">
                 <a:solidFill>
                   <a:srgbClr val="666677"/>
                 </a:solidFill>
                 <a:latin typeface="Helvetica"/>
               </a:rPr>
-              <a:t>+0.99 small-object AP, causal contribution at inference.</a:t>
-            </a:r>
-          </a:p>
-        </p:txBody>
-      </p:sp>
-      <p:sp>
-        <p:nvSpPr>
-          <p:cNvPr id="8" name="Oval 7"/>
-          <p:cNvSpPr/>
-          <p:nvPr/>
-        </p:nvSpPr>
-        <p:spPr>
-          <a:xfrm>
-            <a:off x="822960" y="3383280"/>
-            <a:ext cx="502920" cy="502920"/>
-          </a:xfrm>
-          <a:prstGeom prst="ellipse">
-            <a:avLst/>
-          </a:prstGeom>
-          <a:solidFill>
-            <a:srgbClr val="1F6FEB"/>
-          </a:solidFill>
-          <a:ln>
-            <a:noFill/>
-          </a:ln>
-        </p:spPr>
-        <p:style>
-          <a:lnRef idx="1">
-            <a:schemeClr val="accent1"/>
-          </a:lnRef>
-          <a:fillRef idx="3">
-            <a:schemeClr val="accent1"/>
-          </a:fillRef>
-          <a:effectRef idx="2">
-            <a:schemeClr val="accent1"/>
-          </a:effectRef>
-          <a:fontRef idx="minor">
-            <a:schemeClr val="lt1"/>
-          </a:fontRef>
-        </p:style>
-        <p:txBody>
-          <a:bodyPr rtlCol="0" anchor="ctr"/>
-          <a:lstStyle/>
-          <a:p>
-            <a:pPr algn="ctr"/>
-          </a:p>
-        </p:txBody>
-      </p:sp>
-      <p:sp>
-        <p:nvSpPr>
-          <p:cNvPr id="9" name="TextBox 8"/>
-          <p:cNvSpPr txBox="1"/>
-          <p:nvPr/>
-        </p:nvSpPr>
-        <p:spPr>
-          <a:xfrm>
-            <a:off x="822960" y="3410712"/>
-            <a:ext cx="502920" cy="502920"/>
-          </a:xfrm>
-          <a:prstGeom prst="rect">
-            <a:avLst/>
-          </a:prstGeom>
-          <a:noFill/>
-        </p:spPr>
-        <p:txBody>
-          <a:bodyPr wrap="square" lIns="0" rIns="0" tIns="0" bIns="0" anchor="t">
-            <a:spAutoFit/>
-          </a:bodyPr>
-          <a:lstStyle/>
-          <a:p>
-            <a:pPr algn="ctr"/>
-            <a:r>
-              <a:rPr sz="2000" b="1" i="0">
-                <a:solidFill>
-                  <a:srgbClr val="FFFFFF"/>
-                </a:solidFill>
-                <a:latin typeface="Helvetica"/>
-              </a:rPr>
-              <a:t>2</a:t>
-            </a:r>
-          </a:p>
-        </p:txBody>
-      </p:sp>
-      <p:sp>
-        <p:nvSpPr>
-          <p:cNvPr id="10" name="TextBox 9"/>
-          <p:cNvSpPr txBox="1"/>
-          <p:nvPr/>
-        </p:nvSpPr>
-        <p:spPr>
-          <a:xfrm>
-            <a:off x="1554480" y="3291840"/>
-            <a:ext cx="10058400" cy="548640"/>
-          </a:xfrm>
-          <a:prstGeom prst="rect">
-            <a:avLst/>
-          </a:prstGeom>
-          <a:noFill/>
-        </p:spPr>
-        <p:txBody>
-          <a:bodyPr wrap="square" lIns="0" rIns="0" tIns="0" bIns="0" anchor="t">
-            <a:spAutoFit/>
-          </a:bodyPr>
-          <a:lstStyle/>
-          <a:p>
-            <a:pPr algn="l"/>
-            <a:r>
-              <a:rPr sz="2400" b="1" i="0">
-                <a:solidFill>
-                  <a:srgbClr val="1A1A2E"/>
-                </a:solidFill>
-                <a:latin typeface="Helvetica"/>
-              </a:rPr>
-              <a:t>Only works with proper design</a:t>
+              <a:t>Feedback helps. Spatial sampling helps too.</a:t>
             </a:r>
           </a:p>
         </p:txBody>
@@ -9602,189 +8600,6 @@
       <p:sp>
         <p:nvSpPr>
           <p:cNvPr id="11" name="TextBox 10"/>
-          <p:cNvSpPr txBox="1"/>
-          <p:nvPr/>
-        </p:nvSpPr>
-        <p:spPr>
-          <a:xfrm>
-            <a:off x="1554480" y="3886200"/>
-            <a:ext cx="10058400" cy="548640"/>
-          </a:xfrm>
-          <a:prstGeom prst="rect">
-            <a:avLst/>
-          </a:prstGeom>
-          <a:noFill/>
-        </p:spPr>
-        <p:txBody>
-          <a:bodyPr wrap="square" lIns="0" rIns="0" tIns="0" bIns="0" anchor="t">
-            <a:spAutoFit/>
-          </a:bodyPr>
-          <a:lstStyle/>
-          <a:p>
-            <a:pPr algn="l"/>
-            <a:r>
-              <a:rPr sz="1500" b="0" i="1">
-                <a:solidFill>
-                  <a:srgbClr val="666677"/>
-                </a:solidFill>
-                <a:latin typeface="Helvetica"/>
-              </a:rPr>
-              <a:t>Floor the gate; restrict to small-object levels.</a:t>
-            </a:r>
-          </a:p>
-        </p:txBody>
-      </p:sp>
-      <p:sp>
-        <p:nvSpPr>
-          <p:cNvPr id="12" name="Oval 11"/>
-          <p:cNvSpPr/>
-          <p:nvPr/>
-        </p:nvSpPr>
-        <p:spPr>
-          <a:xfrm>
-            <a:off x="822960" y="4800600"/>
-            <a:ext cx="502920" cy="502920"/>
-          </a:xfrm>
-          <a:prstGeom prst="ellipse">
-            <a:avLst/>
-          </a:prstGeom>
-          <a:solidFill>
-            <a:srgbClr val="1F6FEB"/>
-          </a:solidFill>
-          <a:ln>
-            <a:noFill/>
-          </a:ln>
-        </p:spPr>
-        <p:style>
-          <a:lnRef idx="1">
-            <a:schemeClr val="accent1"/>
-          </a:lnRef>
-          <a:fillRef idx="3">
-            <a:schemeClr val="accent1"/>
-          </a:fillRef>
-          <a:effectRef idx="2">
-            <a:schemeClr val="accent1"/>
-          </a:effectRef>
-          <a:fontRef idx="minor">
-            <a:schemeClr val="lt1"/>
-          </a:fontRef>
-        </p:style>
-        <p:txBody>
-          <a:bodyPr rtlCol="0" anchor="ctr"/>
-          <a:lstStyle/>
-          <a:p>
-            <a:pPr algn="ctr"/>
-          </a:p>
-        </p:txBody>
-      </p:sp>
-      <p:sp>
-        <p:nvSpPr>
-          <p:cNvPr id="13" name="TextBox 12"/>
-          <p:cNvSpPr txBox="1"/>
-          <p:nvPr/>
-        </p:nvSpPr>
-        <p:spPr>
-          <a:xfrm>
-            <a:off x="822960" y="4828032"/>
-            <a:ext cx="502920" cy="502920"/>
-          </a:xfrm>
-          <a:prstGeom prst="rect">
-            <a:avLst/>
-          </a:prstGeom>
-          <a:noFill/>
-        </p:spPr>
-        <p:txBody>
-          <a:bodyPr wrap="square" lIns="0" rIns="0" tIns="0" bIns="0" anchor="t">
-            <a:spAutoFit/>
-          </a:bodyPr>
-          <a:lstStyle/>
-          <a:p>
-            <a:pPr algn="ctr"/>
-            <a:r>
-              <a:rPr sz="2000" b="1" i="0">
-                <a:solidFill>
-                  <a:srgbClr val="FFFFFF"/>
-                </a:solidFill>
-                <a:latin typeface="Helvetica"/>
-              </a:rPr>
-              <a:t>3</a:t>
-            </a:r>
-          </a:p>
-        </p:txBody>
-      </p:sp>
-      <p:sp>
-        <p:nvSpPr>
-          <p:cNvPr id="14" name="TextBox 13"/>
-          <p:cNvSpPr txBox="1"/>
-          <p:nvPr/>
-        </p:nvSpPr>
-        <p:spPr>
-          <a:xfrm>
-            <a:off x="1554480" y="4709160"/>
-            <a:ext cx="10058400" cy="548640"/>
-          </a:xfrm>
-          <a:prstGeom prst="rect">
-            <a:avLst/>
-          </a:prstGeom>
-          <a:noFill/>
-        </p:spPr>
-        <p:txBody>
-          <a:bodyPr wrap="square" lIns="0" rIns="0" tIns="0" bIns="0" anchor="t">
-            <a:spAutoFit/>
-          </a:bodyPr>
-          <a:lstStyle/>
-          <a:p>
-            <a:pPr algn="l"/>
-            <a:r>
-              <a:rPr sz="2400" b="1" i="0">
-                <a:solidFill>
-                  <a:srgbClr val="1A1A2E"/>
-                </a:solidFill>
-                <a:latin typeface="Helvetica"/>
-              </a:rPr>
-              <a:t>Modest but real</a:t>
-            </a:r>
-          </a:p>
-        </p:txBody>
-      </p:sp>
-      <p:sp>
-        <p:nvSpPr>
-          <p:cNvPr id="15" name="TextBox 14"/>
-          <p:cNvSpPr txBox="1"/>
-          <p:nvPr/>
-        </p:nvSpPr>
-        <p:spPr>
-          <a:xfrm>
-            <a:off x="1554480" y="5303520"/>
-            <a:ext cx="10058400" cy="548640"/>
-          </a:xfrm>
-          <a:prstGeom prst="rect">
-            <a:avLst/>
-          </a:prstGeom>
-          <a:noFill/>
-        </p:spPr>
-        <p:txBody>
-          <a:bodyPr wrap="square" lIns="0" rIns="0" tIns="0" bIns="0" anchor="t">
-            <a:spAutoFit/>
-          </a:bodyPr>
-          <a:lstStyle/>
-          <a:p>
-            <a:pPr algn="l"/>
-            <a:r>
-              <a:rPr sz="1500" b="0" i="1">
-                <a:solidFill>
-                  <a:srgbClr val="666677"/>
-                </a:solidFill>
-                <a:latin typeface="Helvetica"/>
-              </a:rPr>
-              <a:t>Consistent across metrics; reproducible from the same checkpoint.</a:t>
-            </a:r>
-          </a:p>
-        </p:txBody>
-      </p:sp>
-      <p:sp>
-        <p:nvSpPr>
-          <p:cNvPr id="16" name="TextBox 15"/>
           <p:cNvSpPr txBox="1"/>
           <p:nvPr/>
         </p:nvSpPr>
@@ -9819,7 +8634,7 @@
       </p:sp>
       <p:sp>
         <p:nvSpPr>
-          <p:cNvPr id="17" name="TextBox 16"/>
+          <p:cNvPr id="12" name="TextBox 11"/>
           <p:cNvSpPr txBox="1"/>
           <p:nvPr/>
         </p:nvSpPr>
@@ -9847,7 +8662,7 @@
                 </a:solidFill>
                 <a:latin typeface="Helvetica"/>
               </a:rPr>
-              <a:t>23 / 24</a:t>
+              <a:t>22 / 27</a:t>
             </a:r>
           </a:p>
         </p:txBody>
@@ -9878,6 +8693,2497 @@
         </p:nvSpPr>
         <p:spPr>
           <a:xfrm>
+            <a:off x="640080" y="457200"/>
+            <a:ext cx="10972800" cy="822960"/>
+          </a:xfrm>
+          <a:prstGeom prst="rect">
+            <a:avLst/>
+          </a:prstGeom>
+          <a:noFill/>
+        </p:spPr>
+        <p:txBody>
+          <a:bodyPr wrap="square" lIns="0" rIns="0" tIns="0" bIns="0" anchor="t">
+            <a:spAutoFit/>
+          </a:bodyPr>
+          <a:lstStyle/>
+          <a:p>
+            <a:pPr algn="l"/>
+            <a:r>
+              <a:rPr sz="3400" b="1" i="0">
+                <a:solidFill>
+                  <a:srgbClr val="1F6FEB"/>
+                </a:solidFill>
+                <a:latin typeface="Helvetica"/>
+              </a:rPr>
+              <a:t>Strengths and limitations</a:t>
+            </a:r>
+          </a:p>
+        </p:txBody>
+      </p:sp>
+      <p:sp>
+        <p:nvSpPr>
+          <p:cNvPr id="3" name="Rectangle 2"/>
+          <p:cNvSpPr/>
+          <p:nvPr/>
+        </p:nvSpPr>
+        <p:spPr>
+          <a:xfrm>
+            <a:off x="640080" y="1143000"/>
+            <a:ext cx="640080" cy="54864"/>
+          </a:xfrm>
+          <a:prstGeom prst="rect">
+            <a:avLst/>
+          </a:prstGeom>
+          <a:solidFill>
+            <a:srgbClr val="1F6FEB"/>
+          </a:solidFill>
+          <a:ln>
+            <a:noFill/>
+          </a:ln>
+        </p:spPr>
+        <p:style>
+          <a:lnRef idx="1">
+            <a:schemeClr val="accent1"/>
+          </a:lnRef>
+          <a:fillRef idx="3">
+            <a:schemeClr val="accent1"/>
+          </a:fillRef>
+          <a:effectRef idx="2">
+            <a:schemeClr val="accent1"/>
+          </a:effectRef>
+          <a:fontRef idx="minor">
+            <a:schemeClr val="lt1"/>
+          </a:fontRef>
+        </p:style>
+        <p:txBody>
+          <a:bodyPr rtlCol="0" anchor="ctr"/>
+          <a:lstStyle/>
+          <a:p>
+            <a:pPr algn="ctr"/>
+          </a:p>
+        </p:txBody>
+      </p:sp>
+      <p:sp>
+        <p:nvSpPr>
+          <p:cNvPr id="4" name="Rounded Rectangle 3"/>
+          <p:cNvSpPr/>
+          <p:nvPr/>
+        </p:nvSpPr>
+        <p:spPr>
+          <a:xfrm>
+            <a:off x="640080" y="1645920"/>
+            <a:ext cx="5394960" cy="4297680"/>
+          </a:xfrm>
+          <a:prstGeom prst="roundRect">
+            <a:avLst/>
+          </a:prstGeom>
+          <a:solidFill>
+            <a:srgbClr val="E8F7E8"/>
+          </a:solidFill>
+          <a:ln w="19050">
+            <a:solidFill>
+              <a:srgbClr val="2CA02C"/>
+            </a:solidFill>
+          </a:ln>
+          <a:effectLst/>
+        </p:spPr>
+        <p:style>
+          <a:lnRef idx="1">
+            <a:schemeClr val="accent1"/>
+          </a:lnRef>
+          <a:fillRef idx="3">
+            <a:schemeClr val="accent1"/>
+          </a:fillRef>
+          <a:effectRef idx="2">
+            <a:schemeClr val="accent1"/>
+          </a:effectRef>
+          <a:fontRef idx="minor">
+            <a:schemeClr val="lt1"/>
+          </a:fontRef>
+        </p:style>
+        <p:txBody>
+          <a:bodyPr rtlCol="0" anchor="ctr"/>
+          <a:lstStyle/>
+          <a:p>
+            <a:pPr algn="ctr"/>
+          </a:p>
+        </p:txBody>
+      </p:sp>
+      <p:sp>
+        <p:nvSpPr>
+          <p:cNvPr id="5" name="TextBox 4"/>
+          <p:cNvSpPr txBox="1"/>
+          <p:nvPr/>
+        </p:nvSpPr>
+        <p:spPr>
+          <a:xfrm>
+            <a:off x="822960" y="1828800"/>
+            <a:ext cx="5029200" cy="548640"/>
+          </a:xfrm>
+          <a:prstGeom prst="rect">
+            <a:avLst/>
+          </a:prstGeom>
+          <a:noFill/>
+        </p:spPr>
+        <p:txBody>
+          <a:bodyPr wrap="square" lIns="0" rIns="0" tIns="0" bIns="0" anchor="t">
+            <a:spAutoFit/>
+          </a:bodyPr>
+          <a:lstStyle/>
+          <a:p>
+            <a:pPr algn="l"/>
+            <a:r>
+              <a:rPr sz="2200" b="1" i="0">
+                <a:solidFill>
+                  <a:srgbClr val="2CA02C"/>
+                </a:solidFill>
+                <a:latin typeface="Helvetica"/>
+              </a:rPr>
+              <a:t>+  Strengths</a:t>
+            </a:r>
+          </a:p>
+        </p:txBody>
+      </p:sp>
+      <p:sp>
+        <p:nvSpPr>
+          <p:cNvPr id="6" name="TextBox 5"/>
+          <p:cNvSpPr txBox="1"/>
+          <p:nvPr/>
+        </p:nvSpPr>
+        <p:spPr>
+          <a:xfrm>
+            <a:off x="868680" y="2468880"/>
+            <a:ext cx="5029200" cy="731520"/>
+          </a:xfrm>
+          <a:prstGeom prst="rect">
+            <a:avLst/>
+          </a:prstGeom>
+          <a:noFill/>
+        </p:spPr>
+        <p:txBody>
+          <a:bodyPr wrap="square" lIns="0" rIns="0" tIns="0" bIns="0" anchor="t">
+            <a:spAutoFit/>
+          </a:bodyPr>
+          <a:lstStyle/>
+          <a:p>
+            <a:pPr algn="l"/>
+            <a:r>
+              <a:rPr sz="1400" b="0" i="0">
+                <a:solidFill>
+                  <a:srgbClr val="1A1A2E"/>
+                </a:solidFill>
+                <a:latin typeface="Helvetica"/>
+              </a:rPr>
+              <a:t>•  Causal contribution: +0.99 on small-object AP, same checkpoint.</a:t>
+            </a:r>
+          </a:p>
+        </p:txBody>
+      </p:sp>
+      <p:sp>
+        <p:nvSpPr>
+          <p:cNvPr id="7" name="TextBox 6"/>
+          <p:cNvSpPr txBox="1"/>
+          <p:nvPr/>
+        </p:nvSpPr>
+        <p:spPr>
+          <a:xfrm>
+            <a:off x="868680" y="3246120"/>
+            <a:ext cx="5029200" cy="731520"/>
+          </a:xfrm>
+          <a:prstGeom prst="rect">
+            <a:avLst/>
+          </a:prstGeom>
+          <a:noFill/>
+        </p:spPr>
+        <p:txBody>
+          <a:bodyPr wrap="square" lIns="0" rIns="0" tIns="0" bIns="0" anchor="t">
+            <a:spAutoFit/>
+          </a:bodyPr>
+          <a:lstStyle/>
+          <a:p>
+            <a:pPr algn="l"/>
+            <a:r>
+              <a:rPr sz="1400" b="0" i="0">
+                <a:solidFill>
+                  <a:srgbClr val="1A1A2E"/>
+                </a:solidFill>
+                <a:latin typeface="Helvetica"/>
+              </a:rPr>
+              <a:t>•  Zero new parameters relative to v1.</a:t>
+            </a:r>
+          </a:p>
+        </p:txBody>
+      </p:sp>
+      <p:sp>
+        <p:nvSpPr>
+          <p:cNvPr id="8" name="TextBox 7"/>
+          <p:cNvSpPr txBox="1"/>
+          <p:nvPr/>
+        </p:nvSpPr>
+        <p:spPr>
+          <a:xfrm>
+            <a:off x="868680" y="4023360"/>
+            <a:ext cx="5029200" cy="731520"/>
+          </a:xfrm>
+          <a:prstGeom prst="rect">
+            <a:avLst/>
+          </a:prstGeom>
+          <a:noFill/>
+        </p:spPr>
+        <p:txBody>
+          <a:bodyPr wrap="square" lIns="0" rIns="0" tIns="0" bIns="0" anchor="t">
+            <a:spAutoFit/>
+          </a:bodyPr>
+          <a:lstStyle/>
+          <a:p>
+            <a:pPr algn="l"/>
+            <a:r>
+              <a:rPr sz="1400" b="0" i="0">
+                <a:solidFill>
+                  <a:srgbClr val="1A1A2E"/>
+                </a:solidFill>
+                <a:latin typeface="Helvetica"/>
+              </a:rPr>
+              <a:t>•  Consistent improvement on every metric (AP, S, M, L).</a:t>
+            </a:r>
+          </a:p>
+        </p:txBody>
+      </p:sp>
+      <p:sp>
+        <p:nvSpPr>
+          <p:cNvPr id="9" name="TextBox 8"/>
+          <p:cNvSpPr txBox="1"/>
+          <p:nvPr/>
+        </p:nvSpPr>
+        <p:spPr>
+          <a:xfrm>
+            <a:off x="868680" y="4800600"/>
+            <a:ext cx="5029200" cy="731520"/>
+          </a:xfrm>
+          <a:prstGeom prst="rect">
+            <a:avLst/>
+          </a:prstGeom>
+          <a:noFill/>
+        </p:spPr>
+        <p:txBody>
+          <a:bodyPr wrap="square" lIns="0" rIns="0" tIns="0" bIns="0" anchor="t">
+            <a:spAutoFit/>
+          </a:bodyPr>
+          <a:lstStyle/>
+          <a:p>
+            <a:pPr algn="l"/>
+            <a:r>
+              <a:rPr sz="1400" b="0" i="0">
+                <a:solidFill>
+                  <a:srgbClr val="1A1A2E"/>
+                </a:solidFill>
+                <a:latin typeface="Helvetica"/>
+              </a:rPr>
+              <a:t>•  Robust at higher resolution (37.01 small-object AP at 800×800).</a:t>
+            </a:r>
+          </a:p>
+        </p:txBody>
+      </p:sp>
+      <p:sp>
+        <p:nvSpPr>
+          <p:cNvPr id="10" name="Rounded Rectangle 9"/>
+          <p:cNvSpPr/>
+          <p:nvPr/>
+        </p:nvSpPr>
+        <p:spPr>
+          <a:xfrm>
+            <a:off x="6217920" y="1645920"/>
+            <a:ext cx="5394960" cy="4297680"/>
+          </a:xfrm>
+          <a:prstGeom prst="roundRect">
+            <a:avLst/>
+          </a:prstGeom>
+          <a:solidFill>
+            <a:srgbClr val="FDECEC"/>
+          </a:solidFill>
+          <a:ln w="19050">
+            <a:solidFill>
+              <a:srgbClr val="D62C2E"/>
+            </a:solidFill>
+          </a:ln>
+          <a:effectLst/>
+        </p:spPr>
+        <p:style>
+          <a:lnRef idx="1">
+            <a:schemeClr val="accent1"/>
+          </a:lnRef>
+          <a:fillRef idx="3">
+            <a:schemeClr val="accent1"/>
+          </a:fillRef>
+          <a:effectRef idx="2">
+            <a:schemeClr val="accent1"/>
+          </a:effectRef>
+          <a:fontRef idx="minor">
+            <a:schemeClr val="lt1"/>
+          </a:fontRef>
+        </p:style>
+        <p:txBody>
+          <a:bodyPr rtlCol="0" anchor="ctr"/>
+          <a:lstStyle/>
+          <a:p>
+            <a:pPr algn="ctr"/>
+          </a:p>
+        </p:txBody>
+      </p:sp>
+      <p:sp>
+        <p:nvSpPr>
+          <p:cNvPr id="11" name="TextBox 10"/>
+          <p:cNvSpPr txBox="1"/>
+          <p:nvPr/>
+        </p:nvSpPr>
+        <p:spPr>
+          <a:xfrm>
+            <a:off x="6400800" y="1828800"/>
+            <a:ext cx="5029200" cy="548640"/>
+          </a:xfrm>
+          <a:prstGeom prst="rect">
+            <a:avLst/>
+          </a:prstGeom>
+          <a:noFill/>
+        </p:spPr>
+        <p:txBody>
+          <a:bodyPr wrap="square" lIns="0" rIns="0" tIns="0" bIns="0" anchor="t">
+            <a:spAutoFit/>
+          </a:bodyPr>
+          <a:lstStyle/>
+          <a:p>
+            <a:pPr algn="l"/>
+            <a:r>
+              <a:rPr sz="2200" b="1" i="0">
+                <a:solidFill>
+                  <a:srgbClr val="D62C2E"/>
+                </a:solidFill>
+                <a:latin typeface="Helvetica"/>
+              </a:rPr>
+              <a:t>−  Limitations</a:t>
+            </a:r>
+          </a:p>
+        </p:txBody>
+      </p:sp>
+      <p:sp>
+        <p:nvSpPr>
+          <p:cNvPr id="12" name="TextBox 11"/>
+          <p:cNvSpPr txBox="1"/>
+          <p:nvPr/>
+        </p:nvSpPr>
+        <p:spPr>
+          <a:xfrm>
+            <a:off x="6446520" y="2468880"/>
+            <a:ext cx="5029200" cy="731520"/>
+          </a:xfrm>
+          <a:prstGeom prst="rect">
+            <a:avLst/>
+          </a:prstGeom>
+          <a:noFill/>
+        </p:spPr>
+        <p:txBody>
+          <a:bodyPr wrap="square" lIns="0" rIns="0" tIns="0" bIns="0" anchor="t">
+            <a:spAutoFit/>
+          </a:bodyPr>
+          <a:lstStyle/>
+          <a:p>
+            <a:pPr algn="l"/>
+            <a:r>
+              <a:rPr sz="1400" b="0" i="0">
+                <a:solidFill>
+                  <a:srgbClr val="1A1A2E"/>
+                </a:solidFill>
+                <a:latin typeface="Helvetica"/>
+              </a:rPr>
+              <a:t>•  Single seed — multi-seed variance unmeasured.</a:t>
+            </a:r>
+          </a:p>
+        </p:txBody>
+      </p:sp>
+      <p:sp>
+        <p:nvSpPr>
+          <p:cNvPr id="13" name="TextBox 12"/>
+          <p:cNvSpPr txBox="1"/>
+          <p:nvPr/>
+        </p:nvSpPr>
+        <p:spPr>
+          <a:xfrm>
+            <a:off x="6446520" y="3246120"/>
+            <a:ext cx="5029200" cy="731520"/>
+          </a:xfrm>
+          <a:prstGeom prst="rect">
+            <a:avLst/>
+          </a:prstGeom>
+          <a:noFill/>
+        </p:spPr>
+        <p:txBody>
+          <a:bodyPr wrap="square" lIns="0" rIns="0" tIns="0" bIns="0" anchor="t">
+            <a:spAutoFit/>
+          </a:bodyPr>
+          <a:lstStyle/>
+          <a:p>
+            <a:pPr algn="l"/>
+            <a:r>
+              <a:rPr sz="1400" b="0" i="0">
+                <a:solidFill>
+                  <a:srgbClr val="1A1A2E"/>
+                </a:solidFill>
+                <a:latin typeface="Helvetica"/>
+              </a:rPr>
+              <a:t>•  13-epoch finetune (vs 72-epoch from scratch).</a:t>
+            </a:r>
+          </a:p>
+        </p:txBody>
+      </p:sp>
+      <p:sp>
+        <p:nvSpPr>
+          <p:cNvPr id="14" name="TextBox 13"/>
+          <p:cNvSpPr txBox="1"/>
+          <p:nvPr/>
+        </p:nvSpPr>
+        <p:spPr>
+          <a:xfrm>
+            <a:off x="6446520" y="4023360"/>
+            <a:ext cx="5029200" cy="731520"/>
+          </a:xfrm>
+          <a:prstGeom prst="rect">
+            <a:avLst/>
+          </a:prstGeom>
+          <a:noFill/>
+        </p:spPr>
+        <p:txBody>
+          <a:bodyPr wrap="square" lIns="0" rIns="0" tIns="0" bIns="0" anchor="t">
+            <a:spAutoFit/>
+          </a:bodyPr>
+          <a:lstStyle/>
+          <a:p>
+            <a:pPr algn="l"/>
+            <a:r>
+              <a:rPr sz="1400" b="0" i="0">
+                <a:solidFill>
+                  <a:srgbClr val="1A1A2E"/>
+                </a:solidFill>
+                <a:latin typeface="Helvetica"/>
+              </a:rPr>
+              <a:t>•  Floor and mask not isolated (a 2×2 ablation is missing).</a:t>
+            </a:r>
+          </a:p>
+        </p:txBody>
+      </p:sp>
+      <p:sp>
+        <p:nvSpPr>
+          <p:cNvPr id="15" name="TextBox 14"/>
+          <p:cNvSpPr txBox="1"/>
+          <p:nvPr/>
+        </p:nvSpPr>
+        <p:spPr>
+          <a:xfrm>
+            <a:off x="6446520" y="4800600"/>
+            <a:ext cx="5029200" cy="731520"/>
+          </a:xfrm>
+          <a:prstGeom prst="rect">
+            <a:avLst/>
+          </a:prstGeom>
+          <a:noFill/>
+        </p:spPr>
+        <p:txBody>
+          <a:bodyPr wrap="square" lIns="0" rIns="0" tIns="0" bIns="0" anchor="t">
+            <a:spAutoFit/>
+          </a:bodyPr>
+          <a:lstStyle/>
+          <a:p>
+            <a:pPr algn="l"/>
+            <a:r>
+              <a:rPr sz="1400" b="0" i="0">
+                <a:solidFill>
+                  <a:srgbClr val="1A1A2E"/>
+                </a:solidFill>
+                <a:latin typeface="Helvetica"/>
+              </a:rPr>
+              <a:t>•  ≈2× slower than baseline (53 → 26 FPS) — cost is the P2 level.</a:t>
+            </a:r>
+          </a:p>
+        </p:txBody>
+      </p:sp>
+      <p:sp>
+        <p:nvSpPr>
+          <p:cNvPr id="16" name="TextBox 15"/>
+          <p:cNvSpPr txBox="1"/>
+          <p:nvPr/>
+        </p:nvSpPr>
+        <p:spPr>
+          <a:xfrm>
+            <a:off x="640080" y="6080760"/>
+            <a:ext cx="10972800" cy="365760"/>
+          </a:xfrm>
+          <a:prstGeom prst="rect">
+            <a:avLst/>
+          </a:prstGeom>
+          <a:noFill/>
+        </p:spPr>
+        <p:txBody>
+          <a:bodyPr wrap="square" lIns="0" rIns="0" tIns="0" bIns="0" anchor="t">
+            <a:spAutoFit/>
+          </a:bodyPr>
+          <a:lstStyle/>
+          <a:p>
+            <a:pPr algn="ctr"/>
+            <a:r>
+              <a:rPr sz="1200" b="0" i="1">
+                <a:solidFill>
+                  <a:srgbClr val="666677"/>
+                </a:solidFill>
+                <a:latin typeface="Helvetica"/>
+              </a:rPr>
+              <a:t>Strong on accuracy; pays in inference speed. The next slide proposes a way to recover speed.</a:t>
+            </a:r>
+          </a:p>
+        </p:txBody>
+      </p:sp>
+      <p:sp>
+        <p:nvSpPr>
+          <p:cNvPr id="17" name="TextBox 16"/>
+          <p:cNvSpPr txBox="1"/>
+          <p:nvPr/>
+        </p:nvSpPr>
+        <p:spPr>
+          <a:xfrm>
+            <a:off x="640080" y="6446520"/>
+            <a:ext cx="9144000" cy="274320"/>
+          </a:xfrm>
+          <a:prstGeom prst="rect">
+            <a:avLst/>
+          </a:prstGeom>
+          <a:noFill/>
+        </p:spPr>
+        <p:txBody>
+          <a:bodyPr wrap="square" lIns="0" rIns="0" tIns="0" bIns="0" anchor="t">
+            <a:spAutoFit/>
+          </a:bodyPr>
+          <a:lstStyle/>
+          <a:p>
+            <a:pPr algn="l"/>
+            <a:r>
+              <a:rPr sz="1000" b="0" i="0">
+                <a:solidFill>
+                  <a:srgbClr val="666677"/>
+                </a:solidFill>
+                <a:latin typeface="Helvetica"/>
+              </a:rPr>
+              <a:t>5. Final Results  •  Feedback-Augmented RT-DETR  •  Hatem Saadallah &amp; Nour Jennane</a:t>
+            </a:r>
+          </a:p>
+        </p:txBody>
+      </p:sp>
+      <p:sp>
+        <p:nvSpPr>
+          <p:cNvPr id="18" name="TextBox 17"/>
+          <p:cNvSpPr txBox="1"/>
+          <p:nvPr/>
+        </p:nvSpPr>
+        <p:spPr>
+          <a:xfrm>
+            <a:off x="10515600" y="6446520"/>
+            <a:ext cx="1097280" cy="274320"/>
+          </a:xfrm>
+          <a:prstGeom prst="rect">
+            <a:avLst/>
+          </a:prstGeom>
+          <a:noFill/>
+        </p:spPr>
+        <p:txBody>
+          <a:bodyPr wrap="square" lIns="0" rIns="0" tIns="0" bIns="0" anchor="t">
+            <a:spAutoFit/>
+          </a:bodyPr>
+          <a:lstStyle/>
+          <a:p>
+            <a:pPr algn="r"/>
+            <a:r>
+              <a:rPr sz="1000" b="0" i="0">
+                <a:solidFill>
+                  <a:srgbClr val="666677"/>
+                </a:solidFill>
+                <a:latin typeface="Helvetica"/>
+              </a:rPr>
+              <a:t>23 / 27</a:t>
+            </a:r>
+          </a:p>
+        </p:txBody>
+      </p:sp>
+    </p:spTree>
+  </p:cSld>
+  <p:clrMapOvr>
+    <a:masterClrMapping/>
+  </p:clrMapOvr>
+</p:sld>
+</file>
+
+<file path=ppt/slides/slide25.xml><?xml version="1.0" encoding="utf-8"?>
+<p:sld xmlns:a="http://schemas.openxmlformats.org/drawingml/2006/main" xmlns:p="http://schemas.openxmlformats.org/presentationml/2006/main" xmlns:r="http://schemas.openxmlformats.org/officeDocument/2006/relationships">
+  <p:cSld>
+    <p:spTree>
+      <p:nvGrpSpPr>
+        <p:cNvPr id="1" name=""/>
+        <p:cNvGrpSpPr/>
+        <p:nvPr/>
+      </p:nvGrpSpPr>
+      <p:grpSpPr/>
+      <p:sp>
+        <p:nvSpPr>
+          <p:cNvPr id="2" name="TextBox 1"/>
+          <p:cNvSpPr txBox="1"/>
+          <p:nvPr/>
+        </p:nvSpPr>
+        <p:spPr>
+          <a:xfrm>
+            <a:off x="640080" y="457200"/>
+            <a:ext cx="10972800" cy="822960"/>
+          </a:xfrm>
+          <a:prstGeom prst="rect">
+            <a:avLst/>
+          </a:prstGeom>
+          <a:noFill/>
+        </p:spPr>
+        <p:txBody>
+          <a:bodyPr wrap="square" lIns="0" rIns="0" tIns="0" bIns="0" anchor="t">
+            <a:spAutoFit/>
+          </a:bodyPr>
+          <a:lstStyle/>
+          <a:p>
+            <a:pPr algn="l"/>
+            <a:r>
+              <a:rPr sz="3400" b="1" i="0">
+                <a:solidFill>
+                  <a:srgbClr val="1F6FEB"/>
+                </a:solidFill>
+                <a:latin typeface="Helvetica"/>
+              </a:rPr>
+              <a:t>Future work: recovering inference speed</a:t>
+            </a:r>
+          </a:p>
+        </p:txBody>
+      </p:sp>
+      <p:sp>
+        <p:nvSpPr>
+          <p:cNvPr id="3" name="Rectangle 2"/>
+          <p:cNvSpPr/>
+          <p:nvPr/>
+        </p:nvSpPr>
+        <p:spPr>
+          <a:xfrm>
+            <a:off x="640080" y="1143000"/>
+            <a:ext cx="640080" cy="54864"/>
+          </a:xfrm>
+          <a:prstGeom prst="rect">
+            <a:avLst/>
+          </a:prstGeom>
+          <a:solidFill>
+            <a:srgbClr val="1F6FEB"/>
+          </a:solidFill>
+          <a:ln>
+            <a:noFill/>
+          </a:ln>
+        </p:spPr>
+        <p:style>
+          <a:lnRef idx="1">
+            <a:schemeClr val="accent1"/>
+          </a:lnRef>
+          <a:fillRef idx="3">
+            <a:schemeClr val="accent1"/>
+          </a:fillRef>
+          <a:effectRef idx="2">
+            <a:schemeClr val="accent1"/>
+          </a:effectRef>
+          <a:fontRef idx="minor">
+            <a:schemeClr val="lt1"/>
+          </a:fontRef>
+        </p:style>
+        <p:txBody>
+          <a:bodyPr rtlCol="0" anchor="ctr"/>
+          <a:lstStyle/>
+          <a:p>
+            <a:pPr algn="ctr"/>
+          </a:p>
+        </p:txBody>
+      </p:sp>
+      <p:sp>
+        <p:nvSpPr>
+          <p:cNvPr id="4" name="TextBox 3"/>
+          <p:cNvSpPr txBox="1"/>
+          <p:nvPr/>
+        </p:nvSpPr>
+        <p:spPr>
+          <a:xfrm>
+            <a:off x="640080" y="1417320"/>
+            <a:ext cx="10972800" cy="457200"/>
+          </a:xfrm>
+          <a:prstGeom prst="rect">
+            <a:avLst/>
+          </a:prstGeom>
+          <a:noFill/>
+        </p:spPr>
+        <p:txBody>
+          <a:bodyPr wrap="square" lIns="0" rIns="0" tIns="0" bIns="0" anchor="t">
+            <a:spAutoFit/>
+          </a:bodyPr>
+          <a:lstStyle/>
+          <a:p>
+            <a:pPr algn="ctr"/>
+            <a:r>
+              <a:rPr sz="1800" b="0" i="1">
+                <a:solidFill>
+                  <a:srgbClr val="1A1A2E"/>
+                </a:solidFill>
+                <a:latin typeface="Helvetica"/>
+              </a:rPr>
+              <a:t>The 2× slowdown comes from the P2 level, not the feedback module.</a:t>
+            </a:r>
+          </a:p>
+        </p:txBody>
+      </p:sp>
+      <p:sp>
+        <p:nvSpPr>
+          <p:cNvPr id="5" name="Rounded Rectangle 4"/>
+          <p:cNvSpPr/>
+          <p:nvPr/>
+        </p:nvSpPr>
+        <p:spPr>
+          <a:xfrm>
+            <a:off x="640080" y="2194560"/>
+            <a:ext cx="3657600" cy="3657600"/>
+          </a:xfrm>
+          <a:prstGeom prst="roundRect">
+            <a:avLst/>
+          </a:prstGeom>
+          <a:solidFill>
+            <a:srgbClr val="F0F6FF"/>
+          </a:solidFill>
+          <a:ln w="15240">
+            <a:solidFill>
+              <a:srgbClr val="1F6FEB"/>
+            </a:solidFill>
+          </a:ln>
+          <a:effectLst/>
+        </p:spPr>
+        <p:style>
+          <a:lnRef idx="1">
+            <a:schemeClr val="accent1"/>
+          </a:lnRef>
+          <a:fillRef idx="3">
+            <a:schemeClr val="accent1"/>
+          </a:fillRef>
+          <a:effectRef idx="2">
+            <a:schemeClr val="accent1"/>
+          </a:effectRef>
+          <a:fontRef idx="minor">
+            <a:schemeClr val="lt1"/>
+          </a:fontRef>
+        </p:style>
+        <p:txBody>
+          <a:bodyPr rtlCol="0" anchor="ctr"/>
+          <a:lstStyle/>
+          <a:p>
+            <a:pPr algn="ctr"/>
+          </a:p>
+        </p:txBody>
+      </p:sp>
+      <p:sp>
+        <p:nvSpPr>
+          <p:cNvPr id="6" name="Oval 5"/>
+          <p:cNvSpPr/>
+          <p:nvPr/>
+        </p:nvSpPr>
+        <p:spPr>
+          <a:xfrm>
+            <a:off x="822960" y="2331720"/>
+            <a:ext cx="457200" cy="457200"/>
+          </a:xfrm>
+          <a:prstGeom prst="ellipse">
+            <a:avLst/>
+          </a:prstGeom>
+          <a:solidFill>
+            <a:srgbClr val="1F6FEB"/>
+          </a:solidFill>
+          <a:ln>
+            <a:noFill/>
+          </a:ln>
+        </p:spPr>
+        <p:style>
+          <a:lnRef idx="1">
+            <a:schemeClr val="accent1"/>
+          </a:lnRef>
+          <a:fillRef idx="3">
+            <a:schemeClr val="accent1"/>
+          </a:fillRef>
+          <a:effectRef idx="2">
+            <a:schemeClr val="accent1"/>
+          </a:effectRef>
+          <a:fontRef idx="minor">
+            <a:schemeClr val="lt1"/>
+          </a:fontRef>
+        </p:style>
+        <p:txBody>
+          <a:bodyPr rtlCol="0" anchor="ctr"/>
+          <a:lstStyle/>
+          <a:p>
+            <a:pPr algn="ctr"/>
+          </a:p>
+        </p:txBody>
+      </p:sp>
+      <p:sp>
+        <p:nvSpPr>
+          <p:cNvPr id="7" name="TextBox 6"/>
+          <p:cNvSpPr txBox="1"/>
+          <p:nvPr/>
+        </p:nvSpPr>
+        <p:spPr>
+          <a:xfrm>
+            <a:off x="822960" y="2359152"/>
+            <a:ext cx="457200" cy="457200"/>
+          </a:xfrm>
+          <a:prstGeom prst="rect">
+            <a:avLst/>
+          </a:prstGeom>
+          <a:noFill/>
+        </p:spPr>
+        <p:txBody>
+          <a:bodyPr wrap="square" lIns="0" rIns="0" tIns="0" bIns="0" anchor="t">
+            <a:spAutoFit/>
+          </a:bodyPr>
+          <a:lstStyle/>
+          <a:p>
+            <a:pPr algn="ctr"/>
+            <a:r>
+              <a:rPr sz="1800" b="1" i="0">
+                <a:solidFill>
+                  <a:srgbClr val="FFFFFF"/>
+                </a:solidFill>
+                <a:latin typeface="Helvetica"/>
+              </a:rPr>
+              <a:t>1</a:t>
+            </a:r>
+          </a:p>
+        </p:txBody>
+      </p:sp>
+      <p:sp>
+        <p:nvSpPr>
+          <p:cNvPr id="8" name="TextBox 7"/>
+          <p:cNvSpPr txBox="1"/>
+          <p:nvPr/>
+        </p:nvSpPr>
+        <p:spPr>
+          <a:xfrm>
+            <a:off x="1417320" y="2331720"/>
+            <a:ext cx="2743200" cy="548640"/>
+          </a:xfrm>
+          <a:prstGeom prst="rect">
+            <a:avLst/>
+          </a:prstGeom>
+          <a:noFill/>
+        </p:spPr>
+        <p:txBody>
+          <a:bodyPr wrap="square" lIns="0" rIns="0" tIns="0" bIns="0" anchor="t">
+            <a:spAutoFit/>
+          </a:bodyPr>
+          <a:lstStyle/>
+          <a:p>
+            <a:pPr algn="l"/>
+            <a:r>
+              <a:rPr sz="1400" b="1" i="0">
+                <a:solidFill>
+                  <a:srgbClr val="1A1A2E"/>
+                </a:solidFill>
+                <a:latin typeface="Helvetica"/>
+              </a:rPr>
+              <a:t>Train with P2, infer without</a:t>
+            </a:r>
+          </a:p>
+        </p:txBody>
+      </p:sp>
+      <p:sp>
+        <p:nvSpPr>
+          <p:cNvPr id="9" name="TextBox 8"/>
+          <p:cNvSpPr txBox="1"/>
+          <p:nvPr/>
+        </p:nvSpPr>
+        <p:spPr>
+          <a:xfrm>
+            <a:off x="822960" y="2971800"/>
+            <a:ext cx="3291840" cy="365760"/>
+          </a:xfrm>
+          <a:prstGeom prst="rect">
+            <a:avLst/>
+          </a:prstGeom>
+          <a:noFill/>
+        </p:spPr>
+        <p:txBody>
+          <a:bodyPr wrap="square" lIns="0" rIns="0" tIns="0" bIns="0" anchor="t">
+            <a:spAutoFit/>
+          </a:bodyPr>
+          <a:lstStyle/>
+          <a:p>
+            <a:pPr algn="l"/>
+            <a:r>
+              <a:rPr sz="1000" b="1" i="1">
+                <a:solidFill>
+                  <a:srgbClr val="1F6FEB"/>
+                </a:solidFill>
+                <a:latin typeface="Helvetica"/>
+              </a:rPr>
+              <a:t>fastest path</a:t>
+            </a:r>
+          </a:p>
+        </p:txBody>
+      </p:sp>
+      <p:sp>
+        <p:nvSpPr>
+          <p:cNvPr id="10" name="TextBox 9"/>
+          <p:cNvSpPr txBox="1"/>
+          <p:nvPr/>
+        </p:nvSpPr>
+        <p:spPr>
+          <a:xfrm>
+            <a:off x="822960" y="3429000"/>
+            <a:ext cx="3291840" cy="365760"/>
+          </a:xfrm>
+          <a:prstGeom prst="rect">
+            <a:avLst/>
+          </a:prstGeom>
+          <a:noFill/>
+        </p:spPr>
+        <p:txBody>
+          <a:bodyPr wrap="square" lIns="0" rIns="0" tIns="0" bIns="0" anchor="t">
+            <a:spAutoFit/>
+          </a:bodyPr>
+          <a:lstStyle/>
+          <a:p>
+            <a:pPr algn="l"/>
+            <a:r>
+              <a:rPr sz="1100" b="1" i="0">
+                <a:solidFill>
+                  <a:srgbClr val="1F6FEB"/>
+                </a:solidFill>
+                <a:latin typeface="Helvetica"/>
+              </a:rPr>
+              <a:t>How</a:t>
+            </a:r>
+          </a:p>
+        </p:txBody>
+      </p:sp>
+      <p:sp>
+        <p:nvSpPr>
+          <p:cNvPr id="11" name="TextBox 10"/>
+          <p:cNvSpPr txBox="1"/>
+          <p:nvPr/>
+        </p:nvSpPr>
+        <p:spPr>
+          <a:xfrm>
+            <a:off x="822960" y="3749039"/>
+            <a:ext cx="3291840" cy="1280160"/>
+          </a:xfrm>
+          <a:prstGeom prst="rect">
+            <a:avLst/>
+          </a:prstGeom>
+          <a:noFill/>
+        </p:spPr>
+        <p:txBody>
+          <a:bodyPr wrap="square" lIns="0" rIns="0" tIns="0" bIns="0" anchor="t">
+            <a:spAutoFit/>
+          </a:bodyPr>
+          <a:lstStyle/>
+          <a:p>
+            <a:pPr algn="l"/>
+            <a:r>
+              <a:rPr sz="1100" b="0" i="0">
+                <a:solidFill>
+                  <a:srgbClr val="1A1A2E"/>
+                </a:solidFill>
+                <a:latin typeface="Helvetica"/>
+              </a:rPr>
+              <a:t>Use P2 during training to improve small-object learning, then remove it at inference.</a:t>
+            </a:r>
+          </a:p>
+        </p:txBody>
+      </p:sp>
+      <p:sp>
+        <p:nvSpPr>
+          <p:cNvPr id="12" name="TextBox 11"/>
+          <p:cNvSpPr txBox="1"/>
+          <p:nvPr/>
+        </p:nvSpPr>
+        <p:spPr>
+          <a:xfrm>
+            <a:off x="822960" y="4846320"/>
+            <a:ext cx="3291840" cy="365760"/>
+          </a:xfrm>
+          <a:prstGeom prst="rect">
+            <a:avLst/>
+          </a:prstGeom>
+          <a:noFill/>
+        </p:spPr>
+        <p:txBody>
+          <a:bodyPr wrap="square" lIns="0" rIns="0" tIns="0" bIns="0" anchor="t">
+            <a:spAutoFit/>
+          </a:bodyPr>
+          <a:lstStyle/>
+          <a:p>
+            <a:pPr algn="l"/>
+            <a:r>
+              <a:rPr sz="1100" b="1" i="0">
+                <a:solidFill>
+                  <a:srgbClr val="2CA02C"/>
+                </a:solidFill>
+                <a:latin typeface="Helvetica"/>
+              </a:rPr>
+              <a:t>Goal</a:t>
+            </a:r>
+          </a:p>
+        </p:txBody>
+      </p:sp>
+      <p:sp>
+        <p:nvSpPr>
+          <p:cNvPr id="13" name="TextBox 12"/>
+          <p:cNvSpPr txBox="1"/>
+          <p:nvPr/>
+        </p:nvSpPr>
+        <p:spPr>
+          <a:xfrm>
+            <a:off x="822960" y="5166360"/>
+            <a:ext cx="3291840" cy="1280160"/>
+          </a:xfrm>
+          <a:prstGeom prst="rect">
+            <a:avLst/>
+          </a:prstGeom>
+          <a:noFill/>
+        </p:spPr>
+        <p:txBody>
+          <a:bodyPr wrap="square" lIns="0" rIns="0" tIns="0" bIns="0" anchor="t">
+            <a:spAutoFit/>
+          </a:bodyPr>
+          <a:lstStyle/>
+          <a:p>
+            <a:pPr algn="l"/>
+            <a:r>
+              <a:rPr sz="1100" b="0" i="0">
+                <a:solidFill>
+                  <a:srgbClr val="1A1A2E"/>
+                </a:solidFill>
+                <a:latin typeface="Helvetica"/>
+              </a:rPr>
+              <a:t>Keep most of the +0.99 small-object AP gain without the P2 computational cost.</a:t>
+            </a:r>
+          </a:p>
+        </p:txBody>
+      </p:sp>
+      <p:sp>
+        <p:nvSpPr>
+          <p:cNvPr id="14" name="Rounded Rectangle 13"/>
+          <p:cNvSpPr/>
+          <p:nvPr/>
+        </p:nvSpPr>
+        <p:spPr>
+          <a:xfrm>
+            <a:off x="4434840" y="2194560"/>
+            <a:ext cx="3657600" cy="3657600"/>
+          </a:xfrm>
+          <a:prstGeom prst="roundRect">
+            <a:avLst/>
+          </a:prstGeom>
+          <a:solidFill>
+            <a:srgbClr val="F0F6FF"/>
+          </a:solidFill>
+          <a:ln w="15240">
+            <a:solidFill>
+              <a:srgbClr val="1F6FEB"/>
+            </a:solidFill>
+          </a:ln>
+          <a:effectLst/>
+        </p:spPr>
+        <p:style>
+          <a:lnRef idx="1">
+            <a:schemeClr val="accent1"/>
+          </a:lnRef>
+          <a:fillRef idx="3">
+            <a:schemeClr val="accent1"/>
+          </a:fillRef>
+          <a:effectRef idx="2">
+            <a:schemeClr val="accent1"/>
+          </a:effectRef>
+          <a:fontRef idx="minor">
+            <a:schemeClr val="lt1"/>
+          </a:fontRef>
+        </p:style>
+        <p:txBody>
+          <a:bodyPr rtlCol="0" anchor="ctr"/>
+          <a:lstStyle/>
+          <a:p>
+            <a:pPr algn="ctr"/>
+          </a:p>
+        </p:txBody>
+      </p:sp>
+      <p:sp>
+        <p:nvSpPr>
+          <p:cNvPr id="15" name="Oval 14"/>
+          <p:cNvSpPr/>
+          <p:nvPr/>
+        </p:nvSpPr>
+        <p:spPr>
+          <a:xfrm>
+            <a:off x="4617720" y="2331720"/>
+            <a:ext cx="457200" cy="457200"/>
+          </a:xfrm>
+          <a:prstGeom prst="ellipse">
+            <a:avLst/>
+          </a:prstGeom>
+          <a:solidFill>
+            <a:srgbClr val="1F6FEB"/>
+          </a:solidFill>
+          <a:ln>
+            <a:noFill/>
+          </a:ln>
+        </p:spPr>
+        <p:style>
+          <a:lnRef idx="1">
+            <a:schemeClr val="accent1"/>
+          </a:lnRef>
+          <a:fillRef idx="3">
+            <a:schemeClr val="accent1"/>
+          </a:fillRef>
+          <a:effectRef idx="2">
+            <a:schemeClr val="accent1"/>
+          </a:effectRef>
+          <a:fontRef idx="minor">
+            <a:schemeClr val="lt1"/>
+          </a:fontRef>
+        </p:style>
+        <p:txBody>
+          <a:bodyPr rtlCol="0" anchor="ctr"/>
+          <a:lstStyle/>
+          <a:p>
+            <a:pPr algn="ctr"/>
+          </a:p>
+        </p:txBody>
+      </p:sp>
+      <p:sp>
+        <p:nvSpPr>
+          <p:cNvPr id="16" name="TextBox 15"/>
+          <p:cNvSpPr txBox="1"/>
+          <p:nvPr/>
+        </p:nvSpPr>
+        <p:spPr>
+          <a:xfrm>
+            <a:off x="4617720" y="2359152"/>
+            <a:ext cx="457200" cy="457200"/>
+          </a:xfrm>
+          <a:prstGeom prst="rect">
+            <a:avLst/>
+          </a:prstGeom>
+          <a:noFill/>
+        </p:spPr>
+        <p:txBody>
+          <a:bodyPr wrap="square" lIns="0" rIns="0" tIns="0" bIns="0" anchor="t">
+            <a:spAutoFit/>
+          </a:bodyPr>
+          <a:lstStyle/>
+          <a:p>
+            <a:pPr algn="ctr"/>
+            <a:r>
+              <a:rPr sz="1800" b="1" i="0">
+                <a:solidFill>
+                  <a:srgbClr val="FFFFFF"/>
+                </a:solidFill>
+                <a:latin typeface="Helvetica"/>
+              </a:rPr>
+              <a:t>2</a:t>
+            </a:r>
+          </a:p>
+        </p:txBody>
+      </p:sp>
+      <p:sp>
+        <p:nvSpPr>
+          <p:cNvPr id="17" name="TextBox 16"/>
+          <p:cNvSpPr txBox="1"/>
+          <p:nvPr/>
+        </p:nvSpPr>
+        <p:spPr>
+          <a:xfrm>
+            <a:off x="5212080" y="2331720"/>
+            <a:ext cx="2743200" cy="548640"/>
+          </a:xfrm>
+          <a:prstGeom prst="rect">
+            <a:avLst/>
+          </a:prstGeom>
+          <a:noFill/>
+        </p:spPr>
+        <p:txBody>
+          <a:bodyPr wrap="square" lIns="0" rIns="0" tIns="0" bIns="0" anchor="t">
+            <a:spAutoFit/>
+          </a:bodyPr>
+          <a:lstStyle/>
+          <a:p>
+            <a:pPr algn="l"/>
+            <a:r>
+              <a:rPr sz="1400" b="1" i="0">
+                <a:solidFill>
+                  <a:srgbClr val="1A1A2E"/>
+                </a:solidFill>
+                <a:latin typeface="Helvetica"/>
+              </a:rPr>
+              <a:t>Lighter P2 path</a:t>
+            </a:r>
+          </a:p>
+        </p:txBody>
+      </p:sp>
+      <p:sp>
+        <p:nvSpPr>
+          <p:cNvPr id="18" name="TextBox 17"/>
+          <p:cNvSpPr txBox="1"/>
+          <p:nvPr/>
+        </p:nvSpPr>
+        <p:spPr>
+          <a:xfrm>
+            <a:off x="4617720" y="2971800"/>
+            <a:ext cx="3291840" cy="365760"/>
+          </a:xfrm>
+          <a:prstGeom prst="rect">
+            <a:avLst/>
+          </a:prstGeom>
+          <a:noFill/>
+        </p:spPr>
+        <p:txBody>
+          <a:bodyPr wrap="square" lIns="0" rIns="0" tIns="0" bIns="0" anchor="t">
+            <a:spAutoFit/>
+          </a:bodyPr>
+          <a:lstStyle/>
+          <a:p>
+            <a:pPr algn="l"/>
+            <a:r>
+              <a:rPr sz="1000" b="1" i="1">
+                <a:solidFill>
+                  <a:srgbClr val="1F6FEB"/>
+                </a:solidFill>
+                <a:latin typeface="Helvetica"/>
+              </a:rPr>
+              <a:t>compromise</a:t>
+            </a:r>
+          </a:p>
+        </p:txBody>
+      </p:sp>
+      <p:sp>
+        <p:nvSpPr>
+          <p:cNvPr id="19" name="TextBox 18"/>
+          <p:cNvSpPr txBox="1"/>
+          <p:nvPr/>
+        </p:nvSpPr>
+        <p:spPr>
+          <a:xfrm>
+            <a:off x="4617720" y="3429000"/>
+            <a:ext cx="3291840" cy="365760"/>
+          </a:xfrm>
+          <a:prstGeom prst="rect">
+            <a:avLst/>
+          </a:prstGeom>
+          <a:noFill/>
+        </p:spPr>
+        <p:txBody>
+          <a:bodyPr wrap="square" lIns="0" rIns="0" tIns="0" bIns="0" anchor="t">
+            <a:spAutoFit/>
+          </a:bodyPr>
+          <a:lstStyle/>
+          <a:p>
+            <a:pPr algn="l"/>
+            <a:r>
+              <a:rPr sz="1100" b="1" i="0">
+                <a:solidFill>
+                  <a:srgbClr val="1F6FEB"/>
+                </a:solidFill>
+                <a:latin typeface="Helvetica"/>
+              </a:rPr>
+              <a:t>How</a:t>
+            </a:r>
+          </a:p>
+        </p:txBody>
+      </p:sp>
+      <p:sp>
+        <p:nvSpPr>
+          <p:cNvPr id="20" name="TextBox 19"/>
+          <p:cNvSpPr txBox="1"/>
+          <p:nvPr/>
+        </p:nvSpPr>
+        <p:spPr>
+          <a:xfrm>
+            <a:off x="4617720" y="3749039"/>
+            <a:ext cx="3291840" cy="1280160"/>
+          </a:xfrm>
+          <a:prstGeom prst="rect">
+            <a:avLst/>
+          </a:prstGeom>
+          <a:noFill/>
+        </p:spPr>
+        <p:txBody>
+          <a:bodyPr wrap="square" lIns="0" rIns="0" tIns="0" bIns="0" anchor="t">
+            <a:spAutoFit/>
+          </a:bodyPr>
+          <a:lstStyle/>
+          <a:p>
+            <a:pPr algn="l"/>
+            <a:r>
+              <a:rPr sz="1100" b="0" i="0">
+                <a:solidFill>
+                  <a:srgbClr val="1A1A2E"/>
+                </a:solidFill>
+                <a:latin typeface="Helvetica"/>
+              </a:rPr>
+              <a:t>Reduce the cost of P2 — fewer channels, or a simpler projection layer.</a:t>
+            </a:r>
+          </a:p>
+        </p:txBody>
+      </p:sp>
+      <p:sp>
+        <p:nvSpPr>
+          <p:cNvPr id="21" name="TextBox 20"/>
+          <p:cNvSpPr txBox="1"/>
+          <p:nvPr/>
+        </p:nvSpPr>
+        <p:spPr>
+          <a:xfrm>
+            <a:off x="4617720" y="4846320"/>
+            <a:ext cx="3291840" cy="365760"/>
+          </a:xfrm>
+          <a:prstGeom prst="rect">
+            <a:avLst/>
+          </a:prstGeom>
+          <a:noFill/>
+        </p:spPr>
+        <p:txBody>
+          <a:bodyPr wrap="square" lIns="0" rIns="0" tIns="0" bIns="0" anchor="t">
+            <a:spAutoFit/>
+          </a:bodyPr>
+          <a:lstStyle/>
+          <a:p>
+            <a:pPr algn="l"/>
+            <a:r>
+              <a:rPr sz="1100" b="1" i="0">
+                <a:solidFill>
+                  <a:srgbClr val="2CA02C"/>
+                </a:solidFill>
+                <a:latin typeface="Helvetica"/>
+              </a:rPr>
+              <a:t>Goal</a:t>
+            </a:r>
+          </a:p>
+        </p:txBody>
+      </p:sp>
+      <p:sp>
+        <p:nvSpPr>
+          <p:cNvPr id="22" name="TextBox 21"/>
+          <p:cNvSpPr txBox="1"/>
+          <p:nvPr/>
+        </p:nvSpPr>
+        <p:spPr>
+          <a:xfrm>
+            <a:off x="4617720" y="5166360"/>
+            <a:ext cx="3291840" cy="1280160"/>
+          </a:xfrm>
+          <a:prstGeom prst="rect">
+            <a:avLst/>
+          </a:prstGeom>
+          <a:noFill/>
+        </p:spPr>
+        <p:txBody>
+          <a:bodyPr wrap="square" lIns="0" rIns="0" tIns="0" bIns="0" anchor="t">
+            <a:spAutoFit/>
+          </a:bodyPr>
+          <a:lstStyle/>
+          <a:p>
+            <a:pPr algn="l"/>
+            <a:r>
+              <a:rPr sz="1100" b="0" i="0">
+                <a:solidFill>
+                  <a:srgbClr val="1A1A2E"/>
+                </a:solidFill>
+                <a:latin typeface="Helvetica"/>
+              </a:rPr>
+              <a:t>Preserve small-object improvements while reducing the high-resolution P2 slowdown.</a:t>
+            </a:r>
+          </a:p>
+        </p:txBody>
+      </p:sp>
+      <p:sp>
+        <p:nvSpPr>
+          <p:cNvPr id="23" name="Rounded Rectangle 22"/>
+          <p:cNvSpPr/>
+          <p:nvPr/>
+        </p:nvSpPr>
+        <p:spPr>
+          <a:xfrm>
+            <a:off x="8229600" y="2194560"/>
+            <a:ext cx="3657600" cy="3657600"/>
+          </a:xfrm>
+          <a:prstGeom prst="roundRect">
+            <a:avLst/>
+          </a:prstGeom>
+          <a:solidFill>
+            <a:srgbClr val="F0F6FF"/>
+          </a:solidFill>
+          <a:ln w="15240">
+            <a:solidFill>
+              <a:srgbClr val="1F6FEB"/>
+            </a:solidFill>
+          </a:ln>
+          <a:effectLst/>
+        </p:spPr>
+        <p:style>
+          <a:lnRef idx="1">
+            <a:schemeClr val="accent1"/>
+          </a:lnRef>
+          <a:fillRef idx="3">
+            <a:schemeClr val="accent1"/>
+          </a:fillRef>
+          <a:effectRef idx="2">
+            <a:schemeClr val="accent1"/>
+          </a:effectRef>
+          <a:fontRef idx="minor">
+            <a:schemeClr val="lt1"/>
+          </a:fontRef>
+        </p:style>
+        <p:txBody>
+          <a:bodyPr rtlCol="0" anchor="ctr"/>
+          <a:lstStyle/>
+          <a:p>
+            <a:pPr algn="ctr"/>
+          </a:p>
+        </p:txBody>
+      </p:sp>
+      <p:sp>
+        <p:nvSpPr>
+          <p:cNvPr id="24" name="Oval 23"/>
+          <p:cNvSpPr/>
+          <p:nvPr/>
+        </p:nvSpPr>
+        <p:spPr>
+          <a:xfrm>
+            <a:off x="8412480" y="2331720"/>
+            <a:ext cx="457200" cy="457200"/>
+          </a:xfrm>
+          <a:prstGeom prst="ellipse">
+            <a:avLst/>
+          </a:prstGeom>
+          <a:solidFill>
+            <a:srgbClr val="1F6FEB"/>
+          </a:solidFill>
+          <a:ln>
+            <a:noFill/>
+          </a:ln>
+        </p:spPr>
+        <p:style>
+          <a:lnRef idx="1">
+            <a:schemeClr val="accent1"/>
+          </a:lnRef>
+          <a:fillRef idx="3">
+            <a:schemeClr val="accent1"/>
+          </a:fillRef>
+          <a:effectRef idx="2">
+            <a:schemeClr val="accent1"/>
+          </a:effectRef>
+          <a:fontRef idx="minor">
+            <a:schemeClr val="lt1"/>
+          </a:fontRef>
+        </p:style>
+        <p:txBody>
+          <a:bodyPr rtlCol="0" anchor="ctr"/>
+          <a:lstStyle/>
+          <a:p>
+            <a:pPr algn="ctr"/>
+          </a:p>
+        </p:txBody>
+      </p:sp>
+      <p:sp>
+        <p:nvSpPr>
+          <p:cNvPr id="25" name="TextBox 24"/>
+          <p:cNvSpPr txBox="1"/>
+          <p:nvPr/>
+        </p:nvSpPr>
+        <p:spPr>
+          <a:xfrm>
+            <a:off x="8412480" y="2359152"/>
+            <a:ext cx="457200" cy="457200"/>
+          </a:xfrm>
+          <a:prstGeom prst="rect">
+            <a:avLst/>
+          </a:prstGeom>
+          <a:noFill/>
+        </p:spPr>
+        <p:txBody>
+          <a:bodyPr wrap="square" lIns="0" rIns="0" tIns="0" bIns="0" anchor="t">
+            <a:spAutoFit/>
+          </a:bodyPr>
+          <a:lstStyle/>
+          <a:p>
+            <a:pPr algn="ctr"/>
+            <a:r>
+              <a:rPr sz="1800" b="1" i="0">
+                <a:solidFill>
+                  <a:srgbClr val="FFFFFF"/>
+                </a:solidFill>
+                <a:latin typeface="Helvetica"/>
+              </a:rPr>
+              <a:t>3</a:t>
+            </a:r>
+          </a:p>
+        </p:txBody>
+      </p:sp>
+      <p:sp>
+        <p:nvSpPr>
+          <p:cNvPr id="26" name="TextBox 25"/>
+          <p:cNvSpPr txBox="1"/>
+          <p:nvPr/>
+        </p:nvSpPr>
+        <p:spPr>
+          <a:xfrm>
+            <a:off x="9006840" y="2331720"/>
+            <a:ext cx="2743200" cy="548640"/>
+          </a:xfrm>
+          <a:prstGeom prst="rect">
+            <a:avLst/>
+          </a:prstGeom>
+          <a:noFill/>
+        </p:spPr>
+        <p:txBody>
+          <a:bodyPr wrap="square" lIns="0" rIns="0" tIns="0" bIns="0" anchor="t">
+            <a:spAutoFit/>
+          </a:bodyPr>
+          <a:lstStyle/>
+          <a:p>
+            <a:pPr algn="l"/>
+            <a:r>
+              <a:rPr sz="1400" b="1" i="0">
+                <a:solidFill>
+                  <a:srgbClr val="1A1A2E"/>
+                </a:solidFill>
+                <a:latin typeface="Helvetica"/>
+              </a:rPr>
+              <a:t>Knowledge distillation</a:t>
+            </a:r>
+          </a:p>
+        </p:txBody>
+      </p:sp>
+      <p:sp>
+        <p:nvSpPr>
+          <p:cNvPr id="27" name="TextBox 26"/>
+          <p:cNvSpPr txBox="1"/>
+          <p:nvPr/>
+        </p:nvSpPr>
+        <p:spPr>
+          <a:xfrm>
+            <a:off x="8412480" y="2971800"/>
+            <a:ext cx="3291840" cy="365760"/>
+          </a:xfrm>
+          <a:prstGeom prst="rect">
+            <a:avLst/>
+          </a:prstGeom>
+          <a:noFill/>
+        </p:spPr>
+        <p:txBody>
+          <a:bodyPr wrap="square" lIns="0" rIns="0" tIns="0" bIns="0" anchor="t">
+            <a:spAutoFit/>
+          </a:bodyPr>
+          <a:lstStyle/>
+          <a:p>
+            <a:pPr algn="l"/>
+            <a:r>
+              <a:rPr sz="1000" b="1" i="1">
+                <a:solidFill>
+                  <a:srgbClr val="1F6FEB"/>
+                </a:solidFill>
+                <a:latin typeface="Helvetica"/>
+              </a:rPr>
+              <a:t>principled</a:t>
+            </a:r>
+          </a:p>
+        </p:txBody>
+      </p:sp>
+      <p:sp>
+        <p:nvSpPr>
+          <p:cNvPr id="28" name="TextBox 27"/>
+          <p:cNvSpPr txBox="1"/>
+          <p:nvPr/>
+        </p:nvSpPr>
+        <p:spPr>
+          <a:xfrm>
+            <a:off x="8412480" y="3429000"/>
+            <a:ext cx="3291840" cy="365760"/>
+          </a:xfrm>
+          <a:prstGeom prst="rect">
+            <a:avLst/>
+          </a:prstGeom>
+          <a:noFill/>
+        </p:spPr>
+        <p:txBody>
+          <a:bodyPr wrap="square" lIns="0" rIns="0" tIns="0" bIns="0" anchor="t">
+            <a:spAutoFit/>
+          </a:bodyPr>
+          <a:lstStyle/>
+          <a:p>
+            <a:pPr algn="l"/>
+            <a:r>
+              <a:rPr sz="1100" b="1" i="0">
+                <a:solidFill>
+                  <a:srgbClr val="1F6FEB"/>
+                </a:solidFill>
+                <a:latin typeface="Helvetica"/>
+              </a:rPr>
+              <a:t>How</a:t>
+            </a:r>
+          </a:p>
+        </p:txBody>
+      </p:sp>
+      <p:sp>
+        <p:nvSpPr>
+          <p:cNvPr id="29" name="TextBox 28"/>
+          <p:cNvSpPr txBox="1"/>
+          <p:nvPr/>
+        </p:nvSpPr>
+        <p:spPr>
+          <a:xfrm>
+            <a:off x="8412480" y="3749039"/>
+            <a:ext cx="3291840" cy="1280160"/>
+          </a:xfrm>
+          <a:prstGeom prst="rect">
+            <a:avLst/>
+          </a:prstGeom>
+          <a:noFill/>
+        </p:spPr>
+        <p:txBody>
+          <a:bodyPr wrap="square" lIns="0" rIns="0" tIns="0" bIns="0" anchor="t">
+            <a:spAutoFit/>
+          </a:bodyPr>
+          <a:lstStyle/>
+          <a:p>
+            <a:pPr algn="l"/>
+            <a:r>
+              <a:rPr sz="1100" b="0" i="0">
+                <a:solidFill>
+                  <a:srgbClr val="1A1A2E"/>
+                </a:solidFill>
+                <a:latin typeface="Helvetica"/>
+              </a:rPr>
+              <a:t>Transfer v2's small-object improvements into a faster baseline RT-DETR student.</a:t>
+            </a:r>
+          </a:p>
+        </p:txBody>
+      </p:sp>
+      <p:sp>
+        <p:nvSpPr>
+          <p:cNvPr id="30" name="TextBox 29"/>
+          <p:cNvSpPr txBox="1"/>
+          <p:nvPr/>
+        </p:nvSpPr>
+        <p:spPr>
+          <a:xfrm>
+            <a:off x="8412480" y="4846320"/>
+            <a:ext cx="3291840" cy="365760"/>
+          </a:xfrm>
+          <a:prstGeom prst="rect">
+            <a:avLst/>
+          </a:prstGeom>
+          <a:noFill/>
+        </p:spPr>
+        <p:txBody>
+          <a:bodyPr wrap="square" lIns="0" rIns="0" tIns="0" bIns="0" anchor="t">
+            <a:spAutoFit/>
+          </a:bodyPr>
+          <a:lstStyle/>
+          <a:p>
+            <a:pPr algn="l"/>
+            <a:r>
+              <a:rPr sz="1100" b="1" i="0">
+                <a:solidFill>
+                  <a:srgbClr val="2CA02C"/>
+                </a:solidFill>
+                <a:latin typeface="Helvetica"/>
+              </a:rPr>
+              <a:t>Goal</a:t>
+            </a:r>
+          </a:p>
+        </p:txBody>
+      </p:sp>
+      <p:sp>
+        <p:nvSpPr>
+          <p:cNvPr id="31" name="TextBox 30"/>
+          <p:cNvSpPr txBox="1"/>
+          <p:nvPr/>
+        </p:nvSpPr>
+        <p:spPr>
+          <a:xfrm>
+            <a:off x="8412480" y="5166360"/>
+            <a:ext cx="3291840" cy="1280160"/>
+          </a:xfrm>
+          <a:prstGeom prst="rect">
+            <a:avLst/>
+          </a:prstGeom>
+          <a:noFill/>
+        </p:spPr>
+        <p:txBody>
+          <a:bodyPr wrap="square" lIns="0" rIns="0" tIns="0" bIns="0" anchor="t">
+            <a:spAutoFit/>
+          </a:bodyPr>
+          <a:lstStyle/>
+          <a:p>
+            <a:pPr algn="l"/>
+            <a:r>
+              <a:rPr sz="1100" b="0" i="0">
+                <a:solidFill>
+                  <a:srgbClr val="1A1A2E"/>
+                </a:solidFill>
+                <a:latin typeface="Helvetica"/>
+              </a:rPr>
+              <a:t>Recover baseline inference speed while retaining the small-object AP gains learned from P2 feedback.</a:t>
+            </a:r>
+          </a:p>
+        </p:txBody>
+      </p:sp>
+      <p:sp>
+        <p:nvSpPr>
+          <p:cNvPr id="32" name="TextBox 31"/>
+          <p:cNvSpPr txBox="1"/>
+          <p:nvPr/>
+        </p:nvSpPr>
+        <p:spPr>
+          <a:xfrm>
+            <a:off x="640080" y="6126480"/>
+            <a:ext cx="10972800" cy="365760"/>
+          </a:xfrm>
+          <a:prstGeom prst="rect">
+            <a:avLst/>
+          </a:prstGeom>
+          <a:noFill/>
+        </p:spPr>
+        <p:txBody>
+          <a:bodyPr wrap="square" lIns="0" rIns="0" tIns="0" bIns="0" anchor="t">
+            <a:spAutoFit/>
+          </a:bodyPr>
+          <a:lstStyle/>
+          <a:p>
+            <a:pPr algn="ctr"/>
+            <a:r>
+              <a:rPr sz="1300" b="1" i="0">
+                <a:solidFill>
+                  <a:srgbClr val="1F6FEB"/>
+                </a:solidFill>
+                <a:latin typeface="Helvetica"/>
+              </a:rPr>
+              <a:t>Common goal: keep the +0.99 small-object AP gain while approaching the 53 FPS baseline.</a:t>
+            </a:r>
+          </a:p>
+        </p:txBody>
+      </p:sp>
+      <p:sp>
+        <p:nvSpPr>
+          <p:cNvPr id="33" name="TextBox 32"/>
+          <p:cNvSpPr txBox="1"/>
+          <p:nvPr/>
+        </p:nvSpPr>
+        <p:spPr>
+          <a:xfrm>
+            <a:off x="640080" y="6446520"/>
+            <a:ext cx="9144000" cy="274320"/>
+          </a:xfrm>
+          <a:prstGeom prst="rect">
+            <a:avLst/>
+          </a:prstGeom>
+          <a:noFill/>
+        </p:spPr>
+        <p:txBody>
+          <a:bodyPr wrap="square" lIns="0" rIns="0" tIns="0" bIns="0" anchor="t">
+            <a:spAutoFit/>
+          </a:bodyPr>
+          <a:lstStyle/>
+          <a:p>
+            <a:pPr algn="l"/>
+            <a:r>
+              <a:rPr sz="1000" b="0" i="0">
+                <a:solidFill>
+                  <a:srgbClr val="666677"/>
+                </a:solidFill>
+                <a:latin typeface="Helvetica"/>
+              </a:rPr>
+              <a:t>5. Final Results  •  Feedback-Augmented RT-DETR  •  Hatem Saadallah &amp; Nour Jennane</a:t>
+            </a:r>
+          </a:p>
+        </p:txBody>
+      </p:sp>
+      <p:sp>
+        <p:nvSpPr>
+          <p:cNvPr id="34" name="TextBox 33"/>
+          <p:cNvSpPr txBox="1"/>
+          <p:nvPr/>
+        </p:nvSpPr>
+        <p:spPr>
+          <a:xfrm>
+            <a:off x="10515600" y="6446520"/>
+            <a:ext cx="1097280" cy="274320"/>
+          </a:xfrm>
+          <a:prstGeom prst="rect">
+            <a:avLst/>
+          </a:prstGeom>
+          <a:noFill/>
+        </p:spPr>
+        <p:txBody>
+          <a:bodyPr wrap="square" lIns="0" rIns="0" tIns="0" bIns="0" anchor="t">
+            <a:spAutoFit/>
+          </a:bodyPr>
+          <a:lstStyle/>
+          <a:p>
+            <a:pPr algn="r"/>
+            <a:r>
+              <a:rPr sz="1000" b="0" i="0">
+                <a:solidFill>
+                  <a:srgbClr val="666677"/>
+                </a:solidFill>
+                <a:latin typeface="Helvetica"/>
+              </a:rPr>
+              <a:t>24 / 27</a:t>
+            </a:r>
+          </a:p>
+        </p:txBody>
+      </p:sp>
+    </p:spTree>
+  </p:cSld>
+  <p:clrMapOvr>
+    <a:masterClrMapping/>
+  </p:clrMapOvr>
+</p:sld>
+</file>
+
+<file path=ppt/slides/slide26.xml><?xml version="1.0" encoding="utf-8"?>
+<p:sld xmlns:a="http://schemas.openxmlformats.org/drawingml/2006/main" xmlns:p="http://schemas.openxmlformats.org/presentationml/2006/main" xmlns:r="http://schemas.openxmlformats.org/officeDocument/2006/relationships">
+  <p:cSld>
+    <p:spTree>
+      <p:nvGrpSpPr>
+        <p:cNvPr id="1" name=""/>
+        <p:cNvGrpSpPr/>
+        <p:nvPr/>
+      </p:nvGrpSpPr>
+      <p:grpSpPr/>
+      <p:sp>
+        <p:nvSpPr>
+          <p:cNvPr id="2" name="TextBox 1"/>
+          <p:cNvSpPr txBox="1"/>
+          <p:nvPr/>
+        </p:nvSpPr>
+        <p:spPr>
+          <a:xfrm>
+            <a:off x="640080" y="457200"/>
+            <a:ext cx="10972800" cy="822960"/>
+          </a:xfrm>
+          <a:prstGeom prst="rect">
+            <a:avLst/>
+          </a:prstGeom>
+          <a:noFill/>
+        </p:spPr>
+        <p:txBody>
+          <a:bodyPr wrap="square" lIns="0" rIns="0" tIns="0" bIns="0" anchor="t">
+            <a:spAutoFit/>
+          </a:bodyPr>
+          <a:lstStyle/>
+          <a:p>
+            <a:pPr algn="l"/>
+            <a:r>
+              <a:rPr sz="3400" b="1" i="0">
+                <a:solidFill>
+                  <a:srgbClr val="1F6FEB"/>
+                </a:solidFill>
+                <a:latin typeface="Helvetica"/>
+              </a:rPr>
+              <a:t>Conclusion</a:t>
+            </a:r>
+          </a:p>
+        </p:txBody>
+      </p:sp>
+      <p:sp>
+        <p:nvSpPr>
+          <p:cNvPr id="3" name="Rectangle 2"/>
+          <p:cNvSpPr/>
+          <p:nvPr/>
+        </p:nvSpPr>
+        <p:spPr>
+          <a:xfrm>
+            <a:off x="640080" y="1143000"/>
+            <a:ext cx="640080" cy="54864"/>
+          </a:xfrm>
+          <a:prstGeom prst="rect">
+            <a:avLst/>
+          </a:prstGeom>
+          <a:solidFill>
+            <a:srgbClr val="1F6FEB"/>
+          </a:solidFill>
+          <a:ln>
+            <a:noFill/>
+          </a:ln>
+        </p:spPr>
+        <p:style>
+          <a:lnRef idx="1">
+            <a:schemeClr val="accent1"/>
+          </a:lnRef>
+          <a:fillRef idx="3">
+            <a:schemeClr val="accent1"/>
+          </a:fillRef>
+          <a:effectRef idx="2">
+            <a:schemeClr val="accent1"/>
+          </a:effectRef>
+          <a:fontRef idx="minor">
+            <a:schemeClr val="lt1"/>
+          </a:fontRef>
+        </p:style>
+        <p:txBody>
+          <a:bodyPr rtlCol="0" anchor="ctr"/>
+          <a:lstStyle/>
+          <a:p>
+            <a:pPr algn="ctr"/>
+          </a:p>
+        </p:txBody>
+      </p:sp>
+      <p:sp>
+        <p:nvSpPr>
+          <p:cNvPr id="4" name="Oval 3"/>
+          <p:cNvSpPr/>
+          <p:nvPr/>
+        </p:nvSpPr>
+        <p:spPr>
+          <a:xfrm>
+            <a:off x="822960" y="1965960"/>
+            <a:ext cx="502920" cy="502920"/>
+          </a:xfrm>
+          <a:prstGeom prst="ellipse">
+            <a:avLst/>
+          </a:prstGeom>
+          <a:solidFill>
+            <a:srgbClr val="1F6FEB"/>
+          </a:solidFill>
+          <a:ln>
+            <a:noFill/>
+          </a:ln>
+        </p:spPr>
+        <p:style>
+          <a:lnRef idx="1">
+            <a:schemeClr val="accent1"/>
+          </a:lnRef>
+          <a:fillRef idx="3">
+            <a:schemeClr val="accent1"/>
+          </a:fillRef>
+          <a:effectRef idx="2">
+            <a:schemeClr val="accent1"/>
+          </a:effectRef>
+          <a:fontRef idx="minor">
+            <a:schemeClr val="lt1"/>
+          </a:fontRef>
+        </p:style>
+        <p:txBody>
+          <a:bodyPr rtlCol="0" anchor="ctr"/>
+          <a:lstStyle/>
+          <a:p>
+            <a:pPr algn="ctr"/>
+          </a:p>
+        </p:txBody>
+      </p:sp>
+      <p:sp>
+        <p:nvSpPr>
+          <p:cNvPr id="5" name="TextBox 4"/>
+          <p:cNvSpPr txBox="1"/>
+          <p:nvPr/>
+        </p:nvSpPr>
+        <p:spPr>
+          <a:xfrm>
+            <a:off x="822960" y="1993392"/>
+            <a:ext cx="502920" cy="502920"/>
+          </a:xfrm>
+          <a:prstGeom prst="rect">
+            <a:avLst/>
+          </a:prstGeom>
+          <a:noFill/>
+        </p:spPr>
+        <p:txBody>
+          <a:bodyPr wrap="square" lIns="0" rIns="0" tIns="0" bIns="0" anchor="t">
+            <a:spAutoFit/>
+          </a:bodyPr>
+          <a:lstStyle/>
+          <a:p>
+            <a:pPr algn="ctr"/>
+            <a:r>
+              <a:rPr sz="2000" b="1" i="0">
+                <a:solidFill>
+                  <a:srgbClr val="FFFFFF"/>
+                </a:solidFill>
+                <a:latin typeface="Helvetica"/>
+              </a:rPr>
+              <a:t>1</a:t>
+            </a:r>
+          </a:p>
+        </p:txBody>
+      </p:sp>
+      <p:sp>
+        <p:nvSpPr>
+          <p:cNvPr id="6" name="TextBox 5"/>
+          <p:cNvSpPr txBox="1"/>
+          <p:nvPr/>
+        </p:nvSpPr>
+        <p:spPr>
+          <a:xfrm>
+            <a:off x="1554480" y="1874520"/>
+            <a:ext cx="10058400" cy="548640"/>
+          </a:xfrm>
+          <a:prstGeom prst="rect">
+            <a:avLst/>
+          </a:prstGeom>
+          <a:noFill/>
+        </p:spPr>
+        <p:txBody>
+          <a:bodyPr wrap="square" lIns="0" rIns="0" tIns="0" bIns="0" anchor="t">
+            <a:spAutoFit/>
+          </a:bodyPr>
+          <a:lstStyle/>
+          <a:p>
+            <a:pPr algn="l"/>
+            <a:r>
+              <a:rPr sz="2400" b="1" i="0">
+                <a:solidFill>
+                  <a:srgbClr val="1A1A2E"/>
+                </a:solidFill>
+                <a:latin typeface="Helvetica"/>
+              </a:rPr>
+              <a:t>Feedback improves small-object detection</a:t>
+            </a:r>
+          </a:p>
+        </p:txBody>
+      </p:sp>
+      <p:sp>
+        <p:nvSpPr>
+          <p:cNvPr id="7" name="TextBox 6"/>
+          <p:cNvSpPr txBox="1"/>
+          <p:nvPr/>
+        </p:nvSpPr>
+        <p:spPr>
+          <a:xfrm>
+            <a:off x="1554480" y="2468880"/>
+            <a:ext cx="10058400" cy="548640"/>
+          </a:xfrm>
+          <a:prstGeom prst="rect">
+            <a:avLst/>
+          </a:prstGeom>
+          <a:noFill/>
+        </p:spPr>
+        <p:txBody>
+          <a:bodyPr wrap="square" lIns="0" rIns="0" tIns="0" bIns="0" anchor="t">
+            <a:spAutoFit/>
+          </a:bodyPr>
+          <a:lstStyle/>
+          <a:p>
+            <a:pPr algn="l"/>
+            <a:r>
+              <a:rPr sz="1500" b="0" i="1">
+                <a:solidFill>
+                  <a:srgbClr val="666677"/>
+                </a:solidFill>
+                <a:latin typeface="Helvetica"/>
+              </a:rPr>
+              <a:t>+0.99 small-object AP, causal contribution at inference.</a:t>
+            </a:r>
+          </a:p>
+        </p:txBody>
+      </p:sp>
+      <p:sp>
+        <p:nvSpPr>
+          <p:cNvPr id="8" name="Oval 7"/>
+          <p:cNvSpPr/>
+          <p:nvPr/>
+        </p:nvSpPr>
+        <p:spPr>
+          <a:xfrm>
+            <a:off x="822960" y="3383280"/>
+            <a:ext cx="502920" cy="502920"/>
+          </a:xfrm>
+          <a:prstGeom prst="ellipse">
+            <a:avLst/>
+          </a:prstGeom>
+          <a:solidFill>
+            <a:srgbClr val="1F6FEB"/>
+          </a:solidFill>
+          <a:ln>
+            <a:noFill/>
+          </a:ln>
+        </p:spPr>
+        <p:style>
+          <a:lnRef idx="1">
+            <a:schemeClr val="accent1"/>
+          </a:lnRef>
+          <a:fillRef idx="3">
+            <a:schemeClr val="accent1"/>
+          </a:fillRef>
+          <a:effectRef idx="2">
+            <a:schemeClr val="accent1"/>
+          </a:effectRef>
+          <a:fontRef idx="minor">
+            <a:schemeClr val="lt1"/>
+          </a:fontRef>
+        </p:style>
+        <p:txBody>
+          <a:bodyPr rtlCol="0" anchor="ctr"/>
+          <a:lstStyle/>
+          <a:p>
+            <a:pPr algn="ctr"/>
+          </a:p>
+        </p:txBody>
+      </p:sp>
+      <p:sp>
+        <p:nvSpPr>
+          <p:cNvPr id="9" name="TextBox 8"/>
+          <p:cNvSpPr txBox="1"/>
+          <p:nvPr/>
+        </p:nvSpPr>
+        <p:spPr>
+          <a:xfrm>
+            <a:off x="822960" y="3410712"/>
+            <a:ext cx="502920" cy="502920"/>
+          </a:xfrm>
+          <a:prstGeom prst="rect">
+            <a:avLst/>
+          </a:prstGeom>
+          <a:noFill/>
+        </p:spPr>
+        <p:txBody>
+          <a:bodyPr wrap="square" lIns="0" rIns="0" tIns="0" bIns="0" anchor="t">
+            <a:spAutoFit/>
+          </a:bodyPr>
+          <a:lstStyle/>
+          <a:p>
+            <a:pPr algn="ctr"/>
+            <a:r>
+              <a:rPr sz="2000" b="1" i="0">
+                <a:solidFill>
+                  <a:srgbClr val="FFFFFF"/>
+                </a:solidFill>
+                <a:latin typeface="Helvetica"/>
+              </a:rPr>
+              <a:t>2</a:t>
+            </a:r>
+          </a:p>
+        </p:txBody>
+      </p:sp>
+      <p:sp>
+        <p:nvSpPr>
+          <p:cNvPr id="10" name="TextBox 9"/>
+          <p:cNvSpPr txBox="1"/>
+          <p:nvPr/>
+        </p:nvSpPr>
+        <p:spPr>
+          <a:xfrm>
+            <a:off x="1554480" y="3291840"/>
+            <a:ext cx="10058400" cy="548640"/>
+          </a:xfrm>
+          <a:prstGeom prst="rect">
+            <a:avLst/>
+          </a:prstGeom>
+          <a:noFill/>
+        </p:spPr>
+        <p:txBody>
+          <a:bodyPr wrap="square" lIns="0" rIns="0" tIns="0" bIns="0" anchor="t">
+            <a:spAutoFit/>
+          </a:bodyPr>
+          <a:lstStyle/>
+          <a:p>
+            <a:pPr algn="l"/>
+            <a:r>
+              <a:rPr sz="2400" b="1" i="0">
+                <a:solidFill>
+                  <a:srgbClr val="1A1A2E"/>
+                </a:solidFill>
+                <a:latin typeface="Helvetica"/>
+              </a:rPr>
+              <a:t>Only works with proper design</a:t>
+            </a:r>
+          </a:p>
+        </p:txBody>
+      </p:sp>
+      <p:sp>
+        <p:nvSpPr>
+          <p:cNvPr id="11" name="TextBox 10"/>
+          <p:cNvSpPr txBox="1"/>
+          <p:nvPr/>
+        </p:nvSpPr>
+        <p:spPr>
+          <a:xfrm>
+            <a:off x="1554480" y="3886200"/>
+            <a:ext cx="10058400" cy="548640"/>
+          </a:xfrm>
+          <a:prstGeom prst="rect">
+            <a:avLst/>
+          </a:prstGeom>
+          <a:noFill/>
+        </p:spPr>
+        <p:txBody>
+          <a:bodyPr wrap="square" lIns="0" rIns="0" tIns="0" bIns="0" anchor="t">
+            <a:spAutoFit/>
+          </a:bodyPr>
+          <a:lstStyle/>
+          <a:p>
+            <a:pPr algn="l"/>
+            <a:r>
+              <a:rPr sz="1500" b="0" i="1">
+                <a:solidFill>
+                  <a:srgbClr val="666677"/>
+                </a:solidFill>
+                <a:latin typeface="Helvetica"/>
+              </a:rPr>
+              <a:t>Floor the gate; restrict to small-object levels.</a:t>
+            </a:r>
+          </a:p>
+        </p:txBody>
+      </p:sp>
+      <p:sp>
+        <p:nvSpPr>
+          <p:cNvPr id="12" name="Oval 11"/>
+          <p:cNvSpPr/>
+          <p:nvPr/>
+        </p:nvSpPr>
+        <p:spPr>
+          <a:xfrm>
+            <a:off x="822960" y="4800600"/>
+            <a:ext cx="502920" cy="502920"/>
+          </a:xfrm>
+          <a:prstGeom prst="ellipse">
+            <a:avLst/>
+          </a:prstGeom>
+          <a:solidFill>
+            <a:srgbClr val="1F6FEB"/>
+          </a:solidFill>
+          <a:ln>
+            <a:noFill/>
+          </a:ln>
+        </p:spPr>
+        <p:style>
+          <a:lnRef idx="1">
+            <a:schemeClr val="accent1"/>
+          </a:lnRef>
+          <a:fillRef idx="3">
+            <a:schemeClr val="accent1"/>
+          </a:fillRef>
+          <a:effectRef idx="2">
+            <a:schemeClr val="accent1"/>
+          </a:effectRef>
+          <a:fontRef idx="minor">
+            <a:schemeClr val="lt1"/>
+          </a:fontRef>
+        </p:style>
+        <p:txBody>
+          <a:bodyPr rtlCol="0" anchor="ctr"/>
+          <a:lstStyle/>
+          <a:p>
+            <a:pPr algn="ctr"/>
+          </a:p>
+        </p:txBody>
+      </p:sp>
+      <p:sp>
+        <p:nvSpPr>
+          <p:cNvPr id="13" name="TextBox 12"/>
+          <p:cNvSpPr txBox="1"/>
+          <p:nvPr/>
+        </p:nvSpPr>
+        <p:spPr>
+          <a:xfrm>
+            <a:off x="822960" y="4828032"/>
+            <a:ext cx="502920" cy="502920"/>
+          </a:xfrm>
+          <a:prstGeom prst="rect">
+            <a:avLst/>
+          </a:prstGeom>
+          <a:noFill/>
+        </p:spPr>
+        <p:txBody>
+          <a:bodyPr wrap="square" lIns="0" rIns="0" tIns="0" bIns="0" anchor="t">
+            <a:spAutoFit/>
+          </a:bodyPr>
+          <a:lstStyle/>
+          <a:p>
+            <a:pPr algn="ctr"/>
+            <a:r>
+              <a:rPr sz="2000" b="1" i="0">
+                <a:solidFill>
+                  <a:srgbClr val="FFFFFF"/>
+                </a:solidFill>
+                <a:latin typeface="Helvetica"/>
+              </a:rPr>
+              <a:t>3</a:t>
+            </a:r>
+          </a:p>
+        </p:txBody>
+      </p:sp>
+      <p:sp>
+        <p:nvSpPr>
+          <p:cNvPr id="14" name="TextBox 13"/>
+          <p:cNvSpPr txBox="1"/>
+          <p:nvPr/>
+        </p:nvSpPr>
+        <p:spPr>
+          <a:xfrm>
+            <a:off x="1554480" y="4709160"/>
+            <a:ext cx="10058400" cy="548640"/>
+          </a:xfrm>
+          <a:prstGeom prst="rect">
+            <a:avLst/>
+          </a:prstGeom>
+          <a:noFill/>
+        </p:spPr>
+        <p:txBody>
+          <a:bodyPr wrap="square" lIns="0" rIns="0" tIns="0" bIns="0" anchor="t">
+            <a:spAutoFit/>
+          </a:bodyPr>
+          <a:lstStyle/>
+          <a:p>
+            <a:pPr algn="l"/>
+            <a:r>
+              <a:rPr sz="2400" b="1" i="0">
+                <a:solidFill>
+                  <a:srgbClr val="1A1A2E"/>
+                </a:solidFill>
+                <a:latin typeface="Helvetica"/>
+              </a:rPr>
+              <a:t>Modest but real</a:t>
+            </a:r>
+          </a:p>
+        </p:txBody>
+      </p:sp>
+      <p:sp>
+        <p:nvSpPr>
+          <p:cNvPr id="15" name="TextBox 14"/>
+          <p:cNvSpPr txBox="1"/>
+          <p:nvPr/>
+        </p:nvSpPr>
+        <p:spPr>
+          <a:xfrm>
+            <a:off x="1554480" y="5303520"/>
+            <a:ext cx="10058400" cy="548640"/>
+          </a:xfrm>
+          <a:prstGeom prst="rect">
+            <a:avLst/>
+          </a:prstGeom>
+          <a:noFill/>
+        </p:spPr>
+        <p:txBody>
+          <a:bodyPr wrap="square" lIns="0" rIns="0" tIns="0" bIns="0" anchor="t">
+            <a:spAutoFit/>
+          </a:bodyPr>
+          <a:lstStyle/>
+          <a:p>
+            <a:pPr algn="l"/>
+            <a:r>
+              <a:rPr sz="1500" b="0" i="1">
+                <a:solidFill>
+                  <a:srgbClr val="666677"/>
+                </a:solidFill>
+                <a:latin typeface="Helvetica"/>
+              </a:rPr>
+              <a:t>Consistent across metrics; reproducible from the same checkpoint.</a:t>
+            </a:r>
+          </a:p>
+        </p:txBody>
+      </p:sp>
+      <p:sp>
+        <p:nvSpPr>
+          <p:cNvPr id="16" name="TextBox 15"/>
+          <p:cNvSpPr txBox="1"/>
+          <p:nvPr/>
+        </p:nvSpPr>
+        <p:spPr>
+          <a:xfrm>
+            <a:off x="640080" y="6446520"/>
+            <a:ext cx="9144000" cy="274320"/>
+          </a:xfrm>
+          <a:prstGeom prst="rect">
+            <a:avLst/>
+          </a:prstGeom>
+          <a:noFill/>
+        </p:spPr>
+        <p:txBody>
+          <a:bodyPr wrap="square" lIns="0" rIns="0" tIns="0" bIns="0" anchor="t">
+            <a:spAutoFit/>
+          </a:bodyPr>
+          <a:lstStyle/>
+          <a:p>
+            <a:pPr algn="l"/>
+            <a:r>
+              <a:rPr sz="1000" b="0" i="0">
+                <a:solidFill>
+                  <a:srgbClr val="666677"/>
+                </a:solidFill>
+                <a:latin typeface="Helvetica"/>
+              </a:rPr>
+              <a:t>5. Final Results  •  Feedback-Augmented RT-DETR  •  Hatem Saadallah &amp; Nour Jennane</a:t>
+            </a:r>
+          </a:p>
+        </p:txBody>
+      </p:sp>
+      <p:sp>
+        <p:nvSpPr>
+          <p:cNvPr id="17" name="TextBox 16"/>
+          <p:cNvSpPr txBox="1"/>
+          <p:nvPr/>
+        </p:nvSpPr>
+        <p:spPr>
+          <a:xfrm>
+            <a:off x="10515600" y="6446520"/>
+            <a:ext cx="1097280" cy="274320"/>
+          </a:xfrm>
+          <a:prstGeom prst="rect">
+            <a:avLst/>
+          </a:prstGeom>
+          <a:noFill/>
+        </p:spPr>
+        <p:txBody>
+          <a:bodyPr wrap="square" lIns="0" rIns="0" tIns="0" bIns="0" anchor="t">
+            <a:spAutoFit/>
+          </a:bodyPr>
+          <a:lstStyle/>
+          <a:p>
+            <a:pPr algn="r"/>
+            <a:r>
+              <a:rPr sz="1000" b="0" i="0">
+                <a:solidFill>
+                  <a:srgbClr val="666677"/>
+                </a:solidFill>
+                <a:latin typeface="Helvetica"/>
+              </a:rPr>
+              <a:t>25 / 27</a:t>
+            </a:r>
+          </a:p>
+        </p:txBody>
+      </p:sp>
+    </p:spTree>
+  </p:cSld>
+  <p:clrMapOvr>
+    <a:masterClrMapping/>
+  </p:clrMapOvr>
+</p:sld>
+</file>
+
+<file path=ppt/slides/slide27.xml><?xml version="1.0" encoding="utf-8"?>
+<p:sld xmlns:a="http://schemas.openxmlformats.org/drawingml/2006/main" xmlns:p="http://schemas.openxmlformats.org/presentationml/2006/main" xmlns:r="http://schemas.openxmlformats.org/officeDocument/2006/relationships">
+  <p:cSld>
+    <p:spTree>
+      <p:nvGrpSpPr>
+        <p:cNvPr id="1" name=""/>
+        <p:cNvGrpSpPr/>
+        <p:nvPr/>
+      </p:nvGrpSpPr>
+      <p:grpSpPr/>
+      <p:sp>
+        <p:nvSpPr>
+          <p:cNvPr id="2" name="TextBox 1"/>
+          <p:cNvSpPr txBox="1"/>
+          <p:nvPr/>
+        </p:nvSpPr>
+        <p:spPr>
+          <a:xfrm>
             <a:off x="640080" y="2194560"/>
             <a:ext cx="10972800" cy="1371600"/>
           </a:xfrm>
@@ -10449,7 +11755,7 @@
                 </a:solidFill>
                 <a:latin typeface="Helvetica"/>
               </a:rPr>
-              <a:t>3 / 24</a:t>
+              <a:t>2 / 27</a:t>
             </a:r>
           </a:p>
         </p:txBody>
@@ -10709,7 +12015,7 @@
                 </a:solidFill>
                 <a:latin typeface="Helvetica"/>
               </a:rPr>
-              <a:t>4 / 24</a:t>
+              <a:t>3 / 27</a:t>
             </a:r>
           </a:p>
         </p:txBody>
@@ -10969,7 +12275,7 @@
                 </a:solidFill>
                 <a:latin typeface="Helvetica"/>
               </a:rPr>
-              <a:t>5 / 24</a:t>
+              <a:t>4 / 27</a:t>
             </a:r>
           </a:p>
         </p:txBody>
@@ -11205,7 +12511,7 @@
                 </a:solidFill>
                 <a:latin typeface="Helvetica"/>
               </a:rPr>
-              <a:t>6 / 24</a:t>
+              <a:t>5 / 27</a:t>
             </a:r>
           </a:p>
         </p:txBody>
@@ -11883,7 +13189,7 @@
                 </a:solidFill>
                 <a:latin typeface="Helvetica"/>
               </a:rPr>
-              <a:t>7 / 24</a:t>
+              <a:t>6 / 27</a:t>
             </a:r>
           </a:p>
         </p:txBody>
@@ -12119,7 +13425,7 @@
                 </a:solidFill>
                 <a:latin typeface="Helvetica"/>
               </a:rPr>
-              <a:t>8 / 24</a:t>
+              <a:t>7 / 27</a:t>
             </a:r>
           </a:p>
         </p:txBody>
@@ -12344,7 +13650,7 @@
                 </a:solidFill>
                 <a:latin typeface="Helvetica"/>
               </a:rPr>
-              <a:t>9 / 24</a:t>
+              <a:t>8 / 27</a:t>
             </a:r>
           </a:p>
         </p:txBody>

--- a/presentation/feedback_rtdetr_presentation.pptx
+++ b/presentation/feedback_rtdetr_presentation.pptx
@@ -32,6 +32,7 @@
     <p:sldId id="280" r:id="rId31"/>
     <p:sldId id="281" r:id="rId32"/>
     <p:sldId id="282" r:id="rId33"/>
+    <p:sldId id="283" r:id="rId34"/>
   </p:sldIdLst>
   <p:sldSz cx="12191695" cy="6858000" type="screen4x3"/>
   <p:notesSz cx="6858000" cy="9144000"/>
@@ -3517,7 +3518,7 @@
                 </a:solidFill>
                 <a:latin typeface="Helvetica"/>
               </a:rPr>
-              <a:t>9 / 27</a:t>
+              <a:t>9 / 28</a:t>
             </a:r>
           </a:p>
         </p:txBody>
@@ -3707,7 +3708,7 @@
                 </a:solidFill>
                 <a:latin typeface="Helvetica"/>
               </a:rPr>
-              <a:t>10 / 27</a:t>
+              <a:t>10 / 28</a:t>
             </a:r>
           </a:p>
         </p:txBody>
@@ -4067,7 +4068,7 @@
                 </a:solidFill>
                 <a:latin typeface="Helvetica"/>
               </a:rPr>
-              <a:t>11 / 27</a:t>
+              <a:t>11 / 28</a:t>
             </a:r>
           </a:p>
         </p:txBody>
@@ -4471,7 +4472,7 @@
                 </a:solidFill>
                 <a:latin typeface="Helvetica"/>
               </a:rPr>
-              <a:t>12 / 27</a:t>
+              <a:t>12 / 28</a:t>
             </a:r>
           </a:p>
         </p:txBody>
@@ -4696,7 +4697,7 @@
                 </a:solidFill>
                 <a:latin typeface="Helvetica"/>
               </a:rPr>
-              <a:t>13 / 27</a:t>
+              <a:t>13 / 28</a:t>
             </a:r>
           </a:p>
         </p:txBody>
@@ -4932,7 +4933,7 @@
                 </a:solidFill>
                 <a:latin typeface="Helvetica"/>
               </a:rPr>
-              <a:t>14 / 27</a:t>
+              <a:t>14 / 28</a:t>
             </a:r>
           </a:p>
         </p:txBody>
@@ -5636,7 +5637,7 @@
                 </a:solidFill>
                 <a:latin typeface="Helvetica"/>
               </a:rPr>
-              <a:t>15 / 27</a:t>
+              <a:t>15 / 28</a:t>
             </a:r>
           </a:p>
         </p:txBody>
@@ -5872,7 +5873,7 @@
                 </a:solidFill>
                 <a:latin typeface="Helvetica"/>
               </a:rPr>
-              <a:t>16 / 27</a:t>
+              <a:t>16 / 28</a:t>
             </a:r>
           </a:p>
         </p:txBody>
@@ -6097,7 +6098,7 @@
                 </a:solidFill>
                 <a:latin typeface="Helvetica"/>
               </a:rPr>
-              <a:t>17 / 27</a:t>
+              <a:t>17 / 28</a:t>
             </a:r>
           </a:p>
         </p:txBody>
@@ -6436,7 +6437,7 @@
                 </a:solidFill>
                 <a:latin typeface="Helvetica"/>
               </a:rPr>
-              <a:t>18 / 27</a:t>
+              <a:t>18 / 28</a:t>
             </a:r>
           </a:p>
         </p:txBody>
@@ -6672,7 +6673,7 @@
                 </a:solidFill>
                 <a:latin typeface="Helvetica"/>
               </a:rPr>
-              <a:t>1 / 27</a:t>
+              <a:t>1 / 28</a:t>
             </a:r>
           </a:p>
         </p:txBody>
@@ -7167,7 +7168,7 @@
                 </a:solidFill>
                 <a:latin typeface="Helvetica"/>
               </a:rPr>
-              <a:t>19 / 27</a:t>
+              <a:t>19 / 28</a:t>
             </a:r>
           </a:p>
         </p:txBody>
@@ -7683,7 +7684,7 @@
                 </a:solidFill>
                 <a:latin typeface="Helvetica"/>
               </a:rPr>
-              <a:t>20 / 27</a:t>
+              <a:t>20 / 28</a:t>
             </a:r>
           </a:p>
         </p:txBody>
@@ -8243,7 +8244,7 @@
                 </a:solidFill>
                 <a:latin typeface="Helvetica"/>
               </a:rPr>
-              <a:t>21 / 27</a:t>
+              <a:t>21 / 28</a:t>
             </a:r>
           </a:p>
         </p:txBody>
@@ -8662,7 +8663,7 @@
                 </a:solidFill>
                 <a:latin typeface="Helvetica"/>
               </a:rPr>
-              <a:t>22 / 27</a:t>
+              <a:t>22 / 28</a:t>
             </a:r>
           </a:p>
         </p:txBody>
@@ -8715,7 +8716,7 @@
                 </a:solidFill>
                 <a:latin typeface="Helvetica"/>
               </a:rPr>
-              <a:t>Strengths and limitations</a:t>
+              <a:t>Higher resolution → bigger gain</a:t>
             </a:r>
           </a:p>
         </p:txBody>
@@ -8765,22 +8766,273 @@
       </p:sp>
       <p:sp>
         <p:nvSpPr>
-          <p:cNvPr id="4" name="Rounded Rectangle 3"/>
+          <p:cNvPr id="4" name="TextBox 3"/>
+          <p:cNvSpPr txBox="1"/>
+          <p:nvPr/>
+        </p:nvSpPr>
+        <p:spPr>
+          <a:xfrm>
+            <a:off x="640080" y="2194560"/>
+            <a:ext cx="5303520" cy="457200"/>
+          </a:xfrm>
+          <a:prstGeom prst="rect">
+            <a:avLst/>
+          </a:prstGeom>
+          <a:noFill/>
+        </p:spPr>
+        <p:txBody>
+          <a:bodyPr wrap="square" lIns="0" rIns="0" tIns="0" bIns="0" anchor="t">
+            <a:spAutoFit/>
+          </a:bodyPr>
+          <a:lstStyle/>
+          <a:p>
+            <a:pPr algn="ctr"/>
+            <a:r>
+              <a:rPr sz="2200" b="0" i="0">
+                <a:solidFill>
+                  <a:srgbClr val="666677"/>
+                </a:solidFill>
+                <a:latin typeface="Helvetica"/>
+              </a:rPr>
+              <a:t>640 × 640</a:t>
+            </a:r>
+          </a:p>
+        </p:txBody>
+      </p:sp>
+      <p:sp>
+        <p:nvSpPr>
+          <p:cNvPr id="5" name="TextBox 4"/>
+          <p:cNvSpPr txBox="1"/>
+          <p:nvPr/>
+        </p:nvSpPr>
+        <p:spPr>
+          <a:xfrm>
+            <a:off x="640080" y="2743200"/>
+            <a:ext cx="5303520" cy="1828800"/>
+          </a:xfrm>
+          <a:prstGeom prst="rect">
+            <a:avLst/>
+          </a:prstGeom>
+          <a:noFill/>
+        </p:spPr>
+        <p:txBody>
+          <a:bodyPr wrap="square" lIns="0" rIns="0" tIns="0" bIns="0" anchor="t">
+            <a:spAutoFit/>
+          </a:bodyPr>
+          <a:lstStyle/>
+          <a:p>
+            <a:pPr algn="ctr"/>
+            <a:r>
+              <a:rPr sz="8800" b="1" i="0">
+                <a:solidFill>
+                  <a:srgbClr val="1A1A2E"/>
+                </a:solidFill>
+                <a:latin typeface="Helvetica"/>
+              </a:rPr>
+              <a:t>34.25</a:t>
+            </a:r>
+          </a:p>
+        </p:txBody>
+      </p:sp>
+      <p:sp>
+        <p:nvSpPr>
+          <p:cNvPr id="6" name="Right Arrow 5"/>
           <p:cNvSpPr/>
           <p:nvPr/>
         </p:nvSpPr>
         <p:spPr>
           <a:xfrm>
-            <a:off x="640080" y="1645920"/>
-            <a:ext cx="5394960" cy="4297680"/>
-          </a:xfrm>
-          <a:prstGeom prst="roundRect">
+            <a:off x="5303520" y="3291840"/>
+            <a:ext cx="1554480" cy="548640"/>
+          </a:xfrm>
+          <a:prstGeom prst="rightArrow">
             <a:avLst/>
           </a:prstGeom>
           <a:solidFill>
-            <a:srgbClr val="E8F7E8"/>
+            <a:srgbClr val="1F6FEB"/>
           </a:solidFill>
-          <a:ln w="19050">
+          <a:ln>
+            <a:noFill/>
+          </a:ln>
+        </p:spPr>
+        <p:style>
+          <a:lnRef idx="1">
+            <a:schemeClr val="accent1"/>
+          </a:lnRef>
+          <a:fillRef idx="3">
+            <a:schemeClr val="accent1"/>
+          </a:fillRef>
+          <a:effectRef idx="2">
+            <a:schemeClr val="accent1"/>
+          </a:effectRef>
+          <a:fontRef idx="minor">
+            <a:schemeClr val="lt1"/>
+          </a:fontRef>
+        </p:style>
+        <p:txBody>
+          <a:bodyPr rtlCol="0" anchor="ctr"/>
+          <a:lstStyle/>
+          <a:p>
+            <a:pPr algn="ctr"/>
+          </a:p>
+        </p:txBody>
+      </p:sp>
+      <p:sp>
+        <p:nvSpPr>
+          <p:cNvPr id="7" name="TextBox 6"/>
+          <p:cNvSpPr txBox="1"/>
+          <p:nvPr/>
+        </p:nvSpPr>
+        <p:spPr>
+          <a:xfrm>
+            <a:off x="6217920" y="2194560"/>
+            <a:ext cx="5303520" cy="457200"/>
+          </a:xfrm>
+          <a:prstGeom prst="rect">
+            <a:avLst/>
+          </a:prstGeom>
+          <a:noFill/>
+        </p:spPr>
+        <p:txBody>
+          <a:bodyPr wrap="square" lIns="0" rIns="0" tIns="0" bIns="0" anchor="t">
+            <a:spAutoFit/>
+          </a:bodyPr>
+          <a:lstStyle/>
+          <a:p>
+            <a:pPr algn="ctr"/>
+            <a:r>
+              <a:rPr sz="2200" b="1" i="0">
+                <a:solidFill>
+                  <a:srgbClr val="1F6FEB"/>
+                </a:solidFill>
+                <a:latin typeface="Helvetica"/>
+              </a:rPr>
+              <a:t>800 × 800</a:t>
+            </a:r>
+          </a:p>
+        </p:txBody>
+      </p:sp>
+      <p:sp>
+        <p:nvSpPr>
+          <p:cNvPr id="8" name="TextBox 7"/>
+          <p:cNvSpPr txBox="1"/>
+          <p:nvPr/>
+        </p:nvSpPr>
+        <p:spPr>
+          <a:xfrm>
+            <a:off x="6217920" y="2743200"/>
+            <a:ext cx="5303520" cy="1828800"/>
+          </a:xfrm>
+          <a:prstGeom prst="rect">
+            <a:avLst/>
+          </a:prstGeom>
+          <a:noFill/>
+        </p:spPr>
+        <p:txBody>
+          <a:bodyPr wrap="square" lIns="0" rIns="0" tIns="0" bIns="0" anchor="t">
+            <a:spAutoFit/>
+          </a:bodyPr>
+          <a:lstStyle/>
+          <a:p>
+            <a:pPr algn="ctr"/>
+            <a:r>
+              <a:rPr sz="8800" b="1" i="0">
+                <a:solidFill>
+                  <a:srgbClr val="2CA02C"/>
+                </a:solidFill>
+                <a:latin typeface="Helvetica"/>
+              </a:rPr>
+              <a:t>37.01</a:t>
+            </a:r>
+          </a:p>
+        </p:txBody>
+      </p:sp>
+      <p:sp>
+        <p:nvSpPr>
+          <p:cNvPr id="9" name="TextBox 8"/>
+          <p:cNvSpPr txBox="1"/>
+          <p:nvPr/>
+        </p:nvSpPr>
+        <p:spPr>
+          <a:xfrm>
+            <a:off x="640080" y="5120640"/>
+            <a:ext cx="10972800" cy="457200"/>
+          </a:xfrm>
+          <a:prstGeom prst="rect">
+            <a:avLst/>
+          </a:prstGeom>
+          <a:noFill/>
+        </p:spPr>
+        <p:txBody>
+          <a:bodyPr wrap="square" lIns="0" rIns="0" tIns="0" bIns="0" anchor="t">
+            <a:spAutoFit/>
+          </a:bodyPr>
+          <a:lstStyle/>
+          <a:p>
+            <a:pPr algn="ctr"/>
+            <a:r>
+              <a:rPr sz="2200" b="0" i="1">
+                <a:solidFill>
+                  <a:srgbClr val="1A1A2E"/>
+                </a:solidFill>
+                <a:latin typeface="Helvetica"/>
+              </a:rPr>
+              <a:t>+2.76 from more pixels.</a:t>
+            </a:r>
+          </a:p>
+        </p:txBody>
+      </p:sp>
+      <p:sp>
+        <p:nvSpPr>
+          <p:cNvPr id="10" name="TextBox 9"/>
+          <p:cNvSpPr txBox="1"/>
+          <p:nvPr/>
+        </p:nvSpPr>
+        <p:spPr>
+          <a:xfrm>
+            <a:off x="640080" y="5669280"/>
+            <a:ext cx="10972800" cy="457200"/>
+          </a:xfrm>
+          <a:prstGeom prst="rect">
+            <a:avLst/>
+          </a:prstGeom>
+          <a:noFill/>
+        </p:spPr>
+        <p:txBody>
+          <a:bodyPr wrap="square" lIns="0" rIns="0" tIns="0" bIns="0" anchor="t">
+            <a:spAutoFit/>
+          </a:bodyPr>
+          <a:lstStyle/>
+          <a:p>
+            <a:pPr algn="ctr"/>
+            <a:r>
+              <a:rPr sz="1600" b="0" i="0">
+                <a:solidFill>
+                  <a:srgbClr val="666677"/>
+                </a:solidFill>
+                <a:latin typeface="Helvetica"/>
+              </a:rPr>
+              <a:t>Feedback helps. Spatial sampling helps too.</a:t>
+            </a:r>
+          </a:p>
+        </p:txBody>
+      </p:sp>
+      <p:sp>
+        <p:nvSpPr>
+          <p:cNvPr id="11" name="Oval 10"/>
+          <p:cNvSpPr/>
+          <p:nvPr/>
+        </p:nvSpPr>
+        <p:spPr>
+          <a:xfrm>
+            <a:off x="6675120" y="2697480"/>
+            <a:ext cx="4389120" cy="1920240"/>
+          </a:xfrm>
+          <a:prstGeom prst="ellipse">
+            <a:avLst/>
+          </a:prstGeom>
+          <a:noFill/>
+          <a:ln w="63500">
             <a:solidFill>
               <a:srgbClr val="2CA02C"/>
             </a:solidFill>
@@ -8811,438 +9063,7 @@
       </p:sp>
       <p:sp>
         <p:nvSpPr>
-          <p:cNvPr id="5" name="TextBox 4"/>
-          <p:cNvSpPr txBox="1"/>
-          <p:nvPr/>
-        </p:nvSpPr>
-        <p:spPr>
-          <a:xfrm>
-            <a:off x="822960" y="1828800"/>
-            <a:ext cx="5029200" cy="548640"/>
-          </a:xfrm>
-          <a:prstGeom prst="rect">
-            <a:avLst/>
-          </a:prstGeom>
-          <a:noFill/>
-        </p:spPr>
-        <p:txBody>
-          <a:bodyPr wrap="square" lIns="0" rIns="0" tIns="0" bIns="0" anchor="t">
-            <a:spAutoFit/>
-          </a:bodyPr>
-          <a:lstStyle/>
-          <a:p>
-            <a:pPr algn="l"/>
-            <a:r>
-              <a:rPr sz="2200" b="1" i="0">
-                <a:solidFill>
-                  <a:srgbClr val="2CA02C"/>
-                </a:solidFill>
-                <a:latin typeface="Helvetica"/>
-              </a:rPr>
-              <a:t>+  Strengths</a:t>
-            </a:r>
-          </a:p>
-        </p:txBody>
-      </p:sp>
-      <p:sp>
-        <p:nvSpPr>
-          <p:cNvPr id="6" name="TextBox 5"/>
-          <p:cNvSpPr txBox="1"/>
-          <p:nvPr/>
-        </p:nvSpPr>
-        <p:spPr>
-          <a:xfrm>
-            <a:off x="868680" y="2468880"/>
-            <a:ext cx="5029200" cy="731520"/>
-          </a:xfrm>
-          <a:prstGeom prst="rect">
-            <a:avLst/>
-          </a:prstGeom>
-          <a:noFill/>
-        </p:spPr>
-        <p:txBody>
-          <a:bodyPr wrap="square" lIns="0" rIns="0" tIns="0" bIns="0" anchor="t">
-            <a:spAutoFit/>
-          </a:bodyPr>
-          <a:lstStyle/>
-          <a:p>
-            <a:pPr algn="l"/>
-            <a:r>
-              <a:rPr sz="1400" b="0" i="0">
-                <a:solidFill>
-                  <a:srgbClr val="1A1A2E"/>
-                </a:solidFill>
-                <a:latin typeface="Helvetica"/>
-              </a:rPr>
-              <a:t>•  Causal contribution: +0.99 on small-object AP, same checkpoint.</a:t>
-            </a:r>
-          </a:p>
-        </p:txBody>
-      </p:sp>
-      <p:sp>
-        <p:nvSpPr>
-          <p:cNvPr id="7" name="TextBox 6"/>
-          <p:cNvSpPr txBox="1"/>
-          <p:nvPr/>
-        </p:nvSpPr>
-        <p:spPr>
-          <a:xfrm>
-            <a:off x="868680" y="3246120"/>
-            <a:ext cx="5029200" cy="731520"/>
-          </a:xfrm>
-          <a:prstGeom prst="rect">
-            <a:avLst/>
-          </a:prstGeom>
-          <a:noFill/>
-        </p:spPr>
-        <p:txBody>
-          <a:bodyPr wrap="square" lIns="0" rIns="0" tIns="0" bIns="0" anchor="t">
-            <a:spAutoFit/>
-          </a:bodyPr>
-          <a:lstStyle/>
-          <a:p>
-            <a:pPr algn="l"/>
-            <a:r>
-              <a:rPr sz="1400" b="0" i="0">
-                <a:solidFill>
-                  <a:srgbClr val="1A1A2E"/>
-                </a:solidFill>
-                <a:latin typeface="Helvetica"/>
-              </a:rPr>
-              <a:t>•  Zero new parameters relative to v1.</a:t>
-            </a:r>
-          </a:p>
-        </p:txBody>
-      </p:sp>
-      <p:sp>
-        <p:nvSpPr>
-          <p:cNvPr id="8" name="TextBox 7"/>
-          <p:cNvSpPr txBox="1"/>
-          <p:nvPr/>
-        </p:nvSpPr>
-        <p:spPr>
-          <a:xfrm>
-            <a:off x="868680" y="4023360"/>
-            <a:ext cx="5029200" cy="731520"/>
-          </a:xfrm>
-          <a:prstGeom prst="rect">
-            <a:avLst/>
-          </a:prstGeom>
-          <a:noFill/>
-        </p:spPr>
-        <p:txBody>
-          <a:bodyPr wrap="square" lIns="0" rIns="0" tIns="0" bIns="0" anchor="t">
-            <a:spAutoFit/>
-          </a:bodyPr>
-          <a:lstStyle/>
-          <a:p>
-            <a:pPr algn="l"/>
-            <a:r>
-              <a:rPr sz="1400" b="0" i="0">
-                <a:solidFill>
-                  <a:srgbClr val="1A1A2E"/>
-                </a:solidFill>
-                <a:latin typeface="Helvetica"/>
-              </a:rPr>
-              <a:t>•  Consistent improvement on every metric (AP, S, M, L).</a:t>
-            </a:r>
-          </a:p>
-        </p:txBody>
-      </p:sp>
-      <p:sp>
-        <p:nvSpPr>
-          <p:cNvPr id="9" name="TextBox 8"/>
-          <p:cNvSpPr txBox="1"/>
-          <p:nvPr/>
-        </p:nvSpPr>
-        <p:spPr>
-          <a:xfrm>
-            <a:off x="868680" y="4800600"/>
-            <a:ext cx="5029200" cy="731520"/>
-          </a:xfrm>
-          <a:prstGeom prst="rect">
-            <a:avLst/>
-          </a:prstGeom>
-          <a:noFill/>
-        </p:spPr>
-        <p:txBody>
-          <a:bodyPr wrap="square" lIns="0" rIns="0" tIns="0" bIns="0" anchor="t">
-            <a:spAutoFit/>
-          </a:bodyPr>
-          <a:lstStyle/>
-          <a:p>
-            <a:pPr algn="l"/>
-            <a:r>
-              <a:rPr sz="1400" b="0" i="0">
-                <a:solidFill>
-                  <a:srgbClr val="1A1A2E"/>
-                </a:solidFill>
-                <a:latin typeface="Helvetica"/>
-              </a:rPr>
-              <a:t>•  Robust at higher resolution (37.01 small-object AP at 800×800).</a:t>
-            </a:r>
-          </a:p>
-        </p:txBody>
-      </p:sp>
-      <p:sp>
-        <p:nvSpPr>
-          <p:cNvPr id="10" name="Rounded Rectangle 9"/>
-          <p:cNvSpPr/>
-          <p:nvPr/>
-        </p:nvSpPr>
-        <p:spPr>
-          <a:xfrm>
-            <a:off x="6217920" y="1645920"/>
-            <a:ext cx="5394960" cy="4297680"/>
-          </a:xfrm>
-          <a:prstGeom prst="roundRect">
-            <a:avLst/>
-          </a:prstGeom>
-          <a:solidFill>
-            <a:srgbClr val="FDECEC"/>
-          </a:solidFill>
-          <a:ln w="19050">
-            <a:solidFill>
-              <a:srgbClr val="D62C2E"/>
-            </a:solidFill>
-          </a:ln>
-          <a:effectLst/>
-        </p:spPr>
-        <p:style>
-          <a:lnRef idx="1">
-            <a:schemeClr val="accent1"/>
-          </a:lnRef>
-          <a:fillRef idx="3">
-            <a:schemeClr val="accent1"/>
-          </a:fillRef>
-          <a:effectRef idx="2">
-            <a:schemeClr val="accent1"/>
-          </a:effectRef>
-          <a:fontRef idx="minor">
-            <a:schemeClr val="lt1"/>
-          </a:fontRef>
-        </p:style>
-        <p:txBody>
-          <a:bodyPr rtlCol="0" anchor="ctr"/>
-          <a:lstStyle/>
-          <a:p>
-            <a:pPr algn="ctr"/>
-          </a:p>
-        </p:txBody>
-      </p:sp>
-      <p:sp>
-        <p:nvSpPr>
-          <p:cNvPr id="11" name="TextBox 10"/>
-          <p:cNvSpPr txBox="1"/>
-          <p:nvPr/>
-        </p:nvSpPr>
-        <p:spPr>
-          <a:xfrm>
-            <a:off x="6400800" y="1828800"/>
-            <a:ext cx="5029200" cy="548640"/>
-          </a:xfrm>
-          <a:prstGeom prst="rect">
-            <a:avLst/>
-          </a:prstGeom>
-          <a:noFill/>
-        </p:spPr>
-        <p:txBody>
-          <a:bodyPr wrap="square" lIns="0" rIns="0" tIns="0" bIns="0" anchor="t">
-            <a:spAutoFit/>
-          </a:bodyPr>
-          <a:lstStyle/>
-          <a:p>
-            <a:pPr algn="l"/>
-            <a:r>
-              <a:rPr sz="2200" b="1" i="0">
-                <a:solidFill>
-                  <a:srgbClr val="D62C2E"/>
-                </a:solidFill>
-                <a:latin typeface="Helvetica"/>
-              </a:rPr>
-              <a:t>−  Limitations</a:t>
-            </a:r>
-          </a:p>
-        </p:txBody>
-      </p:sp>
-      <p:sp>
-        <p:nvSpPr>
           <p:cNvPr id="12" name="TextBox 11"/>
-          <p:cNvSpPr txBox="1"/>
-          <p:nvPr/>
-        </p:nvSpPr>
-        <p:spPr>
-          <a:xfrm>
-            <a:off x="6446520" y="2468880"/>
-            <a:ext cx="5029200" cy="731520"/>
-          </a:xfrm>
-          <a:prstGeom prst="rect">
-            <a:avLst/>
-          </a:prstGeom>
-          <a:noFill/>
-        </p:spPr>
-        <p:txBody>
-          <a:bodyPr wrap="square" lIns="0" rIns="0" tIns="0" bIns="0" anchor="t">
-            <a:spAutoFit/>
-          </a:bodyPr>
-          <a:lstStyle/>
-          <a:p>
-            <a:pPr algn="l"/>
-            <a:r>
-              <a:rPr sz="1400" b="0" i="0">
-                <a:solidFill>
-                  <a:srgbClr val="1A1A2E"/>
-                </a:solidFill>
-                <a:latin typeface="Helvetica"/>
-              </a:rPr>
-              <a:t>•  Single seed — multi-seed variance unmeasured.</a:t>
-            </a:r>
-          </a:p>
-        </p:txBody>
-      </p:sp>
-      <p:sp>
-        <p:nvSpPr>
-          <p:cNvPr id="13" name="TextBox 12"/>
-          <p:cNvSpPr txBox="1"/>
-          <p:nvPr/>
-        </p:nvSpPr>
-        <p:spPr>
-          <a:xfrm>
-            <a:off x="6446520" y="3246120"/>
-            <a:ext cx="5029200" cy="731520"/>
-          </a:xfrm>
-          <a:prstGeom prst="rect">
-            <a:avLst/>
-          </a:prstGeom>
-          <a:noFill/>
-        </p:spPr>
-        <p:txBody>
-          <a:bodyPr wrap="square" lIns="0" rIns="0" tIns="0" bIns="0" anchor="t">
-            <a:spAutoFit/>
-          </a:bodyPr>
-          <a:lstStyle/>
-          <a:p>
-            <a:pPr algn="l"/>
-            <a:r>
-              <a:rPr sz="1400" b="0" i="0">
-                <a:solidFill>
-                  <a:srgbClr val="1A1A2E"/>
-                </a:solidFill>
-                <a:latin typeface="Helvetica"/>
-              </a:rPr>
-              <a:t>•  13-epoch finetune (vs 72-epoch from scratch).</a:t>
-            </a:r>
-          </a:p>
-        </p:txBody>
-      </p:sp>
-      <p:sp>
-        <p:nvSpPr>
-          <p:cNvPr id="14" name="TextBox 13"/>
-          <p:cNvSpPr txBox="1"/>
-          <p:nvPr/>
-        </p:nvSpPr>
-        <p:spPr>
-          <a:xfrm>
-            <a:off x="6446520" y="4023360"/>
-            <a:ext cx="5029200" cy="731520"/>
-          </a:xfrm>
-          <a:prstGeom prst="rect">
-            <a:avLst/>
-          </a:prstGeom>
-          <a:noFill/>
-        </p:spPr>
-        <p:txBody>
-          <a:bodyPr wrap="square" lIns="0" rIns="0" tIns="0" bIns="0" anchor="t">
-            <a:spAutoFit/>
-          </a:bodyPr>
-          <a:lstStyle/>
-          <a:p>
-            <a:pPr algn="l"/>
-            <a:r>
-              <a:rPr sz="1400" b="0" i="0">
-                <a:solidFill>
-                  <a:srgbClr val="1A1A2E"/>
-                </a:solidFill>
-                <a:latin typeface="Helvetica"/>
-              </a:rPr>
-              <a:t>•  Floor and mask not isolated (a 2×2 ablation is missing).</a:t>
-            </a:r>
-          </a:p>
-        </p:txBody>
-      </p:sp>
-      <p:sp>
-        <p:nvSpPr>
-          <p:cNvPr id="15" name="TextBox 14"/>
-          <p:cNvSpPr txBox="1"/>
-          <p:nvPr/>
-        </p:nvSpPr>
-        <p:spPr>
-          <a:xfrm>
-            <a:off x="6446520" y="4800600"/>
-            <a:ext cx="5029200" cy="731520"/>
-          </a:xfrm>
-          <a:prstGeom prst="rect">
-            <a:avLst/>
-          </a:prstGeom>
-          <a:noFill/>
-        </p:spPr>
-        <p:txBody>
-          <a:bodyPr wrap="square" lIns="0" rIns="0" tIns="0" bIns="0" anchor="t">
-            <a:spAutoFit/>
-          </a:bodyPr>
-          <a:lstStyle/>
-          <a:p>
-            <a:pPr algn="l"/>
-            <a:r>
-              <a:rPr sz="1400" b="0" i="0">
-                <a:solidFill>
-                  <a:srgbClr val="1A1A2E"/>
-                </a:solidFill>
-                <a:latin typeface="Helvetica"/>
-              </a:rPr>
-              <a:t>•  ≈2× slower than baseline (53 → 26 FPS) — cost is the P2 level.</a:t>
-            </a:r>
-          </a:p>
-        </p:txBody>
-      </p:sp>
-      <p:sp>
-        <p:nvSpPr>
-          <p:cNvPr id="16" name="TextBox 15"/>
-          <p:cNvSpPr txBox="1"/>
-          <p:nvPr/>
-        </p:nvSpPr>
-        <p:spPr>
-          <a:xfrm>
-            <a:off x="640080" y="6080760"/>
-            <a:ext cx="10972800" cy="365760"/>
-          </a:xfrm>
-          <a:prstGeom prst="rect">
-            <a:avLst/>
-          </a:prstGeom>
-          <a:noFill/>
-        </p:spPr>
-        <p:txBody>
-          <a:bodyPr wrap="square" lIns="0" rIns="0" tIns="0" bIns="0" anchor="t">
-            <a:spAutoFit/>
-          </a:bodyPr>
-          <a:lstStyle/>
-          <a:p>
-            <a:pPr algn="ctr"/>
-            <a:r>
-              <a:rPr sz="1200" b="0" i="1">
-                <a:solidFill>
-                  <a:srgbClr val="666677"/>
-                </a:solidFill>
-                <a:latin typeface="Helvetica"/>
-              </a:rPr>
-              <a:t>Strong on accuracy; pays in inference speed. The next slide proposes a way to recover speed.</a:t>
-            </a:r>
-          </a:p>
-        </p:txBody>
-      </p:sp>
-      <p:sp>
-        <p:nvSpPr>
-          <p:cNvPr id="17" name="TextBox 16"/>
           <p:cNvSpPr txBox="1"/>
           <p:nvPr/>
         </p:nvSpPr>
@@ -9277,7 +9098,7 @@
       </p:sp>
       <p:sp>
         <p:nvSpPr>
-          <p:cNvPr id="18" name="TextBox 17"/>
+          <p:cNvPr id="13" name="TextBox 12"/>
           <p:cNvSpPr txBox="1"/>
           <p:nvPr/>
         </p:nvSpPr>
@@ -9305,7 +9126,7 @@
                 </a:solidFill>
                 <a:latin typeface="Helvetica"/>
               </a:rPr>
-              <a:t>23 / 27</a:t>
+              <a:t>23 / 28</a:t>
             </a:r>
           </a:p>
         </p:txBody>
@@ -9358,7 +9179,7 @@
                 </a:solidFill>
                 <a:latin typeface="Helvetica"/>
               </a:rPr>
-              <a:t>Future work: recovering inference speed</a:t>
+              <a:t>Strengths and limitations</a:t>
             </a:r>
           </a:p>
         </p:txBody>
@@ -9408,59 +9229,24 @@
       </p:sp>
       <p:sp>
         <p:nvSpPr>
-          <p:cNvPr id="4" name="TextBox 3"/>
-          <p:cNvSpPr txBox="1"/>
-          <p:nvPr/>
-        </p:nvSpPr>
-        <p:spPr>
-          <a:xfrm>
-            <a:off x="640080" y="1417320"/>
-            <a:ext cx="10972800" cy="457200"/>
-          </a:xfrm>
-          <a:prstGeom prst="rect">
-            <a:avLst/>
-          </a:prstGeom>
-          <a:noFill/>
-        </p:spPr>
-        <p:txBody>
-          <a:bodyPr wrap="square" lIns="0" rIns="0" tIns="0" bIns="0" anchor="t">
-            <a:spAutoFit/>
-          </a:bodyPr>
-          <a:lstStyle/>
-          <a:p>
-            <a:pPr algn="ctr"/>
-            <a:r>
-              <a:rPr sz="1800" b="0" i="1">
-                <a:solidFill>
-                  <a:srgbClr val="1A1A2E"/>
-                </a:solidFill>
-                <a:latin typeface="Helvetica"/>
-              </a:rPr>
-              <a:t>The 2× slowdown comes from the P2 level, not the feedback module.</a:t>
-            </a:r>
-          </a:p>
-        </p:txBody>
-      </p:sp>
-      <p:sp>
-        <p:nvSpPr>
-          <p:cNvPr id="5" name="Rounded Rectangle 4"/>
+          <p:cNvPr id="4" name="Rounded Rectangle 3"/>
           <p:cNvSpPr/>
           <p:nvPr/>
         </p:nvSpPr>
         <p:spPr>
           <a:xfrm>
-            <a:off x="640080" y="2194560"/>
-            <a:ext cx="3657600" cy="3657600"/>
+            <a:off x="640080" y="1645920"/>
+            <a:ext cx="5394960" cy="4297680"/>
           </a:xfrm>
           <a:prstGeom prst="roundRect">
             <a:avLst/>
           </a:prstGeom>
           <a:solidFill>
-            <a:srgbClr val="F0F6FF"/>
+            <a:srgbClr val="E8F7E8"/>
           </a:solidFill>
-          <a:ln w="15240">
+          <a:ln w="19050">
             <a:solidFill>
-              <a:srgbClr val="1F6FEB"/>
+              <a:srgbClr val="2CA02C"/>
             </a:solidFill>
           </a:ln>
           <a:effectLst/>
@@ -9489,24 +9275,202 @@
       </p:sp>
       <p:sp>
         <p:nvSpPr>
-          <p:cNvPr id="6" name="Oval 5"/>
+          <p:cNvPr id="5" name="TextBox 4"/>
+          <p:cNvSpPr txBox="1"/>
+          <p:nvPr/>
+        </p:nvSpPr>
+        <p:spPr>
+          <a:xfrm>
+            <a:off x="822960" y="1828800"/>
+            <a:ext cx="5029200" cy="548640"/>
+          </a:xfrm>
+          <a:prstGeom prst="rect">
+            <a:avLst/>
+          </a:prstGeom>
+          <a:noFill/>
+        </p:spPr>
+        <p:txBody>
+          <a:bodyPr wrap="square" lIns="0" rIns="0" tIns="0" bIns="0" anchor="t">
+            <a:spAutoFit/>
+          </a:bodyPr>
+          <a:lstStyle/>
+          <a:p>
+            <a:pPr algn="l"/>
+            <a:r>
+              <a:rPr sz="2200" b="1" i="0">
+                <a:solidFill>
+                  <a:srgbClr val="2CA02C"/>
+                </a:solidFill>
+                <a:latin typeface="Helvetica"/>
+              </a:rPr>
+              <a:t>+  Strengths</a:t>
+            </a:r>
+          </a:p>
+        </p:txBody>
+      </p:sp>
+      <p:sp>
+        <p:nvSpPr>
+          <p:cNvPr id="6" name="TextBox 5"/>
+          <p:cNvSpPr txBox="1"/>
+          <p:nvPr/>
+        </p:nvSpPr>
+        <p:spPr>
+          <a:xfrm>
+            <a:off x="868680" y="2468880"/>
+            <a:ext cx="5029200" cy="731520"/>
+          </a:xfrm>
+          <a:prstGeom prst="rect">
+            <a:avLst/>
+          </a:prstGeom>
+          <a:noFill/>
+        </p:spPr>
+        <p:txBody>
+          <a:bodyPr wrap="square" lIns="0" rIns="0" tIns="0" bIns="0" anchor="t">
+            <a:spAutoFit/>
+          </a:bodyPr>
+          <a:lstStyle/>
+          <a:p>
+            <a:pPr algn="l"/>
+            <a:r>
+              <a:rPr sz="1400" b="0" i="0">
+                <a:solidFill>
+                  <a:srgbClr val="1A1A2E"/>
+                </a:solidFill>
+                <a:latin typeface="Helvetica"/>
+              </a:rPr>
+              <a:t>•  Causal contribution: +0.99 on small-object AP, same checkpoint.</a:t>
+            </a:r>
+          </a:p>
+        </p:txBody>
+      </p:sp>
+      <p:sp>
+        <p:nvSpPr>
+          <p:cNvPr id="7" name="TextBox 6"/>
+          <p:cNvSpPr txBox="1"/>
+          <p:nvPr/>
+        </p:nvSpPr>
+        <p:spPr>
+          <a:xfrm>
+            <a:off x="868680" y="3246120"/>
+            <a:ext cx="5029200" cy="731520"/>
+          </a:xfrm>
+          <a:prstGeom prst="rect">
+            <a:avLst/>
+          </a:prstGeom>
+          <a:noFill/>
+        </p:spPr>
+        <p:txBody>
+          <a:bodyPr wrap="square" lIns="0" rIns="0" tIns="0" bIns="0" anchor="t">
+            <a:spAutoFit/>
+          </a:bodyPr>
+          <a:lstStyle/>
+          <a:p>
+            <a:pPr algn="l"/>
+            <a:r>
+              <a:rPr sz="1400" b="0" i="0">
+                <a:solidFill>
+                  <a:srgbClr val="1A1A2E"/>
+                </a:solidFill>
+                <a:latin typeface="Helvetica"/>
+              </a:rPr>
+              <a:t>•  Zero new parameters relative to v1.</a:t>
+            </a:r>
+          </a:p>
+        </p:txBody>
+      </p:sp>
+      <p:sp>
+        <p:nvSpPr>
+          <p:cNvPr id="8" name="TextBox 7"/>
+          <p:cNvSpPr txBox="1"/>
+          <p:nvPr/>
+        </p:nvSpPr>
+        <p:spPr>
+          <a:xfrm>
+            <a:off x="868680" y="4023360"/>
+            <a:ext cx="5029200" cy="731520"/>
+          </a:xfrm>
+          <a:prstGeom prst="rect">
+            <a:avLst/>
+          </a:prstGeom>
+          <a:noFill/>
+        </p:spPr>
+        <p:txBody>
+          <a:bodyPr wrap="square" lIns="0" rIns="0" tIns="0" bIns="0" anchor="t">
+            <a:spAutoFit/>
+          </a:bodyPr>
+          <a:lstStyle/>
+          <a:p>
+            <a:pPr algn="l"/>
+            <a:r>
+              <a:rPr sz="1400" b="0" i="0">
+                <a:solidFill>
+                  <a:srgbClr val="1A1A2E"/>
+                </a:solidFill>
+                <a:latin typeface="Helvetica"/>
+              </a:rPr>
+              <a:t>•  Consistent improvement on every metric (AP, S, M, L).</a:t>
+            </a:r>
+          </a:p>
+        </p:txBody>
+      </p:sp>
+      <p:sp>
+        <p:nvSpPr>
+          <p:cNvPr id="9" name="TextBox 8"/>
+          <p:cNvSpPr txBox="1"/>
+          <p:nvPr/>
+        </p:nvSpPr>
+        <p:spPr>
+          <a:xfrm>
+            <a:off x="868680" y="4800600"/>
+            <a:ext cx="5029200" cy="731520"/>
+          </a:xfrm>
+          <a:prstGeom prst="rect">
+            <a:avLst/>
+          </a:prstGeom>
+          <a:noFill/>
+        </p:spPr>
+        <p:txBody>
+          <a:bodyPr wrap="square" lIns="0" rIns="0" tIns="0" bIns="0" anchor="t">
+            <a:spAutoFit/>
+          </a:bodyPr>
+          <a:lstStyle/>
+          <a:p>
+            <a:pPr algn="l"/>
+            <a:r>
+              <a:rPr sz="1400" b="0" i="0">
+                <a:solidFill>
+                  <a:srgbClr val="1A1A2E"/>
+                </a:solidFill>
+                <a:latin typeface="Helvetica"/>
+              </a:rPr>
+              <a:t>•  Robust at higher resolution (37.01 small-object AP at 800×800).</a:t>
+            </a:r>
+          </a:p>
+        </p:txBody>
+      </p:sp>
+      <p:sp>
+        <p:nvSpPr>
+          <p:cNvPr id="10" name="Rounded Rectangle 9"/>
           <p:cNvSpPr/>
           <p:nvPr/>
         </p:nvSpPr>
         <p:spPr>
           <a:xfrm>
-            <a:off x="822960" y="2331720"/>
-            <a:ext cx="457200" cy="457200"/>
-          </a:xfrm>
-          <a:prstGeom prst="ellipse">
+            <a:off x="6217920" y="1645920"/>
+            <a:ext cx="5394960" cy="4297680"/>
+          </a:xfrm>
+          <a:prstGeom prst="roundRect">
             <a:avLst/>
           </a:prstGeom>
           <a:solidFill>
-            <a:srgbClr val="1F6FEB"/>
+            <a:srgbClr val="FDECEC"/>
           </a:solidFill>
-          <a:ln>
-            <a:noFill/>
+          <a:ln w="19050">
+            <a:solidFill>
+              <a:srgbClr val="D62C2E"/>
+            </a:solidFill>
           </a:ln>
+          <a:effectLst/>
         </p:spPr>
         <p:style>
           <a:lnRef idx="1">
@@ -9532,14 +9496,189 @@
       </p:sp>
       <p:sp>
         <p:nvSpPr>
-          <p:cNvPr id="7" name="TextBox 6"/>
-          <p:cNvSpPr txBox="1"/>
-          <p:nvPr/>
-        </p:nvSpPr>
-        <p:spPr>
-          <a:xfrm>
-            <a:off x="822960" y="2359152"/>
-            <a:ext cx="457200" cy="457200"/>
+          <p:cNvPr id="11" name="TextBox 10"/>
+          <p:cNvSpPr txBox="1"/>
+          <p:nvPr/>
+        </p:nvSpPr>
+        <p:spPr>
+          <a:xfrm>
+            <a:off x="6400800" y="1828800"/>
+            <a:ext cx="5029200" cy="548640"/>
+          </a:xfrm>
+          <a:prstGeom prst="rect">
+            <a:avLst/>
+          </a:prstGeom>
+          <a:noFill/>
+        </p:spPr>
+        <p:txBody>
+          <a:bodyPr wrap="square" lIns="0" rIns="0" tIns="0" bIns="0" anchor="t">
+            <a:spAutoFit/>
+          </a:bodyPr>
+          <a:lstStyle/>
+          <a:p>
+            <a:pPr algn="l"/>
+            <a:r>
+              <a:rPr sz="2200" b="1" i="0">
+                <a:solidFill>
+                  <a:srgbClr val="D62C2E"/>
+                </a:solidFill>
+                <a:latin typeface="Helvetica"/>
+              </a:rPr>
+              <a:t>−  Limitations</a:t>
+            </a:r>
+          </a:p>
+        </p:txBody>
+      </p:sp>
+      <p:sp>
+        <p:nvSpPr>
+          <p:cNvPr id="12" name="TextBox 11"/>
+          <p:cNvSpPr txBox="1"/>
+          <p:nvPr/>
+        </p:nvSpPr>
+        <p:spPr>
+          <a:xfrm>
+            <a:off x="6446520" y="2468880"/>
+            <a:ext cx="5029200" cy="731520"/>
+          </a:xfrm>
+          <a:prstGeom prst="rect">
+            <a:avLst/>
+          </a:prstGeom>
+          <a:noFill/>
+        </p:spPr>
+        <p:txBody>
+          <a:bodyPr wrap="square" lIns="0" rIns="0" tIns="0" bIns="0" anchor="t">
+            <a:spAutoFit/>
+          </a:bodyPr>
+          <a:lstStyle/>
+          <a:p>
+            <a:pPr algn="l"/>
+            <a:r>
+              <a:rPr sz="1400" b="0" i="0">
+                <a:solidFill>
+                  <a:srgbClr val="1A1A2E"/>
+                </a:solidFill>
+                <a:latin typeface="Helvetica"/>
+              </a:rPr>
+              <a:t>•  Single seed — multi-seed variance unmeasured.</a:t>
+            </a:r>
+          </a:p>
+        </p:txBody>
+      </p:sp>
+      <p:sp>
+        <p:nvSpPr>
+          <p:cNvPr id="13" name="TextBox 12"/>
+          <p:cNvSpPr txBox="1"/>
+          <p:nvPr/>
+        </p:nvSpPr>
+        <p:spPr>
+          <a:xfrm>
+            <a:off x="6446520" y="3246120"/>
+            <a:ext cx="5029200" cy="731520"/>
+          </a:xfrm>
+          <a:prstGeom prst="rect">
+            <a:avLst/>
+          </a:prstGeom>
+          <a:noFill/>
+        </p:spPr>
+        <p:txBody>
+          <a:bodyPr wrap="square" lIns="0" rIns="0" tIns="0" bIns="0" anchor="t">
+            <a:spAutoFit/>
+          </a:bodyPr>
+          <a:lstStyle/>
+          <a:p>
+            <a:pPr algn="l"/>
+            <a:r>
+              <a:rPr sz="1400" b="0" i="0">
+                <a:solidFill>
+                  <a:srgbClr val="1A1A2E"/>
+                </a:solidFill>
+                <a:latin typeface="Helvetica"/>
+              </a:rPr>
+              <a:t>•  13-epoch finetune (vs 72-epoch from scratch).</a:t>
+            </a:r>
+          </a:p>
+        </p:txBody>
+      </p:sp>
+      <p:sp>
+        <p:nvSpPr>
+          <p:cNvPr id="14" name="TextBox 13"/>
+          <p:cNvSpPr txBox="1"/>
+          <p:nvPr/>
+        </p:nvSpPr>
+        <p:spPr>
+          <a:xfrm>
+            <a:off x="6446520" y="4023360"/>
+            <a:ext cx="5029200" cy="731520"/>
+          </a:xfrm>
+          <a:prstGeom prst="rect">
+            <a:avLst/>
+          </a:prstGeom>
+          <a:noFill/>
+        </p:spPr>
+        <p:txBody>
+          <a:bodyPr wrap="square" lIns="0" rIns="0" tIns="0" bIns="0" anchor="t">
+            <a:spAutoFit/>
+          </a:bodyPr>
+          <a:lstStyle/>
+          <a:p>
+            <a:pPr algn="l"/>
+            <a:r>
+              <a:rPr sz="1400" b="0" i="0">
+                <a:solidFill>
+                  <a:srgbClr val="1A1A2E"/>
+                </a:solidFill>
+                <a:latin typeface="Helvetica"/>
+              </a:rPr>
+              <a:t>•  Floor and mask not isolated (a 2×2 ablation is missing).</a:t>
+            </a:r>
+          </a:p>
+        </p:txBody>
+      </p:sp>
+      <p:sp>
+        <p:nvSpPr>
+          <p:cNvPr id="15" name="TextBox 14"/>
+          <p:cNvSpPr txBox="1"/>
+          <p:nvPr/>
+        </p:nvSpPr>
+        <p:spPr>
+          <a:xfrm>
+            <a:off x="6446520" y="4800600"/>
+            <a:ext cx="5029200" cy="731520"/>
+          </a:xfrm>
+          <a:prstGeom prst="rect">
+            <a:avLst/>
+          </a:prstGeom>
+          <a:noFill/>
+        </p:spPr>
+        <p:txBody>
+          <a:bodyPr wrap="square" lIns="0" rIns="0" tIns="0" bIns="0" anchor="t">
+            <a:spAutoFit/>
+          </a:bodyPr>
+          <a:lstStyle/>
+          <a:p>
+            <a:pPr algn="l"/>
+            <a:r>
+              <a:rPr sz="1400" b="0" i="0">
+                <a:solidFill>
+                  <a:srgbClr val="1A1A2E"/>
+                </a:solidFill>
+                <a:latin typeface="Helvetica"/>
+              </a:rPr>
+              <a:t>•  ≈2× slower than baseline (53 → 26 FPS) — cost is the P2 level.</a:t>
+            </a:r>
+          </a:p>
+        </p:txBody>
+      </p:sp>
+      <p:sp>
+        <p:nvSpPr>
+          <p:cNvPr id="16" name="TextBox 15"/>
+          <p:cNvSpPr txBox="1"/>
+          <p:nvPr/>
+        </p:nvSpPr>
+        <p:spPr>
+          <a:xfrm>
+            <a:off x="640080" y="6080760"/>
+            <a:ext cx="10972800" cy="365760"/>
           </a:xfrm>
           <a:prstGeom prst="rect">
             <a:avLst/>
@@ -9554,347 +9693,13 @@
           <a:p>
             <a:pPr algn="ctr"/>
             <a:r>
-              <a:rPr sz="1800" b="1" i="0">
-                <a:solidFill>
-                  <a:srgbClr val="FFFFFF"/>
-                </a:solidFill>
-                <a:latin typeface="Helvetica"/>
-              </a:rPr>
-              <a:t>1</a:t>
-            </a:r>
-          </a:p>
-        </p:txBody>
-      </p:sp>
-      <p:sp>
-        <p:nvSpPr>
-          <p:cNvPr id="8" name="TextBox 7"/>
-          <p:cNvSpPr txBox="1"/>
-          <p:nvPr/>
-        </p:nvSpPr>
-        <p:spPr>
-          <a:xfrm>
-            <a:off x="1417320" y="2331720"/>
-            <a:ext cx="2743200" cy="548640"/>
-          </a:xfrm>
-          <a:prstGeom prst="rect">
-            <a:avLst/>
-          </a:prstGeom>
-          <a:noFill/>
-        </p:spPr>
-        <p:txBody>
-          <a:bodyPr wrap="square" lIns="0" rIns="0" tIns="0" bIns="0" anchor="t">
-            <a:spAutoFit/>
-          </a:bodyPr>
-          <a:lstStyle/>
-          <a:p>
-            <a:pPr algn="l"/>
-            <a:r>
-              <a:rPr sz="1400" b="1" i="0">
-                <a:solidFill>
-                  <a:srgbClr val="1A1A2E"/>
-                </a:solidFill>
-                <a:latin typeface="Helvetica"/>
-              </a:rPr>
-              <a:t>Train with P2, infer without</a:t>
-            </a:r>
-          </a:p>
-        </p:txBody>
-      </p:sp>
-      <p:sp>
-        <p:nvSpPr>
-          <p:cNvPr id="9" name="TextBox 8"/>
-          <p:cNvSpPr txBox="1"/>
-          <p:nvPr/>
-        </p:nvSpPr>
-        <p:spPr>
-          <a:xfrm>
-            <a:off x="822960" y="2971800"/>
-            <a:ext cx="3291840" cy="365760"/>
-          </a:xfrm>
-          <a:prstGeom prst="rect">
-            <a:avLst/>
-          </a:prstGeom>
-          <a:noFill/>
-        </p:spPr>
-        <p:txBody>
-          <a:bodyPr wrap="square" lIns="0" rIns="0" tIns="0" bIns="0" anchor="t">
-            <a:spAutoFit/>
-          </a:bodyPr>
-          <a:lstStyle/>
-          <a:p>
-            <a:pPr algn="l"/>
-            <a:r>
-              <a:rPr sz="1000" b="1" i="1">
-                <a:solidFill>
-                  <a:srgbClr val="1F6FEB"/>
-                </a:solidFill>
-                <a:latin typeface="Helvetica"/>
-              </a:rPr>
-              <a:t>fastest path</a:t>
-            </a:r>
-          </a:p>
-        </p:txBody>
-      </p:sp>
-      <p:sp>
-        <p:nvSpPr>
-          <p:cNvPr id="10" name="TextBox 9"/>
-          <p:cNvSpPr txBox="1"/>
-          <p:nvPr/>
-        </p:nvSpPr>
-        <p:spPr>
-          <a:xfrm>
-            <a:off x="822960" y="3429000"/>
-            <a:ext cx="3291840" cy="365760"/>
-          </a:xfrm>
-          <a:prstGeom prst="rect">
-            <a:avLst/>
-          </a:prstGeom>
-          <a:noFill/>
-        </p:spPr>
-        <p:txBody>
-          <a:bodyPr wrap="square" lIns="0" rIns="0" tIns="0" bIns="0" anchor="t">
-            <a:spAutoFit/>
-          </a:bodyPr>
-          <a:lstStyle/>
-          <a:p>
-            <a:pPr algn="l"/>
-            <a:r>
-              <a:rPr sz="1100" b="1" i="0">
-                <a:solidFill>
-                  <a:srgbClr val="1F6FEB"/>
-                </a:solidFill>
-                <a:latin typeface="Helvetica"/>
-              </a:rPr>
-              <a:t>How</a:t>
-            </a:r>
-          </a:p>
-        </p:txBody>
-      </p:sp>
-      <p:sp>
-        <p:nvSpPr>
-          <p:cNvPr id="11" name="TextBox 10"/>
-          <p:cNvSpPr txBox="1"/>
-          <p:nvPr/>
-        </p:nvSpPr>
-        <p:spPr>
-          <a:xfrm>
-            <a:off x="822960" y="3749039"/>
-            <a:ext cx="3291840" cy="1280160"/>
-          </a:xfrm>
-          <a:prstGeom prst="rect">
-            <a:avLst/>
-          </a:prstGeom>
-          <a:noFill/>
-        </p:spPr>
-        <p:txBody>
-          <a:bodyPr wrap="square" lIns="0" rIns="0" tIns="0" bIns="0" anchor="t">
-            <a:spAutoFit/>
-          </a:bodyPr>
-          <a:lstStyle/>
-          <a:p>
-            <a:pPr algn="l"/>
-            <a:r>
-              <a:rPr sz="1100" b="0" i="0">
-                <a:solidFill>
-                  <a:srgbClr val="1A1A2E"/>
-                </a:solidFill>
-                <a:latin typeface="Helvetica"/>
-              </a:rPr>
-              <a:t>Use P2 during training to improve small-object learning, then remove it at inference.</a:t>
-            </a:r>
-          </a:p>
-        </p:txBody>
-      </p:sp>
-      <p:sp>
-        <p:nvSpPr>
-          <p:cNvPr id="12" name="TextBox 11"/>
-          <p:cNvSpPr txBox="1"/>
-          <p:nvPr/>
-        </p:nvSpPr>
-        <p:spPr>
-          <a:xfrm>
-            <a:off x="822960" y="4846320"/>
-            <a:ext cx="3291840" cy="365760"/>
-          </a:xfrm>
-          <a:prstGeom prst="rect">
-            <a:avLst/>
-          </a:prstGeom>
-          <a:noFill/>
-        </p:spPr>
-        <p:txBody>
-          <a:bodyPr wrap="square" lIns="0" rIns="0" tIns="0" bIns="0" anchor="t">
-            <a:spAutoFit/>
-          </a:bodyPr>
-          <a:lstStyle/>
-          <a:p>
-            <a:pPr algn="l"/>
-            <a:r>
-              <a:rPr sz="1100" b="1" i="0">
-                <a:solidFill>
-                  <a:srgbClr val="2CA02C"/>
-                </a:solidFill>
-                <a:latin typeface="Helvetica"/>
-              </a:rPr>
-              <a:t>Goal</a:t>
-            </a:r>
-          </a:p>
-        </p:txBody>
-      </p:sp>
-      <p:sp>
-        <p:nvSpPr>
-          <p:cNvPr id="13" name="TextBox 12"/>
-          <p:cNvSpPr txBox="1"/>
-          <p:nvPr/>
-        </p:nvSpPr>
-        <p:spPr>
-          <a:xfrm>
-            <a:off x="822960" y="5166360"/>
-            <a:ext cx="3291840" cy="1280160"/>
-          </a:xfrm>
-          <a:prstGeom prst="rect">
-            <a:avLst/>
-          </a:prstGeom>
-          <a:noFill/>
-        </p:spPr>
-        <p:txBody>
-          <a:bodyPr wrap="square" lIns="0" rIns="0" tIns="0" bIns="0" anchor="t">
-            <a:spAutoFit/>
-          </a:bodyPr>
-          <a:lstStyle/>
-          <a:p>
-            <a:pPr algn="l"/>
-            <a:r>
-              <a:rPr sz="1100" b="0" i="0">
-                <a:solidFill>
-                  <a:srgbClr val="1A1A2E"/>
-                </a:solidFill>
-                <a:latin typeface="Helvetica"/>
-              </a:rPr>
-              <a:t>Keep most of the +0.99 small-object AP gain without the P2 computational cost.</a:t>
-            </a:r>
-          </a:p>
-        </p:txBody>
-      </p:sp>
-      <p:sp>
-        <p:nvSpPr>
-          <p:cNvPr id="14" name="Rounded Rectangle 13"/>
-          <p:cNvSpPr/>
-          <p:nvPr/>
-        </p:nvSpPr>
-        <p:spPr>
-          <a:xfrm>
-            <a:off x="4434840" y="2194560"/>
-            <a:ext cx="3657600" cy="3657600"/>
-          </a:xfrm>
-          <a:prstGeom prst="roundRect">
-            <a:avLst/>
-          </a:prstGeom>
-          <a:solidFill>
-            <a:srgbClr val="F0F6FF"/>
-          </a:solidFill>
-          <a:ln w="15240">
-            <a:solidFill>
-              <a:srgbClr val="1F6FEB"/>
-            </a:solidFill>
-          </a:ln>
-          <a:effectLst/>
-        </p:spPr>
-        <p:style>
-          <a:lnRef idx="1">
-            <a:schemeClr val="accent1"/>
-          </a:lnRef>
-          <a:fillRef idx="3">
-            <a:schemeClr val="accent1"/>
-          </a:fillRef>
-          <a:effectRef idx="2">
-            <a:schemeClr val="accent1"/>
-          </a:effectRef>
-          <a:fontRef idx="minor">
-            <a:schemeClr val="lt1"/>
-          </a:fontRef>
-        </p:style>
-        <p:txBody>
-          <a:bodyPr rtlCol="0" anchor="ctr"/>
-          <a:lstStyle/>
-          <a:p>
-            <a:pPr algn="ctr"/>
-          </a:p>
-        </p:txBody>
-      </p:sp>
-      <p:sp>
-        <p:nvSpPr>
-          <p:cNvPr id="15" name="Oval 14"/>
-          <p:cNvSpPr/>
-          <p:nvPr/>
-        </p:nvSpPr>
-        <p:spPr>
-          <a:xfrm>
-            <a:off x="4617720" y="2331720"/>
-            <a:ext cx="457200" cy="457200"/>
-          </a:xfrm>
-          <a:prstGeom prst="ellipse">
-            <a:avLst/>
-          </a:prstGeom>
-          <a:solidFill>
-            <a:srgbClr val="1F6FEB"/>
-          </a:solidFill>
-          <a:ln>
-            <a:noFill/>
-          </a:ln>
-        </p:spPr>
-        <p:style>
-          <a:lnRef idx="1">
-            <a:schemeClr val="accent1"/>
-          </a:lnRef>
-          <a:fillRef idx="3">
-            <a:schemeClr val="accent1"/>
-          </a:fillRef>
-          <a:effectRef idx="2">
-            <a:schemeClr val="accent1"/>
-          </a:effectRef>
-          <a:fontRef idx="minor">
-            <a:schemeClr val="lt1"/>
-          </a:fontRef>
-        </p:style>
-        <p:txBody>
-          <a:bodyPr rtlCol="0" anchor="ctr"/>
-          <a:lstStyle/>
-          <a:p>
-            <a:pPr algn="ctr"/>
-          </a:p>
-        </p:txBody>
-      </p:sp>
-      <p:sp>
-        <p:nvSpPr>
-          <p:cNvPr id="16" name="TextBox 15"/>
-          <p:cNvSpPr txBox="1"/>
-          <p:nvPr/>
-        </p:nvSpPr>
-        <p:spPr>
-          <a:xfrm>
-            <a:off x="4617720" y="2359152"/>
-            <a:ext cx="457200" cy="457200"/>
-          </a:xfrm>
-          <a:prstGeom prst="rect">
-            <a:avLst/>
-          </a:prstGeom>
-          <a:noFill/>
-        </p:spPr>
-        <p:txBody>
-          <a:bodyPr wrap="square" lIns="0" rIns="0" tIns="0" bIns="0" anchor="t">
-            <a:spAutoFit/>
-          </a:bodyPr>
-          <a:lstStyle/>
-          <a:p>
-            <a:pPr algn="ctr"/>
-            <a:r>
-              <a:rPr sz="1800" b="1" i="0">
-                <a:solidFill>
-                  <a:srgbClr val="FFFFFF"/>
-                </a:solidFill>
-                <a:latin typeface="Helvetica"/>
-              </a:rPr>
-              <a:t>2</a:t>
+              <a:rPr sz="1200" b="0" i="1">
+                <a:solidFill>
+                  <a:srgbClr val="666677"/>
+                </a:solidFill>
+                <a:latin typeface="Helvetica"/>
+              </a:rPr>
+              <a:t>Strong on accuracy; pays in inference speed. The next slide proposes a way to recover speed.</a:t>
             </a:r>
           </a:p>
         </p:txBody>
@@ -9902,585 +9707,6 @@
       <p:sp>
         <p:nvSpPr>
           <p:cNvPr id="17" name="TextBox 16"/>
-          <p:cNvSpPr txBox="1"/>
-          <p:nvPr/>
-        </p:nvSpPr>
-        <p:spPr>
-          <a:xfrm>
-            <a:off x="5212080" y="2331720"/>
-            <a:ext cx="2743200" cy="548640"/>
-          </a:xfrm>
-          <a:prstGeom prst="rect">
-            <a:avLst/>
-          </a:prstGeom>
-          <a:noFill/>
-        </p:spPr>
-        <p:txBody>
-          <a:bodyPr wrap="square" lIns="0" rIns="0" tIns="0" bIns="0" anchor="t">
-            <a:spAutoFit/>
-          </a:bodyPr>
-          <a:lstStyle/>
-          <a:p>
-            <a:pPr algn="l"/>
-            <a:r>
-              <a:rPr sz="1400" b="1" i="0">
-                <a:solidFill>
-                  <a:srgbClr val="1A1A2E"/>
-                </a:solidFill>
-                <a:latin typeface="Helvetica"/>
-              </a:rPr>
-              <a:t>Lighter P2 path</a:t>
-            </a:r>
-          </a:p>
-        </p:txBody>
-      </p:sp>
-      <p:sp>
-        <p:nvSpPr>
-          <p:cNvPr id="18" name="TextBox 17"/>
-          <p:cNvSpPr txBox="1"/>
-          <p:nvPr/>
-        </p:nvSpPr>
-        <p:spPr>
-          <a:xfrm>
-            <a:off x="4617720" y="2971800"/>
-            <a:ext cx="3291840" cy="365760"/>
-          </a:xfrm>
-          <a:prstGeom prst="rect">
-            <a:avLst/>
-          </a:prstGeom>
-          <a:noFill/>
-        </p:spPr>
-        <p:txBody>
-          <a:bodyPr wrap="square" lIns="0" rIns="0" tIns="0" bIns="0" anchor="t">
-            <a:spAutoFit/>
-          </a:bodyPr>
-          <a:lstStyle/>
-          <a:p>
-            <a:pPr algn="l"/>
-            <a:r>
-              <a:rPr sz="1000" b="1" i="1">
-                <a:solidFill>
-                  <a:srgbClr val="1F6FEB"/>
-                </a:solidFill>
-                <a:latin typeface="Helvetica"/>
-              </a:rPr>
-              <a:t>compromise</a:t>
-            </a:r>
-          </a:p>
-        </p:txBody>
-      </p:sp>
-      <p:sp>
-        <p:nvSpPr>
-          <p:cNvPr id="19" name="TextBox 18"/>
-          <p:cNvSpPr txBox="1"/>
-          <p:nvPr/>
-        </p:nvSpPr>
-        <p:spPr>
-          <a:xfrm>
-            <a:off x="4617720" y="3429000"/>
-            <a:ext cx="3291840" cy="365760"/>
-          </a:xfrm>
-          <a:prstGeom prst="rect">
-            <a:avLst/>
-          </a:prstGeom>
-          <a:noFill/>
-        </p:spPr>
-        <p:txBody>
-          <a:bodyPr wrap="square" lIns="0" rIns="0" tIns="0" bIns="0" anchor="t">
-            <a:spAutoFit/>
-          </a:bodyPr>
-          <a:lstStyle/>
-          <a:p>
-            <a:pPr algn="l"/>
-            <a:r>
-              <a:rPr sz="1100" b="1" i="0">
-                <a:solidFill>
-                  <a:srgbClr val="1F6FEB"/>
-                </a:solidFill>
-                <a:latin typeface="Helvetica"/>
-              </a:rPr>
-              <a:t>How</a:t>
-            </a:r>
-          </a:p>
-        </p:txBody>
-      </p:sp>
-      <p:sp>
-        <p:nvSpPr>
-          <p:cNvPr id="20" name="TextBox 19"/>
-          <p:cNvSpPr txBox="1"/>
-          <p:nvPr/>
-        </p:nvSpPr>
-        <p:spPr>
-          <a:xfrm>
-            <a:off x="4617720" y="3749039"/>
-            <a:ext cx="3291840" cy="1280160"/>
-          </a:xfrm>
-          <a:prstGeom prst="rect">
-            <a:avLst/>
-          </a:prstGeom>
-          <a:noFill/>
-        </p:spPr>
-        <p:txBody>
-          <a:bodyPr wrap="square" lIns="0" rIns="0" tIns="0" bIns="0" anchor="t">
-            <a:spAutoFit/>
-          </a:bodyPr>
-          <a:lstStyle/>
-          <a:p>
-            <a:pPr algn="l"/>
-            <a:r>
-              <a:rPr sz="1100" b="0" i="0">
-                <a:solidFill>
-                  <a:srgbClr val="1A1A2E"/>
-                </a:solidFill>
-                <a:latin typeface="Helvetica"/>
-              </a:rPr>
-              <a:t>Reduce the cost of P2 — fewer channels, or a simpler projection layer.</a:t>
-            </a:r>
-          </a:p>
-        </p:txBody>
-      </p:sp>
-      <p:sp>
-        <p:nvSpPr>
-          <p:cNvPr id="21" name="TextBox 20"/>
-          <p:cNvSpPr txBox="1"/>
-          <p:nvPr/>
-        </p:nvSpPr>
-        <p:spPr>
-          <a:xfrm>
-            <a:off x="4617720" y="4846320"/>
-            <a:ext cx="3291840" cy="365760"/>
-          </a:xfrm>
-          <a:prstGeom prst="rect">
-            <a:avLst/>
-          </a:prstGeom>
-          <a:noFill/>
-        </p:spPr>
-        <p:txBody>
-          <a:bodyPr wrap="square" lIns="0" rIns="0" tIns="0" bIns="0" anchor="t">
-            <a:spAutoFit/>
-          </a:bodyPr>
-          <a:lstStyle/>
-          <a:p>
-            <a:pPr algn="l"/>
-            <a:r>
-              <a:rPr sz="1100" b="1" i="0">
-                <a:solidFill>
-                  <a:srgbClr val="2CA02C"/>
-                </a:solidFill>
-                <a:latin typeface="Helvetica"/>
-              </a:rPr>
-              <a:t>Goal</a:t>
-            </a:r>
-          </a:p>
-        </p:txBody>
-      </p:sp>
-      <p:sp>
-        <p:nvSpPr>
-          <p:cNvPr id="22" name="TextBox 21"/>
-          <p:cNvSpPr txBox="1"/>
-          <p:nvPr/>
-        </p:nvSpPr>
-        <p:spPr>
-          <a:xfrm>
-            <a:off x="4617720" y="5166360"/>
-            <a:ext cx="3291840" cy="1280160"/>
-          </a:xfrm>
-          <a:prstGeom prst="rect">
-            <a:avLst/>
-          </a:prstGeom>
-          <a:noFill/>
-        </p:spPr>
-        <p:txBody>
-          <a:bodyPr wrap="square" lIns="0" rIns="0" tIns="0" bIns="0" anchor="t">
-            <a:spAutoFit/>
-          </a:bodyPr>
-          <a:lstStyle/>
-          <a:p>
-            <a:pPr algn="l"/>
-            <a:r>
-              <a:rPr sz="1100" b="0" i="0">
-                <a:solidFill>
-                  <a:srgbClr val="1A1A2E"/>
-                </a:solidFill>
-                <a:latin typeface="Helvetica"/>
-              </a:rPr>
-              <a:t>Preserve small-object improvements while reducing the high-resolution P2 slowdown.</a:t>
-            </a:r>
-          </a:p>
-        </p:txBody>
-      </p:sp>
-      <p:sp>
-        <p:nvSpPr>
-          <p:cNvPr id="23" name="Rounded Rectangle 22"/>
-          <p:cNvSpPr/>
-          <p:nvPr/>
-        </p:nvSpPr>
-        <p:spPr>
-          <a:xfrm>
-            <a:off x="8229600" y="2194560"/>
-            <a:ext cx="3657600" cy="3657600"/>
-          </a:xfrm>
-          <a:prstGeom prst="roundRect">
-            <a:avLst/>
-          </a:prstGeom>
-          <a:solidFill>
-            <a:srgbClr val="F0F6FF"/>
-          </a:solidFill>
-          <a:ln w="15240">
-            <a:solidFill>
-              <a:srgbClr val="1F6FEB"/>
-            </a:solidFill>
-          </a:ln>
-          <a:effectLst/>
-        </p:spPr>
-        <p:style>
-          <a:lnRef idx="1">
-            <a:schemeClr val="accent1"/>
-          </a:lnRef>
-          <a:fillRef idx="3">
-            <a:schemeClr val="accent1"/>
-          </a:fillRef>
-          <a:effectRef idx="2">
-            <a:schemeClr val="accent1"/>
-          </a:effectRef>
-          <a:fontRef idx="minor">
-            <a:schemeClr val="lt1"/>
-          </a:fontRef>
-        </p:style>
-        <p:txBody>
-          <a:bodyPr rtlCol="0" anchor="ctr"/>
-          <a:lstStyle/>
-          <a:p>
-            <a:pPr algn="ctr"/>
-          </a:p>
-        </p:txBody>
-      </p:sp>
-      <p:sp>
-        <p:nvSpPr>
-          <p:cNvPr id="24" name="Oval 23"/>
-          <p:cNvSpPr/>
-          <p:nvPr/>
-        </p:nvSpPr>
-        <p:spPr>
-          <a:xfrm>
-            <a:off x="8412480" y="2331720"/>
-            <a:ext cx="457200" cy="457200"/>
-          </a:xfrm>
-          <a:prstGeom prst="ellipse">
-            <a:avLst/>
-          </a:prstGeom>
-          <a:solidFill>
-            <a:srgbClr val="1F6FEB"/>
-          </a:solidFill>
-          <a:ln>
-            <a:noFill/>
-          </a:ln>
-        </p:spPr>
-        <p:style>
-          <a:lnRef idx="1">
-            <a:schemeClr val="accent1"/>
-          </a:lnRef>
-          <a:fillRef idx="3">
-            <a:schemeClr val="accent1"/>
-          </a:fillRef>
-          <a:effectRef idx="2">
-            <a:schemeClr val="accent1"/>
-          </a:effectRef>
-          <a:fontRef idx="minor">
-            <a:schemeClr val="lt1"/>
-          </a:fontRef>
-        </p:style>
-        <p:txBody>
-          <a:bodyPr rtlCol="0" anchor="ctr"/>
-          <a:lstStyle/>
-          <a:p>
-            <a:pPr algn="ctr"/>
-          </a:p>
-        </p:txBody>
-      </p:sp>
-      <p:sp>
-        <p:nvSpPr>
-          <p:cNvPr id="25" name="TextBox 24"/>
-          <p:cNvSpPr txBox="1"/>
-          <p:nvPr/>
-        </p:nvSpPr>
-        <p:spPr>
-          <a:xfrm>
-            <a:off x="8412480" y="2359152"/>
-            <a:ext cx="457200" cy="457200"/>
-          </a:xfrm>
-          <a:prstGeom prst="rect">
-            <a:avLst/>
-          </a:prstGeom>
-          <a:noFill/>
-        </p:spPr>
-        <p:txBody>
-          <a:bodyPr wrap="square" lIns="0" rIns="0" tIns="0" bIns="0" anchor="t">
-            <a:spAutoFit/>
-          </a:bodyPr>
-          <a:lstStyle/>
-          <a:p>
-            <a:pPr algn="ctr"/>
-            <a:r>
-              <a:rPr sz="1800" b="1" i="0">
-                <a:solidFill>
-                  <a:srgbClr val="FFFFFF"/>
-                </a:solidFill>
-                <a:latin typeface="Helvetica"/>
-              </a:rPr>
-              <a:t>3</a:t>
-            </a:r>
-          </a:p>
-        </p:txBody>
-      </p:sp>
-      <p:sp>
-        <p:nvSpPr>
-          <p:cNvPr id="26" name="TextBox 25"/>
-          <p:cNvSpPr txBox="1"/>
-          <p:nvPr/>
-        </p:nvSpPr>
-        <p:spPr>
-          <a:xfrm>
-            <a:off x="9006840" y="2331720"/>
-            <a:ext cx="2743200" cy="548640"/>
-          </a:xfrm>
-          <a:prstGeom prst="rect">
-            <a:avLst/>
-          </a:prstGeom>
-          <a:noFill/>
-        </p:spPr>
-        <p:txBody>
-          <a:bodyPr wrap="square" lIns="0" rIns="0" tIns="0" bIns="0" anchor="t">
-            <a:spAutoFit/>
-          </a:bodyPr>
-          <a:lstStyle/>
-          <a:p>
-            <a:pPr algn="l"/>
-            <a:r>
-              <a:rPr sz="1400" b="1" i="0">
-                <a:solidFill>
-                  <a:srgbClr val="1A1A2E"/>
-                </a:solidFill>
-                <a:latin typeface="Helvetica"/>
-              </a:rPr>
-              <a:t>Knowledge distillation</a:t>
-            </a:r>
-          </a:p>
-        </p:txBody>
-      </p:sp>
-      <p:sp>
-        <p:nvSpPr>
-          <p:cNvPr id="27" name="TextBox 26"/>
-          <p:cNvSpPr txBox="1"/>
-          <p:nvPr/>
-        </p:nvSpPr>
-        <p:spPr>
-          <a:xfrm>
-            <a:off x="8412480" y="2971800"/>
-            <a:ext cx="3291840" cy="365760"/>
-          </a:xfrm>
-          <a:prstGeom prst="rect">
-            <a:avLst/>
-          </a:prstGeom>
-          <a:noFill/>
-        </p:spPr>
-        <p:txBody>
-          <a:bodyPr wrap="square" lIns="0" rIns="0" tIns="0" bIns="0" anchor="t">
-            <a:spAutoFit/>
-          </a:bodyPr>
-          <a:lstStyle/>
-          <a:p>
-            <a:pPr algn="l"/>
-            <a:r>
-              <a:rPr sz="1000" b="1" i="1">
-                <a:solidFill>
-                  <a:srgbClr val="1F6FEB"/>
-                </a:solidFill>
-                <a:latin typeface="Helvetica"/>
-              </a:rPr>
-              <a:t>principled</a:t>
-            </a:r>
-          </a:p>
-        </p:txBody>
-      </p:sp>
-      <p:sp>
-        <p:nvSpPr>
-          <p:cNvPr id="28" name="TextBox 27"/>
-          <p:cNvSpPr txBox="1"/>
-          <p:nvPr/>
-        </p:nvSpPr>
-        <p:spPr>
-          <a:xfrm>
-            <a:off x="8412480" y="3429000"/>
-            <a:ext cx="3291840" cy="365760"/>
-          </a:xfrm>
-          <a:prstGeom prst="rect">
-            <a:avLst/>
-          </a:prstGeom>
-          <a:noFill/>
-        </p:spPr>
-        <p:txBody>
-          <a:bodyPr wrap="square" lIns="0" rIns="0" tIns="0" bIns="0" anchor="t">
-            <a:spAutoFit/>
-          </a:bodyPr>
-          <a:lstStyle/>
-          <a:p>
-            <a:pPr algn="l"/>
-            <a:r>
-              <a:rPr sz="1100" b="1" i="0">
-                <a:solidFill>
-                  <a:srgbClr val="1F6FEB"/>
-                </a:solidFill>
-                <a:latin typeface="Helvetica"/>
-              </a:rPr>
-              <a:t>How</a:t>
-            </a:r>
-          </a:p>
-        </p:txBody>
-      </p:sp>
-      <p:sp>
-        <p:nvSpPr>
-          <p:cNvPr id="29" name="TextBox 28"/>
-          <p:cNvSpPr txBox="1"/>
-          <p:nvPr/>
-        </p:nvSpPr>
-        <p:spPr>
-          <a:xfrm>
-            <a:off x="8412480" y="3749039"/>
-            <a:ext cx="3291840" cy="1280160"/>
-          </a:xfrm>
-          <a:prstGeom prst="rect">
-            <a:avLst/>
-          </a:prstGeom>
-          <a:noFill/>
-        </p:spPr>
-        <p:txBody>
-          <a:bodyPr wrap="square" lIns="0" rIns="0" tIns="0" bIns="0" anchor="t">
-            <a:spAutoFit/>
-          </a:bodyPr>
-          <a:lstStyle/>
-          <a:p>
-            <a:pPr algn="l"/>
-            <a:r>
-              <a:rPr sz="1100" b="0" i="0">
-                <a:solidFill>
-                  <a:srgbClr val="1A1A2E"/>
-                </a:solidFill>
-                <a:latin typeface="Helvetica"/>
-              </a:rPr>
-              <a:t>Transfer v2's small-object improvements into a faster baseline RT-DETR student.</a:t>
-            </a:r>
-          </a:p>
-        </p:txBody>
-      </p:sp>
-      <p:sp>
-        <p:nvSpPr>
-          <p:cNvPr id="30" name="TextBox 29"/>
-          <p:cNvSpPr txBox="1"/>
-          <p:nvPr/>
-        </p:nvSpPr>
-        <p:spPr>
-          <a:xfrm>
-            <a:off x="8412480" y="4846320"/>
-            <a:ext cx="3291840" cy="365760"/>
-          </a:xfrm>
-          <a:prstGeom prst="rect">
-            <a:avLst/>
-          </a:prstGeom>
-          <a:noFill/>
-        </p:spPr>
-        <p:txBody>
-          <a:bodyPr wrap="square" lIns="0" rIns="0" tIns="0" bIns="0" anchor="t">
-            <a:spAutoFit/>
-          </a:bodyPr>
-          <a:lstStyle/>
-          <a:p>
-            <a:pPr algn="l"/>
-            <a:r>
-              <a:rPr sz="1100" b="1" i="0">
-                <a:solidFill>
-                  <a:srgbClr val="2CA02C"/>
-                </a:solidFill>
-                <a:latin typeface="Helvetica"/>
-              </a:rPr>
-              <a:t>Goal</a:t>
-            </a:r>
-          </a:p>
-        </p:txBody>
-      </p:sp>
-      <p:sp>
-        <p:nvSpPr>
-          <p:cNvPr id="31" name="TextBox 30"/>
-          <p:cNvSpPr txBox="1"/>
-          <p:nvPr/>
-        </p:nvSpPr>
-        <p:spPr>
-          <a:xfrm>
-            <a:off x="8412480" y="5166360"/>
-            <a:ext cx="3291840" cy="1280160"/>
-          </a:xfrm>
-          <a:prstGeom prst="rect">
-            <a:avLst/>
-          </a:prstGeom>
-          <a:noFill/>
-        </p:spPr>
-        <p:txBody>
-          <a:bodyPr wrap="square" lIns="0" rIns="0" tIns="0" bIns="0" anchor="t">
-            <a:spAutoFit/>
-          </a:bodyPr>
-          <a:lstStyle/>
-          <a:p>
-            <a:pPr algn="l"/>
-            <a:r>
-              <a:rPr sz="1100" b="0" i="0">
-                <a:solidFill>
-                  <a:srgbClr val="1A1A2E"/>
-                </a:solidFill>
-                <a:latin typeface="Helvetica"/>
-              </a:rPr>
-              <a:t>Recover baseline inference speed while retaining the small-object AP gains learned from P2 feedback.</a:t>
-            </a:r>
-          </a:p>
-        </p:txBody>
-      </p:sp>
-      <p:sp>
-        <p:nvSpPr>
-          <p:cNvPr id="32" name="TextBox 31"/>
-          <p:cNvSpPr txBox="1"/>
-          <p:nvPr/>
-        </p:nvSpPr>
-        <p:spPr>
-          <a:xfrm>
-            <a:off x="640080" y="6126480"/>
-            <a:ext cx="10972800" cy="365760"/>
-          </a:xfrm>
-          <a:prstGeom prst="rect">
-            <a:avLst/>
-          </a:prstGeom>
-          <a:noFill/>
-        </p:spPr>
-        <p:txBody>
-          <a:bodyPr wrap="square" lIns="0" rIns="0" tIns="0" bIns="0" anchor="t">
-            <a:spAutoFit/>
-          </a:bodyPr>
-          <a:lstStyle/>
-          <a:p>
-            <a:pPr algn="ctr"/>
-            <a:r>
-              <a:rPr sz="1300" b="1" i="0">
-                <a:solidFill>
-                  <a:srgbClr val="1F6FEB"/>
-                </a:solidFill>
-                <a:latin typeface="Helvetica"/>
-              </a:rPr>
-              <a:t>Common goal: keep the +0.99 small-object AP gain while approaching the 53 FPS baseline.</a:t>
-            </a:r>
-          </a:p>
-        </p:txBody>
-      </p:sp>
-      <p:sp>
-        <p:nvSpPr>
-          <p:cNvPr id="33" name="TextBox 32"/>
           <p:cNvSpPr txBox="1"/>
           <p:nvPr/>
         </p:nvSpPr>
@@ -10515,7 +9741,7 @@
       </p:sp>
       <p:sp>
         <p:nvSpPr>
-          <p:cNvPr id="34" name="TextBox 33"/>
+          <p:cNvPr id="18" name="TextBox 17"/>
           <p:cNvSpPr txBox="1"/>
           <p:nvPr/>
         </p:nvSpPr>
@@ -10543,7 +9769,7 @@
                 </a:solidFill>
                 <a:latin typeface="Helvetica"/>
               </a:rPr>
-              <a:t>24 / 27</a:t>
+              <a:t>24 / 28</a:t>
             </a:r>
           </a:p>
         </p:txBody>
@@ -10596,7 +9822,7 @@
                 </a:solidFill>
                 <a:latin typeface="Helvetica"/>
               </a:rPr>
-              <a:t>Conclusion</a:t>
+              <a:t>Future work: recovering inference speed</a:t>
             </a:r>
           </a:p>
         </p:txBody>
@@ -10646,14 +9872,95 @@
       </p:sp>
       <p:sp>
         <p:nvSpPr>
-          <p:cNvPr id="4" name="Oval 3"/>
+          <p:cNvPr id="4" name="TextBox 3"/>
+          <p:cNvSpPr txBox="1"/>
+          <p:nvPr/>
+        </p:nvSpPr>
+        <p:spPr>
+          <a:xfrm>
+            <a:off x="640080" y="1417320"/>
+            <a:ext cx="10972800" cy="457200"/>
+          </a:xfrm>
+          <a:prstGeom prst="rect">
+            <a:avLst/>
+          </a:prstGeom>
+          <a:noFill/>
+        </p:spPr>
+        <p:txBody>
+          <a:bodyPr wrap="square" lIns="0" rIns="0" tIns="0" bIns="0" anchor="t">
+            <a:spAutoFit/>
+          </a:bodyPr>
+          <a:lstStyle/>
+          <a:p>
+            <a:pPr algn="ctr"/>
+            <a:r>
+              <a:rPr sz="1800" b="0" i="1">
+                <a:solidFill>
+                  <a:srgbClr val="1A1A2E"/>
+                </a:solidFill>
+                <a:latin typeface="Helvetica"/>
+              </a:rPr>
+              <a:t>The 2× slowdown comes from the P2 level, not the feedback module.</a:t>
+            </a:r>
+          </a:p>
+        </p:txBody>
+      </p:sp>
+      <p:sp>
+        <p:nvSpPr>
+          <p:cNvPr id="5" name="Rounded Rectangle 4"/>
           <p:cNvSpPr/>
           <p:nvPr/>
         </p:nvSpPr>
         <p:spPr>
           <a:xfrm>
-            <a:off x="822960" y="1965960"/>
-            <a:ext cx="502920" cy="502920"/>
+            <a:off x="640080" y="2194560"/>
+            <a:ext cx="3657600" cy="3657600"/>
+          </a:xfrm>
+          <a:prstGeom prst="roundRect">
+            <a:avLst/>
+          </a:prstGeom>
+          <a:solidFill>
+            <a:srgbClr val="F0F6FF"/>
+          </a:solidFill>
+          <a:ln w="15240">
+            <a:solidFill>
+              <a:srgbClr val="1F6FEB"/>
+            </a:solidFill>
+          </a:ln>
+          <a:effectLst/>
+        </p:spPr>
+        <p:style>
+          <a:lnRef idx="1">
+            <a:schemeClr val="accent1"/>
+          </a:lnRef>
+          <a:fillRef idx="3">
+            <a:schemeClr val="accent1"/>
+          </a:fillRef>
+          <a:effectRef idx="2">
+            <a:schemeClr val="accent1"/>
+          </a:effectRef>
+          <a:fontRef idx="minor">
+            <a:schemeClr val="lt1"/>
+          </a:fontRef>
+        </p:style>
+        <p:txBody>
+          <a:bodyPr rtlCol="0" anchor="ctr"/>
+          <a:lstStyle/>
+          <a:p>
+            <a:pPr algn="ctr"/>
+          </a:p>
+        </p:txBody>
+      </p:sp>
+      <p:sp>
+        <p:nvSpPr>
+          <p:cNvPr id="6" name="Oval 5"/>
+          <p:cNvSpPr/>
+          <p:nvPr/>
+        </p:nvSpPr>
+        <p:spPr>
+          <a:xfrm>
+            <a:off x="822960" y="2331720"/>
+            <a:ext cx="457200" cy="457200"/>
           </a:xfrm>
           <a:prstGeom prst="ellipse">
             <a:avLst/>
@@ -10689,14 +9996,14 @@
       </p:sp>
       <p:sp>
         <p:nvSpPr>
-          <p:cNvPr id="5" name="TextBox 4"/>
-          <p:cNvSpPr txBox="1"/>
-          <p:nvPr/>
-        </p:nvSpPr>
-        <p:spPr>
-          <a:xfrm>
-            <a:off x="822960" y="1993392"/>
-            <a:ext cx="502920" cy="502920"/>
+          <p:cNvPr id="7" name="TextBox 6"/>
+          <p:cNvSpPr txBox="1"/>
+          <p:nvPr/>
+        </p:nvSpPr>
+        <p:spPr>
+          <a:xfrm>
+            <a:off x="822960" y="2359152"/>
+            <a:ext cx="457200" cy="457200"/>
           </a:xfrm>
           <a:prstGeom prst="rect">
             <a:avLst/>
@@ -10711,7 +10018,7 @@
           <a:p>
             <a:pPr algn="ctr"/>
             <a:r>
-              <a:rPr sz="2000" b="1" i="0">
+              <a:rPr sz="1800" b="1" i="0">
                 <a:solidFill>
                   <a:srgbClr val="FFFFFF"/>
                 </a:solidFill>
@@ -10724,14 +10031,14 @@
       </p:sp>
       <p:sp>
         <p:nvSpPr>
-          <p:cNvPr id="6" name="TextBox 5"/>
-          <p:cNvSpPr txBox="1"/>
-          <p:nvPr/>
-        </p:nvSpPr>
-        <p:spPr>
-          <a:xfrm>
-            <a:off x="1554480" y="1874520"/>
-            <a:ext cx="10058400" cy="548640"/>
+          <p:cNvPr id="8" name="TextBox 7"/>
+          <p:cNvSpPr txBox="1"/>
+          <p:nvPr/>
+        </p:nvSpPr>
+        <p:spPr>
+          <a:xfrm>
+            <a:off x="1417320" y="2331720"/>
+            <a:ext cx="2743200" cy="548640"/>
           </a:xfrm>
           <a:prstGeom prst="rect">
             <a:avLst/>
@@ -10746,27 +10053,27 @@
           <a:p>
             <a:pPr algn="l"/>
             <a:r>
-              <a:rPr sz="2400" b="1" i="0">
+              <a:rPr sz="1400" b="1" i="0">
                 <a:solidFill>
                   <a:srgbClr val="1A1A2E"/>
                 </a:solidFill>
                 <a:latin typeface="Helvetica"/>
               </a:rPr>
-              <a:t>Feedback improves small-object detection</a:t>
-            </a:r>
-          </a:p>
-        </p:txBody>
-      </p:sp>
-      <p:sp>
-        <p:nvSpPr>
-          <p:cNvPr id="7" name="TextBox 6"/>
-          <p:cNvSpPr txBox="1"/>
-          <p:nvPr/>
-        </p:nvSpPr>
-        <p:spPr>
-          <a:xfrm>
-            <a:off x="1554480" y="2468880"/>
-            <a:ext cx="10058400" cy="548640"/>
+              <a:t>Train with P2, infer without</a:t>
+            </a:r>
+          </a:p>
+        </p:txBody>
+      </p:sp>
+      <p:sp>
+        <p:nvSpPr>
+          <p:cNvPr id="9" name="TextBox 8"/>
+          <p:cNvSpPr txBox="1"/>
+          <p:nvPr/>
+        </p:nvSpPr>
+        <p:spPr>
+          <a:xfrm>
+            <a:off x="822960" y="2971800"/>
+            <a:ext cx="3291840" cy="365760"/>
           </a:xfrm>
           <a:prstGeom prst="rect">
             <a:avLst/>
@@ -10781,27 +10088,213 @@
           <a:p>
             <a:pPr algn="l"/>
             <a:r>
-              <a:rPr sz="1500" b="0" i="1">
-                <a:solidFill>
-                  <a:srgbClr val="666677"/>
-                </a:solidFill>
-                <a:latin typeface="Helvetica"/>
-              </a:rPr>
-              <a:t>+0.99 small-object AP, causal contribution at inference.</a:t>
-            </a:r>
-          </a:p>
-        </p:txBody>
-      </p:sp>
-      <p:sp>
-        <p:nvSpPr>
-          <p:cNvPr id="8" name="Oval 7"/>
+              <a:rPr sz="1000" b="1" i="1">
+                <a:solidFill>
+                  <a:srgbClr val="1F6FEB"/>
+                </a:solidFill>
+                <a:latin typeface="Helvetica"/>
+              </a:rPr>
+              <a:t>fastest path</a:t>
+            </a:r>
+          </a:p>
+        </p:txBody>
+      </p:sp>
+      <p:sp>
+        <p:nvSpPr>
+          <p:cNvPr id="10" name="TextBox 9"/>
+          <p:cNvSpPr txBox="1"/>
+          <p:nvPr/>
+        </p:nvSpPr>
+        <p:spPr>
+          <a:xfrm>
+            <a:off x="822960" y="3429000"/>
+            <a:ext cx="3291840" cy="365760"/>
+          </a:xfrm>
+          <a:prstGeom prst="rect">
+            <a:avLst/>
+          </a:prstGeom>
+          <a:noFill/>
+        </p:spPr>
+        <p:txBody>
+          <a:bodyPr wrap="square" lIns="0" rIns="0" tIns="0" bIns="0" anchor="t">
+            <a:spAutoFit/>
+          </a:bodyPr>
+          <a:lstStyle/>
+          <a:p>
+            <a:pPr algn="l"/>
+            <a:r>
+              <a:rPr sz="1100" b="1" i="0">
+                <a:solidFill>
+                  <a:srgbClr val="1F6FEB"/>
+                </a:solidFill>
+                <a:latin typeface="Helvetica"/>
+              </a:rPr>
+              <a:t>How</a:t>
+            </a:r>
+          </a:p>
+        </p:txBody>
+      </p:sp>
+      <p:sp>
+        <p:nvSpPr>
+          <p:cNvPr id="11" name="TextBox 10"/>
+          <p:cNvSpPr txBox="1"/>
+          <p:nvPr/>
+        </p:nvSpPr>
+        <p:spPr>
+          <a:xfrm>
+            <a:off x="822960" y="3749039"/>
+            <a:ext cx="3291840" cy="1280160"/>
+          </a:xfrm>
+          <a:prstGeom prst="rect">
+            <a:avLst/>
+          </a:prstGeom>
+          <a:noFill/>
+        </p:spPr>
+        <p:txBody>
+          <a:bodyPr wrap="square" lIns="0" rIns="0" tIns="0" bIns="0" anchor="t">
+            <a:spAutoFit/>
+          </a:bodyPr>
+          <a:lstStyle/>
+          <a:p>
+            <a:pPr algn="l"/>
+            <a:r>
+              <a:rPr sz="1100" b="0" i="0">
+                <a:solidFill>
+                  <a:srgbClr val="1A1A2E"/>
+                </a:solidFill>
+                <a:latin typeface="Helvetica"/>
+              </a:rPr>
+              <a:t>Use P2 during training to improve small-object learning, then remove it at inference.</a:t>
+            </a:r>
+          </a:p>
+        </p:txBody>
+      </p:sp>
+      <p:sp>
+        <p:nvSpPr>
+          <p:cNvPr id="12" name="TextBox 11"/>
+          <p:cNvSpPr txBox="1"/>
+          <p:nvPr/>
+        </p:nvSpPr>
+        <p:spPr>
+          <a:xfrm>
+            <a:off x="822960" y="4846320"/>
+            <a:ext cx="3291840" cy="365760"/>
+          </a:xfrm>
+          <a:prstGeom prst="rect">
+            <a:avLst/>
+          </a:prstGeom>
+          <a:noFill/>
+        </p:spPr>
+        <p:txBody>
+          <a:bodyPr wrap="square" lIns="0" rIns="0" tIns="0" bIns="0" anchor="t">
+            <a:spAutoFit/>
+          </a:bodyPr>
+          <a:lstStyle/>
+          <a:p>
+            <a:pPr algn="l"/>
+            <a:r>
+              <a:rPr sz="1100" b="1" i="0">
+                <a:solidFill>
+                  <a:srgbClr val="2CA02C"/>
+                </a:solidFill>
+                <a:latin typeface="Helvetica"/>
+              </a:rPr>
+              <a:t>Goal</a:t>
+            </a:r>
+          </a:p>
+        </p:txBody>
+      </p:sp>
+      <p:sp>
+        <p:nvSpPr>
+          <p:cNvPr id="13" name="TextBox 12"/>
+          <p:cNvSpPr txBox="1"/>
+          <p:nvPr/>
+        </p:nvSpPr>
+        <p:spPr>
+          <a:xfrm>
+            <a:off x="822960" y="5166360"/>
+            <a:ext cx="3291840" cy="1280160"/>
+          </a:xfrm>
+          <a:prstGeom prst="rect">
+            <a:avLst/>
+          </a:prstGeom>
+          <a:noFill/>
+        </p:spPr>
+        <p:txBody>
+          <a:bodyPr wrap="square" lIns="0" rIns="0" tIns="0" bIns="0" anchor="t">
+            <a:spAutoFit/>
+          </a:bodyPr>
+          <a:lstStyle/>
+          <a:p>
+            <a:pPr algn="l"/>
+            <a:r>
+              <a:rPr sz="1100" b="0" i="0">
+                <a:solidFill>
+                  <a:srgbClr val="1A1A2E"/>
+                </a:solidFill>
+                <a:latin typeface="Helvetica"/>
+              </a:rPr>
+              <a:t>Keep most of the +0.99 small-object AP gain without the P2 computational cost.</a:t>
+            </a:r>
+          </a:p>
+        </p:txBody>
+      </p:sp>
+      <p:sp>
+        <p:nvSpPr>
+          <p:cNvPr id="14" name="Rounded Rectangle 13"/>
           <p:cNvSpPr/>
           <p:nvPr/>
         </p:nvSpPr>
         <p:spPr>
           <a:xfrm>
-            <a:off x="822960" y="3383280"/>
-            <a:ext cx="502920" cy="502920"/>
+            <a:off x="4434840" y="2194560"/>
+            <a:ext cx="3657600" cy="3657600"/>
+          </a:xfrm>
+          <a:prstGeom prst="roundRect">
+            <a:avLst/>
+          </a:prstGeom>
+          <a:solidFill>
+            <a:srgbClr val="F0F6FF"/>
+          </a:solidFill>
+          <a:ln w="15240">
+            <a:solidFill>
+              <a:srgbClr val="1F6FEB"/>
+            </a:solidFill>
+          </a:ln>
+          <a:effectLst/>
+        </p:spPr>
+        <p:style>
+          <a:lnRef idx="1">
+            <a:schemeClr val="accent1"/>
+          </a:lnRef>
+          <a:fillRef idx="3">
+            <a:schemeClr val="accent1"/>
+          </a:fillRef>
+          <a:effectRef idx="2">
+            <a:schemeClr val="accent1"/>
+          </a:effectRef>
+          <a:fontRef idx="minor">
+            <a:schemeClr val="lt1"/>
+          </a:fontRef>
+        </p:style>
+        <p:txBody>
+          <a:bodyPr rtlCol="0" anchor="ctr"/>
+          <a:lstStyle/>
+          <a:p>
+            <a:pPr algn="ctr"/>
+          </a:p>
+        </p:txBody>
+      </p:sp>
+      <p:sp>
+        <p:nvSpPr>
+          <p:cNvPr id="15" name="Oval 14"/>
+          <p:cNvSpPr/>
+          <p:nvPr/>
+        </p:nvSpPr>
+        <p:spPr>
+          <a:xfrm>
+            <a:off x="4617720" y="2331720"/>
+            <a:ext cx="457200" cy="457200"/>
           </a:xfrm>
           <a:prstGeom prst="ellipse">
             <a:avLst/>
@@ -10837,14 +10330,14 @@
       </p:sp>
       <p:sp>
         <p:nvSpPr>
-          <p:cNvPr id="9" name="TextBox 8"/>
-          <p:cNvSpPr txBox="1"/>
-          <p:nvPr/>
-        </p:nvSpPr>
-        <p:spPr>
-          <a:xfrm>
-            <a:off x="822960" y="3410712"/>
-            <a:ext cx="502920" cy="502920"/>
+          <p:cNvPr id="16" name="TextBox 15"/>
+          <p:cNvSpPr txBox="1"/>
+          <p:nvPr/>
+        </p:nvSpPr>
+        <p:spPr>
+          <a:xfrm>
+            <a:off x="4617720" y="2359152"/>
+            <a:ext cx="457200" cy="457200"/>
           </a:xfrm>
           <a:prstGeom prst="rect">
             <a:avLst/>
@@ -10859,7 +10352,7 @@
           <a:p>
             <a:pPr algn="ctr"/>
             <a:r>
-              <a:rPr sz="2000" b="1" i="0">
+              <a:rPr sz="1800" b="1" i="0">
                 <a:solidFill>
                   <a:srgbClr val="FFFFFF"/>
                 </a:solidFill>
@@ -10872,14 +10365,14 @@
       </p:sp>
       <p:sp>
         <p:nvSpPr>
-          <p:cNvPr id="10" name="TextBox 9"/>
-          <p:cNvSpPr txBox="1"/>
-          <p:nvPr/>
-        </p:nvSpPr>
-        <p:spPr>
-          <a:xfrm>
-            <a:off x="1554480" y="3291840"/>
-            <a:ext cx="10058400" cy="548640"/>
+          <p:cNvPr id="17" name="TextBox 16"/>
+          <p:cNvSpPr txBox="1"/>
+          <p:nvPr/>
+        </p:nvSpPr>
+        <p:spPr>
+          <a:xfrm>
+            <a:off x="5212080" y="2331720"/>
+            <a:ext cx="2743200" cy="548640"/>
           </a:xfrm>
           <a:prstGeom prst="rect">
             <a:avLst/>
@@ -10894,27 +10387,27 @@
           <a:p>
             <a:pPr algn="l"/>
             <a:r>
-              <a:rPr sz="2400" b="1" i="0">
+              <a:rPr sz="1400" b="1" i="0">
                 <a:solidFill>
                   <a:srgbClr val="1A1A2E"/>
                 </a:solidFill>
                 <a:latin typeface="Helvetica"/>
               </a:rPr>
-              <a:t>Only works with proper design</a:t>
-            </a:r>
-          </a:p>
-        </p:txBody>
-      </p:sp>
-      <p:sp>
-        <p:nvSpPr>
-          <p:cNvPr id="11" name="TextBox 10"/>
-          <p:cNvSpPr txBox="1"/>
-          <p:nvPr/>
-        </p:nvSpPr>
-        <p:spPr>
-          <a:xfrm>
-            <a:off x="1554480" y="3886200"/>
-            <a:ext cx="10058400" cy="548640"/>
+              <a:t>Lighter P2 path</a:t>
+            </a:r>
+          </a:p>
+        </p:txBody>
+      </p:sp>
+      <p:sp>
+        <p:nvSpPr>
+          <p:cNvPr id="18" name="TextBox 17"/>
+          <p:cNvSpPr txBox="1"/>
+          <p:nvPr/>
+        </p:nvSpPr>
+        <p:spPr>
+          <a:xfrm>
+            <a:off x="4617720" y="2971800"/>
+            <a:ext cx="3291840" cy="365760"/>
           </a:xfrm>
           <a:prstGeom prst="rect">
             <a:avLst/>
@@ -10929,27 +10422,213 @@
           <a:p>
             <a:pPr algn="l"/>
             <a:r>
-              <a:rPr sz="1500" b="0" i="1">
-                <a:solidFill>
-                  <a:srgbClr val="666677"/>
-                </a:solidFill>
-                <a:latin typeface="Helvetica"/>
-              </a:rPr>
-              <a:t>Floor the gate; restrict to small-object levels.</a:t>
-            </a:r>
-          </a:p>
-        </p:txBody>
-      </p:sp>
-      <p:sp>
-        <p:nvSpPr>
-          <p:cNvPr id="12" name="Oval 11"/>
+              <a:rPr sz="1000" b="1" i="1">
+                <a:solidFill>
+                  <a:srgbClr val="1F6FEB"/>
+                </a:solidFill>
+                <a:latin typeface="Helvetica"/>
+              </a:rPr>
+              <a:t>compromise</a:t>
+            </a:r>
+          </a:p>
+        </p:txBody>
+      </p:sp>
+      <p:sp>
+        <p:nvSpPr>
+          <p:cNvPr id="19" name="TextBox 18"/>
+          <p:cNvSpPr txBox="1"/>
+          <p:nvPr/>
+        </p:nvSpPr>
+        <p:spPr>
+          <a:xfrm>
+            <a:off x="4617720" y="3429000"/>
+            <a:ext cx="3291840" cy="365760"/>
+          </a:xfrm>
+          <a:prstGeom prst="rect">
+            <a:avLst/>
+          </a:prstGeom>
+          <a:noFill/>
+        </p:spPr>
+        <p:txBody>
+          <a:bodyPr wrap="square" lIns="0" rIns="0" tIns="0" bIns="0" anchor="t">
+            <a:spAutoFit/>
+          </a:bodyPr>
+          <a:lstStyle/>
+          <a:p>
+            <a:pPr algn="l"/>
+            <a:r>
+              <a:rPr sz="1100" b="1" i="0">
+                <a:solidFill>
+                  <a:srgbClr val="1F6FEB"/>
+                </a:solidFill>
+                <a:latin typeface="Helvetica"/>
+              </a:rPr>
+              <a:t>How</a:t>
+            </a:r>
+          </a:p>
+        </p:txBody>
+      </p:sp>
+      <p:sp>
+        <p:nvSpPr>
+          <p:cNvPr id="20" name="TextBox 19"/>
+          <p:cNvSpPr txBox="1"/>
+          <p:nvPr/>
+        </p:nvSpPr>
+        <p:spPr>
+          <a:xfrm>
+            <a:off x="4617720" y="3749039"/>
+            <a:ext cx="3291840" cy="1280160"/>
+          </a:xfrm>
+          <a:prstGeom prst="rect">
+            <a:avLst/>
+          </a:prstGeom>
+          <a:noFill/>
+        </p:spPr>
+        <p:txBody>
+          <a:bodyPr wrap="square" lIns="0" rIns="0" tIns="0" bIns="0" anchor="t">
+            <a:spAutoFit/>
+          </a:bodyPr>
+          <a:lstStyle/>
+          <a:p>
+            <a:pPr algn="l"/>
+            <a:r>
+              <a:rPr sz="1100" b="0" i="0">
+                <a:solidFill>
+                  <a:srgbClr val="1A1A2E"/>
+                </a:solidFill>
+                <a:latin typeface="Helvetica"/>
+              </a:rPr>
+              <a:t>Reduce the cost of P2 — fewer channels, or a simpler projection layer.</a:t>
+            </a:r>
+          </a:p>
+        </p:txBody>
+      </p:sp>
+      <p:sp>
+        <p:nvSpPr>
+          <p:cNvPr id="21" name="TextBox 20"/>
+          <p:cNvSpPr txBox="1"/>
+          <p:nvPr/>
+        </p:nvSpPr>
+        <p:spPr>
+          <a:xfrm>
+            <a:off x="4617720" y="4846320"/>
+            <a:ext cx="3291840" cy="365760"/>
+          </a:xfrm>
+          <a:prstGeom prst="rect">
+            <a:avLst/>
+          </a:prstGeom>
+          <a:noFill/>
+        </p:spPr>
+        <p:txBody>
+          <a:bodyPr wrap="square" lIns="0" rIns="0" tIns="0" bIns="0" anchor="t">
+            <a:spAutoFit/>
+          </a:bodyPr>
+          <a:lstStyle/>
+          <a:p>
+            <a:pPr algn="l"/>
+            <a:r>
+              <a:rPr sz="1100" b="1" i="0">
+                <a:solidFill>
+                  <a:srgbClr val="2CA02C"/>
+                </a:solidFill>
+                <a:latin typeface="Helvetica"/>
+              </a:rPr>
+              <a:t>Goal</a:t>
+            </a:r>
+          </a:p>
+        </p:txBody>
+      </p:sp>
+      <p:sp>
+        <p:nvSpPr>
+          <p:cNvPr id="22" name="TextBox 21"/>
+          <p:cNvSpPr txBox="1"/>
+          <p:nvPr/>
+        </p:nvSpPr>
+        <p:spPr>
+          <a:xfrm>
+            <a:off x="4617720" y="5166360"/>
+            <a:ext cx="3291840" cy="1280160"/>
+          </a:xfrm>
+          <a:prstGeom prst="rect">
+            <a:avLst/>
+          </a:prstGeom>
+          <a:noFill/>
+        </p:spPr>
+        <p:txBody>
+          <a:bodyPr wrap="square" lIns="0" rIns="0" tIns="0" bIns="0" anchor="t">
+            <a:spAutoFit/>
+          </a:bodyPr>
+          <a:lstStyle/>
+          <a:p>
+            <a:pPr algn="l"/>
+            <a:r>
+              <a:rPr sz="1100" b="0" i="0">
+                <a:solidFill>
+                  <a:srgbClr val="1A1A2E"/>
+                </a:solidFill>
+                <a:latin typeface="Helvetica"/>
+              </a:rPr>
+              <a:t>Preserve small-object improvements while reducing the high-resolution P2 slowdown.</a:t>
+            </a:r>
+          </a:p>
+        </p:txBody>
+      </p:sp>
+      <p:sp>
+        <p:nvSpPr>
+          <p:cNvPr id="23" name="Rounded Rectangle 22"/>
           <p:cNvSpPr/>
           <p:nvPr/>
         </p:nvSpPr>
         <p:spPr>
           <a:xfrm>
-            <a:off x="822960" y="4800600"/>
-            <a:ext cx="502920" cy="502920"/>
+            <a:off x="8229600" y="2194560"/>
+            <a:ext cx="3657600" cy="3657600"/>
+          </a:xfrm>
+          <a:prstGeom prst="roundRect">
+            <a:avLst/>
+          </a:prstGeom>
+          <a:solidFill>
+            <a:srgbClr val="F0F6FF"/>
+          </a:solidFill>
+          <a:ln w="15240">
+            <a:solidFill>
+              <a:srgbClr val="1F6FEB"/>
+            </a:solidFill>
+          </a:ln>
+          <a:effectLst/>
+        </p:spPr>
+        <p:style>
+          <a:lnRef idx="1">
+            <a:schemeClr val="accent1"/>
+          </a:lnRef>
+          <a:fillRef idx="3">
+            <a:schemeClr val="accent1"/>
+          </a:fillRef>
+          <a:effectRef idx="2">
+            <a:schemeClr val="accent1"/>
+          </a:effectRef>
+          <a:fontRef idx="minor">
+            <a:schemeClr val="lt1"/>
+          </a:fontRef>
+        </p:style>
+        <p:txBody>
+          <a:bodyPr rtlCol="0" anchor="ctr"/>
+          <a:lstStyle/>
+          <a:p>
+            <a:pPr algn="ctr"/>
+          </a:p>
+        </p:txBody>
+      </p:sp>
+      <p:sp>
+        <p:nvSpPr>
+          <p:cNvPr id="24" name="Oval 23"/>
+          <p:cNvSpPr/>
+          <p:nvPr/>
+        </p:nvSpPr>
+        <p:spPr>
+          <a:xfrm>
+            <a:off x="8412480" y="2331720"/>
+            <a:ext cx="457200" cy="457200"/>
           </a:xfrm>
           <a:prstGeom prst="ellipse">
             <a:avLst/>
@@ -10985,14 +10664,14 @@
       </p:sp>
       <p:sp>
         <p:nvSpPr>
-          <p:cNvPr id="13" name="TextBox 12"/>
-          <p:cNvSpPr txBox="1"/>
-          <p:nvPr/>
-        </p:nvSpPr>
-        <p:spPr>
-          <a:xfrm>
-            <a:off x="822960" y="4828032"/>
-            <a:ext cx="502920" cy="502920"/>
+          <p:cNvPr id="25" name="TextBox 24"/>
+          <p:cNvSpPr txBox="1"/>
+          <p:nvPr/>
+        </p:nvSpPr>
+        <p:spPr>
+          <a:xfrm>
+            <a:off x="8412480" y="2359152"/>
+            <a:ext cx="457200" cy="457200"/>
           </a:xfrm>
           <a:prstGeom prst="rect">
             <a:avLst/>
@@ -11007,7 +10686,7 @@
           <a:p>
             <a:pPr algn="ctr"/>
             <a:r>
-              <a:rPr sz="2000" b="1" i="0">
+              <a:rPr sz="1800" b="1" i="0">
                 <a:solidFill>
                   <a:srgbClr val="FFFFFF"/>
                 </a:solidFill>
@@ -11020,14 +10699,14 @@
       </p:sp>
       <p:sp>
         <p:nvSpPr>
-          <p:cNvPr id="14" name="TextBox 13"/>
-          <p:cNvSpPr txBox="1"/>
-          <p:nvPr/>
-        </p:nvSpPr>
-        <p:spPr>
-          <a:xfrm>
-            <a:off x="1554480" y="4709160"/>
-            <a:ext cx="10058400" cy="548640"/>
+          <p:cNvPr id="26" name="TextBox 25"/>
+          <p:cNvSpPr txBox="1"/>
+          <p:nvPr/>
+        </p:nvSpPr>
+        <p:spPr>
+          <a:xfrm>
+            <a:off x="9006840" y="2331720"/>
+            <a:ext cx="2743200" cy="548640"/>
           </a:xfrm>
           <a:prstGeom prst="rect">
             <a:avLst/>
@@ -11042,27 +10721,27 @@
           <a:p>
             <a:pPr algn="l"/>
             <a:r>
-              <a:rPr sz="2400" b="1" i="0">
+              <a:rPr sz="1400" b="1" i="0">
                 <a:solidFill>
                   <a:srgbClr val="1A1A2E"/>
                 </a:solidFill>
                 <a:latin typeface="Helvetica"/>
               </a:rPr>
-              <a:t>Modest but real</a:t>
-            </a:r>
-          </a:p>
-        </p:txBody>
-      </p:sp>
-      <p:sp>
-        <p:nvSpPr>
-          <p:cNvPr id="15" name="TextBox 14"/>
-          <p:cNvSpPr txBox="1"/>
-          <p:nvPr/>
-        </p:nvSpPr>
-        <p:spPr>
-          <a:xfrm>
-            <a:off x="1554480" y="5303520"/>
-            <a:ext cx="10058400" cy="548640"/>
+              <a:t>Knowledge distillation</a:t>
+            </a:r>
+          </a:p>
+        </p:txBody>
+      </p:sp>
+      <p:sp>
+        <p:nvSpPr>
+          <p:cNvPr id="27" name="TextBox 26"/>
+          <p:cNvSpPr txBox="1"/>
+          <p:nvPr/>
+        </p:nvSpPr>
+        <p:spPr>
+          <a:xfrm>
+            <a:off x="8412480" y="2971800"/>
+            <a:ext cx="3291840" cy="365760"/>
           </a:xfrm>
           <a:prstGeom prst="rect">
             <a:avLst/>
@@ -11077,20 +10756,195 @@
           <a:p>
             <a:pPr algn="l"/>
             <a:r>
-              <a:rPr sz="1500" b="0" i="1">
-                <a:solidFill>
-                  <a:srgbClr val="666677"/>
-                </a:solidFill>
-                <a:latin typeface="Helvetica"/>
-              </a:rPr>
-              <a:t>Consistent across metrics; reproducible from the same checkpoint.</a:t>
-            </a:r>
-          </a:p>
-        </p:txBody>
-      </p:sp>
-      <p:sp>
-        <p:nvSpPr>
-          <p:cNvPr id="16" name="TextBox 15"/>
+              <a:rPr sz="1000" b="1" i="1">
+                <a:solidFill>
+                  <a:srgbClr val="1F6FEB"/>
+                </a:solidFill>
+                <a:latin typeface="Helvetica"/>
+              </a:rPr>
+              <a:t>principled</a:t>
+            </a:r>
+          </a:p>
+        </p:txBody>
+      </p:sp>
+      <p:sp>
+        <p:nvSpPr>
+          <p:cNvPr id="28" name="TextBox 27"/>
+          <p:cNvSpPr txBox="1"/>
+          <p:nvPr/>
+        </p:nvSpPr>
+        <p:spPr>
+          <a:xfrm>
+            <a:off x="8412480" y="3429000"/>
+            <a:ext cx="3291840" cy="365760"/>
+          </a:xfrm>
+          <a:prstGeom prst="rect">
+            <a:avLst/>
+          </a:prstGeom>
+          <a:noFill/>
+        </p:spPr>
+        <p:txBody>
+          <a:bodyPr wrap="square" lIns="0" rIns="0" tIns="0" bIns="0" anchor="t">
+            <a:spAutoFit/>
+          </a:bodyPr>
+          <a:lstStyle/>
+          <a:p>
+            <a:pPr algn="l"/>
+            <a:r>
+              <a:rPr sz="1100" b="1" i="0">
+                <a:solidFill>
+                  <a:srgbClr val="1F6FEB"/>
+                </a:solidFill>
+                <a:latin typeface="Helvetica"/>
+              </a:rPr>
+              <a:t>How</a:t>
+            </a:r>
+          </a:p>
+        </p:txBody>
+      </p:sp>
+      <p:sp>
+        <p:nvSpPr>
+          <p:cNvPr id="29" name="TextBox 28"/>
+          <p:cNvSpPr txBox="1"/>
+          <p:nvPr/>
+        </p:nvSpPr>
+        <p:spPr>
+          <a:xfrm>
+            <a:off x="8412480" y="3749039"/>
+            <a:ext cx="3291840" cy="1280160"/>
+          </a:xfrm>
+          <a:prstGeom prst="rect">
+            <a:avLst/>
+          </a:prstGeom>
+          <a:noFill/>
+        </p:spPr>
+        <p:txBody>
+          <a:bodyPr wrap="square" lIns="0" rIns="0" tIns="0" bIns="0" anchor="t">
+            <a:spAutoFit/>
+          </a:bodyPr>
+          <a:lstStyle/>
+          <a:p>
+            <a:pPr algn="l"/>
+            <a:r>
+              <a:rPr sz="1100" b="0" i="0">
+                <a:solidFill>
+                  <a:srgbClr val="1A1A2E"/>
+                </a:solidFill>
+                <a:latin typeface="Helvetica"/>
+              </a:rPr>
+              <a:t>Transfer v2's small-object improvements into a faster baseline RT-DETR student.</a:t>
+            </a:r>
+          </a:p>
+        </p:txBody>
+      </p:sp>
+      <p:sp>
+        <p:nvSpPr>
+          <p:cNvPr id="30" name="TextBox 29"/>
+          <p:cNvSpPr txBox="1"/>
+          <p:nvPr/>
+        </p:nvSpPr>
+        <p:spPr>
+          <a:xfrm>
+            <a:off x="8412480" y="4846320"/>
+            <a:ext cx="3291840" cy="365760"/>
+          </a:xfrm>
+          <a:prstGeom prst="rect">
+            <a:avLst/>
+          </a:prstGeom>
+          <a:noFill/>
+        </p:spPr>
+        <p:txBody>
+          <a:bodyPr wrap="square" lIns="0" rIns="0" tIns="0" bIns="0" anchor="t">
+            <a:spAutoFit/>
+          </a:bodyPr>
+          <a:lstStyle/>
+          <a:p>
+            <a:pPr algn="l"/>
+            <a:r>
+              <a:rPr sz="1100" b="1" i="0">
+                <a:solidFill>
+                  <a:srgbClr val="2CA02C"/>
+                </a:solidFill>
+                <a:latin typeface="Helvetica"/>
+              </a:rPr>
+              <a:t>Goal</a:t>
+            </a:r>
+          </a:p>
+        </p:txBody>
+      </p:sp>
+      <p:sp>
+        <p:nvSpPr>
+          <p:cNvPr id="31" name="TextBox 30"/>
+          <p:cNvSpPr txBox="1"/>
+          <p:nvPr/>
+        </p:nvSpPr>
+        <p:spPr>
+          <a:xfrm>
+            <a:off x="8412480" y="5166360"/>
+            <a:ext cx="3291840" cy="1280160"/>
+          </a:xfrm>
+          <a:prstGeom prst="rect">
+            <a:avLst/>
+          </a:prstGeom>
+          <a:noFill/>
+        </p:spPr>
+        <p:txBody>
+          <a:bodyPr wrap="square" lIns="0" rIns="0" tIns="0" bIns="0" anchor="t">
+            <a:spAutoFit/>
+          </a:bodyPr>
+          <a:lstStyle/>
+          <a:p>
+            <a:pPr algn="l"/>
+            <a:r>
+              <a:rPr sz="1100" b="0" i="0">
+                <a:solidFill>
+                  <a:srgbClr val="1A1A2E"/>
+                </a:solidFill>
+                <a:latin typeface="Helvetica"/>
+              </a:rPr>
+              <a:t>Recover baseline inference speed while retaining the small-object AP gains learned from P2 feedback.</a:t>
+            </a:r>
+          </a:p>
+        </p:txBody>
+      </p:sp>
+      <p:sp>
+        <p:nvSpPr>
+          <p:cNvPr id="32" name="TextBox 31"/>
+          <p:cNvSpPr txBox="1"/>
+          <p:nvPr/>
+        </p:nvSpPr>
+        <p:spPr>
+          <a:xfrm>
+            <a:off x="640080" y="6126480"/>
+            <a:ext cx="10972800" cy="365760"/>
+          </a:xfrm>
+          <a:prstGeom prst="rect">
+            <a:avLst/>
+          </a:prstGeom>
+          <a:noFill/>
+        </p:spPr>
+        <p:txBody>
+          <a:bodyPr wrap="square" lIns="0" rIns="0" tIns="0" bIns="0" anchor="t">
+            <a:spAutoFit/>
+          </a:bodyPr>
+          <a:lstStyle/>
+          <a:p>
+            <a:pPr algn="ctr"/>
+            <a:r>
+              <a:rPr sz="1300" b="1" i="0">
+                <a:solidFill>
+                  <a:srgbClr val="1F6FEB"/>
+                </a:solidFill>
+                <a:latin typeface="Helvetica"/>
+              </a:rPr>
+              <a:t>Common goal: keep the +0.99 small-object AP gain while approaching the 53 FPS baseline.</a:t>
+            </a:r>
+          </a:p>
+        </p:txBody>
+      </p:sp>
+      <p:sp>
+        <p:nvSpPr>
+          <p:cNvPr id="33" name="TextBox 32"/>
           <p:cNvSpPr txBox="1"/>
           <p:nvPr/>
         </p:nvSpPr>
@@ -11125,7 +10979,7 @@
       </p:sp>
       <p:sp>
         <p:nvSpPr>
-          <p:cNvPr id="17" name="TextBox 16"/>
+          <p:cNvPr id="34" name="TextBox 33"/>
           <p:cNvSpPr txBox="1"/>
           <p:nvPr/>
         </p:nvSpPr>
@@ -11153,7 +11007,7 @@
                 </a:solidFill>
                 <a:latin typeface="Helvetica"/>
               </a:rPr>
-              <a:t>25 / 27</a:t>
+              <a:t>25 / 28</a:t>
             </a:r>
           </a:p>
         </p:txBody>
@@ -11184,6 +11038,616 @@
         </p:nvSpPr>
         <p:spPr>
           <a:xfrm>
+            <a:off x="640080" y="457200"/>
+            <a:ext cx="10972800" cy="822960"/>
+          </a:xfrm>
+          <a:prstGeom prst="rect">
+            <a:avLst/>
+          </a:prstGeom>
+          <a:noFill/>
+        </p:spPr>
+        <p:txBody>
+          <a:bodyPr wrap="square" lIns="0" rIns="0" tIns="0" bIns="0" anchor="t">
+            <a:spAutoFit/>
+          </a:bodyPr>
+          <a:lstStyle/>
+          <a:p>
+            <a:pPr algn="l"/>
+            <a:r>
+              <a:rPr sz="3400" b="1" i="0">
+                <a:solidFill>
+                  <a:srgbClr val="1F6FEB"/>
+                </a:solidFill>
+                <a:latin typeface="Helvetica"/>
+              </a:rPr>
+              <a:t>Conclusion</a:t>
+            </a:r>
+          </a:p>
+        </p:txBody>
+      </p:sp>
+      <p:sp>
+        <p:nvSpPr>
+          <p:cNvPr id="3" name="Rectangle 2"/>
+          <p:cNvSpPr/>
+          <p:nvPr/>
+        </p:nvSpPr>
+        <p:spPr>
+          <a:xfrm>
+            <a:off x="640080" y="1143000"/>
+            <a:ext cx="640080" cy="54864"/>
+          </a:xfrm>
+          <a:prstGeom prst="rect">
+            <a:avLst/>
+          </a:prstGeom>
+          <a:solidFill>
+            <a:srgbClr val="1F6FEB"/>
+          </a:solidFill>
+          <a:ln>
+            <a:noFill/>
+          </a:ln>
+        </p:spPr>
+        <p:style>
+          <a:lnRef idx="1">
+            <a:schemeClr val="accent1"/>
+          </a:lnRef>
+          <a:fillRef idx="3">
+            <a:schemeClr val="accent1"/>
+          </a:fillRef>
+          <a:effectRef idx="2">
+            <a:schemeClr val="accent1"/>
+          </a:effectRef>
+          <a:fontRef idx="minor">
+            <a:schemeClr val="lt1"/>
+          </a:fontRef>
+        </p:style>
+        <p:txBody>
+          <a:bodyPr rtlCol="0" anchor="ctr"/>
+          <a:lstStyle/>
+          <a:p>
+            <a:pPr algn="ctr"/>
+          </a:p>
+        </p:txBody>
+      </p:sp>
+      <p:sp>
+        <p:nvSpPr>
+          <p:cNvPr id="4" name="Oval 3"/>
+          <p:cNvSpPr/>
+          <p:nvPr/>
+        </p:nvSpPr>
+        <p:spPr>
+          <a:xfrm>
+            <a:off x="822960" y="1965960"/>
+            <a:ext cx="502920" cy="502920"/>
+          </a:xfrm>
+          <a:prstGeom prst="ellipse">
+            <a:avLst/>
+          </a:prstGeom>
+          <a:solidFill>
+            <a:srgbClr val="1F6FEB"/>
+          </a:solidFill>
+          <a:ln>
+            <a:noFill/>
+          </a:ln>
+        </p:spPr>
+        <p:style>
+          <a:lnRef idx="1">
+            <a:schemeClr val="accent1"/>
+          </a:lnRef>
+          <a:fillRef idx="3">
+            <a:schemeClr val="accent1"/>
+          </a:fillRef>
+          <a:effectRef idx="2">
+            <a:schemeClr val="accent1"/>
+          </a:effectRef>
+          <a:fontRef idx="minor">
+            <a:schemeClr val="lt1"/>
+          </a:fontRef>
+        </p:style>
+        <p:txBody>
+          <a:bodyPr rtlCol="0" anchor="ctr"/>
+          <a:lstStyle/>
+          <a:p>
+            <a:pPr algn="ctr"/>
+          </a:p>
+        </p:txBody>
+      </p:sp>
+      <p:sp>
+        <p:nvSpPr>
+          <p:cNvPr id="5" name="TextBox 4"/>
+          <p:cNvSpPr txBox="1"/>
+          <p:nvPr/>
+        </p:nvSpPr>
+        <p:spPr>
+          <a:xfrm>
+            <a:off x="822960" y="1993392"/>
+            <a:ext cx="502920" cy="502920"/>
+          </a:xfrm>
+          <a:prstGeom prst="rect">
+            <a:avLst/>
+          </a:prstGeom>
+          <a:noFill/>
+        </p:spPr>
+        <p:txBody>
+          <a:bodyPr wrap="square" lIns="0" rIns="0" tIns="0" bIns="0" anchor="t">
+            <a:spAutoFit/>
+          </a:bodyPr>
+          <a:lstStyle/>
+          <a:p>
+            <a:pPr algn="ctr"/>
+            <a:r>
+              <a:rPr sz="2000" b="1" i="0">
+                <a:solidFill>
+                  <a:srgbClr val="FFFFFF"/>
+                </a:solidFill>
+                <a:latin typeface="Helvetica"/>
+              </a:rPr>
+              <a:t>1</a:t>
+            </a:r>
+          </a:p>
+        </p:txBody>
+      </p:sp>
+      <p:sp>
+        <p:nvSpPr>
+          <p:cNvPr id="6" name="TextBox 5"/>
+          <p:cNvSpPr txBox="1"/>
+          <p:nvPr/>
+        </p:nvSpPr>
+        <p:spPr>
+          <a:xfrm>
+            <a:off x="1554480" y="1874520"/>
+            <a:ext cx="10058400" cy="548640"/>
+          </a:xfrm>
+          <a:prstGeom prst="rect">
+            <a:avLst/>
+          </a:prstGeom>
+          <a:noFill/>
+        </p:spPr>
+        <p:txBody>
+          <a:bodyPr wrap="square" lIns="0" rIns="0" tIns="0" bIns="0" anchor="t">
+            <a:spAutoFit/>
+          </a:bodyPr>
+          <a:lstStyle/>
+          <a:p>
+            <a:pPr algn="l"/>
+            <a:r>
+              <a:rPr sz="2400" b="1" i="0">
+                <a:solidFill>
+                  <a:srgbClr val="1A1A2E"/>
+                </a:solidFill>
+                <a:latin typeface="Helvetica"/>
+              </a:rPr>
+              <a:t>Feedback improves small-object detection</a:t>
+            </a:r>
+          </a:p>
+        </p:txBody>
+      </p:sp>
+      <p:sp>
+        <p:nvSpPr>
+          <p:cNvPr id="7" name="TextBox 6"/>
+          <p:cNvSpPr txBox="1"/>
+          <p:nvPr/>
+        </p:nvSpPr>
+        <p:spPr>
+          <a:xfrm>
+            <a:off x="1554480" y="2468880"/>
+            <a:ext cx="10058400" cy="548640"/>
+          </a:xfrm>
+          <a:prstGeom prst="rect">
+            <a:avLst/>
+          </a:prstGeom>
+          <a:noFill/>
+        </p:spPr>
+        <p:txBody>
+          <a:bodyPr wrap="square" lIns="0" rIns="0" tIns="0" bIns="0" anchor="t">
+            <a:spAutoFit/>
+          </a:bodyPr>
+          <a:lstStyle/>
+          <a:p>
+            <a:pPr algn="l"/>
+            <a:r>
+              <a:rPr sz="1500" b="0" i="1">
+                <a:solidFill>
+                  <a:srgbClr val="666677"/>
+                </a:solidFill>
+                <a:latin typeface="Helvetica"/>
+              </a:rPr>
+              <a:t>+0.99 small-object AP, causal contribution at inference.</a:t>
+            </a:r>
+          </a:p>
+        </p:txBody>
+      </p:sp>
+      <p:sp>
+        <p:nvSpPr>
+          <p:cNvPr id="8" name="Oval 7"/>
+          <p:cNvSpPr/>
+          <p:nvPr/>
+        </p:nvSpPr>
+        <p:spPr>
+          <a:xfrm>
+            <a:off x="822960" y="3383280"/>
+            <a:ext cx="502920" cy="502920"/>
+          </a:xfrm>
+          <a:prstGeom prst="ellipse">
+            <a:avLst/>
+          </a:prstGeom>
+          <a:solidFill>
+            <a:srgbClr val="1F6FEB"/>
+          </a:solidFill>
+          <a:ln>
+            <a:noFill/>
+          </a:ln>
+        </p:spPr>
+        <p:style>
+          <a:lnRef idx="1">
+            <a:schemeClr val="accent1"/>
+          </a:lnRef>
+          <a:fillRef idx="3">
+            <a:schemeClr val="accent1"/>
+          </a:fillRef>
+          <a:effectRef idx="2">
+            <a:schemeClr val="accent1"/>
+          </a:effectRef>
+          <a:fontRef idx="minor">
+            <a:schemeClr val="lt1"/>
+          </a:fontRef>
+        </p:style>
+        <p:txBody>
+          <a:bodyPr rtlCol="0" anchor="ctr"/>
+          <a:lstStyle/>
+          <a:p>
+            <a:pPr algn="ctr"/>
+          </a:p>
+        </p:txBody>
+      </p:sp>
+      <p:sp>
+        <p:nvSpPr>
+          <p:cNvPr id="9" name="TextBox 8"/>
+          <p:cNvSpPr txBox="1"/>
+          <p:nvPr/>
+        </p:nvSpPr>
+        <p:spPr>
+          <a:xfrm>
+            <a:off x="822960" y="3410712"/>
+            <a:ext cx="502920" cy="502920"/>
+          </a:xfrm>
+          <a:prstGeom prst="rect">
+            <a:avLst/>
+          </a:prstGeom>
+          <a:noFill/>
+        </p:spPr>
+        <p:txBody>
+          <a:bodyPr wrap="square" lIns="0" rIns="0" tIns="0" bIns="0" anchor="t">
+            <a:spAutoFit/>
+          </a:bodyPr>
+          <a:lstStyle/>
+          <a:p>
+            <a:pPr algn="ctr"/>
+            <a:r>
+              <a:rPr sz="2000" b="1" i="0">
+                <a:solidFill>
+                  <a:srgbClr val="FFFFFF"/>
+                </a:solidFill>
+                <a:latin typeface="Helvetica"/>
+              </a:rPr>
+              <a:t>2</a:t>
+            </a:r>
+          </a:p>
+        </p:txBody>
+      </p:sp>
+      <p:sp>
+        <p:nvSpPr>
+          <p:cNvPr id="10" name="TextBox 9"/>
+          <p:cNvSpPr txBox="1"/>
+          <p:nvPr/>
+        </p:nvSpPr>
+        <p:spPr>
+          <a:xfrm>
+            <a:off x="1554480" y="3291840"/>
+            <a:ext cx="10058400" cy="548640"/>
+          </a:xfrm>
+          <a:prstGeom prst="rect">
+            <a:avLst/>
+          </a:prstGeom>
+          <a:noFill/>
+        </p:spPr>
+        <p:txBody>
+          <a:bodyPr wrap="square" lIns="0" rIns="0" tIns="0" bIns="0" anchor="t">
+            <a:spAutoFit/>
+          </a:bodyPr>
+          <a:lstStyle/>
+          <a:p>
+            <a:pPr algn="l"/>
+            <a:r>
+              <a:rPr sz="2400" b="1" i="0">
+                <a:solidFill>
+                  <a:srgbClr val="1A1A2E"/>
+                </a:solidFill>
+                <a:latin typeface="Helvetica"/>
+              </a:rPr>
+              <a:t>Only works with proper design</a:t>
+            </a:r>
+          </a:p>
+        </p:txBody>
+      </p:sp>
+      <p:sp>
+        <p:nvSpPr>
+          <p:cNvPr id="11" name="TextBox 10"/>
+          <p:cNvSpPr txBox="1"/>
+          <p:nvPr/>
+        </p:nvSpPr>
+        <p:spPr>
+          <a:xfrm>
+            <a:off x="1554480" y="3886200"/>
+            <a:ext cx="10058400" cy="548640"/>
+          </a:xfrm>
+          <a:prstGeom prst="rect">
+            <a:avLst/>
+          </a:prstGeom>
+          <a:noFill/>
+        </p:spPr>
+        <p:txBody>
+          <a:bodyPr wrap="square" lIns="0" rIns="0" tIns="0" bIns="0" anchor="t">
+            <a:spAutoFit/>
+          </a:bodyPr>
+          <a:lstStyle/>
+          <a:p>
+            <a:pPr algn="l"/>
+            <a:r>
+              <a:rPr sz="1500" b="0" i="1">
+                <a:solidFill>
+                  <a:srgbClr val="666677"/>
+                </a:solidFill>
+                <a:latin typeface="Helvetica"/>
+              </a:rPr>
+              <a:t>Floor the gate; restrict to small-object levels.</a:t>
+            </a:r>
+          </a:p>
+        </p:txBody>
+      </p:sp>
+      <p:sp>
+        <p:nvSpPr>
+          <p:cNvPr id="12" name="Oval 11"/>
+          <p:cNvSpPr/>
+          <p:nvPr/>
+        </p:nvSpPr>
+        <p:spPr>
+          <a:xfrm>
+            <a:off x="822960" y="4800600"/>
+            <a:ext cx="502920" cy="502920"/>
+          </a:xfrm>
+          <a:prstGeom prst="ellipse">
+            <a:avLst/>
+          </a:prstGeom>
+          <a:solidFill>
+            <a:srgbClr val="1F6FEB"/>
+          </a:solidFill>
+          <a:ln>
+            <a:noFill/>
+          </a:ln>
+        </p:spPr>
+        <p:style>
+          <a:lnRef idx="1">
+            <a:schemeClr val="accent1"/>
+          </a:lnRef>
+          <a:fillRef idx="3">
+            <a:schemeClr val="accent1"/>
+          </a:fillRef>
+          <a:effectRef idx="2">
+            <a:schemeClr val="accent1"/>
+          </a:effectRef>
+          <a:fontRef idx="minor">
+            <a:schemeClr val="lt1"/>
+          </a:fontRef>
+        </p:style>
+        <p:txBody>
+          <a:bodyPr rtlCol="0" anchor="ctr"/>
+          <a:lstStyle/>
+          <a:p>
+            <a:pPr algn="ctr"/>
+          </a:p>
+        </p:txBody>
+      </p:sp>
+      <p:sp>
+        <p:nvSpPr>
+          <p:cNvPr id="13" name="TextBox 12"/>
+          <p:cNvSpPr txBox="1"/>
+          <p:nvPr/>
+        </p:nvSpPr>
+        <p:spPr>
+          <a:xfrm>
+            <a:off x="822960" y="4828032"/>
+            <a:ext cx="502920" cy="502920"/>
+          </a:xfrm>
+          <a:prstGeom prst="rect">
+            <a:avLst/>
+          </a:prstGeom>
+          <a:noFill/>
+        </p:spPr>
+        <p:txBody>
+          <a:bodyPr wrap="square" lIns="0" rIns="0" tIns="0" bIns="0" anchor="t">
+            <a:spAutoFit/>
+          </a:bodyPr>
+          <a:lstStyle/>
+          <a:p>
+            <a:pPr algn="ctr"/>
+            <a:r>
+              <a:rPr sz="2000" b="1" i="0">
+                <a:solidFill>
+                  <a:srgbClr val="FFFFFF"/>
+                </a:solidFill>
+                <a:latin typeface="Helvetica"/>
+              </a:rPr>
+              <a:t>3</a:t>
+            </a:r>
+          </a:p>
+        </p:txBody>
+      </p:sp>
+      <p:sp>
+        <p:nvSpPr>
+          <p:cNvPr id="14" name="TextBox 13"/>
+          <p:cNvSpPr txBox="1"/>
+          <p:nvPr/>
+        </p:nvSpPr>
+        <p:spPr>
+          <a:xfrm>
+            <a:off x="1554480" y="4709160"/>
+            <a:ext cx="10058400" cy="548640"/>
+          </a:xfrm>
+          <a:prstGeom prst="rect">
+            <a:avLst/>
+          </a:prstGeom>
+          <a:noFill/>
+        </p:spPr>
+        <p:txBody>
+          <a:bodyPr wrap="square" lIns="0" rIns="0" tIns="0" bIns="0" anchor="t">
+            <a:spAutoFit/>
+          </a:bodyPr>
+          <a:lstStyle/>
+          <a:p>
+            <a:pPr algn="l"/>
+            <a:r>
+              <a:rPr sz="2400" b="1" i="0">
+                <a:solidFill>
+                  <a:srgbClr val="1A1A2E"/>
+                </a:solidFill>
+                <a:latin typeface="Helvetica"/>
+              </a:rPr>
+              <a:t>Modest but real</a:t>
+            </a:r>
+          </a:p>
+        </p:txBody>
+      </p:sp>
+      <p:sp>
+        <p:nvSpPr>
+          <p:cNvPr id="15" name="TextBox 14"/>
+          <p:cNvSpPr txBox="1"/>
+          <p:nvPr/>
+        </p:nvSpPr>
+        <p:spPr>
+          <a:xfrm>
+            <a:off x="1554480" y="5303520"/>
+            <a:ext cx="10058400" cy="548640"/>
+          </a:xfrm>
+          <a:prstGeom prst="rect">
+            <a:avLst/>
+          </a:prstGeom>
+          <a:noFill/>
+        </p:spPr>
+        <p:txBody>
+          <a:bodyPr wrap="square" lIns="0" rIns="0" tIns="0" bIns="0" anchor="t">
+            <a:spAutoFit/>
+          </a:bodyPr>
+          <a:lstStyle/>
+          <a:p>
+            <a:pPr algn="l"/>
+            <a:r>
+              <a:rPr sz="1500" b="0" i="1">
+                <a:solidFill>
+                  <a:srgbClr val="666677"/>
+                </a:solidFill>
+                <a:latin typeface="Helvetica"/>
+              </a:rPr>
+              <a:t>Consistent across metrics; reproducible from the same checkpoint.</a:t>
+            </a:r>
+          </a:p>
+        </p:txBody>
+      </p:sp>
+      <p:sp>
+        <p:nvSpPr>
+          <p:cNvPr id="16" name="TextBox 15"/>
+          <p:cNvSpPr txBox="1"/>
+          <p:nvPr/>
+        </p:nvSpPr>
+        <p:spPr>
+          <a:xfrm>
+            <a:off x="640080" y="6446520"/>
+            <a:ext cx="9144000" cy="274320"/>
+          </a:xfrm>
+          <a:prstGeom prst="rect">
+            <a:avLst/>
+          </a:prstGeom>
+          <a:noFill/>
+        </p:spPr>
+        <p:txBody>
+          <a:bodyPr wrap="square" lIns="0" rIns="0" tIns="0" bIns="0" anchor="t">
+            <a:spAutoFit/>
+          </a:bodyPr>
+          <a:lstStyle/>
+          <a:p>
+            <a:pPr algn="l"/>
+            <a:r>
+              <a:rPr sz="1000" b="0" i="0">
+                <a:solidFill>
+                  <a:srgbClr val="666677"/>
+                </a:solidFill>
+                <a:latin typeface="Helvetica"/>
+              </a:rPr>
+              <a:t>5. Final Results  •  Feedback-Augmented RT-DETR  •  Hatem Saadallah &amp; Nour Jennane</a:t>
+            </a:r>
+          </a:p>
+        </p:txBody>
+      </p:sp>
+      <p:sp>
+        <p:nvSpPr>
+          <p:cNvPr id="17" name="TextBox 16"/>
+          <p:cNvSpPr txBox="1"/>
+          <p:nvPr/>
+        </p:nvSpPr>
+        <p:spPr>
+          <a:xfrm>
+            <a:off x="10515600" y="6446520"/>
+            <a:ext cx="1097280" cy="274320"/>
+          </a:xfrm>
+          <a:prstGeom prst="rect">
+            <a:avLst/>
+          </a:prstGeom>
+          <a:noFill/>
+        </p:spPr>
+        <p:txBody>
+          <a:bodyPr wrap="square" lIns="0" rIns="0" tIns="0" bIns="0" anchor="t">
+            <a:spAutoFit/>
+          </a:bodyPr>
+          <a:lstStyle/>
+          <a:p>
+            <a:pPr algn="r"/>
+            <a:r>
+              <a:rPr sz="1000" b="0" i="0">
+                <a:solidFill>
+                  <a:srgbClr val="666677"/>
+                </a:solidFill>
+                <a:latin typeface="Helvetica"/>
+              </a:rPr>
+              <a:t>26 / 28</a:t>
+            </a:r>
+          </a:p>
+        </p:txBody>
+      </p:sp>
+    </p:spTree>
+  </p:cSld>
+  <p:clrMapOvr>
+    <a:masterClrMapping/>
+  </p:clrMapOvr>
+</p:sld>
+</file>
+
+<file path=ppt/slides/slide28.xml><?xml version="1.0" encoding="utf-8"?>
+<p:sld xmlns:a="http://schemas.openxmlformats.org/drawingml/2006/main" xmlns:p="http://schemas.openxmlformats.org/presentationml/2006/main" xmlns:r="http://schemas.openxmlformats.org/officeDocument/2006/relationships">
+  <p:cSld>
+    <p:spTree>
+      <p:nvGrpSpPr>
+        <p:cNvPr id="1" name=""/>
+        <p:cNvGrpSpPr/>
+        <p:nvPr/>
+      </p:nvGrpSpPr>
+      <p:grpSpPr/>
+      <p:sp>
+        <p:nvSpPr>
+          <p:cNvPr id="2" name="TextBox 1"/>
+          <p:cNvSpPr txBox="1"/>
+          <p:nvPr/>
+        </p:nvSpPr>
+        <p:spPr>
+          <a:xfrm>
             <a:off x="640080" y="2194560"/>
             <a:ext cx="10972800" cy="1371600"/>
           </a:xfrm>
@@ -11755,7 +12219,7 @@
                 </a:solidFill>
                 <a:latin typeface="Helvetica"/>
               </a:rPr>
-              <a:t>2 / 27</a:t>
+              <a:t>2 / 28</a:t>
             </a:r>
           </a:p>
         </p:txBody>
@@ -12015,7 +12479,7 @@
                 </a:solidFill>
                 <a:latin typeface="Helvetica"/>
               </a:rPr>
-              <a:t>3 / 27</a:t>
+              <a:t>3 / 28</a:t>
             </a:r>
           </a:p>
         </p:txBody>
@@ -12275,7 +12739,7 @@
                 </a:solidFill>
                 <a:latin typeface="Helvetica"/>
               </a:rPr>
-              <a:t>4 / 27</a:t>
+              <a:t>4 / 28</a:t>
             </a:r>
           </a:p>
         </p:txBody>
@@ -12511,7 +12975,7 @@
                 </a:solidFill>
                 <a:latin typeface="Helvetica"/>
               </a:rPr>
-              <a:t>5 / 27</a:t>
+              <a:t>5 / 28</a:t>
             </a:r>
           </a:p>
         </p:txBody>
@@ -13189,7 +13653,7 @@
                 </a:solidFill>
                 <a:latin typeface="Helvetica"/>
               </a:rPr>
-              <a:t>6 / 27</a:t>
+              <a:t>6 / 28</a:t>
             </a:r>
           </a:p>
         </p:txBody>
@@ -13425,7 +13889,7 @@
                 </a:solidFill>
                 <a:latin typeface="Helvetica"/>
               </a:rPr>
-              <a:t>7 / 27</a:t>
+              <a:t>7 / 28</a:t>
             </a:r>
           </a:p>
         </p:txBody>
@@ -13650,7 +14114,7 @@
                 </a:solidFill>
                 <a:latin typeface="Helvetica"/>
               </a:rPr>
-              <a:t>8 / 27</a:t>
+              <a:t>8 / 28</a:t>
             </a:r>
           </a:p>
         </p:txBody>
